--- a/docs/thesis/defense/答辩PPT-基于etcd的分布式Kubernetes调度器.pptx
+++ b/docs/thesis/defense/答辩PPT-基于etcd的分布式Kubernetes调度器.pptx
@@ -5788,16 +5788,205 @@
         <p:nvPr/>
       </p:nvGrpSpPr>
       <p:grpSpPr/>
-      <p:sp>
-        <p:nvSpPr>
-          <p:cNvPr id="2" name="Rectangle 1"/>
+      <p:pic>
+        <p:nvPicPr>
+          <p:cNvPr id="2" name="Picture 1" descr="fig3-1-system-arch.png"/>
+          <p:cNvPicPr>
+            <a:picLocks noChangeAspect="1"/>
+          </p:cNvPicPr>
+          <p:nvPr/>
+        </p:nvPicPr>
+        <p:blipFill>
+          <a:blip r:embed="rId2">
+            <a:alphaModFix amt="18000"/>
+          </a:blip>
+          <a:stretch>
+            <a:fillRect/>
+          </a:stretch>
+        </p:blipFill>
+        <p:spPr>
+          <a:xfrm>
+            <a:off x="5760719" y="2069208"/>
+            <a:ext cx="6126480" cy="2719583"/>
+          </a:xfrm>
+          <a:prstGeom prst="rect">
+            <a:avLst/>
+          </a:prstGeom>
+        </p:spPr>
+      </p:pic>
+      <p:sp>
+        <p:nvSpPr>
+          <p:cNvPr id="3" name="TextBox 2"/>
+          <p:cNvSpPr txBox="1"/>
+          <p:nvPr/>
+        </p:nvSpPr>
+        <p:spPr>
+          <a:xfrm>
+            <a:off x="822960" y="1417320"/>
+            <a:ext cx="4937760" cy="2194560"/>
+          </a:xfrm>
+          <a:prstGeom prst="rect">
+            <a:avLst/>
+          </a:prstGeom>
+          <a:noFill/>
+        </p:spPr>
+        <p:txBody>
+          <a:bodyPr wrap="square" anchor="t" lIns="0" rIns="0" tIns="0" bIns="0">
+            <a:spAutoFit/>
+          </a:bodyPr>
+          <a:lstStyle/>
+          <a:p>
+            <a:pPr algn="l">
+              <a:lnSpc>
+                <a:spcPct val="115000"/>
+              </a:lnSpc>
+            </a:pPr>
+            <a:r>
+              <a:rPr sz="3000" b="1">
+                <a:solidFill>
+                  <a:srgbClr val="0B2A4A"/>
+                </a:solidFill>
+                <a:latin typeface="Arial"/>
+                <a:ea typeface="微软雅黑"/>
+              </a:rPr>
+              <a:t>基于 etcd 的分布式 Kubernetes 调度器研究与实现</a:t>
+            </a:r>
+          </a:p>
+        </p:txBody>
+      </p:sp>
+      <p:sp>
+        <p:nvSpPr>
+          <p:cNvPr id="4" name="TextBox 3"/>
+          <p:cNvSpPr txBox="1"/>
+          <p:nvPr/>
+        </p:nvSpPr>
+        <p:spPr>
+          <a:xfrm>
+            <a:off x="822960" y="3794760"/>
+            <a:ext cx="4937760" cy="457200"/>
+          </a:xfrm>
+          <a:prstGeom prst="rect">
+            <a:avLst/>
+          </a:prstGeom>
+          <a:noFill/>
+        </p:spPr>
+        <p:txBody>
+          <a:bodyPr wrap="square" anchor="t" lIns="0" rIns="0" tIns="0" bIns="0">
+            <a:spAutoFit/>
+          </a:bodyPr>
+          <a:lstStyle/>
+          <a:p>
+            <a:pPr algn="l"/>
+            <a:r>
+              <a:rPr sz="1700" b="0">
+                <a:solidFill>
+                  <a:srgbClr val="1F5C99"/>
+                </a:solidFill>
+                <a:latin typeface="Arial"/>
+                <a:ea typeface="微软雅黑"/>
+              </a:rPr>
+              <a:t>硕士学位论文答辩</a:t>
+            </a:r>
+          </a:p>
+        </p:txBody>
+      </p:sp>
+      <p:sp>
+        <p:nvSpPr>
+          <p:cNvPr id="5" name="TextBox 4"/>
+          <p:cNvSpPr txBox="1"/>
+          <p:nvPr/>
+        </p:nvSpPr>
+        <p:spPr>
+          <a:xfrm>
+            <a:off x="822960" y="4526280"/>
+            <a:ext cx="4937760" cy="1463040"/>
+          </a:xfrm>
+          <a:prstGeom prst="rect">
+            <a:avLst/>
+          </a:prstGeom>
+          <a:noFill/>
+        </p:spPr>
+        <p:txBody>
+          <a:bodyPr wrap="square" anchor="t" lIns="0" rIns="0" tIns="0" bIns="0">
+            <a:spAutoFit/>
+          </a:bodyPr>
+          <a:lstStyle/>
+          <a:p>
+            <a:pPr algn="l"/>
+            <a:r>
+              <a:rPr sz="1250" b="0">
+                <a:solidFill>
+                  <a:srgbClr val="6B7A8F"/>
+                </a:solidFill>
+                <a:latin typeface="Arial"/>
+                <a:ea typeface="微软雅黑"/>
+              </a:rPr>
+              <a:t>答辩人：[姓名]</a:t>
+            </a:r>
+          </a:p>
+          <a:p>
+            <a:pPr algn="l">
+              <a:spcBef>
+                <a:spcPts val="500"/>
+              </a:spcBef>
+            </a:pPr>
+            <a:r>
+              <a:rPr sz="1250" b="0">
+                <a:solidFill>
+                  <a:srgbClr val="6B7A8F"/>
+                </a:solidFill>
+                <a:latin typeface="Arial"/>
+                <a:ea typeface="微软雅黑"/>
+              </a:rPr>
+              <a:t>指导教师：[导师]</a:t>
+            </a:r>
+          </a:p>
+          <a:p>
+            <a:pPr algn="l">
+              <a:spcBef>
+                <a:spcPts val="500"/>
+              </a:spcBef>
+            </a:pPr>
+            <a:r>
+              <a:rPr sz="1250" b="0">
+                <a:solidFill>
+                  <a:srgbClr val="6B7A8F"/>
+                </a:solidFill>
+                <a:latin typeface="Arial"/>
+                <a:ea typeface="微软雅黑"/>
+              </a:rPr>
+              <a:t>学院：[学院]</a:t>
+            </a:r>
+          </a:p>
+          <a:p>
+            <a:pPr algn="l">
+              <a:spcBef>
+                <a:spcPts val="500"/>
+              </a:spcBef>
+            </a:pPr>
+            <a:r>
+              <a:rPr sz="1250" b="0">
+                <a:solidFill>
+                  <a:srgbClr val="6B7A8F"/>
+                </a:solidFill>
+                <a:latin typeface="Arial"/>
+                <a:ea typeface="微软雅黑"/>
+              </a:rPr>
+              <a:t>日期：[日期]</a:t>
+            </a:r>
+          </a:p>
+        </p:txBody>
+      </p:sp>
+      <p:sp>
+        <p:nvSpPr>
+          <p:cNvPr id="6" name="Rectangle 5"/>
           <p:cNvSpPr/>
           <p:nvPr/>
         </p:nvSpPr>
         <p:spPr>
           <a:xfrm>
-            <a:off x="0" y="0"/>
-            <a:ext cx="12191695" cy="6858000"/>
+            <a:off x="36576" y="6748272"/>
+            <a:ext cx="12198096" cy="45720"/>
           </a:xfrm>
           <a:prstGeom prst="rect">
             <a:avLst/>
@@ -5832,42 +6021,16 @@
           </a:p>
         </p:txBody>
       </p:sp>
-      <p:pic>
-        <p:nvPicPr>
-          <p:cNvPr id="3" name="Picture 2" descr="fig3-1-system-arch.png"/>
-          <p:cNvPicPr>
-            <a:picLocks noChangeAspect="1"/>
-          </p:cNvPicPr>
-          <p:nvPr/>
-        </p:nvPicPr>
-        <p:blipFill>
-          <a:blip r:embed="rId2">
-            <a:alphaModFix amt="20000"/>
-          </a:blip>
-          <a:stretch>
-            <a:fillRect/>
-          </a:stretch>
-        </p:blipFill>
-        <p:spPr>
-          <a:xfrm>
-            <a:off x="5760719" y="2069208"/>
-            <a:ext cx="6126480" cy="2719583"/>
-          </a:xfrm>
-          <a:prstGeom prst="rect">
-            <a:avLst/>
-          </a:prstGeom>
-        </p:spPr>
-      </p:pic>
-      <p:sp>
-        <p:nvSpPr>
-          <p:cNvPr id="4" name="TextBox 3"/>
+      <p:sp>
+        <p:nvSpPr>
+          <p:cNvPr id="7" name="TextBox 6"/>
           <p:cNvSpPr txBox="1"/>
           <p:nvPr/>
         </p:nvSpPr>
         <p:spPr>
           <a:xfrm>
-            <a:off x="822960" y="1417320"/>
-            <a:ext cx="4937760" cy="2194560"/>
+            <a:off x="10780776" y="6345936"/>
+            <a:ext cx="850392" cy="219456"/>
           </a:xfrm>
           <a:prstGeom prst="rect">
             <a:avLst/>
@@ -5880,177 +6043,14 @@
           </a:bodyPr>
           <a:lstStyle/>
           <a:p>
-            <a:pPr algn="l">
-              <a:lnSpc>
-                <a:spcPct val="115000"/>
-              </a:lnSpc>
-            </a:pPr>
-            <a:r>
-              <a:rPr sz="3000" b="1">
-                <a:solidFill>
-                  <a:srgbClr val="FFFFFF"/>
+            <a:pPr algn="r"/>
+            <a:r>
+              <a:rPr sz="950" b="0">
+                <a:solidFill>
+                  <a:srgbClr val="6B7A8F"/>
                 </a:solidFill>
                 <a:latin typeface="Arial"/>
-                <a:ea typeface="Microsoft YaHei"/>
-              </a:rPr>
-              <a:t>基于 etcd 的分布式 Kubernetes 调度器研究与实现</a:t>
-            </a:r>
-          </a:p>
-        </p:txBody>
-      </p:sp>
-      <p:sp>
-        <p:nvSpPr>
-          <p:cNvPr id="5" name="TextBox 4"/>
-          <p:cNvSpPr txBox="1"/>
-          <p:nvPr/>
-        </p:nvSpPr>
-        <p:spPr>
-          <a:xfrm>
-            <a:off x="822960" y="3794760"/>
-            <a:ext cx="4937760" cy="457200"/>
-          </a:xfrm>
-          <a:prstGeom prst="rect">
-            <a:avLst/>
-          </a:prstGeom>
-          <a:noFill/>
-        </p:spPr>
-        <p:txBody>
-          <a:bodyPr wrap="square" anchor="t" lIns="0" rIns="0" tIns="0" bIns="0">
-            <a:spAutoFit/>
-          </a:bodyPr>
-          <a:lstStyle/>
-          <a:p>
-            <a:pPr algn="l"/>
-            <a:r>
-              <a:rPr sz="1700" b="0">
-                <a:solidFill>
-                  <a:srgbClr val="E8833A"/>
-                </a:solidFill>
-                <a:latin typeface="Arial"/>
-                <a:ea typeface="Microsoft YaHei"/>
-              </a:rPr>
-              <a:t>硕士学位论文答辩</a:t>
-            </a:r>
-          </a:p>
-        </p:txBody>
-      </p:sp>
-      <p:sp>
-        <p:nvSpPr>
-          <p:cNvPr id="6" name="TextBox 5"/>
-          <p:cNvSpPr txBox="1"/>
-          <p:nvPr/>
-        </p:nvSpPr>
-        <p:spPr>
-          <a:xfrm>
-            <a:off x="822960" y="4526280"/>
-            <a:ext cx="4937760" cy="1463040"/>
-          </a:xfrm>
-          <a:prstGeom prst="rect">
-            <a:avLst/>
-          </a:prstGeom>
-          <a:noFill/>
-        </p:spPr>
-        <p:txBody>
-          <a:bodyPr wrap="square" anchor="t" lIns="0" rIns="0" tIns="0" bIns="0">
-            <a:spAutoFit/>
-          </a:bodyPr>
-          <a:lstStyle/>
-          <a:p>
-            <a:pPr algn="l"/>
-            <a:r>
-              <a:rPr sz="1250" b="0">
-                <a:solidFill>
-                  <a:srgbClr val="C9D4E2"/>
-                </a:solidFill>
-                <a:latin typeface="Arial"/>
-                <a:ea typeface="Microsoft YaHei"/>
-              </a:rPr>
-              <a:t>答辩人：[姓名]</a:t>
-            </a:r>
-          </a:p>
-          <a:p>
-            <a:pPr algn="l">
-              <a:spcBef>
-                <a:spcPts val="500"/>
-              </a:spcBef>
-            </a:pPr>
-            <a:r>
-              <a:rPr sz="1250" b="0">
-                <a:solidFill>
-                  <a:srgbClr val="C9D4E2"/>
-                </a:solidFill>
-                <a:latin typeface="Arial"/>
-                <a:ea typeface="Microsoft YaHei"/>
-              </a:rPr>
-              <a:t>指导教师：[导师]</a:t>
-            </a:r>
-          </a:p>
-          <a:p>
-            <a:pPr algn="l">
-              <a:spcBef>
-                <a:spcPts val="500"/>
-              </a:spcBef>
-            </a:pPr>
-            <a:r>
-              <a:rPr sz="1250" b="0">
-                <a:solidFill>
-                  <a:srgbClr val="C9D4E2"/>
-                </a:solidFill>
-                <a:latin typeface="Arial"/>
-                <a:ea typeface="Microsoft YaHei"/>
-              </a:rPr>
-              <a:t>学院：[学院]</a:t>
-            </a:r>
-          </a:p>
-          <a:p>
-            <a:pPr algn="l">
-              <a:spcBef>
-                <a:spcPts val="500"/>
-              </a:spcBef>
-            </a:pPr>
-            <a:r>
-              <a:rPr sz="1250" b="0">
-                <a:solidFill>
-                  <a:srgbClr val="C9D4E2"/>
-                </a:solidFill>
-                <a:latin typeface="Arial"/>
-                <a:ea typeface="Microsoft YaHei"/>
-              </a:rPr>
-              <a:t>日期：[日期]</a:t>
-            </a:r>
-          </a:p>
-        </p:txBody>
-      </p:sp>
-      <p:sp>
-        <p:nvSpPr>
-          <p:cNvPr id="7" name="TextBox 6"/>
-          <p:cNvSpPr txBox="1"/>
-          <p:nvPr/>
-        </p:nvSpPr>
-        <p:spPr>
-          <a:xfrm>
-            <a:off x="10780776" y="6345936"/>
-            <a:ext cx="850392" cy="219456"/>
-          </a:xfrm>
-          <a:prstGeom prst="rect">
-            <a:avLst/>
-          </a:prstGeom>
-          <a:noFill/>
-        </p:spPr>
-        <p:txBody>
-          <a:bodyPr wrap="square" anchor="t" lIns="0" rIns="0" tIns="0" bIns="0">
-            <a:spAutoFit/>
-          </a:bodyPr>
-          <a:lstStyle/>
-          <a:p>
-            <a:pPr algn="r"/>
-            <a:r>
-              <a:rPr sz="950" b="0">
-                <a:solidFill>
-                  <a:srgbClr val="8FA3B8"/>
-                </a:solidFill>
-                <a:latin typeface="Arial"/>
-                <a:ea typeface="Microsoft YaHei"/>
+                <a:ea typeface="微软雅黑"/>
               </a:rPr>
               <a:t>1 / 26</a:t>
             </a:r>
@@ -6160,7 +6160,7 @@
                   <a:srgbClr val="0B2A4A"/>
                 </a:solidFill>
                 <a:latin typeface="Arial"/>
-                <a:ea typeface="Microsoft YaHei"/>
+                <a:ea typeface="微软雅黑"/>
               </a:rPr>
               <a:t>CacheAdapter</a:t>
             </a:r>
@@ -6240,7 +6240,7 @@
                   <a:srgbClr val="1F5C99"/>
                 </a:solidFill>
                 <a:latin typeface="Arial"/>
-                <a:ea typeface="Microsoft YaHei"/>
+                <a:ea typeface="微软雅黑"/>
               </a:rPr>
               <a:t>状态以对象引用共享，不再复制，也没有跨进程同步延迟</a:t>
             </a:r>
@@ -6304,7 +6304,7 @@
                   <a:srgbClr val="333333"/>
                 </a:solidFill>
                 <a:latin typeface="Arial"/>
-                <a:ea typeface="Microsoft YaHei"/>
+                <a:ea typeface="微软雅黑"/>
               </a:rPr>
               <a:t>▪  对象引用而非序列化拷贝</a:t>
             </a:r>
@@ -6324,7 +6324,7 @@
                   <a:srgbClr val="333333"/>
                 </a:solidFill>
                 <a:latin typeface="Arial"/>
-                <a:ea typeface="Microsoft YaHei"/>
+                <a:ea typeface="微软雅黑"/>
               </a:rPr>
               <a:t>▪  进程内 Binder 与 Scheduler 同视图</a:t>
             </a:r>
@@ -6344,7 +6344,7 @@
                   <a:srgbClr val="333333"/>
                 </a:solidFill>
                 <a:latin typeface="Arial"/>
-                <a:ea typeface="Microsoft YaHei"/>
+                <a:ea typeface="微软雅黑"/>
               </a:rPr>
               <a:t>▪  为一致性校验提供同一份真相</a:t>
             </a:r>
@@ -6380,7 +6380,7 @@
                   <a:srgbClr val="6B7A8F"/>
                 </a:solidFill>
                 <a:latin typeface="Arial"/>
-                <a:ea typeface="Microsoft YaHei"/>
+                <a:ea typeface="微软雅黑"/>
               </a:rPr>
               <a:t>10 / 26</a:t>
             </a:r>
@@ -6490,7 +6490,7 @@
                   <a:srgbClr val="0B2A4A"/>
                 </a:solidFill>
                 <a:latin typeface="Arial"/>
-                <a:ea typeface="Microsoft YaHei"/>
+                <a:ea typeface="微软雅黑"/>
               </a:rPr>
               <a:t>创新点 2</a:t>
             </a:r>
@@ -6570,7 +6570,7 @@
                   <a:srgbClr val="1F5C99"/>
                 </a:solidFill>
                 <a:latin typeface="Arial"/>
-                <a:ea typeface="Microsoft YaHei"/>
+                <a:ea typeface="微软雅黑"/>
               </a:rPr>
               <a:t>每一层对应一类威胁，并分别依赖一种 etcd 原子语义</a:t>
             </a:r>
@@ -6696,7 +6696,7 @@
                   <a:srgbClr val="0B2A4A"/>
                 </a:solidFill>
                 <a:latin typeface="Arial"/>
-                <a:ea typeface="Microsoft YaHei"/>
+                <a:ea typeface="微软雅黑"/>
               </a:rPr>
               <a:t>① Layer 0 · 预防</a:t>
             </a:r>
@@ -6732,7 +6732,7 @@
                   <a:srgbClr val="333333"/>
                 </a:solidFill>
                 <a:latin typeface="Arial"/>
-                <a:ea typeface="Microsoft YaHei"/>
+                <a:ea typeface="微软雅黑"/>
               </a:rPr>
               <a:t>威胁：分区归属漂移</a:t>
             </a:r>
@@ -6768,7 +6768,7 @@
                   <a:srgbClr val="6B7A8F"/>
                 </a:solidFill>
                 <a:latin typeface="Arial"/>
-                <a:ea typeface="Microsoft YaHei"/>
+                <a:ea typeface="微软雅黑"/>
               </a:rPr>
               <a:t>etcd：resourceVersion 乐观并发</a:t>
             </a:r>
@@ -6894,7 +6894,7 @@
                   <a:srgbClr val="0B2A4A"/>
                 </a:solidFill>
                 <a:latin typeface="Arial"/>
-                <a:ea typeface="Microsoft YaHei"/>
+                <a:ea typeface="微软雅黑"/>
               </a:rPr>
               <a:t>② Layer 1 · 即时恢复</a:t>
             </a:r>
@@ -6930,7 +6930,7 @@
                   <a:srgbClr val="333333"/>
                 </a:solidFill>
                 <a:latin typeface="Arial"/>
-                <a:ea typeface="Microsoft YaHei"/>
+                <a:ea typeface="微软雅黑"/>
               </a:rPr>
               <a:t>威胁：apiserver 暂态错误</a:t>
             </a:r>
@@ -6966,7 +6966,7 @@
                   <a:srgbClr val="6B7A8F"/>
                 </a:solidFill>
                 <a:latin typeface="Arial"/>
-                <a:ea typeface="Microsoft YaHei"/>
+                <a:ea typeface="微软雅黑"/>
               </a:rPr>
               <a:t>etcd：Bind 原子写 / 409 冲突</a:t>
             </a:r>
@@ -7092,7 +7092,7 @@
                   <a:srgbClr val="0B2A4A"/>
                 </a:solidFill>
                 <a:latin typeface="Arial"/>
-                <a:ea typeface="Microsoft YaHei"/>
+                <a:ea typeface="微软雅黑"/>
               </a:rPr>
               <a:t>③ Layer 2 · 后台回收</a:t>
             </a:r>
@@ -7128,7 +7128,7 @@
                   <a:srgbClr val="333333"/>
                 </a:solidFill>
                 <a:latin typeface="Arial"/>
-                <a:ea typeface="Microsoft YaHei"/>
+                <a:ea typeface="微软雅黑"/>
               </a:rPr>
               <a:t>威胁：孤儿 Assumed 状态</a:t>
             </a:r>
@@ -7164,7 +7164,7 @@
                   <a:srgbClr val="6B7A8F"/>
                 </a:solidFill>
                 <a:latin typeface="Arial"/>
-                <a:ea typeface="Microsoft YaHei"/>
+                <a:ea typeface="微软雅黑"/>
               </a:rPr>
               <a:t>etcd：Watch 一致性视图</a:t>
             </a:r>
@@ -7290,7 +7290,7 @@
                   <a:srgbClr val="0B2A4A"/>
                 </a:solidFill>
                 <a:latin typeface="Arial"/>
-                <a:ea typeface="Microsoft YaHei"/>
+                <a:ea typeface="微软雅黑"/>
               </a:rPr>
               <a:t>④ Layer 3 · 全局回退</a:t>
             </a:r>
@@ -7326,7 +7326,7 @@
                   <a:srgbClr val="333333"/>
                 </a:solidFill>
                 <a:latin typeface="Arial"/>
-                <a:ea typeface="Microsoft YaHei"/>
+                <a:ea typeface="微软雅黑"/>
               </a:rPr>
               <a:t>威胁：实例失活、重试耗尽</a:t>
             </a:r>
@@ -7362,7 +7362,7 @@
                   <a:srgbClr val="6B7A8F"/>
                 </a:solidFill>
                 <a:latin typeface="Arial"/>
-                <a:ea typeface="Microsoft YaHei"/>
+                <a:ea typeface="微软雅黑"/>
               </a:rPr>
               <a:t>etcd：注解清理 + 全局重分发</a:t>
             </a:r>
@@ -7398,7 +7398,7 @@
                   <a:srgbClr val="6B7A8F"/>
                 </a:solidFill>
                 <a:latin typeface="Arial"/>
-                <a:ea typeface="Microsoft YaHei"/>
+                <a:ea typeface="微软雅黑"/>
               </a:rPr>
               <a:t>11 / 26</a:t>
             </a:r>
@@ -7508,7 +7508,7 @@
                   <a:srgbClr val="0B2A4A"/>
                 </a:solidFill>
                 <a:latin typeface="Arial"/>
-                <a:ea typeface="Microsoft YaHei"/>
+                <a:ea typeface="微软雅黑"/>
               </a:rPr>
               <a:t>正确性根基</a:t>
             </a:r>
@@ -7588,7 +7588,7 @@
                   <a:srgbClr val="1F5C99"/>
                 </a:solidFill>
                 <a:latin typeface="Arial"/>
-                <a:ea typeface="Microsoft YaHei"/>
+                <a:ea typeface="微软雅黑"/>
               </a:rPr>
               <a:t>所有机制最终归约到“任一 Pod 至多绑定到一个节点”</a:t>
             </a:r>
@@ -7628,7 +7628,7 @@
                   <a:srgbClr val="333333"/>
                 </a:solidFill>
                 <a:latin typeface="Arial"/>
-                <a:ea typeface="Microsoft YaHei"/>
+                <a:ea typeface="微软雅黑"/>
               </a:rPr>
               <a:t>▪  Bind 原子写是最后防线</a:t>
             </a:r>
@@ -7648,7 +7648,7 @@
                   <a:srgbClr val="333333"/>
                 </a:solidFill>
                 <a:latin typeface="Arial"/>
-                <a:ea typeface="Microsoft YaHei"/>
+                <a:ea typeface="微软雅黑"/>
               </a:rPr>
               <a:t>▪  resourceVersion 防并发覆盖</a:t>
             </a:r>
@@ -7668,7 +7668,7 @@
                   <a:srgbClr val="333333"/>
                 </a:solidFill>
                 <a:latin typeface="Arial"/>
-                <a:ea typeface="Microsoft YaHei"/>
+                <a:ea typeface="微软雅黑"/>
               </a:rPr>
               <a:t>▪  四层机制均不破坏 I</a:t>
             </a:r>
@@ -7728,7 +7728,7 @@
                   <a:srgbClr val="6B7A8F"/>
                 </a:solidFill>
                 <a:latin typeface="Arial"/>
-                <a:ea typeface="Microsoft YaHei"/>
+                <a:ea typeface="微软雅黑"/>
               </a:rPr>
               <a:t>12 / 26</a:t>
             </a:r>
@@ -7838,7 +7838,7 @@
                   <a:srgbClr val="0B2A4A"/>
                 </a:solidFill>
                 <a:latin typeface="Arial"/>
-                <a:ea typeface="Microsoft YaHei"/>
+                <a:ea typeface="微软雅黑"/>
               </a:rPr>
               <a:t>实验设计</a:t>
             </a:r>
@@ -7918,7 +7918,7 @@
                   <a:srgbClr val="1F5C99"/>
                 </a:solidFill>
                 <a:latin typeface="Arial"/>
-                <a:ea typeface="Microsoft YaHei"/>
+                <a:ea typeface="微软雅黑"/>
               </a:rPr>
               <a:t>16 个对比场景，每场景 3 次重复，共 144 次 run，n=3 取中位数</a:t>
             </a:r>
@@ -7960,7 +7960,7 @@
                             <a:srgbClr val="FFFFFF"/>
                           </a:solidFill>
                           <a:latin typeface="Arial"/>
-                          <a:ea typeface="Microsoft YaHei"/>
+                          <a:ea typeface="微软雅黑"/>
                         </a:rPr>
                         <a:t>维度</a:t>
                       </a:r>
@@ -7984,7 +7984,7 @@
                             <a:srgbClr val="FFFFFF"/>
                           </a:solidFill>
                           <a:latin typeface="Arial"/>
-                          <a:ea typeface="Microsoft YaHei"/>
+                          <a:ea typeface="微软雅黑"/>
                         </a:rPr>
                         <a:t>取值</a:t>
                       </a:r>
@@ -8010,7 +8010,7 @@
                             <a:srgbClr val="333333"/>
                           </a:solidFill>
                           <a:latin typeface="Arial"/>
-                          <a:ea typeface="Microsoft YaHei"/>
+                          <a:ea typeface="微软雅黑"/>
                         </a:rPr>
                         <a:t>规模 s1–s4</a:t>
                       </a:r>
@@ -8034,7 +8034,7 @@
                             <a:srgbClr val="333333"/>
                           </a:solidFill>
                           <a:latin typeface="Arial"/>
-                          <a:ea typeface="Microsoft YaHei"/>
+                          <a:ea typeface="微软雅黑"/>
                         </a:rPr>
                         <a:t>100 / 1000 / 5000 / 10000 节点</a:t>
                       </a:r>
@@ -8060,7 +8060,7 @@
                             <a:srgbClr val="333333"/>
                           </a:solidFill>
                           <a:latin typeface="Arial"/>
-                          <a:ea typeface="Microsoft YaHei"/>
+                          <a:ea typeface="微软雅黑"/>
                         </a:rPr>
                         <a:t>负载 w1–w7</a:t>
                       </a:r>
@@ -8084,7 +8084,7 @@
                             <a:srgbClr val="333333"/>
                           </a:solidFill>
                           <a:latin typeface="Arial"/>
-                          <a:ea typeface="Microsoft YaHei"/>
+                          <a:ea typeface="微软雅黑"/>
                         </a:rPr>
                         <a:t>w1 100 → w4 2000 pods/s（极限）；w5 突发、w6 Gang、w7 异构</a:t>
                       </a:r>
@@ -8110,7 +8110,7 @@
                             <a:srgbClr val="333333"/>
                           </a:solidFill>
                           <a:latin typeface="Arial"/>
-                          <a:ea typeface="Microsoft YaHei"/>
+                          <a:ea typeface="微软雅黑"/>
                         </a:rPr>
                         <a:t>实例 inst</a:t>
                       </a:r>
@@ -8134,7 +8134,7 @@
                             <a:srgbClr val="333333"/>
                           </a:solidFill>
                           <a:latin typeface="Arial"/>
-                          <a:ea typeface="Microsoft YaHei"/>
+                          <a:ea typeface="微软雅黑"/>
                         </a:rPr>
                         <a:t>inst1 = 1 个实例；inst3 = 3 个实例</a:t>
                       </a:r>
@@ -8160,7 +8160,7 @@
                             <a:srgbClr val="333333"/>
                           </a:solidFill>
                           <a:latin typeface="Arial"/>
-                          <a:ea typeface="Microsoft YaHei"/>
+                          <a:ea typeface="微软雅黑"/>
                         </a:rPr>
                         <a:t>对比组</a:t>
                       </a:r>
@@ -8184,7 +8184,7 @@
                             <a:srgbClr val="333333"/>
                           </a:solidFill>
                           <a:latin typeface="Arial"/>
-                          <a:ea typeface="Microsoft YaHei"/>
+                          <a:ea typeface="微软雅黑"/>
                         </a:rPr>
                         <a:t>a=ENO  b=Gödel  c=kube-scheduler  d=Volcano  e=Koordinator</a:t>
                       </a:r>
@@ -8210,7 +8210,7 @@
                             <a:srgbClr val="333333"/>
                           </a:solidFill>
                           <a:latin typeface="Arial"/>
-                          <a:ea typeface="Microsoft YaHei"/>
+                          <a:ea typeface="微软雅黑"/>
                         </a:rPr>
                         <a:t>公平性</a:t>
                       </a:r>
@@ -8234,7 +8234,7 @@
                             <a:srgbClr val="333333"/>
                           </a:solidFill>
                           <a:latin typeface="Arial"/>
-                          <a:ea typeface="Microsoft YaHei"/>
+                          <a:ea typeface="微软雅黑"/>
                         </a:rPr>
                         <a:t>每 Pod 2C/4G；客户端 QPS=Burst=10000</a:t>
                       </a:r>
@@ -8284,7 +8284,7 @@
                   <a:srgbClr val="333333"/>
                 </a:solidFill>
                 <a:latin typeface="Arial"/>
-                <a:ea typeface="Microsoft YaHei"/>
+                <a:ea typeface="微软雅黑"/>
               </a:rPr>
               <a:t>▪  KWOK 仿真，kind 内 K8s v1.34.8</a:t>
             </a:r>
@@ -8304,7 +8304,7 @@
                   <a:srgbClr val="333333"/>
                 </a:solidFill>
                 <a:latin typeface="Arial"/>
-                <a:ea typeface="Microsoft YaHei"/>
+                <a:ea typeface="微软雅黑"/>
               </a:rPr>
               <a:t>▪  Prometheus 15 s 抓取 + recording rules</a:t>
             </a:r>
@@ -8324,7 +8324,7 @@
                   <a:srgbClr val="333333"/>
                 </a:solidFill>
                 <a:latin typeface="Arial"/>
-                <a:ea typeface="Microsoft YaHei"/>
+                <a:ea typeface="微软雅黑"/>
               </a:rPr>
               <a:t>▪  warmup/cooldown 各剔除 30 s</a:t>
             </a:r>
@@ -8360,7 +8360,7 @@
                   <a:srgbClr val="6B7A8F"/>
                 </a:solidFill>
                 <a:latin typeface="Arial"/>
-                <a:ea typeface="Microsoft YaHei"/>
+                <a:ea typeface="微软雅黑"/>
               </a:rPr>
               <a:t>13 / 26</a:t>
             </a:r>
@@ -8470,7 +8470,7 @@
                   <a:srgbClr val="0B2A4A"/>
                 </a:solidFill>
                 <a:latin typeface="Arial"/>
-                <a:ea typeface="Microsoft YaHei"/>
+                <a:ea typeface="微软雅黑"/>
               </a:rPr>
               <a:t>评估指标</a:t>
             </a:r>
@@ -8550,7 +8550,7 @@
                   <a:srgbClr val="1F5C99"/>
                 </a:solidFill>
                 <a:latin typeface="Arial"/>
-                <a:ea typeface="Microsoft YaHei"/>
+                <a:ea typeface="微软雅黑"/>
               </a:rPr>
               <a:t>吞吐时序会“归零”，只有“总工作量 ÷ 总完成时间”跨场景可比</a:t>
             </a:r>
@@ -8610,7 +8610,7 @@
                   <a:srgbClr val="6B7A8F"/>
                 </a:solidFill>
                 <a:latin typeface="Arial"/>
-                <a:ea typeface="Microsoft YaHei"/>
+                <a:ea typeface="微软雅黑"/>
               </a:rPr>
               <a:t>s2/w3 吞吐时序：爬升—平台—归零</a:t>
             </a:r>
@@ -8650,7 +8650,7 @@
                   <a:srgbClr val="333333"/>
                 </a:solidFill>
                 <a:latin typeface="Arial"/>
-                <a:ea typeface="Microsoft YaHei"/>
+                <a:ea typeface="微软雅黑"/>
               </a:rPr>
               <a:t>▪  三段结构：爬升—平台—归零，均值被尾段零值稀释</a:t>
             </a:r>
@@ -8670,7 +8670,7 @@
                   <a:srgbClr val="333333"/>
                 </a:solidFill>
                 <a:latin typeface="Arial"/>
-                <a:ea typeface="Microsoft YaHei"/>
+                <a:ea typeface="微软雅黑"/>
               </a:rPr>
               <a:t>▪  时序类：3 run 逐点中位数，再去首尾各 2 点（约 30 s）</a:t>
             </a:r>
@@ -8690,7 +8690,7 @@
                   <a:srgbClr val="333333"/>
                 </a:solidFill>
                 <a:latin typeface="Arial"/>
-                <a:ea typeface="Microsoft YaHei"/>
+                <a:ea typeface="微软雅黑"/>
               </a:rPr>
               <a:t>▪  c/d/e 单实例过载存在幸存者偏差，只与 a/b 比吞吐、队列、成功率</a:t>
             </a:r>
@@ -8772,7 +8772,7 @@
                   <a:srgbClr val="0B2A4A"/>
                 </a:solidFill>
                 <a:latin typeface="Arial"/>
-                <a:ea typeface="Microsoft YaHei"/>
+                <a:ea typeface="微软雅黑"/>
               </a:rPr>
               <a:t>有效吞吐 pods/s</a:t>
             </a:r>
@@ -8792,7 +8792,7 @@
                   <a:srgbClr val="6B7A8F"/>
                 </a:solidFill>
                 <a:latin typeface="Arial"/>
-                <a:ea typeface="Microsoft YaHei"/>
+                <a:ea typeface="微软雅黑"/>
               </a:rPr>
               <a:t>名义工作量 ÷ 完成时间（主口径）</a:t>
             </a:r>
@@ -8874,7 +8874,7 @@
                   <a:srgbClr val="0B2A4A"/>
                 </a:solidFill>
                 <a:latin typeface="Arial"/>
-                <a:ea typeface="Microsoft YaHei"/>
+                <a:ea typeface="微软雅黑"/>
               </a:rPr>
               <a:t>峰值吞吐 pods/s</a:t>
             </a:r>
@@ -8894,7 +8894,7 @@
                   <a:srgbClr val="6B7A8F"/>
                 </a:solidFill>
                 <a:latin typeface="Arial"/>
-                <a:ea typeface="Microsoft YaHei"/>
+                <a:ea typeface="微软雅黑"/>
               </a:rPr>
               <a:t>过程中的最高瞬时调度速率</a:t>
             </a:r>
@@ -8976,7 +8976,7 @@
                   <a:srgbClr val="0B2A4A"/>
                 </a:solidFill>
                 <a:latin typeface="Arial"/>
-                <a:ea typeface="Microsoft YaHei"/>
+                <a:ea typeface="微软雅黑"/>
               </a:rPr>
               <a:t>P90 / P99 延迟 s</a:t>
             </a:r>
@@ -8996,7 +8996,7 @@
                   <a:srgbClr val="6B7A8F"/>
                 </a:solidFill>
                 <a:latin typeface="Arial"/>
-                <a:ea typeface="Microsoft YaHei"/>
+                <a:ea typeface="微软雅黑"/>
               </a:rPr>
               <a:t>入 activeQ 到 Bind 完成</a:t>
             </a:r>
@@ -9078,7 +9078,7 @@
                   <a:srgbClr val="0B2A4A"/>
                 </a:solidFill>
                 <a:latin typeface="Arial"/>
-                <a:ea typeface="Microsoft YaHei"/>
+                <a:ea typeface="微软雅黑"/>
               </a:rPr>
               <a:t>Pod E2E P99 s</a:t>
             </a:r>
@@ -9098,7 +9098,7 @@
                   <a:srgbClr val="6B7A8F"/>
                 </a:solidFill>
                 <a:latin typeface="Arial"/>
-                <a:ea typeface="Microsoft YaHei"/>
+                <a:ea typeface="微软雅黑"/>
               </a:rPr>
               <a:t>Dispatcher 观察到绑定完成</a:t>
             </a:r>
@@ -9180,7 +9180,7 @@
                   <a:srgbClr val="0B2A4A"/>
                 </a:solidFill>
                 <a:latin typeface="Arial"/>
-                <a:ea typeface="Microsoft YaHei"/>
+                <a:ea typeface="微软雅黑"/>
               </a:rPr>
               <a:t>绑定成功率</a:t>
             </a:r>
@@ -9200,7 +9200,7 @@
                   <a:srgbClr val="6B7A8F"/>
                 </a:solidFill>
                 <a:latin typeface="Arial"/>
-                <a:ea typeface="Microsoft YaHei"/>
+                <a:ea typeface="微软雅黑"/>
               </a:rPr>
               <a:t>Bind 成功 / Bind 尝试</a:t>
             </a:r>
@@ -9282,7 +9282,7 @@
                   <a:srgbClr val="0B2A4A"/>
                 </a:solidFill>
                 <a:latin typeface="Arial"/>
-                <a:ea typeface="Microsoft YaHei"/>
+                <a:ea typeface="微软雅黑"/>
               </a:rPr>
               <a:t>队列堆积峰值 pods</a:t>
             </a:r>
@@ -9302,7 +9302,7 @@
                   <a:srgbClr val="6B7A8F"/>
                 </a:solidFill>
                 <a:latin typeface="Arial"/>
-                <a:ea typeface="Microsoft YaHei"/>
+                <a:ea typeface="微软雅黑"/>
               </a:rPr>
               <a:t>pending_pods 最大值</a:t>
             </a:r>
@@ -9338,7 +9338,7 @@
                   <a:srgbClr val="6B7A8F"/>
                 </a:solidFill>
                 <a:latin typeface="Arial"/>
-                <a:ea typeface="Microsoft YaHei"/>
+                <a:ea typeface="微软雅黑"/>
               </a:rPr>
               <a:t>编码：s1–s4 = 100 / 1000 / 5000 / 10000 节点；w1–w7 = 负载强度（w2 500、w3 1000、w4 2000 pods/s 极限、w5 突发、w6 Gang、w7 异构）；inst3 = 3 实例</a:t>
             </a:r>
@@ -9374,7 +9374,7 @@
                   <a:srgbClr val="6B7A8F"/>
                 </a:solidFill>
                 <a:latin typeface="Arial"/>
-                <a:ea typeface="Microsoft YaHei"/>
+                <a:ea typeface="微软雅黑"/>
               </a:rPr>
               <a:t>14 / 26</a:t>
             </a:r>
@@ -9484,7 +9484,7 @@
                   <a:srgbClr val="0B2A4A"/>
                 </a:solidFill>
                 <a:latin typeface="Arial"/>
-                <a:ea typeface="Microsoft YaHei"/>
+                <a:ea typeface="微软雅黑"/>
               </a:rPr>
               <a:t>绑定正确性与不变量验证</a:t>
             </a:r>
@@ -9564,7 +9564,7 @@
                   <a:srgbClr val="1F5C99"/>
                 </a:solidFill>
                 <a:latin typeface="Arial"/>
-                <a:ea typeface="Microsoft YaHei"/>
+                <a:ea typeface="微软雅黑"/>
               </a:rPr>
               <a:t>144 次 run 的 apiserver 断言全部通过：unbound = 0 且 dup = 0</a:t>
             </a:r>
@@ -9646,7 +9646,7 @@
                   <a:srgbClr val="E8833A"/>
                 </a:solidFill>
                 <a:latin typeface="Arial"/>
-                <a:ea typeface="Microsoft YaHei"/>
+                <a:ea typeface="微软雅黑"/>
               </a:rPr>
               <a:t>100%</a:t>
             </a:r>
@@ -9682,7 +9682,7 @@
                   <a:srgbClr val="6B7A8F"/>
                 </a:solidFill>
                 <a:latin typeface="Arial"/>
-                <a:ea typeface="Microsoft YaHei"/>
+                <a:ea typeface="微软雅黑"/>
               </a:rPr>
               <a:t>绑定成功率</a:t>
             </a:r>
@@ -9764,7 +9764,7 @@
                   <a:srgbClr val="E8833A"/>
                 </a:solidFill>
                 <a:latin typeface="Arial"/>
-                <a:ea typeface="Microsoft YaHei"/>
+                <a:ea typeface="微软雅黑"/>
               </a:rPr>
               <a:t>144</a:t>
             </a:r>
@@ -9800,7 +9800,7 @@
                   <a:srgbClr val="6B7A8F"/>
                 </a:solidFill>
                 <a:latin typeface="Arial"/>
-                <a:ea typeface="Microsoft YaHei"/>
+                <a:ea typeface="微软雅黑"/>
               </a:rPr>
               <a:t>次 run 全部通过</a:t>
             </a:r>
@@ -9882,7 +9882,7 @@
                   <a:srgbClr val="E8833A"/>
                 </a:solidFill>
                 <a:latin typeface="Arial"/>
-                <a:ea typeface="Microsoft YaHei"/>
+                <a:ea typeface="微软雅黑"/>
               </a:rPr>
               <a:t>0</a:t>
             </a:r>
@@ -9918,7 +9918,7 @@
                   <a:srgbClr val="6B7A8F"/>
                 </a:solidFill>
                 <a:latin typeface="Arial"/>
-                <a:ea typeface="Microsoft YaHei"/>
+                <a:ea typeface="微软雅黑"/>
               </a:rPr>
               <a:t>unbound / dup</a:t>
             </a:r>
@@ -9958,7 +9958,7 @@
                   <a:srgbClr val="333333"/>
                 </a:solidFill>
                 <a:latin typeface="Arial"/>
-                <a:ea typeface="Microsoft YaHei"/>
+                <a:ea typeface="微软雅黑"/>
               </a:rPr>
               <a:t>▪  ENO 48 次 run：绑定成功率 100%</a:t>
             </a:r>
@@ -9978,7 +9978,7 @@
                   <a:srgbClr val="333333"/>
                 </a:solidFill>
                 <a:latin typeface="Arial"/>
-                <a:ea typeface="Microsoft YaHei"/>
+                <a:ea typeface="微软雅黑"/>
               </a:rPr>
               <a:t>▪  Layer 0 / Layer 3 故障注入各 6 项判据全过</a:t>
             </a:r>
@@ -9998,7 +9998,7 @@
                   <a:srgbClr val="333333"/>
                 </a:solidFill>
                 <a:latin typeface="Arial"/>
-                <a:ea typeface="Microsoft YaHei"/>
+                <a:ea typeface="微软雅黑"/>
               </a:rPr>
               <a:t>▪  断言在 apiserver 侧可复核</a:t>
             </a:r>
@@ -10034,7 +10034,7 @@
                   <a:srgbClr val="6B7A8F"/>
                 </a:solidFill>
                 <a:latin typeface="Arial"/>
-                <a:ea typeface="Microsoft YaHei"/>
+                <a:ea typeface="微软雅黑"/>
               </a:rPr>
               <a:t>15 / 26</a:t>
             </a:r>
@@ -10144,7 +10144,7 @@
                   <a:srgbClr val="0B2A4A"/>
                 </a:solidFill>
                 <a:latin typeface="Arial"/>
-                <a:ea typeface="Microsoft YaHei"/>
+                <a:ea typeface="微软雅黑"/>
               </a:rPr>
               <a:t>故障注入 Layer 0</a:t>
             </a:r>
@@ -10224,7 +10224,7 @@
                   <a:srgbClr val="1F5C99"/>
                 </a:solidFill>
                 <a:latin typeface="Arial"/>
-                <a:ea typeface="Microsoft YaHei"/>
+                <a:ea typeface="微软雅黑"/>
               </a:rPr>
               <a:t>10% 节点注解漂移，300 次拦截全部转为合规重排</a:t>
             </a:r>
@@ -10288,7 +10288,7 @@
                   <a:srgbClr val="333333"/>
                 </a:solidFill>
                 <a:latin typeface="Arial"/>
-                <a:ea typeface="Microsoft YaHei"/>
+                <a:ea typeface="微软雅黑"/>
               </a:rPr>
               <a:t>▪  拦截 300 次 / 回退 300 次</a:t>
             </a:r>
@@ -10308,7 +10308,7 @@
                   <a:srgbClr val="333333"/>
                 </a:solidFill>
                 <a:latin typeface="Arial"/>
-                <a:ea typeface="Microsoft YaHei"/>
+                <a:ea typeface="微软雅黑"/>
               </a:rPr>
               <a:t>▪  绑定成功率 1.00；断言 50000/50000</a:t>
             </a:r>
@@ -10328,7 +10328,7 @@
                   <a:srgbClr val="333333"/>
                 </a:solidFill>
                 <a:latin typeface="Arial"/>
-                <a:ea typeface="Microsoft YaHei"/>
+                <a:ea typeface="微软雅黑"/>
               </a:rPr>
               <a:t>▪  总耗时 683 s 对基线 680 s（+0.4%）</a:t>
             </a:r>
@@ -10364,7 +10364,7 @@
                   <a:srgbClr val="6B7A8F"/>
                 </a:solidFill>
                 <a:latin typeface="Arial"/>
-                <a:ea typeface="Microsoft YaHei"/>
+                <a:ea typeface="微软雅黑"/>
               </a:rPr>
               <a:t>编码：s1–s4 = 100 / 1000 / 5000 / 10000 节点；w1–w7 = 负载强度（w2 500、w3 1000、w4 2000 pods/s 极限、w5 突发、w6 Gang、w7 异构）；inst3 = 3 实例</a:t>
             </a:r>
@@ -10400,7 +10400,7 @@
                   <a:srgbClr val="6B7A8F"/>
                 </a:solidFill>
                 <a:latin typeface="Arial"/>
-                <a:ea typeface="Microsoft YaHei"/>
+                <a:ea typeface="微软雅黑"/>
               </a:rPr>
               <a:t>16 / 26</a:t>
             </a:r>
@@ -10510,7 +10510,7 @@
                   <a:srgbClr val="0B2A4A"/>
                 </a:solidFill>
                 <a:latin typeface="Arial"/>
-                <a:ea typeface="Microsoft YaHei"/>
+                <a:ea typeface="微软雅黑"/>
               </a:rPr>
               <a:t>故障注入 Layer 3</a:t>
             </a:r>
@@ -10590,7 +10590,7 @@
                   <a:srgbClr val="1F5C99"/>
                 </a:solidFill>
                 <a:latin typeface="Arial"/>
-                <a:ea typeface="Microsoft YaHei"/>
+                <a:ea typeface="微软雅黑"/>
               </a:rPr>
               <a:t>杀掉 1/3 实例并停机 180 s，系统仍在 784 s 内完成全部绑定</a:t>
             </a:r>
@@ -10654,7 +10654,7 @@
                   <a:srgbClr val="333333"/>
                 </a:solidFill>
                 <a:latin typeface="Arial"/>
-                <a:ea typeface="Microsoft YaHei"/>
+                <a:ea typeface="微软雅黑"/>
               </a:rPr>
               <a:t>▪  被杀实例绑定占比 68/8407 = 0.81%</a:t>
             </a:r>
@@ -10674,7 +10674,7 @@
                   <a:srgbClr val="333333"/>
                 </a:solidFill>
                 <a:latin typeface="Arial"/>
-                <a:ea typeface="Microsoft YaHei"/>
+                <a:ea typeface="微软雅黑"/>
               </a:rPr>
               <a:t>▪  存活实例接管 8407 pods；pending 353→2</a:t>
             </a:r>
@@ -10694,7 +10694,7 @@
                   <a:srgbClr val="333333"/>
                 </a:solidFill>
                 <a:latin typeface="Arial"/>
-                <a:ea typeface="Microsoft YaHei"/>
+                <a:ea typeface="微软雅黑"/>
               </a:rPr>
               <a:t>▪  总耗时 784 s，较基线 +15.3%</a:t>
             </a:r>
@@ -10730,7 +10730,7 @@
                   <a:srgbClr val="6B7A8F"/>
                 </a:solidFill>
                 <a:latin typeface="Arial"/>
-                <a:ea typeface="Microsoft YaHei"/>
+                <a:ea typeface="微软雅黑"/>
               </a:rPr>
               <a:t>编码：s1–s4 = 100 / 1000 / 5000 / 10000 节点；w1–w7 = 负载强度（w2 500、w3 1000、w4 2000 pods/s 极限、w5 突发、w6 Gang、w7 异构）；inst3 = 3 实例</a:t>
             </a:r>
@@ -10766,7 +10766,7 @@
                   <a:srgbClr val="6B7A8F"/>
                 </a:solidFill>
                 <a:latin typeface="Arial"/>
-                <a:ea typeface="Microsoft YaHei"/>
+                <a:ea typeface="微软雅黑"/>
               </a:rPr>
               <a:t>17 / 26</a:t>
             </a:r>
@@ -10876,7 +10876,7 @@
                   <a:srgbClr val="0B2A4A"/>
                 </a:solidFill>
                 <a:latin typeface="Arial"/>
-                <a:ea typeface="Microsoft YaHei"/>
+                <a:ea typeface="微软雅黑"/>
               </a:rPr>
               <a:t>五组基线</a:t>
             </a:r>
@@ -10956,7 +10956,7 @@
                   <a:srgbClr val="1F5C99"/>
                 </a:solidFill>
                 <a:latin typeface="Arial"/>
-                <a:ea typeface="Microsoft YaHei"/>
+                <a:ea typeface="微软雅黑"/>
               </a:rPr>
               <a:t>ENO/Gödel 第一档，kube-scheduler 第二档，Volcano/Koordinator 低一个数量级</a:t>
             </a:r>
@@ -11020,7 +11020,7 @@
                   <a:srgbClr val="333333"/>
                 </a:solidFill>
                 <a:latin typeface="Arial"/>
-                <a:ea typeface="Microsoft YaHei"/>
+                <a:ea typeface="微软雅黑"/>
               </a:rPr>
               <a:t>▪  较 kube-scheduler +1.8%~+22.5%</a:t>
             </a:r>
@@ -11040,7 +11040,7 @@
                   <a:srgbClr val="333333"/>
                 </a:solidFill>
                 <a:latin typeface="Arial"/>
-                <a:ea typeface="Microsoft YaHei"/>
+                <a:ea typeface="微软雅黑"/>
               </a:rPr>
               <a:t>▪  较 Volcano 约 6×，较 Koordinator 12× 以上</a:t>
             </a:r>
@@ -11060,7 +11060,7 @@
                   <a:srgbClr val="333333"/>
                 </a:solidFill>
                 <a:latin typeface="Arial"/>
-                <a:ea typeface="Microsoft YaHei"/>
+                <a:ea typeface="微软雅黑"/>
               </a:rPr>
               <a:t>▪  s1/w1 低负载例外 -7.2%（未饱和）</a:t>
             </a:r>
@@ -11106,7 +11106,7 @@
                             <a:srgbClr val="FFFFFF"/>
                           </a:solidFill>
                           <a:latin typeface="Arial"/>
-                          <a:ea typeface="Microsoft YaHei"/>
+                          <a:ea typeface="微软雅黑"/>
                         </a:rPr>
                         <a:t>场景</a:t>
                       </a:r>
@@ -11130,7 +11130,7 @@
                             <a:srgbClr val="FFFFFF"/>
                           </a:solidFill>
                           <a:latin typeface="Arial"/>
-                          <a:ea typeface="Microsoft YaHei"/>
+                          <a:ea typeface="微软雅黑"/>
                         </a:rPr>
                         <a:t>ENO</a:t>
                       </a:r>
@@ -11154,7 +11154,7 @@
                             <a:srgbClr val="FFFFFF"/>
                           </a:solidFill>
                           <a:latin typeface="Arial"/>
-                          <a:ea typeface="Microsoft YaHei"/>
+                          <a:ea typeface="微软雅黑"/>
                         </a:rPr>
                         <a:t>Gödel</a:t>
                       </a:r>
@@ -11178,7 +11178,7 @@
                             <a:srgbClr val="FFFFFF"/>
                           </a:solidFill>
                           <a:latin typeface="Arial"/>
-                          <a:ea typeface="Microsoft YaHei"/>
+                          <a:ea typeface="微软雅黑"/>
                         </a:rPr>
                         <a:t>k-sched</a:t>
                       </a:r>
@@ -11202,7 +11202,7 @@
                             <a:srgbClr val="FFFFFF"/>
                           </a:solidFill>
                           <a:latin typeface="Arial"/>
-                          <a:ea typeface="Microsoft YaHei"/>
+                          <a:ea typeface="微软雅黑"/>
                         </a:rPr>
                         <a:t>Volcano</a:t>
                       </a:r>
@@ -11226,7 +11226,7 @@
                             <a:srgbClr val="FFFFFF"/>
                           </a:solidFill>
                           <a:latin typeface="Arial"/>
-                          <a:ea typeface="Microsoft YaHei"/>
+                          <a:ea typeface="微软雅黑"/>
                         </a:rPr>
                         <a:t>Koord</a:t>
                       </a:r>
@@ -11252,7 +11252,7 @@
                             <a:srgbClr val="333333"/>
                           </a:solidFill>
                           <a:latin typeface="Arial"/>
-                          <a:ea typeface="Microsoft YaHei"/>
+                          <a:ea typeface="微软雅黑"/>
                         </a:rPr>
                         <a:t>s2/w3</a:t>
                       </a:r>
@@ -11276,7 +11276,7 @@
                             <a:srgbClr val="333333"/>
                           </a:solidFill>
                           <a:latin typeface="Arial"/>
-                          <a:ea typeface="Microsoft YaHei"/>
+                          <a:ea typeface="微软雅黑"/>
                         </a:rPr>
                         <a:t>352.1</a:t>
                       </a:r>
@@ -11300,7 +11300,7 @@
                             <a:srgbClr val="333333"/>
                           </a:solidFill>
                           <a:latin typeface="Arial"/>
-                          <a:ea typeface="Microsoft YaHei"/>
+                          <a:ea typeface="微软雅黑"/>
                         </a:rPr>
                         <a:t>286.5</a:t>
                       </a:r>
@@ -11324,7 +11324,7 @@
                             <a:srgbClr val="333333"/>
                           </a:solidFill>
                           <a:latin typeface="Arial"/>
-                          <a:ea typeface="Microsoft YaHei"/>
+                          <a:ea typeface="微软雅黑"/>
                         </a:rPr>
                         <a:t>≈297</a:t>
                       </a:r>
@@ -11348,7 +11348,7 @@
                             <a:srgbClr val="333333"/>
                           </a:solidFill>
                           <a:latin typeface="Arial"/>
-                          <a:ea typeface="Microsoft YaHei"/>
+                          <a:ea typeface="微软雅黑"/>
                         </a:rPr>
                         <a:t>≈48</a:t>
                       </a:r>
@@ -11372,7 +11372,7 @@
                             <a:srgbClr val="333333"/>
                           </a:solidFill>
                           <a:latin typeface="Arial"/>
-                          <a:ea typeface="Microsoft YaHei"/>
+                          <a:ea typeface="微软雅黑"/>
                         </a:rPr>
                         <a:t>≈16</a:t>
                       </a:r>
@@ -11398,7 +11398,7 @@
                             <a:srgbClr val="333333"/>
                           </a:solidFill>
                           <a:latin typeface="Arial"/>
-                          <a:ea typeface="Microsoft YaHei"/>
+                          <a:ea typeface="微软雅黑"/>
                         </a:rPr>
                         <a:t>s3/w3</a:t>
                       </a:r>
@@ -11422,7 +11422,7 @@
                             <a:srgbClr val="333333"/>
                           </a:solidFill>
                           <a:latin typeface="Arial"/>
-                          <a:ea typeface="Microsoft YaHei"/>
+                          <a:ea typeface="微软雅黑"/>
                         </a:rPr>
                         <a:t>297.6</a:t>
                       </a:r>
@@ -11446,7 +11446,7 @@
                             <a:srgbClr val="333333"/>
                           </a:solidFill>
                           <a:latin typeface="Arial"/>
-                          <a:ea typeface="Microsoft YaHei"/>
+                          <a:ea typeface="微软雅黑"/>
                         </a:rPr>
                         <a:t>283.3</a:t>
                       </a:r>
@@ -11470,7 +11470,7 @@
                             <a:srgbClr val="333333"/>
                           </a:solidFill>
                           <a:latin typeface="Arial"/>
-                          <a:ea typeface="Microsoft YaHei"/>
+                          <a:ea typeface="微软雅黑"/>
                         </a:rPr>
                         <a:t>≈292</a:t>
                       </a:r>
@@ -11494,7 +11494,7 @@
                             <a:srgbClr val="333333"/>
                           </a:solidFill>
                           <a:latin typeface="Arial"/>
-                          <a:ea typeface="Microsoft YaHei"/>
+                          <a:ea typeface="微软雅黑"/>
                         </a:rPr>
                         <a:t>≈48</a:t>
                       </a:r>
@@ -11518,7 +11518,7 @@
                             <a:srgbClr val="333333"/>
                           </a:solidFill>
                           <a:latin typeface="Arial"/>
-                          <a:ea typeface="Microsoft YaHei"/>
+                          <a:ea typeface="微软雅黑"/>
                         </a:rPr>
                         <a:t>≈24</a:t>
                       </a:r>
@@ -11564,7 +11564,7 @@
                   <a:srgbClr val="6B7A8F"/>
                 </a:solidFill>
                 <a:latin typeface="Arial"/>
-                <a:ea typeface="Microsoft YaHei"/>
+                <a:ea typeface="微软雅黑"/>
               </a:rPr>
               <a:t>编码：s1–s4 = 100 / 1000 / 5000 / 10000 节点；w1–w7 = 负载强度（w2 500、w3 1000、w4 2000 pods/s 极限、w5 突发、w6 Gang、w7 异构）；inst3 = 3 实例</a:t>
             </a:r>
@@ -11600,7 +11600,7 @@
                   <a:srgbClr val="6B7A8F"/>
                 </a:solidFill>
                 <a:latin typeface="Arial"/>
-                <a:ea typeface="Microsoft YaHei"/>
+                <a:ea typeface="微软雅黑"/>
               </a:rPr>
               <a:t>18 / 26</a:t>
             </a:r>
@@ -11710,7 +11710,7 @@
                   <a:srgbClr val="0B2A4A"/>
                 </a:solidFill>
                 <a:latin typeface="Arial"/>
-                <a:ea typeface="Microsoft YaHei"/>
+                <a:ea typeface="微软雅黑"/>
               </a:rPr>
               <a:t>ENO vs Gödel</a:t>
             </a:r>
@@ -11790,7 +11790,7 @@
                   <a:srgbClr val="1F5C99"/>
                 </a:solidFill>
                 <a:latin typeface="Arial"/>
-                <a:ea typeface="Microsoft YaHei"/>
+                <a:ea typeface="微软雅黑"/>
               </a:rPr>
               <a:t>平均 +11.9%，高负载与多实例场景优势最大</a:t>
             </a:r>
@@ -11854,7 +11854,7 @@
                   <a:srgbClr val="333333"/>
                 </a:solidFill>
                 <a:latin typeface="Arial"/>
-                <a:ea typeface="Microsoft YaHei"/>
+                <a:ea typeface="微软雅黑"/>
               </a:rPr>
               <a:t>▪  14 领先、2 持平（s1/w1、s4/w7）</a:t>
             </a:r>
@@ -11874,7 +11874,7 @@
                   <a:srgbClr val="333333"/>
                 </a:solidFill>
                 <a:latin typeface="Arial"/>
-                <a:ea typeface="Microsoft YaHei"/>
+                <a:ea typeface="微软雅黑"/>
               </a:rPr>
               <a:t>▪  提升 +2.0%~+22.9%，平均 +11.9%</a:t>
             </a:r>
@@ -11894,7 +11894,7 @@
                   <a:srgbClr val="333333"/>
                 </a:solidFill>
                 <a:latin typeface="Arial"/>
-                <a:ea typeface="Microsoft YaHei"/>
+                <a:ea typeface="微软雅黑"/>
               </a:rPr>
               <a:t>▪  亮点：s2/w3 +22.9%、s3/w3 inst3 +21.7%</a:t>
             </a:r>
@@ -11930,7 +11930,7 @@
                   <a:srgbClr val="6B7A8F"/>
                 </a:solidFill>
                 <a:latin typeface="Arial"/>
-                <a:ea typeface="Microsoft YaHei"/>
+                <a:ea typeface="微软雅黑"/>
               </a:rPr>
               <a:t>编码：s1–s4 = 100 / 1000 / 5000 / 10000 节点；w1–w7 = 负载强度（w2 500、w3 1000、w4 2000 pods/s 极限、w5 突发、w6 Gang、w7 异构）；inst3 = 3 实例</a:t>
             </a:r>
@@ -11966,7 +11966,7 @@
                   <a:srgbClr val="6B7A8F"/>
                 </a:solidFill>
                 <a:latin typeface="Arial"/>
-                <a:ea typeface="Microsoft YaHei"/>
+                <a:ea typeface="微软雅黑"/>
               </a:rPr>
               <a:t>19 / 26</a:t>
             </a:r>
@@ -12076,7 +12076,7 @@
                   <a:srgbClr val="0B2A4A"/>
                 </a:solidFill>
                 <a:latin typeface="Arial"/>
-                <a:ea typeface="Microsoft YaHei"/>
+                <a:ea typeface="微软雅黑"/>
               </a:rPr>
               <a:t>万节点规模下，吞吐上限与单点风险同时暴露</a:t>
             </a:r>
@@ -12156,7 +12156,7 @@
                   <a:srgbClr val="1F5C99"/>
                 </a:solidFill>
                 <a:latin typeface="Arial"/>
-                <a:ea typeface="Microsoft YaHei"/>
+                <a:ea typeface="微软雅黑"/>
               </a:rPr>
               <a:t>业务要求秒级承接海量 Pod，又不能因单点中断；单实例架构在两头受制</a:t>
             </a:r>
@@ -12282,7 +12282,7 @@
                   <a:srgbClr val="0B2A4A"/>
                 </a:solidFill>
                 <a:latin typeface="Arial"/>
-                <a:ea typeface="Microsoft YaHei"/>
+                <a:ea typeface="微软雅黑"/>
               </a:rPr>
               <a:t>规模</a:t>
             </a:r>
@@ -12302,7 +12302,7 @@
                   <a:srgbClr val="6B7A8F"/>
                 </a:solidFill>
                 <a:latin typeface="Arial"/>
-                <a:ea typeface="Microsoft YaHei"/>
+                <a:ea typeface="微软雅黑"/>
               </a:rPr>
               <a:t>生产集群已进入万节点级，规模仍在增长</a:t>
             </a:r>
@@ -12428,7 +12428,7 @@
                   <a:srgbClr val="0B2A4A"/>
                 </a:solidFill>
                 <a:latin typeface="Arial"/>
-                <a:ea typeface="Microsoft YaHei"/>
+                <a:ea typeface="微软雅黑"/>
               </a:rPr>
               <a:t>吞吐</a:t>
             </a:r>
@@ -12448,7 +12448,7 @@
                   <a:srgbClr val="6B7A8F"/>
                 </a:solidFill>
                 <a:latin typeface="Arial"/>
-                <a:ea typeface="Microsoft YaHei"/>
+                <a:ea typeface="微软雅黑"/>
               </a:rPr>
               <a:t>业务要求秒级承接海量 Pod</a:t>
             </a:r>
@@ -12574,7 +12574,7 @@
                   <a:srgbClr val="0B2A4A"/>
                 </a:solidFill>
                 <a:latin typeface="Arial"/>
-                <a:ea typeface="Microsoft YaHei"/>
+                <a:ea typeface="微软雅黑"/>
               </a:rPr>
               <a:t>可用性</a:t>
             </a:r>
@@ -12594,7 +12594,7 @@
                   <a:srgbClr val="6B7A8F"/>
                 </a:solidFill>
                 <a:latin typeface="Arial"/>
-                <a:ea typeface="Microsoft YaHei"/>
+                <a:ea typeface="微软雅黑"/>
               </a:rPr>
               <a:t>长期运行不能因单点失效中断服务</a:t>
             </a:r>
@@ -12724,7 +12724,7 @@
                   <a:srgbClr val="0B2A4A"/>
                 </a:solidFill>
                 <a:latin typeface="Arial"/>
-                <a:ea typeface="Microsoft YaHei"/>
+                <a:ea typeface="微软雅黑"/>
               </a:rPr>
               <a:t>单实例架构难以同时满足高吞吐与高可用，分布式改造成为必然；但改造会带来新的一致性难题。</a:t>
             </a:r>
@@ -12760,7 +12760,7 @@
                   <a:srgbClr val="6B7A8F"/>
                 </a:solidFill>
                 <a:latin typeface="Arial"/>
-                <a:ea typeface="Microsoft YaHei"/>
+                <a:ea typeface="微软雅黑"/>
               </a:rPr>
               <a:t>2 / 26</a:t>
             </a:r>
@@ -12870,7 +12870,7 @@
                   <a:srgbClr val="0B2A4A"/>
                 </a:solidFill>
                 <a:latin typeface="Arial"/>
-                <a:ea typeface="Microsoft YaHei"/>
+                <a:ea typeface="微软雅黑"/>
               </a:rPr>
               <a:t>尾延迟</a:t>
             </a:r>
@@ -12950,7 +12950,7 @@
                   <a:srgbClr val="1F5C99"/>
                 </a:solidFill>
                 <a:latin typeface="Arial"/>
-                <a:ea typeface="Microsoft YaHei"/>
+                <a:ea typeface="微软雅黑"/>
               </a:rPr>
               <a:t>s2/w3 从 23.48 s 降到 4.00 s，降幅 82.9%</a:t>
             </a:r>
@@ -13014,7 +13014,7 @@
                   <a:srgbClr val="333333"/>
                 </a:solidFill>
                 <a:latin typeface="Arial"/>
-                <a:ea typeface="Microsoft YaHei"/>
+                <a:ea typeface="微软雅黑"/>
               </a:rPr>
               <a:t>▪  P99 改善 0.3%~82.9%（除 s2/w2）</a:t>
             </a:r>
@@ -13034,7 +13034,7 @@
                   <a:srgbClr val="333333"/>
                 </a:solidFill>
                 <a:latin typeface="Arial"/>
-                <a:ea typeface="Microsoft YaHei"/>
+                <a:ea typeface="微软雅黑"/>
               </a:rPr>
               <a:t>▪  s3/w3 inst1 32.57→16.22 s（-50.2%）</a:t>
             </a:r>
@@ -13054,7 +13054,7 @@
                   <a:srgbClr val="333333"/>
                 </a:solidFill>
                 <a:latin typeface="Arial"/>
-                <a:ea typeface="Microsoft YaHei"/>
+                <a:ea typeface="微软雅黑"/>
               </a:rPr>
               <a:t>▪  Pod E2E P99 改善 0.6%~75.3%</a:t>
             </a:r>
@@ -13090,7 +13090,7 @@
                   <a:srgbClr val="6B7A8F"/>
                 </a:solidFill>
                 <a:latin typeface="Arial"/>
-                <a:ea typeface="Microsoft YaHei"/>
+                <a:ea typeface="微软雅黑"/>
               </a:rPr>
               <a:t>编码：s1–s4 = 100 / 1000 / 5000 / 10000 节点；w1–w7 = 负载强度（w2 500、w3 1000、w4 2000 pods/s 极限、w5 突发、w6 Gang、w7 异构）；inst3 = 3 实例</a:t>
             </a:r>
@@ -13126,7 +13126,7 @@
                   <a:srgbClr val="6B7A8F"/>
                 </a:solidFill>
                 <a:latin typeface="Arial"/>
-                <a:ea typeface="Microsoft YaHei"/>
+                <a:ea typeface="微软雅黑"/>
               </a:rPr>
               <a:t>20 / 26</a:t>
             </a:r>
@@ -13236,7 +13236,7 @@
                   <a:srgbClr val="0B2A4A"/>
                 </a:solidFill>
                 <a:latin typeface="Arial"/>
-                <a:ea typeface="Microsoft YaHei"/>
+                <a:ea typeface="微软雅黑"/>
               </a:rPr>
               <a:t>实例 1→3</a:t>
             </a:r>
@@ -13316,7 +13316,7 @@
                   <a:srgbClr val="1F5C99"/>
                 </a:solidFill>
                 <a:latin typeface="Arial"/>
-                <a:ea typeface="Microsoft YaHei"/>
+                <a:ea typeface="微软雅黑"/>
               </a:rPr>
               <a:t>ENO 有效吞吐 +17.5%，Gödel 仅 +1.4%</a:t>
             </a:r>
@@ -13359,7 +13359,7 @@
                             <a:srgbClr val="FFFFFF"/>
                           </a:solidFill>
                           <a:latin typeface="Arial"/>
-                          <a:ea typeface="Microsoft YaHei"/>
+                          <a:ea typeface="微软雅黑"/>
                         </a:rPr>
                         <a:t>指标（s3/w3）</a:t>
                       </a:r>
@@ -13383,7 +13383,7 @@
                             <a:srgbClr val="FFFFFF"/>
                           </a:solidFill>
                           <a:latin typeface="Arial"/>
-                          <a:ea typeface="Microsoft YaHei"/>
+                          <a:ea typeface="微软雅黑"/>
                         </a:rPr>
                         <a:t>ENO inst1→inst3</a:t>
                       </a:r>
@@ -13407,7 +13407,7 @@
                             <a:srgbClr val="FFFFFF"/>
                           </a:solidFill>
                           <a:latin typeface="Arial"/>
-                          <a:ea typeface="Microsoft YaHei"/>
+                          <a:ea typeface="微软雅黑"/>
                         </a:rPr>
                         <a:t>Gödel inst1→inst3</a:t>
                       </a:r>
@@ -13433,7 +13433,7 @@
                             <a:srgbClr val="333333"/>
                           </a:solidFill>
                           <a:latin typeface="Arial"/>
-                          <a:ea typeface="Microsoft YaHei"/>
+                          <a:ea typeface="微软雅黑"/>
                         </a:rPr>
                         <a:t>有效吞吐</a:t>
                       </a:r>
@@ -13457,7 +13457,7 @@
                             <a:srgbClr val="333333"/>
                           </a:solidFill>
                           <a:latin typeface="Arial"/>
-                          <a:ea typeface="Microsoft YaHei"/>
+                          <a:ea typeface="微软雅黑"/>
                         </a:rPr>
                         <a:t>297.6 → 349.7（+17.5%）</a:t>
                       </a:r>
@@ -13481,7 +13481,7 @@
                             <a:srgbClr val="333333"/>
                           </a:solidFill>
                           <a:latin typeface="Arial"/>
-                          <a:ea typeface="Microsoft YaHei"/>
+                          <a:ea typeface="微软雅黑"/>
                         </a:rPr>
                         <a:t>283.3 → 287.4（+1.4%）</a:t>
                       </a:r>
@@ -13507,7 +13507,7 @@
                             <a:srgbClr val="333333"/>
                           </a:solidFill>
                           <a:latin typeface="Arial"/>
-                          <a:ea typeface="Microsoft YaHei"/>
+                          <a:ea typeface="微软雅黑"/>
                         </a:rPr>
                         <a:t>P99 延迟</a:t>
                       </a:r>
@@ -13531,7 +13531,7 @@
                             <a:srgbClr val="333333"/>
                           </a:solidFill>
                           <a:latin typeface="Arial"/>
-                          <a:ea typeface="Microsoft YaHei"/>
+                          <a:ea typeface="微软雅黑"/>
                         </a:rPr>
                         <a:t>16.22 → 0.13 s（-99.2%）</a:t>
                       </a:r>
@@ -13555,7 +13555,7 @@
                             <a:srgbClr val="333333"/>
                           </a:solidFill>
                           <a:latin typeface="Arial"/>
-                          <a:ea typeface="Microsoft YaHei"/>
+                          <a:ea typeface="微软雅黑"/>
                         </a:rPr>
                         <a:t>32.57 → 0.15 s（-99.5%）</a:t>
                       </a:r>
@@ -13581,7 +13581,7 @@
                             <a:srgbClr val="333333"/>
                           </a:solidFill>
                           <a:latin typeface="Arial"/>
-                          <a:ea typeface="Microsoft YaHei"/>
+                          <a:ea typeface="微软雅黑"/>
                         </a:rPr>
                         <a:t>队列堆积峰值</a:t>
                       </a:r>
@@ -13605,7 +13605,7 @@
                             <a:srgbClr val="333333"/>
                           </a:solidFill>
                           <a:latin typeface="Arial"/>
-                          <a:ea typeface="Microsoft YaHei"/>
+                          <a:ea typeface="微软雅黑"/>
                         </a:rPr>
                         <a:t>14698 → 20</a:t>
                       </a:r>
@@ -13629,7 +13629,7 @@
                             <a:srgbClr val="333333"/>
                           </a:solidFill>
                           <a:latin typeface="Arial"/>
-                          <a:ea typeface="Microsoft YaHei"/>
+                          <a:ea typeface="微软雅黑"/>
                         </a:rPr>
                         <a:t>22652 → 16</a:t>
                       </a:r>
@@ -13699,7 +13699,7 @@
                   <a:srgbClr val="6B7A8F"/>
                 </a:solidFill>
                 <a:latin typeface="Arial"/>
-                <a:ea typeface="Microsoft YaHei"/>
+                <a:ea typeface="微软雅黑"/>
               </a:rPr>
               <a:t>s3/w3 inst3 吞吐时序</a:t>
             </a:r>
@@ -13739,7 +13739,7 @@
                   <a:srgbClr val="333333"/>
                 </a:solidFill>
                 <a:latin typeface="Arial"/>
-                <a:ea typeface="Microsoft YaHei"/>
+                <a:ea typeface="微软雅黑"/>
               </a:rPr>
               <a:t>▪  延迟都降约 99%，但吞吐转化率差 12 倍</a:t>
             </a:r>
@@ -13759,7 +13759,7 @@
                   <a:srgbClr val="333333"/>
                 </a:solidFill>
                 <a:latin typeface="Arial"/>
-                <a:ea typeface="Microsoft YaHei"/>
+                <a:ea typeface="微软雅黑"/>
               </a:rPr>
               <a:t>▪  Gödel 增量被独立 Binder 串行吸收</a:t>
             </a:r>
@@ -13779,7 +13779,7 @@
                   <a:srgbClr val="333333"/>
                 </a:solidFill>
                 <a:latin typeface="Arial"/>
-                <a:ea typeface="Microsoft YaHei"/>
+                <a:ea typeface="微软雅黑"/>
               </a:rPr>
               <a:t>▪  这是架构归因最强的一组证据</a:t>
             </a:r>
@@ -13815,7 +13815,7 @@
                   <a:srgbClr val="6B7A8F"/>
                 </a:solidFill>
                 <a:latin typeface="Arial"/>
-                <a:ea typeface="Microsoft YaHei"/>
+                <a:ea typeface="微软雅黑"/>
               </a:rPr>
               <a:t>编码：s1–s4 = 100 / 1000 / 5000 / 10000 节点；w1–w7 = 负载强度（w2 500、w3 1000、w4 2000 pods/s 极限、w5 突发、w6 Gang、w7 异构）；inst3 = 3 实例</a:t>
             </a:r>
@@ -13851,7 +13851,7 @@
                   <a:srgbClr val="6B7A8F"/>
                 </a:solidFill>
                 <a:latin typeface="Arial"/>
-                <a:ea typeface="Microsoft YaHei"/>
+                <a:ea typeface="微软雅黑"/>
               </a:rPr>
               <a:t>21 / 26</a:t>
             </a:r>
@@ -13961,7 +13961,7 @@
                   <a:srgbClr val="0B2A4A"/>
                 </a:solidFill>
                 <a:latin typeface="Arial"/>
-                <a:ea typeface="Microsoft YaHei"/>
+                <a:ea typeface="微软雅黑"/>
               </a:rPr>
               <a:t>规模翻倍与复杂负载下仍保持领先</a:t>
             </a:r>
@@ -14041,7 +14041,7 @@
                   <a:srgbClr val="1F5C99"/>
                 </a:solidFill>
                 <a:latin typeface="Arial"/>
-                <a:ea typeface="Microsoft YaHei"/>
+                <a:ea typeface="微软雅黑"/>
               </a:rPr>
               <a:t>s4 规模下吞吐仍 +5.6%、P99 低 33.4%；突发、极限、异构均不落后</a:t>
             </a:r>
@@ -14084,7 +14084,7 @@
                             <a:srgbClr val="FFFFFF"/>
                           </a:solidFill>
                           <a:latin typeface="Arial"/>
-                          <a:ea typeface="Microsoft YaHei"/>
+                          <a:ea typeface="微软雅黑"/>
                         </a:rPr>
                         <a:t>场景（inst3）</a:t>
                       </a:r>
@@ -14108,7 +14108,7 @@
                             <a:srgbClr val="FFFFFF"/>
                           </a:solidFill>
                           <a:latin typeface="Arial"/>
-                          <a:ea typeface="Microsoft YaHei"/>
+                          <a:ea typeface="微软雅黑"/>
                         </a:rPr>
                         <a:t>ENO vs Gödel 有效吞吐</a:t>
                       </a:r>
@@ -14132,7 +14132,7 @@
                             <a:srgbClr val="FFFFFF"/>
                           </a:solidFill>
                           <a:latin typeface="Arial"/>
-                          <a:ea typeface="Microsoft YaHei"/>
+                          <a:ea typeface="微软雅黑"/>
                         </a:rPr>
                         <a:t>P99 / E2E 变化</a:t>
                       </a:r>
@@ -14158,7 +14158,7 @@
                             <a:srgbClr val="333333"/>
                           </a:solidFill>
                           <a:latin typeface="Arial"/>
-                          <a:ea typeface="Microsoft YaHei"/>
+                          <a:ea typeface="微软雅黑"/>
                         </a:rPr>
                         <a:t>s3→s4（w3，实例不变）</a:t>
                       </a:r>
@@ -14182,7 +14182,7 @@
                             <a:srgbClr val="333333"/>
                           </a:solidFill>
                           <a:latin typeface="Arial"/>
-                          <a:ea typeface="Microsoft YaHei"/>
+                          <a:ea typeface="微软雅黑"/>
                         </a:rPr>
                         <a:t>349.7→296.7 vs 287.4→280.9（+5.6%）</a:t>
                       </a:r>
@@ -14206,7 +14206,7 @@
                             <a:srgbClr val="333333"/>
                           </a:solidFill>
                           <a:latin typeface="Arial"/>
-                          <a:ea typeface="Microsoft YaHei"/>
+                          <a:ea typeface="微软雅黑"/>
                         </a:rPr>
                         <a:t>P99 0.19 vs 0.28 s（低 33.4%）</a:t>
                       </a:r>
@@ -14232,7 +14232,7 @@
                             <a:srgbClr val="333333"/>
                           </a:solidFill>
                           <a:latin typeface="Arial"/>
-                          <a:ea typeface="Microsoft YaHei"/>
+                          <a:ea typeface="微软雅黑"/>
                         </a:rPr>
                         <a:t>w4 极限（s3 / s4）</a:t>
                       </a:r>
@@ -14256,7 +14256,7 @@
                             <a:srgbClr val="333333"/>
                           </a:solidFill>
                           <a:latin typeface="Arial"/>
-                          <a:ea typeface="Microsoft YaHei"/>
+                          <a:ea typeface="微软雅黑"/>
                         </a:rPr>
                         <a:t>+9.3% / +16.0%</a:t>
                       </a:r>
@@ -14280,7 +14280,7 @@
                             <a:srgbClr val="333333"/>
                           </a:solidFill>
                           <a:latin typeface="Arial"/>
-                          <a:ea typeface="Microsoft YaHei"/>
+                          <a:ea typeface="微软雅黑"/>
                         </a:rPr>
                         <a:t>P99 -49.7% / -14.8%；E2E -32.6%~-35.3%</a:t>
                       </a:r>
@@ -14306,7 +14306,7 @@
                             <a:srgbClr val="333333"/>
                           </a:solidFill>
                           <a:latin typeface="Arial"/>
-                          <a:ea typeface="Microsoft YaHei"/>
+                          <a:ea typeface="微软雅黑"/>
                         </a:rPr>
                         <a:t>w5 突发（s3 / s4）</a:t>
                       </a:r>
@@ -14330,7 +14330,7 @@
                             <a:srgbClr val="333333"/>
                           </a:solidFill>
                           <a:latin typeface="Arial"/>
-                          <a:ea typeface="Microsoft YaHei"/>
+                          <a:ea typeface="微软雅黑"/>
                         </a:rPr>
                         <a:t>+21.3% / +2.8%</a:t>
                       </a:r>
@@ -14354,7 +14354,7 @@
                             <a:srgbClr val="333333"/>
                           </a:solidFill>
                           <a:latin typeface="Arial"/>
-                          <a:ea typeface="Microsoft YaHei"/>
+                          <a:ea typeface="微软雅黑"/>
                         </a:rPr>
                         <a:t>s3 E2E -53.8%；s4 基本持平</a:t>
                       </a:r>
@@ -14380,7 +14380,7 @@
                             <a:srgbClr val="333333"/>
                           </a:solidFill>
                           <a:latin typeface="Arial"/>
-                          <a:ea typeface="Microsoft YaHei"/>
+                          <a:ea typeface="微软雅黑"/>
                         </a:rPr>
                         <a:t>w7 异构（s3 / s4）</a:t>
                       </a:r>
@@ -14404,7 +14404,7 @@
                             <a:srgbClr val="333333"/>
                           </a:solidFill>
                           <a:latin typeface="Arial"/>
-                          <a:ea typeface="Microsoft YaHei"/>
+                          <a:ea typeface="微软雅黑"/>
                         </a:rPr>
                         <a:t>+21.2% / 基本持平</a:t>
                       </a:r>
@@ -14428,7 +14428,7 @@
                             <a:srgbClr val="333333"/>
                           </a:solidFill>
                           <a:latin typeface="Arial"/>
-                          <a:ea typeface="Microsoft YaHei"/>
+                          <a:ea typeface="微软雅黑"/>
                         </a:rPr>
                         <a:t>s3 E2E -67.6%</a:t>
                       </a:r>
@@ -14478,7 +14478,7 @@
                   <a:srgbClr val="333333"/>
                 </a:solidFill>
                 <a:latin typeface="Arial"/>
-                <a:ea typeface="Microsoft YaHei"/>
+                <a:ea typeface="微软雅黑"/>
               </a:rPr>
               <a:t>▪  s4 队列堆积峰值 9 vs 61</a:t>
             </a:r>
@@ -14498,7 +14498,7 @@
                   <a:srgbClr val="333333"/>
                 </a:solidFill>
                 <a:latin typeface="Arial"/>
-                <a:ea typeface="Microsoft YaHei"/>
+                <a:ea typeface="微软雅黑"/>
               </a:rPr>
               <a:t>▪  规模翻倍时两者都退化（ENO -15.2%）</a:t>
             </a:r>
@@ -14518,7 +14518,7 @@
                   <a:srgbClr val="333333"/>
                 </a:solidFill>
                 <a:latin typeface="Arial"/>
-                <a:ea typeface="Microsoft YaHei"/>
+                <a:ea typeface="微软雅黑"/>
               </a:rPr>
               <a:t>▪  s3/s4 固定 3 实例，口径需说明</a:t>
             </a:r>
@@ -14554,7 +14554,7 @@
                   <a:srgbClr val="6B7A8F"/>
                 </a:solidFill>
                 <a:latin typeface="Arial"/>
-                <a:ea typeface="Microsoft YaHei"/>
+                <a:ea typeface="微软雅黑"/>
               </a:rPr>
               <a:t>编码：s1–s4 = 100 / 1000 / 5000 / 10000 节点；w1–w7 = 负载强度（w2 500、w3 1000、w4 2000 pods/s 极限、w5 突发、w6 Gang、w7 异构）；inst3 = 3 实例</a:t>
             </a:r>
@@ -14590,7 +14590,7 @@
                   <a:srgbClr val="6B7A8F"/>
                 </a:solidFill>
                 <a:latin typeface="Arial"/>
-                <a:ea typeface="Microsoft YaHei"/>
+                <a:ea typeface="微软雅黑"/>
               </a:rPr>
               <a:t>22 / 26</a:t>
             </a:r>
@@ -14700,7 +14700,7 @@
                   <a:srgbClr val="0B2A4A"/>
                 </a:solidFill>
                 <a:latin typeface="Arial"/>
-                <a:ea typeface="Microsoft YaHei"/>
+                <a:ea typeface="微软雅黑"/>
               </a:rPr>
               <a:t>归因闭环</a:t>
             </a:r>
@@ -14780,7 +14780,7 @@
                   <a:srgbClr val="1F5C99"/>
                 </a:solidFill>
                 <a:latin typeface="Arial"/>
-                <a:ea typeface="Microsoft YaHei"/>
+                <a:ea typeface="微软雅黑"/>
               </a:rPr>
               <a:t>去掉一次跨进程绑定链路，换来吞吐、尾延迟、队列深度的同步改善</a:t>
             </a:r>
@@ -14823,7 +14823,7 @@
                             <a:srgbClr val="FFFFFF"/>
                           </a:solidFill>
                           <a:latin typeface="Arial"/>
-                          <a:ea typeface="Microsoft YaHei"/>
+                          <a:ea typeface="微软雅黑"/>
                         </a:rPr>
                         <a:t>机制差异</a:t>
                       </a:r>
@@ -14847,7 +14847,7 @@
                             <a:srgbClr val="FFFFFF"/>
                           </a:solidFill>
                           <a:latin typeface="Arial"/>
-                          <a:ea typeface="Microsoft YaHei"/>
+                          <a:ea typeface="微软雅黑"/>
                         </a:rPr>
                         <a:t>对应指标</a:t>
                       </a:r>
@@ -14871,7 +14871,7 @@
                             <a:srgbClr val="FFFFFF"/>
                           </a:solidFill>
                           <a:latin typeface="Arial"/>
-                          <a:ea typeface="Microsoft YaHei"/>
+                          <a:ea typeface="微软雅黑"/>
                         </a:rPr>
                         <a:t>实测证据</a:t>
                       </a:r>
@@ -14897,7 +14897,7 @@
                             <a:srgbClr val="333333"/>
                           </a:solidFill>
                           <a:latin typeface="Arial"/>
-                          <a:ea typeface="Microsoft YaHei"/>
+                          <a:ea typeface="微软雅黑"/>
                         </a:rPr>
                         <a:t>进程内绑定，无事件传递</a:t>
                       </a:r>
@@ -14921,7 +14921,7 @@
                             <a:srgbClr val="333333"/>
                           </a:solidFill>
                           <a:latin typeface="Arial"/>
-                          <a:ea typeface="Microsoft YaHei"/>
+                          <a:ea typeface="微软雅黑"/>
                         </a:rPr>
                         <a:t>Pod E2E P99</a:t>
                       </a:r>
@@ -14945,7 +14945,7 @@
                             <a:srgbClr val="333333"/>
                           </a:solidFill>
                           <a:latin typeface="Arial"/>
-                          <a:ea typeface="Microsoft YaHei"/>
+                          <a:ea typeface="微软雅黑"/>
                         </a:rPr>
                         <a:t>s3/w3 inst3 0.45 vs 0.93 s（低 51.9%）</a:t>
                       </a:r>
@@ -14971,7 +14971,7 @@
                             <a:srgbClr val="333333"/>
                           </a:solidFill>
                           <a:latin typeface="Arial"/>
-                          <a:ea typeface="Microsoft YaHei"/>
+                          <a:ea typeface="微软雅黑"/>
                         </a:rPr>
                         <a:t>CacheAdapter 零拷贝共享</a:t>
                       </a:r>
@@ -14995,7 +14995,7 @@
                             <a:srgbClr val="333333"/>
                           </a:solidFill>
                           <a:latin typeface="Arial"/>
-                          <a:ea typeface="Microsoft YaHei"/>
+                          <a:ea typeface="微软雅黑"/>
                         </a:rPr>
                         <a:t>状态复用 / 无同步延迟</a:t>
                       </a:r>
@@ -15019,7 +15019,7 @@
                             <a:srgbClr val="333333"/>
                           </a:solidFill>
                           <a:latin typeface="Arial"/>
-                          <a:ea typeface="Microsoft YaHei"/>
+                          <a:ea typeface="微软雅黑"/>
                         </a:rPr>
                         <a:t>inst3 队列峰值 20 vs 16</a:t>
                       </a:r>
@@ -15045,7 +15045,7 @@
                             <a:srgbClr val="333333"/>
                           </a:solidFill>
                           <a:latin typeface="Arial"/>
-                          <a:ea typeface="Microsoft YaHei"/>
+                          <a:ea typeface="微软雅黑"/>
                         </a:rPr>
                         <a:t>无独立 Binder 串行段</a:t>
                       </a:r>
@@ -15069,7 +15069,7 @@
                             <a:srgbClr val="333333"/>
                           </a:solidFill>
                           <a:latin typeface="Arial"/>
-                          <a:ea typeface="Microsoft YaHei"/>
+                          <a:ea typeface="微软雅黑"/>
                         </a:rPr>
                         <a:t>有效吞吐随实例扩展</a:t>
                       </a:r>
@@ -15093,7 +15093,7 @@
                             <a:srgbClr val="333333"/>
                           </a:solidFill>
                           <a:latin typeface="Arial"/>
-                          <a:ea typeface="Microsoft YaHei"/>
+                          <a:ea typeface="微软雅黑"/>
                         </a:rPr>
                         <a:t>+17.5% vs +1.4%</a:t>
                       </a:r>
@@ -15119,7 +15119,7 @@
                             <a:srgbClr val="333333"/>
                           </a:solidFill>
                           <a:latin typeface="Arial"/>
-                          <a:ea typeface="Microsoft YaHei"/>
+                          <a:ea typeface="微软雅黑"/>
                         </a:rPr>
                         <a:t>四层容错守住不变量 I</a:t>
                       </a:r>
@@ -15143,7 +15143,7 @@
                             <a:srgbClr val="333333"/>
                           </a:solidFill>
                           <a:latin typeface="Arial"/>
-                          <a:ea typeface="Microsoft YaHei"/>
+                          <a:ea typeface="微软雅黑"/>
                         </a:rPr>
                         <a:t>绑定成功率 / 断言</a:t>
                       </a:r>
@@ -15167,7 +15167,7 @@
                             <a:srgbClr val="333333"/>
                           </a:solidFill>
                           <a:latin typeface="Arial"/>
-                          <a:ea typeface="Microsoft YaHei"/>
+                          <a:ea typeface="微软雅黑"/>
                         </a:rPr>
                         <a:t>100%；144 次 run 全过</a:t>
                       </a:r>
@@ -15217,7 +15217,7 @@
                   <a:srgbClr val="333333"/>
                 </a:solidFill>
                 <a:latin typeface="Arial"/>
-                <a:ea typeface="Microsoft YaHei"/>
+                <a:ea typeface="微软雅黑"/>
               </a:rPr>
               <a:t>▪  相关不等于归因：峰值吞吐并非全面领先</a:t>
             </a:r>
@@ -15237,7 +15237,7 @@
                   <a:srgbClr val="333333"/>
                 </a:solidFill>
                 <a:latin typeface="Arial"/>
-                <a:ea typeface="Microsoft YaHei"/>
+                <a:ea typeface="微软雅黑"/>
               </a:rPr>
               <a:t>▪  s3/w5、s4/w3 峰值吞吐低于 Gödel</a:t>
             </a:r>
@@ -15257,7 +15257,7 @@
                   <a:srgbClr val="333333"/>
                 </a:solidFill>
                 <a:latin typeface="Arial"/>
-                <a:ea typeface="Microsoft YaHei"/>
+                <a:ea typeface="微软雅黑"/>
               </a:rPr>
               <a:t>▪  收益部分来自启动更快（口径权衡）</a:t>
             </a:r>
@@ -15293,7 +15293,7 @@
                   <a:srgbClr val="6B7A8F"/>
                 </a:solidFill>
                 <a:latin typeface="Arial"/>
-                <a:ea typeface="Microsoft YaHei"/>
+                <a:ea typeface="微软雅黑"/>
               </a:rPr>
               <a:t>编码：s1–s4 = 100 / 1000 / 5000 / 10000 节点；w1–w7 = 负载强度（w2 500、w3 1000、w4 2000 pods/s 极限、w5 突发、w6 Gang、w7 异构）；inst3 = 3 实例</a:t>
             </a:r>
@@ -15329,7 +15329,7 @@
                   <a:srgbClr val="6B7A8F"/>
                 </a:solidFill>
                 <a:latin typeface="Arial"/>
-                <a:ea typeface="Microsoft YaHei"/>
+                <a:ea typeface="微软雅黑"/>
               </a:rPr>
               <a:t>23 / 26</a:t>
             </a:r>
@@ -15439,7 +15439,7 @@
                   <a:srgbClr val="0B2A4A"/>
                 </a:solidFill>
                 <a:latin typeface="Arial"/>
-                <a:ea typeface="Microsoft YaHei"/>
+                <a:ea typeface="微软雅黑"/>
               </a:rPr>
               <a:t>局限性与威胁效力</a:t>
             </a:r>
@@ -15519,7 +15519,7 @@
                   <a:srgbClr val="1F5C99"/>
                 </a:solidFill>
                 <a:latin typeface="Arial"/>
-                <a:ea typeface="Microsoft YaHei"/>
+                <a:ea typeface="微软雅黑"/>
               </a:rPr>
               <a:t>结论在“跨调度器相对比较”上成立，绝对数值不外推到生产</a:t>
             </a:r>
@@ -15645,7 +15645,7 @@
                   <a:srgbClr val="0B2A4A"/>
                 </a:solidFill>
                 <a:latin typeface="Arial"/>
-                <a:ea typeface="Microsoft YaHei"/>
+                <a:ea typeface="微软雅黑"/>
               </a:rPr>
               <a:t>KWOK 仿真</a:t>
             </a:r>
@@ -15665,7 +15665,7 @@
                   <a:srgbClr val="6B7A8F"/>
                 </a:solidFill>
                 <a:latin typeface="Arial"/>
-                <a:ea typeface="Microsoft YaHei"/>
+                <a:ea typeface="微软雅黑"/>
               </a:rPr>
               <a:t>无法反映真实资源竞争与 IO</a:t>
             </a:r>
@@ -15791,7 +15791,7 @@
                   <a:srgbClr val="0B2A4A"/>
                 </a:solidFill>
                 <a:latin typeface="Arial"/>
-                <a:ea typeface="Microsoft YaHei"/>
+                <a:ea typeface="微软雅黑"/>
               </a:rPr>
               <a:t>Gang 延迟口径</a:t>
             </a:r>
@@ -15811,7 +15811,7 @@
                   <a:srgbClr val="6B7A8F"/>
                 </a:solidFill>
                 <a:latin typeface="Arial"/>
-                <a:ea typeface="Microsoft YaHei"/>
+                <a:ea typeface="微软雅黑"/>
               </a:rPr>
               <a:t>w6 尾延迟反向，未分离计时</a:t>
             </a:r>
@@ -15937,7 +15937,7 @@
                   <a:srgbClr val="0B2A4A"/>
                 </a:solidFill>
                 <a:latin typeface="Arial"/>
-                <a:ea typeface="Microsoft YaHei"/>
+                <a:ea typeface="微软雅黑"/>
               </a:rPr>
               <a:t>固定实例数</a:t>
             </a:r>
@@ -15957,7 +15957,7 @@
                   <a:srgbClr val="6B7A8F"/>
                 </a:solidFill>
                 <a:latin typeface="Arial"/>
-                <a:ea typeface="Microsoft YaHei"/>
+                <a:ea typeface="微软雅黑"/>
               </a:rPr>
               <a:t>s3→s4 未同步扩容</a:t>
             </a:r>
@@ -16083,7 +16083,7 @@
                   <a:srgbClr val="0B2A4A"/>
                 </a:solidFill>
                 <a:latin typeface="Arial"/>
-                <a:ea typeface="Microsoft YaHei"/>
+                <a:ea typeface="微软雅黑"/>
               </a:rPr>
               <a:t>资源公平</a:t>
             </a:r>
@@ -16103,7 +16103,7 @@
                   <a:srgbClr val="6B7A8F"/>
                 </a:solidFill>
                 <a:latin typeface="Arial"/>
-                <a:ea typeface="Microsoft YaHei"/>
+                <a:ea typeface="微软雅黑"/>
               </a:rPr>
               <a:t>每 Deployment 同规格，对 ENO 略不利</a:t>
             </a:r>
@@ -16229,7 +16229,7 @@
                   <a:srgbClr val="0B2A4A"/>
                 </a:solidFill>
                 <a:latin typeface="Arial"/>
-                <a:ea typeface="Microsoft YaHei"/>
+                <a:ea typeface="微软雅黑"/>
               </a:rPr>
               <a:t>Volcano 指标</a:t>
             </a:r>
@@ -16249,7 +16249,7 @@
                   <a:srgbClr val="6B7A8F"/>
                 </a:solidFill>
                 <a:latin typeface="Arial"/>
-                <a:ea typeface="Microsoft YaHei"/>
+                <a:ea typeface="微软雅黑"/>
               </a:rPr>
               <a:t>测量对象与粒度不完全等价</a:t>
             </a:r>
@@ -16375,7 +16375,7 @@
                   <a:srgbClr val="0B2A4A"/>
                 </a:solidFill>
                 <a:latin typeface="Arial"/>
-                <a:ea typeface="Microsoft YaHei"/>
+                <a:ea typeface="微软雅黑"/>
               </a:rPr>
               <a:t>幸存者偏差</a:t>
             </a:r>
@@ -16395,7 +16395,7 @@
                   <a:srgbClr val="6B7A8F"/>
                 </a:solidFill>
                 <a:latin typeface="Arial"/>
-                <a:ea typeface="Microsoft YaHei"/>
+                <a:ea typeface="微软雅黑"/>
               </a:rPr>
               <a:t>c/d/e 的 P99 不做数值对齐</a:t>
             </a:r>
@@ -16431,7 +16431,7 @@
                   <a:srgbClr val="6B7A8F"/>
                 </a:solidFill>
                 <a:latin typeface="Arial"/>
-                <a:ea typeface="Microsoft YaHei"/>
+                <a:ea typeface="微软雅黑"/>
               </a:rPr>
               <a:t>24 / 26</a:t>
             </a:r>
@@ -16541,7 +16541,7 @@
                   <a:srgbClr val="0B2A4A"/>
                 </a:solidFill>
                 <a:latin typeface="Arial"/>
-                <a:ea typeface="Microsoft YaHei"/>
+                <a:ea typeface="微软雅黑"/>
               </a:rPr>
               <a:t>结论</a:t>
             </a:r>
@@ -16621,7 +16621,7 @@
                   <a:srgbClr val="1F5C99"/>
                 </a:solidFill>
                 <a:latin typeface="Arial"/>
-                <a:ea typeface="Microsoft YaHei"/>
+                <a:ea typeface="微软雅黑"/>
               </a:rPr>
               <a:t>架构创新与一致性创新都有可复现实验支撑，且实现了向后兼容的工程落地</a:t>
             </a:r>
@@ -16747,7 +16747,7 @@
                   <a:srgbClr val="0B2A4A"/>
                 </a:solidFill>
                 <a:latin typeface="Arial"/>
-                <a:ea typeface="Microsoft YaHei"/>
+                <a:ea typeface="微软雅黑"/>
               </a:rPr>
               <a:t>创新 1 · ENO</a:t>
             </a:r>
@@ -16767,7 +16767,7 @@
                   <a:srgbClr val="6B7A8F"/>
                 </a:solidFill>
                 <a:latin typeface="Arial"/>
-                <a:ea typeface="Microsoft YaHei"/>
+                <a:ea typeface="微软雅黑"/>
               </a:rPr>
               <a:t>Binder 进进程内 + CacheAdapter</a:t>
             </a:r>
@@ -16893,7 +16893,7 @@
                   <a:srgbClr val="0B2A4A"/>
                 </a:solidFill>
                 <a:latin typeface="Arial"/>
-                <a:ea typeface="Microsoft YaHei"/>
+                <a:ea typeface="微软雅黑"/>
               </a:rPr>
               <a:t>创新 2 · 四层容错</a:t>
             </a:r>
@@ -16913,7 +16913,7 @@
                   <a:srgbClr val="6B7A8F"/>
                 </a:solidFill>
                 <a:latin typeface="Arial"/>
-                <a:ea typeface="Microsoft YaHei"/>
+                <a:ea typeface="微软雅黑"/>
               </a:rPr>
               <a:t>不变量 I 的完整证明要点</a:t>
             </a:r>
@@ -17039,7 +17039,7 @@
                   <a:srgbClr val="0B2A4A"/>
                 </a:solidFill>
                 <a:latin typeface="Arial"/>
-                <a:ea typeface="Microsoft YaHei"/>
+                <a:ea typeface="微软雅黑"/>
               </a:rPr>
               <a:t>证据 1 · 规模</a:t>
             </a:r>
@@ -17059,7 +17059,7 @@
                   <a:srgbClr val="6B7A8F"/>
                 </a:solidFill>
                 <a:latin typeface="Arial"/>
-                <a:ea typeface="Microsoft YaHei"/>
+                <a:ea typeface="微软雅黑"/>
               </a:rPr>
               <a:t>16 场景 / 144 run / 100% 成功率</a:t>
             </a:r>
@@ -17185,7 +17185,7 @@
                   <a:srgbClr val="0B2A4A"/>
                 </a:solidFill>
                 <a:latin typeface="Arial"/>
-                <a:ea typeface="Microsoft YaHei"/>
+                <a:ea typeface="微软雅黑"/>
               </a:rPr>
               <a:t>证据 2 · 性能</a:t>
             </a:r>
@@ -17205,7 +17205,7 @@
                   <a:srgbClr val="6B7A8F"/>
                 </a:solidFill>
                 <a:latin typeface="Arial"/>
-                <a:ea typeface="Microsoft YaHei"/>
+                <a:ea typeface="微软雅黑"/>
               </a:rPr>
               <a:t>平均 +11.9%；P99 最高 -82.9%</a:t>
             </a:r>
@@ -17331,7 +17331,7 @@
                   <a:srgbClr val="0B2A4A"/>
                 </a:solidFill>
                 <a:latin typeface="Arial"/>
-                <a:ea typeface="Microsoft YaHei"/>
+                <a:ea typeface="微软雅黑"/>
               </a:rPr>
               <a:t>证据 3 · 扩展</a:t>
             </a:r>
@@ -17351,7 +17351,7 @@
                   <a:srgbClr val="6B7A8F"/>
                 </a:solidFill>
                 <a:latin typeface="Arial"/>
-                <a:ea typeface="Microsoft YaHei"/>
+                <a:ea typeface="微软雅黑"/>
               </a:rPr>
               <a:t>实例 1→3：+17.5% 对 +1.4%</a:t>
             </a:r>
@@ -17477,7 +17477,7 @@
                   <a:srgbClr val="0B2A4A"/>
                 </a:solidFill>
                 <a:latin typeface="Arial"/>
-                <a:ea typeface="Microsoft YaHei"/>
+                <a:ea typeface="微软雅黑"/>
               </a:rPr>
               <a:t>价值 · 落地</a:t>
             </a:r>
@@ -17497,7 +17497,7 @@
                   <a:srgbClr val="6B7A8F"/>
                 </a:solidFill>
                 <a:latin typeface="Arial"/>
-                <a:ea typeface="Microsoft YaHei"/>
+                <a:ea typeface="微软雅黑"/>
               </a:rPr>
               <a:t>不改 API、保留开关、基准开源</a:t>
             </a:r>
@@ -17533,7 +17533,7 @@
                   <a:srgbClr val="6B7A8F"/>
                 </a:solidFill>
                 <a:latin typeface="Arial"/>
-                <a:ea typeface="Microsoft YaHei"/>
+                <a:ea typeface="微软雅黑"/>
               </a:rPr>
               <a:t>25 / 26</a:t>
             </a:r>
@@ -17554,7 +17554,7 @@
     <p:bg>
       <p:bgPr>
         <a:solidFill>
-          <a:srgbClr val="0B2A4A"/>
+          <a:srgbClr val="FFFFFF"/>
         </a:solidFill>
         <a:effectLst/>
       </p:bgPr>
@@ -17574,14 +17574,14 @@
         </p:nvSpPr>
         <p:spPr>
           <a:xfrm>
-            <a:off x="384048" y="420624"/>
-            <a:ext cx="77724" cy="475488"/>
+            <a:off x="1197864" y="2212848"/>
+            <a:ext cx="9866376" cy="20116"/>
           </a:xfrm>
           <a:prstGeom prst="rect">
             <a:avLst/>
           </a:prstGeom>
           <a:solidFill>
-            <a:srgbClr val="E8833A"/>
+            <a:srgbClr val="0B2A4A"/>
           </a:solidFill>
           <a:ln>
             <a:noFill/>
@@ -17618,8 +17618,8 @@
         </p:nvSpPr>
         <p:spPr>
           <a:xfrm>
-            <a:off x="566928" y="329184"/>
-            <a:ext cx="11064240" cy="713232"/>
+            <a:off x="914400" y="2395728"/>
+            <a:ext cx="10332720" cy="914400"/>
           </a:xfrm>
           <a:prstGeom prst="rect">
             <a:avLst/>
@@ -17632,18 +17632,14 @@
           </a:bodyPr>
           <a:lstStyle/>
           <a:p>
-            <a:pPr algn="l">
-              <a:lnSpc>
-                <a:spcPct val="105000"/>
-              </a:lnSpc>
-            </a:pPr>
-            <a:r>
-              <a:rPr sz="2700" b="1">
+            <a:pPr algn="ctr"/>
+            <a:r>
+              <a:rPr sz="3400" b="1">
                 <a:solidFill>
                   <a:srgbClr val="0B2A4A"/>
                 </a:solidFill>
                 <a:latin typeface="Arial"/>
-                <a:ea typeface="Microsoft YaHei"/>
+                <a:ea typeface="微软雅黑"/>
               </a:rPr>
               <a:t>谢谢各位老师，请批评指正</a:t>
             </a:r>
@@ -17652,20 +17648,109 @@
       </p:sp>
       <p:sp>
         <p:nvSpPr>
-          <p:cNvPr id="4" name="Rectangle 3"/>
+          <p:cNvPr id="4" name="TextBox 3"/>
+          <p:cNvSpPr txBox="1"/>
+          <p:nvPr/>
+        </p:nvSpPr>
+        <p:spPr>
+          <a:xfrm>
+            <a:off x="914400" y="3429000"/>
+            <a:ext cx="10332720" cy="457200"/>
+          </a:xfrm>
+          <a:prstGeom prst="rect">
+            <a:avLst/>
+          </a:prstGeom>
+          <a:noFill/>
+        </p:spPr>
+        <p:txBody>
+          <a:bodyPr wrap="square" anchor="t" lIns="0" rIns="0" tIns="0" bIns="0">
+            <a:spAutoFit/>
+          </a:bodyPr>
+          <a:lstStyle/>
+          <a:p>
+            <a:pPr algn="ctr"/>
+            <a:r>
+              <a:rPr sz="1600" b="0">
+                <a:solidFill>
+                  <a:srgbClr val="6B7A8F"/>
+                </a:solidFill>
+                <a:latin typeface="Arial"/>
+                <a:ea typeface="微软雅黑"/>
+              </a:rPr>
+              <a:t>基于 etcd 的分布式 Kubernetes 调度器研究与实现</a:t>
+            </a:r>
+          </a:p>
+        </p:txBody>
+      </p:sp>
+      <p:sp>
+        <p:nvSpPr>
+          <p:cNvPr id="5" name="TextBox 4"/>
+          <p:cNvSpPr txBox="1"/>
+          <p:nvPr/>
+        </p:nvSpPr>
+        <p:spPr>
+          <a:xfrm>
+            <a:off x="914400" y="4343400"/>
+            <a:ext cx="10332720" cy="731520"/>
+          </a:xfrm>
+          <a:prstGeom prst="rect">
+            <a:avLst/>
+          </a:prstGeom>
+          <a:noFill/>
+        </p:spPr>
+        <p:txBody>
+          <a:bodyPr wrap="square" anchor="t" lIns="0" rIns="0" tIns="0" bIns="0">
+            <a:spAutoFit/>
+          </a:bodyPr>
+          <a:lstStyle/>
+          <a:p>
+            <a:pPr algn="ctr"/>
+            <a:r>
+              <a:rPr sz="1300" b="0">
+                <a:solidFill>
+                  <a:srgbClr val="6B7A8F"/>
+                </a:solidFill>
+                <a:latin typeface="Arial"/>
+                <a:ea typeface="微软雅黑"/>
+              </a:rPr>
+              <a:t>答辩人：[姓名]</a:t>
+            </a:r>
+          </a:p>
+          <a:p>
+            <a:pPr algn="ctr">
+              <a:spcBef>
+                <a:spcPts val="400"/>
+              </a:spcBef>
+            </a:pPr>
+            <a:r>
+              <a:rPr sz="1300" b="0">
+                <a:solidFill>
+                  <a:srgbClr val="6B7A8F"/>
+                </a:solidFill>
+                <a:latin typeface="Arial"/>
+                <a:ea typeface="微软雅黑"/>
+              </a:rPr>
+              <a:t>联系方式：[邮箱]</a:t>
+            </a:r>
+          </a:p>
+        </p:txBody>
+      </p:sp>
+      <p:sp>
+        <p:nvSpPr>
+          <p:cNvPr id="6" name="Rectangle 5"/>
           <p:cNvSpPr/>
           <p:nvPr/>
         </p:nvSpPr>
         <p:spPr>
           <a:xfrm>
-            <a:off x="566928" y="1298448"/>
-            <a:ext cx="27432" cy="310896"/>
+            <a:off x="1197864" y="5074920"/>
+            <a:ext cx="9866376" cy="20116"/>
           </a:xfrm>
           <a:prstGeom prst="rect">
             <a:avLst/>
           </a:prstGeom>
           <a:solidFill>
-            <a:srgbClr val="1F5C99"/>
+            <a:srgbClr val="0B2A4A"/>
           </a:solidFill>
           <a:ln>
             <a:noFill/>
@@ -17696,86 +17781,58 @@
       </p:sp>
       <p:sp>
         <p:nvSpPr>
-          <p:cNvPr id="5" name="TextBox 4"/>
+          <p:cNvPr id="7" name="Rectangle 6"/>
+          <p:cNvSpPr/>
+          <p:nvPr/>
+        </p:nvSpPr>
+        <p:spPr>
+          <a:xfrm>
+            <a:off x="36576" y="6748272"/>
+            <a:ext cx="12198096" cy="45720"/>
+          </a:xfrm>
+          <a:prstGeom prst="rect">
+            <a:avLst/>
+          </a:prstGeom>
+          <a:solidFill>
+            <a:srgbClr val="0B2A4A"/>
+          </a:solidFill>
+          <a:ln>
+            <a:noFill/>
+          </a:ln>
+          <a:effectLst/>
+        </p:spPr>
+        <p:style>
+          <a:lnRef idx="1">
+            <a:schemeClr val="accent1"/>
+          </a:lnRef>
+          <a:fillRef idx="3">
+            <a:schemeClr val="accent1"/>
+          </a:fillRef>
+          <a:effectRef idx="2">
+            <a:schemeClr val="accent1"/>
+          </a:effectRef>
+          <a:fontRef idx="minor">
+            <a:schemeClr val="lt1"/>
+          </a:fontRef>
+        </p:style>
+        <p:txBody>
+          <a:bodyPr rtlCol="0" anchor="ctr"/>
+          <a:lstStyle/>
+          <a:p>
+            <a:pPr algn="ctr"/>
+          </a:p>
+        </p:txBody>
+      </p:sp>
+      <p:sp>
+        <p:nvSpPr>
+          <p:cNvPr id="8" name="TextBox 7"/>
           <p:cNvSpPr txBox="1"/>
           <p:nvPr/>
         </p:nvSpPr>
         <p:spPr>
           <a:xfrm>
-            <a:off x="713232" y="1271016"/>
-            <a:ext cx="10972800" cy="384048"/>
-          </a:xfrm>
-          <a:prstGeom prst="rect">
-            <a:avLst/>
-          </a:prstGeom>
-          <a:noFill/>
-        </p:spPr>
-        <p:txBody>
-          <a:bodyPr wrap="square" anchor="ctr" lIns="0" rIns="0" tIns="0" bIns="0">
-            <a:spAutoFit/>
-          </a:bodyPr>
-          <a:lstStyle/>
-          <a:p>
-            <a:pPr algn="l"/>
-            <a:r>
-              <a:rPr sz="1550" b="1">
-                <a:solidFill>
-                  <a:srgbClr val="1F5C99"/>
-                </a:solidFill>
-                <a:latin typeface="Arial"/>
-                <a:ea typeface="Microsoft YaHei"/>
-              </a:rPr>
-              <a:t>基于 etcd 的分布式 Kubernetes 调度器研究与实现</a:t>
-            </a:r>
-          </a:p>
-        </p:txBody>
-      </p:sp>
-      <p:sp>
-        <p:nvSpPr>
-          <p:cNvPr id="6" name="TextBox 5"/>
-          <p:cNvSpPr txBox="1"/>
-          <p:nvPr/>
-        </p:nvSpPr>
-        <p:spPr>
-          <a:xfrm>
-            <a:off x="914400" y="2377440"/>
-            <a:ext cx="10332720" cy="1097280"/>
-          </a:xfrm>
-          <a:prstGeom prst="rect">
-            <a:avLst/>
-          </a:prstGeom>
-          <a:noFill/>
-        </p:spPr>
-        <p:txBody>
-          <a:bodyPr wrap="square" anchor="ctr" lIns="0" rIns="0" tIns="0" bIns="0">
-            <a:spAutoFit/>
-          </a:bodyPr>
-          <a:lstStyle/>
-          <a:p>
-            <a:pPr algn="ctr"/>
-            <a:r>
-              <a:rPr sz="3400" b="1">
-                <a:solidFill>
-                  <a:srgbClr val="FFFFFF"/>
-                </a:solidFill>
-                <a:latin typeface="Arial"/>
-                <a:ea typeface="Microsoft YaHei"/>
-              </a:rPr>
-              <a:t>谢谢各位老师，请批评指正</a:t>
-            </a:r>
-          </a:p>
-        </p:txBody>
-      </p:sp>
-      <p:sp>
-        <p:nvSpPr>
-          <p:cNvPr id="7" name="TextBox 6"/>
-          <p:cNvSpPr txBox="1"/>
-          <p:nvPr/>
-        </p:nvSpPr>
-        <p:spPr>
-          <a:xfrm>
-            <a:off x="914400" y="3611880"/>
-            <a:ext cx="10332720" cy="548640"/>
+            <a:off x="10780776" y="6345936"/>
+            <a:ext cx="850392" cy="219456"/>
           </a:xfrm>
           <a:prstGeom prst="rect">
             <a:avLst/>
@@ -17788,103 +17845,14 @@
           </a:bodyPr>
           <a:lstStyle/>
           <a:p>
-            <a:pPr algn="ctr"/>
-            <a:r>
-              <a:rPr sz="1500" b="0">
-                <a:solidFill>
-                  <a:srgbClr val="E8833A"/>
+            <a:pPr algn="r"/>
+            <a:r>
+              <a:rPr sz="950" b="0">
+                <a:solidFill>
+                  <a:srgbClr val="6B7A8F"/>
                 </a:solidFill>
                 <a:latin typeface="Arial"/>
-                <a:ea typeface="Microsoft YaHei"/>
-              </a:rPr>
-              <a:t>基于 etcd 的分布式 Kubernetes 调度器研究与实现</a:t>
-            </a:r>
-          </a:p>
-        </p:txBody>
-      </p:sp>
-      <p:sp>
-        <p:nvSpPr>
-          <p:cNvPr id="8" name="TextBox 7"/>
-          <p:cNvSpPr txBox="1"/>
-          <p:nvPr/>
-        </p:nvSpPr>
-        <p:spPr>
-          <a:xfrm>
-            <a:off x="914400" y="4754880"/>
-            <a:ext cx="10332720" cy="822960"/>
-          </a:xfrm>
-          <a:prstGeom prst="rect">
-            <a:avLst/>
-          </a:prstGeom>
-          <a:noFill/>
-        </p:spPr>
-        <p:txBody>
-          <a:bodyPr wrap="square" anchor="t" lIns="0" rIns="0" tIns="0" bIns="0">
-            <a:spAutoFit/>
-          </a:bodyPr>
-          <a:lstStyle/>
-          <a:p>
-            <a:pPr algn="ctr"/>
-            <a:r>
-              <a:rPr sz="1250" b="0">
-                <a:solidFill>
-                  <a:srgbClr val="C9D4E2"/>
-                </a:solidFill>
-                <a:latin typeface="Arial"/>
-                <a:ea typeface="Microsoft YaHei"/>
-              </a:rPr>
-              <a:t>答辩人：[姓名]</a:t>
-            </a:r>
-          </a:p>
-          <a:p>
-            <a:pPr algn="ctr">
-              <a:spcBef>
-                <a:spcPts val="400"/>
-              </a:spcBef>
-            </a:pPr>
-            <a:r>
-              <a:rPr sz="1250" b="0">
-                <a:solidFill>
-                  <a:srgbClr val="C9D4E2"/>
-                </a:solidFill>
-                <a:latin typeface="Arial"/>
-                <a:ea typeface="Microsoft YaHei"/>
-              </a:rPr>
-              <a:t>联系方式：[邮箱]</a:t>
-            </a:r>
-          </a:p>
-        </p:txBody>
-      </p:sp>
-      <p:sp>
-        <p:nvSpPr>
-          <p:cNvPr id="9" name="TextBox 8"/>
-          <p:cNvSpPr txBox="1"/>
-          <p:nvPr/>
-        </p:nvSpPr>
-        <p:spPr>
-          <a:xfrm>
-            <a:off x="10780776" y="6345936"/>
-            <a:ext cx="850392" cy="219456"/>
-          </a:xfrm>
-          <a:prstGeom prst="rect">
-            <a:avLst/>
-          </a:prstGeom>
-          <a:noFill/>
-        </p:spPr>
-        <p:txBody>
-          <a:bodyPr wrap="square" anchor="t" lIns="0" rIns="0" tIns="0" bIns="0">
-            <a:spAutoFit/>
-          </a:bodyPr>
-          <a:lstStyle/>
-          <a:p>
-            <a:pPr algn="r"/>
-            <a:r>
-              <a:rPr sz="950" b="0">
-                <a:solidFill>
-                  <a:srgbClr val="8FA3B8"/>
-                </a:solidFill>
-                <a:latin typeface="Arial"/>
-                <a:ea typeface="Microsoft YaHei"/>
+                <a:ea typeface="微软雅黑"/>
               </a:rPr>
               <a:t>26 / 26</a:t>
             </a:r>
@@ -17994,7 +17962,7 @@
                   <a:srgbClr val="0B2A4A"/>
                 </a:solidFill>
                 <a:latin typeface="Arial"/>
-                <a:ea typeface="Microsoft YaHei"/>
+                <a:ea typeface="微软雅黑"/>
               </a:rPr>
               <a:t>16 场景完整数据（摘要）</a:t>
             </a:r>
@@ -18074,7 +18042,7 @@
                   <a:srgbClr val="1F5C99"/>
                 </a:solidFill>
                 <a:latin typeface="Arial"/>
-                <a:ea typeface="Microsoft YaHei"/>
+                <a:ea typeface="微软雅黑"/>
               </a:rPr>
               <a:t>有效吞吐 / P99 / Pod E2E P99 / 队列堆积峰值（n=3 中位数）</a:t>
             </a:r>
@@ -18119,7 +18087,7 @@
                             <a:srgbClr val="FFFFFF"/>
                           </a:solidFill>
                           <a:latin typeface="Arial"/>
-                          <a:ea typeface="Microsoft YaHei"/>
+                          <a:ea typeface="微软雅黑"/>
                         </a:rPr>
                         <a:t>场景</a:t>
                       </a:r>
@@ -18143,7 +18111,7 @@
                             <a:srgbClr val="FFFFFF"/>
                           </a:solidFill>
                           <a:latin typeface="Arial"/>
-                          <a:ea typeface="Microsoft YaHei"/>
+                          <a:ea typeface="微软雅黑"/>
                         </a:rPr>
                         <a:t>ENO 吞吐</a:t>
                       </a:r>
@@ -18167,7 +18135,7 @@
                             <a:srgbClr val="FFFFFF"/>
                           </a:solidFill>
                           <a:latin typeface="Arial"/>
-                          <a:ea typeface="Microsoft YaHei"/>
+                          <a:ea typeface="微软雅黑"/>
                         </a:rPr>
                         <a:t>Gödel 吞吐</a:t>
                       </a:r>
@@ -18191,7 +18159,7 @@
                             <a:srgbClr val="FFFFFF"/>
                           </a:solidFill>
                           <a:latin typeface="Arial"/>
-                          <a:ea typeface="Microsoft YaHei"/>
+                          <a:ea typeface="微软雅黑"/>
                         </a:rPr>
                         <a:t>ENO P99</a:t>
                       </a:r>
@@ -18215,7 +18183,7 @@
                             <a:srgbClr val="FFFFFF"/>
                           </a:solidFill>
                           <a:latin typeface="Arial"/>
-                          <a:ea typeface="Microsoft YaHei"/>
+                          <a:ea typeface="微软雅黑"/>
                         </a:rPr>
                         <a:t>Gödel P99</a:t>
                       </a:r>
@@ -18241,7 +18209,7 @@
                             <a:srgbClr val="333333"/>
                           </a:solidFill>
                           <a:latin typeface="Arial"/>
-                          <a:ea typeface="Microsoft YaHei"/>
+                          <a:ea typeface="微软雅黑"/>
                         </a:rPr>
                         <a:t>s2/w2</a:t>
                       </a:r>
@@ -18265,7 +18233,7 @@
                             <a:srgbClr val="333333"/>
                           </a:solidFill>
                           <a:latin typeface="Arial"/>
-                          <a:ea typeface="Microsoft YaHei"/>
+                          <a:ea typeface="微软雅黑"/>
                         </a:rPr>
                         <a:t>331.1</a:t>
                       </a:r>
@@ -18289,7 +18257,7 @@
                             <a:srgbClr val="333333"/>
                           </a:solidFill>
                           <a:latin typeface="Arial"/>
-                          <a:ea typeface="Microsoft YaHei"/>
+                          <a:ea typeface="微软雅黑"/>
                         </a:rPr>
                         <a:t>324.7</a:t>
                       </a:r>
@@ -18313,7 +18281,7 @@
                             <a:srgbClr val="333333"/>
                           </a:solidFill>
                           <a:latin typeface="Arial"/>
-                          <a:ea typeface="Microsoft YaHei"/>
+                          <a:ea typeface="微软雅黑"/>
                         </a:rPr>
                         <a:t>0.16</a:t>
                       </a:r>
@@ -18337,7 +18305,7 @@
                             <a:srgbClr val="333333"/>
                           </a:solidFill>
                           <a:latin typeface="Arial"/>
-                          <a:ea typeface="Microsoft YaHei"/>
+                          <a:ea typeface="微软雅黑"/>
                         </a:rPr>
                         <a:t>0.11</a:t>
                       </a:r>
@@ -18363,7 +18331,7 @@
                             <a:srgbClr val="333333"/>
                           </a:solidFill>
                           <a:latin typeface="Arial"/>
-                          <a:ea typeface="Microsoft YaHei"/>
+                          <a:ea typeface="微软雅黑"/>
                         </a:rPr>
                         <a:t>s2/w3</a:t>
                       </a:r>
@@ -18387,7 +18355,7 @@
                             <a:srgbClr val="333333"/>
                           </a:solidFill>
                           <a:latin typeface="Arial"/>
-                          <a:ea typeface="Microsoft YaHei"/>
+                          <a:ea typeface="微软雅黑"/>
                         </a:rPr>
                         <a:t>352.1</a:t>
                       </a:r>
@@ -18411,7 +18379,7 @@
                             <a:srgbClr val="333333"/>
                           </a:solidFill>
                           <a:latin typeface="Arial"/>
-                          <a:ea typeface="Microsoft YaHei"/>
+                          <a:ea typeface="微软雅黑"/>
                         </a:rPr>
                         <a:t>286.5</a:t>
                       </a:r>
@@ -18435,7 +18403,7 @@
                             <a:srgbClr val="333333"/>
                           </a:solidFill>
                           <a:latin typeface="Arial"/>
-                          <a:ea typeface="Microsoft YaHei"/>
+                          <a:ea typeface="微软雅黑"/>
                         </a:rPr>
                         <a:t>4.00</a:t>
                       </a:r>
@@ -18459,7 +18427,7 @@
                             <a:srgbClr val="333333"/>
                           </a:solidFill>
                           <a:latin typeface="Arial"/>
-                          <a:ea typeface="Microsoft YaHei"/>
+                          <a:ea typeface="微软雅黑"/>
                         </a:rPr>
                         <a:t>23.48</a:t>
                       </a:r>
@@ -18485,7 +18453,7 @@
                             <a:srgbClr val="333333"/>
                           </a:solidFill>
                           <a:latin typeface="Arial"/>
-                          <a:ea typeface="Microsoft YaHei"/>
+                          <a:ea typeface="微软雅黑"/>
                         </a:rPr>
                         <a:t>s3/w3 inst1</a:t>
                       </a:r>
@@ -18509,7 +18477,7 @@
                             <a:srgbClr val="333333"/>
                           </a:solidFill>
                           <a:latin typeface="Arial"/>
-                          <a:ea typeface="Microsoft YaHei"/>
+                          <a:ea typeface="微软雅黑"/>
                         </a:rPr>
                         <a:t>297.6</a:t>
                       </a:r>
@@ -18533,7 +18501,7 @@
                             <a:srgbClr val="333333"/>
                           </a:solidFill>
                           <a:latin typeface="Arial"/>
-                          <a:ea typeface="Microsoft YaHei"/>
+                          <a:ea typeface="微软雅黑"/>
                         </a:rPr>
                         <a:t>283.3</a:t>
                       </a:r>
@@ -18557,7 +18525,7 @@
                             <a:srgbClr val="333333"/>
                           </a:solidFill>
                           <a:latin typeface="Arial"/>
-                          <a:ea typeface="Microsoft YaHei"/>
+                          <a:ea typeface="微软雅黑"/>
                         </a:rPr>
                         <a:t>16.22</a:t>
                       </a:r>
@@ -18581,7 +18549,7 @@
                             <a:srgbClr val="333333"/>
                           </a:solidFill>
                           <a:latin typeface="Arial"/>
-                          <a:ea typeface="Microsoft YaHei"/>
+                          <a:ea typeface="微软雅黑"/>
                         </a:rPr>
                         <a:t>32.57</a:t>
                       </a:r>
@@ -18607,7 +18575,7 @@
                             <a:srgbClr val="333333"/>
                           </a:solidFill>
                           <a:latin typeface="Arial"/>
-                          <a:ea typeface="Microsoft YaHei"/>
+                          <a:ea typeface="微软雅黑"/>
                         </a:rPr>
                         <a:t>s3/w3 inst3</a:t>
                       </a:r>
@@ -18631,7 +18599,7 @@
                             <a:srgbClr val="333333"/>
                           </a:solidFill>
                           <a:latin typeface="Arial"/>
-                          <a:ea typeface="Microsoft YaHei"/>
+                          <a:ea typeface="微软雅黑"/>
                         </a:rPr>
                         <a:t>349.7</a:t>
                       </a:r>
@@ -18655,7 +18623,7 @@
                             <a:srgbClr val="333333"/>
                           </a:solidFill>
                           <a:latin typeface="Arial"/>
-                          <a:ea typeface="Microsoft YaHei"/>
+                          <a:ea typeface="微软雅黑"/>
                         </a:rPr>
                         <a:t>287.4</a:t>
                       </a:r>
@@ -18679,7 +18647,7 @@
                             <a:srgbClr val="333333"/>
                           </a:solidFill>
                           <a:latin typeface="Arial"/>
-                          <a:ea typeface="Microsoft YaHei"/>
+                          <a:ea typeface="微软雅黑"/>
                         </a:rPr>
                         <a:t>0.13</a:t>
                       </a:r>
@@ -18703,7 +18671,7 @@
                             <a:srgbClr val="333333"/>
                           </a:solidFill>
                           <a:latin typeface="Arial"/>
-                          <a:ea typeface="Microsoft YaHei"/>
+                          <a:ea typeface="微软雅黑"/>
                         </a:rPr>
                         <a:t>0.15</a:t>
                       </a:r>
@@ -18729,7 +18697,7 @@
                             <a:srgbClr val="333333"/>
                           </a:solidFill>
                           <a:latin typeface="Arial"/>
-                          <a:ea typeface="Microsoft YaHei"/>
+                          <a:ea typeface="微软雅黑"/>
                         </a:rPr>
                         <a:t>s4/w3 inst3</a:t>
                       </a:r>
@@ -18753,7 +18721,7 @@
                             <a:srgbClr val="333333"/>
                           </a:solidFill>
                           <a:latin typeface="Arial"/>
-                          <a:ea typeface="Microsoft YaHei"/>
+                          <a:ea typeface="微软雅黑"/>
                         </a:rPr>
                         <a:t>296.7</a:t>
                       </a:r>
@@ -18777,7 +18745,7 @@
                             <a:srgbClr val="333333"/>
                           </a:solidFill>
                           <a:latin typeface="Arial"/>
-                          <a:ea typeface="Microsoft YaHei"/>
+                          <a:ea typeface="微软雅黑"/>
                         </a:rPr>
                         <a:t>280.9</a:t>
                       </a:r>
@@ -18801,7 +18769,7 @@
                             <a:srgbClr val="333333"/>
                           </a:solidFill>
                           <a:latin typeface="Arial"/>
-                          <a:ea typeface="Microsoft YaHei"/>
+                          <a:ea typeface="微软雅黑"/>
                         </a:rPr>
                         <a:t>0.19</a:t>
                       </a:r>
@@ -18825,7 +18793,7 @@
                             <a:srgbClr val="333333"/>
                           </a:solidFill>
                           <a:latin typeface="Arial"/>
-                          <a:ea typeface="Microsoft YaHei"/>
+                          <a:ea typeface="微软雅黑"/>
                         </a:rPr>
                         <a:t>0.28</a:t>
                       </a:r>
@@ -18851,7 +18819,7 @@
                             <a:srgbClr val="333333"/>
                           </a:solidFill>
                           <a:latin typeface="Arial"/>
-                          <a:ea typeface="Microsoft YaHei"/>
+                          <a:ea typeface="微软雅黑"/>
                         </a:rPr>
                         <a:t>s4/w7 inst3</a:t>
                       </a:r>
@@ -18875,7 +18843,7 @@
                             <a:srgbClr val="333333"/>
                           </a:solidFill>
                           <a:latin typeface="Arial"/>
-                          <a:ea typeface="Microsoft YaHei"/>
+                          <a:ea typeface="微软雅黑"/>
                         </a:rPr>
                         <a:t>271.7</a:t>
                       </a:r>
@@ -18899,7 +18867,7 @@
                             <a:srgbClr val="333333"/>
                           </a:solidFill>
                           <a:latin typeface="Arial"/>
-                          <a:ea typeface="Microsoft YaHei"/>
+                          <a:ea typeface="微软雅黑"/>
                         </a:rPr>
                         <a:t>271.7</a:t>
                       </a:r>
@@ -18923,7 +18891,7 @@
                             <a:srgbClr val="333333"/>
                           </a:solidFill>
                           <a:latin typeface="Arial"/>
-                          <a:ea typeface="Microsoft YaHei"/>
+                          <a:ea typeface="微软雅黑"/>
                         </a:rPr>
                         <a:t>0.06</a:t>
                       </a:r>
@@ -18947,7 +18915,7 @@
                             <a:srgbClr val="333333"/>
                           </a:solidFill>
                           <a:latin typeface="Arial"/>
-                          <a:ea typeface="Microsoft YaHei"/>
+                          <a:ea typeface="微软雅黑"/>
                         </a:rPr>
                         <a:t>0.06</a:t>
                       </a:r>
@@ -18997,7 +18965,7 @@
                   <a:srgbClr val="333333"/>
                 </a:solidFill>
                 <a:latin typeface="Arial"/>
-                <a:ea typeface="Microsoft YaHei"/>
+                <a:ea typeface="微软雅黑"/>
               </a:rPr>
               <a:t>▪  完整 16 行见论文表 6-6/6-7/6-8</a:t>
             </a:r>
@@ -19017,7 +18985,7 @@
                   <a:srgbClr val="333333"/>
                 </a:solidFill>
                 <a:latin typeface="Arial"/>
-                <a:ea typeface="Microsoft YaHei"/>
+                <a:ea typeface="微软雅黑"/>
               </a:rPr>
               <a:t>▪  数据目录：results/compare/</a:t>
             </a:r>
@@ -19037,7 +19005,7 @@
                   <a:srgbClr val="333333"/>
                 </a:solidFill>
                 <a:latin typeface="Arial"/>
-                <a:ea typeface="Microsoft YaHei"/>
+                <a:ea typeface="微软雅黑"/>
               </a:rPr>
               <a:t>▪  统计口径：n=3 中位数</a:t>
             </a:r>
@@ -19073,7 +19041,7 @@
                   <a:srgbClr val="6B7A8F"/>
                 </a:solidFill>
                 <a:latin typeface="Arial"/>
-                <a:ea typeface="Microsoft YaHei"/>
+                <a:ea typeface="微软雅黑"/>
               </a:rPr>
               <a:t>B1</a:t>
             </a:r>
@@ -19183,7 +19151,7 @@
                   <a:srgbClr val="0B2A4A"/>
                 </a:solidFill>
                 <a:latin typeface="Arial"/>
-                <a:ea typeface="Microsoft YaHei"/>
+                <a:ea typeface="微软雅黑"/>
               </a:rPr>
               <a:t>6 个指标的精确口径与来源</a:t>
             </a:r>
@@ -19263,7 +19231,7 @@
                   <a:srgbClr val="1F5C99"/>
                 </a:solidFill>
                 <a:latin typeface="Arial"/>
-                <a:ea typeface="Microsoft YaHei"/>
+                <a:ea typeface="微软雅黑"/>
               </a:rPr>
               <a:t>定义、聚合方式与对应的可复核字段</a:t>
             </a:r>
@@ -19306,7 +19274,7 @@
                             <a:srgbClr val="FFFFFF"/>
                           </a:solidFill>
                           <a:latin typeface="Arial"/>
-                          <a:ea typeface="Microsoft YaHei"/>
+                          <a:ea typeface="微软雅黑"/>
                         </a:rPr>
                         <a:t>指标</a:t>
                       </a:r>
@@ -19330,7 +19298,7 @@
                             <a:srgbClr val="FFFFFF"/>
                           </a:solidFill>
                           <a:latin typeface="Arial"/>
-                          <a:ea typeface="Microsoft YaHei"/>
+                          <a:ea typeface="微软雅黑"/>
                         </a:rPr>
                         <a:t>字段 / 定义</a:t>
                       </a:r>
@@ -19354,7 +19322,7 @@
                             <a:srgbClr val="FFFFFF"/>
                           </a:solidFill>
                           <a:latin typeface="Arial"/>
-                          <a:ea typeface="Microsoft YaHei"/>
+                          <a:ea typeface="微软雅黑"/>
                         </a:rPr>
                         <a:t>聚合</a:t>
                       </a:r>
@@ -19380,7 +19348,7 @@
                             <a:srgbClr val="333333"/>
                           </a:solidFill>
                           <a:latin typeface="Arial"/>
-                          <a:ea typeface="Microsoft YaHei"/>
+                          <a:ea typeface="微软雅黑"/>
                         </a:rPr>
                         <a:t>有效吞吐</a:t>
                       </a:r>
@@ -19404,7 +19372,7 @@
                             <a:srgbClr val="333333"/>
                           </a:solidFill>
                           <a:latin typeface="Arial"/>
-                          <a:ea typeface="Microsoft YaHei"/>
+                          <a:ea typeface="微软雅黑"/>
                         </a:rPr>
                         <a:t>名义工作量 ÷ metadata.duration</a:t>
                       </a:r>
@@ -19428,7 +19396,7 @@
                             <a:srgbClr val="333333"/>
                           </a:solidFill>
                           <a:latin typeface="Arial"/>
-                          <a:ea typeface="Microsoft YaHei"/>
+                          <a:ea typeface="微软雅黑"/>
                         </a:rPr>
                         <a:t>每 run 算再取中位数</a:t>
                       </a:r>
@@ -19454,7 +19422,7 @@
                             <a:srgbClr val="333333"/>
                           </a:solidFill>
                           <a:latin typeface="Arial"/>
-                          <a:ea typeface="Microsoft YaHei"/>
+                          <a:ea typeface="微软雅黑"/>
                         </a:rPr>
                         <a:t>峰值吞吐</a:t>
                       </a:r>
@@ -19478,7 +19446,7 @@
                             <a:srgbClr val="333333"/>
                           </a:solidFill>
                           <a:latin typeface="Arial"/>
-                          <a:ea typeface="Microsoft YaHei"/>
+                          <a:ea typeface="微软雅黑"/>
                         </a:rPr>
                         <a:t>scheduling_peak_throughput</a:t>
                       </a:r>
@@ -19502,7 +19470,7 @@
                             <a:srgbClr val="333333"/>
                           </a:solidFill>
                           <a:latin typeface="Arial"/>
-                          <a:ea typeface="Microsoft YaHei"/>
+                          <a:ea typeface="微软雅黑"/>
                         </a:rPr>
                         <a:t>3 run 逐点中位数后取标量</a:t>
                       </a:r>
@@ -19528,7 +19496,7 @@
                             <a:srgbClr val="333333"/>
                           </a:solidFill>
                           <a:latin typeface="Arial"/>
-                          <a:ea typeface="Microsoft YaHei"/>
+                          <a:ea typeface="微软雅黑"/>
                         </a:rPr>
                         <a:t>P90/P99</a:t>
                       </a:r>
@@ -19552,7 +19520,7 @@
                             <a:srgbClr val="333333"/>
                           </a:solidFill>
                           <a:latin typeface="Arial"/>
-                          <a:ea typeface="Microsoft YaHei"/>
+                          <a:ea typeface="微软雅黑"/>
                         </a:rPr>
                         <a:t>activeQ 到 Bind 完成的分位</a:t>
                       </a:r>
@@ -19576,7 +19544,7 @@
                             <a:srgbClr val="333333"/>
                           </a:solidFill>
                           <a:latin typeface="Arial"/>
-                          <a:ea typeface="Microsoft YaHei"/>
+                          <a:ea typeface="微软雅黑"/>
                         </a:rPr>
                         <a:t>剔首尾各 2 点后取中位数</a:t>
                       </a:r>
@@ -19602,7 +19570,7 @@
                             <a:srgbClr val="333333"/>
                           </a:solidFill>
                           <a:latin typeface="Arial"/>
-                          <a:ea typeface="Microsoft YaHei"/>
+                          <a:ea typeface="微软雅黑"/>
                         </a:rPr>
                         <a:t>Pod E2E P99</a:t>
                       </a:r>
@@ -19626,7 +19594,7 @@
                             <a:srgbClr val="333333"/>
                           </a:solidFill>
                           <a:latin typeface="Arial"/>
-                          <a:ea typeface="Microsoft YaHei"/>
+                          <a:ea typeface="微软雅黑"/>
                         </a:rPr>
                         <a:t>pod_e2e_latency_p99</a:t>
                       </a:r>
@@ -19650,7 +19618,7 @@
                             <a:srgbClr val="333333"/>
                           </a:solidFill>
                           <a:latin typeface="Arial"/>
-                          <a:ea typeface="Microsoft YaHei"/>
+                          <a:ea typeface="微软雅黑"/>
                         </a:rPr>
                         <a:t>同上</a:t>
                       </a:r>
@@ -19676,7 +19644,7 @@
                             <a:srgbClr val="333333"/>
                           </a:solidFill>
                           <a:latin typeface="Arial"/>
-                          <a:ea typeface="Microsoft YaHei"/>
+                          <a:ea typeface="微软雅黑"/>
                         </a:rPr>
                         <a:t>绑定成功率</a:t>
                       </a:r>
@@ -19700,7 +19668,7 @@
                             <a:srgbClr val="333333"/>
                           </a:solidFill>
                           <a:latin typeface="Arial"/>
-                          <a:ea typeface="Microsoft YaHei"/>
+                          <a:ea typeface="微软雅黑"/>
                         </a:rPr>
                         <a:t>Bind 成功 / 尝试</a:t>
                       </a:r>
@@ -19724,7 +19692,7 @@
                             <a:srgbClr val="333333"/>
                           </a:solidFill>
                           <a:latin typeface="Arial"/>
-                          <a:ea typeface="Microsoft YaHei"/>
+                          <a:ea typeface="微软雅黑"/>
                         </a:rPr>
                         <a:t>比值</a:t>
                       </a:r>
@@ -19750,7 +19718,7 @@
                             <a:srgbClr val="333333"/>
                           </a:solidFill>
                           <a:latin typeface="Arial"/>
-                          <a:ea typeface="Microsoft YaHei"/>
+                          <a:ea typeface="微软雅黑"/>
                         </a:rPr>
                         <a:t>队列堆积峰值</a:t>
                       </a:r>
@@ -19774,7 +19742,7 @@
                             <a:srgbClr val="333333"/>
                           </a:solidFill>
                           <a:latin typeface="Arial"/>
-                          <a:ea typeface="Microsoft YaHei"/>
+                          <a:ea typeface="微软雅黑"/>
                         </a:rPr>
                         <a:t>pending_pods 最大值</a:t>
                       </a:r>
@@ -19798,7 +19766,7 @@
                             <a:srgbClr val="333333"/>
                           </a:solidFill>
                           <a:latin typeface="Arial"/>
-                          <a:ea typeface="Microsoft YaHei"/>
+                          <a:ea typeface="微软雅黑"/>
                         </a:rPr>
                         <a:t>取最大</a:t>
                       </a:r>
@@ -19848,7 +19816,7 @@
                   <a:srgbClr val="333333"/>
                 </a:solidFill>
                 <a:latin typeface="Arial"/>
-                <a:ea typeface="Microsoft YaHei"/>
+                <a:ea typeface="微软雅黑"/>
               </a:rPr>
               <a:t>▪  recording rules 归一化跨组指标名</a:t>
             </a:r>
@@ -19868,7 +19836,7 @@
                   <a:srgbClr val="333333"/>
                 </a:solidFill>
                 <a:latin typeface="Arial"/>
-                <a:ea typeface="Microsoft YaHei"/>
+                <a:ea typeface="微软雅黑"/>
               </a:rPr>
               <a:t>▪  提取脚本：collect/latency-compare.py</a:t>
             </a:r>
@@ -19888,7 +19856,7 @@
                   <a:srgbClr val="333333"/>
                 </a:solidFill>
                 <a:latin typeface="Arial"/>
-                <a:ea typeface="Microsoft YaHei"/>
+                <a:ea typeface="微软雅黑"/>
               </a:rPr>
               <a:t>▪  场景清单：results/compare/</a:t>
             </a:r>
@@ -19924,7 +19892,7 @@
                   <a:srgbClr val="6B7A8F"/>
                 </a:solidFill>
                 <a:latin typeface="Arial"/>
-                <a:ea typeface="Microsoft YaHei"/>
+                <a:ea typeface="微软雅黑"/>
               </a:rPr>
               <a:t>B2</a:t>
             </a:r>
@@ -20034,7 +20002,7 @@
                   <a:srgbClr val="0B2A4A"/>
                 </a:solidFill>
                 <a:latin typeface="Arial"/>
-                <a:ea typeface="Microsoft YaHei"/>
+                <a:ea typeface="微软雅黑"/>
               </a:rPr>
               <a:t>为什么 c/d/e 的 P99 不能与 a/b 直接比</a:t>
             </a:r>
@@ -20114,7 +20082,7 @@
                   <a:srgbClr val="1F5C99"/>
                 </a:solidFill>
                 <a:latin typeface="Arial"/>
-                <a:ea typeface="Microsoft YaHei"/>
+                <a:ea typeface="微软雅黑"/>
               </a:rPr>
               <a:t>单实例过载 → Pod 长期堵在 activeQ → 未进入延迟直方图</a:t>
             </a:r>
@@ -20154,7 +20122,7 @@
                   <a:srgbClr val="333333"/>
                 </a:solidFill>
                 <a:latin typeface="Arial"/>
-                <a:ea typeface="Microsoft YaHei"/>
+                <a:ea typeface="微软雅黑"/>
               </a:rPr>
               <a:t>▪  直方图只覆盖“已被 pop 处理”的子集</a:t>
             </a:r>
@@ -20174,7 +20142,7 @@
                   <a:srgbClr val="333333"/>
                 </a:solidFill>
                 <a:latin typeface="Arial"/>
-                <a:ea typeface="Microsoft YaHei"/>
+                <a:ea typeface="微软雅黑"/>
               </a:rPr>
               <a:t>▪  数值对该子集准确，但样本群体不同</a:t>
             </a:r>
@@ -20194,7 +20162,7 @@
                   <a:srgbClr val="333333"/>
                 </a:solidFill>
                 <a:latin typeface="Arial"/>
-                <a:ea typeface="Microsoft YaHei"/>
+                <a:ea typeface="微软雅黑"/>
               </a:rPr>
               <a:t>▪  故只比吞吐 / 队列 / 成功率</a:t>
             </a:r>
@@ -20230,7 +20198,7 @@
                   <a:srgbClr val="6B7A8F"/>
                 </a:solidFill>
                 <a:latin typeface="Arial"/>
-                <a:ea typeface="Microsoft YaHei"/>
+                <a:ea typeface="微软雅黑"/>
               </a:rPr>
               <a:t>B3</a:t>
             </a:r>
@@ -20340,7 +20308,7 @@
                   <a:srgbClr val="0B2A4A"/>
                 </a:solidFill>
                 <a:latin typeface="Arial"/>
-                <a:ea typeface="Microsoft YaHei"/>
+                <a:ea typeface="微软雅黑"/>
               </a:rPr>
               <a:t>国内外研究现状</a:t>
             </a:r>
@@ -20420,7 +20388,7 @@
                   <a:srgbClr val="1F5C99"/>
                 </a:solidFill>
                 <a:latin typeface="Arial"/>
-                <a:ea typeface="Microsoft YaHei"/>
+                <a:ea typeface="微软雅黑"/>
               </a:rPr>
               <a:t>国外从集中式走到共享状态，国内以 Gödel 分片式多实例为代表；落盘侧仍缺结构化方案</a:t>
             </a:r>
@@ -20464,7 +20432,7 @@
                             <a:srgbClr val="FFFFFF"/>
                           </a:solidFill>
                           <a:latin typeface="Arial"/>
-                          <a:ea typeface="Microsoft YaHei"/>
+                          <a:ea typeface="微软雅黑"/>
                         </a:rPr>
                         <a:t>系统</a:t>
                       </a:r>
@@ -20488,7 +20456,7 @@
                             <a:srgbClr val="FFFFFF"/>
                           </a:solidFill>
                           <a:latin typeface="Arial"/>
-                          <a:ea typeface="Microsoft YaHei"/>
+                          <a:ea typeface="微软雅黑"/>
                         </a:rPr>
                         <a:t>区域</a:t>
                       </a:r>
@@ -20512,7 +20480,7 @@
                             <a:srgbClr val="FFFFFF"/>
                           </a:solidFill>
                           <a:latin typeface="Arial"/>
-                          <a:ea typeface="Microsoft YaHei"/>
+                          <a:ea typeface="微软雅黑"/>
                         </a:rPr>
                         <a:t>架构特征</a:t>
                       </a:r>
@@ -20536,7 +20504,7 @@
                             <a:srgbClr val="FFFFFF"/>
                           </a:solidFill>
                           <a:latin typeface="Arial"/>
-                          <a:ea typeface="Microsoft YaHei"/>
+                          <a:ea typeface="微软雅黑"/>
                         </a:rPr>
                         <a:t>局限</a:t>
                       </a:r>
@@ -20562,7 +20530,7 @@
                             <a:srgbClr val="333333"/>
                           </a:solidFill>
                           <a:latin typeface="Arial"/>
-                          <a:ea typeface="Microsoft YaHei"/>
+                          <a:ea typeface="微软雅黑"/>
                         </a:rPr>
                         <a:t>Borg</a:t>
                       </a:r>
@@ -20586,7 +20554,7 @@
                             <a:srgbClr val="333333"/>
                           </a:solidFill>
                           <a:latin typeface="Arial"/>
-                          <a:ea typeface="Microsoft YaHei"/>
+                          <a:ea typeface="微软雅黑"/>
                         </a:rPr>
                         <a:t>国外</a:t>
                       </a:r>
@@ -20610,7 +20578,7 @@
                             <a:srgbClr val="333333"/>
                           </a:solidFill>
                           <a:latin typeface="Arial"/>
-                          <a:ea typeface="Microsoft YaHei"/>
+                          <a:ea typeface="微软雅黑"/>
                         </a:rPr>
                         <a:t>集中式</a:t>
                       </a:r>
@@ -20634,7 +20602,7 @@
                             <a:srgbClr val="333333"/>
                           </a:solidFill>
                           <a:latin typeface="Arial"/>
-                          <a:ea typeface="Microsoft YaHei"/>
+                          <a:ea typeface="微软雅黑"/>
                         </a:rPr>
                         <a:t>单点决策路径上限</a:t>
                       </a:r>
@@ -20660,7 +20628,7 @@
                             <a:srgbClr val="333333"/>
                           </a:solidFill>
                           <a:latin typeface="Arial"/>
-                          <a:ea typeface="Microsoft YaHei"/>
+                          <a:ea typeface="微软雅黑"/>
                         </a:rPr>
                         <a:t>Omega</a:t>
                       </a:r>
@@ -20684,7 +20652,7 @@
                             <a:srgbClr val="333333"/>
                           </a:solidFill>
                           <a:latin typeface="Arial"/>
-                          <a:ea typeface="Microsoft YaHei"/>
+                          <a:ea typeface="微软雅黑"/>
                         </a:rPr>
                         <a:t>国外</a:t>
                       </a:r>
@@ -20708,7 +20676,7 @@
                             <a:srgbClr val="333333"/>
                           </a:solidFill>
                           <a:latin typeface="Arial"/>
-                          <a:ea typeface="Microsoft YaHei"/>
+                          <a:ea typeface="微软雅黑"/>
                         </a:rPr>
                         <a:t>共享状态 + 乐观并发</a:t>
                       </a:r>
@@ -20732,7 +20700,7 @@
                             <a:srgbClr val="333333"/>
                           </a:solidFill>
                           <a:latin typeface="Arial"/>
-                          <a:ea typeface="Microsoft YaHei"/>
+                          <a:ea typeface="微软雅黑"/>
                         </a:rPr>
                         <a:t>冲突处理复杂</a:t>
                       </a:r>
@@ -20758,7 +20726,7 @@
                             <a:srgbClr val="333333"/>
                           </a:solidFill>
                           <a:latin typeface="Arial"/>
-                          <a:ea typeface="Microsoft YaHei"/>
+                          <a:ea typeface="微软雅黑"/>
                         </a:rPr>
                         <a:t>Mesos</a:t>
                       </a:r>
@@ -20782,7 +20750,7 @@
                             <a:srgbClr val="333333"/>
                           </a:solidFill>
                           <a:latin typeface="Arial"/>
-                          <a:ea typeface="Microsoft YaHei"/>
+                          <a:ea typeface="微软雅黑"/>
                         </a:rPr>
                         <a:t>国外</a:t>
                       </a:r>
@@ -20806,7 +20774,7 @@
                             <a:srgbClr val="333333"/>
                           </a:solidFill>
                           <a:latin typeface="Arial"/>
-                          <a:ea typeface="Microsoft YaHei"/>
+                          <a:ea typeface="微软雅黑"/>
                         </a:rPr>
                         <a:t>两级资源调度</a:t>
                       </a:r>
@@ -20830,7 +20798,7 @@
                             <a:srgbClr val="333333"/>
                           </a:solidFill>
                           <a:latin typeface="Arial"/>
-                          <a:ea typeface="Microsoft YaHei"/>
+                          <a:ea typeface="微软雅黑"/>
                         </a:rPr>
                         <a:t>多框架共享开销</a:t>
                       </a:r>
@@ -20856,7 +20824,7 @@
                             <a:srgbClr val="333333"/>
                           </a:solidFill>
                           <a:latin typeface="Arial"/>
-                          <a:ea typeface="Microsoft YaHei"/>
+                          <a:ea typeface="微软雅黑"/>
                         </a:rPr>
                         <a:t>kube-scheduler</a:t>
                       </a:r>
@@ -20880,7 +20848,7 @@
                             <a:srgbClr val="333333"/>
                           </a:solidFill>
                           <a:latin typeface="Arial"/>
-                          <a:ea typeface="Microsoft YaHei"/>
+                          <a:ea typeface="微软雅黑"/>
                         </a:rPr>
                         <a:t>国外</a:t>
                       </a:r>
@@ -20904,7 +20872,7 @@
                             <a:srgbClr val="333333"/>
                           </a:solidFill>
                           <a:latin typeface="Arial"/>
-                          <a:ea typeface="Microsoft YaHei"/>
+                          <a:ea typeface="微软雅黑"/>
                         </a:rPr>
                         <a:t>中心式插件框架</a:t>
                       </a:r>
@@ -20928,7 +20896,7 @@
                             <a:srgbClr val="333333"/>
                           </a:solidFill>
                           <a:latin typeface="Arial"/>
-                          <a:ea typeface="Microsoft YaHei"/>
+                          <a:ea typeface="微软雅黑"/>
                         </a:rPr>
                         <a:t>超大规模扩展受限</a:t>
                       </a:r>
@@ -20954,7 +20922,7 @@
                             <a:srgbClr val="333333"/>
                           </a:solidFill>
                           <a:latin typeface="Arial"/>
-                          <a:ea typeface="Microsoft YaHei"/>
+                          <a:ea typeface="微软雅黑"/>
                         </a:rPr>
                         <a:t>Gödel</a:t>
                       </a:r>
@@ -20978,7 +20946,7 @@
                             <a:srgbClr val="333333"/>
                           </a:solidFill>
                           <a:latin typeface="Arial"/>
-                          <a:ea typeface="Microsoft YaHei"/>
+                          <a:ea typeface="微软雅黑"/>
                         </a:rPr>
                         <a:t>国内</a:t>
                       </a:r>
@@ -21002,7 +20970,7 @@
                             <a:srgbClr val="333333"/>
                           </a:solidFill>
                           <a:latin typeface="Arial"/>
-                          <a:ea typeface="Microsoft YaHei"/>
+                          <a:ea typeface="微软雅黑"/>
                         </a:rPr>
                         <a:t>分片式分布式（字节跳动）</a:t>
                       </a:r>
@@ -21026,7 +20994,7 @@
                             <a:srgbClr val="333333"/>
                           </a:solidFill>
                           <a:latin typeface="Arial"/>
-                          <a:ea typeface="Microsoft YaHei"/>
+                          <a:ea typeface="微软雅黑"/>
                         </a:rPr>
                         <a:t>独立 Binder 存在瓶颈</a:t>
                       </a:r>
@@ -21052,7 +21020,7 @@
                             <a:srgbClr val="333333"/>
                           </a:solidFill>
                           <a:latin typeface="Arial"/>
-                          <a:ea typeface="Microsoft YaHei"/>
+                          <a:ea typeface="微软雅黑"/>
                         </a:rPr>
                         <a:t>Volcano</a:t>
                       </a:r>
@@ -21076,7 +21044,7 @@
                             <a:srgbClr val="333333"/>
                           </a:solidFill>
                           <a:latin typeface="Arial"/>
-                          <a:ea typeface="Microsoft YaHei"/>
+                          <a:ea typeface="微软雅黑"/>
                         </a:rPr>
                         <a:t>国内</a:t>
                       </a:r>
@@ -21100,7 +21068,7 @@
                             <a:srgbClr val="333333"/>
                           </a:solidFill>
                           <a:latin typeface="Arial"/>
-                          <a:ea typeface="Microsoft YaHei"/>
+                          <a:ea typeface="微软雅黑"/>
                         </a:rPr>
                         <a:t>插件增强（Gang/队列）</a:t>
                       </a:r>
@@ -21124,7 +21092,7 @@
                             <a:srgbClr val="333333"/>
                           </a:solidFill>
                           <a:latin typeface="Arial"/>
-                          <a:ea typeface="Microsoft YaHei"/>
+                          <a:ea typeface="微软雅黑"/>
                         </a:rPr>
                         <a:t>中心路径仍有瓶颈</a:t>
                       </a:r>
@@ -21150,7 +21118,7 @@
                             <a:srgbClr val="333333"/>
                           </a:solidFill>
                           <a:latin typeface="Arial"/>
-                          <a:ea typeface="Microsoft YaHei"/>
+                          <a:ea typeface="微软雅黑"/>
                         </a:rPr>
                         <a:t>Koordinator</a:t>
                       </a:r>
@@ -21174,7 +21142,7 @@
                             <a:srgbClr val="333333"/>
                           </a:solidFill>
                           <a:latin typeface="Arial"/>
-                          <a:ea typeface="Microsoft YaHei"/>
+                          <a:ea typeface="微软雅黑"/>
                         </a:rPr>
                         <a:t>国内</a:t>
                       </a:r>
@@ -21198,7 +21166,7 @@
                             <a:srgbClr val="333333"/>
                           </a:solidFill>
                           <a:latin typeface="Arial"/>
-                          <a:ea typeface="Microsoft YaHei"/>
+                          <a:ea typeface="微软雅黑"/>
                         </a:rPr>
                         <a:t>插件增强（QoS/超卖）</a:t>
                       </a:r>
@@ -21222,7 +21190,7 @@
                             <a:srgbClr val="333333"/>
                           </a:solidFill>
                           <a:latin typeface="Arial"/>
-                          <a:ea typeface="Microsoft YaHei"/>
+                          <a:ea typeface="微软雅黑"/>
                         </a:rPr>
                         <a:t>单实例扩展受限</a:t>
                       </a:r>
@@ -21272,7 +21240,7 @@
                   <a:srgbClr val="333333"/>
                 </a:solidFill>
                 <a:latin typeface="Arial"/>
-                <a:ea typeface="Microsoft YaHei"/>
+                <a:ea typeface="微软雅黑"/>
               </a:rPr>
               <a:t>▪  国外：Borg→Omega→Mesos→kube-scheduler</a:t>
             </a:r>
@@ -21292,7 +21260,7 @@
                   <a:srgbClr val="333333"/>
                 </a:solidFill>
                 <a:latin typeface="Arial"/>
-                <a:ea typeface="Microsoft YaHei"/>
+                <a:ea typeface="微软雅黑"/>
               </a:rPr>
               <a:t>▪  国内：Gödel（字节跳动）做分片，Volcano/Koordinator 做插件增强</a:t>
             </a:r>
@@ -21312,7 +21280,7 @@
                   <a:srgbClr val="333333"/>
                 </a:solidFill>
                 <a:latin typeface="Arial"/>
-                <a:ea typeface="Microsoft YaHei"/>
+                <a:ea typeface="微软雅黑"/>
               </a:rPr>
               <a:t>▪  缺口：绑定阶段串行化、漂移下的严格一致性</a:t>
             </a:r>
@@ -21348,7 +21316,7 @@
                   <a:srgbClr val="6B7A8F"/>
                 </a:solidFill>
                 <a:latin typeface="Arial"/>
-                <a:ea typeface="Microsoft YaHei"/>
+                <a:ea typeface="微软雅黑"/>
               </a:rPr>
               <a:t>3 / 26</a:t>
             </a:r>
@@ -21458,7 +21426,7 @@
                   <a:srgbClr val="0B2A4A"/>
                 </a:solidFill>
                 <a:latin typeface="Arial"/>
-                <a:ea typeface="Microsoft YaHei"/>
+                <a:ea typeface="微软雅黑"/>
               </a:rPr>
               <a:t>Gang（w6）尾延迟反向的机理与边界</a:t>
             </a:r>
@@ -21538,7 +21506,7 @@
                   <a:srgbClr val="1F5C99"/>
                 </a:solidFill>
                 <a:latin typeface="Arial"/>
-                <a:ea typeface="Microsoft YaHei"/>
+                <a:ea typeface="微软雅黑"/>
               </a:rPr>
               <a:t>吞吐仍领先，但单 Pod 尾延迟高出 1.6~4.1 倍</a:t>
             </a:r>
@@ -21583,7 +21551,7 @@
                             <a:srgbClr val="FFFFFF"/>
                           </a:solidFill>
                           <a:latin typeface="Arial"/>
-                          <a:ea typeface="Microsoft YaHei"/>
+                          <a:ea typeface="微软雅黑"/>
                         </a:rPr>
                         <a:t>场景</a:t>
                       </a:r>
@@ -21607,7 +21575,7 @@
                             <a:srgbClr val="FFFFFF"/>
                           </a:solidFill>
                           <a:latin typeface="Arial"/>
-                          <a:ea typeface="Microsoft YaHei"/>
+                          <a:ea typeface="微软雅黑"/>
                         </a:rPr>
                         <a:t>ENO 吞吐</a:t>
                       </a:r>
@@ -21631,7 +21599,7 @@
                             <a:srgbClr val="FFFFFF"/>
                           </a:solidFill>
                           <a:latin typeface="Arial"/>
-                          <a:ea typeface="Microsoft YaHei"/>
+                          <a:ea typeface="微软雅黑"/>
                         </a:rPr>
                         <a:t>Gödel 吞吐</a:t>
                       </a:r>
@@ -21655,7 +21623,7 @@
                             <a:srgbClr val="FFFFFF"/>
                           </a:solidFill>
                           <a:latin typeface="Arial"/>
-                          <a:ea typeface="Microsoft YaHei"/>
+                          <a:ea typeface="微软雅黑"/>
                         </a:rPr>
                         <a:t>ENO P99</a:t>
                       </a:r>
@@ -21679,7 +21647,7 @@
                             <a:srgbClr val="FFFFFF"/>
                           </a:solidFill>
                           <a:latin typeface="Arial"/>
-                          <a:ea typeface="Microsoft YaHei"/>
+                          <a:ea typeface="微软雅黑"/>
                         </a:rPr>
                         <a:t>Gödel P99</a:t>
                       </a:r>
@@ -21705,7 +21673,7 @@
                             <a:srgbClr val="333333"/>
                           </a:solidFill>
                           <a:latin typeface="Arial"/>
-                          <a:ea typeface="Microsoft YaHei"/>
+                          <a:ea typeface="微软雅黑"/>
                         </a:rPr>
                         <a:t>s3/w6 inst1</a:t>
                       </a:r>
@@ -21729,7 +21697,7 @@
                             <a:srgbClr val="333333"/>
                           </a:solidFill>
                           <a:latin typeface="Arial"/>
-                          <a:ea typeface="Microsoft YaHei"/>
+                          <a:ea typeface="微软雅黑"/>
                         </a:rPr>
                         <a:t>251.3</a:t>
                       </a:r>
@@ -21753,7 +21721,7 @@
                             <a:srgbClr val="333333"/>
                           </a:solidFill>
                           <a:latin typeface="Arial"/>
-                          <a:ea typeface="Microsoft YaHei"/>
+                          <a:ea typeface="微软雅黑"/>
                         </a:rPr>
                         <a:t>211.0</a:t>
                       </a:r>
@@ -21777,7 +21745,7 @@
                             <a:srgbClr val="333333"/>
                           </a:solidFill>
                           <a:latin typeface="Arial"/>
-                          <a:ea typeface="Microsoft YaHei"/>
+                          <a:ea typeface="微软雅黑"/>
                         </a:rPr>
                         <a:t>0.428</a:t>
                       </a:r>
@@ -21801,7 +21769,7 @@
                             <a:srgbClr val="333333"/>
                           </a:solidFill>
                           <a:latin typeface="Arial"/>
-                          <a:ea typeface="Microsoft YaHei"/>
+                          <a:ea typeface="微软雅黑"/>
                         </a:rPr>
                         <a:t>0.175</a:t>
                       </a:r>
@@ -21827,7 +21795,7 @@
                             <a:srgbClr val="333333"/>
                           </a:solidFill>
                           <a:latin typeface="Arial"/>
-                          <a:ea typeface="Microsoft YaHei"/>
+                          <a:ea typeface="微软雅黑"/>
                         </a:rPr>
                         <a:t>s3/w6 inst3</a:t>
                       </a:r>
@@ -21851,7 +21819,7 @@
                             <a:srgbClr val="333333"/>
                           </a:solidFill>
                           <a:latin typeface="Arial"/>
-                          <a:ea typeface="Microsoft YaHei"/>
+                          <a:ea typeface="微软雅黑"/>
                         </a:rPr>
                         <a:t>215.5</a:t>
                       </a:r>
@@ -21875,7 +21843,7 @@
                             <a:srgbClr val="333333"/>
                           </a:solidFill>
                           <a:latin typeface="Arial"/>
-                          <a:ea typeface="Microsoft YaHei"/>
+                          <a:ea typeface="微软雅黑"/>
                         </a:rPr>
                         <a:t>206.6</a:t>
                       </a:r>
@@ -21899,7 +21867,7 @@
                             <a:srgbClr val="333333"/>
                           </a:solidFill>
                           <a:latin typeface="Arial"/>
-                          <a:ea typeface="Microsoft YaHei"/>
+                          <a:ea typeface="微软雅黑"/>
                         </a:rPr>
                         <a:t>0.892</a:t>
                       </a:r>
@@ -21923,7 +21891,7 @@
                             <a:srgbClr val="333333"/>
                           </a:solidFill>
                           <a:latin typeface="Arial"/>
-                          <a:ea typeface="Microsoft YaHei"/>
+                          <a:ea typeface="微软雅黑"/>
                         </a:rPr>
                         <a:t>0.218</a:t>
                       </a:r>
@@ -21949,7 +21917,7 @@
                             <a:srgbClr val="333333"/>
                           </a:solidFill>
                           <a:latin typeface="Arial"/>
-                          <a:ea typeface="Microsoft YaHei"/>
+                          <a:ea typeface="微软雅黑"/>
                         </a:rPr>
                         <a:t>s4/w6 inst3</a:t>
                       </a:r>
@@ -21973,7 +21941,7 @@
                             <a:srgbClr val="333333"/>
                           </a:solidFill>
                           <a:latin typeface="Arial"/>
-                          <a:ea typeface="Microsoft YaHei"/>
+                          <a:ea typeface="微软雅黑"/>
                         </a:rPr>
                         <a:t>245.1</a:t>
                       </a:r>
@@ -21997,7 +21965,7 @@
                             <a:srgbClr val="333333"/>
                           </a:solidFill>
                           <a:latin typeface="Arial"/>
-                          <a:ea typeface="Microsoft YaHei"/>
+                          <a:ea typeface="微软雅黑"/>
                         </a:rPr>
                         <a:t>206.6</a:t>
                       </a:r>
@@ -22021,7 +21989,7 @@
                             <a:srgbClr val="333333"/>
                           </a:solidFill>
                           <a:latin typeface="Arial"/>
-                          <a:ea typeface="Microsoft YaHei"/>
+                          <a:ea typeface="微软雅黑"/>
                         </a:rPr>
                         <a:t>0.576</a:t>
                       </a:r>
@@ -22045,7 +22013,7 @@
                             <a:srgbClr val="333333"/>
                           </a:solidFill>
                           <a:latin typeface="Arial"/>
-                          <a:ea typeface="Microsoft YaHei"/>
+                          <a:ea typeface="微软雅黑"/>
                         </a:rPr>
                         <a:t>0.353</a:t>
                       </a:r>
@@ -22095,7 +22063,7 @@
                   <a:srgbClr val="333333"/>
                 </a:solidFill>
                 <a:latin typeface="Arial"/>
-                <a:ea typeface="Microsoft YaHei"/>
+                <a:ea typeface="微软雅黑"/>
               </a:rPr>
               <a:t>▪  同组预留等待与决策共用进程与队列</a:t>
             </a:r>
@@ -22115,7 +22083,7 @@
                   <a:srgbClr val="333333"/>
                 </a:solidFill>
                 <a:latin typeface="Arial"/>
-                <a:ea typeface="Microsoft YaHei"/>
+                <a:ea typeface="微软雅黑"/>
               </a:rPr>
               <a:t>▪  未用独立计时实验分离两段耗时</a:t>
             </a:r>
@@ -22135,7 +22103,7 @@
                   <a:srgbClr val="333333"/>
                 </a:solidFill>
                 <a:latin typeface="Arial"/>
-                <a:ea typeface="Microsoft YaHei"/>
+                <a:ea typeface="微软雅黑"/>
               </a:rPr>
               <a:t>▪  已在论文 §6.8 列为局限</a:t>
             </a:r>
@@ -22171,7 +22139,7 @@
                   <a:srgbClr val="6B7A8F"/>
                 </a:solidFill>
                 <a:latin typeface="Arial"/>
-                <a:ea typeface="Microsoft YaHei"/>
+                <a:ea typeface="微软雅黑"/>
               </a:rPr>
               <a:t>B4</a:t>
             </a:r>
@@ -22281,7 +22249,7 @@
                   <a:srgbClr val="0B2A4A"/>
                 </a:solidFill>
                 <a:latin typeface="Arial"/>
-                <a:ea typeface="Microsoft YaHei"/>
+                <a:ea typeface="微软雅黑"/>
               </a:rPr>
               <a:t>资源公平性与未量化的资源收益</a:t>
             </a:r>
@@ -22361,7 +22329,7 @@
                   <a:srgbClr val="1F5C99"/>
                 </a:solidFill>
                 <a:latin typeface="Arial"/>
-                <a:ea typeface="Microsoft YaHei"/>
+                <a:ea typeface="微软雅黑"/>
               </a:rPr>
               <a:t>每 Deployment 同规格，对 ENO 略不利</a:t>
             </a:r>
@@ -22401,7 +22369,7 @@
                   <a:srgbClr val="333333"/>
                 </a:solidFill>
                 <a:latin typeface="Arial"/>
-                <a:ea typeface="Microsoft YaHei"/>
+                <a:ea typeface="微软雅黑"/>
               </a:rPr>
               <a:t>▪  Scheduler Pod 统一 2C/4G</a:t>
             </a:r>
@@ -22421,7 +22389,7 @@
                   <a:srgbClr val="333333"/>
                 </a:solidFill>
                 <a:latin typeface="Arial"/>
-                <a:ea typeface="Microsoft YaHei"/>
+                <a:ea typeface="微软雅黑"/>
               </a:rPr>
               <a:t>▪  ENO 少一个 Binder Deployment</a:t>
             </a:r>
@@ -22441,7 +22409,7 @@
                   <a:srgbClr val="333333"/>
                 </a:solidFill>
                 <a:latin typeface="Arial"/>
-                <a:ea typeface="Microsoft YaHei"/>
+                <a:ea typeface="微软雅黑"/>
               </a:rPr>
               <a:t>▪  集群总资源收益未量化</a:t>
             </a:r>
@@ -22477,7 +22445,7 @@
                   <a:srgbClr val="6B7A8F"/>
                 </a:solidFill>
                 <a:latin typeface="Arial"/>
-                <a:ea typeface="Microsoft YaHei"/>
+                <a:ea typeface="微软雅黑"/>
               </a:rPr>
               <a:t>B5</a:t>
             </a:r>
@@ -22587,7 +22555,7 @@
                   <a:srgbClr val="0B2A4A"/>
                 </a:solidFill>
                 <a:latin typeface="Arial"/>
-                <a:ea typeface="Microsoft YaHei"/>
+                <a:ea typeface="微软雅黑"/>
               </a:rPr>
               <a:t>一键复现</a:t>
             </a:r>
@@ -22667,7 +22635,7 @@
                   <a:srgbClr val="1F5C99"/>
                 </a:solidFill>
                 <a:latin typeface="Arial"/>
-                <a:ea typeface="Microsoft YaHei"/>
+                <a:ea typeface="微软雅黑"/>
               </a:rPr>
               <a:t>从零到结果的全部入口</a:t>
             </a:r>
@@ -22707,7 +22675,7 @@
                   <a:srgbClr val="333333"/>
                 </a:solidFill>
                 <a:latin typeface="Arial"/>
-                <a:ea typeface="Microsoft YaHei"/>
+                <a:ea typeface="微软雅黑"/>
               </a:rPr>
               <a:t>▪  run-experiment.sh：12 步实验流程</a:t>
             </a:r>
@@ -22727,7 +22695,7 @@
                   <a:srgbClr val="333333"/>
                 </a:solidFill>
                 <a:latin typeface="Arial"/>
-                <a:ea typeface="Microsoft YaHei"/>
+                <a:ea typeface="微软雅黑"/>
               </a:rPr>
               <a:t>▪  plot-results.py / collect/：聚合与出图</a:t>
             </a:r>
@@ -22747,7 +22715,7 @@
                   <a:srgbClr val="333333"/>
                 </a:solidFill>
                 <a:latin typeface="Arial"/>
-                <a:ea typeface="Microsoft YaHei"/>
+                <a:ea typeface="微软雅黑"/>
               </a:rPr>
               <a:t>▪  results/compare/：16 场景产物</a:t>
             </a:r>
@@ -22783,7 +22751,7 @@
                   <a:srgbClr val="6B7A8F"/>
                 </a:solidFill>
                 <a:latin typeface="Arial"/>
-                <a:ea typeface="Microsoft YaHei"/>
+                <a:ea typeface="微软雅黑"/>
               </a:rPr>
               <a:t>B6</a:t>
             </a:r>
@@ -22893,7 +22861,7 @@
                   <a:srgbClr val="0B2A4A"/>
                 </a:solidFill>
                 <a:latin typeface="Arial"/>
-                <a:ea typeface="Microsoft YaHei"/>
+                <a:ea typeface="微软雅黑"/>
               </a:rPr>
               <a:t>主场景 s3/w3 的时序形态（备用）</a:t>
             </a:r>
@@ -22973,7 +22941,7 @@
                   <a:srgbClr val="1F5C99"/>
                 </a:solidFill>
                 <a:latin typeface="Arial"/>
-                <a:ea typeface="Microsoft YaHei"/>
+                <a:ea typeface="微软雅黑"/>
               </a:rPr>
               <a:t>ENO 更早进入平台、平台更高、结束更早</a:t>
             </a:r>
@@ -23057,7 +23025,7 @@
                   <a:srgbClr val="333333"/>
                 </a:solidFill>
                 <a:latin typeface="Arial"/>
-                <a:ea typeface="Microsoft YaHei"/>
+                <a:ea typeface="微软雅黑"/>
               </a:rPr>
               <a:t>▪  吞吐平台更高且更早稳定</a:t>
             </a:r>
@@ -23074,7 +23042,7 @@
                   <a:srgbClr val="333333"/>
                 </a:solidFill>
                 <a:latin typeface="Arial"/>
-                <a:ea typeface="Microsoft YaHei"/>
+                <a:ea typeface="微软雅黑"/>
               </a:rPr>
               <a:t>▪  P99 峰值更低、回落更快</a:t>
             </a:r>
@@ -23091,7 +23059,7 @@
                   <a:srgbClr val="333333"/>
                 </a:solidFill>
                 <a:latin typeface="Arial"/>
-                <a:ea typeface="Microsoft YaHei"/>
+                <a:ea typeface="微软雅黑"/>
               </a:rPr>
               <a:t>▪  整体完成时间更短</a:t>
             </a:r>
@@ -23127,7 +23095,7 @@
                   <a:srgbClr val="6B7A8F"/>
                 </a:solidFill>
                 <a:latin typeface="Arial"/>
-                <a:ea typeface="Microsoft YaHei"/>
+                <a:ea typeface="微软雅黑"/>
               </a:rPr>
               <a:t>B7</a:t>
             </a:r>
@@ -23237,7 +23205,7 @@
                   <a:srgbClr val="0B2A4A"/>
                 </a:solidFill>
                 <a:latin typeface="Arial"/>
-                <a:ea typeface="Microsoft YaHei"/>
+                <a:ea typeface="微软雅黑"/>
               </a:rPr>
               <a:t>研究内容与创新点</a:t>
             </a:r>
@@ -23317,7 +23285,7 @@
                   <a:srgbClr val="1F5C99"/>
                 </a:solidFill>
                 <a:latin typeface="Arial"/>
-                <a:ea typeface="Microsoft YaHei"/>
+                <a:ea typeface="微软雅黑"/>
               </a:rPr>
               <a:t>两个创新：把 Binder 放进 Scheduler 进程；用四层容错守住“至多绑定一次”</a:t>
             </a:r>
@@ -23443,7 +23411,7 @@
                   <a:srgbClr val="0B2A4A"/>
                 </a:solidFill>
                 <a:latin typeface="Arial"/>
-                <a:ea typeface="Microsoft YaHei"/>
+                <a:ea typeface="微软雅黑"/>
               </a:rPr>
               <a:t>创新 1 · ENO 架构</a:t>
             </a:r>
@@ -23463,7 +23431,7 @@
                   <a:srgbClr val="6B7A8F"/>
                 </a:solidFill>
                 <a:latin typeface="Arial"/>
-                <a:ea typeface="Microsoft YaHei"/>
+                <a:ea typeface="微软雅黑"/>
               </a:rPr>
               <a:t>单 Dispatcher、多独立 Scheduler；Binder 与决策同域；CacheAdapter 零拷贝共享 SchedulerCache</a:t>
             </a:r>
@@ -23589,7 +23557,7 @@
                   <a:srgbClr val="0B2A4A"/>
                 </a:solidFill>
                 <a:latin typeface="Arial"/>
-                <a:ea typeface="Microsoft YaHei"/>
+                <a:ea typeface="微软雅黑"/>
               </a:rPr>
               <a:t>创新 2 · 四层容错</a:t>
             </a:r>
@@ -23609,7 +23577,7 @@
                   <a:srgbClr val="6B7A8F"/>
                 </a:solidFill>
                 <a:latin typeface="Arial"/>
-                <a:ea typeface="Microsoft YaHei"/>
+                <a:ea typeface="微软雅黑"/>
               </a:rPr>
               <a:t>L0 归属校验 · L1 同步退避 · L2 异步回收 · L3 全局回退，全部建立在 etcd 原子语义上</a:t>
             </a:r>
@@ -23739,7 +23707,7 @@
                   <a:srgbClr val="0B2A4A"/>
                 </a:solidFill>
                 <a:latin typeface="Arial"/>
-                <a:ea typeface="Microsoft YaHei"/>
+                <a:ea typeface="微软雅黑"/>
               </a:rPr>
               <a:t>两条创新指向同一目标：不改 API 的前提下，让分布式调度既跑得快，又绑得对。</a:t>
             </a:r>
@@ -23775,7 +23743,7 @@
                   <a:srgbClr val="6B7A8F"/>
                 </a:solidFill>
                 <a:latin typeface="Arial"/>
-                <a:ea typeface="Microsoft YaHei"/>
+                <a:ea typeface="微软雅黑"/>
               </a:rPr>
               <a:t>4 / 26</a:t>
             </a:r>
@@ -23885,7 +23853,7 @@
                   <a:srgbClr val="0B2A4A"/>
                 </a:solidFill>
                 <a:latin typeface="Arial"/>
-                <a:ea typeface="Microsoft YaHei"/>
+                <a:ea typeface="微软雅黑"/>
               </a:rPr>
               <a:t>分布式改造真正的难点在“绑定阶段”</a:t>
             </a:r>
@@ -23965,7 +23933,7 @@
                   <a:srgbClr val="1F5C99"/>
                 </a:solidFill>
                 <a:latin typeface="Arial"/>
-                <a:ea typeface="Microsoft YaHei"/>
+                <a:ea typeface="微软雅黑"/>
               </a:rPr>
               <a:t>Gödel 用三层解耦拿到并发，但 Binder 独立部署与分区漂移留下两个缺口</a:t>
             </a:r>
@@ -24029,7 +23997,7 @@
                   <a:srgbClr val="333333"/>
                 </a:solidFill>
                 <a:latin typeface="Arial"/>
-                <a:ea typeface="Microsoft YaHei"/>
+                <a:ea typeface="微软雅黑"/>
               </a:rPr>
               <a:t>▪  Q1 独立 Binder 重新引入串行化</a:t>
             </a:r>
@@ -24049,7 +24017,7 @@
                   <a:srgbClr val="333333"/>
                 </a:solidFill>
                 <a:latin typeface="Arial"/>
-                <a:ea typeface="Microsoft YaHei"/>
+                <a:ea typeface="微软雅黑"/>
               </a:rPr>
               <a:t>▪  Q2 归属漂移缺乏完整一致性论证</a:t>
             </a:r>
@@ -24069,7 +24037,7 @@
                   <a:srgbClr val="333333"/>
                 </a:solidFill>
                 <a:latin typeface="Arial"/>
-                <a:ea typeface="Microsoft YaHei"/>
+                <a:ea typeface="微软雅黑"/>
               </a:rPr>
               <a:t>▪  本文定位：把绑定拉回进程内</a:t>
             </a:r>
@@ -24105,7 +24073,7 @@
                   <a:srgbClr val="6B7A8F"/>
                 </a:solidFill>
                 <a:latin typeface="Arial"/>
-                <a:ea typeface="Microsoft YaHei"/>
+                <a:ea typeface="微软雅黑"/>
               </a:rPr>
               <a:t>5 / 26</a:t>
             </a:r>
@@ -24215,7 +24183,7 @@
                   <a:srgbClr val="0B2A4A"/>
                 </a:solidFill>
                 <a:latin typeface="Arial"/>
-                <a:ea typeface="Microsoft YaHei"/>
+                <a:ea typeface="微软雅黑"/>
               </a:rPr>
               <a:t>三层职责</a:t>
             </a:r>
@@ -24295,7 +24263,7 @@
                   <a:srgbClr val="1F5C99"/>
                 </a:solidFill>
                 <a:latin typeface="Arial"/>
-                <a:ea typeface="Microsoft YaHei"/>
+                <a:ea typeface="微软雅黑"/>
               </a:rPr>
               <a:t>分区之间无锁并发，状态推进全部由 Watch 事件驱动</a:t>
             </a:r>
@@ -24359,7 +24327,7 @@
                   <a:srgbClr val="333333"/>
                 </a:solidFill>
                 <a:latin typeface="Arial"/>
-                <a:ea typeface="Microsoft YaHei"/>
+                <a:ea typeface="微软雅黑"/>
               </a:rPr>
               <a:t>▪  Dispatcher：分区分配与回退</a:t>
             </a:r>
@@ -24379,7 +24347,7 @@
                   <a:srgbClr val="333333"/>
                 </a:solidFill>
                 <a:latin typeface="Arial"/>
-                <a:ea typeface="Microsoft YaHei"/>
+                <a:ea typeface="微软雅黑"/>
               </a:rPr>
               <a:t>▪  Scheduler：Filter/Score/Reserve</a:t>
             </a:r>
@@ -24399,7 +24367,7 @@
                   <a:srgbClr val="333333"/>
                 </a:solidFill>
                 <a:latin typeface="Arial"/>
-                <a:ea typeface="Microsoft YaHei"/>
+                <a:ea typeface="微软雅黑"/>
               </a:rPr>
               <a:t>▪  Binder：Bind 原子写与失败处理</a:t>
             </a:r>
@@ -24435,7 +24403,7 @@
                   <a:srgbClr val="6B7A8F"/>
                 </a:solidFill>
                 <a:latin typeface="Arial"/>
-                <a:ea typeface="Microsoft YaHei"/>
+                <a:ea typeface="微软雅黑"/>
               </a:rPr>
               <a:t>6 / 26</a:t>
             </a:r>
@@ -24545,7 +24513,7 @@
                   <a:srgbClr val="0B2A4A"/>
                 </a:solidFill>
                 <a:latin typeface="Arial"/>
-                <a:ea typeface="Microsoft YaHei"/>
+                <a:ea typeface="微软雅黑"/>
               </a:rPr>
               <a:t>Dispatcher 内部流程</a:t>
             </a:r>
@@ -24625,7 +24593,7 @@
                   <a:srgbClr val="1F5C99"/>
                 </a:solidFill>
                 <a:latin typeface="Arial"/>
-                <a:ea typeface="Microsoft YaHei"/>
+                <a:ea typeface="微软雅黑"/>
               </a:rPr>
               <a:t>先校验归属、再选分区、然后入队——它不选节点，只决定 Pod 去哪</a:t>
             </a:r>
@@ -24689,7 +24657,7 @@
                   <a:srgbClr val="333333"/>
                 </a:solidFill>
                 <a:latin typeface="Arial"/>
-                <a:ea typeface="Microsoft YaHei"/>
+                <a:ea typeface="微软雅黑"/>
               </a:rPr>
               <a:t>▪  归属校验：把漂移的 Pod 拦住</a:t>
             </a:r>
@@ -24709,7 +24677,7 @@
                   <a:srgbClr val="333333"/>
                 </a:solidFill>
                 <a:latin typeface="Arial"/>
-                <a:ea typeface="Microsoft YaHei"/>
+                <a:ea typeface="微软雅黑"/>
               </a:rPr>
               <a:t>▪  分区选择：按实例负载均衡</a:t>
             </a:r>
@@ -24729,7 +24697,7 @@
                   <a:srgbClr val="333333"/>
                 </a:solidFill>
                 <a:latin typeface="Arial"/>
-                <a:ea typeface="Microsoft YaHei"/>
+                <a:ea typeface="微软雅黑"/>
               </a:rPr>
               <a:t>▪  入队：交给对应 Scheduler 实例</a:t>
             </a:r>
@@ -24765,7 +24733,7 @@
                   <a:srgbClr val="6B7A8F"/>
                 </a:solidFill>
                 <a:latin typeface="Arial"/>
-                <a:ea typeface="Microsoft YaHei"/>
+                <a:ea typeface="微软雅黑"/>
               </a:rPr>
               <a:t>7 / 26</a:t>
             </a:r>
@@ -24875,7 +24843,7 @@
                   <a:srgbClr val="0B2A4A"/>
                 </a:solidFill>
                 <a:latin typeface="Arial"/>
-                <a:ea typeface="Microsoft YaHei"/>
+                <a:ea typeface="微软雅黑"/>
               </a:rPr>
               <a:t>Scheduler 内部流程</a:t>
             </a:r>
@@ -24955,7 +24923,7 @@
                   <a:srgbClr val="1F5C99"/>
                 </a:solidFill>
                 <a:latin typeface="Arial"/>
-                <a:ea typeface="Microsoft YaHei"/>
+                <a:ea typeface="微软雅黑"/>
               </a:rPr>
               <a:t>Filter → Score → Reserve → Permit，产出目标节点后交给 Binder 落盘</a:t>
             </a:r>
@@ -25019,7 +24987,7 @@
                   <a:srgbClr val="333333"/>
                 </a:solidFill>
                 <a:latin typeface="Arial"/>
-                <a:ea typeface="Microsoft YaHei"/>
+                <a:ea typeface="微软雅黑"/>
               </a:rPr>
               <a:t>▪  Filter：在分区内过滤候选节点</a:t>
             </a:r>
@@ -25039,7 +25007,7 @@
                   <a:srgbClr val="333333"/>
                 </a:solidFill>
                 <a:latin typeface="Arial"/>
-                <a:ea typeface="Microsoft YaHei"/>
+                <a:ea typeface="微软雅黑"/>
               </a:rPr>
               <a:t>▪  Score：打分选出最优节点</a:t>
             </a:r>
@@ -25059,7 +25027,7 @@
                   <a:srgbClr val="333333"/>
                 </a:solidFill>
                 <a:latin typeface="Arial"/>
-                <a:ea typeface="Microsoft YaHei"/>
+                <a:ea typeface="微软雅黑"/>
               </a:rPr>
               <a:t>▪  Reserve/Permit 后交 Binder</a:t>
             </a:r>
@@ -25095,7 +25063,7 @@
                   <a:srgbClr val="6B7A8F"/>
                 </a:solidFill>
                 <a:latin typeface="Arial"/>
-                <a:ea typeface="Microsoft YaHei"/>
+                <a:ea typeface="微软雅黑"/>
               </a:rPr>
               <a:t>8 / 26</a:t>
             </a:r>
@@ -25205,7 +25173,7 @@
                   <a:srgbClr val="0B2A4A"/>
                 </a:solidFill>
                 <a:latin typeface="Arial"/>
-                <a:ea typeface="Microsoft YaHei"/>
+                <a:ea typeface="微软雅黑"/>
               </a:rPr>
               <a:t>创新点 1</a:t>
             </a:r>
@@ -25285,7 +25253,7 @@
                   <a:srgbClr val="1F5C99"/>
                 </a:solidFill>
                 <a:latin typeface="Arial"/>
-                <a:ea typeface="Microsoft YaHei"/>
+                <a:ea typeface="微软雅黑"/>
               </a:rPr>
               <a:t>去掉一次跨进程绑定链路，是吞吐提升的第一性来源</a:t>
             </a:r>
@@ -25369,7 +25337,7 @@
                   <a:srgbClr val="333333"/>
                 </a:solidFill>
                 <a:latin typeface="Arial"/>
-                <a:ea typeface="Microsoft YaHei"/>
+                <a:ea typeface="微软雅黑"/>
               </a:rPr>
               <a:t>▪  绑定与决策同域，事件传递归零</a:t>
             </a:r>
@@ -25386,7 +25354,7 @@
                   <a:srgbClr val="333333"/>
                 </a:solidFill>
                 <a:latin typeface="Arial"/>
-                <a:ea typeface="Microsoft YaHei"/>
+                <a:ea typeface="微软雅黑"/>
               </a:rPr>
               <a:t>▪  序列化与网络往返被消除</a:t>
             </a:r>
@@ -25403,7 +25371,7 @@
                   <a:srgbClr val="333333"/>
                 </a:solidFill>
                 <a:latin typeface="Arial"/>
-                <a:ea typeface="Microsoft YaHei"/>
+                <a:ea typeface="微软雅黑"/>
               </a:rPr>
               <a:t>▪  保留 CLI 开关，可回退</a:t>
             </a:r>
@@ -25439,7 +25407,7 @@
                   <a:srgbClr val="6B7A8F"/>
                 </a:solidFill>
                 <a:latin typeface="Arial"/>
-                <a:ea typeface="Microsoft YaHei"/>
+                <a:ea typeface="微软雅黑"/>
               </a:rPr>
               <a:t>9 / 26</a:t>
             </a:r>

--- a/docs/thesis/defense/答辩PPT-基于etcd的分布式Kubernetes调度器.pptx
+++ b/docs/thesis/defense/答辩PPT-基于etcd的分布式Kubernetes调度器.pptx
@@ -5986,7 +5986,7 @@
         <p:spPr>
           <a:xfrm>
             <a:off x="36576" y="6748272"/>
-            <a:ext cx="12198096" cy="45720"/>
+            <a:ext cx="12088368" cy="45720"/>
           </a:xfrm>
           <a:prstGeom prst="rect">
             <a:avLst/>
@@ -17788,7 +17788,7 @@
         <p:spPr>
           <a:xfrm>
             <a:off x="36576" y="6748272"/>
-            <a:ext cx="12198096" cy="45720"/>
+            <a:ext cx="12088368" cy="45720"/>
           </a:xfrm>
           <a:prstGeom prst="rect">
             <a:avLst/>

--- a/docs/thesis/defense/答辩PPT-基于etcd的分布式Kubernetes调度器.pptx
+++ b/docs/thesis/defense/答辩PPT-基于etcd的分布式Kubernetes调度器.pptx
@@ -12299,7 +12299,7 @@
             <a:r>
               <a:rPr sz="1150" b="0">
                 <a:solidFill>
-                  <a:srgbClr val="6B7A8F"/>
+                  <a:srgbClr val="333333"/>
                 </a:solidFill>
                 <a:latin typeface="Arial"/>
                 <a:ea typeface="微软雅黑"/>
@@ -12445,7 +12445,7 @@
             <a:r>
               <a:rPr sz="1150" b="0">
                 <a:solidFill>
-                  <a:srgbClr val="6B7A8F"/>
+                  <a:srgbClr val="333333"/>
                 </a:solidFill>
                 <a:latin typeface="Arial"/>
                 <a:ea typeface="微软雅黑"/>
@@ -12591,7 +12591,7 @@
             <a:r>
               <a:rPr sz="1150" b="0">
                 <a:solidFill>
-                  <a:srgbClr val="6B7A8F"/>
+                  <a:srgbClr val="333333"/>
                 </a:solidFill>
                 <a:latin typeface="Arial"/>
                 <a:ea typeface="微软雅黑"/>
@@ -15662,7 +15662,7 @@
             <a:r>
               <a:rPr sz="1150" b="0">
                 <a:solidFill>
-                  <a:srgbClr val="6B7A8F"/>
+                  <a:srgbClr val="333333"/>
                 </a:solidFill>
                 <a:latin typeface="Arial"/>
                 <a:ea typeface="微软雅黑"/>
@@ -15808,7 +15808,7 @@
             <a:r>
               <a:rPr sz="1150" b="0">
                 <a:solidFill>
-                  <a:srgbClr val="6B7A8F"/>
+                  <a:srgbClr val="333333"/>
                 </a:solidFill>
                 <a:latin typeface="Arial"/>
                 <a:ea typeface="微软雅黑"/>
@@ -15954,7 +15954,7 @@
             <a:r>
               <a:rPr sz="1150" b="0">
                 <a:solidFill>
-                  <a:srgbClr val="6B7A8F"/>
+                  <a:srgbClr val="333333"/>
                 </a:solidFill>
                 <a:latin typeface="Arial"/>
                 <a:ea typeface="微软雅黑"/>
@@ -16100,7 +16100,7 @@
             <a:r>
               <a:rPr sz="1150" b="0">
                 <a:solidFill>
-                  <a:srgbClr val="6B7A8F"/>
+                  <a:srgbClr val="333333"/>
                 </a:solidFill>
                 <a:latin typeface="Arial"/>
                 <a:ea typeface="微软雅黑"/>
@@ -16246,7 +16246,7 @@
             <a:r>
               <a:rPr sz="1150" b="0">
                 <a:solidFill>
-                  <a:srgbClr val="6B7A8F"/>
+                  <a:srgbClr val="333333"/>
                 </a:solidFill>
                 <a:latin typeface="Arial"/>
                 <a:ea typeface="微软雅黑"/>
@@ -16392,7 +16392,7 @@
             <a:r>
               <a:rPr sz="1150" b="0">
                 <a:solidFill>
-                  <a:srgbClr val="6B7A8F"/>
+                  <a:srgbClr val="333333"/>
                 </a:solidFill>
                 <a:latin typeface="Arial"/>
                 <a:ea typeface="微软雅黑"/>
@@ -16764,7 +16764,7 @@
             <a:r>
               <a:rPr sz="1150" b="0">
                 <a:solidFill>
-                  <a:srgbClr val="6B7A8F"/>
+                  <a:srgbClr val="333333"/>
                 </a:solidFill>
                 <a:latin typeface="Arial"/>
                 <a:ea typeface="微软雅黑"/>
@@ -16910,7 +16910,7 @@
             <a:r>
               <a:rPr sz="1150" b="0">
                 <a:solidFill>
-                  <a:srgbClr val="6B7A8F"/>
+                  <a:srgbClr val="333333"/>
                 </a:solidFill>
                 <a:latin typeface="Arial"/>
                 <a:ea typeface="微软雅黑"/>
@@ -17056,7 +17056,7 @@
             <a:r>
               <a:rPr sz="1150" b="0">
                 <a:solidFill>
-                  <a:srgbClr val="6B7A8F"/>
+                  <a:srgbClr val="333333"/>
                 </a:solidFill>
                 <a:latin typeface="Arial"/>
                 <a:ea typeface="微软雅黑"/>
@@ -17202,7 +17202,7 @@
             <a:r>
               <a:rPr sz="1150" b="0">
                 <a:solidFill>
-                  <a:srgbClr val="6B7A8F"/>
+                  <a:srgbClr val="333333"/>
                 </a:solidFill>
                 <a:latin typeface="Arial"/>
                 <a:ea typeface="微软雅黑"/>
@@ -17348,7 +17348,7 @@
             <a:r>
               <a:rPr sz="1150" b="0">
                 <a:solidFill>
-                  <a:srgbClr val="6B7A8F"/>
+                  <a:srgbClr val="333333"/>
                 </a:solidFill>
                 <a:latin typeface="Arial"/>
                 <a:ea typeface="微软雅黑"/>
@@ -17494,7 +17494,7 @@
             <a:r>
               <a:rPr sz="1150" b="0">
                 <a:solidFill>
-                  <a:srgbClr val="6B7A8F"/>
+                  <a:srgbClr val="333333"/>
                 </a:solidFill>
                 <a:latin typeface="Arial"/>
                 <a:ea typeface="微软雅黑"/>
@@ -23428,7 +23428,7 @@
             <a:r>
               <a:rPr sz="1150" b="0">
                 <a:solidFill>
-                  <a:srgbClr val="6B7A8F"/>
+                  <a:srgbClr val="333333"/>
                 </a:solidFill>
                 <a:latin typeface="Arial"/>
                 <a:ea typeface="微软雅黑"/>
@@ -23574,7 +23574,7 @@
             <a:r>
               <a:rPr sz="1150" b="0">
                 <a:solidFill>
-                  <a:srgbClr val="6B7A8F"/>
+                  <a:srgbClr val="333333"/>
                 </a:solidFill>
                 <a:latin typeface="Arial"/>
                 <a:ea typeface="微软雅黑"/>

--- a/docs/thesis/defense/答辩PPT-基于etcd的分布式Kubernetes调度器.pptx
+++ b/docs/thesis/defense/答辩PPT-基于etcd的分布式Kubernetes调度器.pptx
@@ -5916,7 +5916,7 @@
             <a:r>
               <a:rPr sz="1250" b="0">
                 <a:solidFill>
-                  <a:srgbClr val="6B7A8F"/>
+                  <a:srgbClr val="566474"/>
                 </a:solidFill>
                 <a:latin typeface="Arial"/>
                 <a:ea typeface="微软雅黑"/>
@@ -5933,7 +5933,7 @@
             <a:r>
               <a:rPr sz="1250" b="0">
                 <a:solidFill>
-                  <a:srgbClr val="6B7A8F"/>
+                  <a:srgbClr val="566474"/>
                 </a:solidFill>
                 <a:latin typeface="Arial"/>
                 <a:ea typeface="微软雅黑"/>
@@ -5950,7 +5950,7 @@
             <a:r>
               <a:rPr sz="1250" b="0">
                 <a:solidFill>
-                  <a:srgbClr val="6B7A8F"/>
+                  <a:srgbClr val="566474"/>
                 </a:solidFill>
                 <a:latin typeface="Arial"/>
                 <a:ea typeface="微软雅黑"/>
@@ -5967,7 +5967,7 @@
             <a:r>
               <a:rPr sz="1250" b="0">
                 <a:solidFill>
-                  <a:srgbClr val="6B7A8F"/>
+                  <a:srgbClr val="566474"/>
                 </a:solidFill>
                 <a:latin typeface="Arial"/>
                 <a:ea typeface="微软雅黑"/>
@@ -6047,7 +6047,7 @@
             <a:r>
               <a:rPr sz="950" b="0">
                 <a:solidFill>
-                  <a:srgbClr val="6B7A8F"/>
+                  <a:srgbClr val="566474"/>
                 </a:solidFill>
                 <a:latin typeface="Arial"/>
                 <a:ea typeface="微软雅黑"/>
@@ -6377,7 +6377,7 @@
             <a:r>
               <a:rPr sz="950" b="0">
                 <a:solidFill>
-                  <a:srgbClr val="6B7A8F"/>
+                  <a:srgbClr val="566474"/>
                 </a:solidFill>
                 <a:latin typeface="Arial"/>
                 <a:ea typeface="微软雅黑"/>
@@ -6765,7 +6765,7 @@
             <a:r>
               <a:rPr sz="1100" b="0">
                 <a:solidFill>
-                  <a:srgbClr val="6B7A8F"/>
+                  <a:srgbClr val="566474"/>
                 </a:solidFill>
                 <a:latin typeface="Arial"/>
                 <a:ea typeface="微软雅黑"/>
@@ -6963,7 +6963,7 @@
             <a:r>
               <a:rPr sz="1100" b="0">
                 <a:solidFill>
-                  <a:srgbClr val="6B7A8F"/>
+                  <a:srgbClr val="566474"/>
                 </a:solidFill>
                 <a:latin typeface="Arial"/>
                 <a:ea typeface="微软雅黑"/>
@@ -7161,7 +7161,7 @@
             <a:r>
               <a:rPr sz="1100" b="0">
                 <a:solidFill>
-                  <a:srgbClr val="6B7A8F"/>
+                  <a:srgbClr val="566474"/>
                 </a:solidFill>
                 <a:latin typeface="Arial"/>
                 <a:ea typeface="微软雅黑"/>
@@ -7359,7 +7359,7 @@
             <a:r>
               <a:rPr sz="1100" b="0">
                 <a:solidFill>
-                  <a:srgbClr val="6B7A8F"/>
+                  <a:srgbClr val="566474"/>
                 </a:solidFill>
                 <a:latin typeface="Arial"/>
                 <a:ea typeface="微软雅黑"/>
@@ -7395,7 +7395,7 @@
             <a:r>
               <a:rPr sz="950" b="0">
                 <a:solidFill>
-                  <a:srgbClr val="6B7A8F"/>
+                  <a:srgbClr val="566474"/>
                 </a:solidFill>
                 <a:latin typeface="Arial"/>
                 <a:ea typeface="微软雅黑"/>
@@ -7725,7 +7725,7 @@
             <a:r>
               <a:rPr sz="950" b="0">
                 <a:solidFill>
-                  <a:srgbClr val="6B7A8F"/>
+                  <a:srgbClr val="566474"/>
                 </a:solidFill>
                 <a:latin typeface="Arial"/>
                 <a:ea typeface="微软雅黑"/>
@@ -8357,7 +8357,7 @@
             <a:r>
               <a:rPr sz="950" b="0">
                 <a:solidFill>
-                  <a:srgbClr val="6B7A8F"/>
+                  <a:srgbClr val="566474"/>
                 </a:solidFill>
                 <a:latin typeface="Arial"/>
                 <a:ea typeface="微软雅黑"/>
@@ -8607,7 +8607,7 @@
             <a:r>
               <a:rPr sz="950" b="0">
                 <a:solidFill>
-                  <a:srgbClr val="6B7A8F"/>
+                  <a:srgbClr val="566474"/>
                 </a:solidFill>
                 <a:latin typeface="Arial"/>
                 <a:ea typeface="微软雅黑"/>
@@ -8789,7 +8789,7 @@
             <a:r>
               <a:rPr sz="800" b="0">
                 <a:solidFill>
-                  <a:srgbClr val="6B7A8F"/>
+                  <a:srgbClr val="566474"/>
                 </a:solidFill>
                 <a:latin typeface="Arial"/>
                 <a:ea typeface="微软雅黑"/>
@@ -8891,7 +8891,7 @@
             <a:r>
               <a:rPr sz="800" b="0">
                 <a:solidFill>
-                  <a:srgbClr val="6B7A8F"/>
+                  <a:srgbClr val="566474"/>
                 </a:solidFill>
                 <a:latin typeface="Arial"/>
                 <a:ea typeface="微软雅黑"/>
@@ -8993,7 +8993,7 @@
             <a:r>
               <a:rPr sz="800" b="0">
                 <a:solidFill>
-                  <a:srgbClr val="6B7A8F"/>
+                  <a:srgbClr val="566474"/>
                 </a:solidFill>
                 <a:latin typeface="Arial"/>
                 <a:ea typeface="微软雅黑"/>
@@ -9095,7 +9095,7 @@
             <a:r>
               <a:rPr sz="800" b="0">
                 <a:solidFill>
-                  <a:srgbClr val="6B7A8F"/>
+                  <a:srgbClr val="566474"/>
                 </a:solidFill>
                 <a:latin typeface="Arial"/>
                 <a:ea typeface="微软雅黑"/>
@@ -9197,7 +9197,7 @@
             <a:r>
               <a:rPr sz="800" b="0">
                 <a:solidFill>
-                  <a:srgbClr val="6B7A8F"/>
+                  <a:srgbClr val="566474"/>
                 </a:solidFill>
                 <a:latin typeface="Arial"/>
                 <a:ea typeface="微软雅黑"/>
@@ -9299,7 +9299,7 @@
             <a:r>
               <a:rPr sz="800" b="0">
                 <a:solidFill>
-                  <a:srgbClr val="6B7A8F"/>
+                  <a:srgbClr val="566474"/>
                 </a:solidFill>
                 <a:latin typeface="Arial"/>
                 <a:ea typeface="微软雅黑"/>
@@ -9335,7 +9335,7 @@
             <a:r>
               <a:rPr sz="850" b="0">
                 <a:solidFill>
-                  <a:srgbClr val="6B7A8F"/>
+                  <a:srgbClr val="566474"/>
                 </a:solidFill>
                 <a:latin typeface="Arial"/>
                 <a:ea typeface="微软雅黑"/>
@@ -9371,7 +9371,7 @@
             <a:r>
               <a:rPr sz="950" b="0">
                 <a:solidFill>
-                  <a:srgbClr val="6B7A8F"/>
+                  <a:srgbClr val="566474"/>
                 </a:solidFill>
                 <a:latin typeface="Arial"/>
                 <a:ea typeface="微软雅黑"/>
@@ -9679,7 +9679,7 @@
             <a:r>
               <a:rPr sz="1200" b="0">
                 <a:solidFill>
-                  <a:srgbClr val="6B7A8F"/>
+                  <a:srgbClr val="566474"/>
                 </a:solidFill>
                 <a:latin typeface="Arial"/>
                 <a:ea typeface="微软雅黑"/>
@@ -9797,7 +9797,7 @@
             <a:r>
               <a:rPr sz="1200" b="0">
                 <a:solidFill>
-                  <a:srgbClr val="6B7A8F"/>
+                  <a:srgbClr val="566474"/>
                 </a:solidFill>
                 <a:latin typeface="Arial"/>
                 <a:ea typeface="微软雅黑"/>
@@ -9915,7 +9915,7 @@
             <a:r>
               <a:rPr sz="1200" b="0">
                 <a:solidFill>
-                  <a:srgbClr val="6B7A8F"/>
+                  <a:srgbClr val="566474"/>
                 </a:solidFill>
                 <a:latin typeface="Arial"/>
                 <a:ea typeface="微软雅黑"/>
@@ -10031,7 +10031,7 @@
             <a:r>
               <a:rPr sz="950" b="0">
                 <a:solidFill>
-                  <a:srgbClr val="6B7A8F"/>
+                  <a:srgbClr val="566474"/>
                 </a:solidFill>
                 <a:latin typeface="Arial"/>
                 <a:ea typeface="微软雅黑"/>
@@ -10361,7 +10361,7 @@
             <a:r>
               <a:rPr sz="850" b="0">
                 <a:solidFill>
-                  <a:srgbClr val="6B7A8F"/>
+                  <a:srgbClr val="566474"/>
                 </a:solidFill>
                 <a:latin typeface="Arial"/>
                 <a:ea typeface="微软雅黑"/>
@@ -10397,7 +10397,7 @@
             <a:r>
               <a:rPr sz="950" b="0">
                 <a:solidFill>
-                  <a:srgbClr val="6B7A8F"/>
+                  <a:srgbClr val="566474"/>
                 </a:solidFill>
                 <a:latin typeface="Arial"/>
                 <a:ea typeface="微软雅黑"/>
@@ -10727,7 +10727,7 @@
             <a:r>
               <a:rPr sz="850" b="0">
                 <a:solidFill>
-                  <a:srgbClr val="6B7A8F"/>
+                  <a:srgbClr val="566474"/>
                 </a:solidFill>
                 <a:latin typeface="Arial"/>
                 <a:ea typeface="微软雅黑"/>
@@ -10763,7 +10763,7 @@
             <a:r>
               <a:rPr sz="950" b="0">
                 <a:solidFill>
-                  <a:srgbClr val="6B7A8F"/>
+                  <a:srgbClr val="566474"/>
                 </a:solidFill>
                 <a:latin typeface="Arial"/>
                 <a:ea typeface="微软雅黑"/>
@@ -11561,7 +11561,7 @@
             <a:r>
               <a:rPr sz="850" b="0">
                 <a:solidFill>
-                  <a:srgbClr val="6B7A8F"/>
+                  <a:srgbClr val="566474"/>
                 </a:solidFill>
                 <a:latin typeface="Arial"/>
                 <a:ea typeface="微软雅黑"/>
@@ -11597,7 +11597,7 @@
             <a:r>
               <a:rPr sz="950" b="0">
                 <a:solidFill>
-                  <a:srgbClr val="6B7A8F"/>
+                  <a:srgbClr val="566474"/>
                 </a:solidFill>
                 <a:latin typeface="Arial"/>
                 <a:ea typeface="微软雅黑"/>
@@ -11927,7 +11927,7 @@
             <a:r>
               <a:rPr sz="850" b="0">
                 <a:solidFill>
-                  <a:srgbClr val="6B7A8F"/>
+                  <a:srgbClr val="566474"/>
                 </a:solidFill>
                 <a:latin typeface="Arial"/>
                 <a:ea typeface="微软雅黑"/>
@@ -11963,7 +11963,7 @@
             <a:r>
               <a:rPr sz="950" b="0">
                 <a:solidFill>
-                  <a:srgbClr val="6B7A8F"/>
+                  <a:srgbClr val="566474"/>
                 </a:solidFill>
                 <a:latin typeface="Arial"/>
                 <a:ea typeface="微软雅黑"/>
@@ -12757,7 +12757,7 @@
             <a:r>
               <a:rPr sz="950" b="0">
                 <a:solidFill>
-                  <a:srgbClr val="6B7A8F"/>
+                  <a:srgbClr val="566474"/>
                 </a:solidFill>
                 <a:latin typeface="Arial"/>
                 <a:ea typeface="微软雅黑"/>
@@ -13087,7 +13087,7 @@
             <a:r>
               <a:rPr sz="850" b="0">
                 <a:solidFill>
-                  <a:srgbClr val="6B7A8F"/>
+                  <a:srgbClr val="566474"/>
                 </a:solidFill>
                 <a:latin typeface="Arial"/>
                 <a:ea typeface="微软雅黑"/>
@@ -13123,7 +13123,7 @@
             <a:r>
               <a:rPr sz="950" b="0">
                 <a:solidFill>
-                  <a:srgbClr val="6B7A8F"/>
+                  <a:srgbClr val="566474"/>
                 </a:solidFill>
                 <a:latin typeface="Arial"/>
                 <a:ea typeface="微软雅黑"/>
@@ -13696,7 +13696,7 @@
             <a:r>
               <a:rPr sz="950" b="0">
                 <a:solidFill>
-                  <a:srgbClr val="6B7A8F"/>
+                  <a:srgbClr val="566474"/>
                 </a:solidFill>
                 <a:latin typeface="Arial"/>
                 <a:ea typeface="微软雅黑"/>
@@ -13812,7 +13812,7 @@
             <a:r>
               <a:rPr sz="850" b="0">
                 <a:solidFill>
-                  <a:srgbClr val="6B7A8F"/>
+                  <a:srgbClr val="566474"/>
                 </a:solidFill>
                 <a:latin typeface="Arial"/>
                 <a:ea typeface="微软雅黑"/>
@@ -13848,7 +13848,7 @@
             <a:r>
               <a:rPr sz="950" b="0">
                 <a:solidFill>
-                  <a:srgbClr val="6B7A8F"/>
+                  <a:srgbClr val="566474"/>
                 </a:solidFill>
                 <a:latin typeface="Arial"/>
                 <a:ea typeface="微软雅黑"/>
@@ -14551,7 +14551,7 @@
             <a:r>
               <a:rPr sz="850" b="0">
                 <a:solidFill>
-                  <a:srgbClr val="6B7A8F"/>
+                  <a:srgbClr val="566474"/>
                 </a:solidFill>
                 <a:latin typeface="Arial"/>
                 <a:ea typeface="微软雅黑"/>
@@ -14587,7 +14587,7 @@
             <a:r>
               <a:rPr sz="950" b="0">
                 <a:solidFill>
-                  <a:srgbClr val="6B7A8F"/>
+                  <a:srgbClr val="566474"/>
                 </a:solidFill>
                 <a:latin typeface="Arial"/>
                 <a:ea typeface="微软雅黑"/>
@@ -15290,7 +15290,7 @@
             <a:r>
               <a:rPr sz="850" b="0">
                 <a:solidFill>
-                  <a:srgbClr val="6B7A8F"/>
+                  <a:srgbClr val="566474"/>
                 </a:solidFill>
                 <a:latin typeface="Arial"/>
                 <a:ea typeface="微软雅黑"/>
@@ -15326,7 +15326,7 @@
             <a:r>
               <a:rPr sz="950" b="0">
                 <a:solidFill>
-                  <a:srgbClr val="6B7A8F"/>
+                  <a:srgbClr val="566474"/>
                 </a:solidFill>
                 <a:latin typeface="Arial"/>
                 <a:ea typeface="微软雅黑"/>
@@ -16428,7 +16428,7 @@
             <a:r>
               <a:rPr sz="950" b="0">
                 <a:solidFill>
-                  <a:srgbClr val="6B7A8F"/>
+                  <a:srgbClr val="566474"/>
                 </a:solidFill>
                 <a:latin typeface="Arial"/>
                 <a:ea typeface="微软雅黑"/>
@@ -17530,7 +17530,7 @@
             <a:r>
               <a:rPr sz="950" b="0">
                 <a:solidFill>
-                  <a:srgbClr val="6B7A8F"/>
+                  <a:srgbClr val="566474"/>
                 </a:solidFill>
                 <a:latin typeface="Arial"/>
                 <a:ea typeface="微软雅黑"/>
@@ -17672,7 +17672,7 @@
             <a:r>
               <a:rPr sz="1600" b="0">
                 <a:solidFill>
-                  <a:srgbClr val="6B7A8F"/>
+                  <a:srgbClr val="566474"/>
                 </a:solidFill>
                 <a:latin typeface="Arial"/>
                 <a:ea typeface="微软雅黑"/>
@@ -17708,7 +17708,7 @@
             <a:r>
               <a:rPr sz="1300" b="0">
                 <a:solidFill>
-                  <a:srgbClr val="6B7A8F"/>
+                  <a:srgbClr val="566474"/>
                 </a:solidFill>
                 <a:latin typeface="Arial"/>
                 <a:ea typeface="微软雅黑"/>
@@ -17725,7 +17725,7 @@
             <a:r>
               <a:rPr sz="1300" b="0">
                 <a:solidFill>
-                  <a:srgbClr val="6B7A8F"/>
+                  <a:srgbClr val="566474"/>
                 </a:solidFill>
                 <a:latin typeface="Arial"/>
                 <a:ea typeface="微软雅黑"/>
@@ -17849,7 +17849,7 @@
             <a:r>
               <a:rPr sz="950" b="0">
                 <a:solidFill>
-                  <a:srgbClr val="6B7A8F"/>
+                  <a:srgbClr val="566474"/>
                 </a:solidFill>
                 <a:latin typeface="Arial"/>
                 <a:ea typeface="微软雅黑"/>
@@ -19038,7 +19038,7 @@
             <a:r>
               <a:rPr sz="950" b="0">
                 <a:solidFill>
-                  <a:srgbClr val="6B7A8F"/>
+                  <a:srgbClr val="566474"/>
                 </a:solidFill>
                 <a:latin typeface="Arial"/>
                 <a:ea typeface="微软雅黑"/>
@@ -19889,7 +19889,7 @@
             <a:r>
               <a:rPr sz="950" b="0">
                 <a:solidFill>
-                  <a:srgbClr val="6B7A8F"/>
+                  <a:srgbClr val="566474"/>
                 </a:solidFill>
                 <a:latin typeface="Arial"/>
                 <a:ea typeface="微软雅黑"/>
@@ -20195,7 +20195,7 @@
             <a:r>
               <a:rPr sz="950" b="0">
                 <a:solidFill>
-                  <a:srgbClr val="6B7A8F"/>
+                  <a:srgbClr val="566474"/>
                 </a:solidFill>
                 <a:latin typeface="Arial"/>
                 <a:ea typeface="微软雅黑"/>
@@ -21313,7 +21313,7 @@
             <a:r>
               <a:rPr sz="950" b="0">
                 <a:solidFill>
-                  <a:srgbClr val="6B7A8F"/>
+                  <a:srgbClr val="566474"/>
                 </a:solidFill>
                 <a:latin typeface="Arial"/>
                 <a:ea typeface="微软雅黑"/>
@@ -22136,7 +22136,7 @@
             <a:r>
               <a:rPr sz="950" b="0">
                 <a:solidFill>
-                  <a:srgbClr val="6B7A8F"/>
+                  <a:srgbClr val="566474"/>
                 </a:solidFill>
                 <a:latin typeface="Arial"/>
                 <a:ea typeface="微软雅黑"/>
@@ -22442,7 +22442,7 @@
             <a:r>
               <a:rPr sz="950" b="0">
                 <a:solidFill>
-                  <a:srgbClr val="6B7A8F"/>
+                  <a:srgbClr val="566474"/>
                 </a:solidFill>
                 <a:latin typeface="Arial"/>
                 <a:ea typeface="微软雅黑"/>
@@ -22748,7 +22748,7 @@
             <a:r>
               <a:rPr sz="950" b="0">
                 <a:solidFill>
-                  <a:srgbClr val="6B7A8F"/>
+                  <a:srgbClr val="566474"/>
                 </a:solidFill>
                 <a:latin typeface="Arial"/>
                 <a:ea typeface="微软雅黑"/>
@@ -23092,7 +23092,7 @@
             <a:r>
               <a:rPr sz="950" b="0">
                 <a:solidFill>
-                  <a:srgbClr val="6B7A8F"/>
+                  <a:srgbClr val="566474"/>
                 </a:solidFill>
                 <a:latin typeface="Arial"/>
                 <a:ea typeface="微软雅黑"/>
@@ -23740,7 +23740,7 @@
             <a:r>
               <a:rPr sz="950" b="0">
                 <a:solidFill>
-                  <a:srgbClr val="6B7A8F"/>
+                  <a:srgbClr val="566474"/>
                 </a:solidFill>
                 <a:latin typeface="Arial"/>
                 <a:ea typeface="微软雅黑"/>
@@ -24070,7 +24070,7 @@
             <a:r>
               <a:rPr sz="950" b="0">
                 <a:solidFill>
-                  <a:srgbClr val="6B7A8F"/>
+                  <a:srgbClr val="566474"/>
                 </a:solidFill>
                 <a:latin typeface="Arial"/>
                 <a:ea typeface="微软雅黑"/>
@@ -24400,7 +24400,7 @@
             <a:r>
               <a:rPr sz="950" b="0">
                 <a:solidFill>
-                  <a:srgbClr val="6B7A8F"/>
+                  <a:srgbClr val="566474"/>
                 </a:solidFill>
                 <a:latin typeface="Arial"/>
                 <a:ea typeface="微软雅黑"/>
@@ -24730,7 +24730,7 @@
             <a:r>
               <a:rPr sz="950" b="0">
                 <a:solidFill>
-                  <a:srgbClr val="6B7A8F"/>
+                  <a:srgbClr val="566474"/>
                 </a:solidFill>
                 <a:latin typeface="Arial"/>
                 <a:ea typeface="微软雅黑"/>
@@ -25060,7 +25060,7 @@
             <a:r>
               <a:rPr sz="950" b="0">
                 <a:solidFill>
-                  <a:srgbClr val="6B7A8F"/>
+                  <a:srgbClr val="566474"/>
                 </a:solidFill>
                 <a:latin typeface="Arial"/>
                 <a:ea typeface="微软雅黑"/>
@@ -25404,7 +25404,7 @@
             <a:r>
               <a:rPr sz="950" b="0">
                 <a:solidFill>
-                  <a:srgbClr val="6B7A8F"/>
+                  <a:srgbClr val="566474"/>
                 </a:solidFill>
                 <a:latin typeface="Arial"/>
                 <a:ea typeface="微软雅黑"/>

--- a/docs/thesis/defense/答辩PPT-基于etcd的分布式Kubernetes调度器.pptx
+++ b/docs/thesis/defense/答辩PPT-基于etcd的分布式Kubernetes调度器.pptx
@@ -12078,7 +12078,7 @@
                 <a:latin typeface="Arial"/>
                 <a:ea typeface="微软雅黑"/>
               </a:rPr>
-              <a:t>万节点规模下，吞吐上限与单点风险同时暴露</a:t>
+              <a:t>研究背景</a:t>
             </a:r>
           </a:p>
         </p:txBody>
@@ -12158,7 +12158,7 @@
                 <a:latin typeface="Arial"/>
                 <a:ea typeface="微软雅黑"/>
               </a:rPr>
-              <a:t>业务要求秒级承接海量 Pod，又不能因单点中断；单实例架构在两头受制</a:t>
+              <a:t>生产集群进入万节点量级，单实例架构在吞吐与高可用上同时受制</a:t>
             </a:r>
           </a:p>
         </p:txBody>

--- a/docs/thesis/defense/答辩PPT-基于etcd的分布式Kubernetes调度器.pptx
+++ b/docs/thesis/defense/答辩PPT-基于etcd的分布式Kubernetes调度器.pptx
@@ -12165,14 +12165,54 @@
       </p:sp>
       <p:sp>
         <p:nvSpPr>
-          <p:cNvPr id="6" name="Rounded Rectangle 5"/>
+          <p:cNvPr id="6" name="TextBox 5"/>
+          <p:cNvSpPr txBox="1"/>
+          <p:nvPr/>
+        </p:nvSpPr>
+        <p:spPr>
+          <a:xfrm>
+            <a:off x="566928" y="1719072"/>
+            <a:ext cx="10058400" cy="960120"/>
+          </a:xfrm>
+          <a:prstGeom prst="rect">
+            <a:avLst/>
+          </a:prstGeom>
+          <a:noFill/>
+        </p:spPr>
+        <p:txBody>
+          <a:bodyPr wrap="square" anchor="t" lIns="0" rIns="0" tIns="0" bIns="0">
+            <a:spAutoFit/>
+          </a:bodyPr>
+          <a:lstStyle/>
+          <a:p>
+            <a:pPr algn="l">
+              <a:lnSpc>
+                <a:spcPct val="135000"/>
+              </a:lnSpc>
+            </a:pPr>
+            <a:r>
+              <a:rPr sz="1300" b="0">
+                <a:solidFill>
+                  <a:srgbClr val="333333"/>
+                </a:solidFill>
+                <a:latin typeface="Arial"/>
+                <a:ea typeface="微软雅黑"/>
+              </a:rPr>
+              <a:t>Kubernetes 已成为云原生的事实标准，调度器处在 Pod 生命周期的关键路径上：它的吞吐与延迟直接决定集群资源利用率与业务响应速度。千节点规模下单实例尚可支撑，集群进入万节点量级后，三个瓶颈同时显现。</a:t>
+            </a:r>
+          </a:p>
+        </p:txBody>
+      </p:sp>
+      <p:sp>
+        <p:nvSpPr>
+          <p:cNvPr id="7" name="Rounded Rectangle 6"/>
           <p:cNvSpPr/>
           <p:nvPr/>
         </p:nvSpPr>
         <p:spPr>
           <a:xfrm>
-            <a:off x="566928" y="1874519"/>
-            <a:ext cx="3517391" cy="1371600"/>
+            <a:off x="566928" y="2834640"/>
+            <a:ext cx="3517391" cy="1353312"/>
           </a:xfrm>
           <a:prstGeom prst="roundRect">
             <a:avLst/>
@@ -12211,14 +12251,14 @@
       </p:sp>
       <p:sp>
         <p:nvSpPr>
-          <p:cNvPr id="7" name="Rectangle 6"/>
+          <p:cNvPr id="8" name="Rectangle 7"/>
           <p:cNvSpPr/>
           <p:nvPr/>
         </p:nvSpPr>
         <p:spPr>
           <a:xfrm>
-            <a:off x="566928" y="1874519"/>
-            <a:ext cx="50292" cy="1371600"/>
+            <a:off x="566928" y="2834640"/>
+            <a:ext cx="50292" cy="1353312"/>
           </a:xfrm>
           <a:prstGeom prst="rect">
             <a:avLst/>
@@ -12255,14 +12295,14 @@
       </p:sp>
       <p:sp>
         <p:nvSpPr>
-          <p:cNvPr id="8" name="TextBox 7"/>
+          <p:cNvPr id="9" name="TextBox 8"/>
           <p:cNvSpPr txBox="1"/>
           <p:nvPr/>
         </p:nvSpPr>
         <p:spPr>
           <a:xfrm>
-            <a:off x="731520" y="2002536"/>
-            <a:ext cx="3243072" cy="1188720"/>
+            <a:off x="731520" y="2962656"/>
+            <a:ext cx="3243072" cy="1170432"/>
           </a:xfrm>
           <a:prstGeom prst="rect">
             <a:avLst/>
@@ -12284,7 +12324,7 @@
                 <a:latin typeface="Arial"/>
                 <a:ea typeface="微软雅黑"/>
               </a:rPr>
-              <a:t>规模</a:t>
+              <a:t>吞吐存在上限</a:t>
             </a:r>
           </a:p>
           <a:p>
@@ -12304,21 +12344,21 @@
                 <a:latin typeface="Arial"/>
                 <a:ea typeface="微软雅黑"/>
               </a:rPr>
-              <a:t>生产集群已进入万节点级，规模仍在增长</a:t>
-            </a:r>
-          </a:p>
-        </p:txBody>
-      </p:sp>
-      <p:sp>
-        <p:nvSpPr>
-          <p:cNvPr id="9" name="Rounded Rectangle 8"/>
+              <a:t>activeQ 串行处理 Pod，大规模弹性伸缩与批任务启动被拖慢</a:t>
+            </a:r>
+          </a:p>
+        </p:txBody>
+      </p:sp>
+      <p:sp>
+        <p:nvSpPr>
+          <p:cNvPr id="10" name="Rounded Rectangle 9"/>
           <p:cNvSpPr/>
           <p:nvPr/>
         </p:nvSpPr>
         <p:spPr>
           <a:xfrm>
-            <a:off x="4340351" y="1874519"/>
-            <a:ext cx="3517391" cy="1371600"/>
+            <a:off x="4340351" y="2834640"/>
+            <a:ext cx="3517391" cy="1353312"/>
           </a:xfrm>
           <a:prstGeom prst="roundRect">
             <a:avLst/>
@@ -12357,14 +12397,14 @@
       </p:sp>
       <p:sp>
         <p:nvSpPr>
-          <p:cNvPr id="10" name="Rectangle 9"/>
+          <p:cNvPr id="11" name="Rectangle 10"/>
           <p:cNvSpPr/>
           <p:nvPr/>
         </p:nvSpPr>
         <p:spPr>
           <a:xfrm>
-            <a:off x="4340351" y="1874519"/>
-            <a:ext cx="50292" cy="1371600"/>
+            <a:off x="4340351" y="2834640"/>
+            <a:ext cx="50292" cy="1353312"/>
           </a:xfrm>
           <a:prstGeom prst="rect">
             <a:avLst/>
@@ -12401,14 +12441,14 @@
       </p:sp>
       <p:sp>
         <p:nvSpPr>
-          <p:cNvPr id="11" name="TextBox 10"/>
+          <p:cNvPr id="12" name="TextBox 11"/>
           <p:cNvSpPr txBox="1"/>
           <p:nvPr/>
         </p:nvSpPr>
         <p:spPr>
           <a:xfrm>
-            <a:off x="4504943" y="2002536"/>
-            <a:ext cx="3243072" cy="1188720"/>
+            <a:off x="4504943" y="2962656"/>
+            <a:ext cx="3243072" cy="1170432"/>
           </a:xfrm>
           <a:prstGeom prst="rect">
             <a:avLst/>
@@ -12430,7 +12470,7 @@
                 <a:latin typeface="Arial"/>
                 <a:ea typeface="微软雅黑"/>
               </a:rPr>
-              <a:t>吞吐</a:t>
+              <a:t>尾延迟持续抬升</a:t>
             </a:r>
           </a:p>
           <a:p>
@@ -12450,21 +12490,21 @@
                 <a:latin typeface="Arial"/>
                 <a:ea typeface="微软雅黑"/>
               </a:rPr>
-              <a:t>业务要求秒级承接海量 Pod</a:t>
-            </a:r>
-          </a:p>
-        </p:txBody>
-      </p:sp>
-      <p:sp>
-        <p:nvSpPr>
-          <p:cNvPr id="12" name="Rounded Rectangle 11"/>
+              <a:t>Filter/Score 遍历节点开销随规模线性上升，5000 节点下 P99 明显恶化</a:t>
+            </a:r>
+          </a:p>
+        </p:txBody>
+      </p:sp>
+      <p:sp>
+        <p:nvSpPr>
+          <p:cNvPr id="13" name="Rounded Rectangle 12"/>
           <p:cNvSpPr/>
           <p:nvPr/>
         </p:nvSpPr>
         <p:spPr>
           <a:xfrm>
-            <a:off x="8113775" y="1874519"/>
-            <a:ext cx="3517391" cy="1371600"/>
+            <a:off x="8113775" y="2834640"/>
+            <a:ext cx="3517391" cy="1353312"/>
           </a:xfrm>
           <a:prstGeom prst="roundRect">
             <a:avLst/>
@@ -12503,14 +12543,14 @@
       </p:sp>
       <p:sp>
         <p:nvSpPr>
-          <p:cNvPr id="13" name="Rectangle 12"/>
+          <p:cNvPr id="14" name="Rectangle 13"/>
           <p:cNvSpPr/>
           <p:nvPr/>
         </p:nvSpPr>
         <p:spPr>
           <a:xfrm>
-            <a:off x="8113775" y="1874519"/>
-            <a:ext cx="50292" cy="1371600"/>
+            <a:off x="8113775" y="2834640"/>
+            <a:ext cx="50292" cy="1353312"/>
           </a:xfrm>
           <a:prstGeom prst="rect">
             <a:avLst/>
@@ -12547,14 +12587,14 @@
       </p:sp>
       <p:sp>
         <p:nvSpPr>
-          <p:cNvPr id="14" name="TextBox 13"/>
+          <p:cNvPr id="15" name="TextBox 14"/>
           <p:cNvSpPr txBox="1"/>
           <p:nvPr/>
         </p:nvSpPr>
         <p:spPr>
           <a:xfrm>
-            <a:off x="8278367" y="2002536"/>
-            <a:ext cx="3243072" cy="1188720"/>
+            <a:off x="8278367" y="2962656"/>
+            <a:ext cx="3243072" cy="1170432"/>
           </a:xfrm>
           <a:prstGeom prst="rect">
             <a:avLst/>
@@ -12576,7 +12616,7 @@
                 <a:latin typeface="Arial"/>
                 <a:ea typeface="微软雅黑"/>
               </a:rPr>
-              <a:t>可用性</a:t>
+              <a:t>单点故障风险</a:t>
             </a:r>
           </a:p>
           <a:p>
@@ -12596,20 +12636,20 @@
                 <a:latin typeface="Arial"/>
                 <a:ea typeface="微软雅黑"/>
               </a:rPr>
-              <a:t>长期运行不能因单点失效中断服务</a:t>
-            </a:r>
-          </a:p>
-        </p:txBody>
-      </p:sp>
-      <p:sp>
-        <p:nvSpPr>
-          <p:cNvPr id="15" name="Rounded Rectangle 14"/>
+              <a:t>Leader 崩溃后需等待 Standby 接管，这段窗口内集群完全无法调度</a:t>
+            </a:r>
+          </a:p>
+        </p:txBody>
+      </p:sp>
+      <p:sp>
+        <p:nvSpPr>
+          <p:cNvPr id="16" name="Rounded Rectangle 15"/>
           <p:cNvSpPr/>
           <p:nvPr/>
         </p:nvSpPr>
         <p:spPr>
           <a:xfrm>
-            <a:off x="566928" y="3657600"/>
+            <a:off x="566928" y="4617720"/>
             <a:ext cx="11064240" cy="868680"/>
           </a:xfrm>
           <a:prstGeom prst="roundRect">
@@ -12649,13 +12689,13 @@
       </p:sp>
       <p:sp>
         <p:nvSpPr>
-          <p:cNvPr id="16" name="Rectangle 15"/>
+          <p:cNvPr id="17" name="Rectangle 16"/>
           <p:cNvSpPr/>
           <p:nvPr/>
         </p:nvSpPr>
         <p:spPr>
           <a:xfrm>
-            <a:off x="566928" y="3657600"/>
+            <a:off x="566928" y="4617720"/>
             <a:ext cx="73152" cy="868680"/>
           </a:xfrm>
           <a:prstGeom prst="rect">
@@ -12693,13 +12733,13 @@
       </p:sp>
       <p:sp>
         <p:nvSpPr>
-          <p:cNvPr id="17" name="TextBox 16"/>
+          <p:cNvPr id="18" name="TextBox 17"/>
           <p:cNvSpPr txBox="1"/>
           <p:nvPr/>
         </p:nvSpPr>
         <p:spPr>
           <a:xfrm>
-            <a:off x="786384" y="3749039"/>
+            <a:off x="786384" y="4709159"/>
             <a:ext cx="10607040" cy="685800"/>
           </a:xfrm>
           <a:prstGeom prst="rect">
@@ -12726,14 +12766,14 @@
                 <a:latin typeface="Arial"/>
                 <a:ea typeface="微软雅黑"/>
               </a:rPr>
-              <a:t>单实例架构难以同时满足高吞吐与高可用，分布式改造成为必然；但改造会带来新的一致性难题。</a:t>
-            </a:r>
-          </a:p>
-        </p:txBody>
-      </p:sp>
-      <p:sp>
-        <p:nvSpPr>
-          <p:cNvPr id="18" name="TextBox 17"/>
+              <a:t>分布式改造是必然选择；但多实例并发又把“任一 Pod 至多绑定一次”推到设计前台。</a:t>
+            </a:r>
+          </a:p>
+        </p:txBody>
+      </p:sp>
+      <p:sp>
+        <p:nvSpPr>
+          <p:cNvPr id="19" name="TextBox 18"/>
           <p:cNvSpPr txBox="1"/>
           <p:nvPr/>
         </p:nvSpPr>

--- a/docs/thesis/defense/答辩PPT-基于etcd的分布式Kubernetes调度器.pptx
+++ b/docs/thesis/defense/答辩PPT-基于etcd的分布式Kubernetes调度器.pptx
@@ -12172,7 +12172,7 @@
         <p:spPr>
           <a:xfrm>
             <a:off x="566928" y="1719072"/>
-            <a:ext cx="10058400" cy="960120"/>
+            <a:ext cx="10058400" cy="1143000"/>
           </a:xfrm>
           <a:prstGeom prst="rect">
             <a:avLst/>
@@ -12187,11 +12187,11 @@
           <a:p>
             <a:pPr algn="l">
               <a:lnSpc>
-                <a:spcPct val="135000"/>
+                <a:spcPct val="140000"/>
               </a:lnSpc>
             </a:pPr>
             <a:r>
-              <a:rPr sz="1300" b="0">
+              <a:rPr sz="1350" b="0">
                 <a:solidFill>
                   <a:srgbClr val="333333"/>
                 </a:solidFill>
@@ -12211,8 +12211,8 @@
         </p:nvSpPr>
         <p:spPr>
           <a:xfrm>
-            <a:off x="566928" y="2834640"/>
-            <a:ext cx="3517391" cy="1353312"/>
+            <a:off x="566928" y="2880360"/>
+            <a:ext cx="3517391" cy="2103120"/>
           </a:xfrm>
           <a:prstGeom prst="roundRect">
             <a:avLst/>
@@ -12257,8 +12257,8 @@
         </p:nvSpPr>
         <p:spPr>
           <a:xfrm>
-            <a:off x="566928" y="2834640"/>
-            <a:ext cx="50292" cy="1353312"/>
+            <a:off x="566928" y="2880360"/>
+            <a:ext cx="50292" cy="2103120"/>
           </a:xfrm>
           <a:prstGeom prst="rect">
             <a:avLst/>
@@ -12301,8 +12301,8 @@
         </p:nvSpPr>
         <p:spPr>
           <a:xfrm>
-            <a:off x="731520" y="2962656"/>
-            <a:ext cx="3243072" cy="1170432"/>
+            <a:off x="731520" y="3008376"/>
+            <a:ext cx="3243072" cy="1920239"/>
           </a:xfrm>
           <a:prstGeom prst="rect">
             <a:avLst/>
@@ -12357,8 +12357,8 @@
         </p:nvSpPr>
         <p:spPr>
           <a:xfrm>
-            <a:off x="4340351" y="2834640"/>
-            <a:ext cx="3517391" cy="1353312"/>
+            <a:off x="4340351" y="2880360"/>
+            <a:ext cx="3517391" cy="2103120"/>
           </a:xfrm>
           <a:prstGeom prst="roundRect">
             <a:avLst/>
@@ -12403,8 +12403,8 @@
         </p:nvSpPr>
         <p:spPr>
           <a:xfrm>
-            <a:off x="4340351" y="2834640"/>
-            <a:ext cx="50292" cy="1353312"/>
+            <a:off x="4340351" y="2880360"/>
+            <a:ext cx="50292" cy="2103120"/>
           </a:xfrm>
           <a:prstGeom prst="rect">
             <a:avLst/>
@@ -12447,8 +12447,8 @@
         </p:nvSpPr>
         <p:spPr>
           <a:xfrm>
-            <a:off x="4504943" y="2962656"/>
-            <a:ext cx="3243072" cy="1170432"/>
+            <a:off x="4504943" y="3008376"/>
+            <a:ext cx="3243072" cy="1920239"/>
           </a:xfrm>
           <a:prstGeom prst="rect">
             <a:avLst/>
@@ -12503,8 +12503,8 @@
         </p:nvSpPr>
         <p:spPr>
           <a:xfrm>
-            <a:off x="8113775" y="2834640"/>
-            <a:ext cx="3517391" cy="1353312"/>
+            <a:off x="8113775" y="2880360"/>
+            <a:ext cx="3517391" cy="2103120"/>
           </a:xfrm>
           <a:prstGeom prst="roundRect">
             <a:avLst/>
@@ -12549,8 +12549,8 @@
         </p:nvSpPr>
         <p:spPr>
           <a:xfrm>
-            <a:off x="8113775" y="2834640"/>
-            <a:ext cx="50292" cy="1353312"/>
+            <a:off x="8113775" y="2880360"/>
+            <a:ext cx="50292" cy="2103120"/>
           </a:xfrm>
           <a:prstGeom prst="rect">
             <a:avLst/>
@@ -12593,8 +12593,8 @@
         </p:nvSpPr>
         <p:spPr>
           <a:xfrm>
-            <a:off x="8278367" y="2962656"/>
-            <a:ext cx="3243072" cy="1170432"/>
+            <a:off x="8278367" y="3008376"/>
+            <a:ext cx="3243072" cy="1920239"/>
           </a:xfrm>
           <a:prstGeom prst="rect">
             <a:avLst/>
@@ -12643,137 +12643,7 @@
       </p:sp>
       <p:sp>
         <p:nvSpPr>
-          <p:cNvPr id="16" name="Rounded Rectangle 15"/>
-          <p:cNvSpPr/>
-          <p:nvPr/>
-        </p:nvSpPr>
-        <p:spPr>
-          <a:xfrm>
-            <a:off x="566928" y="4617720"/>
-            <a:ext cx="11064240" cy="868680"/>
-          </a:xfrm>
-          <a:prstGeom prst="roundRect">
-            <a:avLst/>
-          </a:prstGeom>
-          <a:solidFill>
-            <a:srgbClr val="F5F7FA"/>
-          </a:solidFill>
-          <a:ln w="9525">
-            <a:solidFill>
-              <a:srgbClr val="D8DFE8"/>
-            </a:solidFill>
-          </a:ln>
-          <a:effectLst/>
-        </p:spPr>
-        <p:style>
-          <a:lnRef idx="1">
-            <a:schemeClr val="accent1"/>
-          </a:lnRef>
-          <a:fillRef idx="3">
-            <a:schemeClr val="accent1"/>
-          </a:fillRef>
-          <a:effectRef idx="2">
-            <a:schemeClr val="accent1"/>
-          </a:effectRef>
-          <a:fontRef idx="minor">
-            <a:schemeClr val="lt1"/>
-          </a:fontRef>
-        </p:style>
-        <p:txBody>
-          <a:bodyPr rtlCol="0" anchor="ctr"/>
-          <a:lstStyle/>
-          <a:p>
-            <a:pPr algn="ctr"/>
-          </a:p>
-        </p:txBody>
-      </p:sp>
-      <p:sp>
-        <p:nvSpPr>
-          <p:cNvPr id="17" name="Rectangle 16"/>
-          <p:cNvSpPr/>
-          <p:nvPr/>
-        </p:nvSpPr>
-        <p:spPr>
-          <a:xfrm>
-            <a:off x="566928" y="4617720"/>
-            <a:ext cx="73152" cy="868680"/>
-          </a:xfrm>
-          <a:prstGeom prst="rect">
-            <a:avLst/>
-          </a:prstGeom>
-          <a:solidFill>
-            <a:srgbClr val="E8833A"/>
-          </a:solidFill>
-          <a:ln>
-            <a:noFill/>
-          </a:ln>
-          <a:effectLst/>
-        </p:spPr>
-        <p:style>
-          <a:lnRef idx="1">
-            <a:schemeClr val="accent1"/>
-          </a:lnRef>
-          <a:fillRef idx="3">
-            <a:schemeClr val="accent1"/>
-          </a:fillRef>
-          <a:effectRef idx="2">
-            <a:schemeClr val="accent1"/>
-          </a:effectRef>
-          <a:fontRef idx="minor">
-            <a:schemeClr val="lt1"/>
-          </a:fontRef>
-        </p:style>
-        <p:txBody>
-          <a:bodyPr rtlCol="0" anchor="ctr"/>
-          <a:lstStyle/>
-          <a:p>
-            <a:pPr algn="ctr"/>
-          </a:p>
-        </p:txBody>
-      </p:sp>
-      <p:sp>
-        <p:nvSpPr>
-          <p:cNvPr id="18" name="TextBox 17"/>
-          <p:cNvSpPr txBox="1"/>
-          <p:nvPr/>
-        </p:nvSpPr>
-        <p:spPr>
-          <a:xfrm>
-            <a:off x="786384" y="4709159"/>
-            <a:ext cx="10607040" cy="685800"/>
-          </a:xfrm>
-          <a:prstGeom prst="rect">
-            <a:avLst/>
-          </a:prstGeom>
-          <a:noFill/>
-        </p:spPr>
-        <p:txBody>
-          <a:bodyPr wrap="square" anchor="ctr" lIns="0" rIns="0" tIns="0" bIns="0">
-            <a:spAutoFit/>
-          </a:bodyPr>
-          <a:lstStyle/>
-          <a:p>
-            <a:pPr algn="l">
-              <a:lnSpc>
-                <a:spcPct val="115000"/>
-              </a:lnSpc>
-            </a:pPr>
-            <a:r>
-              <a:rPr sz="1500" b="1">
-                <a:solidFill>
-                  <a:srgbClr val="0B2A4A"/>
-                </a:solidFill>
-                <a:latin typeface="Arial"/>
-                <a:ea typeface="微软雅黑"/>
-              </a:rPr>
-              <a:t>分布式改造是必然选择；但多实例并发又把“任一 Pod 至多绑定一次”推到设计前台。</a:t>
-            </a:r>
-          </a:p>
-        </p:txBody>
-      </p:sp>
-      <p:sp>
-        <p:nvSpPr>
-          <p:cNvPr id="19" name="TextBox 18"/>
+          <p:cNvPr id="16" name="TextBox 15"/>
           <p:cNvSpPr txBox="1"/>
           <p:nvPr/>
         </p:nvSpPr>

--- a/docs/thesis/defense/答辩PPT-基于etcd的分布式Kubernetes调度器.pptx
+++ b/docs/thesis/defense/答辩PPT-基于etcd的分布式Kubernetes调度器.pptx
@@ -6176,7 +6176,7 @@
         <p:spPr>
           <a:xfrm>
             <a:off x="566928" y="1298448"/>
-            <a:ext cx="27432" cy="310896"/>
+            <a:ext cx="32004" cy="365760"/>
           </a:xfrm>
           <a:prstGeom prst="rect">
             <a:avLst/>
@@ -6219,8 +6219,8 @@
         </p:nvSpPr>
         <p:spPr>
           <a:xfrm>
-            <a:off x="713232" y="1271016"/>
-            <a:ext cx="10972800" cy="384048"/>
+            <a:off x="713232" y="1261872"/>
+            <a:ext cx="10744200" cy="438912"/>
           </a:xfrm>
           <a:prstGeom prst="rect">
             <a:avLst/>
@@ -6233,9 +6233,13 @@
           </a:bodyPr>
           <a:lstStyle/>
           <a:p>
-            <a:pPr algn="l"/>
-            <a:r>
-              <a:rPr sz="1550" b="1">
+            <a:pPr algn="l">
+              <a:lnSpc>
+                <a:spcPct val="110000"/>
+              </a:lnSpc>
+            </a:pPr>
+            <a:r>
+              <a:rPr sz="1800" b="1">
                 <a:solidFill>
                   <a:srgbClr val="1F5C99"/>
                 </a:solidFill>
@@ -6506,7 +6510,7 @@
         <p:spPr>
           <a:xfrm>
             <a:off x="566928" y="1298448"/>
-            <a:ext cx="27432" cy="310896"/>
+            <a:ext cx="32004" cy="365760"/>
           </a:xfrm>
           <a:prstGeom prst="rect">
             <a:avLst/>
@@ -6549,8 +6553,8 @@
         </p:nvSpPr>
         <p:spPr>
           <a:xfrm>
-            <a:off x="713232" y="1271016"/>
-            <a:ext cx="10972800" cy="384048"/>
+            <a:off x="713232" y="1261872"/>
+            <a:ext cx="10744200" cy="438912"/>
           </a:xfrm>
           <a:prstGeom prst="rect">
             <a:avLst/>
@@ -6563,9 +6567,13 @@
           </a:bodyPr>
           <a:lstStyle/>
           <a:p>
-            <a:pPr algn="l"/>
-            <a:r>
-              <a:rPr sz="1550" b="1">
+            <a:pPr algn="l">
+              <a:lnSpc>
+                <a:spcPct val="110000"/>
+              </a:lnSpc>
+            </a:pPr>
+            <a:r>
+              <a:rPr sz="1800" b="1">
                 <a:solidFill>
                   <a:srgbClr val="1F5C99"/>
                 </a:solidFill>
@@ -7524,7 +7532,7 @@
         <p:spPr>
           <a:xfrm>
             <a:off x="566928" y="1298448"/>
-            <a:ext cx="27432" cy="310896"/>
+            <a:ext cx="32004" cy="365760"/>
           </a:xfrm>
           <a:prstGeom prst="rect">
             <a:avLst/>
@@ -7567,8 +7575,8 @@
         </p:nvSpPr>
         <p:spPr>
           <a:xfrm>
-            <a:off x="713232" y="1271016"/>
-            <a:ext cx="10972800" cy="384048"/>
+            <a:off x="713232" y="1261872"/>
+            <a:ext cx="10744200" cy="438912"/>
           </a:xfrm>
           <a:prstGeom prst="rect">
             <a:avLst/>
@@ -7581,9 +7589,13 @@
           </a:bodyPr>
           <a:lstStyle/>
           <a:p>
-            <a:pPr algn="l"/>
-            <a:r>
-              <a:rPr sz="1550" b="1">
+            <a:pPr algn="l">
+              <a:lnSpc>
+                <a:spcPct val="110000"/>
+              </a:lnSpc>
+            </a:pPr>
+            <a:r>
+              <a:rPr sz="1800" b="1">
                 <a:solidFill>
                   <a:srgbClr val="1F5C99"/>
                 </a:solidFill>
@@ -7854,7 +7866,7 @@
         <p:spPr>
           <a:xfrm>
             <a:off x="566928" y="1298448"/>
-            <a:ext cx="27432" cy="310896"/>
+            <a:ext cx="32004" cy="365760"/>
           </a:xfrm>
           <a:prstGeom prst="rect">
             <a:avLst/>
@@ -7897,8 +7909,8 @@
         </p:nvSpPr>
         <p:spPr>
           <a:xfrm>
-            <a:off x="713232" y="1271016"/>
-            <a:ext cx="10972800" cy="384048"/>
+            <a:off x="713232" y="1261872"/>
+            <a:ext cx="10744200" cy="438912"/>
           </a:xfrm>
           <a:prstGeom prst="rect">
             <a:avLst/>
@@ -7911,9 +7923,13 @@
           </a:bodyPr>
           <a:lstStyle/>
           <a:p>
-            <a:pPr algn="l"/>
-            <a:r>
-              <a:rPr sz="1550" b="1">
+            <a:pPr algn="l">
+              <a:lnSpc>
+                <a:spcPct val="110000"/>
+              </a:lnSpc>
+            </a:pPr>
+            <a:r>
+              <a:rPr sz="1800" b="1">
                 <a:solidFill>
                   <a:srgbClr val="1F5C99"/>
                 </a:solidFill>
@@ -8486,7 +8502,7 @@
         <p:spPr>
           <a:xfrm>
             <a:off x="566928" y="1298448"/>
-            <a:ext cx="27432" cy="310896"/>
+            <a:ext cx="32004" cy="365760"/>
           </a:xfrm>
           <a:prstGeom prst="rect">
             <a:avLst/>
@@ -8529,8 +8545,8 @@
         </p:nvSpPr>
         <p:spPr>
           <a:xfrm>
-            <a:off x="713232" y="1271016"/>
-            <a:ext cx="10972800" cy="384048"/>
+            <a:off x="713232" y="1261872"/>
+            <a:ext cx="10744200" cy="438912"/>
           </a:xfrm>
           <a:prstGeom prst="rect">
             <a:avLst/>
@@ -8543,9 +8559,13 @@
           </a:bodyPr>
           <a:lstStyle/>
           <a:p>
-            <a:pPr algn="l"/>
-            <a:r>
-              <a:rPr sz="1550" b="1">
+            <a:pPr algn="l">
+              <a:lnSpc>
+                <a:spcPct val="110000"/>
+              </a:lnSpc>
+            </a:pPr>
+            <a:r>
+              <a:rPr sz="1800" b="1">
                 <a:solidFill>
                   <a:srgbClr val="1F5C99"/>
                 </a:solidFill>
@@ -9500,7 +9520,7 @@
         <p:spPr>
           <a:xfrm>
             <a:off x="566928" y="1298448"/>
-            <a:ext cx="27432" cy="310896"/>
+            <a:ext cx="32004" cy="365760"/>
           </a:xfrm>
           <a:prstGeom prst="rect">
             <a:avLst/>
@@ -9543,8 +9563,8 @@
         </p:nvSpPr>
         <p:spPr>
           <a:xfrm>
-            <a:off x="713232" y="1271016"/>
-            <a:ext cx="10972800" cy="384048"/>
+            <a:off x="713232" y="1261872"/>
+            <a:ext cx="10744200" cy="438912"/>
           </a:xfrm>
           <a:prstGeom prst="rect">
             <a:avLst/>
@@ -9557,9 +9577,13 @@
           </a:bodyPr>
           <a:lstStyle/>
           <a:p>
-            <a:pPr algn="l"/>
-            <a:r>
-              <a:rPr sz="1550" b="1">
+            <a:pPr algn="l">
+              <a:lnSpc>
+                <a:spcPct val="110000"/>
+              </a:lnSpc>
+            </a:pPr>
+            <a:r>
+              <a:rPr sz="1800" b="1">
                 <a:solidFill>
                   <a:srgbClr val="1F5C99"/>
                 </a:solidFill>
@@ -10160,7 +10184,7 @@
         <p:spPr>
           <a:xfrm>
             <a:off x="566928" y="1298448"/>
-            <a:ext cx="27432" cy="310896"/>
+            <a:ext cx="32004" cy="365760"/>
           </a:xfrm>
           <a:prstGeom prst="rect">
             <a:avLst/>
@@ -10203,8 +10227,8 @@
         </p:nvSpPr>
         <p:spPr>
           <a:xfrm>
-            <a:off x="713232" y="1271016"/>
-            <a:ext cx="10972800" cy="384048"/>
+            <a:off x="713232" y="1261872"/>
+            <a:ext cx="10744200" cy="438912"/>
           </a:xfrm>
           <a:prstGeom prst="rect">
             <a:avLst/>
@@ -10217,9 +10241,13 @@
           </a:bodyPr>
           <a:lstStyle/>
           <a:p>
-            <a:pPr algn="l"/>
-            <a:r>
-              <a:rPr sz="1550" b="1">
+            <a:pPr algn="l">
+              <a:lnSpc>
+                <a:spcPct val="110000"/>
+              </a:lnSpc>
+            </a:pPr>
+            <a:r>
+              <a:rPr sz="1800" b="1">
                 <a:solidFill>
                   <a:srgbClr val="1F5C99"/>
                 </a:solidFill>
@@ -10526,7 +10554,7 @@
         <p:spPr>
           <a:xfrm>
             <a:off x="566928" y="1298448"/>
-            <a:ext cx="27432" cy="310896"/>
+            <a:ext cx="32004" cy="365760"/>
           </a:xfrm>
           <a:prstGeom prst="rect">
             <a:avLst/>
@@ -10569,8 +10597,8 @@
         </p:nvSpPr>
         <p:spPr>
           <a:xfrm>
-            <a:off x="713232" y="1271016"/>
-            <a:ext cx="10972800" cy="384048"/>
+            <a:off x="713232" y="1261872"/>
+            <a:ext cx="10744200" cy="438912"/>
           </a:xfrm>
           <a:prstGeom prst="rect">
             <a:avLst/>
@@ -10583,9 +10611,13 @@
           </a:bodyPr>
           <a:lstStyle/>
           <a:p>
-            <a:pPr algn="l"/>
-            <a:r>
-              <a:rPr sz="1550" b="1">
+            <a:pPr algn="l">
+              <a:lnSpc>
+                <a:spcPct val="110000"/>
+              </a:lnSpc>
+            </a:pPr>
+            <a:r>
+              <a:rPr sz="1800" b="1">
                 <a:solidFill>
                   <a:srgbClr val="1F5C99"/>
                 </a:solidFill>
@@ -10892,7 +10924,7 @@
         <p:spPr>
           <a:xfrm>
             <a:off x="566928" y="1298448"/>
-            <a:ext cx="27432" cy="310896"/>
+            <a:ext cx="32004" cy="365760"/>
           </a:xfrm>
           <a:prstGeom prst="rect">
             <a:avLst/>
@@ -10935,8 +10967,8 @@
         </p:nvSpPr>
         <p:spPr>
           <a:xfrm>
-            <a:off x="713232" y="1271016"/>
-            <a:ext cx="10972800" cy="384048"/>
+            <a:off x="713232" y="1261872"/>
+            <a:ext cx="10744200" cy="438912"/>
           </a:xfrm>
           <a:prstGeom prst="rect">
             <a:avLst/>
@@ -10949,9 +10981,13 @@
           </a:bodyPr>
           <a:lstStyle/>
           <a:p>
-            <a:pPr algn="l"/>
-            <a:r>
-              <a:rPr sz="1550" b="1">
+            <a:pPr algn="l">
+              <a:lnSpc>
+                <a:spcPct val="110000"/>
+              </a:lnSpc>
+            </a:pPr>
+            <a:r>
+              <a:rPr sz="1800" b="1">
                 <a:solidFill>
                   <a:srgbClr val="1F5C99"/>
                 </a:solidFill>
@@ -11726,7 +11762,7 @@
         <p:spPr>
           <a:xfrm>
             <a:off x="566928" y="1298448"/>
-            <a:ext cx="27432" cy="310896"/>
+            <a:ext cx="32004" cy="365760"/>
           </a:xfrm>
           <a:prstGeom prst="rect">
             <a:avLst/>
@@ -11769,8 +11805,8 @@
         </p:nvSpPr>
         <p:spPr>
           <a:xfrm>
-            <a:off x="713232" y="1271016"/>
-            <a:ext cx="10972800" cy="384048"/>
+            <a:off x="713232" y="1261872"/>
+            <a:ext cx="10744200" cy="438912"/>
           </a:xfrm>
           <a:prstGeom prst="rect">
             <a:avLst/>
@@ -11783,9 +11819,13 @@
           </a:bodyPr>
           <a:lstStyle/>
           <a:p>
-            <a:pPr algn="l"/>
-            <a:r>
-              <a:rPr sz="1550" b="1">
+            <a:pPr algn="l">
+              <a:lnSpc>
+                <a:spcPct val="110000"/>
+              </a:lnSpc>
+            </a:pPr>
+            <a:r>
+              <a:rPr sz="1800" b="1">
                 <a:solidFill>
                   <a:srgbClr val="1F5C99"/>
                 </a:solidFill>
@@ -12092,7 +12132,7 @@
         <p:spPr>
           <a:xfrm>
             <a:off x="566928" y="1298448"/>
-            <a:ext cx="27432" cy="310896"/>
+            <a:ext cx="32004" cy="365760"/>
           </a:xfrm>
           <a:prstGeom prst="rect">
             <a:avLst/>
@@ -12135,8 +12175,8 @@
         </p:nvSpPr>
         <p:spPr>
           <a:xfrm>
-            <a:off x="713232" y="1271016"/>
-            <a:ext cx="10972800" cy="384048"/>
+            <a:off x="713232" y="1261872"/>
+            <a:ext cx="10744200" cy="438912"/>
           </a:xfrm>
           <a:prstGeom prst="rect">
             <a:avLst/>
@@ -12149,9 +12189,13 @@
           </a:bodyPr>
           <a:lstStyle/>
           <a:p>
-            <a:pPr algn="l"/>
-            <a:r>
-              <a:rPr sz="1550" b="1">
+            <a:pPr algn="l">
+              <a:lnSpc>
+                <a:spcPct val="110000"/>
+              </a:lnSpc>
+            </a:pPr>
+            <a:r>
+              <a:rPr sz="1800" b="1">
                 <a:solidFill>
                   <a:srgbClr val="1F5C99"/>
                 </a:solidFill>
@@ -12171,8 +12215,8 @@
         </p:nvSpPr>
         <p:spPr>
           <a:xfrm>
-            <a:off x="566928" y="1719072"/>
-            <a:ext cx="10058400" cy="1143000"/>
+            <a:off x="566928" y="1783080"/>
+            <a:ext cx="10881360" cy="1234440"/>
           </a:xfrm>
           <a:prstGeom prst="rect">
             <a:avLst/>
@@ -12187,11 +12231,11 @@
           <a:p>
             <a:pPr algn="l">
               <a:lnSpc>
-                <a:spcPct val="140000"/>
+                <a:spcPct val="135000"/>
               </a:lnSpc>
             </a:pPr>
             <a:r>
-              <a:rPr sz="1350" b="0">
+              <a:rPr sz="1500" b="0">
                 <a:solidFill>
                   <a:srgbClr val="333333"/>
                 </a:solidFill>
@@ -12796,7 +12840,7 @@
         <p:spPr>
           <a:xfrm>
             <a:off x="566928" y="1298448"/>
-            <a:ext cx="27432" cy="310896"/>
+            <a:ext cx="32004" cy="365760"/>
           </a:xfrm>
           <a:prstGeom prst="rect">
             <a:avLst/>
@@ -12839,8 +12883,8 @@
         </p:nvSpPr>
         <p:spPr>
           <a:xfrm>
-            <a:off x="713232" y="1271016"/>
-            <a:ext cx="10972800" cy="384048"/>
+            <a:off x="713232" y="1261872"/>
+            <a:ext cx="10744200" cy="438912"/>
           </a:xfrm>
           <a:prstGeom prst="rect">
             <a:avLst/>
@@ -12853,9 +12897,13 @@
           </a:bodyPr>
           <a:lstStyle/>
           <a:p>
-            <a:pPr algn="l"/>
-            <a:r>
-              <a:rPr sz="1550" b="1">
+            <a:pPr algn="l">
+              <a:lnSpc>
+                <a:spcPct val="110000"/>
+              </a:lnSpc>
+            </a:pPr>
+            <a:r>
+              <a:rPr sz="1800" b="1">
                 <a:solidFill>
                   <a:srgbClr val="1F5C99"/>
                 </a:solidFill>
@@ -13162,7 +13210,7 @@
         <p:spPr>
           <a:xfrm>
             <a:off x="566928" y="1298448"/>
-            <a:ext cx="27432" cy="310896"/>
+            <a:ext cx="32004" cy="365760"/>
           </a:xfrm>
           <a:prstGeom prst="rect">
             <a:avLst/>
@@ -13205,8 +13253,8 @@
         </p:nvSpPr>
         <p:spPr>
           <a:xfrm>
-            <a:off x="713232" y="1271016"/>
-            <a:ext cx="10972800" cy="384048"/>
+            <a:off x="713232" y="1261872"/>
+            <a:ext cx="10744200" cy="438912"/>
           </a:xfrm>
           <a:prstGeom prst="rect">
             <a:avLst/>
@@ -13219,9 +13267,13 @@
           </a:bodyPr>
           <a:lstStyle/>
           <a:p>
-            <a:pPr algn="l"/>
-            <a:r>
-              <a:rPr sz="1550" b="1">
+            <a:pPr algn="l">
+              <a:lnSpc>
+                <a:spcPct val="110000"/>
+              </a:lnSpc>
+            </a:pPr>
+            <a:r>
+              <a:rPr sz="1800" b="1">
                 <a:solidFill>
                   <a:srgbClr val="1F5C99"/>
                 </a:solidFill>
@@ -13887,7 +13939,7 @@
         <p:spPr>
           <a:xfrm>
             <a:off x="566928" y="1298448"/>
-            <a:ext cx="27432" cy="310896"/>
+            <a:ext cx="32004" cy="365760"/>
           </a:xfrm>
           <a:prstGeom prst="rect">
             <a:avLst/>
@@ -13930,8 +13982,8 @@
         </p:nvSpPr>
         <p:spPr>
           <a:xfrm>
-            <a:off x="713232" y="1271016"/>
-            <a:ext cx="10972800" cy="384048"/>
+            <a:off x="713232" y="1261872"/>
+            <a:ext cx="10744200" cy="438912"/>
           </a:xfrm>
           <a:prstGeom prst="rect">
             <a:avLst/>
@@ -13944,9 +13996,13 @@
           </a:bodyPr>
           <a:lstStyle/>
           <a:p>
-            <a:pPr algn="l"/>
-            <a:r>
-              <a:rPr sz="1550" b="1">
+            <a:pPr algn="l">
+              <a:lnSpc>
+                <a:spcPct val="110000"/>
+              </a:lnSpc>
+            </a:pPr>
+            <a:r>
+              <a:rPr sz="1800" b="1">
                 <a:solidFill>
                   <a:srgbClr val="1F5C99"/>
                 </a:solidFill>
@@ -14626,7 +14682,7 @@
         <p:spPr>
           <a:xfrm>
             <a:off x="566928" y="1298448"/>
-            <a:ext cx="27432" cy="310896"/>
+            <a:ext cx="32004" cy="365760"/>
           </a:xfrm>
           <a:prstGeom prst="rect">
             <a:avLst/>
@@ -14669,8 +14725,8 @@
         </p:nvSpPr>
         <p:spPr>
           <a:xfrm>
-            <a:off x="713232" y="1271016"/>
-            <a:ext cx="10972800" cy="384048"/>
+            <a:off x="713232" y="1261872"/>
+            <a:ext cx="10744200" cy="438912"/>
           </a:xfrm>
           <a:prstGeom prst="rect">
             <a:avLst/>
@@ -14683,9 +14739,13 @@
           </a:bodyPr>
           <a:lstStyle/>
           <a:p>
-            <a:pPr algn="l"/>
-            <a:r>
-              <a:rPr sz="1550" b="1">
+            <a:pPr algn="l">
+              <a:lnSpc>
+                <a:spcPct val="110000"/>
+              </a:lnSpc>
+            </a:pPr>
+            <a:r>
+              <a:rPr sz="1800" b="1">
                 <a:solidFill>
                   <a:srgbClr val="1F5C99"/>
                 </a:solidFill>
@@ -15365,7 +15425,7 @@
         <p:spPr>
           <a:xfrm>
             <a:off x="566928" y="1298448"/>
-            <a:ext cx="27432" cy="310896"/>
+            <a:ext cx="32004" cy="365760"/>
           </a:xfrm>
           <a:prstGeom prst="rect">
             <a:avLst/>
@@ -15408,8 +15468,8 @@
         </p:nvSpPr>
         <p:spPr>
           <a:xfrm>
-            <a:off x="713232" y="1271016"/>
-            <a:ext cx="10972800" cy="384048"/>
+            <a:off x="713232" y="1261872"/>
+            <a:ext cx="10744200" cy="438912"/>
           </a:xfrm>
           <a:prstGeom prst="rect">
             <a:avLst/>
@@ -15422,9 +15482,13 @@
           </a:bodyPr>
           <a:lstStyle/>
           <a:p>
-            <a:pPr algn="l"/>
-            <a:r>
-              <a:rPr sz="1550" b="1">
+            <a:pPr algn="l">
+              <a:lnSpc>
+                <a:spcPct val="110000"/>
+              </a:lnSpc>
+            </a:pPr>
+            <a:r>
+              <a:rPr sz="1800" b="1">
                 <a:solidFill>
                   <a:srgbClr val="1F5C99"/>
                 </a:solidFill>
@@ -16467,7 +16531,7 @@
         <p:spPr>
           <a:xfrm>
             <a:off x="566928" y="1298448"/>
-            <a:ext cx="27432" cy="310896"/>
+            <a:ext cx="32004" cy="365760"/>
           </a:xfrm>
           <a:prstGeom prst="rect">
             <a:avLst/>
@@ -16510,8 +16574,8 @@
         </p:nvSpPr>
         <p:spPr>
           <a:xfrm>
-            <a:off x="713232" y="1271016"/>
-            <a:ext cx="10972800" cy="384048"/>
+            <a:off x="713232" y="1261872"/>
+            <a:ext cx="10744200" cy="438912"/>
           </a:xfrm>
           <a:prstGeom prst="rect">
             <a:avLst/>
@@ -16524,9 +16588,13 @@
           </a:bodyPr>
           <a:lstStyle/>
           <a:p>
-            <a:pPr algn="l"/>
-            <a:r>
-              <a:rPr sz="1550" b="1">
+            <a:pPr algn="l">
+              <a:lnSpc>
+                <a:spcPct val="110000"/>
+              </a:lnSpc>
+            </a:pPr>
+            <a:r>
+              <a:rPr sz="1800" b="1">
                 <a:solidFill>
                   <a:srgbClr val="1F5C99"/>
                 </a:solidFill>
@@ -17888,7 +17956,7 @@
         <p:spPr>
           <a:xfrm>
             <a:off x="566928" y="1298448"/>
-            <a:ext cx="27432" cy="310896"/>
+            <a:ext cx="32004" cy="365760"/>
           </a:xfrm>
           <a:prstGeom prst="rect">
             <a:avLst/>
@@ -17931,8 +17999,8 @@
         </p:nvSpPr>
         <p:spPr>
           <a:xfrm>
-            <a:off x="713232" y="1271016"/>
-            <a:ext cx="10972800" cy="384048"/>
+            <a:off x="713232" y="1261872"/>
+            <a:ext cx="10744200" cy="438912"/>
           </a:xfrm>
           <a:prstGeom prst="rect">
             <a:avLst/>
@@ -17945,9 +18013,13 @@
           </a:bodyPr>
           <a:lstStyle/>
           <a:p>
-            <a:pPr algn="l"/>
-            <a:r>
-              <a:rPr sz="1550" b="1">
+            <a:pPr algn="l">
+              <a:lnSpc>
+                <a:spcPct val="110000"/>
+              </a:lnSpc>
+            </a:pPr>
+            <a:r>
+              <a:rPr sz="1800" b="1">
                 <a:solidFill>
                   <a:srgbClr val="1F5C99"/>
                 </a:solidFill>
@@ -19077,7 +19149,7 @@
         <p:spPr>
           <a:xfrm>
             <a:off x="566928" y="1298448"/>
-            <a:ext cx="27432" cy="310896"/>
+            <a:ext cx="32004" cy="365760"/>
           </a:xfrm>
           <a:prstGeom prst="rect">
             <a:avLst/>
@@ -19120,8 +19192,8 @@
         </p:nvSpPr>
         <p:spPr>
           <a:xfrm>
-            <a:off x="713232" y="1271016"/>
-            <a:ext cx="10972800" cy="384048"/>
+            <a:off x="713232" y="1261872"/>
+            <a:ext cx="10744200" cy="438912"/>
           </a:xfrm>
           <a:prstGeom prst="rect">
             <a:avLst/>
@@ -19134,9 +19206,13 @@
           </a:bodyPr>
           <a:lstStyle/>
           <a:p>
-            <a:pPr algn="l"/>
-            <a:r>
-              <a:rPr sz="1550" b="1">
+            <a:pPr algn="l">
+              <a:lnSpc>
+                <a:spcPct val="110000"/>
+              </a:lnSpc>
+            </a:pPr>
+            <a:r>
+              <a:rPr sz="1800" b="1">
                 <a:solidFill>
                   <a:srgbClr val="1F5C99"/>
                 </a:solidFill>
@@ -19928,7 +20004,7 @@
         <p:spPr>
           <a:xfrm>
             <a:off x="566928" y="1298448"/>
-            <a:ext cx="27432" cy="310896"/>
+            <a:ext cx="32004" cy="365760"/>
           </a:xfrm>
           <a:prstGeom prst="rect">
             <a:avLst/>
@@ -19971,8 +20047,8 @@
         </p:nvSpPr>
         <p:spPr>
           <a:xfrm>
-            <a:off x="713232" y="1271016"/>
-            <a:ext cx="10972800" cy="384048"/>
+            <a:off x="713232" y="1261872"/>
+            <a:ext cx="10744200" cy="438912"/>
           </a:xfrm>
           <a:prstGeom prst="rect">
             <a:avLst/>
@@ -19985,9 +20061,13 @@
           </a:bodyPr>
           <a:lstStyle/>
           <a:p>
-            <a:pPr algn="l"/>
-            <a:r>
-              <a:rPr sz="1550" b="1">
+            <a:pPr algn="l">
+              <a:lnSpc>
+                <a:spcPct val="110000"/>
+              </a:lnSpc>
+            </a:pPr>
+            <a:r>
+              <a:rPr sz="1800" b="1">
                 <a:solidFill>
                   <a:srgbClr val="1F5C99"/>
                 </a:solidFill>
@@ -20234,7 +20314,7 @@
         <p:spPr>
           <a:xfrm>
             <a:off x="566928" y="1298448"/>
-            <a:ext cx="27432" cy="310896"/>
+            <a:ext cx="32004" cy="365760"/>
           </a:xfrm>
           <a:prstGeom prst="rect">
             <a:avLst/>
@@ -20277,8 +20357,8 @@
         </p:nvSpPr>
         <p:spPr>
           <a:xfrm>
-            <a:off x="713232" y="1271016"/>
-            <a:ext cx="10972800" cy="384048"/>
+            <a:off x="713232" y="1261872"/>
+            <a:ext cx="10744200" cy="438912"/>
           </a:xfrm>
           <a:prstGeom prst="rect">
             <a:avLst/>
@@ -20291,9 +20371,13 @@
           </a:bodyPr>
           <a:lstStyle/>
           <a:p>
-            <a:pPr algn="l"/>
-            <a:r>
-              <a:rPr sz="1550" b="1">
+            <a:pPr algn="l">
+              <a:lnSpc>
+                <a:spcPct val="110000"/>
+              </a:lnSpc>
+            </a:pPr>
+            <a:r>
+              <a:rPr sz="1800" b="1">
                 <a:solidFill>
                   <a:srgbClr val="1F5C99"/>
                 </a:solidFill>
@@ -21352,7 +21436,7 @@
         <p:spPr>
           <a:xfrm>
             <a:off x="566928" y="1298448"/>
-            <a:ext cx="27432" cy="310896"/>
+            <a:ext cx="32004" cy="365760"/>
           </a:xfrm>
           <a:prstGeom prst="rect">
             <a:avLst/>
@@ -21395,8 +21479,8 @@
         </p:nvSpPr>
         <p:spPr>
           <a:xfrm>
-            <a:off x="713232" y="1271016"/>
-            <a:ext cx="10972800" cy="384048"/>
+            <a:off x="713232" y="1261872"/>
+            <a:ext cx="10744200" cy="438912"/>
           </a:xfrm>
           <a:prstGeom prst="rect">
             <a:avLst/>
@@ -21409,9 +21493,13 @@
           </a:bodyPr>
           <a:lstStyle/>
           <a:p>
-            <a:pPr algn="l"/>
-            <a:r>
-              <a:rPr sz="1550" b="1">
+            <a:pPr algn="l">
+              <a:lnSpc>
+                <a:spcPct val="110000"/>
+              </a:lnSpc>
+            </a:pPr>
+            <a:r>
+              <a:rPr sz="1800" b="1">
                 <a:solidFill>
                   <a:srgbClr val="1F5C99"/>
                 </a:solidFill>
@@ -22175,7 +22263,7 @@
         <p:spPr>
           <a:xfrm>
             <a:off x="566928" y="1298448"/>
-            <a:ext cx="27432" cy="310896"/>
+            <a:ext cx="32004" cy="365760"/>
           </a:xfrm>
           <a:prstGeom prst="rect">
             <a:avLst/>
@@ -22218,8 +22306,8 @@
         </p:nvSpPr>
         <p:spPr>
           <a:xfrm>
-            <a:off x="713232" y="1271016"/>
-            <a:ext cx="10972800" cy="384048"/>
+            <a:off x="713232" y="1261872"/>
+            <a:ext cx="10744200" cy="438912"/>
           </a:xfrm>
           <a:prstGeom prst="rect">
             <a:avLst/>
@@ -22232,9 +22320,13 @@
           </a:bodyPr>
           <a:lstStyle/>
           <a:p>
-            <a:pPr algn="l"/>
-            <a:r>
-              <a:rPr sz="1550" b="1">
+            <a:pPr algn="l">
+              <a:lnSpc>
+                <a:spcPct val="110000"/>
+              </a:lnSpc>
+            </a:pPr>
+            <a:r>
+              <a:rPr sz="1800" b="1">
                 <a:solidFill>
                   <a:srgbClr val="1F5C99"/>
                 </a:solidFill>
@@ -22481,7 +22573,7 @@
         <p:spPr>
           <a:xfrm>
             <a:off x="566928" y="1298448"/>
-            <a:ext cx="27432" cy="310896"/>
+            <a:ext cx="32004" cy="365760"/>
           </a:xfrm>
           <a:prstGeom prst="rect">
             <a:avLst/>
@@ -22524,8 +22616,8 @@
         </p:nvSpPr>
         <p:spPr>
           <a:xfrm>
-            <a:off x="713232" y="1271016"/>
-            <a:ext cx="10972800" cy="384048"/>
+            <a:off x="713232" y="1261872"/>
+            <a:ext cx="10744200" cy="438912"/>
           </a:xfrm>
           <a:prstGeom prst="rect">
             <a:avLst/>
@@ -22538,9 +22630,13 @@
           </a:bodyPr>
           <a:lstStyle/>
           <a:p>
-            <a:pPr algn="l"/>
-            <a:r>
-              <a:rPr sz="1550" b="1">
+            <a:pPr algn="l">
+              <a:lnSpc>
+                <a:spcPct val="110000"/>
+              </a:lnSpc>
+            </a:pPr>
+            <a:r>
+              <a:rPr sz="1800" b="1">
                 <a:solidFill>
                   <a:srgbClr val="1F5C99"/>
                 </a:solidFill>
@@ -22787,7 +22883,7 @@
         <p:spPr>
           <a:xfrm>
             <a:off x="566928" y="1298448"/>
-            <a:ext cx="27432" cy="310896"/>
+            <a:ext cx="32004" cy="365760"/>
           </a:xfrm>
           <a:prstGeom prst="rect">
             <a:avLst/>
@@ -22830,8 +22926,8 @@
         </p:nvSpPr>
         <p:spPr>
           <a:xfrm>
-            <a:off x="713232" y="1271016"/>
-            <a:ext cx="10972800" cy="384048"/>
+            <a:off x="713232" y="1261872"/>
+            <a:ext cx="10744200" cy="438912"/>
           </a:xfrm>
           <a:prstGeom prst="rect">
             <a:avLst/>
@@ -22844,9 +22940,13 @@
           </a:bodyPr>
           <a:lstStyle/>
           <a:p>
-            <a:pPr algn="l"/>
-            <a:r>
-              <a:rPr sz="1550" b="1">
+            <a:pPr algn="l">
+              <a:lnSpc>
+                <a:spcPct val="110000"/>
+              </a:lnSpc>
+            </a:pPr>
+            <a:r>
+              <a:rPr sz="1800" b="1">
                 <a:solidFill>
                   <a:srgbClr val="1F5C99"/>
                 </a:solidFill>
@@ -23131,7 +23231,7 @@
         <p:spPr>
           <a:xfrm>
             <a:off x="566928" y="1298448"/>
-            <a:ext cx="27432" cy="310896"/>
+            <a:ext cx="32004" cy="365760"/>
           </a:xfrm>
           <a:prstGeom prst="rect">
             <a:avLst/>
@@ -23174,8 +23274,8 @@
         </p:nvSpPr>
         <p:spPr>
           <a:xfrm>
-            <a:off x="713232" y="1271016"/>
-            <a:ext cx="10972800" cy="384048"/>
+            <a:off x="713232" y="1261872"/>
+            <a:ext cx="10744200" cy="438912"/>
           </a:xfrm>
           <a:prstGeom prst="rect">
             <a:avLst/>
@@ -23188,9 +23288,13 @@
           </a:bodyPr>
           <a:lstStyle/>
           <a:p>
-            <a:pPr algn="l"/>
-            <a:r>
-              <a:rPr sz="1550" b="1">
+            <a:pPr algn="l">
+              <a:lnSpc>
+                <a:spcPct val="110000"/>
+              </a:lnSpc>
+            </a:pPr>
+            <a:r>
+              <a:rPr sz="1800" b="1">
                 <a:solidFill>
                   <a:srgbClr val="1F5C99"/>
                 </a:solidFill>
@@ -23779,7 +23883,7 @@
         <p:spPr>
           <a:xfrm>
             <a:off x="566928" y="1298448"/>
-            <a:ext cx="27432" cy="310896"/>
+            <a:ext cx="32004" cy="365760"/>
           </a:xfrm>
           <a:prstGeom prst="rect">
             <a:avLst/>
@@ -23822,8 +23926,8 @@
         </p:nvSpPr>
         <p:spPr>
           <a:xfrm>
-            <a:off x="713232" y="1271016"/>
-            <a:ext cx="10972800" cy="384048"/>
+            <a:off x="713232" y="1261872"/>
+            <a:ext cx="10744200" cy="438912"/>
           </a:xfrm>
           <a:prstGeom prst="rect">
             <a:avLst/>
@@ -23836,9 +23940,13 @@
           </a:bodyPr>
           <a:lstStyle/>
           <a:p>
-            <a:pPr algn="l"/>
-            <a:r>
-              <a:rPr sz="1550" b="1">
+            <a:pPr algn="l">
+              <a:lnSpc>
+                <a:spcPct val="110000"/>
+              </a:lnSpc>
+            </a:pPr>
+            <a:r>
+              <a:rPr sz="1800" b="1">
                 <a:solidFill>
                   <a:srgbClr val="1F5C99"/>
                 </a:solidFill>
@@ -24109,7 +24217,7 @@
         <p:spPr>
           <a:xfrm>
             <a:off x="566928" y="1298448"/>
-            <a:ext cx="27432" cy="310896"/>
+            <a:ext cx="32004" cy="365760"/>
           </a:xfrm>
           <a:prstGeom prst="rect">
             <a:avLst/>
@@ -24152,8 +24260,8 @@
         </p:nvSpPr>
         <p:spPr>
           <a:xfrm>
-            <a:off x="713232" y="1271016"/>
-            <a:ext cx="10972800" cy="384048"/>
+            <a:off x="713232" y="1261872"/>
+            <a:ext cx="10744200" cy="438912"/>
           </a:xfrm>
           <a:prstGeom prst="rect">
             <a:avLst/>
@@ -24166,9 +24274,13 @@
           </a:bodyPr>
           <a:lstStyle/>
           <a:p>
-            <a:pPr algn="l"/>
-            <a:r>
-              <a:rPr sz="1550" b="1">
+            <a:pPr algn="l">
+              <a:lnSpc>
+                <a:spcPct val="110000"/>
+              </a:lnSpc>
+            </a:pPr>
+            <a:r>
+              <a:rPr sz="1800" b="1">
                 <a:solidFill>
                   <a:srgbClr val="1F5C99"/>
                 </a:solidFill>
@@ -24439,7 +24551,7 @@
         <p:spPr>
           <a:xfrm>
             <a:off x="566928" y="1298448"/>
-            <a:ext cx="27432" cy="310896"/>
+            <a:ext cx="32004" cy="365760"/>
           </a:xfrm>
           <a:prstGeom prst="rect">
             <a:avLst/>
@@ -24482,8 +24594,8 @@
         </p:nvSpPr>
         <p:spPr>
           <a:xfrm>
-            <a:off x="713232" y="1271016"/>
-            <a:ext cx="10972800" cy="384048"/>
+            <a:off x="713232" y="1261872"/>
+            <a:ext cx="10744200" cy="438912"/>
           </a:xfrm>
           <a:prstGeom prst="rect">
             <a:avLst/>
@@ -24496,9 +24608,13 @@
           </a:bodyPr>
           <a:lstStyle/>
           <a:p>
-            <a:pPr algn="l"/>
-            <a:r>
-              <a:rPr sz="1550" b="1">
+            <a:pPr algn="l">
+              <a:lnSpc>
+                <a:spcPct val="110000"/>
+              </a:lnSpc>
+            </a:pPr>
+            <a:r>
+              <a:rPr sz="1800" b="1">
                 <a:solidFill>
                   <a:srgbClr val="1F5C99"/>
                 </a:solidFill>
@@ -24769,7 +24885,7 @@
         <p:spPr>
           <a:xfrm>
             <a:off x="566928" y="1298448"/>
-            <a:ext cx="27432" cy="310896"/>
+            <a:ext cx="32004" cy="365760"/>
           </a:xfrm>
           <a:prstGeom prst="rect">
             <a:avLst/>
@@ -24812,8 +24928,8 @@
         </p:nvSpPr>
         <p:spPr>
           <a:xfrm>
-            <a:off x="713232" y="1271016"/>
-            <a:ext cx="10972800" cy="384048"/>
+            <a:off x="713232" y="1261872"/>
+            <a:ext cx="10744200" cy="438912"/>
           </a:xfrm>
           <a:prstGeom prst="rect">
             <a:avLst/>
@@ -24826,9 +24942,13 @@
           </a:bodyPr>
           <a:lstStyle/>
           <a:p>
-            <a:pPr algn="l"/>
-            <a:r>
-              <a:rPr sz="1550" b="1">
+            <a:pPr algn="l">
+              <a:lnSpc>
+                <a:spcPct val="110000"/>
+              </a:lnSpc>
+            </a:pPr>
+            <a:r>
+              <a:rPr sz="1800" b="1">
                 <a:solidFill>
                   <a:srgbClr val="1F5C99"/>
                 </a:solidFill>
@@ -25099,7 +25219,7 @@
         <p:spPr>
           <a:xfrm>
             <a:off x="566928" y="1298448"/>
-            <a:ext cx="27432" cy="310896"/>
+            <a:ext cx="32004" cy="365760"/>
           </a:xfrm>
           <a:prstGeom prst="rect">
             <a:avLst/>
@@ -25142,8 +25262,8 @@
         </p:nvSpPr>
         <p:spPr>
           <a:xfrm>
-            <a:off x="713232" y="1271016"/>
-            <a:ext cx="10972800" cy="384048"/>
+            <a:off x="713232" y="1261872"/>
+            <a:ext cx="10744200" cy="438912"/>
           </a:xfrm>
           <a:prstGeom prst="rect">
             <a:avLst/>
@@ -25156,9 +25276,13 @@
           </a:bodyPr>
           <a:lstStyle/>
           <a:p>
-            <a:pPr algn="l"/>
-            <a:r>
-              <a:rPr sz="1550" b="1">
+            <a:pPr algn="l">
+              <a:lnSpc>
+                <a:spcPct val="110000"/>
+              </a:lnSpc>
+            </a:pPr>
+            <a:r>
+              <a:rPr sz="1800" b="1">
                 <a:solidFill>
                   <a:srgbClr val="1F5C99"/>
                 </a:solidFill>

--- a/docs/thesis/defense/答辩PPT-基于etcd的分布式Kubernetes调度器.pptx
+++ b/docs/thesis/defense/答辩PPT-基于etcd的分布式Kubernetes调度器.pptx
@@ -23224,98 +23224,14 @@
       </p:sp>
       <p:sp>
         <p:nvSpPr>
-          <p:cNvPr id="4" name="Rectangle 3"/>
+          <p:cNvPr id="4" name="Rounded Rectangle 3"/>
           <p:cNvSpPr/>
           <p:nvPr/>
         </p:nvSpPr>
         <p:spPr>
           <a:xfrm>
-            <a:off x="566928" y="1298448"/>
-            <a:ext cx="32004" cy="365760"/>
-          </a:xfrm>
-          <a:prstGeom prst="rect">
-            <a:avLst/>
-          </a:prstGeom>
-          <a:solidFill>
-            <a:srgbClr val="1F5C99"/>
-          </a:solidFill>
-          <a:ln>
-            <a:noFill/>
-          </a:ln>
-          <a:effectLst/>
-        </p:spPr>
-        <p:style>
-          <a:lnRef idx="1">
-            <a:schemeClr val="accent1"/>
-          </a:lnRef>
-          <a:fillRef idx="3">
-            <a:schemeClr val="accent1"/>
-          </a:fillRef>
-          <a:effectRef idx="2">
-            <a:schemeClr val="accent1"/>
-          </a:effectRef>
-          <a:fontRef idx="minor">
-            <a:schemeClr val="lt1"/>
-          </a:fontRef>
-        </p:style>
-        <p:txBody>
-          <a:bodyPr rtlCol="0" anchor="ctr"/>
-          <a:lstStyle/>
-          <a:p>
-            <a:pPr algn="ctr"/>
-          </a:p>
-        </p:txBody>
-      </p:sp>
-      <p:sp>
-        <p:nvSpPr>
-          <p:cNvPr id="5" name="TextBox 4"/>
-          <p:cNvSpPr txBox="1"/>
-          <p:nvPr/>
-        </p:nvSpPr>
-        <p:spPr>
-          <a:xfrm>
-            <a:off x="713232" y="1261872"/>
-            <a:ext cx="10744200" cy="438912"/>
-          </a:xfrm>
-          <a:prstGeom prst="rect">
-            <a:avLst/>
-          </a:prstGeom>
-          <a:noFill/>
-        </p:spPr>
-        <p:txBody>
-          <a:bodyPr wrap="square" anchor="ctr" lIns="0" rIns="0" tIns="0" bIns="0">
-            <a:spAutoFit/>
-          </a:bodyPr>
-          <a:lstStyle/>
-          <a:p>
-            <a:pPr algn="l">
-              <a:lnSpc>
-                <a:spcPct val="110000"/>
-              </a:lnSpc>
-            </a:pPr>
-            <a:r>
-              <a:rPr sz="1800" b="1">
-                <a:solidFill>
-                  <a:srgbClr val="1F5C99"/>
-                </a:solidFill>
-                <a:latin typeface="Arial"/>
-                <a:ea typeface="微软雅黑"/>
-              </a:rPr>
-              <a:t>两个创新：把 Binder 放进 Scheduler 进程；用四层容错守住“至多绑定一次”</a:t>
-            </a:r>
-          </a:p>
-        </p:txBody>
-      </p:sp>
-      <p:sp>
-        <p:nvSpPr>
-          <p:cNvPr id="6" name="Rounded Rectangle 5"/>
-          <p:cNvSpPr/>
-          <p:nvPr/>
-        </p:nvSpPr>
-        <p:spPr>
-          <a:xfrm>
-            <a:off x="566928" y="1874519"/>
-            <a:ext cx="5404104" cy="2103120"/>
+            <a:off x="566928" y="1755648"/>
+            <a:ext cx="5404104" cy="2331720"/>
           </a:xfrm>
           <a:prstGeom prst="roundRect">
             <a:avLst/>
@@ -23354,14 +23270,14 @@
       </p:sp>
       <p:sp>
         <p:nvSpPr>
-          <p:cNvPr id="7" name="Rectangle 6"/>
+          <p:cNvPr id="5" name="Rectangle 4"/>
           <p:cNvSpPr/>
           <p:nvPr/>
         </p:nvSpPr>
         <p:spPr>
           <a:xfrm>
-            <a:off x="566928" y="1874519"/>
-            <a:ext cx="50292" cy="2103120"/>
+            <a:off x="566928" y="1755648"/>
+            <a:ext cx="50292" cy="2331720"/>
           </a:xfrm>
           <a:prstGeom prst="rect">
             <a:avLst/>
@@ -23398,14 +23314,14 @@
       </p:sp>
       <p:sp>
         <p:nvSpPr>
-          <p:cNvPr id="8" name="TextBox 7"/>
+          <p:cNvPr id="6" name="TextBox 5"/>
           <p:cNvSpPr txBox="1"/>
           <p:nvPr/>
         </p:nvSpPr>
         <p:spPr>
           <a:xfrm>
-            <a:off x="731520" y="2002536"/>
-            <a:ext cx="5129784" cy="1920239"/>
+            <a:off x="731520" y="1883664"/>
+            <a:ext cx="5129784" cy="2148839"/>
           </a:xfrm>
           <a:prstGeom prst="rect">
             <a:avLst/>
@@ -23454,14 +23370,14 @@
       </p:sp>
       <p:sp>
         <p:nvSpPr>
-          <p:cNvPr id="9" name="Rounded Rectangle 8"/>
+          <p:cNvPr id="7" name="Rounded Rectangle 6"/>
           <p:cNvSpPr/>
           <p:nvPr/>
         </p:nvSpPr>
         <p:spPr>
           <a:xfrm>
-            <a:off x="6227064" y="1874519"/>
-            <a:ext cx="5404104" cy="2103120"/>
+            <a:off x="6227064" y="1755648"/>
+            <a:ext cx="5404104" cy="2331720"/>
           </a:xfrm>
           <a:prstGeom prst="roundRect">
             <a:avLst/>
@@ -23500,14 +23416,14 @@
       </p:sp>
       <p:sp>
         <p:nvSpPr>
-          <p:cNvPr id="10" name="Rectangle 9"/>
+          <p:cNvPr id="8" name="Rectangle 7"/>
           <p:cNvSpPr/>
           <p:nvPr/>
         </p:nvSpPr>
         <p:spPr>
           <a:xfrm>
-            <a:off x="6227064" y="1874519"/>
-            <a:ext cx="50292" cy="2103120"/>
+            <a:off x="6227064" y="1755648"/>
+            <a:ext cx="50292" cy="2331720"/>
           </a:xfrm>
           <a:prstGeom prst="rect">
             <a:avLst/>
@@ -23544,14 +23460,14 @@
       </p:sp>
       <p:sp>
         <p:nvSpPr>
-          <p:cNvPr id="11" name="TextBox 10"/>
+          <p:cNvPr id="9" name="TextBox 8"/>
           <p:cNvSpPr txBox="1"/>
           <p:nvPr/>
         </p:nvSpPr>
         <p:spPr>
           <a:xfrm>
-            <a:off x="6391656" y="2002536"/>
-            <a:ext cx="5129784" cy="1920239"/>
+            <a:off x="6391656" y="1883664"/>
+            <a:ext cx="5129784" cy="2148839"/>
           </a:xfrm>
           <a:prstGeom prst="rect">
             <a:avLst/>
@@ -23600,13 +23516,13 @@
       </p:sp>
       <p:sp>
         <p:nvSpPr>
-          <p:cNvPr id="12" name="Rounded Rectangle 11"/>
+          <p:cNvPr id="10" name="Rounded Rectangle 9"/>
           <p:cNvSpPr/>
           <p:nvPr/>
         </p:nvSpPr>
         <p:spPr>
           <a:xfrm>
-            <a:off x="566928" y="4343400"/>
+            <a:off x="566928" y="4553712"/>
             <a:ext cx="11064240" cy="868680"/>
           </a:xfrm>
           <a:prstGeom prst="roundRect">
@@ -23646,13 +23562,13 @@
       </p:sp>
       <p:sp>
         <p:nvSpPr>
-          <p:cNvPr id="13" name="Rectangle 12"/>
+          <p:cNvPr id="11" name="Rectangle 10"/>
           <p:cNvSpPr/>
           <p:nvPr/>
         </p:nvSpPr>
         <p:spPr>
           <a:xfrm>
-            <a:off x="566928" y="4343400"/>
+            <a:off x="566928" y="4553712"/>
             <a:ext cx="73152" cy="868680"/>
           </a:xfrm>
           <a:prstGeom prst="rect">
@@ -23690,13 +23606,13 @@
       </p:sp>
       <p:sp>
         <p:nvSpPr>
-          <p:cNvPr id="14" name="TextBox 13"/>
+          <p:cNvPr id="12" name="TextBox 11"/>
           <p:cNvSpPr txBox="1"/>
           <p:nvPr/>
         </p:nvSpPr>
         <p:spPr>
           <a:xfrm>
-            <a:off x="786384" y="4434840"/>
+            <a:off x="786384" y="4645152"/>
             <a:ext cx="10607040" cy="685800"/>
           </a:xfrm>
           <a:prstGeom prst="rect">
@@ -23730,7 +23646,7 @@
       </p:sp>
       <p:sp>
         <p:nvSpPr>
-          <p:cNvPr id="15" name="TextBox 14"/>
+          <p:cNvPr id="13" name="TextBox 12"/>
           <p:cNvSpPr txBox="1"/>
           <p:nvPr/>
         </p:nvSpPr>

--- a/docs/thesis/defense/答辩PPT-基于etcd的分布式Kubernetes调度器.pptx
+++ b/docs/thesis/defense/答辩PPT-基于etcd的分布式Kubernetes调度器.pptx
@@ -23639,7 +23639,7 @@
                 <a:latin typeface="Arial"/>
                 <a:ea typeface="微软雅黑"/>
               </a:rPr>
-              <a:t>两条创新指向同一目标：不改 API 的前提下，让分布式调度既跑得快，又绑得对。</a:t>
+              <a:t>两条创新指向同一目标：不改 API 的前提下，让分布式调度既跑得快，稳定性更高。</a:t>
             </a:r>
           </a:p>
         </p:txBody>

--- a/docs/thesis/defense/答辩PPT-基于etcd的分布式Kubernetes调度器.pptx
+++ b/docs/thesis/defense/答辩PPT-基于etcd的分布式Kubernetes调度器.pptx
@@ -23380,7 +23380,7 @@
                 <a:latin typeface="Arial"/>
                 <a:ea typeface="微软雅黑"/>
               </a:rPr>
-              <a:t>三层职责</a:t>
+              <a:t>整体架构图</a:t>
             </a:r>
           </a:p>
         </p:txBody>

--- a/docs/thesis/defense/答辩PPT-基于etcd的分布式Kubernetes调度器.pptx
+++ b/docs/thesis/defense/答辩PPT-基于etcd的分布式Kubernetes调度器.pptx
@@ -23385,93 +23385,9 @@
           </a:p>
         </p:txBody>
       </p:sp>
-      <p:sp>
-        <p:nvSpPr>
-          <p:cNvPr id="4" name="Rectangle 3"/>
-          <p:cNvSpPr/>
-          <p:nvPr/>
-        </p:nvSpPr>
-        <p:spPr>
-          <a:xfrm>
-            <a:off x="566928" y="1298448"/>
-            <a:ext cx="32004" cy="365760"/>
-          </a:xfrm>
-          <a:prstGeom prst="rect">
-            <a:avLst/>
-          </a:prstGeom>
-          <a:solidFill>
-            <a:srgbClr val="1F5C99"/>
-          </a:solidFill>
-          <a:ln>
-            <a:noFill/>
-          </a:ln>
-          <a:effectLst/>
-        </p:spPr>
-        <p:style>
-          <a:lnRef idx="1">
-            <a:schemeClr val="accent1"/>
-          </a:lnRef>
-          <a:fillRef idx="3">
-            <a:schemeClr val="accent1"/>
-          </a:fillRef>
-          <a:effectRef idx="2">
-            <a:schemeClr val="accent1"/>
-          </a:effectRef>
-          <a:fontRef idx="minor">
-            <a:schemeClr val="lt1"/>
-          </a:fontRef>
-        </p:style>
-        <p:txBody>
-          <a:bodyPr rtlCol="0" anchor="ctr"/>
-          <a:lstStyle/>
-          <a:p>
-            <a:pPr algn="ctr"/>
-          </a:p>
-        </p:txBody>
-      </p:sp>
-      <p:sp>
-        <p:nvSpPr>
-          <p:cNvPr id="5" name="TextBox 4"/>
-          <p:cNvSpPr txBox="1"/>
-          <p:nvPr/>
-        </p:nvSpPr>
-        <p:spPr>
-          <a:xfrm>
-            <a:off x="713232" y="1261872"/>
-            <a:ext cx="10744200" cy="438912"/>
-          </a:xfrm>
-          <a:prstGeom prst="rect">
-            <a:avLst/>
-          </a:prstGeom>
-          <a:noFill/>
-        </p:spPr>
-        <p:txBody>
-          <a:bodyPr wrap="square" anchor="ctr" lIns="0" rIns="0" tIns="0" bIns="0">
-            <a:spAutoFit/>
-          </a:bodyPr>
-          <a:lstStyle/>
-          <a:p>
-            <a:pPr algn="l">
-              <a:lnSpc>
-                <a:spcPct val="110000"/>
-              </a:lnSpc>
-            </a:pPr>
-            <a:r>
-              <a:rPr sz="1800" b="1">
-                <a:solidFill>
-                  <a:srgbClr val="1F5C99"/>
-                </a:solidFill>
-                <a:latin typeface="Arial"/>
-                <a:ea typeface="微软雅黑"/>
-              </a:rPr>
-              <a:t>分区之间无锁并发，状态推进全部由 Watch 事件驱动</a:t>
-            </a:r>
-          </a:p>
-        </p:txBody>
-      </p:sp>
       <p:pic>
         <p:nvPicPr>
-          <p:cNvPr id="6" name="Picture 5" descr="fig3-1-system-arch.png"/>
+          <p:cNvPr id="4" name="Picture 3" descr="fig3-1-system-arch.png"/>
           <p:cNvPicPr>
             <a:picLocks noChangeAspect="1"/>
           </p:cNvPicPr>
@@ -23485,14 +23401,104 @@
         </p:blipFill>
         <p:spPr>
           <a:xfrm>
-            <a:off x="5806440" y="2587294"/>
-            <a:ext cx="5852160" cy="2597811"/>
+            <a:off x="2115464" y="868680"/>
+            <a:ext cx="7930591" cy="3520440"/>
           </a:xfrm>
           <a:prstGeom prst="rect">
             <a:avLst/>
           </a:prstGeom>
         </p:spPr>
       </p:pic>
+      <p:sp>
+        <p:nvSpPr>
+          <p:cNvPr id="5" name="Rounded Rectangle 4"/>
+          <p:cNvSpPr/>
+          <p:nvPr/>
+        </p:nvSpPr>
+        <p:spPr>
+          <a:xfrm>
+            <a:off x="566928" y="4590288"/>
+            <a:ext cx="3535680" cy="1481328"/>
+          </a:xfrm>
+          <a:prstGeom prst="roundRect">
+            <a:avLst/>
+          </a:prstGeom>
+          <a:solidFill>
+            <a:srgbClr val="FFFFFF"/>
+          </a:solidFill>
+          <a:ln w="9525">
+            <a:solidFill>
+              <a:srgbClr val="D8DFE8"/>
+            </a:solidFill>
+          </a:ln>
+          <a:effectLst/>
+        </p:spPr>
+        <p:style>
+          <a:lnRef idx="1">
+            <a:schemeClr val="accent1"/>
+          </a:lnRef>
+          <a:fillRef idx="3">
+            <a:schemeClr val="accent1"/>
+          </a:fillRef>
+          <a:effectRef idx="2">
+            <a:schemeClr val="accent1"/>
+          </a:effectRef>
+          <a:fontRef idx="minor">
+            <a:schemeClr val="lt1"/>
+          </a:fontRef>
+        </p:style>
+        <p:txBody>
+          <a:bodyPr rtlCol="0" anchor="ctr"/>
+          <a:lstStyle/>
+          <a:p>
+            <a:pPr algn="ctr"/>
+          </a:p>
+        </p:txBody>
+      </p:sp>
+      <p:sp>
+        <p:nvSpPr>
+          <p:cNvPr id="6" name="Rectangle 5"/>
+          <p:cNvSpPr/>
+          <p:nvPr/>
+        </p:nvSpPr>
+        <p:spPr>
+          <a:xfrm>
+            <a:off x="566928" y="4590288"/>
+            <a:ext cx="50292" cy="1481328"/>
+          </a:xfrm>
+          <a:prstGeom prst="rect">
+            <a:avLst/>
+          </a:prstGeom>
+          <a:solidFill>
+            <a:srgbClr val="0B2A4A"/>
+          </a:solidFill>
+          <a:ln>
+            <a:noFill/>
+          </a:ln>
+          <a:effectLst/>
+        </p:spPr>
+        <p:style>
+          <a:lnRef idx="1">
+            <a:schemeClr val="accent1"/>
+          </a:lnRef>
+          <a:fillRef idx="3">
+            <a:schemeClr val="accent1"/>
+          </a:fillRef>
+          <a:effectRef idx="2">
+            <a:schemeClr val="accent1"/>
+          </a:effectRef>
+          <a:fontRef idx="minor">
+            <a:schemeClr val="lt1"/>
+          </a:fontRef>
+        </p:style>
+        <p:txBody>
+          <a:bodyPr rtlCol="0" anchor="ctr"/>
+          <a:lstStyle/>
+          <a:p>
+            <a:pPr algn="ctr"/>
+          </a:p>
+        </p:txBody>
+      </p:sp>
       <p:sp>
         <p:nvSpPr>
           <p:cNvPr id="7" name="TextBox 6"/>
@@ -23501,8 +23507,8 @@
         </p:nvSpPr>
         <p:spPr>
           <a:xfrm>
-            <a:off x="566928" y="2011680"/>
-            <a:ext cx="5029200" cy="1417320"/>
+            <a:off x="749808" y="4700016"/>
+            <a:ext cx="3224784" cy="1298448"/>
           </a:xfrm>
           <a:prstGeom prst="rect">
             <a:avLst/>
@@ -23515,67 +23521,335 @@
           </a:bodyPr>
           <a:lstStyle/>
           <a:p>
-            <a:pPr algn="l">
-              <a:lnSpc>
-                <a:spcPct val="115000"/>
-              </a:lnSpc>
-            </a:pPr>
-            <a:r>
-              <a:rPr sz="1550" b="0">
-                <a:solidFill>
-                  <a:srgbClr val="333333"/>
+            <a:pPr algn="l"/>
+            <a:r>
+              <a:rPr sz="1500" b="1">
+                <a:solidFill>
+                  <a:srgbClr val="0B2A4A"/>
                 </a:solidFill>
                 <a:latin typeface="Arial"/>
                 <a:ea typeface="微软雅黑"/>
               </a:rPr>
-              <a:t>▪  Dispatcher：分区分配与回退</a:t>
+              <a:t>Dispatcher</a:t>
             </a:r>
           </a:p>
           <a:p>
             <a:pPr algn="l">
               <a:lnSpc>
-                <a:spcPct val="115000"/>
+                <a:spcPct val="118000"/>
               </a:lnSpc>
               <a:spcBef>
-                <a:spcPts val="1400"/>
+                <a:spcPts val="400"/>
               </a:spcBef>
             </a:pPr>
             <a:r>
-              <a:rPr sz="1550" b="0">
+              <a:rPr sz="1250" b="0">
                 <a:solidFill>
                   <a:srgbClr val="333333"/>
                 </a:solidFill>
                 <a:latin typeface="Arial"/>
                 <a:ea typeface="微软雅黑"/>
               </a:rPr>
-              <a:t>▪  Scheduler：Filter/Score/Reserve</a:t>
-            </a:r>
-          </a:p>
-          <a:p>
-            <a:pPr algn="l">
-              <a:lnSpc>
-                <a:spcPct val="115000"/>
-              </a:lnSpc>
-              <a:spcBef>
-                <a:spcPts val="1400"/>
-              </a:spcBef>
-            </a:pPr>
-            <a:r>
-              <a:rPr sz="1550" b="0">
-                <a:solidFill>
-                  <a:srgbClr val="333333"/>
+              <a:t>单实例（Leader Election）。维护节点分区表，按分区把待调度 Pod 分发到对应 Scheduler；绑定失败时清理调度注解，触发全局重分发。</a:t>
+            </a:r>
+          </a:p>
+        </p:txBody>
+      </p:sp>
+      <p:sp>
+        <p:nvSpPr>
+          <p:cNvPr id="8" name="Rounded Rectangle 7"/>
+          <p:cNvSpPr/>
+          <p:nvPr/>
+        </p:nvSpPr>
+        <p:spPr>
+          <a:xfrm>
+            <a:off x="4331208" y="4590288"/>
+            <a:ext cx="3535680" cy="1481328"/>
+          </a:xfrm>
+          <a:prstGeom prst="roundRect">
+            <a:avLst/>
+          </a:prstGeom>
+          <a:solidFill>
+            <a:srgbClr val="FFFFFF"/>
+          </a:solidFill>
+          <a:ln w="9525">
+            <a:solidFill>
+              <a:srgbClr val="D8DFE8"/>
+            </a:solidFill>
+          </a:ln>
+          <a:effectLst/>
+        </p:spPr>
+        <p:style>
+          <a:lnRef idx="1">
+            <a:schemeClr val="accent1"/>
+          </a:lnRef>
+          <a:fillRef idx="3">
+            <a:schemeClr val="accent1"/>
+          </a:fillRef>
+          <a:effectRef idx="2">
+            <a:schemeClr val="accent1"/>
+          </a:effectRef>
+          <a:fontRef idx="minor">
+            <a:schemeClr val="lt1"/>
+          </a:fontRef>
+        </p:style>
+        <p:txBody>
+          <a:bodyPr rtlCol="0" anchor="ctr"/>
+          <a:lstStyle/>
+          <a:p>
+            <a:pPr algn="ctr"/>
+          </a:p>
+        </p:txBody>
+      </p:sp>
+      <p:sp>
+        <p:nvSpPr>
+          <p:cNvPr id="9" name="Rectangle 8"/>
+          <p:cNvSpPr/>
+          <p:nvPr/>
+        </p:nvSpPr>
+        <p:spPr>
+          <a:xfrm>
+            <a:off x="4331208" y="4590288"/>
+            <a:ext cx="50292" cy="1481328"/>
+          </a:xfrm>
+          <a:prstGeom prst="rect">
+            <a:avLst/>
+          </a:prstGeom>
+          <a:solidFill>
+            <a:srgbClr val="0B2A4A"/>
+          </a:solidFill>
+          <a:ln>
+            <a:noFill/>
+          </a:ln>
+          <a:effectLst/>
+        </p:spPr>
+        <p:style>
+          <a:lnRef idx="1">
+            <a:schemeClr val="accent1"/>
+          </a:lnRef>
+          <a:fillRef idx="3">
+            <a:schemeClr val="accent1"/>
+          </a:fillRef>
+          <a:effectRef idx="2">
+            <a:schemeClr val="accent1"/>
+          </a:effectRef>
+          <a:fontRef idx="minor">
+            <a:schemeClr val="lt1"/>
+          </a:fontRef>
+        </p:style>
+        <p:txBody>
+          <a:bodyPr rtlCol="0" anchor="ctr"/>
+          <a:lstStyle/>
+          <a:p>
+            <a:pPr algn="ctr"/>
+          </a:p>
+        </p:txBody>
+      </p:sp>
+      <p:sp>
+        <p:nvSpPr>
+          <p:cNvPr id="10" name="TextBox 9"/>
+          <p:cNvSpPr txBox="1"/>
+          <p:nvPr/>
+        </p:nvSpPr>
+        <p:spPr>
+          <a:xfrm>
+            <a:off x="4514088" y="4700016"/>
+            <a:ext cx="3224784" cy="1298448"/>
+          </a:xfrm>
+          <a:prstGeom prst="rect">
+            <a:avLst/>
+          </a:prstGeom>
+          <a:noFill/>
+        </p:spPr>
+        <p:txBody>
+          <a:bodyPr wrap="square" anchor="t" lIns="0" rIns="0" tIns="0" bIns="0">
+            <a:spAutoFit/>
+          </a:bodyPr>
+          <a:lstStyle/>
+          <a:p>
+            <a:pPr algn="l"/>
+            <a:r>
+              <a:rPr sz="1500" b="1">
+                <a:solidFill>
+                  <a:srgbClr val="0B2A4A"/>
                 </a:solidFill>
                 <a:latin typeface="Arial"/>
                 <a:ea typeface="微软雅黑"/>
               </a:rPr>
-              <a:t>▪  Binder：Bind 原子写与失败处理</a:t>
-            </a:r>
-          </a:p>
-        </p:txBody>
-      </p:sp>
-      <p:sp>
-        <p:nvSpPr>
-          <p:cNvPr id="8" name="TextBox 7"/>
+              <a:t>Scheduler</a:t>
+            </a:r>
+          </a:p>
+          <a:p>
+            <a:pPr algn="l">
+              <a:lnSpc>
+                <a:spcPct val="118000"/>
+              </a:lnSpc>
+              <a:spcBef>
+                <a:spcPts val="400"/>
+              </a:spcBef>
+            </a:pPr>
+            <a:r>
+              <a:rPr sz="1250" b="0">
+                <a:solidFill>
+                  <a:srgbClr val="333333"/>
+                </a:solidFill>
+                <a:latin typeface="Arial"/>
+                <a:ea typeface="微软雅黑"/>
+              </a:rPr>
+              <a:t>多实例水平扩展。只调度本分区内的节点，依次执行 Filter / Score / Reserve，产出目标节点后交给 Binder 落盘。</a:t>
+            </a:r>
+          </a:p>
+        </p:txBody>
+      </p:sp>
+      <p:sp>
+        <p:nvSpPr>
+          <p:cNvPr id="11" name="Rounded Rectangle 10"/>
+          <p:cNvSpPr/>
+          <p:nvPr/>
+        </p:nvSpPr>
+        <p:spPr>
+          <a:xfrm>
+            <a:off x="8095488" y="4590288"/>
+            <a:ext cx="3535680" cy="1481328"/>
+          </a:xfrm>
+          <a:prstGeom prst="roundRect">
+            <a:avLst/>
+          </a:prstGeom>
+          <a:solidFill>
+            <a:srgbClr val="FFFFFF"/>
+          </a:solidFill>
+          <a:ln w="9525">
+            <a:solidFill>
+              <a:srgbClr val="D8DFE8"/>
+            </a:solidFill>
+          </a:ln>
+          <a:effectLst/>
+        </p:spPr>
+        <p:style>
+          <a:lnRef idx="1">
+            <a:schemeClr val="accent1"/>
+          </a:lnRef>
+          <a:fillRef idx="3">
+            <a:schemeClr val="accent1"/>
+          </a:fillRef>
+          <a:effectRef idx="2">
+            <a:schemeClr val="accent1"/>
+          </a:effectRef>
+          <a:fontRef idx="minor">
+            <a:schemeClr val="lt1"/>
+          </a:fontRef>
+        </p:style>
+        <p:txBody>
+          <a:bodyPr rtlCol="0" anchor="ctr"/>
+          <a:lstStyle/>
+          <a:p>
+            <a:pPr algn="ctr"/>
+          </a:p>
+        </p:txBody>
+      </p:sp>
+      <p:sp>
+        <p:nvSpPr>
+          <p:cNvPr id="12" name="Rectangle 11"/>
+          <p:cNvSpPr/>
+          <p:nvPr/>
+        </p:nvSpPr>
+        <p:spPr>
+          <a:xfrm>
+            <a:off x="8095488" y="4590288"/>
+            <a:ext cx="50292" cy="1481328"/>
+          </a:xfrm>
+          <a:prstGeom prst="rect">
+            <a:avLst/>
+          </a:prstGeom>
+          <a:solidFill>
+            <a:srgbClr val="0B2A4A"/>
+          </a:solidFill>
+          <a:ln>
+            <a:noFill/>
+          </a:ln>
+          <a:effectLst/>
+        </p:spPr>
+        <p:style>
+          <a:lnRef idx="1">
+            <a:schemeClr val="accent1"/>
+          </a:lnRef>
+          <a:fillRef idx="3">
+            <a:schemeClr val="accent1"/>
+          </a:fillRef>
+          <a:effectRef idx="2">
+            <a:schemeClr val="accent1"/>
+          </a:effectRef>
+          <a:fontRef idx="minor">
+            <a:schemeClr val="lt1"/>
+          </a:fontRef>
+        </p:style>
+        <p:txBody>
+          <a:bodyPr rtlCol="0" anchor="ctr"/>
+          <a:lstStyle/>
+          <a:p>
+            <a:pPr algn="ctr"/>
+          </a:p>
+        </p:txBody>
+      </p:sp>
+      <p:sp>
+        <p:nvSpPr>
+          <p:cNvPr id="13" name="TextBox 12"/>
+          <p:cNvSpPr txBox="1"/>
+          <p:nvPr/>
+        </p:nvSpPr>
+        <p:spPr>
+          <a:xfrm>
+            <a:off x="8278367" y="4700016"/>
+            <a:ext cx="3224784" cy="1298448"/>
+          </a:xfrm>
+          <a:prstGeom prst="rect">
+            <a:avLst/>
+          </a:prstGeom>
+          <a:noFill/>
+        </p:spPr>
+        <p:txBody>
+          <a:bodyPr wrap="square" anchor="t" lIns="0" rIns="0" tIns="0" bIns="0">
+            <a:spAutoFit/>
+          </a:bodyPr>
+          <a:lstStyle/>
+          <a:p>
+            <a:pPr algn="l"/>
+            <a:r>
+              <a:rPr sz="1500" b="1">
+                <a:solidFill>
+                  <a:srgbClr val="0B2A4A"/>
+                </a:solidFill>
+                <a:latin typeface="Arial"/>
+                <a:ea typeface="微软雅黑"/>
+              </a:rPr>
+              <a:t>Binder</a:t>
+            </a:r>
+          </a:p>
+          <a:p>
+            <a:pPr algn="l">
+              <a:lnSpc>
+                <a:spcPct val="118000"/>
+              </a:lnSpc>
+              <a:spcBef>
+                <a:spcPts val="400"/>
+              </a:spcBef>
+            </a:pPr>
+            <a:r>
+              <a:rPr sz="1250" b="0">
+                <a:solidFill>
+                  <a:srgbClr val="333333"/>
+                </a:solidFill>
+                <a:latin typeface="Arial"/>
+                <a:ea typeface="微软雅黑"/>
+              </a:rPr>
+              <a:t>与 Scheduler 同进程。执行 Bind 子资源原子写；失败时按四层机制重试、回收孤儿状态，必要时上升到跨实例回退。</a:t>
+            </a:r>
+          </a:p>
+        </p:txBody>
+      </p:sp>
+      <p:sp>
+        <p:nvSpPr>
+          <p:cNvPr id="14" name="TextBox 13"/>
           <p:cNvSpPr txBox="1"/>
           <p:nvPr/>
         </p:nvSpPr>

--- a/docs/thesis/defense/答辩PPT-基于etcd的分布式Kubernetes调度器.pptx
+++ b/docs/thesis/defense/答辩PPT-基于etcd的分布式Kubernetes调度器.pptx
@@ -23993,93 +23993,9 @@
           </a:p>
         </p:txBody>
       </p:sp>
-      <p:sp>
-        <p:nvSpPr>
-          <p:cNvPr id="4" name="Rectangle 3"/>
-          <p:cNvSpPr/>
-          <p:nvPr/>
-        </p:nvSpPr>
-        <p:spPr>
-          <a:xfrm>
-            <a:off x="566928" y="1298448"/>
-            <a:ext cx="32004" cy="365760"/>
-          </a:xfrm>
-          <a:prstGeom prst="rect">
-            <a:avLst/>
-          </a:prstGeom>
-          <a:solidFill>
-            <a:srgbClr val="1F5C99"/>
-          </a:solidFill>
-          <a:ln>
-            <a:noFill/>
-          </a:ln>
-          <a:effectLst/>
-        </p:spPr>
-        <p:style>
-          <a:lnRef idx="1">
-            <a:schemeClr val="accent1"/>
-          </a:lnRef>
-          <a:fillRef idx="3">
-            <a:schemeClr val="accent1"/>
-          </a:fillRef>
-          <a:effectRef idx="2">
-            <a:schemeClr val="accent1"/>
-          </a:effectRef>
-          <a:fontRef idx="minor">
-            <a:schemeClr val="lt1"/>
-          </a:fontRef>
-        </p:style>
-        <p:txBody>
-          <a:bodyPr rtlCol="0" anchor="ctr"/>
-          <a:lstStyle/>
-          <a:p>
-            <a:pPr algn="ctr"/>
-          </a:p>
-        </p:txBody>
-      </p:sp>
-      <p:sp>
-        <p:nvSpPr>
-          <p:cNvPr id="5" name="TextBox 4"/>
-          <p:cNvSpPr txBox="1"/>
-          <p:nvPr/>
-        </p:nvSpPr>
-        <p:spPr>
-          <a:xfrm>
-            <a:off x="713232" y="1261872"/>
-            <a:ext cx="10744200" cy="438912"/>
-          </a:xfrm>
-          <a:prstGeom prst="rect">
-            <a:avLst/>
-          </a:prstGeom>
-          <a:noFill/>
-        </p:spPr>
-        <p:txBody>
-          <a:bodyPr wrap="square" anchor="ctr" lIns="0" rIns="0" tIns="0" bIns="0">
-            <a:spAutoFit/>
-          </a:bodyPr>
-          <a:lstStyle/>
-          <a:p>
-            <a:pPr algn="l">
-              <a:lnSpc>
-                <a:spcPct val="110000"/>
-              </a:lnSpc>
-            </a:pPr>
-            <a:r>
-              <a:rPr sz="1800" b="1">
-                <a:solidFill>
-                  <a:srgbClr val="1F5C99"/>
-                </a:solidFill>
-                <a:latin typeface="Arial"/>
-                <a:ea typeface="微软雅黑"/>
-              </a:rPr>
-              <a:t>先校验归属、再选分区、然后入队——它不选节点，只决定 Pod 去哪</a:t>
-            </a:r>
-          </a:p>
-        </p:txBody>
-      </p:sp>
       <p:pic>
         <p:nvPicPr>
-          <p:cNvPr id="6" name="Picture 5" descr="fig3-3-dispatcher-flow.png"/>
+          <p:cNvPr id="4" name="Picture 3" descr="fig3-3-dispatcher-flow.png"/>
           <p:cNvPicPr>
             <a:picLocks noChangeAspect="1"/>
           </p:cNvPicPr>
@@ -24093,14 +24009,104 @@
         </p:blipFill>
         <p:spPr>
           <a:xfrm>
-            <a:off x="4892040" y="1666984"/>
-            <a:ext cx="6720840" cy="4246406"/>
+            <a:off x="3150114" y="868680"/>
+            <a:ext cx="5861290" cy="3703320"/>
           </a:xfrm>
           <a:prstGeom prst="rect">
             <a:avLst/>
           </a:prstGeom>
         </p:spPr>
       </p:pic>
+      <p:sp>
+        <p:nvSpPr>
+          <p:cNvPr id="5" name="Rounded Rectangle 4"/>
+          <p:cNvSpPr/>
+          <p:nvPr/>
+        </p:nvSpPr>
+        <p:spPr>
+          <a:xfrm>
+            <a:off x="566928" y="4754880"/>
+            <a:ext cx="3535680" cy="1417320"/>
+          </a:xfrm>
+          <a:prstGeom prst="roundRect">
+            <a:avLst/>
+          </a:prstGeom>
+          <a:solidFill>
+            <a:srgbClr val="FFFFFF"/>
+          </a:solidFill>
+          <a:ln w="9525">
+            <a:solidFill>
+              <a:srgbClr val="D8DFE8"/>
+            </a:solidFill>
+          </a:ln>
+          <a:effectLst/>
+        </p:spPr>
+        <p:style>
+          <a:lnRef idx="1">
+            <a:schemeClr val="accent1"/>
+          </a:lnRef>
+          <a:fillRef idx="3">
+            <a:schemeClr val="accent1"/>
+          </a:fillRef>
+          <a:effectRef idx="2">
+            <a:schemeClr val="accent1"/>
+          </a:effectRef>
+          <a:fontRef idx="minor">
+            <a:schemeClr val="lt1"/>
+          </a:fontRef>
+        </p:style>
+        <p:txBody>
+          <a:bodyPr rtlCol="0" anchor="ctr"/>
+          <a:lstStyle/>
+          <a:p>
+            <a:pPr algn="ctr"/>
+          </a:p>
+        </p:txBody>
+      </p:sp>
+      <p:sp>
+        <p:nvSpPr>
+          <p:cNvPr id="6" name="Rectangle 5"/>
+          <p:cNvSpPr/>
+          <p:nvPr/>
+        </p:nvSpPr>
+        <p:spPr>
+          <a:xfrm>
+            <a:off x="566928" y="4754880"/>
+            <a:ext cx="50292" cy="1417320"/>
+          </a:xfrm>
+          <a:prstGeom prst="rect">
+            <a:avLst/>
+          </a:prstGeom>
+          <a:solidFill>
+            <a:srgbClr val="0B2A4A"/>
+          </a:solidFill>
+          <a:ln>
+            <a:noFill/>
+          </a:ln>
+          <a:effectLst/>
+        </p:spPr>
+        <p:style>
+          <a:lnRef idx="1">
+            <a:schemeClr val="accent1"/>
+          </a:lnRef>
+          <a:fillRef idx="3">
+            <a:schemeClr val="accent1"/>
+          </a:fillRef>
+          <a:effectRef idx="2">
+            <a:schemeClr val="accent1"/>
+          </a:effectRef>
+          <a:fontRef idx="minor">
+            <a:schemeClr val="lt1"/>
+          </a:fontRef>
+        </p:style>
+        <p:txBody>
+          <a:bodyPr rtlCol="0" anchor="ctr"/>
+          <a:lstStyle/>
+          <a:p>
+            <a:pPr algn="ctr"/>
+          </a:p>
+        </p:txBody>
+      </p:sp>
       <p:sp>
         <p:nvSpPr>
           <p:cNvPr id="7" name="TextBox 6"/>
@@ -24109,8 +24115,8 @@
         </p:nvSpPr>
         <p:spPr>
           <a:xfrm>
-            <a:off x="566928" y="2011680"/>
-            <a:ext cx="4160520" cy="1417320"/>
+            <a:off x="749808" y="4864608"/>
+            <a:ext cx="3224784" cy="1234440"/>
           </a:xfrm>
           <a:prstGeom prst="rect">
             <a:avLst/>
@@ -24123,67 +24129,335 @@
           </a:bodyPr>
           <a:lstStyle/>
           <a:p>
-            <a:pPr algn="l">
-              <a:lnSpc>
-                <a:spcPct val="115000"/>
-              </a:lnSpc>
-            </a:pPr>
-            <a:r>
-              <a:rPr sz="1550" b="0">
-                <a:solidFill>
-                  <a:srgbClr val="333333"/>
+            <a:pPr algn="l"/>
+            <a:r>
+              <a:rPr sz="1500" b="1">
+                <a:solidFill>
+                  <a:srgbClr val="0B2A4A"/>
                 </a:solidFill>
                 <a:latin typeface="Arial"/>
                 <a:ea typeface="微软雅黑"/>
               </a:rPr>
-              <a:t>▪  归属校验：把漂移的 Pod 拦住</a:t>
+              <a:t>① 归属校验</a:t>
             </a:r>
           </a:p>
           <a:p>
             <a:pPr algn="l">
               <a:lnSpc>
-                <a:spcPct val="115000"/>
+                <a:spcPct val="118000"/>
               </a:lnSpc>
               <a:spcBef>
-                <a:spcPts val="1400"/>
+                <a:spcPts val="400"/>
               </a:spcBef>
             </a:pPr>
             <a:r>
-              <a:rPr sz="1550" b="0">
+              <a:rPr sz="1250" b="0">
                 <a:solidFill>
                   <a:srgbClr val="333333"/>
                 </a:solidFill>
                 <a:latin typeface="Arial"/>
                 <a:ea typeface="微软雅黑"/>
               </a:rPr>
-              <a:t>▪  分区选择：按实例负载均衡</a:t>
-            </a:r>
-          </a:p>
-          <a:p>
-            <a:pPr algn="l">
-              <a:lnSpc>
-                <a:spcPct val="115000"/>
-              </a:lnSpc>
-              <a:spcBef>
-                <a:spcPts val="1400"/>
-              </a:spcBef>
-            </a:pPr>
-            <a:r>
-              <a:rPr sz="1550" b="0">
-                <a:solidFill>
-                  <a:srgbClr val="333333"/>
+              <a:t>Bind 前校验目标节点的 eno.io/scheduler-name 注解，把分区归属漂移的 Pod 拦在门外</a:t>
+            </a:r>
+          </a:p>
+        </p:txBody>
+      </p:sp>
+      <p:sp>
+        <p:nvSpPr>
+          <p:cNvPr id="8" name="Rounded Rectangle 7"/>
+          <p:cNvSpPr/>
+          <p:nvPr/>
+        </p:nvSpPr>
+        <p:spPr>
+          <a:xfrm>
+            <a:off x="4331208" y="4754880"/>
+            <a:ext cx="3535680" cy="1417320"/>
+          </a:xfrm>
+          <a:prstGeom prst="roundRect">
+            <a:avLst/>
+          </a:prstGeom>
+          <a:solidFill>
+            <a:srgbClr val="FFFFFF"/>
+          </a:solidFill>
+          <a:ln w="9525">
+            <a:solidFill>
+              <a:srgbClr val="D8DFE8"/>
+            </a:solidFill>
+          </a:ln>
+          <a:effectLst/>
+        </p:spPr>
+        <p:style>
+          <a:lnRef idx="1">
+            <a:schemeClr val="accent1"/>
+          </a:lnRef>
+          <a:fillRef idx="3">
+            <a:schemeClr val="accent1"/>
+          </a:fillRef>
+          <a:effectRef idx="2">
+            <a:schemeClr val="accent1"/>
+          </a:effectRef>
+          <a:fontRef idx="minor">
+            <a:schemeClr val="lt1"/>
+          </a:fontRef>
+        </p:style>
+        <p:txBody>
+          <a:bodyPr rtlCol="0" anchor="ctr"/>
+          <a:lstStyle/>
+          <a:p>
+            <a:pPr algn="ctr"/>
+          </a:p>
+        </p:txBody>
+      </p:sp>
+      <p:sp>
+        <p:nvSpPr>
+          <p:cNvPr id="9" name="Rectangle 8"/>
+          <p:cNvSpPr/>
+          <p:nvPr/>
+        </p:nvSpPr>
+        <p:spPr>
+          <a:xfrm>
+            <a:off x="4331208" y="4754880"/>
+            <a:ext cx="50292" cy="1417320"/>
+          </a:xfrm>
+          <a:prstGeom prst="rect">
+            <a:avLst/>
+          </a:prstGeom>
+          <a:solidFill>
+            <a:srgbClr val="0B2A4A"/>
+          </a:solidFill>
+          <a:ln>
+            <a:noFill/>
+          </a:ln>
+          <a:effectLst/>
+        </p:spPr>
+        <p:style>
+          <a:lnRef idx="1">
+            <a:schemeClr val="accent1"/>
+          </a:lnRef>
+          <a:fillRef idx="3">
+            <a:schemeClr val="accent1"/>
+          </a:fillRef>
+          <a:effectRef idx="2">
+            <a:schemeClr val="accent1"/>
+          </a:effectRef>
+          <a:fontRef idx="minor">
+            <a:schemeClr val="lt1"/>
+          </a:fontRef>
+        </p:style>
+        <p:txBody>
+          <a:bodyPr rtlCol="0" anchor="ctr"/>
+          <a:lstStyle/>
+          <a:p>
+            <a:pPr algn="ctr"/>
+          </a:p>
+        </p:txBody>
+      </p:sp>
+      <p:sp>
+        <p:nvSpPr>
+          <p:cNvPr id="10" name="TextBox 9"/>
+          <p:cNvSpPr txBox="1"/>
+          <p:nvPr/>
+        </p:nvSpPr>
+        <p:spPr>
+          <a:xfrm>
+            <a:off x="4514088" y="4864608"/>
+            <a:ext cx="3224784" cy="1234440"/>
+          </a:xfrm>
+          <a:prstGeom prst="rect">
+            <a:avLst/>
+          </a:prstGeom>
+          <a:noFill/>
+        </p:spPr>
+        <p:txBody>
+          <a:bodyPr wrap="square" anchor="t" lIns="0" rIns="0" tIns="0" bIns="0">
+            <a:spAutoFit/>
+          </a:bodyPr>
+          <a:lstStyle/>
+          <a:p>
+            <a:pPr algn="l"/>
+            <a:r>
+              <a:rPr sz="1500" b="1">
+                <a:solidFill>
+                  <a:srgbClr val="0B2A4A"/>
                 </a:solidFill>
                 <a:latin typeface="Arial"/>
                 <a:ea typeface="微软雅黑"/>
               </a:rPr>
-              <a:t>▪  入队：交给对应 Scheduler 实例</a:t>
-            </a:r>
-          </a:p>
-        </p:txBody>
-      </p:sp>
-      <p:sp>
-        <p:nvSpPr>
-          <p:cNvPr id="8" name="TextBox 7"/>
+              <a:t>② 分区选择</a:t>
+            </a:r>
+          </a:p>
+          <a:p>
+            <a:pPr algn="l">
+              <a:lnSpc>
+                <a:spcPct val="118000"/>
+              </a:lnSpc>
+              <a:spcBef>
+                <a:spcPts val="400"/>
+              </a:spcBef>
+            </a:pPr>
+            <a:r>
+              <a:rPr sz="1250" b="0">
+                <a:solidFill>
+                  <a:srgbClr val="333333"/>
+                </a:solidFill>
+                <a:latin typeface="Arial"/>
+                <a:ea typeface="微软雅黑"/>
+              </a:rPr>
+              <a:t>依据节点分区表与实例负载，决定这个 Pod 交给哪个 Scheduler 实例处理</a:t>
+            </a:r>
+          </a:p>
+        </p:txBody>
+      </p:sp>
+      <p:sp>
+        <p:nvSpPr>
+          <p:cNvPr id="11" name="Rounded Rectangle 10"/>
+          <p:cNvSpPr/>
+          <p:nvPr/>
+        </p:nvSpPr>
+        <p:spPr>
+          <a:xfrm>
+            <a:off x="8095488" y="4754880"/>
+            <a:ext cx="3535680" cy="1417320"/>
+          </a:xfrm>
+          <a:prstGeom prst="roundRect">
+            <a:avLst/>
+          </a:prstGeom>
+          <a:solidFill>
+            <a:srgbClr val="FFFFFF"/>
+          </a:solidFill>
+          <a:ln w="9525">
+            <a:solidFill>
+              <a:srgbClr val="D8DFE8"/>
+            </a:solidFill>
+          </a:ln>
+          <a:effectLst/>
+        </p:spPr>
+        <p:style>
+          <a:lnRef idx="1">
+            <a:schemeClr val="accent1"/>
+          </a:lnRef>
+          <a:fillRef idx="3">
+            <a:schemeClr val="accent1"/>
+          </a:fillRef>
+          <a:effectRef idx="2">
+            <a:schemeClr val="accent1"/>
+          </a:effectRef>
+          <a:fontRef idx="minor">
+            <a:schemeClr val="lt1"/>
+          </a:fontRef>
+        </p:style>
+        <p:txBody>
+          <a:bodyPr rtlCol="0" anchor="ctr"/>
+          <a:lstStyle/>
+          <a:p>
+            <a:pPr algn="ctr"/>
+          </a:p>
+        </p:txBody>
+      </p:sp>
+      <p:sp>
+        <p:nvSpPr>
+          <p:cNvPr id="12" name="Rectangle 11"/>
+          <p:cNvSpPr/>
+          <p:nvPr/>
+        </p:nvSpPr>
+        <p:spPr>
+          <a:xfrm>
+            <a:off x="8095488" y="4754880"/>
+            <a:ext cx="50292" cy="1417320"/>
+          </a:xfrm>
+          <a:prstGeom prst="rect">
+            <a:avLst/>
+          </a:prstGeom>
+          <a:solidFill>
+            <a:srgbClr val="0B2A4A"/>
+          </a:solidFill>
+          <a:ln>
+            <a:noFill/>
+          </a:ln>
+          <a:effectLst/>
+        </p:spPr>
+        <p:style>
+          <a:lnRef idx="1">
+            <a:schemeClr val="accent1"/>
+          </a:lnRef>
+          <a:fillRef idx="3">
+            <a:schemeClr val="accent1"/>
+          </a:fillRef>
+          <a:effectRef idx="2">
+            <a:schemeClr val="accent1"/>
+          </a:effectRef>
+          <a:fontRef idx="minor">
+            <a:schemeClr val="lt1"/>
+          </a:fontRef>
+        </p:style>
+        <p:txBody>
+          <a:bodyPr rtlCol="0" anchor="ctr"/>
+          <a:lstStyle/>
+          <a:p>
+            <a:pPr algn="ctr"/>
+          </a:p>
+        </p:txBody>
+      </p:sp>
+      <p:sp>
+        <p:nvSpPr>
+          <p:cNvPr id="13" name="TextBox 12"/>
+          <p:cNvSpPr txBox="1"/>
+          <p:nvPr/>
+        </p:nvSpPr>
+        <p:spPr>
+          <a:xfrm>
+            <a:off x="8278367" y="4864608"/>
+            <a:ext cx="3224784" cy="1234440"/>
+          </a:xfrm>
+          <a:prstGeom prst="rect">
+            <a:avLst/>
+          </a:prstGeom>
+          <a:noFill/>
+        </p:spPr>
+        <p:txBody>
+          <a:bodyPr wrap="square" anchor="t" lIns="0" rIns="0" tIns="0" bIns="0">
+            <a:spAutoFit/>
+          </a:bodyPr>
+          <a:lstStyle/>
+          <a:p>
+            <a:pPr algn="l"/>
+            <a:r>
+              <a:rPr sz="1500" b="1">
+                <a:solidFill>
+                  <a:srgbClr val="0B2A4A"/>
+                </a:solidFill>
+                <a:latin typeface="Arial"/>
+                <a:ea typeface="微软雅黑"/>
+              </a:rPr>
+              <a:t>③ 入队</a:t>
+            </a:r>
+          </a:p>
+          <a:p>
+            <a:pPr algn="l">
+              <a:lnSpc>
+                <a:spcPct val="118000"/>
+              </a:lnSpc>
+              <a:spcBef>
+                <a:spcPts val="400"/>
+              </a:spcBef>
+            </a:pPr>
+            <a:r>
+              <a:rPr sz="1250" b="0">
+                <a:solidFill>
+                  <a:srgbClr val="333333"/>
+                </a:solidFill>
+                <a:latin typeface="Arial"/>
+                <a:ea typeface="微软雅黑"/>
+              </a:rPr>
+              <a:t>放入对应实例的调度队列；它不选节点，只决定 Pod 去哪，失败时触发回退</a:t>
+            </a:r>
+          </a:p>
+        </p:txBody>
+      </p:sp>
+      <p:sp>
+        <p:nvSpPr>
+          <p:cNvPr id="14" name="TextBox 13"/>
           <p:cNvSpPr txBox="1"/>
           <p:nvPr/>
         </p:nvSpPr>
@@ -24327,93 +24601,9 @@
           </a:p>
         </p:txBody>
       </p:sp>
-      <p:sp>
-        <p:nvSpPr>
-          <p:cNvPr id="4" name="Rectangle 3"/>
-          <p:cNvSpPr/>
-          <p:nvPr/>
-        </p:nvSpPr>
-        <p:spPr>
-          <a:xfrm>
-            <a:off x="566928" y="1298448"/>
-            <a:ext cx="32004" cy="365760"/>
-          </a:xfrm>
-          <a:prstGeom prst="rect">
-            <a:avLst/>
-          </a:prstGeom>
-          <a:solidFill>
-            <a:srgbClr val="1F5C99"/>
-          </a:solidFill>
-          <a:ln>
-            <a:noFill/>
-          </a:ln>
-          <a:effectLst/>
-        </p:spPr>
-        <p:style>
-          <a:lnRef idx="1">
-            <a:schemeClr val="accent1"/>
-          </a:lnRef>
-          <a:fillRef idx="3">
-            <a:schemeClr val="accent1"/>
-          </a:fillRef>
-          <a:effectRef idx="2">
-            <a:schemeClr val="accent1"/>
-          </a:effectRef>
-          <a:fontRef idx="minor">
-            <a:schemeClr val="lt1"/>
-          </a:fontRef>
-        </p:style>
-        <p:txBody>
-          <a:bodyPr rtlCol="0" anchor="ctr"/>
-          <a:lstStyle/>
-          <a:p>
-            <a:pPr algn="ctr"/>
-          </a:p>
-        </p:txBody>
-      </p:sp>
-      <p:sp>
-        <p:nvSpPr>
-          <p:cNvPr id="5" name="TextBox 4"/>
-          <p:cNvSpPr txBox="1"/>
-          <p:nvPr/>
-        </p:nvSpPr>
-        <p:spPr>
-          <a:xfrm>
-            <a:off x="713232" y="1261872"/>
-            <a:ext cx="10744200" cy="438912"/>
-          </a:xfrm>
-          <a:prstGeom prst="rect">
-            <a:avLst/>
-          </a:prstGeom>
-          <a:noFill/>
-        </p:spPr>
-        <p:txBody>
-          <a:bodyPr wrap="square" anchor="ctr" lIns="0" rIns="0" tIns="0" bIns="0">
-            <a:spAutoFit/>
-          </a:bodyPr>
-          <a:lstStyle/>
-          <a:p>
-            <a:pPr algn="l">
-              <a:lnSpc>
-                <a:spcPct val="110000"/>
-              </a:lnSpc>
-            </a:pPr>
-            <a:r>
-              <a:rPr sz="1800" b="1">
-                <a:solidFill>
-                  <a:srgbClr val="1F5C99"/>
-                </a:solidFill>
-                <a:latin typeface="Arial"/>
-                <a:ea typeface="微软雅黑"/>
-              </a:rPr>
-              <a:t>Filter → Score → Reserve → Permit，产出目标节点后交给 Binder 落盘</a:t>
-            </a:r>
-          </a:p>
-        </p:txBody>
-      </p:sp>
       <p:pic>
         <p:nvPicPr>
-          <p:cNvPr id="6" name="Picture 5" descr="fig3-4-scheduler-flow.png"/>
+          <p:cNvPr id="4" name="Picture 3" descr="fig3-4-scheduler-flow.png"/>
           <p:cNvPicPr>
             <a:picLocks noChangeAspect="1"/>
           </p:cNvPicPr>
@@ -24427,14 +24617,104 @@
         </p:blipFill>
         <p:spPr>
           <a:xfrm>
-            <a:off x="4999282" y="1664208"/>
-            <a:ext cx="6506354" cy="4251960"/>
+            <a:off x="3247347" y="868680"/>
+            <a:ext cx="5666825" cy="3703320"/>
           </a:xfrm>
           <a:prstGeom prst="rect">
             <a:avLst/>
           </a:prstGeom>
         </p:spPr>
       </p:pic>
+      <p:sp>
+        <p:nvSpPr>
+          <p:cNvPr id="5" name="Rounded Rectangle 4"/>
+          <p:cNvSpPr/>
+          <p:nvPr/>
+        </p:nvSpPr>
+        <p:spPr>
+          <a:xfrm>
+            <a:off x="566928" y="4754880"/>
+            <a:ext cx="3535680" cy="1417320"/>
+          </a:xfrm>
+          <a:prstGeom prst="roundRect">
+            <a:avLst/>
+          </a:prstGeom>
+          <a:solidFill>
+            <a:srgbClr val="FFFFFF"/>
+          </a:solidFill>
+          <a:ln w="9525">
+            <a:solidFill>
+              <a:srgbClr val="D8DFE8"/>
+            </a:solidFill>
+          </a:ln>
+          <a:effectLst/>
+        </p:spPr>
+        <p:style>
+          <a:lnRef idx="1">
+            <a:schemeClr val="accent1"/>
+          </a:lnRef>
+          <a:fillRef idx="3">
+            <a:schemeClr val="accent1"/>
+          </a:fillRef>
+          <a:effectRef idx="2">
+            <a:schemeClr val="accent1"/>
+          </a:effectRef>
+          <a:fontRef idx="minor">
+            <a:schemeClr val="lt1"/>
+          </a:fontRef>
+        </p:style>
+        <p:txBody>
+          <a:bodyPr rtlCol="0" anchor="ctr"/>
+          <a:lstStyle/>
+          <a:p>
+            <a:pPr algn="ctr"/>
+          </a:p>
+        </p:txBody>
+      </p:sp>
+      <p:sp>
+        <p:nvSpPr>
+          <p:cNvPr id="6" name="Rectangle 5"/>
+          <p:cNvSpPr/>
+          <p:nvPr/>
+        </p:nvSpPr>
+        <p:spPr>
+          <a:xfrm>
+            <a:off x="566928" y="4754880"/>
+            <a:ext cx="50292" cy="1417320"/>
+          </a:xfrm>
+          <a:prstGeom prst="rect">
+            <a:avLst/>
+          </a:prstGeom>
+          <a:solidFill>
+            <a:srgbClr val="0B2A4A"/>
+          </a:solidFill>
+          <a:ln>
+            <a:noFill/>
+          </a:ln>
+          <a:effectLst/>
+        </p:spPr>
+        <p:style>
+          <a:lnRef idx="1">
+            <a:schemeClr val="accent1"/>
+          </a:lnRef>
+          <a:fillRef idx="3">
+            <a:schemeClr val="accent1"/>
+          </a:fillRef>
+          <a:effectRef idx="2">
+            <a:schemeClr val="accent1"/>
+          </a:effectRef>
+          <a:fontRef idx="minor">
+            <a:schemeClr val="lt1"/>
+          </a:fontRef>
+        </p:style>
+        <p:txBody>
+          <a:bodyPr rtlCol="0" anchor="ctr"/>
+          <a:lstStyle/>
+          <a:p>
+            <a:pPr algn="ctr"/>
+          </a:p>
+        </p:txBody>
+      </p:sp>
       <p:sp>
         <p:nvSpPr>
           <p:cNvPr id="7" name="TextBox 6"/>
@@ -24443,8 +24723,8 @@
         </p:nvSpPr>
         <p:spPr>
           <a:xfrm>
-            <a:off x="566928" y="2011680"/>
-            <a:ext cx="4160520" cy="1417320"/>
+            <a:off x="749808" y="4864608"/>
+            <a:ext cx="3224784" cy="1234440"/>
           </a:xfrm>
           <a:prstGeom prst="rect">
             <a:avLst/>
@@ -24457,67 +24737,335 @@
           </a:bodyPr>
           <a:lstStyle/>
           <a:p>
-            <a:pPr algn="l">
-              <a:lnSpc>
-                <a:spcPct val="115000"/>
-              </a:lnSpc>
-            </a:pPr>
-            <a:r>
-              <a:rPr sz="1550" b="0">
-                <a:solidFill>
-                  <a:srgbClr val="333333"/>
+            <a:pPr algn="l"/>
+            <a:r>
+              <a:rPr sz="1500" b="1">
+                <a:solidFill>
+                  <a:srgbClr val="0B2A4A"/>
                 </a:solidFill>
                 <a:latin typeface="Arial"/>
                 <a:ea typeface="微软雅黑"/>
               </a:rPr>
-              <a:t>▪  Filter：在分区内过滤候选节点</a:t>
+              <a:t>① Filter</a:t>
             </a:r>
           </a:p>
           <a:p>
             <a:pPr algn="l">
               <a:lnSpc>
-                <a:spcPct val="115000"/>
+                <a:spcPct val="118000"/>
               </a:lnSpc>
               <a:spcBef>
-                <a:spcPts val="1400"/>
+                <a:spcPts val="400"/>
               </a:spcBef>
             </a:pPr>
             <a:r>
-              <a:rPr sz="1550" b="0">
+              <a:rPr sz="1250" b="0">
                 <a:solidFill>
                   <a:srgbClr val="333333"/>
                 </a:solidFill>
                 <a:latin typeface="Arial"/>
                 <a:ea typeface="微软雅黑"/>
               </a:rPr>
-              <a:t>▪  Score：打分选出最优节点</a:t>
-            </a:r>
-          </a:p>
-          <a:p>
-            <a:pPr algn="l">
-              <a:lnSpc>
-                <a:spcPct val="115000"/>
-              </a:lnSpc>
-              <a:spcBef>
-                <a:spcPts val="1400"/>
-              </a:spcBef>
-            </a:pPr>
-            <a:r>
-              <a:rPr sz="1550" b="0">
-                <a:solidFill>
-                  <a:srgbClr val="333333"/>
+              <a:t>只在本分区内的节点上过滤，排除资源不足、约束不满足的候选</a:t>
+            </a:r>
+          </a:p>
+        </p:txBody>
+      </p:sp>
+      <p:sp>
+        <p:nvSpPr>
+          <p:cNvPr id="8" name="Rounded Rectangle 7"/>
+          <p:cNvSpPr/>
+          <p:nvPr/>
+        </p:nvSpPr>
+        <p:spPr>
+          <a:xfrm>
+            <a:off x="4331208" y="4754880"/>
+            <a:ext cx="3535680" cy="1417320"/>
+          </a:xfrm>
+          <a:prstGeom prst="roundRect">
+            <a:avLst/>
+          </a:prstGeom>
+          <a:solidFill>
+            <a:srgbClr val="FFFFFF"/>
+          </a:solidFill>
+          <a:ln w="9525">
+            <a:solidFill>
+              <a:srgbClr val="D8DFE8"/>
+            </a:solidFill>
+          </a:ln>
+          <a:effectLst/>
+        </p:spPr>
+        <p:style>
+          <a:lnRef idx="1">
+            <a:schemeClr val="accent1"/>
+          </a:lnRef>
+          <a:fillRef idx="3">
+            <a:schemeClr val="accent1"/>
+          </a:fillRef>
+          <a:effectRef idx="2">
+            <a:schemeClr val="accent1"/>
+          </a:effectRef>
+          <a:fontRef idx="minor">
+            <a:schemeClr val="lt1"/>
+          </a:fontRef>
+        </p:style>
+        <p:txBody>
+          <a:bodyPr rtlCol="0" anchor="ctr"/>
+          <a:lstStyle/>
+          <a:p>
+            <a:pPr algn="ctr"/>
+          </a:p>
+        </p:txBody>
+      </p:sp>
+      <p:sp>
+        <p:nvSpPr>
+          <p:cNvPr id="9" name="Rectangle 8"/>
+          <p:cNvSpPr/>
+          <p:nvPr/>
+        </p:nvSpPr>
+        <p:spPr>
+          <a:xfrm>
+            <a:off x="4331208" y="4754880"/>
+            <a:ext cx="50292" cy="1417320"/>
+          </a:xfrm>
+          <a:prstGeom prst="rect">
+            <a:avLst/>
+          </a:prstGeom>
+          <a:solidFill>
+            <a:srgbClr val="0B2A4A"/>
+          </a:solidFill>
+          <a:ln>
+            <a:noFill/>
+          </a:ln>
+          <a:effectLst/>
+        </p:spPr>
+        <p:style>
+          <a:lnRef idx="1">
+            <a:schemeClr val="accent1"/>
+          </a:lnRef>
+          <a:fillRef idx="3">
+            <a:schemeClr val="accent1"/>
+          </a:fillRef>
+          <a:effectRef idx="2">
+            <a:schemeClr val="accent1"/>
+          </a:effectRef>
+          <a:fontRef idx="minor">
+            <a:schemeClr val="lt1"/>
+          </a:fontRef>
+        </p:style>
+        <p:txBody>
+          <a:bodyPr rtlCol="0" anchor="ctr"/>
+          <a:lstStyle/>
+          <a:p>
+            <a:pPr algn="ctr"/>
+          </a:p>
+        </p:txBody>
+      </p:sp>
+      <p:sp>
+        <p:nvSpPr>
+          <p:cNvPr id="10" name="TextBox 9"/>
+          <p:cNvSpPr txBox="1"/>
+          <p:nvPr/>
+        </p:nvSpPr>
+        <p:spPr>
+          <a:xfrm>
+            <a:off x="4514088" y="4864608"/>
+            <a:ext cx="3224784" cy="1234440"/>
+          </a:xfrm>
+          <a:prstGeom prst="rect">
+            <a:avLst/>
+          </a:prstGeom>
+          <a:noFill/>
+        </p:spPr>
+        <p:txBody>
+          <a:bodyPr wrap="square" anchor="t" lIns="0" rIns="0" tIns="0" bIns="0">
+            <a:spAutoFit/>
+          </a:bodyPr>
+          <a:lstStyle/>
+          <a:p>
+            <a:pPr algn="l"/>
+            <a:r>
+              <a:rPr sz="1500" b="1">
+                <a:solidFill>
+                  <a:srgbClr val="0B2A4A"/>
                 </a:solidFill>
                 <a:latin typeface="Arial"/>
                 <a:ea typeface="微软雅黑"/>
               </a:rPr>
-              <a:t>▪  Reserve/Permit 后交 Binder</a:t>
-            </a:r>
-          </a:p>
-        </p:txBody>
-      </p:sp>
-      <p:sp>
-        <p:nvSpPr>
-          <p:cNvPr id="8" name="TextBox 7"/>
+              <a:t>② Score</a:t>
+            </a:r>
+          </a:p>
+          <a:p>
+            <a:pPr algn="l">
+              <a:lnSpc>
+                <a:spcPct val="118000"/>
+              </a:lnSpc>
+              <a:spcBef>
+                <a:spcPts val="400"/>
+              </a:spcBef>
+            </a:pPr>
+            <a:r>
+              <a:rPr sz="1250" b="0">
+                <a:solidFill>
+                  <a:srgbClr val="333333"/>
+                </a:solidFill>
+                <a:latin typeface="Arial"/>
+                <a:ea typeface="微软雅黑"/>
+              </a:rPr>
+              <a:t>对候选节点打分排序，选出最优节点作为目标</a:t>
+            </a:r>
+          </a:p>
+        </p:txBody>
+      </p:sp>
+      <p:sp>
+        <p:nvSpPr>
+          <p:cNvPr id="11" name="Rounded Rectangle 10"/>
+          <p:cNvSpPr/>
+          <p:nvPr/>
+        </p:nvSpPr>
+        <p:spPr>
+          <a:xfrm>
+            <a:off x="8095488" y="4754880"/>
+            <a:ext cx="3535680" cy="1417320"/>
+          </a:xfrm>
+          <a:prstGeom prst="roundRect">
+            <a:avLst/>
+          </a:prstGeom>
+          <a:solidFill>
+            <a:srgbClr val="FFFFFF"/>
+          </a:solidFill>
+          <a:ln w="9525">
+            <a:solidFill>
+              <a:srgbClr val="D8DFE8"/>
+            </a:solidFill>
+          </a:ln>
+          <a:effectLst/>
+        </p:spPr>
+        <p:style>
+          <a:lnRef idx="1">
+            <a:schemeClr val="accent1"/>
+          </a:lnRef>
+          <a:fillRef idx="3">
+            <a:schemeClr val="accent1"/>
+          </a:fillRef>
+          <a:effectRef idx="2">
+            <a:schemeClr val="accent1"/>
+          </a:effectRef>
+          <a:fontRef idx="minor">
+            <a:schemeClr val="lt1"/>
+          </a:fontRef>
+        </p:style>
+        <p:txBody>
+          <a:bodyPr rtlCol="0" anchor="ctr"/>
+          <a:lstStyle/>
+          <a:p>
+            <a:pPr algn="ctr"/>
+          </a:p>
+        </p:txBody>
+      </p:sp>
+      <p:sp>
+        <p:nvSpPr>
+          <p:cNvPr id="12" name="Rectangle 11"/>
+          <p:cNvSpPr/>
+          <p:nvPr/>
+        </p:nvSpPr>
+        <p:spPr>
+          <a:xfrm>
+            <a:off x="8095488" y="4754880"/>
+            <a:ext cx="50292" cy="1417320"/>
+          </a:xfrm>
+          <a:prstGeom prst="rect">
+            <a:avLst/>
+          </a:prstGeom>
+          <a:solidFill>
+            <a:srgbClr val="0B2A4A"/>
+          </a:solidFill>
+          <a:ln>
+            <a:noFill/>
+          </a:ln>
+          <a:effectLst/>
+        </p:spPr>
+        <p:style>
+          <a:lnRef idx="1">
+            <a:schemeClr val="accent1"/>
+          </a:lnRef>
+          <a:fillRef idx="3">
+            <a:schemeClr val="accent1"/>
+          </a:fillRef>
+          <a:effectRef idx="2">
+            <a:schemeClr val="accent1"/>
+          </a:effectRef>
+          <a:fontRef idx="minor">
+            <a:schemeClr val="lt1"/>
+          </a:fontRef>
+        </p:style>
+        <p:txBody>
+          <a:bodyPr rtlCol="0" anchor="ctr"/>
+          <a:lstStyle/>
+          <a:p>
+            <a:pPr algn="ctr"/>
+          </a:p>
+        </p:txBody>
+      </p:sp>
+      <p:sp>
+        <p:nvSpPr>
+          <p:cNvPr id="13" name="TextBox 12"/>
+          <p:cNvSpPr txBox="1"/>
+          <p:nvPr/>
+        </p:nvSpPr>
+        <p:spPr>
+          <a:xfrm>
+            <a:off x="8278367" y="4864608"/>
+            <a:ext cx="3224784" cy="1234440"/>
+          </a:xfrm>
+          <a:prstGeom prst="rect">
+            <a:avLst/>
+          </a:prstGeom>
+          <a:noFill/>
+        </p:spPr>
+        <p:txBody>
+          <a:bodyPr wrap="square" anchor="t" lIns="0" rIns="0" tIns="0" bIns="0">
+            <a:spAutoFit/>
+          </a:bodyPr>
+          <a:lstStyle/>
+          <a:p>
+            <a:pPr algn="l"/>
+            <a:r>
+              <a:rPr sz="1500" b="1">
+                <a:solidFill>
+                  <a:srgbClr val="0B2A4A"/>
+                </a:solidFill>
+                <a:latin typeface="Arial"/>
+                <a:ea typeface="微软雅黑"/>
+              </a:rPr>
+              <a:t>③ Reserve / Permit</a:t>
+            </a:r>
+          </a:p>
+          <a:p>
+            <a:pPr algn="l">
+              <a:lnSpc>
+                <a:spcPct val="118000"/>
+              </a:lnSpc>
+              <a:spcBef>
+                <a:spcPts val="400"/>
+              </a:spcBef>
+            </a:pPr>
+            <a:r>
+              <a:rPr sz="1250" b="0">
+                <a:solidFill>
+                  <a:srgbClr val="333333"/>
+                </a:solidFill>
+                <a:latin typeface="Arial"/>
+                <a:ea typeface="微软雅黑"/>
+              </a:rPr>
+              <a:t>预留资源并放行，产出目标节点后交给 Binder 落盘</a:t>
+            </a:r>
+          </a:p>
+        </p:txBody>
+      </p:sp>
+      <p:sp>
+        <p:nvSpPr>
+          <p:cNvPr id="14" name="TextBox 13"/>
           <p:cNvSpPr txBox="1"/>
           <p:nvPr/>
         </p:nvSpPr>

--- a/docs/thesis/defense/答辩PPT-基于etcd的分布式Kubernetes调度器.pptx
+++ b/docs/thesis/defense/答辩PPT-基于etcd的分布式Kubernetes调度器.pptx
@@ -24138,7 +24138,7 @@
                 <a:latin typeface="Arial"/>
                 <a:ea typeface="微软雅黑"/>
               </a:rPr>
-              <a:t>① 归属校验</a:t>
+              <a:t>① 排序入队</a:t>
             </a:r>
           </a:p>
           <a:p>
@@ -24158,7 +24158,7 @@
                 <a:latin typeface="Arial"/>
                 <a:ea typeface="微软雅黑"/>
               </a:rPr>
-              <a:t>Bind 前校验目标节点的 eno.io/scheduler-name 注解，把分区归属漂移的 Pod 拦在门外</a:t>
+              <a:t>Informer 观察到 nodeName 为空、且无 scheduler-name 注解的新 Pod，按 FIFO 排序后进入有序队列</a:t>
             </a:r>
           </a:p>
         </p:txBody>
@@ -24284,7 +24284,7 @@
                 <a:latin typeface="Arial"/>
                 <a:ea typeface="微软雅黑"/>
               </a:rPr>
-              <a:t>② 分区选择</a:t>
+              <a:t>② 分发决策</a:t>
             </a:r>
           </a:p>
           <a:p>
@@ -24304,7 +24304,7 @@
                 <a:latin typeface="Arial"/>
                 <a:ea typeface="微软雅黑"/>
               </a:rPr>
-              <a:t>依据节点分区表与实例负载，决定这个 Pod 交给哪个 Scheduler 实例处理</a:t>
+              <a:t>PodGroup 成员复用该组已分配的实例；否则按负载均衡（MaxIdle 加权轮询）挑选最空闲的 Scheduler</a:t>
             </a:r>
           </a:p>
         </p:txBody>
@@ -24430,7 +24430,7 @@
                 <a:latin typeface="Arial"/>
                 <a:ea typeface="微软雅黑"/>
               </a:rPr>
-              <a:t>③ 入队</a:t>
+              <a:t>③ 写入并跟踪</a:t>
             </a:r>
           </a:p>
           <a:p>
@@ -24450,7 +24450,7 @@
                 <a:latin typeface="Arial"/>
                 <a:ea typeface="微软雅黑"/>
               </a:rPr>
-              <a:t>放入对应实例的调度队列；它不选节点，只决定 Pod 去哪，失败时触发回退</a:t>
+              <a:t>PatchPod 写入 scheduler-name 完成分发；持续观察绑定结果，失败进入不可调度队列等待重分</a:t>
             </a:r>
           </a:p>
         </p:txBody>
@@ -24746,7 +24746,7 @@
                 <a:latin typeface="Arial"/>
                 <a:ea typeface="微软雅黑"/>
               </a:rPr>
-              <a:t>① Filter</a:t>
+              <a:t>① 入队与预处理</a:t>
             </a:r>
           </a:p>
           <a:p>
@@ -24766,7 +24766,7 @@
                 <a:latin typeface="Arial"/>
                 <a:ea typeface="微软雅黑"/>
               </a:rPr>
-              <a:t>只在本分区内的节点上过滤，排除资源不足、约束不满足的候选</a:t>
+              <a:t>只接 scheduler-name 匹配自身的 Pod；pre-queue 插件校验 PodGroup 成员与亲和依赖，不通过则退回 Dispatcher</a:t>
             </a:r>
           </a:p>
         </p:txBody>
@@ -24892,7 +24892,7 @@
                 <a:latin typeface="Arial"/>
                 <a:ea typeface="微软雅黑"/>
               </a:rPr>
-              <a:t>② Score</a:t>
+              <a:t>② 调度循环</a:t>
             </a:r>
           </a:p>
           <a:p>
@@ -24912,7 +24912,7 @@
                 <a:latin typeface="Arial"/>
                 <a:ea typeface="微软雅黑"/>
               </a:rPr>
-              <a:t>对候选节点打分排序，选出最优节点作为目标</a:t>
+              <a:t>从 activeQ 弹出后依次 Filter（剔除硬约束不满足）、Score（打分）、Reserve（标记候选并写 Assumed 状态）</a:t>
             </a:r>
           </a:p>
         </p:txBody>
@@ -25038,7 +25038,7 @@
                 <a:latin typeface="Arial"/>
                 <a:ea typeface="微软雅黑"/>
               </a:rPr>
-              <a:t>③ Reserve / Permit</a:t>
+              <a:t>③ 绑定与回流</a:t>
             </a:r>
           </a:p>
           <a:p>
@@ -25058,7 +25058,7 @@
                 <a:latin typeface="Arial"/>
                 <a:ea typeface="微软雅黑"/>
               </a:rPr>
-              <a:t>预留资源并放行，产出目标节点后交给 Binder 落盘</a:t>
+              <a:t>Reserve 后调用 Binder 执行 Bind；失败进入 backoffQ 指数退避，多次失败则退回 Dispatcher 触发跨实例回退</a:t>
             </a:r>
           </a:p>
         </p:txBody>

--- a/docs/thesis/defense/答辩PPT-基于etcd的分布式Kubernetes调度器.pptx
+++ b/docs/thesis/defense/答辩PPT-基于etcd的分布式Kubernetes调度器.pptx
@@ -6091,7 +6091,7 @@
                 <a:latin typeface="Arial"/>
                 <a:ea typeface="微软雅黑"/>
               </a:rPr>
-              <a:t>创新点 2</a:t>
+              <a:t>四层绑定容错</a:t>
             </a:r>
           </a:p>
         </p:txBody>
@@ -25204,7 +25204,7 @@
                 <a:latin typeface="Arial"/>
                 <a:ea typeface="微软雅黑"/>
               </a:rPr>
-              <a:t>创新点 1</a:t>
+              <a:t>进程内 Binder 架构</a:t>
             </a:r>
           </a:p>
         </p:txBody>

--- a/docs/thesis/defense/答辩PPT-基于etcd的分布式Kubernetes调度器.pptx
+++ b/docs/thesis/defense/答辩PPT-基于etcd的分布式Kubernetes调度器.pptx
@@ -533,7 +533,7 @@
           <a:lstStyle/>
           <a:p>
             <a:r>
-              <a:t>各位老师上午好。我汇报的题目是《基于 etcd 的分布式 Kubernetes 调度器研究与实现》。这项工作针对分布式调度器把绑定拆出去之后吞吐上不去、一致性也守不住的问题。一句话概括：把 Binder 合并回 Scheduler，用四层机制守住“至多绑定一次”。</a:t>
+              <a:t>各位老师上午好。我的论文题目是《基于 etcd 的分布式 Kubernetes 调度器研究与实现》。这项工作针对分布式调度器把绑定拆出去之后吞吐上不去、一致性也守不住的问题。一句话概括：把 Binder 合并回 Scheduler，用四层机制守住“至多绑定一次”。十八分钟，只讲问题、方法、证据。</a:t>
             </a:r>
           </a:p>
         </p:txBody>
@@ -603,7 +603,7 @@
           <a:lstStyle/>
           <a:p>
             <a:r>
-              <a:t>所有机制最后都回到不变量 I：任一 Pod 至多绑定到一个节点。证明拆四点：P1 来自 Bind 子资源原子写；P2 是 Assumed 状态清理；P3 是注解清理与重分发的时序；P4 是 Layer 0 前置拦截。四层都不破坏 I，且可在 apiserver 侧复核。这也是后面所有实验断言的设计依据。</a:t>
+              <a:t>四层是一条时间轴。Bind 前 Layer 0 校验归属注解，把漂移拦在门外；Bind 中 Layer 1 用同步退避处理暂态错误；失败后 Layer 2 异步回收孤儿状态；重试耗尽 Layer 3 由 Dispatcher 清注解、触发全局重分发。每层依赖一种 etcd 语义。四层之间是衔接关系，不是四个独立补丁。</a:t>
             </a:r>
           </a:p>
         </p:txBody>
@@ -673,7 +673,7 @@
           <a:lstStyle/>
           <a:p>
             <a:r>
-              <a:t>先讲编码：s 是规模档位，w 是负载强度，inst 是实例数，后面场景名都由这三段拼成。实验设计说明三点公平性。第一，KWOK 仿真，kind 集群内运行，Kubernetes 版本与对照组一致。第二，五个调度器 Pod 规格相同，客户端 QPS 与 Burst 都是 10000，避免把限流误读成能力差异。第三，每场景三次取中位数，共 144 次 run。所以主评估用 s2/w2、s2/w3、s3/w2、s3/w3 四个场景，扩展场景另算。</a:t>
+              <a:t>所有机制最后都回到不变量 I：任一 Pod 至多绑定到一个节点。证明拆四点：P1 来自 Bind 子资源原子写；P2 是 Assumed 状态清理；P3 是注解清理与重分发的时序；P4 是 Layer 0 前置拦截。四层都不破坏 I，且可在 apiserver 侧复核。这也是后面所有实验断言的设计依据。</a:t>
             </a:r>
           </a:p>
         </p:txBody>
@@ -743,7 +743,7 @@
           <a:lstStyle/>
           <a:p>
             <a:r>
-              <a:t>所有机制最后都要回到不变量 I：任一 Pod 至多绑定到一个节点。证明拆四点：P1 来自 Bind 子资源原子写；P2 是 Assumed 状态清理；P3 是注解清理与重分发的时序；P4 是 Layer 0 前置拦截。四层都不破坏 I，而且可以在 apiserver 侧用断言复核，不是自说自话。</a:t>
+              <a:t>先讲编码：s 是规模档位，w 是负载强度，inst 是实例数，后面场景名都由这三段拼成。再说公平性：KWOK 仿真、kind 集群内运行；五个调度器 Pod 规格相同，客户端 QPS 与 Burst 都是 10000；每场景三次取中位数，共 144 次 run。主评估取 s2/w2、s2/w3、s3/w2、s3/w3 四个场景，其余作为扩展与复杂负载场景。观测栈是 Prometheus 每 15 秒抓取，recording rules 统一各组指标名。</a:t>
             </a:r>
           </a:p>
         </p:txBody>
@@ -813,7 +813,7 @@
           <a:lstStyle/>
           <a:p>
             <a:r>
-              <a:t>在给性能数字之前，先说正确性。144 次 run，每次跑完都在 apiserver 侧断言：未绑定为零、重复绑定为零，全部通过；ENO 那 48 次 run 成功率都是 100%。两场故障注入各 6 项判据全过。所谓正确，不是日志没报错，而是外部事实对得上。两场注入分别是分区漂移与实例失活，正好覆盖两类威胁。判据包括成功率、断言、拦截数、回退数、耗时与队列行为，六项都要成立。</a:t>
+              <a:t>这一页是方法学核心。吞吐时序是爬升、平台、归零三段，直接取平均会被尾段零值稀释，稀释程度还取决于跑多久，跨调度器就不可比，所以主口径是总工作量除以总完成时间。时序类先对三条 run 逐点取中位数，再剔首尾各两点。c、d、e 是单实例，过载时 Pod 没进直方图，存在幸存者偏差，只做定性说明。所以跨调度器我只用吞吐、队列堆积与绑定成功率做整体比较，延迟只在 ENO 与 Gödel 之间比。这三条口径是后面所有数字可比的前提；口径不同，数字就不能直接并列。</a:t>
             </a:r>
           </a:p>
         </p:txBody>
@@ -883,7 +883,7 @@
           <a:lstStyle/>
           <a:p>
             <a:r>
-              <a:t>第一场注入：s2/w2、三实例，第 30 秒把 10% 的节点、约 100 个，归属注解从 scheduler-0 改为 scheduler-1。NodeValidator 拦截 300 次，Dispatcher 回退 300 次，两条曲线重叠。关键是拦截不等于丢弃：Pod 进回退队列被重分发，所以成功率仍是 1.00，断言 50000 全过，总耗时 683 秒，只比基线多 3 秒。这组数字说明 Layer 0 只是把错误前置，不是把工作丢掉，代价几乎为零。</a:t>
+              <a:t>在给性能数字之前，先说正确性。144 次 run，每次跑完都在 apiserver 侧断言：未绑定为零、重复绑定为零，全部通过；ENO 那 48 次 run 成功率都是 100%。两场故障注入各 6 项判据全过。所谓正确，不是日志里没报错，而是外部可观测的事实对得上。断言是在 apiserver 侧做的，不是调度器自报。</a:t>
             </a:r>
           </a:p>
         </p:txBody>
@@ -953,7 +953,7 @@
           <a:lstStyle/>
           <a:p>
             <a:r>
-              <a:t>第二场注入：第 10 秒杀掉 scheduler-0，停机 180 秒，实测中断 189 秒。被杀实例未完成的绑定只占 68/8407，即 0.81%；两个存活实例接管 8407 个 Pod，孤儿回收 77.15 每秒，队列峰值 353 后回落到 2。累计绑定 49607/50000，断言仍全过。代价是 784 秒、多 104 秒，这是工作量重排，不是数据损坏。对比基线是同一场景下的无故障运行，680 秒；这也说明接管是可控的，代价有界。</a:t>
+              <a:t>第一场注入：s2/w2、三实例，第 30 秒把 10% 的节点、约 100 个，归属注解从 scheduler-0 改为 scheduler-1。NodeValidator 拦截 300 次，Dispatcher 回退 300 次，两条曲线重叠。拦截不等于丢弃：Pod 进回退队列被重分发，成功率仍是 1.00，总耗时 683 秒、只比基线多 3 秒。这组数字说明 Layer 0 只是把错误前置，不是把工作丢掉，代价几乎为零。拦截 300 次、回退 300 次，两边对得上，说明没有 Pod 被丢掉。</a:t>
             </a:r>
           </a:p>
         </p:txBody>
@@ -1023,7 +1023,7 @@
           <a:lstStyle/>
           <a:p>
             <a:r>
-              <a:t>五组对比，结论是三档。第一档 ENO 与 Gödel，都是几百 pods/s；第二档 kube-scheduler；第三档 Volcano 与 Koordinator，只有约 48 和约 24 pods/s，几乎不随规模变化。主评估四场景里，ENO 比 kube-scheduler 高 1.8% 到 22.5%，比 Volcano 约 6 倍、比 Koordinator 12 倍以上。唯一例外是 s1/w1 低负载低 7.2%，那是没饱和。柱状图按场景排序，第三档几乎是一条水平线。</a:t>
+              <a:t>第二场注入：第 10 秒杀掉 scheduler-0，停机 180 秒，实测中断 189 秒。被杀实例未完成的绑定只占 68/8407，即 0.81%；两个存活实例接管 8407 个 Pod，队列峰值 353 后回落到 2。累计绑定 49607/50000，断言仍全过。代价是 784 秒、比基线多 104 秒，是工作量重排的代价，不是数据损坏。对比基线是同一场景下的无故障运行，680 秒。队列在 353 之后回落到 2，说明积压是瞬时的。</a:t>
             </a:r>
           </a:p>
         </p:txBody>
@@ -1093,7 +1093,7 @@
           <a:lstStyle/>
           <a:p>
             <a:r>
-              <a:t>和 Gödel 逐场景对比：16 个场景 14 个领先、2 个持平，没有落后的，提升 2.0% 到 22.9%，平均 11.9%。优势最大的是高负载与多实例：s2/w3 高 22.9%，s3/w3 三实例高 21.7%，s3/w5 与 s3/w7 三实例也都超过 21%。持平场景是没饱和，完成时间由注入速率决定。四个亮点场景分别是高负载、突发、异构与多实例。平均 11.9% 这个数，是把 14 个领先场景的幅度取均值得到的。</a:t>
+              <a:t>五组横向对比，结论是三档。第一档 ENO 与 Gödel，都是几百 pods/s；第二档 kube-scheduler；第三档 Volcano 与 Koordinator，只有约 48 和约 24 pods/s，几乎不随规模变化。主评估四场景里，ENO 比 kube-scheduler 高 1.8% 到 22.5%。唯一例外是 s1/w1 低负载低 7.2%，那个场景没饱和。柱状图按场景排序，第三档几乎是一条水平线，说明它们的瓶颈不在调度吞吐这一维。从 s1 到 s3，第一档的曲线始终压在最上面，第三档几乎不随规模变化。</a:t>
             </a:r>
           </a:p>
         </p:txBody>
@@ -1163,7 +1163,7 @@
           <a:lstStyle/>
           <a:p>
             <a:r>
-              <a:t>延迟这页。除 s2/w2 外，11 个非 Gang 场景 P99 都低于 Gödel，改善 0.3% 到 82.9%。最典型是 s2/w3，23.48 秒降到 4.00 秒；单实例 s3/w3 从 32.57 秒到 16.22 秒。Pod 端到端 P99 在 12 个非 Gang 场景也都不高于 Gödel，改善 0.6% 到 75.3%。Gang 是反的，放到局限里展开。延迟的单位都是秒，纵轴用对数，便于跨量级比较；改善的下界 0.3% 出现在接近饱和的场景。</a:t>
+              <a:t>和 Gödel 逐场景对比：16 个场景里 14 个领先，2 个持平，没有落后的，提升 2.0% 到 22.9%，平均 11.9%。优势最大的是高负载与多实例：s2/w3 高 22.9%，s3/w3 三实例高 21.7%。两个持平场景都没饱和，完成时间由注入速率决定。两个持平场景说明，未饱和时调度器再快也压不出更多吞吐。平均 11.9% 是 14 个领先场景提升幅度的均值。</a:t>
             </a:r>
           </a:p>
         </p:txBody>
@@ -1233,7 +1233,7 @@
           <a:lstStyle/>
           <a:p>
             <a:r>
-              <a:t>这是全文最强的归因证据。同样把实例从 1 加到 3，两边延迟都降约 99%，这部分一样。差别在吞吐：ENO 从 297.6 到 349.7，提升 17.5%；Gödel 从 283.3 到 287.4，只提升 1.4%。同样多的并发能力，Gödel 的增量被独立 Binder 的串行绑定吸收掉了。扩展性实验固定负载为 s3/w3，w3 即 1000 pods per second，两组都跑三次取中位数。延迟数量级下降，说明瓶颈不在决策侧。</a:t>
+              <a:t>延迟这页。除 s2/w2 外，11 个非 Gang 场景 P99 都低于 Gödel，改善 0.3% 到 82.9%。最典型是 s2/w3，23.48 秒降到 4.00 秒；单实例 s3/w3 从 32.57 秒到 16.22 秒。Pod 端到端 P99 在 12 个非 Gang 场景也都不高于 Gödel。Gang 是反的，放到局限里展开。延迟单位是秒，纵轴用对数，便于跨量级比较。改善的下界 0.3% 出现在已经接近饱和的场景。</a:t>
             </a:r>
           </a:p>
         </p:txBody>
@@ -1303,7 +1303,7 @@
           <a:lstStyle/>
           <a:p>
             <a:r>
-              <a:t>先说背景。云原生负载规模持续增长，生产集群已经进入万节点量级；业务对调度器提出双重要求，既要秒级承接海量 Pod，又要长期运行不因单点失效中断服务。原生 kube-scheduler 是单实例架构，这两条同时满足很吃力——这正是工业界做分布式改造的起点，也是本文要处理的问题。</a:t>
+              <a:t>先说背景。Kubernetes 已成为云原生的事实标准，调度器在 Pod 生命周期的关键路径上，吞吐和延迟直接决定资源利用率与业务响应速度。千节点规模单实例还能撑住，到万节点量级就暴露三个瓶颈：activeQ 串行、Filter/Score 随规模线性、Leader 单点。这三条叠在一起，单实例架构就很难再往上走。</a:t>
             </a:r>
           </a:p>
         </p:txBody>
@@ -1373,7 +1373,7 @@
           <a:lstStyle/>
           <a:p>
             <a:r>
-              <a:t>两件事。第一，规模从 5000 到 10000、实例数不变，两边都退化：ENO -15.2%，Gödel -2.3%；但 ENO 仍领先——吞吐 296.7 对 280.9 高 5.6%，P99 0.19 对 0.28 秒低 33.4%，队列峰值 9 对 61。第二，复杂负载：极限 +9.3% 与 +16.0%，突发 +21.3% 与 +2.8%，异构 s3 高 21.2%、s4 持平。注意固定三实例，回落不等于扩展上限。s4 的退化与固定三实例有关，这写在局限里。</a:t>
+              <a:t>这是全文最强的归因证据。同样把实例从 1 加到 3，两边延迟都降约 99%，这部分一样。差别在吞吐：ENO 从 297.6 到 349.7，提升 17.5%；Gödel 从 283.3 到 287.4，只提升 1.4%。同样多的并发能力，Gödel 的增量被独立 Binder 的串行绑定吸收掉了。延迟数量级下降说明瓶颈不在决策侧，而在绑定这一环的串行化。峰值吞吐两家都涨，但只有 ENO 把增量转化成了有效吞吐。</a:t>
             </a:r>
           </a:p>
         </p:txBody>
@@ -1443,7 +1443,7 @@
           <a:lstStyle/>
           <a:p>
             <a:r>
-              <a:t>把机制和指标对齐。进程内绑定去掉事件传递，对应 E2E 降低，三实例 0.45 对 0.93 秒；零拷贝让状态复用无同步延迟；关键是第三行，没有独立 Binder 的串行段，吞吐才能随实例扩展，+17.5% 对 +1.4%；第四行四层容错守住不变量。也要说明相关与归因的区别：峰值吞吐不是每个场景都领先，s3/w5 与 s4/w3 低于 Gödel。四行对应四个机制，每一项都有可复核的字段；如果评委追问某个数字，备用页里有完整口径以及原始目录。</a:t>
+              <a:t>两件事。第一，规模从 5000 到 10000、实例数不变，两边都退化：ENO -15.2%，Gödel -2.3%；但 ENO 仍领先，吞吐 296.7 对 280.9 高 5.6%，P99 0.19 对 0.28 秒低 33.4%，队列峰值 9 对 61。第二，复杂负载：极限 +9.3% 与 +16.0%，突发 +21.3% 与 +2.8%，异构 s3 高 21.2%、s4 持平。s4 的退化与固定三实例有关，这写在局限里。规模翻倍而实例不扩，本身就是一个更苛刻的设定，不能当作扩展上限。</a:t>
             </a:r>
           </a:p>
         </p:txBody>
@@ -1513,7 +1513,7 @@
           <a:lstStyle/>
           <a:p>
             <a:r>
-              <a:t>局限六条，只讲关键。KWOK 是仿真，绝对数值不外推，但跨调度器相对比较成立。Gang 即 w6，ENO 尾延迟确实更高：吞吐高 4.3% 到 19.1%，单 Pod P99 高 1.6 到 4.1 倍，原因是同组预留等待与决策共用进程和队列，我们没用独立计时实验把两段分离。其余是固定实例数、资源公平、Volcano 口径、幸存者偏差。这六条不是免责声明，而是给结论划边界；在这个边界内，跨调度器的相对结论是稳的。</a:t>
+              <a:t>把机制和指标对齐。进程内绑定去掉事件传递，对应 E2E 降低，三实例 0.45 对 0.93 秒；零拷贝让状态复用无同步延迟；关键是第三行，没有独立 Binder 的串行段，吞吐才能随实例扩展，+17.5% 对 +1.4%；第四行四层容错守住不变量。也要说明相关与归因的区别：峰值吞吐不是每个场景都领先。如果评委追问某个数字，备用页里有完整口径与原始目录。四行对应四个机制，每一项都有可复核的字段。</a:t>
             </a:r>
           </a:p>
         </p:txBody>
@@ -1583,7 +1583,7 @@
           <a:lstStyle/>
           <a:p>
             <a:r>
-              <a:t>最后收束。两个创新：ENO 把 Binder 放进进程内并用 CacheAdapter 共享缓存；四层容错给出不变量 I 的证明要点。三组证据：16 场景 144 次 run 全成功、平均 +11.9%、P99 最高 -82.9%、实例扩展 +17.5% 对 +1.4%。价值：不改 API、保留开关、基准开源。三组证据合起来，正好对应问题、方法与效果。</a:t>
+              <a:t>局限六条，只讲关键。KWOK 是仿真，绝对数值不外推，但跨调度器相对比较成立。Gang 即 w6，ENO 尾延迟确实更高：吞吐高 4.3% 到 19.1%，单 Pod P99 高 1.6 到 4.1 倍，原因是同组预留等待与决策共用进程和队列。s3 到 s4 固定三实例，退化幅度不能读成上限。其余是资源公平、Volcano 口径、幸存者偏差。这六条不是免责声明，而是给结论划边界。在这个边界内，跨调度器的相对结论是稳的。</a:t>
             </a:r>
           </a:p>
         </p:txBody>
@@ -1653,7 +1653,7 @@
           <a:lstStyle/>
           <a:p>
             <a:r>
-              <a:t>汇报到这里。一句话总结：把 Binder 合并进 Scheduler 进程，用 etcd 原子语义上的四层容错守住“至多绑定一次”，在 16 个场景、144 次 run 上做到更高吞吐、更低尾延迟、100% 成功率。请各位老师批评指正。如果只问一个问题，我的回答就是刚才那一句。</a:t>
+              <a:t>最后收束。两个创新：ENO 把 Binder 放进进程内并用 CacheAdapter 共享缓存；四层容错给出不变量 I 的证明要点。三组证据：16 场景 144 次 run 全成功、平均 +11.9%、P99 最高 -82.9%、实例扩展 +17.5% 对 +1.4%。价值：不改 API、保留开关、基准开源。三组证据合起来，正好对应问题、方法与效果。</a:t>
             </a:r>
           </a:p>
         </p:txBody>
@@ -1723,7 +1723,7 @@
           <a:lstStyle/>
           <a:p>
             <a:r>
-              <a:t>我的汇报到这里。如果只允许一句话总结：本文把 Binder 从独立进程合并进 Scheduler，用基于 etcd 原子语义的四层容错守住“至多绑定一次”，在 16 个场景、144 次 run 上做到更高吞吐、更低尾延迟和 100% 绑定成功率。请各位老师批评指正，谢谢。</a:t>
+              <a:t>汇报到这里。一句话总结：把 Binder 合并进 Scheduler 进程，用 etcd 原子语义上的四层容错守住“至多绑定一次”，在 16 个场景、144 次 run 上做到更高吞吐、更低尾延迟与 100% 绑定成功率。请各位老师批评指正。如果只问一个问题，我的回答就是刚才那一句。</a:t>
             </a:r>
           </a:p>
         </p:txBody>
@@ -2073,7 +2073,7 @@
           <a:lstStyle/>
           <a:p>
             <a:r>
-              <a:t>现状分国外与国内两条线。国外从集中式走到共享状态：Borg、Omega、Mesos，再到 kube-scheduler 的插件框架。国内代表是 Gödel，字节跳动开源，用节点分区做分片式多实例；Volcano 与 Koordinator 走插件增强。共同缺口在落盘侧，本文正落在这个缺口上。</a:t>
+              <a:t>第二章分国外与国内两条线。国外从集中式走到共享状态：Borg、Omega、Mesos，再到 kube-scheduler 的插件框架。国内代表是 Gödel，字节跳动开源，用节点分区做分片式多实例；Volcano 与 Koordinator 走插件增强。共同缺口在落盘侧。决策侧已相对充分，落盘侧的工程问题还没被系统回答。</a:t>
             </a:r>
           </a:p>
         </p:txBody>
@@ -2283,7 +2283,7 @@
           <a:lstStyle/>
           <a:p>
             <a:r>
-              <a:t>备用页：这一页给评委看形态。左边吞吐，右边 P99，共享时间轴。ENO 的平台更高、更早稳定；P99 峰值更低、回落更快。两张图放一起的意义是：我们的优势不是某个瞬时点，而是整段完成时间更短。这正好解释为什么有效吞吐对我们有利——它衡量的就是固定工作量多久做完，而不是某一秒的瞬时速率。</a:t>
+              <a:t>备用页：这一页是给评委看“形态”的。左边吞吐，右边 P99，共享同一条时间轴。ENO 的平台更高、更早稳定；右边的 P99 峰值更低、回落更快。这两张图放在一起的意义是：我们的优势不是某个瞬时点上的抖动，而是整段完成时间都更短——这也正好解释了为什么有效吞吐这个口径对我们有利，因为它衡量的是固定工作量做多久做完。</a:t>
             </a:r>
           </a:p>
         </p:txBody>
@@ -2353,7 +2353,7 @@
           <a:lstStyle/>
           <a:p>
             <a:r>
-              <a:t>这一页把全文压成两句。架构上，单 Dispatcher、多独立 Scheduler，Binder 合并进 Scheduler 进程，CacheAdapter 零拷贝共享缓存，去掉跨进程的事件传递与序列化。一致性上，四层容错，L0 到 L3 覆盖 Bind 前中后，每层对应一类 etcd 原子语义。两条创新指向同一个目标：不改 API，跑得快且绑得对。</a:t>
+              <a:t>这一页压成两句。架构上，单 Dispatcher、多独立 Scheduler，Binder 合并进 Scheduler 进程，CacheAdapter 零拷贝共享缓存。一致性上，四层容错覆盖 Bind 前中后，都建立在 etcd 原子语义上。两条创新指向同一个目标。不改 API 的前提下，让分布式调度既跑得快、稳定性更高。</a:t>
             </a:r>
           </a:p>
         </p:txBody>
@@ -2423,7 +2423,7 @@
           <a:lstStyle/>
           <a:p>
             <a:r>
-              <a:t>Gödel 是最有代表性的开源实现：Dispatcher 分发、Scheduler 决策、Binder 落盘，加节点分区。但它留了两个缺口：Binder 独立部署，绑定又变成跨进程串行环节；分区归属会漂移，严格一致性缺少完整论证。本文的两个问题就对着这两个缺口。</a:t>
+              <a:t>这张图是总体架构。上层 Dispatcher 单实例，维护节点分区表，把 Pod 按分区分发给对应 Scheduler，绑定出问题时清理注解、触发重分发。中间多个 Scheduler 只调度本分区节点。下层 Binder 与 Scheduler 同进程，负责真正写进 apiserver。三层职责清晰，故障面也就容易划清，后面的四层容错正是按这三层分工展开的。</a:t>
             </a:r>
           </a:p>
         </p:txBody>
@@ -2493,7 +2493,7 @@
           <a:lstStyle/>
           <a:p>
             <a:r>
-              <a:t>技术路线：并发做在分区上，一致性做在 etcd 上。Dispatcher 统一分发，Scheduler 在分区内并行决策，落盘走 dispatching、assuming、binding 三步事务。一致性不靠加锁，靠 etcd 三种原子语义：resourceVersion 乐观并发、Watch 一致性视图、Bind 子资源原子写。这三步事务，就是后面四层容错的落点。</a:t>
+              <a:t>Dispatcher 内部三步。第一步排序入队：nodeName 为空、还没有 scheduler-name 注解的新 Pod，按 FIFO 进有序队列。第二步分发决策：PodGroup 成员复用已分配实例，否则按负载均衡挑最空闲的。第三步写入并跟踪：PatchPod 写 scheduler-name，失败进不可调度队列。注意它不选节点，只决定 Pod 去哪。</a:t>
             </a:r>
           </a:p>
         </p:txBody>
@@ -2563,7 +2563,7 @@
           <a:lstStyle/>
           <a:p>
             <a:r>
-              <a:t>先看 Dispatcher 的内部流程。它进来先做归属校验，把分区漂移的 Pod 拦住；再按实例负载做分区选择，决定交给哪个 Scheduler；然后入队。注意它不选节点，只决定 Pod 去哪，选节点是下一环的事，这也是它能并行分发的原因。</a:t>
+              <a:t>Scheduler 内部也是三步。入队前 pre-queue 先校验 PodGroup 成员与亲和依赖，不通过退回 Dispatcher。进 activeQ 后跑 Filter、Score、Reserve，Reserve 阶段写 Assumed 状态。最后调 Binder 执行 Bind；失败进 backoffQ 退避，多次失败退回 Dispatcher。Scheduler 决定何时放弃本地重试，Dispatcher 决定何时重新分发，这是双向协作。</a:t>
             </a:r>
           </a:p>
         </p:txBody>
@@ -2633,7 +2633,7 @@
           <a:lstStyle/>
           <a:p>
             <a:r>
-              <a:t>难点在缓存。以前 Binder 在另一个进程，缓存要么复制要么重建。CacheAdapter 让进程内 Binder 直接拿到同一份 SchedulerCache 的对象引用，所以叫零拷贝。两边看到同一份状态，Layer 0 的校验才有同一个真相可依。零拷贝的收益，会在扩展性实验里直接体现。</a:t>
+              <a:t>左边是原形态，Binder 独立部署，决策完要把任务发过去；右边是本文形态，Binder 就在 Scheduler 进程里。这一刀去掉三段开销：事件传递、跨进程调用、序列化。我把它称为第一性来源。Binder 进进程之后，绑定与决策共享同一份缓存、同一个调度循环。</a:t>
             </a:r>
           </a:p>
         </p:txBody>
@@ -2703,7 +2703,7 @@
           <a:lstStyle/>
           <a:p>
             <a:r>
-              <a:t>四层是一条时间轴。Bind 前，Layer 0 校验归属注解，把漂移拦在门外；Bind 中，Layer 1 用同步退避处理暂态错误；失败后，Layer 2 用异步 Reconciler 回收孤儿状态；重试耗尽，Layer 3 由 Dispatcher 清注解、触发全局重分发。四层之间是衔接关系，不是四个独立补丁。</a:t>
+              <a:t>难点在缓存。以前 Binder 在另一个进程，缓存要么复制要么重建。CacheAdapter 让进程内 Binder 直接拿到同一份 SchedulerCache 的对象引用，所以叫零拷贝。两边看到同一份状态，Layer 0 的校验才有同一个真相可依。零拷贝的收益，会在后面的扩展性实验里直接看到。</a:t>
             </a:r>
           </a:p>
         </p:txBody>
@@ -25392,23 +25392,6 @@
               <a:t>▪  序列化与网络往返被消除</a:t>
             </a:r>
           </a:p>
-          <a:p>
-            <a:pPr algn="l">
-              <a:spcBef>
-                <a:spcPts val="600"/>
-              </a:spcBef>
-            </a:pPr>
-            <a:r>
-              <a:rPr sz="1400" b="0">
-                <a:solidFill>
-                  <a:srgbClr val="333333"/>
-                </a:solidFill>
-                <a:latin typeface="Arial"/>
-                <a:ea typeface="微软雅黑"/>
-              </a:rPr>
-              <a:t>▪  保留 CLI 开关，可回退</a:t>
-            </a:r>
-          </a:p>
         </p:txBody>
       </p:sp>
       <p:sp>

--- a/docs/thesis/defense/答辩PPT-基于etcd的分布式Kubernetes调度器.pptx
+++ b/docs/thesis/defense/答辩PPT-基于etcd的分布式Kubernetes调度器.pptx
@@ -25540,93 +25540,9 @@
           </a:p>
         </p:txBody>
       </p:sp>
-      <p:sp>
-        <p:nvSpPr>
-          <p:cNvPr id="4" name="Rectangle 3"/>
-          <p:cNvSpPr/>
-          <p:nvPr/>
-        </p:nvSpPr>
-        <p:spPr>
-          <a:xfrm>
-            <a:off x="566928" y="1298448"/>
-            <a:ext cx="32004" cy="365760"/>
-          </a:xfrm>
-          <a:prstGeom prst="rect">
-            <a:avLst/>
-          </a:prstGeom>
-          <a:solidFill>
-            <a:srgbClr val="1F5C99"/>
-          </a:solidFill>
-          <a:ln>
-            <a:noFill/>
-          </a:ln>
-          <a:effectLst/>
-        </p:spPr>
-        <p:style>
-          <a:lnRef idx="1">
-            <a:schemeClr val="accent1"/>
-          </a:lnRef>
-          <a:fillRef idx="3">
-            <a:schemeClr val="accent1"/>
-          </a:fillRef>
-          <a:effectRef idx="2">
-            <a:schemeClr val="accent1"/>
-          </a:effectRef>
-          <a:fontRef idx="minor">
-            <a:schemeClr val="lt1"/>
-          </a:fontRef>
-        </p:style>
-        <p:txBody>
-          <a:bodyPr rtlCol="0" anchor="ctr"/>
-          <a:lstStyle/>
-          <a:p>
-            <a:pPr algn="ctr"/>
-          </a:p>
-        </p:txBody>
-      </p:sp>
-      <p:sp>
-        <p:nvSpPr>
-          <p:cNvPr id="5" name="TextBox 4"/>
-          <p:cNvSpPr txBox="1"/>
-          <p:nvPr/>
-        </p:nvSpPr>
-        <p:spPr>
-          <a:xfrm>
-            <a:off x="713232" y="1261872"/>
-            <a:ext cx="10744200" cy="438912"/>
-          </a:xfrm>
-          <a:prstGeom prst="rect">
-            <a:avLst/>
-          </a:prstGeom>
-          <a:noFill/>
-        </p:spPr>
-        <p:txBody>
-          <a:bodyPr wrap="square" anchor="ctr" lIns="0" rIns="0" tIns="0" bIns="0">
-            <a:spAutoFit/>
-          </a:bodyPr>
-          <a:lstStyle/>
-          <a:p>
-            <a:pPr algn="l">
-              <a:lnSpc>
-                <a:spcPct val="110000"/>
-              </a:lnSpc>
-            </a:pPr>
-            <a:r>
-              <a:rPr sz="1800" b="1">
-                <a:solidFill>
-                  <a:srgbClr val="1F5C99"/>
-                </a:solidFill>
-                <a:latin typeface="Arial"/>
-                <a:ea typeface="微软雅黑"/>
-              </a:rPr>
-              <a:t>状态以对象引用共享，不再复制，也没有跨进程同步延迟</a:t>
-            </a:r>
-          </a:p>
-        </p:txBody>
-      </p:sp>
       <p:pic>
         <p:nvPicPr>
-          <p:cNvPr id="6" name="Picture 5" descr="fig5-2-cache-zero-copy.png"/>
+          <p:cNvPr id="4" name="Picture 3" descr="fig5-2-cache-zero-copy.png"/>
           <p:cNvPicPr>
             <a:picLocks noChangeAspect="1"/>
           </p:cNvPicPr>
@@ -25640,14 +25556,104 @@
         </p:blipFill>
         <p:spPr>
           <a:xfrm>
-            <a:off x="6174622" y="1783080"/>
-            <a:ext cx="5115794" cy="4206240"/>
+            <a:off x="3828698" y="868680"/>
+            <a:ext cx="4504123" cy="3703320"/>
           </a:xfrm>
           <a:prstGeom prst="rect">
             <a:avLst/>
           </a:prstGeom>
         </p:spPr>
       </p:pic>
+      <p:sp>
+        <p:nvSpPr>
+          <p:cNvPr id="5" name="Rounded Rectangle 4"/>
+          <p:cNvSpPr/>
+          <p:nvPr/>
+        </p:nvSpPr>
+        <p:spPr>
+          <a:xfrm>
+            <a:off x="566928" y="4754880"/>
+            <a:ext cx="3535680" cy="1417320"/>
+          </a:xfrm>
+          <a:prstGeom prst="roundRect">
+            <a:avLst/>
+          </a:prstGeom>
+          <a:solidFill>
+            <a:srgbClr val="FFFFFF"/>
+          </a:solidFill>
+          <a:ln w="9525">
+            <a:solidFill>
+              <a:srgbClr val="D8DFE8"/>
+            </a:solidFill>
+          </a:ln>
+          <a:effectLst/>
+        </p:spPr>
+        <p:style>
+          <a:lnRef idx="1">
+            <a:schemeClr val="accent1"/>
+          </a:lnRef>
+          <a:fillRef idx="3">
+            <a:schemeClr val="accent1"/>
+          </a:fillRef>
+          <a:effectRef idx="2">
+            <a:schemeClr val="accent1"/>
+          </a:effectRef>
+          <a:fontRef idx="minor">
+            <a:schemeClr val="lt1"/>
+          </a:fontRef>
+        </p:style>
+        <p:txBody>
+          <a:bodyPr rtlCol="0" anchor="ctr"/>
+          <a:lstStyle/>
+          <a:p>
+            <a:pPr algn="ctr"/>
+          </a:p>
+        </p:txBody>
+      </p:sp>
+      <p:sp>
+        <p:nvSpPr>
+          <p:cNvPr id="6" name="Rectangle 5"/>
+          <p:cNvSpPr/>
+          <p:nvPr/>
+        </p:nvSpPr>
+        <p:spPr>
+          <a:xfrm>
+            <a:off x="566928" y="4754880"/>
+            <a:ext cx="50292" cy="1417320"/>
+          </a:xfrm>
+          <a:prstGeom prst="rect">
+            <a:avLst/>
+          </a:prstGeom>
+          <a:solidFill>
+            <a:srgbClr val="0B2A4A"/>
+          </a:solidFill>
+          <a:ln>
+            <a:noFill/>
+          </a:ln>
+          <a:effectLst/>
+        </p:spPr>
+        <p:style>
+          <a:lnRef idx="1">
+            <a:schemeClr val="accent1"/>
+          </a:lnRef>
+          <a:fillRef idx="3">
+            <a:schemeClr val="accent1"/>
+          </a:fillRef>
+          <a:effectRef idx="2">
+            <a:schemeClr val="accent1"/>
+          </a:effectRef>
+          <a:fontRef idx="minor">
+            <a:schemeClr val="lt1"/>
+          </a:fontRef>
+        </p:style>
+        <p:txBody>
+          <a:bodyPr rtlCol="0" anchor="ctr"/>
+          <a:lstStyle/>
+          <a:p>
+            <a:pPr algn="ctr"/>
+          </a:p>
+        </p:txBody>
+      </p:sp>
       <p:sp>
         <p:nvSpPr>
           <p:cNvPr id="7" name="TextBox 6"/>
@@ -25656,8 +25662,8 @@
         </p:nvSpPr>
         <p:spPr>
           <a:xfrm>
-            <a:off x="566928" y="2011680"/>
-            <a:ext cx="5029200" cy="1417320"/>
+            <a:off x="749808" y="4864608"/>
+            <a:ext cx="3224784" cy="1234440"/>
           </a:xfrm>
           <a:prstGeom prst="rect">
             <a:avLst/>
@@ -25670,67 +25676,335 @@
           </a:bodyPr>
           <a:lstStyle/>
           <a:p>
-            <a:pPr algn="l">
-              <a:lnSpc>
-                <a:spcPct val="115000"/>
-              </a:lnSpc>
-            </a:pPr>
-            <a:r>
-              <a:rPr sz="1550" b="0">
-                <a:solidFill>
-                  <a:srgbClr val="333333"/>
+            <a:pPr algn="l"/>
+            <a:r>
+              <a:rPr sz="1500" b="1">
+                <a:solidFill>
+                  <a:srgbClr val="0B2A4A"/>
                 </a:solidFill>
                 <a:latin typeface="Arial"/>
                 <a:ea typeface="微软雅黑"/>
               </a:rPr>
-              <a:t>▪  对象引用而非序列化拷贝</a:t>
+              <a:t>① 共享同一实例</a:t>
             </a:r>
           </a:p>
           <a:p>
             <a:pPr algn="l">
               <a:lnSpc>
-                <a:spcPct val="115000"/>
+                <a:spcPct val="118000"/>
               </a:lnSpc>
               <a:spcBef>
-                <a:spcPts val="1400"/>
+                <a:spcPts val="400"/>
               </a:spcBef>
             </a:pPr>
             <a:r>
-              <a:rPr sz="1550" b="0">
+              <a:rPr sz="1250" b="0">
                 <a:solidFill>
                   <a:srgbClr val="333333"/>
                 </a:solidFill>
                 <a:latin typeface="Arial"/>
                 <a:ea typeface="微软雅黑"/>
               </a:rPr>
-              <a:t>▪  进程内 Binder 与 Scheduler 同视图</a:t>
-            </a:r>
-          </a:p>
-          <a:p>
-            <a:pPr algn="l">
-              <a:lnSpc>
-                <a:spcPct val="115000"/>
-              </a:lnSpc>
-              <a:spcBef>
-                <a:spcPts val="1400"/>
-              </a:spcBef>
-            </a:pPr>
-            <a:r>
-              <a:rPr sz="1550" b="0">
-                <a:solidFill>
-                  <a:srgbClr val="333333"/>
+              <a:t>CacheAdapter 把 Scheduler 的 SchedulerCache 交给进程内 Binder，两边持有同一份缓存对象</a:t>
+            </a:r>
+          </a:p>
+        </p:txBody>
+      </p:sp>
+      <p:sp>
+        <p:nvSpPr>
+          <p:cNvPr id="8" name="Rounded Rectangle 7"/>
+          <p:cNvSpPr/>
+          <p:nvPr/>
+        </p:nvSpPr>
+        <p:spPr>
+          <a:xfrm>
+            <a:off x="4331208" y="4754880"/>
+            <a:ext cx="3535680" cy="1417320"/>
+          </a:xfrm>
+          <a:prstGeom prst="roundRect">
+            <a:avLst/>
+          </a:prstGeom>
+          <a:solidFill>
+            <a:srgbClr val="FFFFFF"/>
+          </a:solidFill>
+          <a:ln w="9525">
+            <a:solidFill>
+              <a:srgbClr val="D8DFE8"/>
+            </a:solidFill>
+          </a:ln>
+          <a:effectLst/>
+        </p:spPr>
+        <p:style>
+          <a:lnRef idx="1">
+            <a:schemeClr val="accent1"/>
+          </a:lnRef>
+          <a:fillRef idx="3">
+            <a:schemeClr val="accent1"/>
+          </a:fillRef>
+          <a:effectRef idx="2">
+            <a:schemeClr val="accent1"/>
+          </a:effectRef>
+          <a:fontRef idx="minor">
+            <a:schemeClr val="lt1"/>
+          </a:fontRef>
+        </p:style>
+        <p:txBody>
+          <a:bodyPr rtlCol="0" anchor="ctr"/>
+          <a:lstStyle/>
+          <a:p>
+            <a:pPr algn="ctr"/>
+          </a:p>
+        </p:txBody>
+      </p:sp>
+      <p:sp>
+        <p:nvSpPr>
+          <p:cNvPr id="9" name="Rectangle 8"/>
+          <p:cNvSpPr/>
+          <p:nvPr/>
+        </p:nvSpPr>
+        <p:spPr>
+          <a:xfrm>
+            <a:off x="4331208" y="4754880"/>
+            <a:ext cx="50292" cy="1417320"/>
+          </a:xfrm>
+          <a:prstGeom prst="rect">
+            <a:avLst/>
+          </a:prstGeom>
+          <a:solidFill>
+            <a:srgbClr val="0B2A4A"/>
+          </a:solidFill>
+          <a:ln>
+            <a:noFill/>
+          </a:ln>
+          <a:effectLst/>
+        </p:spPr>
+        <p:style>
+          <a:lnRef idx="1">
+            <a:schemeClr val="accent1"/>
+          </a:lnRef>
+          <a:fillRef idx="3">
+            <a:schemeClr val="accent1"/>
+          </a:fillRef>
+          <a:effectRef idx="2">
+            <a:schemeClr val="accent1"/>
+          </a:effectRef>
+          <a:fontRef idx="minor">
+            <a:schemeClr val="lt1"/>
+          </a:fontRef>
+        </p:style>
+        <p:txBody>
+          <a:bodyPr rtlCol="0" anchor="ctr"/>
+          <a:lstStyle/>
+          <a:p>
+            <a:pPr algn="ctr"/>
+          </a:p>
+        </p:txBody>
+      </p:sp>
+      <p:sp>
+        <p:nvSpPr>
+          <p:cNvPr id="10" name="TextBox 9"/>
+          <p:cNvSpPr txBox="1"/>
+          <p:nvPr/>
+        </p:nvSpPr>
+        <p:spPr>
+          <a:xfrm>
+            <a:off x="4514088" y="4864608"/>
+            <a:ext cx="3224784" cy="1234440"/>
+          </a:xfrm>
+          <a:prstGeom prst="rect">
+            <a:avLst/>
+          </a:prstGeom>
+          <a:noFill/>
+        </p:spPr>
+        <p:txBody>
+          <a:bodyPr wrap="square" anchor="t" lIns="0" rIns="0" tIns="0" bIns="0">
+            <a:spAutoFit/>
+          </a:bodyPr>
+          <a:lstStyle/>
+          <a:p>
+            <a:pPr algn="l"/>
+            <a:r>
+              <a:rPr sz="1500" b="1">
+                <a:solidFill>
+                  <a:srgbClr val="0B2A4A"/>
                 </a:solidFill>
                 <a:latin typeface="Arial"/>
                 <a:ea typeface="微软雅黑"/>
               </a:rPr>
-              <a:t>▪  为一致性校验提供同一份真相</a:t>
-            </a:r>
-          </a:p>
-        </p:txBody>
-      </p:sp>
-      <p:sp>
-        <p:nvSpPr>
-          <p:cNvPr id="8" name="TextBox 7"/>
+              <a:t>② 零拷贝、零同步</a:t>
+            </a:r>
+          </a:p>
+          <a:p>
+            <a:pPr algn="l">
+              <a:lnSpc>
+                <a:spcPct val="118000"/>
+              </a:lnSpc>
+              <a:spcBef>
+                <a:spcPts val="400"/>
+              </a:spcBef>
+            </a:pPr>
+            <a:r>
+              <a:rPr sz="1250" b="0">
+                <a:solidFill>
+                  <a:srgbClr val="333333"/>
+                </a:solidFill>
+                <a:latin typeface="Arial"/>
+                <a:ea typeface="微软雅黑"/>
+              </a:rPr>
+              <a:t>状态以引用传递，不做序列化复制，也没有跨进程的同步延迟与网络往返</a:t>
+            </a:r>
+          </a:p>
+        </p:txBody>
+      </p:sp>
+      <p:sp>
+        <p:nvSpPr>
+          <p:cNvPr id="11" name="Rounded Rectangle 10"/>
+          <p:cNvSpPr/>
+          <p:nvPr/>
+        </p:nvSpPr>
+        <p:spPr>
+          <a:xfrm>
+            <a:off x="8095488" y="4754880"/>
+            <a:ext cx="3535680" cy="1417320"/>
+          </a:xfrm>
+          <a:prstGeom prst="roundRect">
+            <a:avLst/>
+          </a:prstGeom>
+          <a:solidFill>
+            <a:srgbClr val="FFFFFF"/>
+          </a:solidFill>
+          <a:ln w="9525">
+            <a:solidFill>
+              <a:srgbClr val="D8DFE8"/>
+            </a:solidFill>
+          </a:ln>
+          <a:effectLst/>
+        </p:spPr>
+        <p:style>
+          <a:lnRef idx="1">
+            <a:schemeClr val="accent1"/>
+          </a:lnRef>
+          <a:fillRef idx="3">
+            <a:schemeClr val="accent1"/>
+          </a:fillRef>
+          <a:effectRef idx="2">
+            <a:schemeClr val="accent1"/>
+          </a:effectRef>
+          <a:fontRef idx="minor">
+            <a:schemeClr val="lt1"/>
+          </a:fontRef>
+        </p:style>
+        <p:txBody>
+          <a:bodyPr rtlCol="0" anchor="ctr"/>
+          <a:lstStyle/>
+          <a:p>
+            <a:pPr algn="ctr"/>
+          </a:p>
+        </p:txBody>
+      </p:sp>
+      <p:sp>
+        <p:nvSpPr>
+          <p:cNvPr id="12" name="Rectangle 11"/>
+          <p:cNvSpPr/>
+          <p:nvPr/>
+        </p:nvSpPr>
+        <p:spPr>
+          <a:xfrm>
+            <a:off x="8095488" y="4754880"/>
+            <a:ext cx="50292" cy="1417320"/>
+          </a:xfrm>
+          <a:prstGeom prst="rect">
+            <a:avLst/>
+          </a:prstGeom>
+          <a:solidFill>
+            <a:srgbClr val="0B2A4A"/>
+          </a:solidFill>
+          <a:ln>
+            <a:noFill/>
+          </a:ln>
+          <a:effectLst/>
+        </p:spPr>
+        <p:style>
+          <a:lnRef idx="1">
+            <a:schemeClr val="accent1"/>
+          </a:lnRef>
+          <a:fillRef idx="3">
+            <a:schemeClr val="accent1"/>
+          </a:fillRef>
+          <a:effectRef idx="2">
+            <a:schemeClr val="accent1"/>
+          </a:effectRef>
+          <a:fontRef idx="minor">
+            <a:schemeClr val="lt1"/>
+          </a:fontRef>
+        </p:style>
+        <p:txBody>
+          <a:bodyPr rtlCol="0" anchor="ctr"/>
+          <a:lstStyle/>
+          <a:p>
+            <a:pPr algn="ctr"/>
+          </a:p>
+        </p:txBody>
+      </p:sp>
+      <p:sp>
+        <p:nvSpPr>
+          <p:cNvPr id="13" name="TextBox 12"/>
+          <p:cNvSpPr txBox="1"/>
+          <p:nvPr/>
+        </p:nvSpPr>
+        <p:spPr>
+          <a:xfrm>
+            <a:off x="8278367" y="4864608"/>
+            <a:ext cx="3224784" cy="1234440"/>
+          </a:xfrm>
+          <a:prstGeom prst="rect">
+            <a:avLst/>
+          </a:prstGeom>
+          <a:noFill/>
+        </p:spPr>
+        <p:txBody>
+          <a:bodyPr wrap="square" anchor="t" lIns="0" rIns="0" tIns="0" bIns="0">
+            <a:spAutoFit/>
+          </a:bodyPr>
+          <a:lstStyle/>
+          <a:p>
+            <a:pPr algn="l"/>
+            <a:r>
+              <a:rPr sz="1500" b="1">
+                <a:solidFill>
+                  <a:srgbClr val="0B2A4A"/>
+                </a:solidFill>
+                <a:latin typeface="Arial"/>
+                <a:ea typeface="微软雅黑"/>
+              </a:rPr>
+              <a:t>③ 同一份真相</a:t>
+            </a:r>
+          </a:p>
+          <a:p>
+            <a:pPr algn="l">
+              <a:lnSpc>
+                <a:spcPct val="118000"/>
+              </a:lnSpc>
+              <a:spcBef>
+                <a:spcPts val="400"/>
+              </a:spcBef>
+            </a:pPr>
+            <a:r>
+              <a:rPr sz="1250" b="0">
+                <a:solidFill>
+                  <a:srgbClr val="333333"/>
+                </a:solidFill>
+                <a:latin typeface="Arial"/>
+                <a:ea typeface="微软雅黑"/>
+              </a:rPr>
+              <a:t>Layer 0 的节点归属校验读的就是这份缓存，Scheduler 与 Binder 看到的状态一致</a:t>
+            </a:r>
+          </a:p>
+        </p:txBody>
+      </p:sp>
+      <p:sp>
+        <p:nvSpPr>
+          <p:cNvPr id="14" name="TextBox 13"/>
           <p:cNvSpPr txBox="1"/>
           <p:nvPr/>
         </p:nvSpPr>

--- a/docs/thesis/defense/答辩PPT-基于etcd的分布式Kubernetes调度器.pptx
+++ b/docs/thesis/defense/答辩PPT-基于etcd的分布式Kubernetes调度器.pptx
@@ -6294,7 +6294,7 @@
           <a:p>
             <a:pPr algn="l"/>
             <a:r>
-              <a:rPr sz="1450" b="1">
+              <a:rPr sz="1350" b="1">
                 <a:solidFill>
                   <a:srgbClr val="0B2A4A"/>
                 </a:solidFill>
@@ -6314,8 +6314,8 @@
         </p:nvSpPr>
         <p:spPr>
           <a:xfrm>
-            <a:off x="3538728" y="1911095"/>
-            <a:ext cx="3566160" cy="694944"/>
+            <a:off x="3538728" y="1874519"/>
+            <a:ext cx="3840480" cy="731520"/>
           </a:xfrm>
           <a:prstGeom prst="rect">
             <a:avLst/>
@@ -6328,16 +6328,40 @@
           </a:bodyPr>
           <a:lstStyle/>
           <a:p>
-            <a:pPr algn="l"/>
-            <a:r>
-              <a:rPr sz="1150" b="0">
+            <a:pPr algn="l">
+              <a:lnSpc>
+                <a:spcPct val="100000"/>
+              </a:lnSpc>
+            </a:pPr>
+            <a:r>
+              <a:rPr sz="1050" b="0">
                 <a:solidFill>
                   <a:srgbClr val="333333"/>
                 </a:solidFill>
                 <a:latin typeface="Arial"/>
                 <a:ea typeface="微软雅黑"/>
               </a:rPr>
-              <a:t>威胁：分区归属漂移</a:t>
+              <a:t>威胁：T0 节点分区归属漂移</a:t>
+            </a:r>
+          </a:p>
+          <a:p>
+            <a:pPr algn="l">
+              <a:lnSpc>
+                <a:spcPct val="100000"/>
+              </a:lnSpc>
+              <a:spcBef>
+                <a:spcPts val="100"/>
+              </a:spcBef>
+            </a:pPr>
+            <a:r>
+              <a:rPr sz="1000" b="0">
+                <a:solidFill>
+                  <a:srgbClr val="333333"/>
+                </a:solidFill>
+                <a:latin typeface="Arial"/>
+                <a:ea typeface="微软雅黑"/>
+              </a:rPr>
+              <a:t>动作：Bind 前校验 Node 的 eno.io/scheduler-name 注解，非本分区直接拒绝并清理注解回退</a:t>
             </a:r>
           </a:p>
         </p:txBody>
@@ -6350,8 +6374,8 @@
         </p:nvSpPr>
         <p:spPr>
           <a:xfrm>
-            <a:off x="7287768" y="1911095"/>
-            <a:ext cx="4206240" cy="694944"/>
+            <a:off x="7470648" y="1874519"/>
+            <a:ext cx="3977639" cy="731520"/>
           </a:xfrm>
           <a:prstGeom prst="rect">
             <a:avLst/>
@@ -6364,16 +6388,20 @@
           </a:bodyPr>
           <a:lstStyle/>
           <a:p>
-            <a:pPr algn="l"/>
-            <a:r>
-              <a:rPr sz="1100" b="0">
+            <a:pPr algn="l">
+              <a:lnSpc>
+                <a:spcPct val="105000"/>
+              </a:lnSpc>
+            </a:pPr>
+            <a:r>
+              <a:rPr sz="950" b="0">
                 <a:solidFill>
                   <a:srgbClr val="566474"/>
                 </a:solidFill>
                 <a:latin typeface="Arial"/>
                 <a:ea typeface="微软雅黑"/>
               </a:rPr>
-              <a:t>etcd：resourceVersion 乐观并发</a:t>
+              <a:t>依赖：resourceVersion 乐观并发</a:t>
             </a:r>
           </a:p>
         </p:txBody>
@@ -6492,7 +6520,7 @@
           <a:p>
             <a:pPr algn="l"/>
             <a:r>
-              <a:rPr sz="1450" b="1">
+              <a:rPr sz="1350" b="1">
                 <a:solidFill>
                   <a:srgbClr val="0B2A4A"/>
                 </a:solidFill>
@@ -6512,8 +6540,8 @@
         </p:nvSpPr>
         <p:spPr>
           <a:xfrm>
-            <a:off x="3538728" y="2898648"/>
-            <a:ext cx="3566160" cy="694944"/>
+            <a:off x="3538728" y="2862072"/>
+            <a:ext cx="3840480" cy="731520"/>
           </a:xfrm>
           <a:prstGeom prst="rect">
             <a:avLst/>
@@ -6526,16 +6554,40 @@
           </a:bodyPr>
           <a:lstStyle/>
           <a:p>
-            <a:pPr algn="l"/>
-            <a:r>
-              <a:rPr sz="1150" b="0">
+            <a:pPr algn="l">
+              <a:lnSpc>
+                <a:spcPct val="100000"/>
+              </a:lnSpc>
+            </a:pPr>
+            <a:r>
+              <a:rPr sz="1050" b="0">
                 <a:solidFill>
                   <a:srgbClr val="333333"/>
                 </a:solidFill>
                 <a:latin typeface="Arial"/>
                 <a:ea typeface="微软雅黑"/>
               </a:rPr>
-              <a:t>威胁：apiserver 暂态错误</a:t>
+              <a:t>威胁：T1 Bind 返回 409 Conflict / 429 TooManyRequests / ServerTimeout</a:t>
+            </a:r>
+          </a:p>
+          <a:p>
+            <a:pPr algn="l">
+              <a:lnSpc>
+                <a:spcPct val="100000"/>
+              </a:lnSpc>
+              <a:spcBef>
+                <a:spcPts val="100"/>
+              </a:spcBef>
+            </a:pPr>
+            <a:r>
+              <a:rPr sz="1000" b="0">
+                <a:solidFill>
+                  <a:srgbClr val="333333"/>
+                </a:solidFill>
+                <a:latin typeface="Arial"/>
+                <a:ea typeface="微软雅黑"/>
+              </a:rPr>
+              <a:t>动作：线性退避 n×100ms（100/200/300ms），最多 3 次；仅这三类重试，其余错误立即上抛</a:t>
             </a:r>
           </a:p>
         </p:txBody>
@@ -6548,8 +6600,8 @@
         </p:nvSpPr>
         <p:spPr>
           <a:xfrm>
-            <a:off x="7287768" y="2898648"/>
-            <a:ext cx="4206240" cy="694944"/>
+            <a:off x="7470648" y="2862072"/>
+            <a:ext cx="3977639" cy="731520"/>
           </a:xfrm>
           <a:prstGeom prst="rect">
             <a:avLst/>
@@ -6562,16 +6614,20 @@
           </a:bodyPr>
           <a:lstStyle/>
           <a:p>
-            <a:pPr algn="l"/>
-            <a:r>
-              <a:rPr sz="1100" b="0">
+            <a:pPr algn="l">
+              <a:lnSpc>
+                <a:spcPct val="105000"/>
+              </a:lnSpc>
+            </a:pPr>
+            <a:r>
+              <a:rPr sz="950" b="0">
                 <a:solidFill>
                   <a:srgbClr val="566474"/>
                 </a:solidFill>
                 <a:latin typeface="Arial"/>
                 <a:ea typeface="微软雅黑"/>
               </a:rPr>
-              <a:t>etcd：Bind 原子写 / 409 冲突</a:t>
+              <a:t>依赖：Bind 原子性：重复 Bind 返回 409，可视为成功</a:t>
             </a:r>
           </a:p>
         </p:txBody>
@@ -6690,7 +6746,7 @@
           <a:p>
             <a:pPr algn="l"/>
             <a:r>
-              <a:rPr sz="1450" b="1">
+              <a:rPr sz="1350" b="1">
                 <a:solidFill>
                   <a:srgbClr val="0B2A4A"/>
                 </a:solidFill>
@@ -6710,8 +6766,8 @@
         </p:nvSpPr>
         <p:spPr>
           <a:xfrm>
-            <a:off x="3538728" y="3886200"/>
-            <a:ext cx="3566160" cy="694944"/>
+            <a:off x="3538728" y="3849624"/>
+            <a:ext cx="3840480" cy="731520"/>
           </a:xfrm>
           <a:prstGeom prst="rect">
             <a:avLst/>
@@ -6724,16 +6780,40 @@
           </a:bodyPr>
           <a:lstStyle/>
           <a:p>
-            <a:pPr algn="l"/>
-            <a:r>
-              <a:rPr sz="1150" b="0">
+            <a:pPr algn="l">
+              <a:lnSpc>
+                <a:spcPct val="100000"/>
+              </a:lnSpc>
+            </a:pPr>
+            <a:r>
+              <a:rPr sz="1050" b="0">
                 <a:solidFill>
                   <a:srgbClr val="333333"/>
                 </a:solidFill>
                 <a:latin typeface="Arial"/>
                 <a:ea typeface="微软雅黑"/>
               </a:rPr>
-              <a:t>威胁：孤儿 Assumed 状态</a:t>
+              <a:t>威胁：T2 Bind 失败后 scheduler-name、assumed-node 注解残留</a:t>
+            </a:r>
+          </a:p>
+          <a:p>
+            <a:pPr algn="l">
+              <a:lnSpc>
+                <a:spcPct val="100000"/>
+              </a:lnSpc>
+              <a:spcBef>
+                <a:spcPts val="100"/>
+              </a:spcBef>
+            </a:pPr>
+            <a:r>
+              <a:rPr sz="1000" b="0">
+                <a:solidFill>
+                  <a:srgbClr val="333333"/>
+                </a:solidFill>
+                <a:latin typeface="Arial"/>
+                <a:ea typeface="微软雅黑"/>
+              </a:rPr>
+              <a:t>动作：异步 Reconciler 消费失败队列，PatchPod 清理调度注解，按失败计数决定本地重试或升 L3</a:t>
             </a:r>
           </a:p>
         </p:txBody>
@@ -6746,8 +6826,8 @@
         </p:nvSpPr>
         <p:spPr>
           <a:xfrm>
-            <a:off x="7287768" y="3886200"/>
-            <a:ext cx="4206240" cy="694944"/>
+            <a:off x="7470648" y="3849624"/>
+            <a:ext cx="3977639" cy="731520"/>
           </a:xfrm>
           <a:prstGeom prst="rect">
             <a:avLst/>
@@ -6760,16 +6840,20 @@
           </a:bodyPr>
           <a:lstStyle/>
           <a:p>
-            <a:pPr algn="l"/>
-            <a:r>
-              <a:rPr sz="1100" b="0">
+            <a:pPr algn="l">
+              <a:lnSpc>
+                <a:spcPct val="105000"/>
+              </a:lnSpc>
+            </a:pPr>
+            <a:r>
+              <a:rPr sz="950" b="0">
                 <a:solidFill>
                   <a:srgbClr val="566474"/>
                 </a:solidFill>
                 <a:latin typeface="Arial"/>
                 <a:ea typeface="微软雅黑"/>
               </a:rPr>
-              <a:t>etcd：Watch 一致性视图</a:t>
+              <a:t>依赖：Watch 一致性视图；NotFound 直接丢弃</a:t>
             </a:r>
           </a:p>
         </p:txBody>
@@ -6888,7 +6972,7 @@
           <a:p>
             <a:pPr algn="l"/>
             <a:r>
-              <a:rPr sz="1450" b="1">
+              <a:rPr sz="1350" b="1">
                 <a:solidFill>
                   <a:srgbClr val="0B2A4A"/>
                 </a:solidFill>
@@ -6908,8 +6992,8 @@
         </p:nvSpPr>
         <p:spPr>
           <a:xfrm>
-            <a:off x="3538728" y="4873752"/>
-            <a:ext cx="3566160" cy="694944"/>
+            <a:off x="3538728" y="4837176"/>
+            <a:ext cx="3840480" cy="731520"/>
           </a:xfrm>
           <a:prstGeom prst="rect">
             <a:avLst/>
@@ -6922,16 +7006,40 @@
           </a:bodyPr>
           <a:lstStyle/>
           <a:p>
-            <a:pPr algn="l"/>
-            <a:r>
-              <a:rPr sz="1150" b="0">
+            <a:pPr algn="l">
+              <a:lnSpc>
+                <a:spcPct val="100000"/>
+              </a:lnSpc>
+            </a:pPr>
+            <a:r>
+              <a:rPr sz="1050" b="0">
                 <a:solidFill>
                   <a:srgbClr val="333333"/>
                 </a:solidFill>
                 <a:latin typeface="Arial"/>
                 <a:ea typeface="微软雅黑"/>
               </a:rPr>
-              <a:t>威胁：实例失活、重试耗尽</a:t>
+              <a:t>威胁：T3 本地重试耗尽、Scheduler 实例失活</a:t>
+            </a:r>
+          </a:p>
+          <a:p>
+            <a:pPr algn="l">
+              <a:lnSpc>
+                <a:spcPct val="100000"/>
+              </a:lnSpc>
+              <a:spcBef>
+                <a:spcPts val="100"/>
+              </a:spcBef>
+            </a:pPr>
+            <a:r>
+              <a:rPr sz="1000" b="0">
+                <a:solidFill>
+                  <a:srgbClr val="333333"/>
+                </a:solidFill>
+                <a:latin typeface="Arial"/>
+                <a:ea typeface="微软雅黑"/>
+              </a:rPr>
+              <a:t>动作：一次 PatchPod 原子提交：置 pod-state=Pending、删 scheduler-name、追加 failed-schedulers</a:t>
             </a:r>
           </a:p>
         </p:txBody>
@@ -6944,8 +7052,8 @@
         </p:nvSpPr>
         <p:spPr>
           <a:xfrm>
-            <a:off x="7287768" y="4873752"/>
-            <a:ext cx="4206240" cy="694944"/>
+            <a:off x="7470648" y="4837176"/>
+            <a:ext cx="3977639" cy="731520"/>
           </a:xfrm>
           <a:prstGeom prst="rect">
             <a:avLst/>
@@ -6958,16 +7066,20 @@
           </a:bodyPr>
           <a:lstStyle/>
           <a:p>
-            <a:pPr algn="l"/>
-            <a:r>
-              <a:rPr sz="1100" b="0">
+            <a:pPr algn="l">
+              <a:lnSpc>
+                <a:spcPct val="105000"/>
+              </a:lnSpc>
+            </a:pPr>
+            <a:r>
+              <a:rPr sz="950" b="0">
                 <a:solidFill>
                   <a:srgbClr val="566474"/>
                 </a:solidFill>
                 <a:latin typeface="Arial"/>
                 <a:ea typeface="微软雅黑"/>
               </a:rPr>
-              <a:t>etcd：注解清理 + 全局重分发</a:t>
+              <a:t>依赖：etcd 事务原子提交（Txn）</a:t>
             </a:r>
           </a:p>
         </p:txBody>

--- a/docs/thesis/defense/答辩PPT-基于etcd的分布式Kubernetes调度器.pptx
+++ b/docs/thesis/defense/答辩PPT-基于etcd的分布式Kubernetes调度器.pptx
@@ -603,7 +603,7 @@
           <a:lstStyle/>
           <a:p>
             <a:r>
-              <a:t>四层是一条时间轴。Bind 前 Layer 0 校验归属注解，把漂移拦在门外；Bind 中 Layer 1 用同步退避处理暂态错误；失败后 Layer 2 异步回收孤儿状态；重试耗尽 Layer 3 由 Dispatcher 清注解、触发全局重分发。每层依赖一种 etcd 语义。四层之间是衔接关系，不是四个独立补丁。</a:t>
+              <a:t>四层是一条时间轴。Bind 前 Layer 0 校验归属注解，非本分区直接拒绝并回退。Bind 中 Layer 1 只处理 409、429、ServerTimeout 三类暂态错误：线性退避 100、200、300 毫秒，最多三次，其它错误立即上抛。失败后 Layer 2 异步清理残留注解，按失败计数决定本地重试还是上升。重试耗尽 Layer 3 用一次原子 patch 交回 Dispatcher 重分发。四层之间是衔接关系，不是四个独立补丁。</a:t>
             </a:r>
           </a:p>
         </p:txBody>
@@ -1093,7 +1093,7 @@
           <a:lstStyle/>
           <a:p>
             <a:r>
-              <a:t>五组横向对比，结论是三档。第一档 ENO 与 Gödel，都是几百 pods/s；第二档 kube-scheduler；第三档 Volcano 与 Koordinator，只有约 48 和约 24 pods/s，几乎不随规模变化。主评估四场景里，ENO 比 kube-scheduler 高 1.8% 到 22.5%。唯一例外是 s1/w1 低负载低 7.2%，那个场景没饱和。柱状图按场景排序，第三档几乎是一条水平线，说明它们的瓶颈不在调度吞吐这一维。从 s1 到 s3，第一档的曲线始终压在最上面，第三档几乎不随规模变化。</a:t>
+              <a:t>五组横向对比，结论是三档。第一档 ENO 与 Gödel，都是几百 pods/s；第二档 kube-scheduler；第三档 Volcano 与 Koordinator，只有约 48 和约 24 pods/s，几乎不随规模变化。主评估四场景里，ENO 比 kube-scheduler 高 1.8% 到 22.5%。唯一例外是 s1/w1 低负载低 7.2%，那个场景没饱和。柱状图按场景排序，第三档几乎是一条水平线，说明它们的瓶颈不在调度吞吐这一维。从 s1 到 s3，第一档的曲线始终压在最上面，第三档几乎不随规模变化。这个排序在 16 个场景上是一致的。</a:t>
             </a:r>
           </a:p>
         </p:txBody>
@@ -2423,7 +2423,7 @@
           <a:lstStyle/>
           <a:p>
             <a:r>
-              <a:t>这张图是总体架构。上层 Dispatcher 单实例，维护节点分区表，把 Pod 按分区分发给对应 Scheduler，绑定出问题时清理注解、触发重分发。中间多个 Scheduler 只调度本分区节点。下层 Binder 与 Scheduler 同进程，负责真正写进 apiserver。三层职责清晰，故障面也就容易划清，后面的四层容错正是按这三层分工展开的。</a:t>
+              <a:t>这张图是总体架构。上层 Dispatcher 单实例，维护节点分区表，把 Pod 按分区分发给对应 Scheduler，绑定出问题时清理注解、触发重分发。中间多个 Scheduler 只调度本分区节点。下层 Binder 与 Scheduler 同进程，负责真正写进 apiserver。</a:t>
             </a:r>
           </a:p>
         </p:txBody>
@@ -2563,7 +2563,7 @@
           <a:lstStyle/>
           <a:p>
             <a:r>
-              <a:t>Scheduler 内部也是三步。入队前 pre-queue 先校验 PodGroup 成员与亲和依赖，不通过退回 Dispatcher。进 activeQ 后跑 Filter、Score、Reserve，Reserve 阶段写 Assumed 状态。最后调 Binder 执行 Bind；失败进 backoffQ 退避，多次失败退回 Dispatcher。Scheduler 决定何时放弃本地重试，Dispatcher 决定何时重新分发，这是双向协作。</a:t>
+              <a:t>Scheduler 内部也是三步。入队前 pre-queue 先校验 PodGroup 成员与亲和依赖，不通过退回 Dispatcher。进 activeQ 后跑 Filter、Score、Reserve，Reserve 阶段写 Assumed 状态。最后调 Binder 执行 Bind；失败进 backoffQ 退避，多次失败退回 Dispatcher。</a:t>
             </a:r>
           </a:p>
         </p:txBody>

--- a/docs/thesis/defense/答辩PPT-基于etcd的分布式Kubernetes调度器.pptx
+++ b/docs/thesis/defense/答辩PPT-基于etcd的分布式Kubernetes调度器.pptx
@@ -533,7 +533,7 @@
           <a:lstStyle/>
           <a:p>
             <a:r>
-              <a:t>各位老师上午好。我的论文题目是《基于 etcd 的分布式 Kubernetes 调度器研究与实现》。这项工作针对分布式调度器把绑定拆出去之后吞吐上不去、一致性也守不住的问题。一句话概括：把 Binder 合并回 Scheduler，用四层机制守住“至多绑定一次”。十八分钟，只讲问题、方法、证据。</a:t>
+              <a:t>各位老师上午好。我的论文题目是《基于 etcd 的分布式 Kubernetes 调度器研究与实现》。这项工作针对分布式调度器把绑定拆出去之后吞吐上不去、一致性也守不住的问题。一句话概括：把 Binder 合并回 Scheduler，用四层机制守住“至多绑定一次”。</a:t>
             </a:r>
           </a:p>
         </p:txBody>
@@ -673,7 +673,7 @@
           <a:lstStyle/>
           <a:p>
             <a:r>
-              <a:t>所有机制最后都回到不变量 I：任一 Pod 至多绑定到一个节点。证明拆四点：P1 来自 Bind 子资源原子写；P2 是 Assumed 状态清理；P3 是注解清理与重分发的时序；P4 是 Layer 0 前置拦截。四层都不破坏 I，且可在 apiserver 侧复核。这也是后面所有实验断言的设计依据。</a:t>
+              <a:t>所有机制最后都归约到这一条不变量 I：任一 Pod 至多绑定到一个节点。证明拆四点。P1 是 Bind 唯一性，来自 Kubernetes 自身：nodeName 为空才允许原子写入，重复写返回 409。P2 是 Assumed 清理，Reject 阶段 ForgetPod 清内存态，Layer 2 清 etcd 注解。P3 是清理到重分发的时序，一次 PatchPod 原子提交。P4 是 Layer 0 前置拦截，缓存滞后由 P1 兜底。这也是后面所有实验断言的设计依据：断言查的就是未绑定与重复绑定两项。</a:t>
             </a:r>
           </a:p>
         </p:txBody>
@@ -1303,7 +1303,7 @@
           <a:lstStyle/>
           <a:p>
             <a:r>
-              <a:t>先说背景。Kubernetes 已成为云原生的事实标准，调度器在 Pod 生命周期的关键路径上，吞吐和延迟直接决定资源利用率与业务响应速度。千节点规模单实例还能撑住，到万节点量级就暴露三个瓶颈：activeQ 串行、Filter/Score 随规模线性、Leader 单点。这三条叠在一起，单实例架构就很难再往上走。</a:t>
+              <a:t>先说背景。Kubernetes 已成为云原生的事实标准，调度器在 Pod 生命周期的关键路径上，吞吐和延迟直接决定资源利用率与业务响应速度。千节点规模单实例还能撑住，到万节点量级就暴露三个瓶颈：activeQ 串行、Filter/Score 随规模线性、Leader 单点。</a:t>
             </a:r>
           </a:p>
         </p:txBody>
@@ -2073,7 +2073,7 @@
           <a:lstStyle/>
           <a:p>
             <a:r>
-              <a:t>第二章分国外与国内两条线。国外从集中式走到共享状态：Borg、Omega、Mesos，再到 kube-scheduler 的插件框架。国内代表是 Gödel，字节跳动开源，用节点分区做分片式多实例；Volcano 与 Koordinator 走插件增强。共同缺口在落盘侧。决策侧已相对充分，落盘侧的工程问题还没被系统回答。</a:t>
+              <a:t>第二章分国外与国内两条线。国外从集中式走到共享状态：Borg、Omega、Mesos，再到 kube-scheduler 的插件框架。国内代表是 Gödel，字节跳动开源，用节点分区做分片式多实例；Volcano 与 Koordinator 走插件增强。共同缺口在落盘侧。</a:t>
             </a:r>
           </a:p>
         </p:txBody>
@@ -2353,7 +2353,7 @@
           <a:lstStyle/>
           <a:p>
             <a:r>
-              <a:t>这一页压成两句。架构上，单 Dispatcher、多独立 Scheduler，Binder 合并进 Scheduler 进程，CacheAdapter 零拷贝共享缓存。一致性上，四层容错覆盖 Bind 前中后，都建立在 etcd 原子语义上。两条创新指向同一个目标。不改 API 的前提下，让分布式调度既跑得快、稳定性更高。</a:t>
+              <a:t>这一页压成两句。架构上，单 Dispatcher、多独立 Scheduler，Binder 合并进 Scheduler 进程，CacheAdapter 零拷贝共享缓存。一致性上，四层容错覆盖 Bind 前中后，都建立在 etcd 原子语义上。两条创新指向同一个目标。</a:t>
             </a:r>
           </a:p>
         </p:txBody>
@@ -7225,7 +7225,7 @@
                 <a:latin typeface="Arial"/>
                 <a:ea typeface="微软雅黑"/>
               </a:rPr>
-              <a:t>正确性根基</a:t>
+              <a:t>核心不变量 I</a:t>
             </a:r>
           </a:p>
         </p:txBody>
@@ -7349,7 +7349,7 @@
                 <a:latin typeface="Arial"/>
                 <a:ea typeface="微软雅黑"/>
               </a:rPr>
-              <a:t>▪  Bind 原子写是最后防线</a:t>
+              <a:t>▪  P1 Bind 唯一性：nodeName 为空才允许写，重复写返回 409</a:t>
             </a:r>
           </a:p>
           <a:p>
@@ -7369,7 +7369,7 @@
                 <a:latin typeface="Arial"/>
                 <a:ea typeface="微软雅黑"/>
               </a:rPr>
-              <a:t>▪  resourceVersion 防并发覆盖</a:t>
+              <a:t>▪  P2 Assumed 清理：Reject 阶段 ForgetPod，Layer 2 清 etcd 注解</a:t>
             </a:r>
           </a:p>
           <a:p>
@@ -7389,7 +7389,27 @@
                 <a:latin typeface="Arial"/>
                 <a:ea typeface="微软雅黑"/>
               </a:rPr>
-              <a:t>▪  四层机制均不破坏 I</a:t>
+              <a:t>▪  P3 清理与重分发时序：一次 PatchPod 原子提交，无中间态</a:t>
+            </a:r>
+          </a:p>
+          <a:p>
+            <a:pPr algn="l">
+              <a:lnSpc>
+                <a:spcPct val="115000"/>
+              </a:lnSpc>
+              <a:spcBef>
+                <a:spcPts val="600"/>
+              </a:spcBef>
+            </a:pPr>
+            <a:r>
+              <a:rPr sz="1350" b="0">
+                <a:solidFill>
+                  <a:srgbClr val="333333"/>
+                </a:solidFill>
+                <a:latin typeface="Arial"/>
+                <a:ea typeface="微软雅黑"/>
+              </a:rPr>
+              <a:t>▪  P4 前置拦截：归属注解 + Layer 0 校验，缓存滞后由 P1 兜底</a:t>
             </a:r>
           </a:p>
         </p:txBody>
@@ -17184,7 +17204,7 @@
                 <a:latin typeface="Arial"/>
                 <a:ea typeface="微软雅黑"/>
               </a:rPr>
-              <a:t>不改 API、保留开关、基准开源</a:t>
+              <a:t>不改 API、可平滑替换、基准开源</a:t>
             </a:r>
           </a:p>
         </p:txBody>

--- a/docs/thesis/defense/答辩PPT-基于etcd的分布式Kubernetes调度器.pptx
+++ b/docs/thesis/defense/答辩PPT-基于etcd的分布式Kubernetes调度器.pptx
@@ -7678,7 +7678,7 @@
         </p:nvGraphicFramePr>
         <p:xfrm>
           <a:off x="566928" y="1828800"/>
-          <a:ext cx="11064240" cy="2523744"/>
+          <a:ext cx="11064240" cy="3456432"/>
         </p:xfrm>
         <a:graphic>
           <a:graphicData uri="http://schemas.openxmlformats.org/drawingml/2006/table">
@@ -7690,7 +7690,7 @@
                 <a:gridCol w="5532120"/>
                 <a:gridCol w="5532120"/>
               </a:tblGrid>
-              <a:tr h="420624">
+              <a:tr h="384048">
                 <a:tc>
                   <a:txBody>
                     <a:bodyPr wrap="square"/>
@@ -7698,7 +7698,7 @@
                     <a:p>
                       <a:pPr algn="l"/>
                       <a:r>
-                        <a:rPr sz="1200" b="1">
+                        <a:rPr sz="1150" b="1">
                           <a:solidFill>
                             <a:srgbClr val="FFFFFF"/>
                           </a:solidFill>
@@ -7722,7 +7722,7 @@
                     <a:p>
                       <a:pPr algn="ctr"/>
                       <a:r>
-                        <a:rPr sz="1200" b="1">
+                        <a:rPr sz="1150" b="1">
                           <a:solidFill>
                             <a:srgbClr val="FFFFFF"/>
                           </a:solidFill>
@@ -7740,7 +7740,7 @@
                   </a:tcPr>
                 </a:tc>
               </a:tr>
-              <a:tr h="420624">
+              <a:tr h="384048">
                 <a:tc>
                   <a:txBody>
                     <a:bodyPr wrap="square"/>
@@ -7748,7 +7748,7 @@
                     <a:p>
                       <a:pPr algn="l"/>
                       <a:r>
-                        <a:rPr sz="1200" b="0">
+                        <a:rPr sz="1150" b="0">
                           <a:solidFill>
                             <a:srgbClr val="333333"/>
                           </a:solidFill>
@@ -7772,7 +7772,7 @@
                     <a:p>
                       <a:pPr algn="ctr"/>
                       <a:r>
-                        <a:rPr sz="1200" b="0">
+                        <a:rPr sz="1150" b="0">
                           <a:solidFill>
                             <a:srgbClr val="333333"/>
                           </a:solidFill>
@@ -7790,7 +7790,7 @@
                   </a:tcPr>
                 </a:tc>
               </a:tr>
-              <a:tr h="420624">
+              <a:tr h="384048">
                 <a:tc>
                   <a:txBody>
                     <a:bodyPr wrap="square"/>
@@ -7798,14 +7798,14 @@
                     <a:p>
                       <a:pPr algn="l"/>
                       <a:r>
-                        <a:rPr sz="1200" b="0">
+                        <a:rPr sz="1150" b="0">
                           <a:solidFill>
                             <a:srgbClr val="333333"/>
                           </a:solidFill>
                           <a:latin typeface="Arial"/>
                           <a:ea typeface="微软雅黑"/>
                         </a:rPr>
-                        <a:t>负载 w1–w7</a:t>
+                        <a:t>速率型 w1–w4</a:t>
                       </a:r>
                     </a:p>
                   </a:txBody>
@@ -7822,14 +7822,14 @@
                     <a:p>
                       <a:pPr algn="ctr"/>
                       <a:r>
-                        <a:rPr sz="1200" b="0">
+                        <a:rPr sz="1150" b="0">
                           <a:solidFill>
                             <a:srgbClr val="333333"/>
                           </a:solidFill>
                           <a:latin typeface="Arial"/>
                           <a:ea typeface="微软雅黑"/>
                         </a:rPr>
-                        <a:t>w1 100 → w4 2000 pods/s（极限）；w5 突发、w6 Gang、w7 异构</a:t>
+                        <a:t>100 / 500 / 1000 / 2000 pods/s（1 万 / 5 万 / 10 万 / 20 万 Pod，w4 为极限）</a:t>
                       </a:r>
                     </a:p>
                   </a:txBody>
@@ -7840,7 +7840,7 @@
                   </a:tcPr>
                 </a:tc>
               </a:tr>
-              <a:tr h="420624">
+              <a:tr h="384048">
                 <a:tc>
                   <a:txBody>
                     <a:bodyPr wrap="square"/>
@@ -7848,14 +7848,14 @@
                     <a:p>
                       <a:pPr algn="l"/>
                       <a:r>
-                        <a:rPr sz="1200" b="0">
+                        <a:rPr sz="1150" b="0">
                           <a:solidFill>
                             <a:srgbClr val="333333"/>
                           </a:solidFill>
                           <a:latin typeface="Arial"/>
                           <a:ea typeface="微软雅黑"/>
                         </a:rPr>
-                        <a:t>实例 inst</a:t>
+                        <a:t>突发 w5</a:t>
                       </a:r>
                     </a:p>
                   </a:txBody>
@@ -7872,14 +7872,14 @@
                     <a:p>
                       <a:pPr algn="ctr"/>
                       <a:r>
-                        <a:rPr sz="1200" b="0">
+                        <a:rPr sz="1150" b="0">
                           <a:solidFill>
                             <a:srgbClr val="333333"/>
                           </a:solidFill>
                           <a:latin typeface="Arial"/>
                           <a:ea typeface="微软雅黑"/>
                         </a:rPr>
-                        <a:t>inst1 = 1 个实例；inst3 = 3 个实例</a:t>
+                        <a:t>0 → 2000 → 0 pods/s，5 万 Pod，考察涌入与退潮</a:t>
                       </a:r>
                     </a:p>
                   </a:txBody>
@@ -7890,7 +7890,7 @@
                   </a:tcPr>
                 </a:tc>
               </a:tr>
-              <a:tr h="420624">
+              <a:tr h="384048">
                 <a:tc>
                   <a:txBody>
                     <a:bodyPr wrap="square"/>
@@ -7898,14 +7898,14 @@
                     <a:p>
                       <a:pPr algn="l"/>
                       <a:r>
-                        <a:rPr sz="1200" b="0">
+                        <a:rPr sz="1150" b="0">
                           <a:solidFill>
                             <a:srgbClr val="333333"/>
                           </a:solidFill>
                           <a:latin typeface="Arial"/>
                           <a:ea typeface="微软雅黑"/>
                         </a:rPr>
-                        <a:t>对比组</a:t>
+                        <a:t>Gang w6</a:t>
                       </a:r>
                     </a:p>
                   </a:txBody>
@@ -7922,14 +7922,14 @@
                     <a:p>
                       <a:pPr algn="ctr"/>
                       <a:r>
-                        <a:rPr sz="1200" b="0">
+                        <a:rPr sz="1150" b="0">
                           <a:solidFill>
                             <a:srgbClr val="333333"/>
                           </a:solidFill>
                           <a:latin typeface="Arial"/>
                           <a:ea typeface="微软雅黑"/>
                         </a:rPr>
-                        <a:t>a=ENO  b=Gödel  c=kube-scheduler  d=Volcano  e=Koordinator</a:t>
+                        <a:t>200 组/s × 5 Pod，共 5 万 Pod，组内必须同时调度</a:t>
                       </a:r>
                     </a:p>
                   </a:txBody>
@@ -7940,7 +7940,7 @@
                   </a:tcPr>
                 </a:tc>
               </a:tr>
-              <a:tr h="420624">
+              <a:tr h="384048">
                 <a:tc>
                   <a:txBody>
                     <a:bodyPr wrap="square"/>
@@ -7948,14 +7948,14 @@
                     <a:p>
                       <a:pPr algn="l"/>
                       <a:r>
-                        <a:rPr sz="1200" b="0">
+                        <a:rPr sz="1150" b="0">
                           <a:solidFill>
                             <a:srgbClr val="333333"/>
                           </a:solidFill>
                           <a:latin typeface="Arial"/>
                           <a:ea typeface="微软雅黑"/>
                         </a:rPr>
-                        <a:t>公平性</a:t>
+                        <a:t>异构 w7</a:t>
                       </a:r>
                     </a:p>
                   </a:txBody>
@@ -7972,7 +7972,157 @@
                     <a:p>
                       <a:pPr algn="ctr"/>
                       <a:r>
-                        <a:rPr sz="1200" b="0">
+                        <a:rPr sz="1150" b="0">
+                          <a:solidFill>
+                            <a:srgbClr val="333333"/>
+                          </a:solidFill>
+                          <a:latin typeface="Arial"/>
+                          <a:ea typeface="微软雅黑"/>
+                        </a:rPr>
+                        <a:t>500 pods/s，5 万 Pod，节点资源规格异构</a:t>
+                      </a:r>
+                    </a:p>
+                  </a:txBody>
+                  <a:tcPr marL="54864" marR="54864" marT="18288" marB="18288" anchor="ctr">
+                    <a:solidFill>
+                      <a:srgbClr val="FFFFFF"/>
+                    </a:solidFill>
+                  </a:tcPr>
+                </a:tc>
+              </a:tr>
+              <a:tr h="384048">
+                <a:tc>
+                  <a:txBody>
+                    <a:bodyPr wrap="square"/>
+                    <a:lstStyle/>
+                    <a:p>
+                      <a:pPr algn="l"/>
+                      <a:r>
+                        <a:rPr sz="1150" b="0">
+                          <a:solidFill>
+                            <a:srgbClr val="333333"/>
+                          </a:solidFill>
+                          <a:latin typeface="Arial"/>
+                          <a:ea typeface="微软雅黑"/>
+                        </a:rPr>
+                        <a:t>实例 inst</a:t>
+                      </a:r>
+                    </a:p>
+                  </a:txBody>
+                  <a:tcPr marL="54864" marR="54864" marT="18288" marB="18288" anchor="ctr">
+                    <a:solidFill>
+                      <a:srgbClr val="F5F7FA"/>
+                    </a:solidFill>
+                  </a:tcPr>
+                </a:tc>
+                <a:tc>
+                  <a:txBody>
+                    <a:bodyPr wrap="square"/>
+                    <a:lstStyle/>
+                    <a:p>
+                      <a:pPr algn="ctr"/>
+                      <a:r>
+                        <a:rPr sz="1150" b="0">
+                          <a:solidFill>
+                            <a:srgbClr val="333333"/>
+                          </a:solidFill>
+                          <a:latin typeface="Arial"/>
+                          <a:ea typeface="微软雅黑"/>
+                        </a:rPr>
+                        <a:t>inst1 = 1 个实例；inst3 = 3 个实例</a:t>
+                      </a:r>
+                    </a:p>
+                  </a:txBody>
+                  <a:tcPr marL="54864" marR="54864" marT="18288" marB="18288" anchor="ctr">
+                    <a:solidFill>
+                      <a:srgbClr val="F5F7FA"/>
+                    </a:solidFill>
+                  </a:tcPr>
+                </a:tc>
+              </a:tr>
+              <a:tr h="384048">
+                <a:tc>
+                  <a:txBody>
+                    <a:bodyPr wrap="square"/>
+                    <a:lstStyle/>
+                    <a:p>
+                      <a:pPr algn="l"/>
+                      <a:r>
+                        <a:rPr sz="1150" b="0">
+                          <a:solidFill>
+                            <a:srgbClr val="333333"/>
+                          </a:solidFill>
+                          <a:latin typeface="Arial"/>
+                          <a:ea typeface="微软雅黑"/>
+                        </a:rPr>
+                        <a:t>对比组</a:t>
+                      </a:r>
+                    </a:p>
+                  </a:txBody>
+                  <a:tcPr marL="54864" marR="54864" marT="18288" marB="18288" anchor="ctr">
+                    <a:solidFill>
+                      <a:srgbClr val="FFFFFF"/>
+                    </a:solidFill>
+                  </a:tcPr>
+                </a:tc>
+                <a:tc>
+                  <a:txBody>
+                    <a:bodyPr wrap="square"/>
+                    <a:lstStyle/>
+                    <a:p>
+                      <a:pPr algn="ctr"/>
+                      <a:r>
+                        <a:rPr sz="1150" b="0">
+                          <a:solidFill>
+                            <a:srgbClr val="333333"/>
+                          </a:solidFill>
+                          <a:latin typeface="Arial"/>
+                          <a:ea typeface="微软雅黑"/>
+                        </a:rPr>
+                        <a:t>a=ENO  b=Gödel  c=kube-scheduler  d=Volcano  e=Koordinator</a:t>
+                      </a:r>
+                    </a:p>
+                  </a:txBody>
+                  <a:tcPr marL="54864" marR="54864" marT="18288" marB="18288" anchor="ctr">
+                    <a:solidFill>
+                      <a:srgbClr val="FFFFFF"/>
+                    </a:solidFill>
+                  </a:tcPr>
+                </a:tc>
+              </a:tr>
+              <a:tr h="384048">
+                <a:tc>
+                  <a:txBody>
+                    <a:bodyPr wrap="square"/>
+                    <a:lstStyle/>
+                    <a:p>
+                      <a:pPr algn="l"/>
+                      <a:r>
+                        <a:rPr sz="1150" b="0">
+                          <a:solidFill>
+                            <a:srgbClr val="333333"/>
+                          </a:solidFill>
+                          <a:latin typeface="Arial"/>
+                          <a:ea typeface="微软雅黑"/>
+                        </a:rPr>
+                        <a:t>公平性</a:t>
+                      </a:r>
+                    </a:p>
+                  </a:txBody>
+                  <a:tcPr marL="54864" marR="54864" marT="18288" marB="18288" anchor="ctr">
+                    <a:solidFill>
+                      <a:srgbClr val="F5F7FA"/>
+                    </a:solidFill>
+                  </a:tcPr>
+                </a:tc>
+                <a:tc>
+                  <a:txBody>
+                    <a:bodyPr wrap="square"/>
+                    <a:lstStyle/>
+                    <a:p>
+                      <a:pPr algn="ctr"/>
+                      <a:r>
+                        <a:rPr sz="1150" b="0">
                           <a:solidFill>
                             <a:srgbClr val="333333"/>
                           </a:solidFill>
@@ -7985,7 +8135,7 @@
                   </a:txBody>
                   <a:tcPr marL="54864" marR="54864" marT="18288" marB="18288" anchor="ctr">
                     <a:solidFill>
-                      <a:srgbClr val="FFFFFF"/>
+                      <a:srgbClr val="F5F7FA"/>
                     </a:solidFill>
                   </a:tcPr>
                 </a:tc>
@@ -8002,8 +8152,8 @@
         </p:nvSpPr>
         <p:spPr>
           <a:xfrm>
-            <a:off x="566928" y="5074920"/>
-            <a:ext cx="10972800" cy="960120"/>
+            <a:off x="566928" y="5431536"/>
+            <a:ext cx="10972800" cy="914400"/>
           </a:xfrm>
           <a:prstGeom prst="rect">
             <a:avLst/>
@@ -14147,7 +14297,7 @@
         <p:spPr>
           <a:xfrm>
             <a:off x="566928" y="5074920"/>
-            <a:ext cx="10972800" cy="960120"/>
+            <a:ext cx="10972800" cy="914400"/>
           </a:xfrm>
           <a:prstGeom prst="rect">
             <a:avLst/>
@@ -14890,7 +15040,7 @@
         <p:spPr>
           <a:xfrm>
             <a:off x="566928" y="5074920"/>
-            <a:ext cx="10972800" cy="960120"/>
+            <a:ext cx="10972800" cy="914400"/>
           </a:xfrm>
           <a:prstGeom prst="rect">
             <a:avLst/>
@@ -18650,7 +18800,7 @@
         <p:spPr>
           <a:xfrm>
             <a:off x="566928" y="5074920"/>
-            <a:ext cx="10972800" cy="960120"/>
+            <a:ext cx="10972800" cy="914400"/>
           </a:xfrm>
           <a:prstGeom prst="rect">
             <a:avLst/>
@@ -19505,7 +19655,7 @@
         <p:spPr>
           <a:xfrm>
             <a:off x="566928" y="5074920"/>
-            <a:ext cx="10972800" cy="960120"/>
+            <a:ext cx="10972800" cy="914400"/>
           </a:xfrm>
           <a:prstGeom prst="rect">
             <a:avLst/>
@@ -20642,7 +20792,7 @@
         <p:spPr>
           <a:xfrm>
             <a:off x="566928" y="5074920"/>
-            <a:ext cx="10972800" cy="960120"/>
+            <a:ext cx="10972800" cy="914400"/>
           </a:xfrm>
           <a:prstGeom prst="rect">
             <a:avLst/>
@@ -21764,7 +21914,7 @@
         <p:spPr>
           <a:xfrm>
             <a:off x="566928" y="5074920"/>
-            <a:ext cx="10972800" cy="960120"/>
+            <a:ext cx="10972800" cy="914400"/>
           </a:xfrm>
           <a:prstGeom prst="rect">
             <a:avLst/>

--- a/docs/thesis/defense/答辩PPT-基于etcd的分布式Kubernetes调度器.pptx
+++ b/docs/thesis/defense/答辩PPT-基于etcd的分布式Kubernetes调度器.pptx
@@ -743,7 +743,7 @@
           <a:lstStyle/>
           <a:p>
             <a:r>
-              <a:t>先讲编码：s 是规模档位，w 是负载强度，inst 是实例数，后面场景名都由这三段拼成。再说公平性：KWOK 仿真、kind 集群内运行；五个调度器 Pod 规格相同，客户端 QPS 与 Burst 都是 10000；每场景三次取中位数，共 144 次 run。主评估取 s2/w2、s2/w3、s3/w2、s3/w3 四个场景，其余作为扩展与复杂负载场景。观测栈是 Prometheus 每 15 秒抓取，recording rules 统一各组指标名。</a:t>
+              <a:t>先讲编码：s 是规模档位，w 是负载强度，inst 是实例数，后面场景名都由这三段拼成。再说公平性：KWOK 仿真、kind 集群内运行；五个调度器 Pod 规格相同，各自的 client-go QPS 与 Burst 都放到 10000，避免把客户端限流误读成调度能力差异；每场景三次取中位数，共 144 次 run。主评估取 s2/w2、s2/w3、s3/w2、s3/w3 四个场景，其余作为扩展与复杂负载场景。观测栈是 Prometheus 每 15 秒抓取，recording rules 统一各组指标名。</a:t>
             </a:r>
           </a:p>
         </p:txBody>
@@ -8129,7 +8129,7 @@
                           <a:latin typeface="Arial"/>
                           <a:ea typeface="微软雅黑"/>
                         </a:rPr>
-                        <a:t>每 Pod 2C/4G；客户端 QPS=Burst=10000</a:t>
+                        <a:t>每 Pod 2C/4G；各调度器 client-go QPS=Burst=10000（不设限流瓶颈）</a:t>
                       </a:r>
                     </a:p>
                   </a:txBody>

--- a/docs/thesis/defense/答辩PPT-基于etcd的分布式Kubernetes调度器.pptx
+++ b/docs/thesis/defense/答辩PPT-基于etcd的分布式Kubernetes调度器.pptx
@@ -8454,156 +8454,16 @@
           </a:p>
         </p:txBody>
       </p:sp>
-      <p:pic>
-        <p:nvPicPr>
-          <p:cNvPr id="6" name="Picture 5" descr="fig6-throughput-s2-w3.png"/>
-          <p:cNvPicPr>
-            <a:picLocks noChangeAspect="1"/>
-          </p:cNvPicPr>
-          <p:nvPr/>
-        </p:nvPicPr>
-        <p:blipFill>
-          <a:blip r:embed="rId2"/>
-          <a:stretch>
-            <a:fillRect/>
-          </a:stretch>
-        </p:blipFill>
-        <p:spPr>
-          <a:xfrm>
-            <a:off x="568493" y="1755647"/>
-            <a:ext cx="7357788" cy="3017520"/>
-          </a:xfrm>
-          <a:prstGeom prst="rect">
-            <a:avLst/>
-          </a:prstGeom>
-        </p:spPr>
-      </p:pic>
-      <p:sp>
-        <p:nvSpPr>
-          <p:cNvPr id="7" name="TextBox 6"/>
-          <p:cNvSpPr txBox="1"/>
-          <p:nvPr/>
-        </p:nvSpPr>
-        <p:spPr>
-          <a:xfrm>
-            <a:off x="566928" y="4809744"/>
-            <a:ext cx="7360920" cy="237744"/>
-          </a:xfrm>
-          <a:prstGeom prst="rect">
-            <a:avLst/>
-          </a:prstGeom>
-          <a:noFill/>
-        </p:spPr>
-        <p:txBody>
-          <a:bodyPr wrap="square" anchor="t" lIns="0" rIns="0" tIns="0" bIns="0">
-            <a:spAutoFit/>
-          </a:bodyPr>
-          <a:lstStyle/>
-          <a:p>
-            <a:pPr algn="ctr"/>
-            <a:r>
-              <a:rPr sz="950" b="0">
-                <a:solidFill>
-                  <a:srgbClr val="566474"/>
-                </a:solidFill>
-                <a:latin typeface="Arial"/>
-                <a:ea typeface="微软雅黑"/>
-              </a:rPr>
-              <a:t>s2/w3 吞吐时序：爬升—平台—归零</a:t>
-            </a:r>
-          </a:p>
-        </p:txBody>
-      </p:sp>
-      <p:sp>
-        <p:nvSpPr>
-          <p:cNvPr id="8" name="TextBox 7"/>
-          <p:cNvSpPr txBox="1"/>
-          <p:nvPr/>
-        </p:nvSpPr>
-        <p:spPr>
-          <a:xfrm>
-            <a:off x="8138160" y="1828800"/>
-            <a:ext cx="3474720" cy="2834640"/>
-          </a:xfrm>
-          <a:prstGeom prst="rect">
-            <a:avLst/>
-          </a:prstGeom>
-          <a:noFill/>
-        </p:spPr>
-        <p:txBody>
-          <a:bodyPr wrap="square" anchor="t" lIns="0" rIns="0" tIns="0" bIns="0">
-            <a:spAutoFit/>
-          </a:bodyPr>
-          <a:lstStyle/>
-          <a:p>
-            <a:pPr algn="l">
-              <a:lnSpc>
-                <a:spcPct val="115000"/>
-              </a:lnSpc>
-            </a:pPr>
-            <a:r>
-              <a:rPr sz="1100" b="0">
-                <a:solidFill>
-                  <a:srgbClr val="333333"/>
-                </a:solidFill>
-                <a:latin typeface="Arial"/>
-                <a:ea typeface="微软雅黑"/>
-              </a:rPr>
-              <a:t>▪  三段结构：爬升—平台—归零，均值被尾段零值稀释</a:t>
-            </a:r>
-          </a:p>
-          <a:p>
-            <a:pPr algn="l">
-              <a:lnSpc>
-                <a:spcPct val="115000"/>
-              </a:lnSpc>
-              <a:spcBef>
-                <a:spcPts val="800"/>
-              </a:spcBef>
-            </a:pPr>
-            <a:r>
-              <a:rPr sz="1100" b="0">
-                <a:solidFill>
-                  <a:srgbClr val="333333"/>
-                </a:solidFill>
-                <a:latin typeface="Arial"/>
-                <a:ea typeface="微软雅黑"/>
-              </a:rPr>
-              <a:t>▪  时序类：3 run 逐点中位数，再去首尾各 2 点（约 30 s）</a:t>
-            </a:r>
-          </a:p>
-          <a:p>
-            <a:pPr algn="l">
-              <a:lnSpc>
-                <a:spcPct val="115000"/>
-              </a:lnSpc>
-              <a:spcBef>
-                <a:spcPts val="800"/>
-              </a:spcBef>
-            </a:pPr>
-            <a:r>
-              <a:rPr sz="1100" b="0">
-                <a:solidFill>
-                  <a:srgbClr val="333333"/>
-                </a:solidFill>
-                <a:latin typeface="Arial"/>
-                <a:ea typeface="微软雅黑"/>
-              </a:rPr>
-              <a:t>▪  c/d/e 单实例过载存在幸存者偏差，只与 a/b 比吞吐、队列、成功率</a:t>
-            </a:r>
-          </a:p>
-        </p:txBody>
-      </p:sp>
-      <p:sp>
-        <p:nvSpPr>
-          <p:cNvPr id="9" name="Rounded Rectangle 8"/>
+      <p:sp>
+        <p:nvSpPr>
+          <p:cNvPr id="6" name="Rounded Rectangle 5"/>
           <p:cNvSpPr/>
           <p:nvPr/>
         </p:nvSpPr>
         <p:spPr>
           <a:xfrm>
-            <a:off x="566928" y="4956048"/>
-            <a:ext cx="1744980" cy="841248"/>
+            <a:off x="566928" y="1783080"/>
+            <a:ext cx="3517391" cy="1325880"/>
           </a:xfrm>
           <a:prstGeom prst="roundRect">
             <a:avLst/>
@@ -8642,14 +8502,58 @@
       </p:sp>
       <p:sp>
         <p:nvSpPr>
-          <p:cNvPr id="10" name="TextBox 9"/>
+          <p:cNvPr id="7" name="Rectangle 6"/>
+          <p:cNvSpPr/>
+          <p:nvPr/>
+        </p:nvSpPr>
+        <p:spPr>
+          <a:xfrm>
+            <a:off x="566928" y="1783080"/>
+            <a:ext cx="50292" cy="1325880"/>
+          </a:xfrm>
+          <a:prstGeom prst="rect">
+            <a:avLst/>
+          </a:prstGeom>
+          <a:solidFill>
+            <a:srgbClr val="1F5C99"/>
+          </a:solidFill>
+          <a:ln>
+            <a:noFill/>
+          </a:ln>
+          <a:effectLst/>
+        </p:spPr>
+        <p:style>
+          <a:lnRef idx="1">
+            <a:schemeClr val="accent1"/>
+          </a:lnRef>
+          <a:fillRef idx="3">
+            <a:schemeClr val="accent1"/>
+          </a:fillRef>
+          <a:effectRef idx="2">
+            <a:schemeClr val="accent1"/>
+          </a:effectRef>
+          <a:fontRef idx="minor">
+            <a:schemeClr val="lt1"/>
+          </a:fontRef>
+        </p:style>
+        <p:txBody>
+          <a:bodyPr rtlCol="0" anchor="ctr"/>
+          <a:lstStyle/>
+          <a:p>
+            <a:pPr algn="ctr"/>
+          </a:p>
+        </p:txBody>
+      </p:sp>
+      <p:sp>
+        <p:nvSpPr>
+          <p:cNvPr id="8" name="TextBox 7"/>
           <p:cNvSpPr txBox="1"/>
           <p:nvPr/>
         </p:nvSpPr>
         <p:spPr>
           <a:xfrm>
-            <a:off x="658368" y="5029200"/>
-            <a:ext cx="1598676" cy="713232"/>
+            <a:off x="731520" y="1911095"/>
+            <a:ext cx="3243072" cy="1143000"/>
           </a:xfrm>
           <a:prstGeom prst="rect">
             <a:avLst/>
@@ -8664,7 +8568,7 @@
           <a:p>
             <a:pPr algn="l"/>
             <a:r>
-              <a:rPr sz="950" b="1">
+              <a:rPr sz="1400" b="1">
                 <a:solidFill>
                   <a:srgbClr val="0B2A4A"/>
                 </a:solidFill>
@@ -8677,35 +8581,35 @@
           <a:p>
             <a:pPr algn="l">
               <a:lnSpc>
-                <a:spcPct val="105000"/>
+                <a:spcPct val="110000"/>
               </a:lnSpc>
               <a:spcBef>
-                <a:spcPts val="100"/>
+                <a:spcPts val="400"/>
               </a:spcBef>
             </a:pPr>
             <a:r>
-              <a:rPr sz="800" b="0">
-                <a:solidFill>
-                  <a:srgbClr val="566474"/>
+              <a:rPr sz="1150" b="0">
+                <a:solidFill>
+                  <a:srgbClr val="333333"/>
                 </a:solidFill>
                 <a:latin typeface="Arial"/>
                 <a:ea typeface="微软雅黑"/>
               </a:rPr>
-              <a:t>名义工作量 ÷ 完成时间（主口径）</a:t>
-            </a:r>
-          </a:p>
-        </p:txBody>
-      </p:sp>
-      <p:sp>
-        <p:nvSpPr>
-          <p:cNvPr id="11" name="Rounded Rectangle 10"/>
+              <a:t>名义总工作量 ÷ 总完成时间；本文吞吐主口径，与采样窗口长度无关</a:t>
+            </a:r>
+          </a:p>
+        </p:txBody>
+      </p:sp>
+      <p:sp>
+        <p:nvSpPr>
+          <p:cNvPr id="9" name="Rounded Rectangle 8"/>
           <p:cNvSpPr/>
           <p:nvPr/>
         </p:nvSpPr>
         <p:spPr>
           <a:xfrm>
-            <a:off x="2430780" y="4956048"/>
-            <a:ext cx="1744980" cy="841248"/>
+            <a:off x="4340351" y="1783080"/>
+            <a:ext cx="3517391" cy="1325880"/>
           </a:xfrm>
           <a:prstGeom prst="roundRect">
             <a:avLst/>
@@ -8744,14 +8648,58 @@
       </p:sp>
       <p:sp>
         <p:nvSpPr>
-          <p:cNvPr id="12" name="TextBox 11"/>
+          <p:cNvPr id="10" name="Rectangle 9"/>
+          <p:cNvSpPr/>
+          <p:nvPr/>
+        </p:nvSpPr>
+        <p:spPr>
+          <a:xfrm>
+            <a:off x="4340351" y="1783080"/>
+            <a:ext cx="50292" cy="1325880"/>
+          </a:xfrm>
+          <a:prstGeom prst="rect">
+            <a:avLst/>
+          </a:prstGeom>
+          <a:solidFill>
+            <a:srgbClr val="1F5C99"/>
+          </a:solidFill>
+          <a:ln>
+            <a:noFill/>
+          </a:ln>
+          <a:effectLst/>
+        </p:spPr>
+        <p:style>
+          <a:lnRef idx="1">
+            <a:schemeClr val="accent1"/>
+          </a:lnRef>
+          <a:fillRef idx="3">
+            <a:schemeClr val="accent1"/>
+          </a:fillRef>
+          <a:effectRef idx="2">
+            <a:schemeClr val="accent1"/>
+          </a:effectRef>
+          <a:fontRef idx="minor">
+            <a:schemeClr val="lt1"/>
+          </a:fontRef>
+        </p:style>
+        <p:txBody>
+          <a:bodyPr rtlCol="0" anchor="ctr"/>
+          <a:lstStyle/>
+          <a:p>
+            <a:pPr algn="ctr"/>
+          </a:p>
+        </p:txBody>
+      </p:sp>
+      <p:sp>
+        <p:nvSpPr>
+          <p:cNvPr id="11" name="TextBox 10"/>
           <p:cNvSpPr txBox="1"/>
           <p:nvPr/>
         </p:nvSpPr>
         <p:spPr>
           <a:xfrm>
-            <a:off x="2522220" y="5029200"/>
-            <a:ext cx="1598676" cy="713232"/>
+            <a:off x="4504943" y="1911095"/>
+            <a:ext cx="3243072" cy="1143000"/>
           </a:xfrm>
           <a:prstGeom prst="rect">
             <a:avLst/>
@@ -8766,7 +8714,7 @@
           <a:p>
             <a:pPr algn="l"/>
             <a:r>
-              <a:rPr sz="950" b="1">
+              <a:rPr sz="1400" b="1">
                 <a:solidFill>
                   <a:srgbClr val="0B2A4A"/>
                 </a:solidFill>
@@ -8779,35 +8727,35 @@
           <a:p>
             <a:pPr algn="l">
               <a:lnSpc>
-                <a:spcPct val="105000"/>
+                <a:spcPct val="110000"/>
               </a:lnSpc>
               <a:spcBef>
-                <a:spcPts val="100"/>
+                <a:spcPts val="400"/>
               </a:spcBef>
             </a:pPr>
             <a:r>
-              <a:rPr sz="800" b="0">
-                <a:solidFill>
-                  <a:srgbClr val="566474"/>
+              <a:rPr sz="1150" b="0">
+                <a:solidFill>
+                  <a:srgbClr val="333333"/>
                 </a:solidFill>
                 <a:latin typeface="Arial"/>
                 <a:ea typeface="微软雅黑"/>
               </a:rPr>
-              <a:t>过程中的最高瞬时调度速率</a:t>
-            </a:r>
-          </a:p>
-        </p:txBody>
-      </p:sp>
-      <p:sp>
-        <p:nvSpPr>
-          <p:cNvPr id="13" name="Rounded Rectangle 12"/>
+              <a:t>处理过程中的最高瞬时调度速率，反映瞬时处理能力上限</a:t>
+            </a:r>
+          </a:p>
+        </p:txBody>
+      </p:sp>
+      <p:sp>
+        <p:nvSpPr>
+          <p:cNvPr id="12" name="Rounded Rectangle 11"/>
           <p:cNvSpPr/>
           <p:nvPr/>
         </p:nvSpPr>
         <p:spPr>
           <a:xfrm>
-            <a:off x="4294632" y="4956048"/>
-            <a:ext cx="1744980" cy="841248"/>
+            <a:off x="8113775" y="1783080"/>
+            <a:ext cx="3517391" cy="1325880"/>
           </a:xfrm>
           <a:prstGeom prst="roundRect">
             <a:avLst/>
@@ -8846,14 +8794,58 @@
       </p:sp>
       <p:sp>
         <p:nvSpPr>
+          <p:cNvPr id="13" name="Rectangle 12"/>
+          <p:cNvSpPr/>
+          <p:nvPr/>
+        </p:nvSpPr>
+        <p:spPr>
+          <a:xfrm>
+            <a:off x="8113775" y="1783080"/>
+            <a:ext cx="50292" cy="1325880"/>
+          </a:xfrm>
+          <a:prstGeom prst="rect">
+            <a:avLst/>
+          </a:prstGeom>
+          <a:solidFill>
+            <a:srgbClr val="1F5C99"/>
+          </a:solidFill>
+          <a:ln>
+            <a:noFill/>
+          </a:ln>
+          <a:effectLst/>
+        </p:spPr>
+        <p:style>
+          <a:lnRef idx="1">
+            <a:schemeClr val="accent1"/>
+          </a:lnRef>
+          <a:fillRef idx="3">
+            <a:schemeClr val="accent1"/>
+          </a:fillRef>
+          <a:effectRef idx="2">
+            <a:schemeClr val="accent1"/>
+          </a:effectRef>
+          <a:fontRef idx="minor">
+            <a:schemeClr val="lt1"/>
+          </a:fontRef>
+        </p:style>
+        <p:txBody>
+          <a:bodyPr rtlCol="0" anchor="ctr"/>
+          <a:lstStyle/>
+          <a:p>
+            <a:pPr algn="ctr"/>
+          </a:p>
+        </p:txBody>
+      </p:sp>
+      <p:sp>
+        <p:nvSpPr>
           <p:cNvPr id="14" name="TextBox 13"/>
           <p:cNvSpPr txBox="1"/>
           <p:nvPr/>
         </p:nvSpPr>
         <p:spPr>
           <a:xfrm>
-            <a:off x="4386071" y="5029200"/>
-            <a:ext cx="1598676" cy="713232"/>
+            <a:off x="8278367" y="1911095"/>
+            <a:ext cx="3243072" cy="1143000"/>
           </a:xfrm>
           <a:prstGeom prst="rect">
             <a:avLst/>
@@ -8868,34 +8860,34 @@
           <a:p>
             <a:pPr algn="l"/>
             <a:r>
-              <a:rPr sz="950" b="1">
+              <a:rPr sz="1400" b="1">
                 <a:solidFill>
                   <a:srgbClr val="0B2A4A"/>
                 </a:solidFill>
                 <a:latin typeface="Arial"/>
                 <a:ea typeface="微软雅黑"/>
               </a:rPr>
-              <a:t>P90 / P99 延迟 s</a:t>
+              <a:t>P90 / P99 调度延迟</a:t>
             </a:r>
           </a:p>
           <a:p>
             <a:pPr algn="l">
               <a:lnSpc>
-                <a:spcPct val="105000"/>
+                <a:spcPct val="110000"/>
               </a:lnSpc>
               <a:spcBef>
-                <a:spcPts val="100"/>
+                <a:spcPts val="400"/>
               </a:spcBef>
             </a:pPr>
             <a:r>
-              <a:rPr sz="800" b="0">
-                <a:solidFill>
-                  <a:srgbClr val="566474"/>
+              <a:rPr sz="1150" b="0">
+                <a:solidFill>
+                  <a:srgbClr val="333333"/>
                 </a:solidFill>
                 <a:latin typeface="Arial"/>
                 <a:ea typeface="微软雅黑"/>
               </a:rPr>
-              <a:t>入 activeQ 到 Bind 完成</a:t>
+              <a:t>从 Pod 进入 activeQ 到完成 Bind 的分位延迟</a:t>
             </a:r>
           </a:p>
         </p:txBody>
@@ -8908,8 +8900,8 @@
         </p:nvSpPr>
         <p:spPr>
           <a:xfrm>
-            <a:off x="6158483" y="4956048"/>
-            <a:ext cx="1744980" cy="841248"/>
+            <a:off x="566928" y="3364991"/>
+            <a:ext cx="3517391" cy="1325880"/>
           </a:xfrm>
           <a:prstGeom prst="roundRect">
             <a:avLst/>
@@ -8948,14 +8940,58 @@
       </p:sp>
       <p:sp>
         <p:nvSpPr>
-          <p:cNvPr id="16" name="TextBox 15"/>
+          <p:cNvPr id="16" name="Rectangle 15"/>
+          <p:cNvSpPr/>
+          <p:nvPr/>
+        </p:nvSpPr>
+        <p:spPr>
+          <a:xfrm>
+            <a:off x="566928" y="3364991"/>
+            <a:ext cx="50292" cy="1325880"/>
+          </a:xfrm>
+          <a:prstGeom prst="rect">
+            <a:avLst/>
+          </a:prstGeom>
+          <a:solidFill>
+            <a:srgbClr val="1F5C99"/>
+          </a:solidFill>
+          <a:ln>
+            <a:noFill/>
+          </a:ln>
+          <a:effectLst/>
+        </p:spPr>
+        <p:style>
+          <a:lnRef idx="1">
+            <a:schemeClr val="accent1"/>
+          </a:lnRef>
+          <a:fillRef idx="3">
+            <a:schemeClr val="accent1"/>
+          </a:fillRef>
+          <a:effectRef idx="2">
+            <a:schemeClr val="accent1"/>
+          </a:effectRef>
+          <a:fontRef idx="minor">
+            <a:schemeClr val="lt1"/>
+          </a:fontRef>
+        </p:style>
+        <p:txBody>
+          <a:bodyPr rtlCol="0" anchor="ctr"/>
+          <a:lstStyle/>
+          <a:p>
+            <a:pPr algn="ctr"/>
+          </a:p>
+        </p:txBody>
+      </p:sp>
+      <p:sp>
+        <p:nvSpPr>
+          <p:cNvPr id="17" name="TextBox 16"/>
           <p:cNvSpPr txBox="1"/>
           <p:nvPr/>
         </p:nvSpPr>
         <p:spPr>
           <a:xfrm>
-            <a:off x="6249923" y="5029200"/>
-            <a:ext cx="1598676" cy="713232"/>
+            <a:off x="731520" y="3493008"/>
+            <a:ext cx="3243072" cy="1143000"/>
           </a:xfrm>
           <a:prstGeom prst="rect">
             <a:avLst/>
@@ -8970,48 +9006,48 @@
           <a:p>
             <a:pPr algn="l"/>
             <a:r>
-              <a:rPr sz="950" b="1">
+              <a:rPr sz="1400" b="1">
                 <a:solidFill>
                   <a:srgbClr val="0B2A4A"/>
                 </a:solidFill>
                 <a:latin typeface="Arial"/>
                 <a:ea typeface="微软雅黑"/>
               </a:rPr>
-              <a:t>Pod E2E P99 s</a:t>
+              <a:t>Pod E2E 延迟 P99</a:t>
             </a:r>
           </a:p>
           <a:p>
             <a:pPr algn="l">
               <a:lnSpc>
-                <a:spcPct val="105000"/>
+                <a:spcPct val="110000"/>
               </a:lnSpc>
               <a:spcBef>
-                <a:spcPts val="100"/>
+                <a:spcPts val="400"/>
               </a:spcBef>
             </a:pPr>
             <a:r>
-              <a:rPr sz="800" b="0">
-                <a:solidFill>
-                  <a:srgbClr val="566474"/>
+              <a:rPr sz="1150" b="0">
+                <a:solidFill>
+                  <a:srgbClr val="333333"/>
                 </a:solidFill>
                 <a:latin typeface="Arial"/>
                 <a:ea typeface="微软雅黑"/>
               </a:rPr>
-              <a:t>Dispatcher 观察到绑定完成</a:t>
-            </a:r>
-          </a:p>
-        </p:txBody>
-      </p:sp>
-      <p:sp>
-        <p:nvSpPr>
-          <p:cNvPr id="17" name="Rounded Rectangle 16"/>
+              <a:t>从 Dispatcher 观察到 Pod 起，直至绑定完成</a:t>
+            </a:r>
+          </a:p>
+        </p:txBody>
+      </p:sp>
+      <p:sp>
+        <p:nvSpPr>
+          <p:cNvPr id="18" name="Rounded Rectangle 17"/>
           <p:cNvSpPr/>
           <p:nvPr/>
         </p:nvSpPr>
         <p:spPr>
           <a:xfrm>
-            <a:off x="8022335" y="4956048"/>
-            <a:ext cx="1744980" cy="841248"/>
+            <a:off x="4340351" y="3364991"/>
+            <a:ext cx="3517391" cy="1325880"/>
           </a:xfrm>
           <a:prstGeom prst="roundRect">
             <a:avLst/>
@@ -9050,14 +9086,58 @@
       </p:sp>
       <p:sp>
         <p:nvSpPr>
-          <p:cNvPr id="18" name="TextBox 17"/>
+          <p:cNvPr id="19" name="Rectangle 18"/>
+          <p:cNvSpPr/>
+          <p:nvPr/>
+        </p:nvSpPr>
+        <p:spPr>
+          <a:xfrm>
+            <a:off x="4340351" y="3364991"/>
+            <a:ext cx="50292" cy="1325880"/>
+          </a:xfrm>
+          <a:prstGeom prst="rect">
+            <a:avLst/>
+          </a:prstGeom>
+          <a:solidFill>
+            <a:srgbClr val="1F5C99"/>
+          </a:solidFill>
+          <a:ln>
+            <a:noFill/>
+          </a:ln>
+          <a:effectLst/>
+        </p:spPr>
+        <p:style>
+          <a:lnRef idx="1">
+            <a:schemeClr val="accent1"/>
+          </a:lnRef>
+          <a:fillRef idx="3">
+            <a:schemeClr val="accent1"/>
+          </a:fillRef>
+          <a:effectRef idx="2">
+            <a:schemeClr val="accent1"/>
+          </a:effectRef>
+          <a:fontRef idx="minor">
+            <a:schemeClr val="lt1"/>
+          </a:fontRef>
+        </p:style>
+        <p:txBody>
+          <a:bodyPr rtlCol="0" anchor="ctr"/>
+          <a:lstStyle/>
+          <a:p>
+            <a:pPr algn="ctr"/>
+          </a:p>
+        </p:txBody>
+      </p:sp>
+      <p:sp>
+        <p:nvSpPr>
+          <p:cNvPr id="20" name="TextBox 19"/>
           <p:cNvSpPr txBox="1"/>
           <p:nvPr/>
         </p:nvSpPr>
         <p:spPr>
           <a:xfrm>
-            <a:off x="8113775" y="5029200"/>
-            <a:ext cx="1598676" cy="713232"/>
+            <a:off x="4504943" y="3493008"/>
+            <a:ext cx="3243072" cy="1143000"/>
           </a:xfrm>
           <a:prstGeom prst="rect">
             <a:avLst/>
@@ -9072,7 +9152,7 @@
           <a:p>
             <a:pPr algn="l"/>
             <a:r>
-              <a:rPr sz="950" b="1">
+              <a:rPr sz="1400" b="1">
                 <a:solidFill>
                   <a:srgbClr val="0B2A4A"/>
                 </a:solidFill>
@@ -9085,35 +9165,35 @@
           <a:p>
             <a:pPr algn="l">
               <a:lnSpc>
-                <a:spcPct val="105000"/>
+                <a:spcPct val="110000"/>
               </a:lnSpc>
               <a:spcBef>
-                <a:spcPts val="100"/>
+                <a:spcPts val="400"/>
               </a:spcBef>
             </a:pPr>
             <a:r>
-              <a:rPr sz="800" b="0">
-                <a:solidFill>
-                  <a:srgbClr val="566474"/>
+              <a:rPr sz="1150" b="0">
+                <a:solidFill>
+                  <a:srgbClr val="333333"/>
                 </a:solidFill>
                 <a:latin typeface="Arial"/>
                 <a:ea typeface="微软雅黑"/>
               </a:rPr>
-              <a:t>Bind 成功 / Bind 尝试</a:t>
-            </a:r>
-          </a:p>
-        </p:txBody>
-      </p:sp>
-      <p:sp>
-        <p:nvSpPr>
-          <p:cNvPr id="19" name="Rounded Rectangle 18"/>
+              <a:t>Bind 成功次数 ÷ Bind 尝试次数，直接对应正确性</a:t>
+            </a:r>
+          </a:p>
+        </p:txBody>
+      </p:sp>
+      <p:sp>
+        <p:nvSpPr>
+          <p:cNvPr id="21" name="Rounded Rectangle 20"/>
           <p:cNvSpPr/>
           <p:nvPr/>
         </p:nvSpPr>
         <p:spPr>
           <a:xfrm>
-            <a:off x="9886188" y="4956048"/>
-            <a:ext cx="1744980" cy="841248"/>
+            <a:off x="8113775" y="3364991"/>
+            <a:ext cx="3517391" cy="1325880"/>
           </a:xfrm>
           <a:prstGeom prst="roundRect">
             <a:avLst/>
@@ -9152,14 +9232,58 @@
       </p:sp>
       <p:sp>
         <p:nvSpPr>
-          <p:cNvPr id="20" name="TextBox 19"/>
+          <p:cNvPr id="22" name="Rectangle 21"/>
+          <p:cNvSpPr/>
+          <p:nvPr/>
+        </p:nvSpPr>
+        <p:spPr>
+          <a:xfrm>
+            <a:off x="8113775" y="3364991"/>
+            <a:ext cx="50292" cy="1325880"/>
+          </a:xfrm>
+          <a:prstGeom prst="rect">
+            <a:avLst/>
+          </a:prstGeom>
+          <a:solidFill>
+            <a:srgbClr val="1F5C99"/>
+          </a:solidFill>
+          <a:ln>
+            <a:noFill/>
+          </a:ln>
+          <a:effectLst/>
+        </p:spPr>
+        <p:style>
+          <a:lnRef idx="1">
+            <a:schemeClr val="accent1"/>
+          </a:lnRef>
+          <a:fillRef idx="3">
+            <a:schemeClr val="accent1"/>
+          </a:fillRef>
+          <a:effectRef idx="2">
+            <a:schemeClr val="accent1"/>
+          </a:effectRef>
+          <a:fontRef idx="minor">
+            <a:schemeClr val="lt1"/>
+          </a:fontRef>
+        </p:style>
+        <p:txBody>
+          <a:bodyPr rtlCol="0" anchor="ctr"/>
+          <a:lstStyle/>
+          <a:p>
+            <a:pPr algn="ctr"/>
+          </a:p>
+        </p:txBody>
+      </p:sp>
+      <p:sp>
+        <p:nvSpPr>
+          <p:cNvPr id="23" name="TextBox 22"/>
           <p:cNvSpPr txBox="1"/>
           <p:nvPr/>
         </p:nvSpPr>
         <p:spPr>
           <a:xfrm>
-            <a:off x="9977627" y="5029200"/>
-            <a:ext cx="1598676" cy="713232"/>
+            <a:off x="8278367" y="3493008"/>
+            <a:ext cx="3243072" cy="1143000"/>
           </a:xfrm>
           <a:prstGeom prst="rect">
             <a:avLst/>
@@ -9174,7 +9298,7 @@
           <a:p>
             <a:pPr algn="l"/>
             <a:r>
-              <a:rPr sz="950" b="1">
+              <a:rPr sz="1400" b="1">
                 <a:solidFill>
                   <a:srgbClr val="0B2A4A"/>
                 </a:solidFill>
@@ -9187,28 +9311,98 @@
           <a:p>
             <a:pPr algn="l">
               <a:lnSpc>
-                <a:spcPct val="105000"/>
+                <a:spcPct val="110000"/>
               </a:lnSpc>
               <a:spcBef>
-                <a:spcPts val="100"/>
+                <a:spcPts val="400"/>
               </a:spcBef>
             </a:pPr>
             <a:r>
-              <a:rPr sz="800" b="0">
-                <a:solidFill>
-                  <a:srgbClr val="566474"/>
+              <a:rPr sz="1150" b="0">
+                <a:solidFill>
+                  <a:srgbClr val="333333"/>
                 </a:solidFill>
                 <a:latin typeface="Arial"/>
                 <a:ea typeface="微软雅黑"/>
               </a:rPr>
-              <a:t>pending_pods 最大值</a:t>
-            </a:r>
-          </a:p>
-        </p:txBody>
-      </p:sp>
-      <p:sp>
-        <p:nvSpPr>
-          <p:cNvPr id="21" name="TextBox 20"/>
+              <a:t>pending_pods 在处理过程中的最大值，反映消化能力</a:t>
+            </a:r>
+          </a:p>
+        </p:txBody>
+      </p:sp>
+      <p:sp>
+        <p:nvSpPr>
+          <p:cNvPr id="24" name="TextBox 23"/>
+          <p:cNvSpPr txBox="1"/>
+          <p:nvPr/>
+        </p:nvSpPr>
+        <p:spPr>
+          <a:xfrm>
+            <a:off x="566928" y="4846320"/>
+            <a:ext cx="11064240" cy="777240"/>
+          </a:xfrm>
+          <a:prstGeom prst="rect">
+            <a:avLst/>
+          </a:prstGeom>
+          <a:noFill/>
+        </p:spPr>
+        <p:txBody>
+          <a:bodyPr wrap="square" anchor="t" lIns="0" rIns="0" tIns="0" bIns="0">
+            <a:spAutoFit/>
+          </a:bodyPr>
+          <a:lstStyle/>
+          <a:p>
+            <a:pPr algn="l"/>
+            <a:r>
+              <a:rPr sz="1200" b="0">
+                <a:solidFill>
+                  <a:srgbClr val="566474"/>
+                </a:solidFill>
+                <a:latin typeface="Arial"/>
+                <a:ea typeface="微软雅黑"/>
+              </a:rPr>
+              <a:t>▪  三段结构：爬升—平台—归零，均值被尾段零值稀释</a:t>
+            </a:r>
+          </a:p>
+          <a:p>
+            <a:pPr algn="l">
+              <a:spcBef>
+                <a:spcPts val="300"/>
+              </a:spcBef>
+            </a:pPr>
+            <a:r>
+              <a:rPr sz="1200" b="0">
+                <a:solidFill>
+                  <a:srgbClr val="566474"/>
+                </a:solidFill>
+                <a:latin typeface="Arial"/>
+                <a:ea typeface="微软雅黑"/>
+              </a:rPr>
+              <a:t>▪  时序类：3 run 逐点中位数，再去首尾各 2 点（约 30 s）</a:t>
+            </a:r>
+          </a:p>
+          <a:p>
+            <a:pPr algn="l">
+              <a:spcBef>
+                <a:spcPts val="300"/>
+              </a:spcBef>
+            </a:pPr>
+            <a:r>
+              <a:rPr sz="1200" b="0">
+                <a:solidFill>
+                  <a:srgbClr val="566474"/>
+                </a:solidFill>
+                <a:latin typeface="Arial"/>
+                <a:ea typeface="微软雅黑"/>
+              </a:rPr>
+              <a:t>▪  c/d/e 单实例过载存在幸存者偏差，只与 a/b 比吞吐、队列、成功率</a:t>
+            </a:r>
+          </a:p>
+        </p:txBody>
+      </p:sp>
+      <p:sp>
+        <p:nvSpPr>
+          <p:cNvPr id="25" name="TextBox 24"/>
           <p:cNvSpPr txBox="1"/>
           <p:nvPr/>
         </p:nvSpPr>
@@ -9244,7 +9438,7 @@
       </p:sp>
       <p:sp>
         <p:nvSpPr>
-          <p:cNvPr id="22" name="TextBox 21"/>
+          <p:cNvPr id="26" name="TextBox 25"/>
           <p:cNvSpPr txBox="1"/>
           <p:nvPr/>
         </p:nvSpPr>

--- a/docs/thesis/defense/答辩PPT-基于etcd的分布式Kubernetes调度器.pptx
+++ b/docs/thesis/defense/答辩PPT-基于etcd的分布式Kubernetes调度器.pptx
@@ -8372,98 +8372,14 @@
       </p:sp>
       <p:sp>
         <p:nvSpPr>
-          <p:cNvPr id="4" name="Rectangle 3"/>
+          <p:cNvPr id="4" name="Rounded Rectangle 3"/>
           <p:cNvSpPr/>
           <p:nvPr/>
         </p:nvSpPr>
         <p:spPr>
           <a:xfrm>
-            <a:off x="566928" y="1298448"/>
-            <a:ext cx="32004" cy="365760"/>
-          </a:xfrm>
-          <a:prstGeom prst="rect">
-            <a:avLst/>
-          </a:prstGeom>
-          <a:solidFill>
-            <a:srgbClr val="1F5C99"/>
-          </a:solidFill>
-          <a:ln>
-            <a:noFill/>
-          </a:ln>
-          <a:effectLst/>
-        </p:spPr>
-        <p:style>
-          <a:lnRef idx="1">
-            <a:schemeClr val="accent1"/>
-          </a:lnRef>
-          <a:fillRef idx="3">
-            <a:schemeClr val="accent1"/>
-          </a:fillRef>
-          <a:effectRef idx="2">
-            <a:schemeClr val="accent1"/>
-          </a:effectRef>
-          <a:fontRef idx="minor">
-            <a:schemeClr val="lt1"/>
-          </a:fontRef>
-        </p:style>
-        <p:txBody>
-          <a:bodyPr rtlCol="0" anchor="ctr"/>
-          <a:lstStyle/>
-          <a:p>
-            <a:pPr algn="ctr"/>
-          </a:p>
-        </p:txBody>
-      </p:sp>
-      <p:sp>
-        <p:nvSpPr>
-          <p:cNvPr id="5" name="TextBox 4"/>
-          <p:cNvSpPr txBox="1"/>
-          <p:nvPr/>
-        </p:nvSpPr>
-        <p:spPr>
-          <a:xfrm>
-            <a:off x="713232" y="1261872"/>
-            <a:ext cx="10744200" cy="438912"/>
-          </a:xfrm>
-          <a:prstGeom prst="rect">
-            <a:avLst/>
-          </a:prstGeom>
-          <a:noFill/>
-        </p:spPr>
-        <p:txBody>
-          <a:bodyPr wrap="square" anchor="ctr" lIns="0" rIns="0" tIns="0" bIns="0">
-            <a:spAutoFit/>
-          </a:bodyPr>
-          <a:lstStyle/>
-          <a:p>
-            <a:pPr algn="l">
-              <a:lnSpc>
-                <a:spcPct val="110000"/>
-              </a:lnSpc>
-            </a:pPr>
-            <a:r>
-              <a:rPr sz="1800" b="1">
-                <a:solidFill>
-                  <a:srgbClr val="1F5C99"/>
-                </a:solidFill>
-                <a:latin typeface="Arial"/>
-                <a:ea typeface="微软雅黑"/>
-              </a:rPr>
-              <a:t>吞吐时序会“归零”，只有“总工作量 ÷ 总完成时间”跨场景可比</a:t>
-            </a:r>
-          </a:p>
-        </p:txBody>
-      </p:sp>
-      <p:sp>
-        <p:nvSpPr>
-          <p:cNvPr id="6" name="Rounded Rectangle 5"/>
-          <p:cNvSpPr/>
-          <p:nvPr/>
-        </p:nvSpPr>
-        <p:spPr>
-          <a:xfrm>
-            <a:off x="566928" y="1783080"/>
-            <a:ext cx="3517391" cy="1325880"/>
+            <a:off x="566928" y="1417320"/>
+            <a:ext cx="3517391" cy="1481328"/>
           </a:xfrm>
           <a:prstGeom prst="roundRect">
             <a:avLst/>
@@ -8502,14 +8418,14 @@
       </p:sp>
       <p:sp>
         <p:nvSpPr>
-          <p:cNvPr id="7" name="Rectangle 6"/>
+          <p:cNvPr id="5" name="Rectangle 4"/>
           <p:cNvSpPr/>
           <p:nvPr/>
         </p:nvSpPr>
         <p:spPr>
           <a:xfrm>
-            <a:off x="566928" y="1783080"/>
-            <a:ext cx="50292" cy="1325880"/>
+            <a:off x="566928" y="1417320"/>
+            <a:ext cx="50292" cy="1481328"/>
           </a:xfrm>
           <a:prstGeom prst="rect">
             <a:avLst/>
@@ -8546,14 +8462,14 @@
       </p:sp>
       <p:sp>
         <p:nvSpPr>
-          <p:cNvPr id="8" name="TextBox 7"/>
+          <p:cNvPr id="6" name="TextBox 5"/>
           <p:cNvSpPr txBox="1"/>
           <p:nvPr/>
         </p:nvSpPr>
         <p:spPr>
           <a:xfrm>
-            <a:off x="731520" y="1911095"/>
-            <a:ext cx="3243072" cy="1143000"/>
+            <a:off x="731520" y="1545336"/>
+            <a:ext cx="3243072" cy="1298448"/>
           </a:xfrm>
           <a:prstGeom prst="rect">
             <a:avLst/>
@@ -8602,14 +8518,14 @@
       </p:sp>
       <p:sp>
         <p:nvSpPr>
-          <p:cNvPr id="9" name="Rounded Rectangle 8"/>
+          <p:cNvPr id="7" name="Rounded Rectangle 6"/>
           <p:cNvSpPr/>
           <p:nvPr/>
         </p:nvSpPr>
         <p:spPr>
           <a:xfrm>
-            <a:off x="4340351" y="1783080"/>
-            <a:ext cx="3517391" cy="1325880"/>
+            <a:off x="4340351" y="1417320"/>
+            <a:ext cx="3517391" cy="1481328"/>
           </a:xfrm>
           <a:prstGeom prst="roundRect">
             <a:avLst/>
@@ -8648,14 +8564,14 @@
       </p:sp>
       <p:sp>
         <p:nvSpPr>
-          <p:cNvPr id="10" name="Rectangle 9"/>
+          <p:cNvPr id="8" name="Rectangle 7"/>
           <p:cNvSpPr/>
           <p:nvPr/>
         </p:nvSpPr>
         <p:spPr>
           <a:xfrm>
-            <a:off x="4340351" y="1783080"/>
-            <a:ext cx="50292" cy="1325880"/>
+            <a:off x="4340351" y="1417320"/>
+            <a:ext cx="50292" cy="1481328"/>
           </a:xfrm>
           <a:prstGeom prst="rect">
             <a:avLst/>
@@ -8692,14 +8608,14 @@
       </p:sp>
       <p:sp>
         <p:nvSpPr>
-          <p:cNvPr id="11" name="TextBox 10"/>
+          <p:cNvPr id="9" name="TextBox 8"/>
           <p:cNvSpPr txBox="1"/>
           <p:nvPr/>
         </p:nvSpPr>
         <p:spPr>
           <a:xfrm>
-            <a:off x="4504943" y="1911095"/>
-            <a:ext cx="3243072" cy="1143000"/>
+            <a:off x="4504943" y="1545336"/>
+            <a:ext cx="3243072" cy="1298448"/>
           </a:xfrm>
           <a:prstGeom prst="rect">
             <a:avLst/>
@@ -8748,14 +8664,14 @@
       </p:sp>
       <p:sp>
         <p:nvSpPr>
-          <p:cNvPr id="12" name="Rounded Rectangle 11"/>
+          <p:cNvPr id="10" name="Rounded Rectangle 9"/>
           <p:cNvSpPr/>
           <p:nvPr/>
         </p:nvSpPr>
         <p:spPr>
           <a:xfrm>
-            <a:off x="8113775" y="1783080"/>
-            <a:ext cx="3517391" cy="1325880"/>
+            <a:off x="8113775" y="1417320"/>
+            <a:ext cx="3517391" cy="1481328"/>
           </a:xfrm>
           <a:prstGeom prst="roundRect">
             <a:avLst/>
@@ -8794,14 +8710,14 @@
       </p:sp>
       <p:sp>
         <p:nvSpPr>
-          <p:cNvPr id="13" name="Rectangle 12"/>
+          <p:cNvPr id="11" name="Rectangle 10"/>
           <p:cNvSpPr/>
           <p:nvPr/>
         </p:nvSpPr>
         <p:spPr>
           <a:xfrm>
-            <a:off x="8113775" y="1783080"/>
-            <a:ext cx="50292" cy="1325880"/>
+            <a:off x="8113775" y="1417320"/>
+            <a:ext cx="50292" cy="1481328"/>
           </a:xfrm>
           <a:prstGeom prst="rect">
             <a:avLst/>
@@ -8838,14 +8754,14 @@
       </p:sp>
       <p:sp>
         <p:nvSpPr>
-          <p:cNvPr id="14" name="TextBox 13"/>
+          <p:cNvPr id="12" name="TextBox 11"/>
           <p:cNvSpPr txBox="1"/>
           <p:nvPr/>
         </p:nvSpPr>
         <p:spPr>
           <a:xfrm>
-            <a:off x="8278367" y="1911095"/>
-            <a:ext cx="3243072" cy="1143000"/>
+            <a:off x="8278367" y="1545336"/>
+            <a:ext cx="3243072" cy="1298448"/>
           </a:xfrm>
           <a:prstGeom prst="rect">
             <a:avLst/>
@@ -8894,14 +8810,14 @@
       </p:sp>
       <p:sp>
         <p:nvSpPr>
-          <p:cNvPr id="15" name="Rounded Rectangle 14"/>
+          <p:cNvPr id="13" name="Rounded Rectangle 12"/>
           <p:cNvSpPr/>
           <p:nvPr/>
         </p:nvSpPr>
         <p:spPr>
           <a:xfrm>
-            <a:off x="566928" y="3364991"/>
-            <a:ext cx="3517391" cy="1325880"/>
+            <a:off x="566928" y="3154680"/>
+            <a:ext cx="3517391" cy="1481328"/>
           </a:xfrm>
           <a:prstGeom prst="roundRect">
             <a:avLst/>
@@ -8940,14 +8856,14 @@
       </p:sp>
       <p:sp>
         <p:nvSpPr>
-          <p:cNvPr id="16" name="Rectangle 15"/>
+          <p:cNvPr id="14" name="Rectangle 13"/>
           <p:cNvSpPr/>
           <p:nvPr/>
         </p:nvSpPr>
         <p:spPr>
           <a:xfrm>
-            <a:off x="566928" y="3364991"/>
-            <a:ext cx="50292" cy="1325880"/>
+            <a:off x="566928" y="3154680"/>
+            <a:ext cx="50292" cy="1481328"/>
           </a:xfrm>
           <a:prstGeom prst="rect">
             <a:avLst/>
@@ -8984,14 +8900,14 @@
       </p:sp>
       <p:sp>
         <p:nvSpPr>
-          <p:cNvPr id="17" name="TextBox 16"/>
+          <p:cNvPr id="15" name="TextBox 14"/>
           <p:cNvSpPr txBox="1"/>
           <p:nvPr/>
         </p:nvSpPr>
         <p:spPr>
           <a:xfrm>
-            <a:off x="731520" y="3493008"/>
-            <a:ext cx="3243072" cy="1143000"/>
+            <a:off x="731520" y="3282696"/>
+            <a:ext cx="3243072" cy="1298448"/>
           </a:xfrm>
           <a:prstGeom prst="rect">
             <a:avLst/>
@@ -9040,14 +8956,14 @@
       </p:sp>
       <p:sp>
         <p:nvSpPr>
-          <p:cNvPr id="18" name="Rounded Rectangle 17"/>
+          <p:cNvPr id="16" name="Rounded Rectangle 15"/>
           <p:cNvSpPr/>
           <p:nvPr/>
         </p:nvSpPr>
         <p:spPr>
           <a:xfrm>
-            <a:off x="4340351" y="3364991"/>
-            <a:ext cx="3517391" cy="1325880"/>
+            <a:off x="4340351" y="3154680"/>
+            <a:ext cx="3517391" cy="1481328"/>
           </a:xfrm>
           <a:prstGeom prst="roundRect">
             <a:avLst/>
@@ -9086,14 +9002,14 @@
       </p:sp>
       <p:sp>
         <p:nvSpPr>
-          <p:cNvPr id="19" name="Rectangle 18"/>
+          <p:cNvPr id="17" name="Rectangle 16"/>
           <p:cNvSpPr/>
           <p:nvPr/>
         </p:nvSpPr>
         <p:spPr>
           <a:xfrm>
-            <a:off x="4340351" y="3364991"/>
-            <a:ext cx="50292" cy="1325880"/>
+            <a:off x="4340351" y="3154680"/>
+            <a:ext cx="50292" cy="1481328"/>
           </a:xfrm>
           <a:prstGeom prst="rect">
             <a:avLst/>
@@ -9130,14 +9046,14 @@
       </p:sp>
       <p:sp>
         <p:nvSpPr>
-          <p:cNvPr id="20" name="TextBox 19"/>
+          <p:cNvPr id="18" name="TextBox 17"/>
           <p:cNvSpPr txBox="1"/>
           <p:nvPr/>
         </p:nvSpPr>
         <p:spPr>
           <a:xfrm>
-            <a:off x="4504943" y="3493008"/>
-            <a:ext cx="3243072" cy="1143000"/>
+            <a:off x="4504943" y="3282696"/>
+            <a:ext cx="3243072" cy="1298448"/>
           </a:xfrm>
           <a:prstGeom prst="rect">
             <a:avLst/>
@@ -9186,14 +9102,14 @@
       </p:sp>
       <p:sp>
         <p:nvSpPr>
-          <p:cNvPr id="21" name="Rounded Rectangle 20"/>
+          <p:cNvPr id="19" name="Rounded Rectangle 18"/>
           <p:cNvSpPr/>
           <p:nvPr/>
         </p:nvSpPr>
         <p:spPr>
           <a:xfrm>
-            <a:off x="8113775" y="3364991"/>
-            <a:ext cx="3517391" cy="1325880"/>
+            <a:off x="8113775" y="3154680"/>
+            <a:ext cx="3517391" cy="1481328"/>
           </a:xfrm>
           <a:prstGeom prst="roundRect">
             <a:avLst/>
@@ -9232,14 +9148,14 @@
       </p:sp>
       <p:sp>
         <p:nvSpPr>
-          <p:cNvPr id="22" name="Rectangle 21"/>
+          <p:cNvPr id="20" name="Rectangle 19"/>
           <p:cNvSpPr/>
           <p:nvPr/>
         </p:nvSpPr>
         <p:spPr>
           <a:xfrm>
-            <a:off x="8113775" y="3364991"/>
-            <a:ext cx="50292" cy="1325880"/>
+            <a:off x="8113775" y="3154680"/>
+            <a:ext cx="50292" cy="1481328"/>
           </a:xfrm>
           <a:prstGeom prst="rect">
             <a:avLst/>
@@ -9276,14 +9192,14 @@
       </p:sp>
       <p:sp>
         <p:nvSpPr>
-          <p:cNvPr id="23" name="TextBox 22"/>
+          <p:cNvPr id="21" name="TextBox 20"/>
           <p:cNvSpPr txBox="1"/>
           <p:nvPr/>
         </p:nvSpPr>
         <p:spPr>
           <a:xfrm>
-            <a:off x="8278367" y="3493008"/>
-            <a:ext cx="3243072" cy="1143000"/>
+            <a:off x="8278367" y="3282696"/>
+            <a:ext cx="3243072" cy="1298448"/>
           </a:xfrm>
           <a:prstGeom prst="rect">
             <a:avLst/>
@@ -9332,13 +9248,13 @@
       </p:sp>
       <p:sp>
         <p:nvSpPr>
-          <p:cNvPr id="24" name="TextBox 23"/>
+          <p:cNvPr id="22" name="TextBox 21"/>
           <p:cNvSpPr txBox="1"/>
           <p:nvPr/>
         </p:nvSpPr>
         <p:spPr>
           <a:xfrm>
-            <a:off x="566928" y="4846320"/>
+            <a:off x="566928" y="4956048"/>
             <a:ext cx="11064240" cy="777240"/>
           </a:xfrm>
           <a:prstGeom prst="rect">
@@ -9402,7 +9318,7 @@
       </p:sp>
       <p:sp>
         <p:nvSpPr>
-          <p:cNvPr id="25" name="TextBox 24"/>
+          <p:cNvPr id="23" name="TextBox 22"/>
           <p:cNvSpPr txBox="1"/>
           <p:nvPr/>
         </p:nvSpPr>
@@ -9438,7 +9354,7 @@
       </p:sp>
       <p:sp>
         <p:nvSpPr>
-          <p:cNvPr id="26" name="TextBox 25"/>
+          <p:cNvPr id="24" name="TextBox 23"/>
           <p:cNvSpPr txBox="1"/>
           <p:nvPr/>
         </p:nvSpPr>

--- a/docs/thesis/defense/答辩PPT-基于etcd的分布式Kubernetes调度器.pptx
+++ b/docs/thesis/defense/答辩PPT-基于etcd的分布式Kubernetes调度器.pptx
@@ -9319,42 +9319,6 @@
       <p:sp>
         <p:nvSpPr>
           <p:cNvPr id="23" name="TextBox 22"/>
-          <p:cNvSpPr txBox="1"/>
-          <p:nvPr/>
-        </p:nvSpPr>
-        <p:spPr>
-          <a:xfrm>
-            <a:off x="566928" y="6309360"/>
-            <a:ext cx="10104120" cy="201168"/>
-          </a:xfrm>
-          <a:prstGeom prst="rect">
-            <a:avLst/>
-          </a:prstGeom>
-          <a:noFill/>
-        </p:spPr>
-        <p:txBody>
-          <a:bodyPr wrap="square" anchor="t" lIns="0" rIns="0" tIns="0" bIns="0">
-            <a:spAutoFit/>
-          </a:bodyPr>
-          <a:lstStyle/>
-          <a:p>
-            <a:pPr algn="l"/>
-            <a:r>
-              <a:rPr sz="850" b="0">
-                <a:solidFill>
-                  <a:srgbClr val="566474"/>
-                </a:solidFill>
-                <a:latin typeface="Arial"/>
-                <a:ea typeface="微软雅黑"/>
-              </a:rPr>
-              <a:t>编码：s1–s4 = 100 / 1000 / 5000 / 10000 节点；w1–w7 = 负载强度（w2 500、w3 1000、w4 2000 pods/s 极限、w5 突发、w6 Gang、w7 异构）；inst3 = 3 实例</a:t>
-            </a:r>
-          </a:p>
-        </p:txBody>
-      </p:sp>
-      <p:sp>
-        <p:nvSpPr>
-          <p:cNvPr id="24" name="TextBox 23"/>
           <p:cNvSpPr txBox="1"/>
           <p:nvPr/>
         </p:nvSpPr>

--- a/docs/thesis/defense/答辩PPT-基于etcd的分布式Kubernetes调度器.pptx
+++ b/docs/thesis/defense/答辩PPT-基于etcd的分布式Kubernetes调度器.pptx
@@ -813,7 +813,7 @@
           <a:lstStyle/>
           <a:p>
             <a:r>
-              <a:t>这一页是方法学核心。吞吐时序是爬升、平台、归零三段，直接取平均会被尾段零值稀释，稀释程度还取决于跑多久，跨调度器就不可比，所以主口径是总工作量除以总完成时间。时序类先对三条 run 逐点取中位数，再剔首尾各两点。c、d、e 是单实例，过载时 Pod 没进直方图，存在幸存者偏差，只做定性说明。所以跨调度器我只用吞吐、队列堆积与绑定成功率做整体比较，延迟只在 ENO 与 Gödel 之间比。这三条口径是后面所有数字可比的前提；口径不同，数字就不能直接并列。</a:t>
+              <a:t>这一页是方法学核心。吞吐时序是爬升、平台、归零三段，直接取平均会被尾段零值稀释，稀释程度还取决于跑多久，跨调度器就不可比，所以主口径是总工作量除以总完成时间。时序处理三步：每个场景跑三次，按相对时间对齐后逐时间点取中位数；剔掉首尾各两个采样点，也就是约 30 秒的预热与冷却；剩下的序列上取分位数，P90、P99 用线性插值算。c、d、e 是单实例，过载时 Pod 没进直方图，存在幸存者偏差，只做定性说明。所以跨调度器我只用吞吐、队列堆积与绑定成功率做整体比较，延迟只在 ENO 与 Gödel 之间比。这三条口径是后面所有数字可比的前提；口径不同，数字就不能直接并列。</a:t>
             </a:r>
           </a:p>
         </p:txBody>
@@ -9277,7 +9277,7 @@
                 <a:latin typeface="Arial"/>
                 <a:ea typeface="微软雅黑"/>
               </a:rPr>
-              <a:t>▪  三段结构：爬升—平台—归零，均值被尾段零值稀释</a:t>
+              <a:t>▪  每场景 3 次 run：按相对时间对齐，逐时间点取中位数，得一条中位时序（离散度取半 IQR）</a:t>
             </a:r>
           </a:p>
           <a:p>
@@ -9294,7 +9294,7 @@
                 <a:latin typeface="Arial"/>
                 <a:ea typeface="微软雅黑"/>
               </a:rPr>
-              <a:t>▪  时序类：3 run 逐点中位数，再去首尾各 2 点（约 30 s）</a:t>
+              <a:t>▪  剔除首尾各 2 个采样点（约 30 s 的 warmup / cooldown），再在剩余序列上取标量</a:t>
             </a:r>
           </a:p>
           <a:p>
@@ -9311,7 +9311,7 @@
                 <a:latin typeface="Arial"/>
                 <a:ea typeface="微软雅黑"/>
               </a:rPr>
-              <a:t>▪  c/d/e 单实例过载存在幸存者偏差，只与 a/b 比吞吐、队列、成功率</a:t>
+              <a:t>▪  P90 / P99 用线性插值计算；c/d/e 单实例过载存在幸存者偏差，只与 a/b 比吞吐、队列、成功率</a:t>
             </a:r>
           </a:p>
         </p:txBody>

--- a/docs/thesis/defense/答辩PPT-基于etcd的分布式Kubernetes调度器.pptx
+++ b/docs/thesis/defense/答辩PPT-基于etcd的分布式Kubernetes调度器.pptx
@@ -2633,7 +2633,7 @@
           <a:lstStyle/>
           <a:p>
             <a:r>
-              <a:t>左边是原形态，Binder 独立部署，决策完要把任务发过去；右边是本文形态，Binder 就在 Scheduler 进程里。这一刀去掉三段开销：事件传递、跨进程调用、序列化。我把它称为第一性来源。Binder 进进程之后，绑定与决策共享同一份缓存、同一个调度循环。</a:t>
+              <a:t>左边是原形态，Binder 独立部署，决策完要把任务发过去；右边是本文形态，Binder 就在 Scheduler 进程里。这一刀去掉三段开销：事件传递、跨进程调用、序列化。我把它称为第一性来源。</a:t>
             </a:r>
           </a:p>
         </p:txBody>
@@ -2703,7 +2703,7 @@
           <a:lstStyle/>
           <a:p>
             <a:r>
-              <a:t>难点在缓存。以前 Binder 在另一个进程，缓存要么复制要么重建。CacheAdapter 让进程内 Binder 直接拿到同一份 SchedulerCache 的对象引用，所以叫零拷贝。两边看到同一份状态，Layer 0 的校验才有同一个真相可依。零拷贝的收益，会在后面的扩展性实验里直接看到。</a:t>
+              <a:t>难点在缓存。以前 Binder 在另一个进程，缓存要么复制要么重建。CacheAdapter 让进程内 Binder 直接拿到同一份 SchedulerCache 的对象引用，所以叫零拷贝。两边看到同一份状态，Layer 0 的校验才有同一个真相可依。</a:t>
             </a:r>
           </a:p>
         </p:txBody>

--- a/docs/thesis/defense/答辩PPT-基于etcd的分布式Kubernetes调度器.pptx
+++ b/docs/thesis/defense/答辩PPT-基于etcd的分布式Kubernetes调度器.pptx
@@ -603,7 +603,7 @@
           <a:lstStyle/>
           <a:p>
             <a:r>
-              <a:t>四层是一条时间轴。Bind 前 Layer 0 校验归属注解，非本分区直接拒绝并回退。Bind 中 Layer 1 只处理 409、429、ServerTimeout 三类暂态错误：线性退避 100、200、300 毫秒，最多三次，其它错误立即上抛。失败后 Layer 2 异步清理残留注解，按失败计数决定本地重试还是上升。重试耗尽 Layer 3 用一次原子 patch 交回 Dispatcher 重分发。四层之间是衔接关系，不是四个独立补丁。</a:t>
+              <a:t>四层是一条时间轴。Bind 前 Layer 0 校验归属注解，非本分区直接拒绝并回退。Bind 中 Layer 1 只处理 409、429、ServerTimeout 三类暂态错误：线性退避 100、200、300 毫秒，最多三次，其它错误立即上抛。失败后 Layer 2 异步清理残留注解，按失败计数决定本地重试还是上升。重试耗尽 Layer 3 用一次原子 patch 交回 Dispatcher 重分发。</a:t>
             </a:r>
           </a:p>
         </p:txBody>
@@ -813,7 +813,7 @@
           <a:lstStyle/>
           <a:p>
             <a:r>
-              <a:t>这一页是方法学核心。吞吐时序是爬升、平台、归零三段，直接取平均会被尾段零值稀释，稀释程度还取决于跑多久，跨调度器就不可比，所以主口径是总工作量除以总完成时间。时序处理三步：每个场景跑三次，按相对时间对齐后逐时间点取中位数；剔掉首尾各两个采样点，也就是约 30 秒的预热与冷却；剩下的序列上取分位数，P90、P99 用线性插值算。c、d、e 是单实例，过载时 Pod 没进直方图，存在幸存者偏差，只做定性说明。所以跨调度器我只用吞吐、队列堆积与绑定成功率做整体比较，延迟只在 ENO 与 Gödel 之间比。这三条口径是后面所有数字可比的前提；口径不同，数字就不能直接并列。</a:t>
+              <a:t>这一页是方法学核心。吞吐时序是爬升、平台、归零三段，直接取平均会被尾段零值稀释，稀释程度还取决于跑多久，跨调度器就不可比，所以主口径是总工作量除以总完成时间。时序处理三步：每个场景跑三次，按相对时间对齐后逐时间点取中位数；剔掉首尾各两个采样点，也就是约 30 秒的预热与冷却；剩下的序列上取分位数，P90、P99 用线性插值算。队列堆积是个例外，取过程最大值；绑定成功率按三次比值取中位数。c、d、e 是单实例，过载时 Pod 没进直方图，存在幸存者偏差，只做定性说明。所以跨调度器我只用吞吐、队列堆积与绑定成功率做整体比较，延迟只在 ENO 与 Gödel 之间比。这三条口径是后面所有数字可比的前提；口径不同，数字就不能直接并列。</a:t>
             </a:r>
           </a:p>
         </p:txBody>
@@ -9277,7 +9277,7 @@
                 <a:latin typeface="Arial"/>
                 <a:ea typeface="微软雅黑"/>
               </a:rPr>
-              <a:t>▪  每场景 3 次 run：按相对时间对齐，逐时间点取中位数，得一条中位时序（离散度取半 IQR）</a:t>
+              <a:t>▪  有效吞吐：每次 run 单独算「总工作量 ÷ 完成时间」，再取 3 次中位数（不走时序聚合）</a:t>
             </a:r>
           </a:p>
           <a:p>
@@ -9294,7 +9294,7 @@
                 <a:latin typeface="Arial"/>
                 <a:ea typeface="微软雅黑"/>
               </a:rPr>
-              <a:t>▪  剔除首尾各 2 个采样点（约 30 s 的 warmup / cooldown），再在剩余序列上取标量</a:t>
+              <a:t>▪  其余时序指标：3 条 run 逐时间点取中位数（离散度半 IQR）→ 剔首尾各 2 点（约 30 s）→ 取标量，分位数线性插值</a:t>
             </a:r>
           </a:p>
           <a:p>
@@ -9311,7 +9311,7 @@
                 <a:latin typeface="Arial"/>
                 <a:ea typeface="微软雅黑"/>
               </a:rPr>
-              <a:t>▪  P90 / P99 用线性插值计算；c/d/e 单实例过载存在幸存者偏差，只与 a/b 比吞吐、队列、成功率</a:t>
+              <a:t>▪  队列堆积取过程最大值；c/d/e 单实例过载存在幸存者偏差，只与 a/b 比吞吐、队列、成功率</a:t>
             </a:r>
           </a:p>
         </p:txBody>

--- a/docs/thesis/defense/答辩PPT-基于etcd的分布式Kubernetes调度器.pptx
+++ b/docs/thesis/defense/答辩PPT-基于etcd的分布式Kubernetes调度器.pptx
@@ -9311,7 +9311,7 @@
                 <a:latin typeface="Arial"/>
                 <a:ea typeface="微软雅黑"/>
               </a:rPr>
-              <a:t>▪  队列堆积取过程最大值；c/d/e 单实例过载存在幸存者偏差，只与 a/b 比吞吐、队列、成功率</a:t>
+              <a:t>▪  队列堆积是例外：逐点中位聚合后取峰值、不做剔尾；c/d/e 过载存在幸存者偏差，只与 a/b 比吞吐、队列、成功率</a:t>
             </a:r>
           </a:p>
         </p:txBody>

--- a/docs/thesis/defense/答辩PPT-基于etcd的分布式Kubernetes调度器.pptx
+++ b/docs/thesis/defense/答辩PPT-基于etcd的分布式Kubernetes调度器.pptx
@@ -9294,7 +9294,7 @@
                 <a:latin typeface="Arial"/>
                 <a:ea typeface="微软雅黑"/>
               </a:rPr>
-              <a:t>▪  其余时序指标：3 条 run 逐时间点取中位数（离散度半 IQR）→ 剔首尾各 2 点（约 30 s）→ 取标量，分位数线性插值</a:t>
+              <a:t>▪  其余时序指标：3 条 run 逐点取中位（离散度半 IQR）→ 剔首尾各 2 点（约 30 s）→ 取中位数；分位数线性插值</a:t>
             </a:r>
           </a:p>
           <a:p>

--- a/docs/thesis/defense/答辩PPT-基于etcd的分布式Kubernetes调度器.pptx
+++ b/docs/thesis/defense/答辩PPT-基于etcd的分布式Kubernetes调度器.pptx
@@ -953,7 +953,7 @@
           <a:lstStyle/>
           <a:p>
             <a:r>
-              <a:t>第一场注入：s2/w2、三实例，第 30 秒把 10% 的节点、约 100 个，归属注解从 scheduler-0 改为 scheduler-1。NodeValidator 拦截 300 次，Dispatcher 回退 300 次，两条曲线重叠。拦截不等于丢弃：Pod 进回退队列被重分发，成功率仍是 1.00，总耗时 683 秒、只比基线多 3 秒。这组数字说明 Layer 0 只是把错误前置，不是把工作丢掉，代价几乎为零。拦截 300 次、回退 300 次，两边对得上，说明没有 Pod 被丢掉。</a:t>
+              <a:t>五组横向对比，结论是三档。第一档 ENO 与 Gödel，都是几百 pods/s；第二档 kube-scheduler；第三档 Volcano 与 Koordinator，只有约 48 和约 24 pods/s，几乎不随规模变化。主评估四场景里，ENO 比 kube-scheduler 高 1.8% 到 22.5%。唯一例外是 s1/w1 低负载低 7.2%，那个场景没饱和。柱状图按场景排序，第三档几乎是一条水平线，说明它们的瓶颈不在调度吞吐这一维。从 s1 到 s3，第一档的曲线始终压在最上面，第三档几乎不随规模变化。这个排序在 16 个场景上是一致的。</a:t>
             </a:r>
           </a:p>
         </p:txBody>
@@ -1023,7 +1023,7 @@
           <a:lstStyle/>
           <a:p>
             <a:r>
-              <a:t>第二场注入：第 10 秒杀掉 scheduler-0，停机 180 秒，实测中断 189 秒。被杀实例未完成的绑定只占 68/8407，即 0.81%；两个存活实例接管 8407 个 Pod，队列峰值 353 后回落到 2。累计绑定 49607/50000，断言仍全过。代价是 784 秒、比基线多 104 秒，是工作量重排的代价，不是数据损坏。对比基线是同一场景下的无故障运行，680 秒。队列在 353 之后回落到 2，说明积压是瞬时的。</a:t>
+              <a:t>和 Gödel 逐场景对比：16 个场景里 14 个领先，2 个持平，没有落后的，提升 2.0% 到 22.9%，平均 11.9%。优势最大的是高负载与多实例：s2/w3 高 22.9%，s3/w3 三实例高 21.7%。两个持平场景都没饱和，完成时间由注入速率决定。两个持平场景说明，未饱和时调度器再快也压不出更多吞吐。平均 11.9% 是 14 个领先场景提升幅度的均值。</a:t>
             </a:r>
           </a:p>
         </p:txBody>
@@ -1093,7 +1093,7 @@
           <a:lstStyle/>
           <a:p>
             <a:r>
-              <a:t>五组横向对比，结论是三档。第一档 ENO 与 Gödel，都是几百 pods/s；第二档 kube-scheduler；第三档 Volcano 与 Koordinator，只有约 48 和约 24 pods/s，几乎不随规模变化。主评估四场景里，ENO 比 kube-scheduler 高 1.8% 到 22.5%。唯一例外是 s1/w1 低负载低 7.2%，那个场景没饱和。柱状图按场景排序，第三档几乎是一条水平线，说明它们的瓶颈不在调度吞吐这一维。从 s1 到 s3，第一档的曲线始终压在最上面，第三档几乎不随规模变化。这个排序在 16 个场景上是一致的。</a:t>
+              <a:t>延迟这页。除 s2/w2 外，11 个非 Gang 场景 P99 都低于 Gödel，改善 0.3% 到 82.9%。最典型是 s2/w3，23.48 秒降到 4.00 秒；单实例 s3/w3 从 32.57 秒到 16.22 秒。Pod 端到端 P99 在 12 个非 Gang 场景也都不高于 Gödel。Gang 是反的，放到局限里展开。延迟单位是秒，纵轴用对数，便于跨量级比较。改善的下界 0.3% 出现在已经接近饱和的场景。</a:t>
             </a:r>
           </a:p>
         </p:txBody>
@@ -1163,7 +1163,7 @@
           <a:lstStyle/>
           <a:p>
             <a:r>
-              <a:t>和 Gödel 逐场景对比：16 个场景里 14 个领先，2 个持平，没有落后的，提升 2.0% 到 22.9%，平均 11.9%。优势最大的是高负载与多实例：s2/w3 高 22.9%，s3/w3 三实例高 21.7%。两个持平场景都没饱和，完成时间由注入速率决定。两个持平场景说明，未饱和时调度器再快也压不出更多吞吐。平均 11.9% 是 14 个领先场景提升幅度的均值。</a:t>
+              <a:t>这是全文最强的归因证据。同样把实例从 1 加到 3，两边延迟都降约 99%，这部分一样。差别在吞吐：ENO 从 297.6 到 349.7，提升 17.5%；Gödel 从 283.3 到 287.4，只提升 1.4%。同样多的并发能力，Gödel 的增量被独立 Binder 的串行绑定吸收掉了。延迟数量级下降说明瓶颈不在决策侧，而在绑定这一环的串行化。峰值吞吐两家都涨，但只有 ENO 把增量转化成了有效吞吐。</a:t>
             </a:r>
           </a:p>
         </p:txBody>
@@ -1233,7 +1233,7 @@
           <a:lstStyle/>
           <a:p>
             <a:r>
-              <a:t>延迟这页。除 s2/w2 外，11 个非 Gang 场景 P99 都低于 Gödel，改善 0.3% 到 82.9%。最典型是 s2/w3，23.48 秒降到 4.00 秒；单实例 s3/w3 从 32.57 秒到 16.22 秒。Pod 端到端 P99 在 12 个非 Gang 场景也都不高于 Gödel。Gang 是反的，放到局限里展开。延迟单位是秒，纵轴用对数，便于跨量级比较。改善的下界 0.3% 出现在已经接近饱和的场景。</a:t>
+              <a:t>两件事。第一，规模从 5000 到 10000、实例数不变，两边都退化：ENO -15.2%，Gödel -2.3%；但 ENO 仍领先，吞吐 296.7 对 280.9 高 5.6%，P99 0.19 对 0.28 秒低 33.4%，队列峰值 9 对 61。第二，复杂负载：极限 +9.3% 与 +16.0%，突发 +21.3% 与 +2.8%，异构 s3 高 21.2%、s4 持平。s4 的退化与固定三实例有关，这写在局限里。规模翻倍而实例不扩，本身就是一个更苛刻的设定，不能当作扩展上限。</a:t>
             </a:r>
           </a:p>
         </p:txBody>
@@ -1373,7 +1373,7 @@
           <a:lstStyle/>
           <a:p>
             <a:r>
-              <a:t>这是全文最强的归因证据。同样把实例从 1 加到 3，两边延迟都降约 99%，这部分一样。差别在吞吐：ENO 从 297.6 到 349.7，提升 17.5%；Gödel 从 283.3 到 287.4，只提升 1.4%。同样多的并发能力，Gödel 的增量被独立 Binder 的串行绑定吸收掉了。延迟数量级下降说明瓶颈不在决策侧，而在绑定这一环的串行化。峰值吞吐两家都涨，但只有 ENO 把增量转化成了有效吞吐。</a:t>
+              <a:t>把机制和指标对齐。进程内绑定去掉事件传递，对应 E2E 降低，三实例 0.45 对 0.93 秒；零拷贝让状态复用无同步延迟；关键是第三行，没有独立 Binder 的串行段，吞吐才能随实例扩展，+17.5% 对 +1.4%；第四行四层容错守住不变量。也要说明相关与归因的区别：峰值吞吐不是每个场景都领先。如果评委追问某个数字，备用页里有完整口径与原始目录。四行对应四个机制，每一项都有可复核的字段。</a:t>
             </a:r>
           </a:p>
         </p:txBody>
@@ -1443,7 +1443,7 @@
           <a:lstStyle/>
           <a:p>
             <a:r>
-              <a:t>两件事。第一，规模从 5000 到 10000、实例数不变，两边都退化：ENO -15.2%，Gödel -2.3%；但 ENO 仍领先，吞吐 296.7 对 280.9 高 5.6%，P99 0.19 对 0.28 秒低 33.4%，队列峰值 9 对 61。第二，复杂负载：极限 +9.3% 与 +16.0%，突发 +21.3% 与 +2.8%，异构 s3 高 21.2%、s4 持平。s4 的退化与固定三实例有关，这写在局限里。规模翻倍而实例不扩，本身就是一个更苛刻的设定，不能当作扩展上限。</a:t>
+              <a:t>第一场注入：s2/w2、三实例，第 30 秒把 10% 的节点、约 100 个，归属注解从 scheduler-0 改为 scheduler-1。NodeValidator 拦截 300 次，Dispatcher 回退 300 次，两条曲线重叠。拦截不等于丢弃：Pod 进回退队列被重分发，成功率仍是 1.00，总耗时 683 秒、只比基线多 3 秒。这组数字说明 Layer 0 只是把错误前置，不是把工作丢掉，代价几乎为零。拦截 300 次、回退 300 次，两边对得上，说明没有 Pod 被丢掉。</a:t>
             </a:r>
           </a:p>
         </p:txBody>
@@ -1513,7 +1513,7 @@
           <a:lstStyle/>
           <a:p>
             <a:r>
-              <a:t>把机制和指标对齐。进程内绑定去掉事件传递，对应 E2E 降低，三实例 0.45 对 0.93 秒；零拷贝让状态复用无同步延迟；关键是第三行，没有独立 Binder 的串行段，吞吐才能随实例扩展，+17.5% 对 +1.4%；第四行四层容错守住不变量。也要说明相关与归因的区别：峰值吞吐不是每个场景都领先。如果评委追问某个数字，备用页里有完整口径与原始目录。四行对应四个机制，每一项都有可复核的字段。</a:t>
+              <a:t>第二场注入：第 10 秒杀掉 scheduler-0，停机 180 秒，实测中断 189 秒。被杀实例未完成的绑定只占 68/8407，即 0.81%；两个存活实例接管 8407 个 Pod，队列峰值 353 后回落到 2。累计绑定 49607/50000，断言仍全过。代价是 784 秒、比基线多 104 秒，是工作量重排的代价，不是数据损坏。对比基线是同一场景下的无故障运行，680 秒。队列在 353 之后回落到 2，说明积压是瞬时的。</a:t>
             </a:r>
           </a:p>
         </p:txBody>
@@ -10121,746 +10121,6 @@
                 <a:latin typeface="Arial"/>
                 <a:ea typeface="微软雅黑"/>
               </a:rPr>
-              <a:t>故障注入 Layer 0</a:t>
-            </a:r>
-          </a:p>
-        </p:txBody>
-      </p:sp>
-      <p:sp>
-        <p:nvSpPr>
-          <p:cNvPr id="4" name="Rectangle 3"/>
-          <p:cNvSpPr/>
-          <p:nvPr/>
-        </p:nvSpPr>
-        <p:spPr>
-          <a:xfrm>
-            <a:off x="566928" y="1298448"/>
-            <a:ext cx="32004" cy="365760"/>
-          </a:xfrm>
-          <a:prstGeom prst="rect">
-            <a:avLst/>
-          </a:prstGeom>
-          <a:solidFill>
-            <a:srgbClr val="1F5C99"/>
-          </a:solidFill>
-          <a:ln>
-            <a:noFill/>
-          </a:ln>
-          <a:effectLst/>
-        </p:spPr>
-        <p:style>
-          <a:lnRef idx="1">
-            <a:schemeClr val="accent1"/>
-          </a:lnRef>
-          <a:fillRef idx="3">
-            <a:schemeClr val="accent1"/>
-          </a:fillRef>
-          <a:effectRef idx="2">
-            <a:schemeClr val="accent1"/>
-          </a:effectRef>
-          <a:fontRef idx="minor">
-            <a:schemeClr val="lt1"/>
-          </a:fontRef>
-        </p:style>
-        <p:txBody>
-          <a:bodyPr rtlCol="0" anchor="ctr"/>
-          <a:lstStyle/>
-          <a:p>
-            <a:pPr algn="ctr"/>
-          </a:p>
-        </p:txBody>
-      </p:sp>
-      <p:sp>
-        <p:nvSpPr>
-          <p:cNvPr id="5" name="TextBox 4"/>
-          <p:cNvSpPr txBox="1"/>
-          <p:nvPr/>
-        </p:nvSpPr>
-        <p:spPr>
-          <a:xfrm>
-            <a:off x="713232" y="1261872"/>
-            <a:ext cx="10744200" cy="438912"/>
-          </a:xfrm>
-          <a:prstGeom prst="rect">
-            <a:avLst/>
-          </a:prstGeom>
-          <a:noFill/>
-        </p:spPr>
-        <p:txBody>
-          <a:bodyPr wrap="square" anchor="ctr" lIns="0" rIns="0" tIns="0" bIns="0">
-            <a:spAutoFit/>
-          </a:bodyPr>
-          <a:lstStyle/>
-          <a:p>
-            <a:pPr algn="l">
-              <a:lnSpc>
-                <a:spcPct val="110000"/>
-              </a:lnSpc>
-            </a:pPr>
-            <a:r>
-              <a:rPr sz="1800" b="1">
-                <a:solidFill>
-                  <a:srgbClr val="1F5C99"/>
-                </a:solidFill>
-                <a:latin typeface="Arial"/>
-                <a:ea typeface="微软雅黑"/>
-              </a:rPr>
-              <a:t>10% 节点注解漂移，300 次拦截全部转为合规重排</a:t>
-            </a:r>
-          </a:p>
-        </p:txBody>
-      </p:sp>
-      <p:pic>
-        <p:nvPicPr>
-          <p:cNvPr id="6" name="Picture 5" descr="fig6-29a-layer0-timeseries.png"/>
-          <p:cNvPicPr>
-            <a:picLocks noChangeAspect="1"/>
-          </p:cNvPicPr>
-          <p:nvPr/>
-        </p:nvPicPr>
-        <p:blipFill>
-          <a:blip r:embed="rId2"/>
-          <a:stretch>
-            <a:fillRect/>
-          </a:stretch>
-        </p:blipFill>
-        <p:spPr>
-          <a:xfrm>
-            <a:off x="5806440" y="2657246"/>
-            <a:ext cx="5852160" cy="2457907"/>
-          </a:xfrm>
-          <a:prstGeom prst="rect">
-            <a:avLst/>
-          </a:prstGeom>
-        </p:spPr>
-      </p:pic>
-      <p:sp>
-        <p:nvSpPr>
-          <p:cNvPr id="7" name="TextBox 6"/>
-          <p:cNvSpPr txBox="1"/>
-          <p:nvPr/>
-        </p:nvSpPr>
-        <p:spPr>
-          <a:xfrm>
-            <a:off x="566928" y="2011680"/>
-            <a:ext cx="5029200" cy="1417320"/>
-          </a:xfrm>
-          <a:prstGeom prst="rect">
-            <a:avLst/>
-          </a:prstGeom>
-          <a:noFill/>
-        </p:spPr>
-        <p:txBody>
-          <a:bodyPr wrap="square" anchor="t" lIns="0" rIns="0" tIns="0" bIns="0">
-            <a:spAutoFit/>
-          </a:bodyPr>
-          <a:lstStyle/>
-          <a:p>
-            <a:pPr algn="l">
-              <a:lnSpc>
-                <a:spcPct val="115000"/>
-              </a:lnSpc>
-            </a:pPr>
-            <a:r>
-              <a:rPr sz="1550" b="0">
-                <a:solidFill>
-                  <a:srgbClr val="333333"/>
-                </a:solidFill>
-                <a:latin typeface="Arial"/>
-                <a:ea typeface="微软雅黑"/>
-              </a:rPr>
-              <a:t>▪  拦截 300 次 / 回退 300 次</a:t>
-            </a:r>
-          </a:p>
-          <a:p>
-            <a:pPr algn="l">
-              <a:lnSpc>
-                <a:spcPct val="115000"/>
-              </a:lnSpc>
-              <a:spcBef>
-                <a:spcPts val="1400"/>
-              </a:spcBef>
-            </a:pPr>
-            <a:r>
-              <a:rPr sz="1550" b="0">
-                <a:solidFill>
-                  <a:srgbClr val="333333"/>
-                </a:solidFill>
-                <a:latin typeface="Arial"/>
-                <a:ea typeface="微软雅黑"/>
-              </a:rPr>
-              <a:t>▪  绑定成功率 1.00；断言 50000/50000</a:t>
-            </a:r>
-          </a:p>
-          <a:p>
-            <a:pPr algn="l">
-              <a:lnSpc>
-                <a:spcPct val="115000"/>
-              </a:lnSpc>
-              <a:spcBef>
-                <a:spcPts val="1400"/>
-              </a:spcBef>
-            </a:pPr>
-            <a:r>
-              <a:rPr sz="1550" b="0">
-                <a:solidFill>
-                  <a:srgbClr val="333333"/>
-                </a:solidFill>
-                <a:latin typeface="Arial"/>
-                <a:ea typeface="微软雅黑"/>
-              </a:rPr>
-              <a:t>▪  总耗时 683 s 对基线 680 s（+0.4%）</a:t>
-            </a:r>
-          </a:p>
-        </p:txBody>
-      </p:sp>
-      <p:sp>
-        <p:nvSpPr>
-          <p:cNvPr id="8" name="TextBox 7"/>
-          <p:cNvSpPr txBox="1"/>
-          <p:nvPr/>
-        </p:nvSpPr>
-        <p:spPr>
-          <a:xfrm>
-            <a:off x="566928" y="6309360"/>
-            <a:ext cx="10104120" cy="201168"/>
-          </a:xfrm>
-          <a:prstGeom prst="rect">
-            <a:avLst/>
-          </a:prstGeom>
-          <a:noFill/>
-        </p:spPr>
-        <p:txBody>
-          <a:bodyPr wrap="square" anchor="t" lIns="0" rIns="0" tIns="0" bIns="0">
-            <a:spAutoFit/>
-          </a:bodyPr>
-          <a:lstStyle/>
-          <a:p>
-            <a:pPr algn="l"/>
-            <a:r>
-              <a:rPr sz="850" b="0">
-                <a:solidFill>
-                  <a:srgbClr val="566474"/>
-                </a:solidFill>
-                <a:latin typeface="Arial"/>
-                <a:ea typeface="微软雅黑"/>
-              </a:rPr>
-              <a:t>编码：s1–s4 = 100 / 1000 / 5000 / 10000 节点；w1–w7 = 负载强度（w2 500、w3 1000、w4 2000 pods/s 极限、w5 突发、w6 Gang、w7 异构）；inst3 = 3 实例</a:t>
-            </a:r>
-          </a:p>
-        </p:txBody>
-      </p:sp>
-      <p:sp>
-        <p:nvSpPr>
-          <p:cNvPr id="9" name="TextBox 8"/>
-          <p:cNvSpPr txBox="1"/>
-          <p:nvPr/>
-        </p:nvSpPr>
-        <p:spPr>
-          <a:xfrm>
-            <a:off x="10780776" y="6345936"/>
-            <a:ext cx="850392" cy="219456"/>
-          </a:xfrm>
-          <a:prstGeom prst="rect">
-            <a:avLst/>
-          </a:prstGeom>
-          <a:noFill/>
-        </p:spPr>
-        <p:txBody>
-          <a:bodyPr wrap="square" anchor="t" lIns="0" rIns="0" tIns="0" bIns="0">
-            <a:spAutoFit/>
-          </a:bodyPr>
-          <a:lstStyle/>
-          <a:p>
-            <a:pPr algn="r"/>
-            <a:r>
-              <a:rPr sz="950" b="0">
-                <a:solidFill>
-                  <a:srgbClr val="566474"/>
-                </a:solidFill>
-                <a:latin typeface="Arial"/>
-                <a:ea typeface="微软雅黑"/>
-              </a:rPr>
-              <a:t>15 / 25</a:t>
-            </a:r>
-          </a:p>
-        </p:txBody>
-      </p:sp>
-    </p:spTree>
-  </p:cSld>
-  <p:clrMapOvr>
-    <a:masterClrMapping/>
-  </p:clrMapOvr>
-</p:sld>
-</file>
-
-<file path=ppt/slides/slide16.xml><?xml version="1.0" encoding="utf-8"?>
-<p:sld xmlns:a="http://schemas.openxmlformats.org/drawingml/2006/main" xmlns:p="http://schemas.openxmlformats.org/presentationml/2006/main" xmlns:r="http://schemas.openxmlformats.org/officeDocument/2006/relationships">
-  <p:cSld>
-    <p:bg>
-      <p:bgPr>
-        <a:solidFill>
-          <a:srgbClr val="FFFFFF"/>
-        </a:solidFill>
-        <a:effectLst/>
-      </p:bgPr>
-    </p:bg>
-    <p:spTree>
-      <p:nvGrpSpPr>
-        <p:cNvPr id="1" name=""/>
-        <p:cNvGrpSpPr/>
-        <p:nvPr/>
-      </p:nvGrpSpPr>
-      <p:grpSpPr/>
-      <p:sp>
-        <p:nvSpPr>
-          <p:cNvPr id="2" name="Rectangle 1"/>
-          <p:cNvSpPr/>
-          <p:nvPr/>
-        </p:nvSpPr>
-        <p:spPr>
-          <a:xfrm>
-            <a:off x="384048" y="420624"/>
-            <a:ext cx="77724" cy="475488"/>
-          </a:xfrm>
-          <a:prstGeom prst="rect">
-            <a:avLst/>
-          </a:prstGeom>
-          <a:solidFill>
-            <a:srgbClr val="E8833A"/>
-          </a:solidFill>
-          <a:ln>
-            <a:noFill/>
-          </a:ln>
-          <a:effectLst/>
-        </p:spPr>
-        <p:style>
-          <a:lnRef idx="1">
-            <a:schemeClr val="accent1"/>
-          </a:lnRef>
-          <a:fillRef idx="3">
-            <a:schemeClr val="accent1"/>
-          </a:fillRef>
-          <a:effectRef idx="2">
-            <a:schemeClr val="accent1"/>
-          </a:effectRef>
-          <a:fontRef idx="minor">
-            <a:schemeClr val="lt1"/>
-          </a:fontRef>
-        </p:style>
-        <p:txBody>
-          <a:bodyPr rtlCol="0" anchor="ctr"/>
-          <a:lstStyle/>
-          <a:p>
-            <a:pPr algn="ctr"/>
-          </a:p>
-        </p:txBody>
-      </p:sp>
-      <p:sp>
-        <p:nvSpPr>
-          <p:cNvPr id="3" name="TextBox 2"/>
-          <p:cNvSpPr txBox="1"/>
-          <p:nvPr/>
-        </p:nvSpPr>
-        <p:spPr>
-          <a:xfrm>
-            <a:off x="566928" y="329184"/>
-            <a:ext cx="11064240" cy="713232"/>
-          </a:xfrm>
-          <a:prstGeom prst="rect">
-            <a:avLst/>
-          </a:prstGeom>
-          <a:noFill/>
-        </p:spPr>
-        <p:txBody>
-          <a:bodyPr wrap="square" anchor="ctr" lIns="0" rIns="0" tIns="0" bIns="0">
-            <a:spAutoFit/>
-          </a:bodyPr>
-          <a:lstStyle/>
-          <a:p>
-            <a:pPr algn="l">
-              <a:lnSpc>
-                <a:spcPct val="105000"/>
-              </a:lnSpc>
-            </a:pPr>
-            <a:r>
-              <a:rPr sz="2700" b="1">
-                <a:solidFill>
-                  <a:srgbClr val="0B2A4A"/>
-                </a:solidFill>
-                <a:latin typeface="Arial"/>
-                <a:ea typeface="微软雅黑"/>
-              </a:rPr>
-              <a:t>故障注入 Layer 3</a:t>
-            </a:r>
-          </a:p>
-        </p:txBody>
-      </p:sp>
-      <p:sp>
-        <p:nvSpPr>
-          <p:cNvPr id="4" name="Rectangle 3"/>
-          <p:cNvSpPr/>
-          <p:nvPr/>
-        </p:nvSpPr>
-        <p:spPr>
-          <a:xfrm>
-            <a:off x="566928" y="1298448"/>
-            <a:ext cx="32004" cy="365760"/>
-          </a:xfrm>
-          <a:prstGeom prst="rect">
-            <a:avLst/>
-          </a:prstGeom>
-          <a:solidFill>
-            <a:srgbClr val="1F5C99"/>
-          </a:solidFill>
-          <a:ln>
-            <a:noFill/>
-          </a:ln>
-          <a:effectLst/>
-        </p:spPr>
-        <p:style>
-          <a:lnRef idx="1">
-            <a:schemeClr val="accent1"/>
-          </a:lnRef>
-          <a:fillRef idx="3">
-            <a:schemeClr val="accent1"/>
-          </a:fillRef>
-          <a:effectRef idx="2">
-            <a:schemeClr val="accent1"/>
-          </a:effectRef>
-          <a:fontRef idx="minor">
-            <a:schemeClr val="lt1"/>
-          </a:fontRef>
-        </p:style>
-        <p:txBody>
-          <a:bodyPr rtlCol="0" anchor="ctr"/>
-          <a:lstStyle/>
-          <a:p>
-            <a:pPr algn="ctr"/>
-          </a:p>
-        </p:txBody>
-      </p:sp>
-      <p:sp>
-        <p:nvSpPr>
-          <p:cNvPr id="5" name="TextBox 4"/>
-          <p:cNvSpPr txBox="1"/>
-          <p:nvPr/>
-        </p:nvSpPr>
-        <p:spPr>
-          <a:xfrm>
-            <a:off x="713232" y="1261872"/>
-            <a:ext cx="10744200" cy="438912"/>
-          </a:xfrm>
-          <a:prstGeom prst="rect">
-            <a:avLst/>
-          </a:prstGeom>
-          <a:noFill/>
-        </p:spPr>
-        <p:txBody>
-          <a:bodyPr wrap="square" anchor="ctr" lIns="0" rIns="0" tIns="0" bIns="0">
-            <a:spAutoFit/>
-          </a:bodyPr>
-          <a:lstStyle/>
-          <a:p>
-            <a:pPr algn="l">
-              <a:lnSpc>
-                <a:spcPct val="110000"/>
-              </a:lnSpc>
-            </a:pPr>
-            <a:r>
-              <a:rPr sz="1800" b="1">
-                <a:solidFill>
-                  <a:srgbClr val="1F5C99"/>
-                </a:solidFill>
-                <a:latin typeface="Arial"/>
-                <a:ea typeface="微软雅黑"/>
-              </a:rPr>
-              <a:t>杀掉 1/3 实例并停机 180 s，系统仍在 784 s 内完成全部绑定</a:t>
-            </a:r>
-          </a:p>
-        </p:txBody>
-      </p:sp>
-      <p:pic>
-        <p:nvPicPr>
-          <p:cNvPr id="6" name="Picture 5" descr="fig6-29b-layer3-timeseries.png"/>
-          <p:cNvPicPr>
-            <a:picLocks noChangeAspect="1"/>
-          </p:cNvPicPr>
-          <p:nvPr/>
-        </p:nvPicPr>
-        <p:blipFill>
-          <a:blip r:embed="rId2"/>
-          <a:stretch>
-            <a:fillRect/>
-          </a:stretch>
-        </p:blipFill>
-        <p:spPr>
-          <a:xfrm>
-            <a:off x="5806440" y="2657246"/>
-            <a:ext cx="5852160" cy="2457907"/>
-          </a:xfrm>
-          <a:prstGeom prst="rect">
-            <a:avLst/>
-          </a:prstGeom>
-        </p:spPr>
-      </p:pic>
-      <p:sp>
-        <p:nvSpPr>
-          <p:cNvPr id="7" name="TextBox 6"/>
-          <p:cNvSpPr txBox="1"/>
-          <p:nvPr/>
-        </p:nvSpPr>
-        <p:spPr>
-          <a:xfrm>
-            <a:off x="566928" y="2011680"/>
-            <a:ext cx="5029200" cy="1417320"/>
-          </a:xfrm>
-          <a:prstGeom prst="rect">
-            <a:avLst/>
-          </a:prstGeom>
-          <a:noFill/>
-        </p:spPr>
-        <p:txBody>
-          <a:bodyPr wrap="square" anchor="t" lIns="0" rIns="0" tIns="0" bIns="0">
-            <a:spAutoFit/>
-          </a:bodyPr>
-          <a:lstStyle/>
-          <a:p>
-            <a:pPr algn="l">
-              <a:lnSpc>
-                <a:spcPct val="115000"/>
-              </a:lnSpc>
-            </a:pPr>
-            <a:r>
-              <a:rPr sz="1550" b="0">
-                <a:solidFill>
-                  <a:srgbClr val="333333"/>
-                </a:solidFill>
-                <a:latin typeface="Arial"/>
-                <a:ea typeface="微软雅黑"/>
-              </a:rPr>
-              <a:t>▪  被杀实例绑定占比 68/8407 = 0.81%</a:t>
-            </a:r>
-          </a:p>
-          <a:p>
-            <a:pPr algn="l">
-              <a:lnSpc>
-                <a:spcPct val="115000"/>
-              </a:lnSpc>
-              <a:spcBef>
-                <a:spcPts val="1400"/>
-              </a:spcBef>
-            </a:pPr>
-            <a:r>
-              <a:rPr sz="1550" b="0">
-                <a:solidFill>
-                  <a:srgbClr val="333333"/>
-                </a:solidFill>
-                <a:latin typeface="Arial"/>
-                <a:ea typeface="微软雅黑"/>
-              </a:rPr>
-              <a:t>▪  存活实例接管 8407 pods；pending 353→2</a:t>
-            </a:r>
-          </a:p>
-          <a:p>
-            <a:pPr algn="l">
-              <a:lnSpc>
-                <a:spcPct val="115000"/>
-              </a:lnSpc>
-              <a:spcBef>
-                <a:spcPts val="1400"/>
-              </a:spcBef>
-            </a:pPr>
-            <a:r>
-              <a:rPr sz="1550" b="0">
-                <a:solidFill>
-                  <a:srgbClr val="333333"/>
-                </a:solidFill>
-                <a:latin typeface="Arial"/>
-                <a:ea typeface="微软雅黑"/>
-              </a:rPr>
-              <a:t>▪  总耗时 784 s，较基线 +15.3%</a:t>
-            </a:r>
-          </a:p>
-        </p:txBody>
-      </p:sp>
-      <p:sp>
-        <p:nvSpPr>
-          <p:cNvPr id="8" name="TextBox 7"/>
-          <p:cNvSpPr txBox="1"/>
-          <p:nvPr/>
-        </p:nvSpPr>
-        <p:spPr>
-          <a:xfrm>
-            <a:off x="566928" y="6309360"/>
-            <a:ext cx="10104120" cy="201168"/>
-          </a:xfrm>
-          <a:prstGeom prst="rect">
-            <a:avLst/>
-          </a:prstGeom>
-          <a:noFill/>
-        </p:spPr>
-        <p:txBody>
-          <a:bodyPr wrap="square" anchor="t" lIns="0" rIns="0" tIns="0" bIns="0">
-            <a:spAutoFit/>
-          </a:bodyPr>
-          <a:lstStyle/>
-          <a:p>
-            <a:pPr algn="l"/>
-            <a:r>
-              <a:rPr sz="850" b="0">
-                <a:solidFill>
-                  <a:srgbClr val="566474"/>
-                </a:solidFill>
-                <a:latin typeface="Arial"/>
-                <a:ea typeface="微软雅黑"/>
-              </a:rPr>
-              <a:t>编码：s1–s4 = 100 / 1000 / 5000 / 10000 节点；w1–w7 = 负载强度（w2 500、w3 1000、w4 2000 pods/s 极限、w5 突发、w6 Gang、w7 异构）；inst3 = 3 实例</a:t>
-            </a:r>
-          </a:p>
-        </p:txBody>
-      </p:sp>
-      <p:sp>
-        <p:nvSpPr>
-          <p:cNvPr id="9" name="TextBox 8"/>
-          <p:cNvSpPr txBox="1"/>
-          <p:nvPr/>
-        </p:nvSpPr>
-        <p:spPr>
-          <a:xfrm>
-            <a:off x="10780776" y="6345936"/>
-            <a:ext cx="850392" cy="219456"/>
-          </a:xfrm>
-          <a:prstGeom prst="rect">
-            <a:avLst/>
-          </a:prstGeom>
-          <a:noFill/>
-        </p:spPr>
-        <p:txBody>
-          <a:bodyPr wrap="square" anchor="t" lIns="0" rIns="0" tIns="0" bIns="0">
-            <a:spAutoFit/>
-          </a:bodyPr>
-          <a:lstStyle/>
-          <a:p>
-            <a:pPr algn="r"/>
-            <a:r>
-              <a:rPr sz="950" b="0">
-                <a:solidFill>
-                  <a:srgbClr val="566474"/>
-                </a:solidFill>
-                <a:latin typeface="Arial"/>
-                <a:ea typeface="微软雅黑"/>
-              </a:rPr>
-              <a:t>16 / 25</a:t>
-            </a:r>
-          </a:p>
-        </p:txBody>
-      </p:sp>
-    </p:spTree>
-  </p:cSld>
-  <p:clrMapOvr>
-    <a:masterClrMapping/>
-  </p:clrMapOvr>
-</p:sld>
-</file>
-
-<file path=ppt/slides/slide17.xml><?xml version="1.0" encoding="utf-8"?>
-<p:sld xmlns:a="http://schemas.openxmlformats.org/drawingml/2006/main" xmlns:p="http://schemas.openxmlformats.org/presentationml/2006/main" xmlns:r="http://schemas.openxmlformats.org/officeDocument/2006/relationships">
-  <p:cSld>
-    <p:bg>
-      <p:bgPr>
-        <a:solidFill>
-          <a:srgbClr val="FFFFFF"/>
-        </a:solidFill>
-        <a:effectLst/>
-      </p:bgPr>
-    </p:bg>
-    <p:spTree>
-      <p:nvGrpSpPr>
-        <p:cNvPr id="1" name=""/>
-        <p:cNvGrpSpPr/>
-        <p:nvPr/>
-      </p:nvGrpSpPr>
-      <p:grpSpPr/>
-      <p:sp>
-        <p:nvSpPr>
-          <p:cNvPr id="2" name="Rectangle 1"/>
-          <p:cNvSpPr/>
-          <p:nvPr/>
-        </p:nvSpPr>
-        <p:spPr>
-          <a:xfrm>
-            <a:off x="384048" y="420624"/>
-            <a:ext cx="77724" cy="475488"/>
-          </a:xfrm>
-          <a:prstGeom prst="rect">
-            <a:avLst/>
-          </a:prstGeom>
-          <a:solidFill>
-            <a:srgbClr val="E8833A"/>
-          </a:solidFill>
-          <a:ln>
-            <a:noFill/>
-          </a:ln>
-          <a:effectLst/>
-        </p:spPr>
-        <p:style>
-          <a:lnRef idx="1">
-            <a:schemeClr val="accent1"/>
-          </a:lnRef>
-          <a:fillRef idx="3">
-            <a:schemeClr val="accent1"/>
-          </a:fillRef>
-          <a:effectRef idx="2">
-            <a:schemeClr val="accent1"/>
-          </a:effectRef>
-          <a:fontRef idx="minor">
-            <a:schemeClr val="lt1"/>
-          </a:fontRef>
-        </p:style>
-        <p:txBody>
-          <a:bodyPr rtlCol="0" anchor="ctr"/>
-          <a:lstStyle/>
-          <a:p>
-            <a:pPr algn="ctr"/>
-          </a:p>
-        </p:txBody>
-      </p:sp>
-      <p:sp>
-        <p:nvSpPr>
-          <p:cNvPr id="3" name="TextBox 2"/>
-          <p:cNvSpPr txBox="1"/>
-          <p:nvPr/>
-        </p:nvSpPr>
-        <p:spPr>
-          <a:xfrm>
-            <a:off x="566928" y="329184"/>
-            <a:ext cx="11064240" cy="713232"/>
-          </a:xfrm>
-          <a:prstGeom prst="rect">
-            <a:avLst/>
-          </a:prstGeom>
-          <a:noFill/>
-        </p:spPr>
-        <p:txBody>
-          <a:bodyPr wrap="square" anchor="ctr" lIns="0" rIns="0" tIns="0" bIns="0">
-            <a:spAutoFit/>
-          </a:bodyPr>
-          <a:lstStyle/>
-          <a:p>
-            <a:pPr algn="l">
-              <a:lnSpc>
-                <a:spcPct val="105000"/>
-              </a:lnSpc>
-            </a:pPr>
-            <a:r>
-              <a:rPr sz="2700" b="1">
-                <a:solidFill>
-                  <a:srgbClr val="0B2A4A"/>
-                </a:solidFill>
-                <a:latin typeface="Arial"/>
-                <a:ea typeface="微软雅黑"/>
-              </a:rPr>
               <a:t>五组基线</a:t>
             </a:r>
           </a:p>
@@ -11589,7 +10849,7 @@
                 <a:latin typeface="Arial"/>
                 <a:ea typeface="微软雅黑"/>
               </a:rPr>
-              <a:t>17 / 25</a:t>
+              <a:t>15 / 25</a:t>
             </a:r>
           </a:p>
         </p:txBody>
@@ -11602,7 +10862,7 @@
 </p:sld>
 </file>
 
-<file path=ppt/slides/slide18.xml><?xml version="1.0" encoding="utf-8"?>
+<file path=ppt/slides/slide16.xml><?xml version="1.0" encoding="utf-8"?>
 <p:sld xmlns:a="http://schemas.openxmlformats.org/drawingml/2006/main" xmlns:p="http://schemas.openxmlformats.org/presentationml/2006/main" xmlns:r="http://schemas.openxmlformats.org/officeDocument/2006/relationships">
   <p:cSld>
     <p:bg>
@@ -11959,7 +11219,7 @@
                 <a:latin typeface="Arial"/>
                 <a:ea typeface="微软雅黑"/>
               </a:rPr>
-              <a:t>18 / 25</a:t>
+              <a:t>16 / 25</a:t>
             </a:r>
           </a:p>
         </p:txBody>
@@ -11972,7 +11232,7 @@
 </p:sld>
 </file>
 
-<file path=ppt/slides/slide19.xml><?xml version="1.0" encoding="utf-8"?>
+<file path=ppt/slides/slide17.xml><?xml version="1.0" encoding="utf-8"?>
 <p:sld xmlns:a="http://schemas.openxmlformats.org/drawingml/2006/main" xmlns:p="http://schemas.openxmlformats.org/presentationml/2006/main" xmlns:r="http://schemas.openxmlformats.org/officeDocument/2006/relationships">
   <p:cSld>
     <p:bg>
@@ -12329,7 +11589,7 @@
                 <a:latin typeface="Arial"/>
                 <a:ea typeface="微软雅黑"/>
               </a:rPr>
-              <a:t>19 / 25</a:t>
+              <a:t>17 / 25</a:t>
             </a:r>
           </a:p>
         </p:txBody>
@@ -12342,715 +11602,7 @@
 </p:sld>
 </file>
 
-<file path=ppt/slides/slide2.xml><?xml version="1.0" encoding="utf-8"?>
-<p:sld xmlns:a="http://schemas.openxmlformats.org/drawingml/2006/main" xmlns:p="http://schemas.openxmlformats.org/presentationml/2006/main" xmlns:r="http://schemas.openxmlformats.org/officeDocument/2006/relationships">
-  <p:cSld>
-    <p:bg>
-      <p:bgPr>
-        <a:solidFill>
-          <a:srgbClr val="FFFFFF"/>
-        </a:solidFill>
-        <a:effectLst/>
-      </p:bgPr>
-    </p:bg>
-    <p:spTree>
-      <p:nvGrpSpPr>
-        <p:cNvPr id="1" name=""/>
-        <p:cNvGrpSpPr/>
-        <p:nvPr/>
-      </p:nvGrpSpPr>
-      <p:grpSpPr/>
-      <p:sp>
-        <p:nvSpPr>
-          <p:cNvPr id="2" name="Rectangle 1"/>
-          <p:cNvSpPr/>
-          <p:nvPr/>
-        </p:nvSpPr>
-        <p:spPr>
-          <a:xfrm>
-            <a:off x="384048" y="420624"/>
-            <a:ext cx="77724" cy="475488"/>
-          </a:xfrm>
-          <a:prstGeom prst="rect">
-            <a:avLst/>
-          </a:prstGeom>
-          <a:solidFill>
-            <a:srgbClr val="E8833A"/>
-          </a:solidFill>
-          <a:ln>
-            <a:noFill/>
-          </a:ln>
-          <a:effectLst/>
-        </p:spPr>
-        <p:style>
-          <a:lnRef idx="1">
-            <a:schemeClr val="accent1"/>
-          </a:lnRef>
-          <a:fillRef idx="3">
-            <a:schemeClr val="accent1"/>
-          </a:fillRef>
-          <a:effectRef idx="2">
-            <a:schemeClr val="accent1"/>
-          </a:effectRef>
-          <a:fontRef idx="minor">
-            <a:schemeClr val="lt1"/>
-          </a:fontRef>
-        </p:style>
-        <p:txBody>
-          <a:bodyPr rtlCol="0" anchor="ctr"/>
-          <a:lstStyle/>
-          <a:p>
-            <a:pPr algn="ctr"/>
-          </a:p>
-        </p:txBody>
-      </p:sp>
-      <p:sp>
-        <p:nvSpPr>
-          <p:cNvPr id="3" name="TextBox 2"/>
-          <p:cNvSpPr txBox="1"/>
-          <p:nvPr/>
-        </p:nvSpPr>
-        <p:spPr>
-          <a:xfrm>
-            <a:off x="566928" y="329184"/>
-            <a:ext cx="11064240" cy="713232"/>
-          </a:xfrm>
-          <a:prstGeom prst="rect">
-            <a:avLst/>
-          </a:prstGeom>
-          <a:noFill/>
-        </p:spPr>
-        <p:txBody>
-          <a:bodyPr wrap="square" anchor="ctr" lIns="0" rIns="0" tIns="0" bIns="0">
-            <a:spAutoFit/>
-          </a:bodyPr>
-          <a:lstStyle/>
-          <a:p>
-            <a:pPr algn="l">
-              <a:lnSpc>
-                <a:spcPct val="105000"/>
-              </a:lnSpc>
-            </a:pPr>
-            <a:r>
-              <a:rPr sz="2700" b="1">
-                <a:solidFill>
-                  <a:srgbClr val="0B2A4A"/>
-                </a:solidFill>
-                <a:latin typeface="Arial"/>
-                <a:ea typeface="微软雅黑"/>
-              </a:rPr>
-              <a:t>研究背景</a:t>
-            </a:r>
-          </a:p>
-        </p:txBody>
-      </p:sp>
-      <p:sp>
-        <p:nvSpPr>
-          <p:cNvPr id="4" name="Rectangle 3"/>
-          <p:cNvSpPr/>
-          <p:nvPr/>
-        </p:nvSpPr>
-        <p:spPr>
-          <a:xfrm>
-            <a:off x="566928" y="1298448"/>
-            <a:ext cx="32004" cy="365760"/>
-          </a:xfrm>
-          <a:prstGeom prst="rect">
-            <a:avLst/>
-          </a:prstGeom>
-          <a:solidFill>
-            <a:srgbClr val="1F5C99"/>
-          </a:solidFill>
-          <a:ln>
-            <a:noFill/>
-          </a:ln>
-          <a:effectLst/>
-        </p:spPr>
-        <p:style>
-          <a:lnRef idx="1">
-            <a:schemeClr val="accent1"/>
-          </a:lnRef>
-          <a:fillRef idx="3">
-            <a:schemeClr val="accent1"/>
-          </a:fillRef>
-          <a:effectRef idx="2">
-            <a:schemeClr val="accent1"/>
-          </a:effectRef>
-          <a:fontRef idx="minor">
-            <a:schemeClr val="lt1"/>
-          </a:fontRef>
-        </p:style>
-        <p:txBody>
-          <a:bodyPr rtlCol="0" anchor="ctr"/>
-          <a:lstStyle/>
-          <a:p>
-            <a:pPr algn="ctr"/>
-          </a:p>
-        </p:txBody>
-      </p:sp>
-      <p:sp>
-        <p:nvSpPr>
-          <p:cNvPr id="5" name="TextBox 4"/>
-          <p:cNvSpPr txBox="1"/>
-          <p:nvPr/>
-        </p:nvSpPr>
-        <p:spPr>
-          <a:xfrm>
-            <a:off x="713232" y="1261872"/>
-            <a:ext cx="10744200" cy="438912"/>
-          </a:xfrm>
-          <a:prstGeom prst="rect">
-            <a:avLst/>
-          </a:prstGeom>
-          <a:noFill/>
-        </p:spPr>
-        <p:txBody>
-          <a:bodyPr wrap="square" anchor="ctr" lIns="0" rIns="0" tIns="0" bIns="0">
-            <a:spAutoFit/>
-          </a:bodyPr>
-          <a:lstStyle/>
-          <a:p>
-            <a:pPr algn="l">
-              <a:lnSpc>
-                <a:spcPct val="110000"/>
-              </a:lnSpc>
-            </a:pPr>
-            <a:r>
-              <a:rPr sz="1800" b="1">
-                <a:solidFill>
-                  <a:srgbClr val="1F5C99"/>
-                </a:solidFill>
-                <a:latin typeface="Arial"/>
-                <a:ea typeface="微软雅黑"/>
-              </a:rPr>
-              <a:t>生产集群进入万节点量级，单实例架构在吞吐与高可用上同时受制</a:t>
-            </a:r>
-          </a:p>
-        </p:txBody>
-      </p:sp>
-      <p:sp>
-        <p:nvSpPr>
-          <p:cNvPr id="6" name="TextBox 5"/>
-          <p:cNvSpPr txBox="1"/>
-          <p:nvPr/>
-        </p:nvSpPr>
-        <p:spPr>
-          <a:xfrm>
-            <a:off x="566928" y="1783080"/>
-            <a:ext cx="10881360" cy="1234440"/>
-          </a:xfrm>
-          <a:prstGeom prst="rect">
-            <a:avLst/>
-          </a:prstGeom>
-          <a:noFill/>
-        </p:spPr>
-        <p:txBody>
-          <a:bodyPr wrap="square" anchor="t" lIns="0" rIns="0" tIns="0" bIns="0">
-            <a:spAutoFit/>
-          </a:bodyPr>
-          <a:lstStyle/>
-          <a:p>
-            <a:pPr algn="l">
-              <a:lnSpc>
-                <a:spcPct val="135000"/>
-              </a:lnSpc>
-            </a:pPr>
-            <a:r>
-              <a:rPr sz="1500" b="0">
-                <a:solidFill>
-                  <a:srgbClr val="333333"/>
-                </a:solidFill>
-                <a:latin typeface="Arial"/>
-                <a:ea typeface="微软雅黑"/>
-              </a:rPr>
-              <a:t>Kubernetes 已成为云原生的事实标准，调度器处在 Pod 生命周期的关键路径上：它的吞吐与延迟直接决定集群资源利用率与业务响应速度。千节点规模下单实例尚可支撑，集群进入万节点量级后，三个瓶颈同时显现。</a:t>
-            </a:r>
-          </a:p>
-        </p:txBody>
-      </p:sp>
-      <p:sp>
-        <p:nvSpPr>
-          <p:cNvPr id="7" name="Rounded Rectangle 6"/>
-          <p:cNvSpPr/>
-          <p:nvPr/>
-        </p:nvSpPr>
-        <p:spPr>
-          <a:xfrm>
-            <a:off x="566928" y="2880360"/>
-            <a:ext cx="3517391" cy="2103120"/>
-          </a:xfrm>
-          <a:prstGeom prst="roundRect">
-            <a:avLst/>
-          </a:prstGeom>
-          <a:solidFill>
-            <a:srgbClr val="F5F7FA"/>
-          </a:solidFill>
-          <a:ln w="9525">
-            <a:solidFill>
-              <a:srgbClr val="D8DFE8"/>
-            </a:solidFill>
-          </a:ln>
-          <a:effectLst/>
-        </p:spPr>
-        <p:style>
-          <a:lnRef idx="1">
-            <a:schemeClr val="accent1"/>
-          </a:lnRef>
-          <a:fillRef idx="3">
-            <a:schemeClr val="accent1"/>
-          </a:fillRef>
-          <a:effectRef idx="2">
-            <a:schemeClr val="accent1"/>
-          </a:effectRef>
-          <a:fontRef idx="minor">
-            <a:schemeClr val="lt1"/>
-          </a:fontRef>
-        </p:style>
-        <p:txBody>
-          <a:bodyPr rtlCol="0" anchor="ctr"/>
-          <a:lstStyle/>
-          <a:p>
-            <a:pPr algn="ctr"/>
-          </a:p>
-        </p:txBody>
-      </p:sp>
-      <p:sp>
-        <p:nvSpPr>
-          <p:cNvPr id="8" name="Rectangle 7"/>
-          <p:cNvSpPr/>
-          <p:nvPr/>
-        </p:nvSpPr>
-        <p:spPr>
-          <a:xfrm>
-            <a:off x="566928" y="2880360"/>
-            <a:ext cx="50292" cy="2103120"/>
-          </a:xfrm>
-          <a:prstGeom prst="rect">
-            <a:avLst/>
-          </a:prstGeom>
-          <a:solidFill>
-            <a:srgbClr val="1F5C99"/>
-          </a:solidFill>
-          <a:ln>
-            <a:noFill/>
-          </a:ln>
-          <a:effectLst/>
-        </p:spPr>
-        <p:style>
-          <a:lnRef idx="1">
-            <a:schemeClr val="accent1"/>
-          </a:lnRef>
-          <a:fillRef idx="3">
-            <a:schemeClr val="accent1"/>
-          </a:fillRef>
-          <a:effectRef idx="2">
-            <a:schemeClr val="accent1"/>
-          </a:effectRef>
-          <a:fontRef idx="minor">
-            <a:schemeClr val="lt1"/>
-          </a:fontRef>
-        </p:style>
-        <p:txBody>
-          <a:bodyPr rtlCol="0" anchor="ctr"/>
-          <a:lstStyle/>
-          <a:p>
-            <a:pPr algn="ctr"/>
-          </a:p>
-        </p:txBody>
-      </p:sp>
-      <p:sp>
-        <p:nvSpPr>
-          <p:cNvPr id="9" name="TextBox 8"/>
-          <p:cNvSpPr txBox="1"/>
-          <p:nvPr/>
-        </p:nvSpPr>
-        <p:spPr>
-          <a:xfrm>
-            <a:off x="731520" y="3008376"/>
-            <a:ext cx="3243072" cy="1920239"/>
-          </a:xfrm>
-          <a:prstGeom prst="rect">
-            <a:avLst/>
-          </a:prstGeom>
-          <a:noFill/>
-        </p:spPr>
-        <p:txBody>
-          <a:bodyPr wrap="square" anchor="t" lIns="0" rIns="0" tIns="0" bIns="0">
-            <a:spAutoFit/>
-          </a:bodyPr>
-          <a:lstStyle/>
-          <a:p>
-            <a:pPr algn="l"/>
-            <a:r>
-              <a:rPr sz="1400" b="1">
-                <a:solidFill>
-                  <a:srgbClr val="0B2A4A"/>
-                </a:solidFill>
-                <a:latin typeface="Arial"/>
-                <a:ea typeface="微软雅黑"/>
-              </a:rPr>
-              <a:t>吞吐存在上限</a:t>
-            </a:r>
-          </a:p>
-          <a:p>
-            <a:pPr algn="l">
-              <a:lnSpc>
-                <a:spcPct val="110000"/>
-              </a:lnSpc>
-              <a:spcBef>
-                <a:spcPts val="400"/>
-              </a:spcBef>
-            </a:pPr>
-            <a:r>
-              <a:rPr sz="1150" b="0">
-                <a:solidFill>
-                  <a:srgbClr val="333333"/>
-                </a:solidFill>
-                <a:latin typeface="Arial"/>
-                <a:ea typeface="微软雅黑"/>
-              </a:rPr>
-              <a:t>activeQ 串行处理 Pod，大规模弹性伸缩与批任务启动被拖慢</a:t>
-            </a:r>
-          </a:p>
-        </p:txBody>
-      </p:sp>
-      <p:sp>
-        <p:nvSpPr>
-          <p:cNvPr id="10" name="Rounded Rectangle 9"/>
-          <p:cNvSpPr/>
-          <p:nvPr/>
-        </p:nvSpPr>
-        <p:spPr>
-          <a:xfrm>
-            <a:off x="4340351" y="2880360"/>
-            <a:ext cx="3517391" cy="2103120"/>
-          </a:xfrm>
-          <a:prstGeom prst="roundRect">
-            <a:avLst/>
-          </a:prstGeom>
-          <a:solidFill>
-            <a:srgbClr val="F5F7FA"/>
-          </a:solidFill>
-          <a:ln w="9525">
-            <a:solidFill>
-              <a:srgbClr val="D8DFE8"/>
-            </a:solidFill>
-          </a:ln>
-          <a:effectLst/>
-        </p:spPr>
-        <p:style>
-          <a:lnRef idx="1">
-            <a:schemeClr val="accent1"/>
-          </a:lnRef>
-          <a:fillRef idx="3">
-            <a:schemeClr val="accent1"/>
-          </a:fillRef>
-          <a:effectRef idx="2">
-            <a:schemeClr val="accent1"/>
-          </a:effectRef>
-          <a:fontRef idx="minor">
-            <a:schemeClr val="lt1"/>
-          </a:fontRef>
-        </p:style>
-        <p:txBody>
-          <a:bodyPr rtlCol="0" anchor="ctr"/>
-          <a:lstStyle/>
-          <a:p>
-            <a:pPr algn="ctr"/>
-          </a:p>
-        </p:txBody>
-      </p:sp>
-      <p:sp>
-        <p:nvSpPr>
-          <p:cNvPr id="11" name="Rectangle 10"/>
-          <p:cNvSpPr/>
-          <p:nvPr/>
-        </p:nvSpPr>
-        <p:spPr>
-          <a:xfrm>
-            <a:off x="4340351" y="2880360"/>
-            <a:ext cx="50292" cy="2103120"/>
-          </a:xfrm>
-          <a:prstGeom prst="rect">
-            <a:avLst/>
-          </a:prstGeom>
-          <a:solidFill>
-            <a:srgbClr val="1F5C99"/>
-          </a:solidFill>
-          <a:ln>
-            <a:noFill/>
-          </a:ln>
-          <a:effectLst/>
-        </p:spPr>
-        <p:style>
-          <a:lnRef idx="1">
-            <a:schemeClr val="accent1"/>
-          </a:lnRef>
-          <a:fillRef idx="3">
-            <a:schemeClr val="accent1"/>
-          </a:fillRef>
-          <a:effectRef idx="2">
-            <a:schemeClr val="accent1"/>
-          </a:effectRef>
-          <a:fontRef idx="minor">
-            <a:schemeClr val="lt1"/>
-          </a:fontRef>
-        </p:style>
-        <p:txBody>
-          <a:bodyPr rtlCol="0" anchor="ctr"/>
-          <a:lstStyle/>
-          <a:p>
-            <a:pPr algn="ctr"/>
-          </a:p>
-        </p:txBody>
-      </p:sp>
-      <p:sp>
-        <p:nvSpPr>
-          <p:cNvPr id="12" name="TextBox 11"/>
-          <p:cNvSpPr txBox="1"/>
-          <p:nvPr/>
-        </p:nvSpPr>
-        <p:spPr>
-          <a:xfrm>
-            <a:off x="4504943" y="3008376"/>
-            <a:ext cx="3243072" cy="1920239"/>
-          </a:xfrm>
-          <a:prstGeom prst="rect">
-            <a:avLst/>
-          </a:prstGeom>
-          <a:noFill/>
-        </p:spPr>
-        <p:txBody>
-          <a:bodyPr wrap="square" anchor="t" lIns="0" rIns="0" tIns="0" bIns="0">
-            <a:spAutoFit/>
-          </a:bodyPr>
-          <a:lstStyle/>
-          <a:p>
-            <a:pPr algn="l"/>
-            <a:r>
-              <a:rPr sz="1400" b="1">
-                <a:solidFill>
-                  <a:srgbClr val="0B2A4A"/>
-                </a:solidFill>
-                <a:latin typeface="Arial"/>
-                <a:ea typeface="微软雅黑"/>
-              </a:rPr>
-              <a:t>尾延迟持续抬升</a:t>
-            </a:r>
-          </a:p>
-          <a:p>
-            <a:pPr algn="l">
-              <a:lnSpc>
-                <a:spcPct val="110000"/>
-              </a:lnSpc>
-              <a:spcBef>
-                <a:spcPts val="400"/>
-              </a:spcBef>
-            </a:pPr>
-            <a:r>
-              <a:rPr sz="1150" b="0">
-                <a:solidFill>
-                  <a:srgbClr val="333333"/>
-                </a:solidFill>
-                <a:latin typeface="Arial"/>
-                <a:ea typeface="微软雅黑"/>
-              </a:rPr>
-              <a:t>Filter/Score 遍历节点开销随规模线性上升，5000 节点下 P99 明显恶化</a:t>
-            </a:r>
-          </a:p>
-        </p:txBody>
-      </p:sp>
-      <p:sp>
-        <p:nvSpPr>
-          <p:cNvPr id="13" name="Rounded Rectangle 12"/>
-          <p:cNvSpPr/>
-          <p:nvPr/>
-        </p:nvSpPr>
-        <p:spPr>
-          <a:xfrm>
-            <a:off x="8113775" y="2880360"/>
-            <a:ext cx="3517391" cy="2103120"/>
-          </a:xfrm>
-          <a:prstGeom prst="roundRect">
-            <a:avLst/>
-          </a:prstGeom>
-          <a:solidFill>
-            <a:srgbClr val="F5F7FA"/>
-          </a:solidFill>
-          <a:ln w="9525">
-            <a:solidFill>
-              <a:srgbClr val="D8DFE8"/>
-            </a:solidFill>
-          </a:ln>
-          <a:effectLst/>
-        </p:spPr>
-        <p:style>
-          <a:lnRef idx="1">
-            <a:schemeClr val="accent1"/>
-          </a:lnRef>
-          <a:fillRef idx="3">
-            <a:schemeClr val="accent1"/>
-          </a:fillRef>
-          <a:effectRef idx="2">
-            <a:schemeClr val="accent1"/>
-          </a:effectRef>
-          <a:fontRef idx="minor">
-            <a:schemeClr val="lt1"/>
-          </a:fontRef>
-        </p:style>
-        <p:txBody>
-          <a:bodyPr rtlCol="0" anchor="ctr"/>
-          <a:lstStyle/>
-          <a:p>
-            <a:pPr algn="ctr"/>
-          </a:p>
-        </p:txBody>
-      </p:sp>
-      <p:sp>
-        <p:nvSpPr>
-          <p:cNvPr id="14" name="Rectangle 13"/>
-          <p:cNvSpPr/>
-          <p:nvPr/>
-        </p:nvSpPr>
-        <p:spPr>
-          <a:xfrm>
-            <a:off x="8113775" y="2880360"/>
-            <a:ext cx="50292" cy="2103120"/>
-          </a:xfrm>
-          <a:prstGeom prst="rect">
-            <a:avLst/>
-          </a:prstGeom>
-          <a:solidFill>
-            <a:srgbClr val="1F5C99"/>
-          </a:solidFill>
-          <a:ln>
-            <a:noFill/>
-          </a:ln>
-          <a:effectLst/>
-        </p:spPr>
-        <p:style>
-          <a:lnRef idx="1">
-            <a:schemeClr val="accent1"/>
-          </a:lnRef>
-          <a:fillRef idx="3">
-            <a:schemeClr val="accent1"/>
-          </a:fillRef>
-          <a:effectRef idx="2">
-            <a:schemeClr val="accent1"/>
-          </a:effectRef>
-          <a:fontRef idx="minor">
-            <a:schemeClr val="lt1"/>
-          </a:fontRef>
-        </p:style>
-        <p:txBody>
-          <a:bodyPr rtlCol="0" anchor="ctr"/>
-          <a:lstStyle/>
-          <a:p>
-            <a:pPr algn="ctr"/>
-          </a:p>
-        </p:txBody>
-      </p:sp>
-      <p:sp>
-        <p:nvSpPr>
-          <p:cNvPr id="15" name="TextBox 14"/>
-          <p:cNvSpPr txBox="1"/>
-          <p:nvPr/>
-        </p:nvSpPr>
-        <p:spPr>
-          <a:xfrm>
-            <a:off x="8278367" y="3008376"/>
-            <a:ext cx="3243072" cy="1920239"/>
-          </a:xfrm>
-          <a:prstGeom prst="rect">
-            <a:avLst/>
-          </a:prstGeom>
-          <a:noFill/>
-        </p:spPr>
-        <p:txBody>
-          <a:bodyPr wrap="square" anchor="t" lIns="0" rIns="0" tIns="0" bIns="0">
-            <a:spAutoFit/>
-          </a:bodyPr>
-          <a:lstStyle/>
-          <a:p>
-            <a:pPr algn="l"/>
-            <a:r>
-              <a:rPr sz="1400" b="1">
-                <a:solidFill>
-                  <a:srgbClr val="0B2A4A"/>
-                </a:solidFill>
-                <a:latin typeface="Arial"/>
-                <a:ea typeface="微软雅黑"/>
-              </a:rPr>
-              <a:t>单点故障风险</a:t>
-            </a:r>
-          </a:p>
-          <a:p>
-            <a:pPr algn="l">
-              <a:lnSpc>
-                <a:spcPct val="110000"/>
-              </a:lnSpc>
-              <a:spcBef>
-                <a:spcPts val="400"/>
-              </a:spcBef>
-            </a:pPr>
-            <a:r>
-              <a:rPr sz="1150" b="0">
-                <a:solidFill>
-                  <a:srgbClr val="333333"/>
-                </a:solidFill>
-                <a:latin typeface="Arial"/>
-                <a:ea typeface="微软雅黑"/>
-              </a:rPr>
-              <a:t>Leader 崩溃后需等待 Standby 接管，这段窗口内集群完全无法调度</a:t>
-            </a:r>
-          </a:p>
-        </p:txBody>
-      </p:sp>
-      <p:sp>
-        <p:nvSpPr>
-          <p:cNvPr id="16" name="TextBox 15"/>
-          <p:cNvSpPr txBox="1"/>
-          <p:nvPr/>
-        </p:nvSpPr>
-        <p:spPr>
-          <a:xfrm>
-            <a:off x="10780776" y="6345936"/>
-            <a:ext cx="850392" cy="219456"/>
-          </a:xfrm>
-          <a:prstGeom prst="rect">
-            <a:avLst/>
-          </a:prstGeom>
-          <a:noFill/>
-        </p:spPr>
-        <p:txBody>
-          <a:bodyPr wrap="square" anchor="t" lIns="0" rIns="0" tIns="0" bIns="0">
-            <a:spAutoFit/>
-          </a:bodyPr>
-          <a:lstStyle/>
-          <a:p>
-            <a:pPr algn="r"/>
-            <a:r>
-              <a:rPr sz="950" b="0">
-                <a:solidFill>
-                  <a:srgbClr val="566474"/>
-                </a:solidFill>
-                <a:latin typeface="Arial"/>
-                <a:ea typeface="微软雅黑"/>
-              </a:rPr>
-              <a:t>2 / 25</a:t>
-            </a:r>
-          </a:p>
-        </p:txBody>
-      </p:sp>
-    </p:spTree>
-  </p:cSld>
-  <p:clrMapOvr>
-    <a:masterClrMapping/>
-  </p:clrMapOvr>
-</p:sld>
-</file>
-
-<file path=ppt/slides/slide20.xml><?xml version="1.0" encoding="utf-8"?>
+<file path=ppt/slides/slide18.xml><?xml version="1.0" encoding="utf-8"?>
 <p:sld xmlns:a="http://schemas.openxmlformats.org/drawingml/2006/main" xmlns:p="http://schemas.openxmlformats.org/presentationml/2006/main" xmlns:r="http://schemas.openxmlformats.org/officeDocument/2006/relationships">
   <p:cSld>
     <p:bg>
@@ -13766,7 +12318,7 @@
                 <a:latin typeface="Arial"/>
                 <a:ea typeface="微软雅黑"/>
               </a:rPr>
-              <a:t>20 / 25</a:t>
+              <a:t>18 / 25</a:t>
             </a:r>
           </a:p>
         </p:txBody>
@@ -13779,7 +12331,7 @@
 </p:sld>
 </file>
 
-<file path=ppt/slides/slide21.xml><?xml version="1.0" encoding="utf-8"?>
+<file path=ppt/slides/slide19.xml><?xml version="1.0" encoding="utf-8"?>
 <p:sld xmlns:a="http://schemas.openxmlformats.org/drawingml/2006/main" xmlns:p="http://schemas.openxmlformats.org/presentationml/2006/main" xmlns:r="http://schemas.openxmlformats.org/officeDocument/2006/relationships">
   <p:cSld>
     <p:bg>
@@ -14509,7 +13061,7 @@
                 <a:latin typeface="Arial"/>
                 <a:ea typeface="微软雅黑"/>
               </a:rPr>
-              <a:t>21 / 25</a:t>
+              <a:t>19 / 25</a:t>
             </a:r>
           </a:p>
         </p:txBody>
@@ -14522,7 +13074,715 @@
 </p:sld>
 </file>
 
-<file path=ppt/slides/slide22.xml><?xml version="1.0" encoding="utf-8"?>
+<file path=ppt/slides/slide2.xml><?xml version="1.0" encoding="utf-8"?>
+<p:sld xmlns:a="http://schemas.openxmlformats.org/drawingml/2006/main" xmlns:p="http://schemas.openxmlformats.org/presentationml/2006/main" xmlns:r="http://schemas.openxmlformats.org/officeDocument/2006/relationships">
+  <p:cSld>
+    <p:bg>
+      <p:bgPr>
+        <a:solidFill>
+          <a:srgbClr val="FFFFFF"/>
+        </a:solidFill>
+        <a:effectLst/>
+      </p:bgPr>
+    </p:bg>
+    <p:spTree>
+      <p:nvGrpSpPr>
+        <p:cNvPr id="1" name=""/>
+        <p:cNvGrpSpPr/>
+        <p:nvPr/>
+      </p:nvGrpSpPr>
+      <p:grpSpPr/>
+      <p:sp>
+        <p:nvSpPr>
+          <p:cNvPr id="2" name="Rectangle 1"/>
+          <p:cNvSpPr/>
+          <p:nvPr/>
+        </p:nvSpPr>
+        <p:spPr>
+          <a:xfrm>
+            <a:off x="384048" y="420624"/>
+            <a:ext cx="77724" cy="475488"/>
+          </a:xfrm>
+          <a:prstGeom prst="rect">
+            <a:avLst/>
+          </a:prstGeom>
+          <a:solidFill>
+            <a:srgbClr val="E8833A"/>
+          </a:solidFill>
+          <a:ln>
+            <a:noFill/>
+          </a:ln>
+          <a:effectLst/>
+        </p:spPr>
+        <p:style>
+          <a:lnRef idx="1">
+            <a:schemeClr val="accent1"/>
+          </a:lnRef>
+          <a:fillRef idx="3">
+            <a:schemeClr val="accent1"/>
+          </a:fillRef>
+          <a:effectRef idx="2">
+            <a:schemeClr val="accent1"/>
+          </a:effectRef>
+          <a:fontRef idx="minor">
+            <a:schemeClr val="lt1"/>
+          </a:fontRef>
+        </p:style>
+        <p:txBody>
+          <a:bodyPr rtlCol="0" anchor="ctr"/>
+          <a:lstStyle/>
+          <a:p>
+            <a:pPr algn="ctr"/>
+          </a:p>
+        </p:txBody>
+      </p:sp>
+      <p:sp>
+        <p:nvSpPr>
+          <p:cNvPr id="3" name="TextBox 2"/>
+          <p:cNvSpPr txBox="1"/>
+          <p:nvPr/>
+        </p:nvSpPr>
+        <p:spPr>
+          <a:xfrm>
+            <a:off x="566928" y="329184"/>
+            <a:ext cx="11064240" cy="713232"/>
+          </a:xfrm>
+          <a:prstGeom prst="rect">
+            <a:avLst/>
+          </a:prstGeom>
+          <a:noFill/>
+        </p:spPr>
+        <p:txBody>
+          <a:bodyPr wrap="square" anchor="ctr" lIns="0" rIns="0" tIns="0" bIns="0">
+            <a:spAutoFit/>
+          </a:bodyPr>
+          <a:lstStyle/>
+          <a:p>
+            <a:pPr algn="l">
+              <a:lnSpc>
+                <a:spcPct val="105000"/>
+              </a:lnSpc>
+            </a:pPr>
+            <a:r>
+              <a:rPr sz="2700" b="1">
+                <a:solidFill>
+                  <a:srgbClr val="0B2A4A"/>
+                </a:solidFill>
+                <a:latin typeface="Arial"/>
+                <a:ea typeface="微软雅黑"/>
+              </a:rPr>
+              <a:t>研究背景</a:t>
+            </a:r>
+          </a:p>
+        </p:txBody>
+      </p:sp>
+      <p:sp>
+        <p:nvSpPr>
+          <p:cNvPr id="4" name="Rectangle 3"/>
+          <p:cNvSpPr/>
+          <p:nvPr/>
+        </p:nvSpPr>
+        <p:spPr>
+          <a:xfrm>
+            <a:off x="566928" y="1298448"/>
+            <a:ext cx="32004" cy="365760"/>
+          </a:xfrm>
+          <a:prstGeom prst="rect">
+            <a:avLst/>
+          </a:prstGeom>
+          <a:solidFill>
+            <a:srgbClr val="1F5C99"/>
+          </a:solidFill>
+          <a:ln>
+            <a:noFill/>
+          </a:ln>
+          <a:effectLst/>
+        </p:spPr>
+        <p:style>
+          <a:lnRef idx="1">
+            <a:schemeClr val="accent1"/>
+          </a:lnRef>
+          <a:fillRef idx="3">
+            <a:schemeClr val="accent1"/>
+          </a:fillRef>
+          <a:effectRef idx="2">
+            <a:schemeClr val="accent1"/>
+          </a:effectRef>
+          <a:fontRef idx="minor">
+            <a:schemeClr val="lt1"/>
+          </a:fontRef>
+        </p:style>
+        <p:txBody>
+          <a:bodyPr rtlCol="0" anchor="ctr"/>
+          <a:lstStyle/>
+          <a:p>
+            <a:pPr algn="ctr"/>
+          </a:p>
+        </p:txBody>
+      </p:sp>
+      <p:sp>
+        <p:nvSpPr>
+          <p:cNvPr id="5" name="TextBox 4"/>
+          <p:cNvSpPr txBox="1"/>
+          <p:nvPr/>
+        </p:nvSpPr>
+        <p:spPr>
+          <a:xfrm>
+            <a:off x="713232" y="1261872"/>
+            <a:ext cx="10744200" cy="438912"/>
+          </a:xfrm>
+          <a:prstGeom prst="rect">
+            <a:avLst/>
+          </a:prstGeom>
+          <a:noFill/>
+        </p:spPr>
+        <p:txBody>
+          <a:bodyPr wrap="square" anchor="ctr" lIns="0" rIns="0" tIns="0" bIns="0">
+            <a:spAutoFit/>
+          </a:bodyPr>
+          <a:lstStyle/>
+          <a:p>
+            <a:pPr algn="l">
+              <a:lnSpc>
+                <a:spcPct val="110000"/>
+              </a:lnSpc>
+            </a:pPr>
+            <a:r>
+              <a:rPr sz="1800" b="1">
+                <a:solidFill>
+                  <a:srgbClr val="1F5C99"/>
+                </a:solidFill>
+                <a:latin typeface="Arial"/>
+                <a:ea typeface="微软雅黑"/>
+              </a:rPr>
+              <a:t>生产集群进入万节点量级，单实例架构在吞吐与高可用上同时受制</a:t>
+            </a:r>
+          </a:p>
+        </p:txBody>
+      </p:sp>
+      <p:sp>
+        <p:nvSpPr>
+          <p:cNvPr id="6" name="TextBox 5"/>
+          <p:cNvSpPr txBox="1"/>
+          <p:nvPr/>
+        </p:nvSpPr>
+        <p:spPr>
+          <a:xfrm>
+            <a:off x="566928" y="1783080"/>
+            <a:ext cx="10881360" cy="1234440"/>
+          </a:xfrm>
+          <a:prstGeom prst="rect">
+            <a:avLst/>
+          </a:prstGeom>
+          <a:noFill/>
+        </p:spPr>
+        <p:txBody>
+          <a:bodyPr wrap="square" anchor="t" lIns="0" rIns="0" tIns="0" bIns="0">
+            <a:spAutoFit/>
+          </a:bodyPr>
+          <a:lstStyle/>
+          <a:p>
+            <a:pPr algn="l">
+              <a:lnSpc>
+                <a:spcPct val="135000"/>
+              </a:lnSpc>
+            </a:pPr>
+            <a:r>
+              <a:rPr sz="1500" b="0">
+                <a:solidFill>
+                  <a:srgbClr val="333333"/>
+                </a:solidFill>
+                <a:latin typeface="Arial"/>
+                <a:ea typeface="微软雅黑"/>
+              </a:rPr>
+              <a:t>Kubernetes 已成为云原生的事实标准，调度器处在 Pod 生命周期的关键路径上：它的吞吐与延迟直接决定集群资源利用率与业务响应速度。千节点规模下单实例尚可支撑，集群进入万节点量级后，三个瓶颈同时显现。</a:t>
+            </a:r>
+          </a:p>
+        </p:txBody>
+      </p:sp>
+      <p:sp>
+        <p:nvSpPr>
+          <p:cNvPr id="7" name="Rounded Rectangle 6"/>
+          <p:cNvSpPr/>
+          <p:nvPr/>
+        </p:nvSpPr>
+        <p:spPr>
+          <a:xfrm>
+            <a:off x="566928" y="2880360"/>
+            <a:ext cx="3517391" cy="2103120"/>
+          </a:xfrm>
+          <a:prstGeom prst="roundRect">
+            <a:avLst/>
+          </a:prstGeom>
+          <a:solidFill>
+            <a:srgbClr val="F5F7FA"/>
+          </a:solidFill>
+          <a:ln w="9525">
+            <a:solidFill>
+              <a:srgbClr val="D8DFE8"/>
+            </a:solidFill>
+          </a:ln>
+          <a:effectLst/>
+        </p:spPr>
+        <p:style>
+          <a:lnRef idx="1">
+            <a:schemeClr val="accent1"/>
+          </a:lnRef>
+          <a:fillRef idx="3">
+            <a:schemeClr val="accent1"/>
+          </a:fillRef>
+          <a:effectRef idx="2">
+            <a:schemeClr val="accent1"/>
+          </a:effectRef>
+          <a:fontRef idx="minor">
+            <a:schemeClr val="lt1"/>
+          </a:fontRef>
+        </p:style>
+        <p:txBody>
+          <a:bodyPr rtlCol="0" anchor="ctr"/>
+          <a:lstStyle/>
+          <a:p>
+            <a:pPr algn="ctr"/>
+          </a:p>
+        </p:txBody>
+      </p:sp>
+      <p:sp>
+        <p:nvSpPr>
+          <p:cNvPr id="8" name="Rectangle 7"/>
+          <p:cNvSpPr/>
+          <p:nvPr/>
+        </p:nvSpPr>
+        <p:spPr>
+          <a:xfrm>
+            <a:off x="566928" y="2880360"/>
+            <a:ext cx="50292" cy="2103120"/>
+          </a:xfrm>
+          <a:prstGeom prst="rect">
+            <a:avLst/>
+          </a:prstGeom>
+          <a:solidFill>
+            <a:srgbClr val="1F5C99"/>
+          </a:solidFill>
+          <a:ln>
+            <a:noFill/>
+          </a:ln>
+          <a:effectLst/>
+        </p:spPr>
+        <p:style>
+          <a:lnRef idx="1">
+            <a:schemeClr val="accent1"/>
+          </a:lnRef>
+          <a:fillRef idx="3">
+            <a:schemeClr val="accent1"/>
+          </a:fillRef>
+          <a:effectRef idx="2">
+            <a:schemeClr val="accent1"/>
+          </a:effectRef>
+          <a:fontRef idx="minor">
+            <a:schemeClr val="lt1"/>
+          </a:fontRef>
+        </p:style>
+        <p:txBody>
+          <a:bodyPr rtlCol="0" anchor="ctr"/>
+          <a:lstStyle/>
+          <a:p>
+            <a:pPr algn="ctr"/>
+          </a:p>
+        </p:txBody>
+      </p:sp>
+      <p:sp>
+        <p:nvSpPr>
+          <p:cNvPr id="9" name="TextBox 8"/>
+          <p:cNvSpPr txBox="1"/>
+          <p:nvPr/>
+        </p:nvSpPr>
+        <p:spPr>
+          <a:xfrm>
+            <a:off x="731520" y="3008376"/>
+            <a:ext cx="3243072" cy="1920239"/>
+          </a:xfrm>
+          <a:prstGeom prst="rect">
+            <a:avLst/>
+          </a:prstGeom>
+          <a:noFill/>
+        </p:spPr>
+        <p:txBody>
+          <a:bodyPr wrap="square" anchor="t" lIns="0" rIns="0" tIns="0" bIns="0">
+            <a:spAutoFit/>
+          </a:bodyPr>
+          <a:lstStyle/>
+          <a:p>
+            <a:pPr algn="l"/>
+            <a:r>
+              <a:rPr sz="1400" b="1">
+                <a:solidFill>
+                  <a:srgbClr val="0B2A4A"/>
+                </a:solidFill>
+                <a:latin typeface="Arial"/>
+                <a:ea typeface="微软雅黑"/>
+              </a:rPr>
+              <a:t>吞吐存在上限</a:t>
+            </a:r>
+          </a:p>
+          <a:p>
+            <a:pPr algn="l">
+              <a:lnSpc>
+                <a:spcPct val="110000"/>
+              </a:lnSpc>
+              <a:spcBef>
+                <a:spcPts val="400"/>
+              </a:spcBef>
+            </a:pPr>
+            <a:r>
+              <a:rPr sz="1150" b="0">
+                <a:solidFill>
+                  <a:srgbClr val="333333"/>
+                </a:solidFill>
+                <a:latin typeface="Arial"/>
+                <a:ea typeface="微软雅黑"/>
+              </a:rPr>
+              <a:t>activeQ 串行处理 Pod，大规模弹性伸缩与批任务启动被拖慢</a:t>
+            </a:r>
+          </a:p>
+        </p:txBody>
+      </p:sp>
+      <p:sp>
+        <p:nvSpPr>
+          <p:cNvPr id="10" name="Rounded Rectangle 9"/>
+          <p:cNvSpPr/>
+          <p:nvPr/>
+        </p:nvSpPr>
+        <p:spPr>
+          <a:xfrm>
+            <a:off x="4340351" y="2880360"/>
+            <a:ext cx="3517391" cy="2103120"/>
+          </a:xfrm>
+          <a:prstGeom prst="roundRect">
+            <a:avLst/>
+          </a:prstGeom>
+          <a:solidFill>
+            <a:srgbClr val="F5F7FA"/>
+          </a:solidFill>
+          <a:ln w="9525">
+            <a:solidFill>
+              <a:srgbClr val="D8DFE8"/>
+            </a:solidFill>
+          </a:ln>
+          <a:effectLst/>
+        </p:spPr>
+        <p:style>
+          <a:lnRef idx="1">
+            <a:schemeClr val="accent1"/>
+          </a:lnRef>
+          <a:fillRef idx="3">
+            <a:schemeClr val="accent1"/>
+          </a:fillRef>
+          <a:effectRef idx="2">
+            <a:schemeClr val="accent1"/>
+          </a:effectRef>
+          <a:fontRef idx="minor">
+            <a:schemeClr val="lt1"/>
+          </a:fontRef>
+        </p:style>
+        <p:txBody>
+          <a:bodyPr rtlCol="0" anchor="ctr"/>
+          <a:lstStyle/>
+          <a:p>
+            <a:pPr algn="ctr"/>
+          </a:p>
+        </p:txBody>
+      </p:sp>
+      <p:sp>
+        <p:nvSpPr>
+          <p:cNvPr id="11" name="Rectangle 10"/>
+          <p:cNvSpPr/>
+          <p:nvPr/>
+        </p:nvSpPr>
+        <p:spPr>
+          <a:xfrm>
+            <a:off x="4340351" y="2880360"/>
+            <a:ext cx="50292" cy="2103120"/>
+          </a:xfrm>
+          <a:prstGeom prst="rect">
+            <a:avLst/>
+          </a:prstGeom>
+          <a:solidFill>
+            <a:srgbClr val="1F5C99"/>
+          </a:solidFill>
+          <a:ln>
+            <a:noFill/>
+          </a:ln>
+          <a:effectLst/>
+        </p:spPr>
+        <p:style>
+          <a:lnRef idx="1">
+            <a:schemeClr val="accent1"/>
+          </a:lnRef>
+          <a:fillRef idx="3">
+            <a:schemeClr val="accent1"/>
+          </a:fillRef>
+          <a:effectRef idx="2">
+            <a:schemeClr val="accent1"/>
+          </a:effectRef>
+          <a:fontRef idx="minor">
+            <a:schemeClr val="lt1"/>
+          </a:fontRef>
+        </p:style>
+        <p:txBody>
+          <a:bodyPr rtlCol="0" anchor="ctr"/>
+          <a:lstStyle/>
+          <a:p>
+            <a:pPr algn="ctr"/>
+          </a:p>
+        </p:txBody>
+      </p:sp>
+      <p:sp>
+        <p:nvSpPr>
+          <p:cNvPr id="12" name="TextBox 11"/>
+          <p:cNvSpPr txBox="1"/>
+          <p:nvPr/>
+        </p:nvSpPr>
+        <p:spPr>
+          <a:xfrm>
+            <a:off x="4504943" y="3008376"/>
+            <a:ext cx="3243072" cy="1920239"/>
+          </a:xfrm>
+          <a:prstGeom prst="rect">
+            <a:avLst/>
+          </a:prstGeom>
+          <a:noFill/>
+        </p:spPr>
+        <p:txBody>
+          <a:bodyPr wrap="square" anchor="t" lIns="0" rIns="0" tIns="0" bIns="0">
+            <a:spAutoFit/>
+          </a:bodyPr>
+          <a:lstStyle/>
+          <a:p>
+            <a:pPr algn="l"/>
+            <a:r>
+              <a:rPr sz="1400" b="1">
+                <a:solidFill>
+                  <a:srgbClr val="0B2A4A"/>
+                </a:solidFill>
+                <a:latin typeface="Arial"/>
+                <a:ea typeface="微软雅黑"/>
+              </a:rPr>
+              <a:t>尾延迟持续抬升</a:t>
+            </a:r>
+          </a:p>
+          <a:p>
+            <a:pPr algn="l">
+              <a:lnSpc>
+                <a:spcPct val="110000"/>
+              </a:lnSpc>
+              <a:spcBef>
+                <a:spcPts val="400"/>
+              </a:spcBef>
+            </a:pPr>
+            <a:r>
+              <a:rPr sz="1150" b="0">
+                <a:solidFill>
+                  <a:srgbClr val="333333"/>
+                </a:solidFill>
+                <a:latin typeface="Arial"/>
+                <a:ea typeface="微软雅黑"/>
+              </a:rPr>
+              <a:t>Filter/Score 遍历节点开销随规模线性上升，5000 节点下 P99 明显恶化</a:t>
+            </a:r>
+          </a:p>
+        </p:txBody>
+      </p:sp>
+      <p:sp>
+        <p:nvSpPr>
+          <p:cNvPr id="13" name="Rounded Rectangle 12"/>
+          <p:cNvSpPr/>
+          <p:nvPr/>
+        </p:nvSpPr>
+        <p:spPr>
+          <a:xfrm>
+            <a:off x="8113775" y="2880360"/>
+            <a:ext cx="3517391" cy="2103120"/>
+          </a:xfrm>
+          <a:prstGeom prst="roundRect">
+            <a:avLst/>
+          </a:prstGeom>
+          <a:solidFill>
+            <a:srgbClr val="F5F7FA"/>
+          </a:solidFill>
+          <a:ln w="9525">
+            <a:solidFill>
+              <a:srgbClr val="D8DFE8"/>
+            </a:solidFill>
+          </a:ln>
+          <a:effectLst/>
+        </p:spPr>
+        <p:style>
+          <a:lnRef idx="1">
+            <a:schemeClr val="accent1"/>
+          </a:lnRef>
+          <a:fillRef idx="3">
+            <a:schemeClr val="accent1"/>
+          </a:fillRef>
+          <a:effectRef idx="2">
+            <a:schemeClr val="accent1"/>
+          </a:effectRef>
+          <a:fontRef idx="minor">
+            <a:schemeClr val="lt1"/>
+          </a:fontRef>
+        </p:style>
+        <p:txBody>
+          <a:bodyPr rtlCol="0" anchor="ctr"/>
+          <a:lstStyle/>
+          <a:p>
+            <a:pPr algn="ctr"/>
+          </a:p>
+        </p:txBody>
+      </p:sp>
+      <p:sp>
+        <p:nvSpPr>
+          <p:cNvPr id="14" name="Rectangle 13"/>
+          <p:cNvSpPr/>
+          <p:nvPr/>
+        </p:nvSpPr>
+        <p:spPr>
+          <a:xfrm>
+            <a:off x="8113775" y="2880360"/>
+            <a:ext cx="50292" cy="2103120"/>
+          </a:xfrm>
+          <a:prstGeom prst="rect">
+            <a:avLst/>
+          </a:prstGeom>
+          <a:solidFill>
+            <a:srgbClr val="1F5C99"/>
+          </a:solidFill>
+          <a:ln>
+            <a:noFill/>
+          </a:ln>
+          <a:effectLst/>
+        </p:spPr>
+        <p:style>
+          <a:lnRef idx="1">
+            <a:schemeClr val="accent1"/>
+          </a:lnRef>
+          <a:fillRef idx="3">
+            <a:schemeClr val="accent1"/>
+          </a:fillRef>
+          <a:effectRef idx="2">
+            <a:schemeClr val="accent1"/>
+          </a:effectRef>
+          <a:fontRef idx="minor">
+            <a:schemeClr val="lt1"/>
+          </a:fontRef>
+        </p:style>
+        <p:txBody>
+          <a:bodyPr rtlCol="0" anchor="ctr"/>
+          <a:lstStyle/>
+          <a:p>
+            <a:pPr algn="ctr"/>
+          </a:p>
+        </p:txBody>
+      </p:sp>
+      <p:sp>
+        <p:nvSpPr>
+          <p:cNvPr id="15" name="TextBox 14"/>
+          <p:cNvSpPr txBox="1"/>
+          <p:nvPr/>
+        </p:nvSpPr>
+        <p:spPr>
+          <a:xfrm>
+            <a:off x="8278367" y="3008376"/>
+            <a:ext cx="3243072" cy="1920239"/>
+          </a:xfrm>
+          <a:prstGeom prst="rect">
+            <a:avLst/>
+          </a:prstGeom>
+          <a:noFill/>
+        </p:spPr>
+        <p:txBody>
+          <a:bodyPr wrap="square" anchor="t" lIns="0" rIns="0" tIns="0" bIns="0">
+            <a:spAutoFit/>
+          </a:bodyPr>
+          <a:lstStyle/>
+          <a:p>
+            <a:pPr algn="l"/>
+            <a:r>
+              <a:rPr sz="1400" b="1">
+                <a:solidFill>
+                  <a:srgbClr val="0B2A4A"/>
+                </a:solidFill>
+                <a:latin typeface="Arial"/>
+                <a:ea typeface="微软雅黑"/>
+              </a:rPr>
+              <a:t>单点故障风险</a:t>
+            </a:r>
+          </a:p>
+          <a:p>
+            <a:pPr algn="l">
+              <a:lnSpc>
+                <a:spcPct val="110000"/>
+              </a:lnSpc>
+              <a:spcBef>
+                <a:spcPts val="400"/>
+              </a:spcBef>
+            </a:pPr>
+            <a:r>
+              <a:rPr sz="1150" b="0">
+                <a:solidFill>
+                  <a:srgbClr val="333333"/>
+                </a:solidFill>
+                <a:latin typeface="Arial"/>
+                <a:ea typeface="微软雅黑"/>
+              </a:rPr>
+              <a:t>Leader 崩溃后需等待 Standby 接管，这段窗口内集群完全无法调度</a:t>
+            </a:r>
+          </a:p>
+        </p:txBody>
+      </p:sp>
+      <p:sp>
+        <p:nvSpPr>
+          <p:cNvPr id="16" name="TextBox 15"/>
+          <p:cNvSpPr txBox="1"/>
+          <p:nvPr/>
+        </p:nvSpPr>
+        <p:spPr>
+          <a:xfrm>
+            <a:off x="10780776" y="6345936"/>
+            <a:ext cx="850392" cy="219456"/>
+          </a:xfrm>
+          <a:prstGeom prst="rect">
+            <a:avLst/>
+          </a:prstGeom>
+          <a:noFill/>
+        </p:spPr>
+        <p:txBody>
+          <a:bodyPr wrap="square" anchor="t" lIns="0" rIns="0" tIns="0" bIns="0">
+            <a:spAutoFit/>
+          </a:bodyPr>
+          <a:lstStyle/>
+          <a:p>
+            <a:pPr algn="r"/>
+            <a:r>
+              <a:rPr sz="950" b="0">
+                <a:solidFill>
+                  <a:srgbClr val="566474"/>
+                </a:solidFill>
+                <a:latin typeface="Arial"/>
+                <a:ea typeface="微软雅黑"/>
+              </a:rPr>
+              <a:t>2 / 25</a:t>
+            </a:r>
+          </a:p>
+        </p:txBody>
+      </p:sp>
+    </p:spTree>
+  </p:cSld>
+  <p:clrMapOvr>
+    <a:masterClrMapping/>
+  </p:clrMapOvr>
+</p:sld>
+</file>
+
+<file path=ppt/slides/slide20.xml><?xml version="1.0" encoding="utf-8"?>
 <p:sld xmlns:a="http://schemas.openxmlformats.org/drawingml/2006/main" xmlns:p="http://schemas.openxmlformats.org/presentationml/2006/main" xmlns:r="http://schemas.openxmlformats.org/officeDocument/2006/relationships">
   <p:cSld>
     <p:bg>
@@ -15181,6 +14441,746 @@
                 <a:ea typeface="微软雅黑"/>
               </a:rPr>
               <a:t>▪  收益部分来自启动更快（口径权衡）</a:t>
+            </a:r>
+          </a:p>
+        </p:txBody>
+      </p:sp>
+      <p:sp>
+        <p:nvSpPr>
+          <p:cNvPr id="8" name="TextBox 7"/>
+          <p:cNvSpPr txBox="1"/>
+          <p:nvPr/>
+        </p:nvSpPr>
+        <p:spPr>
+          <a:xfrm>
+            <a:off x="566928" y="6309360"/>
+            <a:ext cx="10104120" cy="201168"/>
+          </a:xfrm>
+          <a:prstGeom prst="rect">
+            <a:avLst/>
+          </a:prstGeom>
+          <a:noFill/>
+        </p:spPr>
+        <p:txBody>
+          <a:bodyPr wrap="square" anchor="t" lIns="0" rIns="0" tIns="0" bIns="0">
+            <a:spAutoFit/>
+          </a:bodyPr>
+          <a:lstStyle/>
+          <a:p>
+            <a:pPr algn="l"/>
+            <a:r>
+              <a:rPr sz="850" b="0">
+                <a:solidFill>
+                  <a:srgbClr val="566474"/>
+                </a:solidFill>
+                <a:latin typeface="Arial"/>
+                <a:ea typeface="微软雅黑"/>
+              </a:rPr>
+              <a:t>编码：s1–s4 = 100 / 1000 / 5000 / 10000 节点；w1–w7 = 负载强度（w2 500、w3 1000、w4 2000 pods/s 极限、w5 突发、w6 Gang、w7 异构）；inst3 = 3 实例</a:t>
+            </a:r>
+          </a:p>
+        </p:txBody>
+      </p:sp>
+      <p:sp>
+        <p:nvSpPr>
+          <p:cNvPr id="9" name="TextBox 8"/>
+          <p:cNvSpPr txBox="1"/>
+          <p:nvPr/>
+        </p:nvSpPr>
+        <p:spPr>
+          <a:xfrm>
+            <a:off x="10780776" y="6345936"/>
+            <a:ext cx="850392" cy="219456"/>
+          </a:xfrm>
+          <a:prstGeom prst="rect">
+            <a:avLst/>
+          </a:prstGeom>
+          <a:noFill/>
+        </p:spPr>
+        <p:txBody>
+          <a:bodyPr wrap="square" anchor="t" lIns="0" rIns="0" tIns="0" bIns="0">
+            <a:spAutoFit/>
+          </a:bodyPr>
+          <a:lstStyle/>
+          <a:p>
+            <a:pPr algn="r"/>
+            <a:r>
+              <a:rPr sz="950" b="0">
+                <a:solidFill>
+                  <a:srgbClr val="566474"/>
+                </a:solidFill>
+                <a:latin typeface="Arial"/>
+                <a:ea typeface="微软雅黑"/>
+              </a:rPr>
+              <a:t>20 / 25</a:t>
+            </a:r>
+          </a:p>
+        </p:txBody>
+      </p:sp>
+    </p:spTree>
+  </p:cSld>
+  <p:clrMapOvr>
+    <a:masterClrMapping/>
+  </p:clrMapOvr>
+</p:sld>
+</file>
+
+<file path=ppt/slides/slide21.xml><?xml version="1.0" encoding="utf-8"?>
+<p:sld xmlns:a="http://schemas.openxmlformats.org/drawingml/2006/main" xmlns:p="http://schemas.openxmlformats.org/presentationml/2006/main" xmlns:r="http://schemas.openxmlformats.org/officeDocument/2006/relationships">
+  <p:cSld>
+    <p:bg>
+      <p:bgPr>
+        <a:solidFill>
+          <a:srgbClr val="FFFFFF"/>
+        </a:solidFill>
+        <a:effectLst/>
+      </p:bgPr>
+    </p:bg>
+    <p:spTree>
+      <p:nvGrpSpPr>
+        <p:cNvPr id="1" name=""/>
+        <p:cNvGrpSpPr/>
+        <p:nvPr/>
+      </p:nvGrpSpPr>
+      <p:grpSpPr/>
+      <p:sp>
+        <p:nvSpPr>
+          <p:cNvPr id="2" name="Rectangle 1"/>
+          <p:cNvSpPr/>
+          <p:nvPr/>
+        </p:nvSpPr>
+        <p:spPr>
+          <a:xfrm>
+            <a:off x="384048" y="420624"/>
+            <a:ext cx="77724" cy="475488"/>
+          </a:xfrm>
+          <a:prstGeom prst="rect">
+            <a:avLst/>
+          </a:prstGeom>
+          <a:solidFill>
+            <a:srgbClr val="E8833A"/>
+          </a:solidFill>
+          <a:ln>
+            <a:noFill/>
+          </a:ln>
+          <a:effectLst/>
+        </p:spPr>
+        <p:style>
+          <a:lnRef idx="1">
+            <a:schemeClr val="accent1"/>
+          </a:lnRef>
+          <a:fillRef idx="3">
+            <a:schemeClr val="accent1"/>
+          </a:fillRef>
+          <a:effectRef idx="2">
+            <a:schemeClr val="accent1"/>
+          </a:effectRef>
+          <a:fontRef idx="minor">
+            <a:schemeClr val="lt1"/>
+          </a:fontRef>
+        </p:style>
+        <p:txBody>
+          <a:bodyPr rtlCol="0" anchor="ctr"/>
+          <a:lstStyle/>
+          <a:p>
+            <a:pPr algn="ctr"/>
+          </a:p>
+        </p:txBody>
+      </p:sp>
+      <p:sp>
+        <p:nvSpPr>
+          <p:cNvPr id="3" name="TextBox 2"/>
+          <p:cNvSpPr txBox="1"/>
+          <p:nvPr/>
+        </p:nvSpPr>
+        <p:spPr>
+          <a:xfrm>
+            <a:off x="566928" y="329184"/>
+            <a:ext cx="11064240" cy="713232"/>
+          </a:xfrm>
+          <a:prstGeom prst="rect">
+            <a:avLst/>
+          </a:prstGeom>
+          <a:noFill/>
+        </p:spPr>
+        <p:txBody>
+          <a:bodyPr wrap="square" anchor="ctr" lIns="0" rIns="0" tIns="0" bIns="0">
+            <a:spAutoFit/>
+          </a:bodyPr>
+          <a:lstStyle/>
+          <a:p>
+            <a:pPr algn="l">
+              <a:lnSpc>
+                <a:spcPct val="105000"/>
+              </a:lnSpc>
+            </a:pPr>
+            <a:r>
+              <a:rPr sz="2700" b="1">
+                <a:solidFill>
+                  <a:srgbClr val="0B2A4A"/>
+                </a:solidFill>
+                <a:latin typeface="Arial"/>
+                <a:ea typeface="微软雅黑"/>
+              </a:rPr>
+              <a:t>故障注入 Layer 0</a:t>
+            </a:r>
+          </a:p>
+        </p:txBody>
+      </p:sp>
+      <p:sp>
+        <p:nvSpPr>
+          <p:cNvPr id="4" name="Rectangle 3"/>
+          <p:cNvSpPr/>
+          <p:nvPr/>
+        </p:nvSpPr>
+        <p:spPr>
+          <a:xfrm>
+            <a:off x="566928" y="1298448"/>
+            <a:ext cx="32004" cy="365760"/>
+          </a:xfrm>
+          <a:prstGeom prst="rect">
+            <a:avLst/>
+          </a:prstGeom>
+          <a:solidFill>
+            <a:srgbClr val="1F5C99"/>
+          </a:solidFill>
+          <a:ln>
+            <a:noFill/>
+          </a:ln>
+          <a:effectLst/>
+        </p:spPr>
+        <p:style>
+          <a:lnRef idx="1">
+            <a:schemeClr val="accent1"/>
+          </a:lnRef>
+          <a:fillRef idx="3">
+            <a:schemeClr val="accent1"/>
+          </a:fillRef>
+          <a:effectRef idx="2">
+            <a:schemeClr val="accent1"/>
+          </a:effectRef>
+          <a:fontRef idx="minor">
+            <a:schemeClr val="lt1"/>
+          </a:fontRef>
+        </p:style>
+        <p:txBody>
+          <a:bodyPr rtlCol="0" anchor="ctr"/>
+          <a:lstStyle/>
+          <a:p>
+            <a:pPr algn="ctr"/>
+          </a:p>
+        </p:txBody>
+      </p:sp>
+      <p:sp>
+        <p:nvSpPr>
+          <p:cNvPr id="5" name="TextBox 4"/>
+          <p:cNvSpPr txBox="1"/>
+          <p:nvPr/>
+        </p:nvSpPr>
+        <p:spPr>
+          <a:xfrm>
+            <a:off x="713232" y="1261872"/>
+            <a:ext cx="10744200" cy="438912"/>
+          </a:xfrm>
+          <a:prstGeom prst="rect">
+            <a:avLst/>
+          </a:prstGeom>
+          <a:noFill/>
+        </p:spPr>
+        <p:txBody>
+          <a:bodyPr wrap="square" anchor="ctr" lIns="0" rIns="0" tIns="0" bIns="0">
+            <a:spAutoFit/>
+          </a:bodyPr>
+          <a:lstStyle/>
+          <a:p>
+            <a:pPr algn="l">
+              <a:lnSpc>
+                <a:spcPct val="110000"/>
+              </a:lnSpc>
+            </a:pPr>
+            <a:r>
+              <a:rPr sz="1800" b="1">
+                <a:solidFill>
+                  <a:srgbClr val="1F5C99"/>
+                </a:solidFill>
+                <a:latin typeface="Arial"/>
+                <a:ea typeface="微软雅黑"/>
+              </a:rPr>
+              <a:t>10% 节点注解漂移，300 次拦截全部转为合规重排</a:t>
+            </a:r>
+          </a:p>
+        </p:txBody>
+      </p:sp>
+      <p:pic>
+        <p:nvPicPr>
+          <p:cNvPr id="6" name="Picture 5" descr="fig6-29a-layer0-timeseries.png"/>
+          <p:cNvPicPr>
+            <a:picLocks noChangeAspect="1"/>
+          </p:cNvPicPr>
+          <p:nvPr/>
+        </p:nvPicPr>
+        <p:blipFill>
+          <a:blip r:embed="rId2"/>
+          <a:stretch>
+            <a:fillRect/>
+          </a:stretch>
+        </p:blipFill>
+        <p:spPr>
+          <a:xfrm>
+            <a:off x="5806440" y="2657246"/>
+            <a:ext cx="5852160" cy="2457907"/>
+          </a:xfrm>
+          <a:prstGeom prst="rect">
+            <a:avLst/>
+          </a:prstGeom>
+        </p:spPr>
+      </p:pic>
+      <p:sp>
+        <p:nvSpPr>
+          <p:cNvPr id="7" name="TextBox 6"/>
+          <p:cNvSpPr txBox="1"/>
+          <p:nvPr/>
+        </p:nvSpPr>
+        <p:spPr>
+          <a:xfrm>
+            <a:off x="566928" y="2011680"/>
+            <a:ext cx="5029200" cy="1417320"/>
+          </a:xfrm>
+          <a:prstGeom prst="rect">
+            <a:avLst/>
+          </a:prstGeom>
+          <a:noFill/>
+        </p:spPr>
+        <p:txBody>
+          <a:bodyPr wrap="square" anchor="t" lIns="0" rIns="0" tIns="0" bIns="0">
+            <a:spAutoFit/>
+          </a:bodyPr>
+          <a:lstStyle/>
+          <a:p>
+            <a:pPr algn="l">
+              <a:lnSpc>
+                <a:spcPct val="115000"/>
+              </a:lnSpc>
+            </a:pPr>
+            <a:r>
+              <a:rPr sz="1550" b="0">
+                <a:solidFill>
+                  <a:srgbClr val="333333"/>
+                </a:solidFill>
+                <a:latin typeface="Arial"/>
+                <a:ea typeface="微软雅黑"/>
+              </a:rPr>
+              <a:t>▪  拦截 300 次 / 回退 300 次</a:t>
+            </a:r>
+          </a:p>
+          <a:p>
+            <a:pPr algn="l">
+              <a:lnSpc>
+                <a:spcPct val="115000"/>
+              </a:lnSpc>
+              <a:spcBef>
+                <a:spcPts val="1400"/>
+              </a:spcBef>
+            </a:pPr>
+            <a:r>
+              <a:rPr sz="1550" b="0">
+                <a:solidFill>
+                  <a:srgbClr val="333333"/>
+                </a:solidFill>
+                <a:latin typeface="Arial"/>
+                <a:ea typeface="微软雅黑"/>
+              </a:rPr>
+              <a:t>▪  绑定成功率 1.00；断言 50000/50000</a:t>
+            </a:r>
+          </a:p>
+          <a:p>
+            <a:pPr algn="l">
+              <a:lnSpc>
+                <a:spcPct val="115000"/>
+              </a:lnSpc>
+              <a:spcBef>
+                <a:spcPts val="1400"/>
+              </a:spcBef>
+            </a:pPr>
+            <a:r>
+              <a:rPr sz="1550" b="0">
+                <a:solidFill>
+                  <a:srgbClr val="333333"/>
+                </a:solidFill>
+                <a:latin typeface="Arial"/>
+                <a:ea typeface="微软雅黑"/>
+              </a:rPr>
+              <a:t>▪  总耗时 683 s 对基线 680 s（+0.4%）</a:t>
+            </a:r>
+          </a:p>
+        </p:txBody>
+      </p:sp>
+      <p:sp>
+        <p:nvSpPr>
+          <p:cNvPr id="8" name="TextBox 7"/>
+          <p:cNvSpPr txBox="1"/>
+          <p:nvPr/>
+        </p:nvSpPr>
+        <p:spPr>
+          <a:xfrm>
+            <a:off x="566928" y="6309360"/>
+            <a:ext cx="10104120" cy="201168"/>
+          </a:xfrm>
+          <a:prstGeom prst="rect">
+            <a:avLst/>
+          </a:prstGeom>
+          <a:noFill/>
+        </p:spPr>
+        <p:txBody>
+          <a:bodyPr wrap="square" anchor="t" lIns="0" rIns="0" tIns="0" bIns="0">
+            <a:spAutoFit/>
+          </a:bodyPr>
+          <a:lstStyle/>
+          <a:p>
+            <a:pPr algn="l"/>
+            <a:r>
+              <a:rPr sz="850" b="0">
+                <a:solidFill>
+                  <a:srgbClr val="566474"/>
+                </a:solidFill>
+                <a:latin typeface="Arial"/>
+                <a:ea typeface="微软雅黑"/>
+              </a:rPr>
+              <a:t>编码：s1–s4 = 100 / 1000 / 5000 / 10000 节点；w1–w7 = 负载强度（w2 500、w3 1000、w4 2000 pods/s 极限、w5 突发、w6 Gang、w7 异构）；inst3 = 3 实例</a:t>
+            </a:r>
+          </a:p>
+        </p:txBody>
+      </p:sp>
+      <p:sp>
+        <p:nvSpPr>
+          <p:cNvPr id="9" name="TextBox 8"/>
+          <p:cNvSpPr txBox="1"/>
+          <p:nvPr/>
+        </p:nvSpPr>
+        <p:spPr>
+          <a:xfrm>
+            <a:off x="10780776" y="6345936"/>
+            <a:ext cx="850392" cy="219456"/>
+          </a:xfrm>
+          <a:prstGeom prst="rect">
+            <a:avLst/>
+          </a:prstGeom>
+          <a:noFill/>
+        </p:spPr>
+        <p:txBody>
+          <a:bodyPr wrap="square" anchor="t" lIns="0" rIns="0" tIns="0" bIns="0">
+            <a:spAutoFit/>
+          </a:bodyPr>
+          <a:lstStyle/>
+          <a:p>
+            <a:pPr algn="r"/>
+            <a:r>
+              <a:rPr sz="950" b="0">
+                <a:solidFill>
+                  <a:srgbClr val="566474"/>
+                </a:solidFill>
+                <a:latin typeface="Arial"/>
+                <a:ea typeface="微软雅黑"/>
+              </a:rPr>
+              <a:t>21 / 25</a:t>
+            </a:r>
+          </a:p>
+        </p:txBody>
+      </p:sp>
+    </p:spTree>
+  </p:cSld>
+  <p:clrMapOvr>
+    <a:masterClrMapping/>
+  </p:clrMapOvr>
+</p:sld>
+</file>
+
+<file path=ppt/slides/slide22.xml><?xml version="1.0" encoding="utf-8"?>
+<p:sld xmlns:a="http://schemas.openxmlformats.org/drawingml/2006/main" xmlns:p="http://schemas.openxmlformats.org/presentationml/2006/main" xmlns:r="http://schemas.openxmlformats.org/officeDocument/2006/relationships">
+  <p:cSld>
+    <p:bg>
+      <p:bgPr>
+        <a:solidFill>
+          <a:srgbClr val="FFFFFF"/>
+        </a:solidFill>
+        <a:effectLst/>
+      </p:bgPr>
+    </p:bg>
+    <p:spTree>
+      <p:nvGrpSpPr>
+        <p:cNvPr id="1" name=""/>
+        <p:cNvGrpSpPr/>
+        <p:nvPr/>
+      </p:nvGrpSpPr>
+      <p:grpSpPr/>
+      <p:sp>
+        <p:nvSpPr>
+          <p:cNvPr id="2" name="Rectangle 1"/>
+          <p:cNvSpPr/>
+          <p:nvPr/>
+        </p:nvSpPr>
+        <p:spPr>
+          <a:xfrm>
+            <a:off x="384048" y="420624"/>
+            <a:ext cx="77724" cy="475488"/>
+          </a:xfrm>
+          <a:prstGeom prst="rect">
+            <a:avLst/>
+          </a:prstGeom>
+          <a:solidFill>
+            <a:srgbClr val="E8833A"/>
+          </a:solidFill>
+          <a:ln>
+            <a:noFill/>
+          </a:ln>
+          <a:effectLst/>
+        </p:spPr>
+        <p:style>
+          <a:lnRef idx="1">
+            <a:schemeClr val="accent1"/>
+          </a:lnRef>
+          <a:fillRef idx="3">
+            <a:schemeClr val="accent1"/>
+          </a:fillRef>
+          <a:effectRef idx="2">
+            <a:schemeClr val="accent1"/>
+          </a:effectRef>
+          <a:fontRef idx="minor">
+            <a:schemeClr val="lt1"/>
+          </a:fontRef>
+        </p:style>
+        <p:txBody>
+          <a:bodyPr rtlCol="0" anchor="ctr"/>
+          <a:lstStyle/>
+          <a:p>
+            <a:pPr algn="ctr"/>
+          </a:p>
+        </p:txBody>
+      </p:sp>
+      <p:sp>
+        <p:nvSpPr>
+          <p:cNvPr id="3" name="TextBox 2"/>
+          <p:cNvSpPr txBox="1"/>
+          <p:nvPr/>
+        </p:nvSpPr>
+        <p:spPr>
+          <a:xfrm>
+            <a:off x="566928" y="329184"/>
+            <a:ext cx="11064240" cy="713232"/>
+          </a:xfrm>
+          <a:prstGeom prst="rect">
+            <a:avLst/>
+          </a:prstGeom>
+          <a:noFill/>
+        </p:spPr>
+        <p:txBody>
+          <a:bodyPr wrap="square" anchor="ctr" lIns="0" rIns="0" tIns="0" bIns="0">
+            <a:spAutoFit/>
+          </a:bodyPr>
+          <a:lstStyle/>
+          <a:p>
+            <a:pPr algn="l">
+              <a:lnSpc>
+                <a:spcPct val="105000"/>
+              </a:lnSpc>
+            </a:pPr>
+            <a:r>
+              <a:rPr sz="2700" b="1">
+                <a:solidFill>
+                  <a:srgbClr val="0B2A4A"/>
+                </a:solidFill>
+                <a:latin typeface="Arial"/>
+                <a:ea typeface="微软雅黑"/>
+              </a:rPr>
+              <a:t>故障注入 Layer 3</a:t>
+            </a:r>
+          </a:p>
+        </p:txBody>
+      </p:sp>
+      <p:sp>
+        <p:nvSpPr>
+          <p:cNvPr id="4" name="Rectangle 3"/>
+          <p:cNvSpPr/>
+          <p:nvPr/>
+        </p:nvSpPr>
+        <p:spPr>
+          <a:xfrm>
+            <a:off x="566928" y="1298448"/>
+            <a:ext cx="32004" cy="365760"/>
+          </a:xfrm>
+          <a:prstGeom prst="rect">
+            <a:avLst/>
+          </a:prstGeom>
+          <a:solidFill>
+            <a:srgbClr val="1F5C99"/>
+          </a:solidFill>
+          <a:ln>
+            <a:noFill/>
+          </a:ln>
+          <a:effectLst/>
+        </p:spPr>
+        <p:style>
+          <a:lnRef idx="1">
+            <a:schemeClr val="accent1"/>
+          </a:lnRef>
+          <a:fillRef idx="3">
+            <a:schemeClr val="accent1"/>
+          </a:fillRef>
+          <a:effectRef idx="2">
+            <a:schemeClr val="accent1"/>
+          </a:effectRef>
+          <a:fontRef idx="minor">
+            <a:schemeClr val="lt1"/>
+          </a:fontRef>
+        </p:style>
+        <p:txBody>
+          <a:bodyPr rtlCol="0" anchor="ctr"/>
+          <a:lstStyle/>
+          <a:p>
+            <a:pPr algn="ctr"/>
+          </a:p>
+        </p:txBody>
+      </p:sp>
+      <p:sp>
+        <p:nvSpPr>
+          <p:cNvPr id="5" name="TextBox 4"/>
+          <p:cNvSpPr txBox="1"/>
+          <p:nvPr/>
+        </p:nvSpPr>
+        <p:spPr>
+          <a:xfrm>
+            <a:off x="713232" y="1261872"/>
+            <a:ext cx="10744200" cy="438912"/>
+          </a:xfrm>
+          <a:prstGeom prst="rect">
+            <a:avLst/>
+          </a:prstGeom>
+          <a:noFill/>
+        </p:spPr>
+        <p:txBody>
+          <a:bodyPr wrap="square" anchor="ctr" lIns="0" rIns="0" tIns="0" bIns="0">
+            <a:spAutoFit/>
+          </a:bodyPr>
+          <a:lstStyle/>
+          <a:p>
+            <a:pPr algn="l">
+              <a:lnSpc>
+                <a:spcPct val="110000"/>
+              </a:lnSpc>
+            </a:pPr>
+            <a:r>
+              <a:rPr sz="1800" b="1">
+                <a:solidFill>
+                  <a:srgbClr val="1F5C99"/>
+                </a:solidFill>
+                <a:latin typeface="Arial"/>
+                <a:ea typeface="微软雅黑"/>
+              </a:rPr>
+              <a:t>杀掉 1/3 实例并停机 180 s，系统仍在 784 s 内完成全部绑定</a:t>
+            </a:r>
+          </a:p>
+        </p:txBody>
+      </p:sp>
+      <p:pic>
+        <p:nvPicPr>
+          <p:cNvPr id="6" name="Picture 5" descr="fig6-29b-layer3-timeseries.png"/>
+          <p:cNvPicPr>
+            <a:picLocks noChangeAspect="1"/>
+          </p:cNvPicPr>
+          <p:nvPr/>
+        </p:nvPicPr>
+        <p:blipFill>
+          <a:blip r:embed="rId2"/>
+          <a:stretch>
+            <a:fillRect/>
+          </a:stretch>
+        </p:blipFill>
+        <p:spPr>
+          <a:xfrm>
+            <a:off x="5806440" y="2657246"/>
+            <a:ext cx="5852160" cy="2457907"/>
+          </a:xfrm>
+          <a:prstGeom prst="rect">
+            <a:avLst/>
+          </a:prstGeom>
+        </p:spPr>
+      </p:pic>
+      <p:sp>
+        <p:nvSpPr>
+          <p:cNvPr id="7" name="TextBox 6"/>
+          <p:cNvSpPr txBox="1"/>
+          <p:nvPr/>
+        </p:nvSpPr>
+        <p:spPr>
+          <a:xfrm>
+            <a:off x="566928" y="2011680"/>
+            <a:ext cx="5029200" cy="1417320"/>
+          </a:xfrm>
+          <a:prstGeom prst="rect">
+            <a:avLst/>
+          </a:prstGeom>
+          <a:noFill/>
+        </p:spPr>
+        <p:txBody>
+          <a:bodyPr wrap="square" anchor="t" lIns="0" rIns="0" tIns="0" bIns="0">
+            <a:spAutoFit/>
+          </a:bodyPr>
+          <a:lstStyle/>
+          <a:p>
+            <a:pPr algn="l">
+              <a:lnSpc>
+                <a:spcPct val="115000"/>
+              </a:lnSpc>
+            </a:pPr>
+            <a:r>
+              <a:rPr sz="1550" b="0">
+                <a:solidFill>
+                  <a:srgbClr val="333333"/>
+                </a:solidFill>
+                <a:latin typeface="Arial"/>
+                <a:ea typeface="微软雅黑"/>
+              </a:rPr>
+              <a:t>▪  被杀实例绑定占比 68/8407 = 0.81%</a:t>
+            </a:r>
+          </a:p>
+          <a:p>
+            <a:pPr algn="l">
+              <a:lnSpc>
+                <a:spcPct val="115000"/>
+              </a:lnSpc>
+              <a:spcBef>
+                <a:spcPts val="1400"/>
+              </a:spcBef>
+            </a:pPr>
+            <a:r>
+              <a:rPr sz="1550" b="0">
+                <a:solidFill>
+                  <a:srgbClr val="333333"/>
+                </a:solidFill>
+                <a:latin typeface="Arial"/>
+                <a:ea typeface="微软雅黑"/>
+              </a:rPr>
+              <a:t>▪  存活实例接管 8407 pods；pending 353→2</a:t>
+            </a:r>
+          </a:p>
+          <a:p>
+            <a:pPr algn="l">
+              <a:lnSpc>
+                <a:spcPct val="115000"/>
+              </a:lnSpc>
+              <a:spcBef>
+                <a:spcPts val="1400"/>
+              </a:spcBef>
+            </a:pPr>
+            <a:r>
+              <a:rPr sz="1550" b="0">
+                <a:solidFill>
+                  <a:srgbClr val="333333"/>
+                </a:solidFill>
+                <a:latin typeface="Arial"/>
+                <a:ea typeface="微软雅黑"/>
+              </a:rPr>
+              <a:t>▪  总耗时 784 s，较基线 +15.3%</a:t>
             </a:r>
           </a:p>
         </p:txBody>

--- a/docs/thesis/defense/答辩PPT-基于etcd的分布式Kubernetes调度器.pptx
+++ b/docs/thesis/defense/答辩PPT-基于etcd的分布式Kubernetes调度器.pptx
@@ -883,7 +883,7 @@
           <a:lstStyle/>
           <a:p>
             <a:r>
-              <a:t>在给性能数字之前，先说正确性。144 次 run，每次跑完都在 apiserver 侧断言：未绑定为零、重复绑定为零，全部通过；ENO 那 48 次 run 成功率都是 100%。两场故障注入各 6 项判据全过。所谓正确，不是日志里没报错，而是外部可观测的事实对得上。断言是在 apiserver 侧做的，不是调度器自报。</a:t>
+              <a:t>在给性能数字之前，先说正确性。144 次 run，每次跑完都在 apiserver 侧断言：未绑定为零、重复绑定为零，全部通过；ENO 那 48 次 run 成功率都是 100%。两场故障注入各 6 项判据全过：Layer 0 拦截 300 次、全部由 Dispatcher 回退重排；Layer 3 存活实例接管 8407 个 Pod、pending 从 353 回落到 2。所谓正确，不是日志里没报错，而是外部可观测的事实对得上。断言是在 apiserver 侧做的，不是调度器自报。</a:t>
             </a:r>
           </a:p>
         </p:txBody>
@@ -9955,7 +9955,7 @@
                 <a:latin typeface="Arial"/>
                 <a:ea typeface="微软雅黑"/>
               </a:rPr>
-              <a:t>▪  Layer 0 / Layer 3 故障注入各 6 项判据全过</a:t>
+              <a:t>▪  故障注入各 6 项判据全过：L0 拦截 300 次、全部经回退重排；L3 存活实例接管 8407 pods、pending 353 → 2</a:t>
             </a:r>
           </a:p>
           <a:p>

--- a/docs/thesis/defense/答辩PPT-基于etcd的分布式Kubernetes调度器.pptx
+++ b/docs/thesis/defense/答辩PPT-基于etcd的分布式Kubernetes调度器.pptx
@@ -673,7 +673,7 @@
           <a:lstStyle/>
           <a:p>
             <a:r>
-              <a:t>所有机制最后都归约到这一条不变量 I：任一 Pod 至多绑定到一个节点。证明拆四点。P1 是 Bind 唯一性，来自 Kubernetes 自身：nodeName 为空才允许原子写入，重复写返回 409。P2 是 Assumed 清理，Reject 阶段 ForgetPod 清内存态，Layer 2 清 etcd 注解。P3 是清理到重分发的时序，一次 PatchPod 原子提交。P4 是 Layer 0 前置拦截，缓存滞后由 P1 兜底。这也是后面所有实验断言的设计依据：断言查的就是未绑定与重复绑定两项。</a:t>
+              <a:t>所有机制最后都归约到这一条不变量 I：任一 Pod 至多绑定到一个节点。证明拆四点。P1 是 Bind 唯一性，来自 Kubernetes 自身：nodeName 为空才允许原子写入，重复写返回 409。P2 是 Assumed 清理，Reject 阶段 ForgetPod 清内存态，Layer 2 清 etcd 注解。P3 是清理到重分发的时序，一次 PatchPod 原子提交。P4 是 Layer 0 前置拦截，缓存滞后由 P1 兜底。</a:t>
             </a:r>
           </a:p>
         </p:txBody>
@@ -1653,7 +1653,7 @@
           <a:lstStyle/>
           <a:p>
             <a:r>
-              <a:t>最后收束。两个创新：ENO 把 Binder 放进进程内并用 CacheAdapter 共享缓存；四层容错给出不变量 I 的证明要点。三组证据：16 场景 144 次 run 全成功、平均 +11.9%、P99 最高 -82.9%、实例扩展 +17.5% 对 +1.4%。价值：不改 API、保留开关、基准开源。三组证据合起来，正好对应问题、方法与效果。</a:t>
+              <a:t>最后收束。两个创新：ENO 把 Binder 放进进程内并用 CacheAdapter 共享缓存；四层容错给出不变量 I 的证明要点。三组证据：16 场景 144 次 run 全成功、平均 +11.9%、P99 最高 -82.9%、实例扩展 +17.5% 对 +1.4%。价值：不改 API、保留开关、基准开源。</a:t>
             </a:r>
           </a:p>
         </p:txBody>
@@ -1723,7 +1723,7 @@
           <a:lstStyle/>
           <a:p>
             <a:r>
-              <a:t>汇报到这里。一句话总结：把 Binder 合并进 Scheduler 进程，用 etcd 原子语义上的四层容错守住“至多绑定一次”，在 16 个场景、144 次 run 上做到更高吞吐、更低尾延迟与 100% 绑定成功率。请各位老师批评指正。如果只问一个问题，我的回答就是刚才那一句。</a:t>
+              <a:t>汇报到这里。一句话总结：把 Binder 合并进 Scheduler 进程，用 etcd 原子语义上的四层容错守住“至多绑定一次”，在 16 个场景、144 次 run 上做到更高吞吐、更低尾延迟与 100% 绑定成功率。请各位老师批评指正。</a:t>
             </a:r>
           </a:p>
         </p:txBody>
@@ -2493,7 +2493,7 @@
           <a:lstStyle/>
           <a:p>
             <a:r>
-              <a:t>Dispatcher 内部三步。第一步排序入队：nodeName 为空、还没有 scheduler-name 注解的新 Pod，按 FIFO 进有序队列。第二步分发决策：PodGroup 成员复用已分配实例，否则按负载均衡挑最空闲的。第三步写入并跟踪：PatchPod 写 scheduler-name，失败进不可调度队列。注意它不选节点，只决定 Pod 去哪。</a:t>
+              <a:t>Dispatcher 内部三步。第一步排序入队：nodeName 为空、还没有 scheduler-name 注解的新 Pod，按 FIFO 进有序队列。第二步分发决策：PodGroup 成员复用已分配实例，否则按负载均衡挑最空闲的。第三步写入并跟踪：PatchPod 写 scheduler-name，失败进不可调度队列。</a:t>
             </a:r>
           </a:p>
         </p:txBody>

--- a/docs/thesis/defense/答辩PPT-基于etcd的分布式Kubernetes调度器.pptx
+++ b/docs/thesis/defense/答辩PPT-基于etcd的分布式Kubernetes调度器.pptx
@@ -883,7 +883,7 @@
           <a:lstStyle/>
           <a:p>
             <a:r>
-              <a:t>在给性能数字之前，先说正确性。144 次 run，每次跑完都在 apiserver 侧断言：未绑定为零、重复绑定为零，全部通过；ENO 那 48 次 run 成功率都是 100%。两场故障注入各 6 项判据全过：Layer 0 拦截 300 次、全部由 Dispatcher 回退重排；Layer 3 存活实例接管 8407 个 Pod、pending 从 353 回落到 2。所谓正确，不是日志里没报错，而是外部可观测的事实对得上。断言是在 apiserver 侧做的，不是调度器自报。</a:t>
+              <a:t>在给性能数字之前，先说正确性。144 次 run，每次跑完都在 apiserver 侧断言：未绑定为零、重复绑定为零，全部通过；ENO 那 48 次 run 成功率都是 100%。两场故障注入各 6 项判据全过。所谓正确，不是日志里没报错，而是外部可观测的事实对得上。断言是在 apiserver 侧做的，不是调度器自报。</a:t>
             </a:r>
           </a:p>
         </p:txBody>
@@ -9955,7 +9955,7 @@
                 <a:latin typeface="Arial"/>
                 <a:ea typeface="微软雅黑"/>
               </a:rPr>
-              <a:t>▪  故障注入各 6 项判据全过：L0 拦截 300 次、全部经回退重排；L3 存活实例接管 8407 pods、pending 353 → 2</a:t>
+              <a:t>▪  Layer 0 / Layer 3 故障注入均通过 6 项判据</a:t>
             </a:r>
           </a:p>
           <a:p>

--- a/docs/thesis/defense/答辩PPT-基于etcd的分布式Kubernetes调度器.pptx
+++ b/docs/thesis/defense/答辩PPT-基于etcd的分布式Kubernetes调度器.pptx
@@ -9955,7 +9955,7 @@
                 <a:latin typeface="Arial"/>
                 <a:ea typeface="微软雅黑"/>
               </a:rPr>
-              <a:t>▪  Layer 0 / Layer 3 故障注入均通过 6 项判据</a:t>
+              <a:t>▪  Layer 0 / Layer 3 故障注入均通过</a:t>
             </a:r>
           </a:p>
           <a:p>

--- a/docs/thesis/defense/答辩PPT-基于etcd的分布式Kubernetes调度器.pptx
+++ b/docs/thesis/defense/答辩PPT-基于etcd的分布式Kubernetes调度器.pptx
@@ -9956,26 +9956,6 @@
                 <a:ea typeface="微软雅黑"/>
               </a:rPr>
               <a:t>▪  Layer 0 / Layer 3 故障注入均通过</a:t>
-            </a:r>
-          </a:p>
-          <a:p>
-            <a:pPr algn="l">
-              <a:lnSpc>
-                <a:spcPct val="115000"/>
-              </a:lnSpc>
-              <a:spcBef>
-                <a:spcPts val="1200"/>
-              </a:spcBef>
-            </a:pPr>
-            <a:r>
-              <a:rPr sz="1550" b="0">
-                <a:solidFill>
-                  <a:srgbClr val="333333"/>
-                </a:solidFill>
-                <a:latin typeface="Arial"/>
-                <a:ea typeface="微软雅黑"/>
-              </a:rPr>
-              <a:t>▪  断言在 apiserver 侧可复核</a:t>
             </a:r>
           </a:p>
         </p:txBody>

--- a/docs/thesis/defense/答辩PPT-基于etcd的分布式Kubernetes调度器.pptx
+++ b/docs/thesis/defense/答辩PPT-基于etcd的分布式Kubernetes调度器.pptx
@@ -10939,7 +10939,7 @@
                 <a:latin typeface="Arial"/>
                 <a:ea typeface="微软雅黑"/>
               </a:rPr>
-              <a:t>ENO vs Gödel</a:t>
+              <a:t>ENO vs Gödel 各场景吞吐对比</a:t>
             </a:r>
           </a:p>
         </p:txBody>

--- a/docs/thesis/defense/答辩PPT-基于etcd的分布式Kubernetes调度器.pptx
+++ b/docs/thesis/defense/答辩PPT-基于etcd的分布式Kubernetes调度器.pptx
@@ -1093,7 +1093,7 @@
           <a:lstStyle/>
           <a:p>
             <a:r>
-              <a:t>延迟这页。除 s2/w2 外，11 个非 Gang 场景 P99 都低于 Gödel，改善 0.3% 到 82.9%。最典型是 s2/w3，23.48 秒降到 4.00 秒；单实例 s3/w3 从 32.57 秒到 16.22 秒。Pod 端到端 P99 在 12 个非 Gang 场景也都不高于 Gödel。Gang 是反的，放到局限里展开。延迟单位是秒，纵轴用对数，便于跨量级比较。改善的下界 0.3% 出现在已经接近饱和的场景。</a:t>
+              <a:t>和 Gödel 逐场景对比：16 个场景里 14 个领先，2 个持平，没有落后的，提升 2.0% 到 22.9%，平均 11.9%。优势最大的是高负载与多实例：s2/w3 高 22.9%，s3/w3 三实例高 21.7%。两个持平场景都没饱和，完成时间由注入速率决定。两个持平场景说明，未饱和时调度器再快也压不出更多吞吐。平均 11.9% 是 14 个领先场景提升幅度的均值。</a:t>
             </a:r>
           </a:p>
         </p:txBody>
@@ -11309,7 +11309,7 @@
                 <a:latin typeface="Arial"/>
                 <a:ea typeface="微软雅黑"/>
               </a:rPr>
-              <a:t>尾延迟</a:t>
+              <a:t>ENO vs Gödel 各场景尾延迟对比</a:t>
             </a:r>
           </a:p>
         </p:txBody>

--- a/docs/thesis/defense/答辩PPT-基于etcd的分布式Kubernetes调度器.pptx
+++ b/docs/thesis/defense/答辩PPT-基于etcd的分布式Kubernetes调度器.pptx
@@ -11450,14 +11450,14 @@
               </a:lnSpc>
             </a:pPr>
             <a:r>
-              <a:rPr sz="1550" b="0">
+              <a:rPr sz="1350" b="0">
                 <a:solidFill>
                   <a:srgbClr val="333333"/>
                 </a:solidFill>
                 <a:latin typeface="Arial"/>
                 <a:ea typeface="微软雅黑"/>
               </a:rPr>
-              <a:t>▪  P99 改善 0.3%~82.9%（除 s2/w2）</a:t>
+              <a:t>▪  16 个场景：11 好、1 持平（s2/w2）、3 个 Gang 反向、1 个无数据</a:t>
             </a:r>
           </a:p>
           <a:p>
@@ -11466,18 +11466,18 @@
                 <a:spcPct val="115000"/>
               </a:lnSpc>
               <a:spcBef>
-                <a:spcPts val="1400"/>
+                <a:spcPts val="1000"/>
               </a:spcBef>
             </a:pPr>
             <a:r>
-              <a:rPr sz="1550" b="0">
+              <a:rPr sz="1350" b="0">
                 <a:solidFill>
                   <a:srgbClr val="333333"/>
                 </a:solidFill>
                 <a:latin typeface="Arial"/>
                 <a:ea typeface="微软雅黑"/>
               </a:rPr>
-              <a:t>▪  s3/w3 inst1 32.57→16.22 s（-50.2%）</a:t>
+              <a:t>▪  Gang（w6）3 个场景全部偏差：P99 高 1.6~4.1 倍，但吞吐仍 +4.3%~+19.1%</a:t>
             </a:r>
           </a:p>
           <a:p>
@@ -11486,18 +11486,18 @@
                 <a:spcPct val="115000"/>
               </a:lnSpc>
               <a:spcBef>
-                <a:spcPts val="1400"/>
+                <a:spcPts val="1000"/>
               </a:spcBef>
             </a:pPr>
             <a:r>
-              <a:rPr sz="1550" b="0">
+              <a:rPr sz="1350" b="0">
                 <a:solidFill>
                   <a:srgbClr val="333333"/>
                 </a:solidFill>
                 <a:latin typeface="Arial"/>
                 <a:ea typeface="微软雅黑"/>
               </a:rPr>
-              <a:t>▪  Pod E2E P99 改善 0.6%~75.3%</a:t>
+              <a:t>▪  Pod E2E P99：12 个非 Gang 改善 0.6%~75.3%，3 个 Gang 高 11.9%~122.2%</a:t>
             </a:r>
           </a:p>
         </p:txBody>

--- a/docs/thesis/defense/答辩PPT-基于etcd的分布式Kubernetes调度器.pptx
+++ b/docs/thesis/defense/答辩PPT-基于etcd的分布式Kubernetes调度器.pptx
@@ -11457,7 +11457,7 @@
                 <a:latin typeface="Arial"/>
                 <a:ea typeface="微软雅黑"/>
               </a:rPr>
-              <a:t>▪  16 个场景：11 好、1 持平（s2/w2）、3 个 Gang 反向、1 个无数据</a:t>
+              <a:t>▪  15 个场景：11 好、1 持平（s2/w2）、3 个 Gang 反向</a:t>
             </a:r>
           </a:p>
           <a:p>

--- a/docs/thesis/defense/答辩PPT-基于etcd的分布式Kubernetes调度器.pptx
+++ b/docs/thesis/defense/答辩PPT-基于etcd的分布式Kubernetes调度器.pptx
@@ -1163,7 +1163,7 @@
           <a:lstStyle/>
           <a:p>
             <a:r>
-              <a:t>这是全文最强的归因证据。同样把实例从 1 加到 3，两边延迟都降约 99%，这部分一样。差别在吞吐：ENO 从 297.6 到 349.7，提升 17.5%；Gödel 从 283.3 到 287.4，只提升 1.4%。同样多的并发能力，Gödel 的增量被独立 Binder 的串行绑定吸收掉了。延迟数量级下降说明瓶颈不在决策侧，而在绑定这一环的串行化。峰值吞吐两家都涨，但只有 ENO 把增量转化成了有效吞吐。</a:t>
+              <a:t>和 Gödel 逐场景对比：16 个场景里 14 个领先，2 个持平，没有落后的，提升 2.0% 到 22.9%，平均 11.9%。优势最大的是高负载与多实例：s2/w3 高 22.9%，s3/w3 三实例高 21.7%。两个持平场景都没饱和，完成时间由注入速率决定。两个持平场景说明，未饱和时调度器再快也压不出更多吞吐。平均 11.9% 是 14 个领先场景提升幅度的均值。</a:t>
             </a:r>
           </a:p>
         </p:txBody>
@@ -11679,7 +11679,7 @@
                 <a:latin typeface="Arial"/>
                 <a:ea typeface="微软雅黑"/>
               </a:rPr>
-              <a:t>实例 1→3</a:t>
+              <a:t>ENO vs Gödel 实例扩展对比</a:t>
             </a:r>
           </a:p>
         </p:txBody>

--- a/docs/thesis/defense/答辩PPT-基于etcd的分布式Kubernetes调度器.pptx
+++ b/docs/thesis/defense/答辩PPT-基于etcd的分布式Kubernetes调度器.pptx
@@ -12187,46 +12187,6 @@
                 <a:ea typeface="微软雅黑"/>
               </a:rPr>
               <a:t>▪  延迟都降约 99%，但吞吐转化率差 12 倍</a:t>
-            </a:r>
-          </a:p>
-          <a:p>
-            <a:pPr algn="l">
-              <a:lnSpc>
-                <a:spcPct val="115000"/>
-              </a:lnSpc>
-              <a:spcBef>
-                <a:spcPts val="400"/>
-              </a:spcBef>
-            </a:pPr>
-            <a:r>
-              <a:rPr sz="1200" b="0">
-                <a:solidFill>
-                  <a:srgbClr val="333333"/>
-                </a:solidFill>
-                <a:latin typeface="Arial"/>
-                <a:ea typeface="微软雅黑"/>
-              </a:rPr>
-              <a:t>▪  Gödel 增量被独立 Binder 串行吸收</a:t>
-            </a:r>
-          </a:p>
-          <a:p>
-            <a:pPr algn="l">
-              <a:lnSpc>
-                <a:spcPct val="115000"/>
-              </a:lnSpc>
-              <a:spcBef>
-                <a:spcPts val="400"/>
-              </a:spcBef>
-            </a:pPr>
-            <a:r>
-              <a:rPr sz="1200" b="0">
-                <a:solidFill>
-                  <a:srgbClr val="333333"/>
-                </a:solidFill>
-                <a:latin typeface="Arial"/>
-                <a:ea typeface="微软雅黑"/>
-              </a:rPr>
-              <a:t>▪  这是架构归因最强的一组证据</a:t>
             </a:r>
           </a:p>
         </p:txBody>

--- a/docs/thesis/defense/答辩PPT-基于etcd的分布式Kubernetes调度器.pptx
+++ b/docs/thesis/defense/答辩PPT-基于etcd的分布式Kubernetes调度器.pptx
@@ -12467,7 +12467,7 @@
         </p:nvGraphicFramePr>
         <p:xfrm>
           <a:off x="566928" y="1828800"/>
-          <a:ext cx="11064240" cy="2103120"/>
+          <a:ext cx="11064240" cy="2560320"/>
         </p:xfrm>
         <a:graphic>
           <a:graphicData uri="http://schemas.openxmlformats.org/drawingml/2006/table">
@@ -12476,11 +12476,11 @@
                 <a:tableStyleId>{5C22544A-7EE6-4342-B048-85BDC9FD1C3A}</a:tableStyleId>
               </a:tblPr>
               <a:tblGrid>
-                <a:gridCol w="3688080"/>
-                <a:gridCol w="3688080"/>
-                <a:gridCol w="3688080"/>
+                <a:gridCol w="2423160"/>
+                <a:gridCol w="4160520"/>
+                <a:gridCol w="4480560"/>
               </a:tblGrid>
-              <a:tr h="420624">
+              <a:tr h="512064">
                 <a:tc>
                   <a:txBody>
                     <a:bodyPr wrap="square"/>
@@ -12488,7 +12488,7 @@
                     <a:p>
                       <a:pPr algn="l"/>
                       <a:r>
-                        <a:rPr sz="1200" b="1">
+                        <a:rPr sz="1150" b="1">
                           <a:solidFill>
                             <a:srgbClr val="FFFFFF"/>
                           </a:solidFill>
@@ -12512,14 +12512,14 @@
                     <a:p>
                       <a:pPr algn="ctr"/>
                       <a:r>
-                        <a:rPr sz="1200" b="1">
+                        <a:rPr sz="1150" b="1">
                           <a:solidFill>
                             <a:srgbClr val="FFFFFF"/>
                           </a:solidFill>
                           <a:latin typeface="Arial"/>
                           <a:ea typeface="微软雅黑"/>
                         </a:rPr>
-                        <a:t>ENO vs Gödel 有效吞吐</a:t>
+                        <a:t>有效吞吐（ENO vs Gödel）</a:t>
                       </a:r>
                     </a:p>
                   </a:txBody>
@@ -12536,14 +12536,14 @@
                     <a:p>
                       <a:pPr algn="ctr"/>
                       <a:r>
-                        <a:rPr sz="1200" b="1">
+                        <a:rPr sz="1150" b="1">
                           <a:solidFill>
                             <a:srgbClr val="FFFFFF"/>
                           </a:solidFill>
                           <a:latin typeface="Arial"/>
                           <a:ea typeface="微软雅黑"/>
                         </a:rPr>
-                        <a:t>P99 / E2E 变化</a:t>
+                        <a:t>尾延迟变化</a:t>
                       </a:r>
                     </a:p>
                   </a:txBody>
@@ -12554,7 +12554,7 @@
                   </a:tcPr>
                 </a:tc>
               </a:tr>
-              <a:tr h="420624">
+              <a:tr h="512064">
                 <a:tc>
                   <a:txBody>
                     <a:bodyPr wrap="square"/>
@@ -12562,14 +12562,14 @@
                     <a:p>
                       <a:pPr algn="l"/>
                       <a:r>
-                        <a:rPr sz="1200" b="0">
+                        <a:rPr sz="1150" b="0">
                           <a:solidFill>
                             <a:srgbClr val="333333"/>
                           </a:solidFill>
                           <a:latin typeface="Arial"/>
                           <a:ea typeface="微软雅黑"/>
                         </a:rPr>
-                        <a:t>s3→s4（w3，实例不变）</a:t>
+                        <a:t>s3 → s4（w3）</a:t>
                       </a:r>
                     </a:p>
                   </a:txBody>
@@ -12586,14 +12586,14 @@
                     <a:p>
                       <a:pPr algn="ctr"/>
                       <a:r>
-                        <a:rPr sz="1200" b="0">
+                        <a:rPr sz="1150" b="0">
                           <a:solidFill>
                             <a:srgbClr val="333333"/>
                           </a:solidFill>
                           <a:latin typeface="Arial"/>
                           <a:ea typeface="微软雅黑"/>
                         </a:rPr>
-                        <a:t>349.7→296.7 vs 287.4→280.9（+5.6%）</a:t>
+                        <a:t>+5.6%（296.7 vs 280.9）</a:t>
                       </a:r>
                     </a:p>
                   </a:txBody>
@@ -12610,7 +12610,7 @@
                     <a:p>
                       <a:pPr algn="ctr"/>
                       <a:r>
-                        <a:rPr sz="1200" b="0">
+                        <a:rPr sz="1150" b="0">
                           <a:solidFill>
                             <a:srgbClr val="333333"/>
                           </a:solidFill>
@@ -12628,7 +12628,7 @@
                   </a:tcPr>
                 </a:tc>
               </a:tr>
-              <a:tr h="420624">
+              <a:tr h="512064">
                 <a:tc>
                   <a:txBody>
                     <a:bodyPr wrap="square"/>
@@ -12636,7 +12636,7 @@
                     <a:p>
                       <a:pPr algn="l"/>
                       <a:r>
-                        <a:rPr sz="1200" b="0">
+                        <a:rPr sz="1150" b="0">
                           <a:solidFill>
                             <a:srgbClr val="333333"/>
                           </a:solidFill>
@@ -12660,7 +12660,7 @@
                     <a:p>
                       <a:pPr algn="ctr"/>
                       <a:r>
-                        <a:rPr sz="1200" b="0">
+                        <a:rPr sz="1150" b="0">
                           <a:solidFill>
                             <a:srgbClr val="333333"/>
                           </a:solidFill>
@@ -12684,14 +12684,14 @@
                     <a:p>
                       <a:pPr algn="ctr"/>
                       <a:r>
-                        <a:rPr sz="1200" b="0">
+                        <a:rPr sz="1150" b="0">
                           <a:solidFill>
                             <a:srgbClr val="333333"/>
                           </a:solidFill>
                           <a:latin typeface="Arial"/>
                           <a:ea typeface="微软雅黑"/>
                         </a:rPr>
-                        <a:t>P99 -49.7% / -14.8%；E2E -32.6%~-35.3%</a:t>
+                        <a:t>P99 −49.7% / −14.8%</a:t>
                       </a:r>
                     </a:p>
                   </a:txBody>
@@ -12702,7 +12702,7 @@
                   </a:tcPr>
                 </a:tc>
               </a:tr>
-              <a:tr h="420624">
+              <a:tr h="512064">
                 <a:tc>
                   <a:txBody>
                     <a:bodyPr wrap="square"/>
@@ -12710,7 +12710,7 @@
                     <a:p>
                       <a:pPr algn="l"/>
                       <a:r>
-                        <a:rPr sz="1200" b="0">
+                        <a:rPr sz="1150" b="0">
                           <a:solidFill>
                             <a:srgbClr val="333333"/>
                           </a:solidFill>
@@ -12734,7 +12734,7 @@
                     <a:p>
                       <a:pPr algn="ctr"/>
                       <a:r>
-                        <a:rPr sz="1200" b="0">
+                        <a:rPr sz="1150" b="0">
                           <a:solidFill>
                             <a:srgbClr val="333333"/>
                           </a:solidFill>
@@ -12758,14 +12758,14 @@
                     <a:p>
                       <a:pPr algn="ctr"/>
                       <a:r>
-                        <a:rPr sz="1200" b="0">
+                        <a:rPr sz="1150" b="0">
                           <a:solidFill>
                             <a:srgbClr val="333333"/>
                           </a:solidFill>
                           <a:latin typeface="Arial"/>
                           <a:ea typeface="微软雅黑"/>
                         </a:rPr>
-                        <a:t>s3 E2E -53.8%；s4 基本持平</a:t>
+                        <a:t>E2E −53.8% / 持平</a:t>
                       </a:r>
                     </a:p>
                   </a:txBody>
@@ -12776,7 +12776,7 @@
                   </a:tcPr>
                 </a:tc>
               </a:tr>
-              <a:tr h="420624">
+              <a:tr h="512064">
                 <a:tc>
                   <a:txBody>
                     <a:bodyPr wrap="square"/>
@@ -12784,7 +12784,7 @@
                     <a:p>
                       <a:pPr algn="l"/>
                       <a:r>
-                        <a:rPr sz="1200" b="0">
+                        <a:rPr sz="1150" b="0">
                           <a:solidFill>
                             <a:srgbClr val="333333"/>
                           </a:solidFill>
@@ -12808,14 +12808,14 @@
                     <a:p>
                       <a:pPr algn="ctr"/>
                       <a:r>
-                        <a:rPr sz="1200" b="0">
+                        <a:rPr sz="1150" b="0">
                           <a:solidFill>
                             <a:srgbClr val="333333"/>
                           </a:solidFill>
                           <a:latin typeface="Arial"/>
                           <a:ea typeface="微软雅黑"/>
                         </a:rPr>
-                        <a:t>+21.2% / 基本持平</a:t>
+                        <a:t>+21.2% / 持平</a:t>
                       </a:r>
                     </a:p>
                   </a:txBody>
@@ -12832,14 +12832,14 @@
                     <a:p>
                       <a:pPr algn="ctr"/>
                       <a:r>
-                        <a:rPr sz="1200" b="0">
+                        <a:rPr sz="1150" b="0">
                           <a:solidFill>
                             <a:srgbClr val="333333"/>
                           </a:solidFill>
                           <a:latin typeface="Arial"/>
                           <a:ea typeface="微软雅黑"/>
                         </a:rPr>
-                        <a:t>s3 E2E -67.6%</a:t>
+                        <a:t>E2E −67.6% / 持平</a:t>
                       </a:r>
                     </a:p>
                   </a:txBody>
@@ -12862,7 +12862,7 @@
         </p:nvSpPr>
         <p:spPr>
           <a:xfrm>
-            <a:off x="566928" y="5074920"/>
+            <a:off x="566928" y="4718304"/>
             <a:ext cx="10972800" cy="914400"/>
           </a:xfrm>
           <a:prstGeom prst="rect">

--- a/docs/thesis/defense/答辩PPT-基于etcd的分布式Kubernetes调度器.pptx
+++ b/docs/thesis/defense/答辩PPT-基于etcd的分布式Kubernetes调度器.pptx
@@ -12569,7 +12569,7 @@
                           <a:latin typeface="Arial"/>
                           <a:ea typeface="微软雅黑"/>
                         </a:rPr>
-                        <a:t>s3 → s4（w3）</a:t>
+                        <a:t>w3 稳态（s3 → s4）</a:t>
                       </a:r>
                     </a:p>
                   </a:txBody>

--- a/docs/thesis/defense/答辩PPT-基于etcd的分布式Kubernetes调度器.pptx
+++ b/docs/thesis/defense/答辩PPT-基于etcd的分布式Kubernetes调度器.pptx
@@ -12569,7 +12569,7 @@
                           <a:latin typeface="Arial"/>
                           <a:ea typeface="微软雅黑"/>
                         </a:rPr>
-                        <a:t>w3 稳态（s3 → s4）</a:t>
+                        <a:t>w3 稳态（s3 / s4）</a:t>
                       </a:r>
                     </a:p>
                   </a:txBody>
@@ -12593,7 +12593,7 @@
                           <a:latin typeface="Arial"/>
                           <a:ea typeface="微软雅黑"/>
                         </a:rPr>
-                        <a:t>+5.6%（296.7 vs 280.9）</a:t>
+                        <a:t>+21.7% / +5.6%</a:t>
                       </a:r>
                     </a:p>
                   </a:txBody>
@@ -12617,7 +12617,7 @@
                           <a:latin typeface="Arial"/>
                           <a:ea typeface="微软雅黑"/>
                         </a:rPr>
-                        <a:t>P99 0.19 vs 0.28 s（低 33.4%）</a:t>
+                        <a:t>P99 −15.2% / −33.4%</a:t>
                       </a:r>
                     </a:p>
                   </a:txBody>

--- a/docs/thesis/defense/答辩PPT-基于etcd的分布式Kubernetes调度器.pptx
+++ b/docs/thesis/defense/答辩PPT-基于etcd的分布式Kubernetes调度器.pptx
@@ -12543,7 +12543,7 @@
                           <a:latin typeface="Arial"/>
                           <a:ea typeface="微软雅黑"/>
                         </a:rPr>
-                        <a:t>尾延迟变化</a:t>
+                        <a:t>P99 调度延迟（相对 Gödel）</a:t>
                       </a:r>
                     </a:p>
                   </a:txBody>
@@ -12617,7 +12617,7 @@
                           <a:latin typeface="Arial"/>
                           <a:ea typeface="微软雅黑"/>
                         </a:rPr>
-                        <a:t>P99 −15.2% / −33.4%</a:t>
+                        <a:t>−15.2% / −33.4%</a:t>
                       </a:r>
                     </a:p>
                   </a:txBody>
@@ -12691,7 +12691,7 @@
                           <a:latin typeface="Arial"/>
                           <a:ea typeface="微软雅黑"/>
                         </a:rPr>
-                        <a:t>P99 −49.7% / −14.8%</a:t>
+                        <a:t>−49.7% / −14.8%</a:t>
                       </a:r>
                     </a:p>
                   </a:txBody>
@@ -12765,7 +12765,7 @@
                           <a:latin typeface="Arial"/>
                           <a:ea typeface="微软雅黑"/>
                         </a:rPr>
-                        <a:t>E2E −53.8% / 持平</a:t>
+                        <a:t>−18.0% / −0.3%</a:t>
                       </a:r>
                     </a:p>
                   </a:txBody>
@@ -12839,7 +12839,7 @@
                           <a:latin typeface="Arial"/>
                           <a:ea typeface="微软雅黑"/>
                         </a:rPr>
-                        <a:t>E2E −67.6% / 持平</a:t>
+                        <a:t>−22.1% / −3.9%</a:t>
                       </a:r>
                     </a:p>
                   </a:txBody>

--- a/docs/thesis/defense/答辩PPT-基于etcd的分布式Kubernetes调度器.pptx
+++ b/docs/thesis/defense/答辩PPT-基于etcd的分布式Kubernetes调度器.pptx
@@ -12519,7 +12519,7 @@
                           <a:latin typeface="Arial"/>
                           <a:ea typeface="微软雅黑"/>
                         </a:rPr>
-                        <a:t>有效吞吐（ENO vs Gödel）</a:t>
+                        <a:t>有效吞吐提升（vs Gödel）</a:t>
                       </a:r>
                     </a:p>
                   </a:txBody>
@@ -12543,7 +12543,7 @@
                           <a:latin typeface="Arial"/>
                           <a:ea typeface="微软雅黑"/>
                         </a:rPr>
-                        <a:t>P99 调度延迟（相对 Gödel）</a:t>
+                        <a:t>P99 降幅（vs Gödel）</a:t>
                       </a:r>
                     </a:p>
                   </a:txBody>

--- a/docs/thesis/defense/答辩PPT-基于etcd的分布式Kubernetes调度器.pptx
+++ b/docs/thesis/defense/答辩PPT-基于etcd的分布式Kubernetes调度器.pptx
@@ -12519,7 +12519,7 @@
                           <a:latin typeface="Arial"/>
                           <a:ea typeface="微软雅黑"/>
                         </a:rPr>
-                        <a:t>有效吞吐提升（vs Gödel）</a:t>
+                        <a:t>吞吐提升（vs Gödel）</a:t>
                       </a:r>
                     </a:p>
                   </a:txBody>

--- a/docs/thesis/defense/答辩PPT-基于etcd的分布式Kubernetes调度器.pptx
+++ b/docs/thesis/defense/答辩PPT-基于etcd的分布式Kubernetes调度器.pptx
@@ -12889,7 +12889,7 @@
                 <a:latin typeface="Arial"/>
                 <a:ea typeface="微软雅黑"/>
               </a:rPr>
-              <a:t>▪  s4 队列堆积峰值 9 vs 61</a:t>
+              <a:t>▪  s4 队列堆积峰值 9 vs 61（低 85%），过载积压明显更少</a:t>
             </a:r>
           </a:p>
           <a:p>
@@ -12909,7 +12909,7 @@
                 <a:latin typeface="Arial"/>
                 <a:ea typeface="微软雅黑"/>
               </a:rPr>
-              <a:t>▪  规模翻倍时两者都退化（ENO -15.2%）</a:t>
+              <a:t>▪  规模翻倍后两者都退化：ENO −15.2%、Gödel −2.3%，但 ENO 仍领先 5.6%</a:t>
             </a:r>
           </a:p>
           <a:p>
@@ -12929,7 +12929,7 @@
                 <a:latin typeface="Arial"/>
                 <a:ea typeface="微软雅黑"/>
               </a:rPr>
-              <a:t>▪  s3/s4 固定 3 实例，口径需说明</a:t>
+              <a:t>▪  s3/s4 均固定 3 实例，本页衡量规模增长，不构成扩展上限</a:t>
             </a:r>
           </a:p>
         </p:txBody>

--- a/docs/thesis/defense/答辩PPT-基于etcd的分布式Kubernetes调度器.pptx
+++ b/docs/thesis/defense/答辩PPT-基于etcd的分布式Kubernetes调度器.pptx
@@ -11763,7 +11763,7 @@
                 <a:latin typeface="Arial"/>
                 <a:ea typeface="微软雅黑"/>
               </a:rPr>
-              <a:t>ENO 有效吞吐 +17.5%，Gödel 仅 +1.4%</a:t>
+              <a:t>实例 ×3：ENO 吞吐 ×1.18，Gödel 仅 ×1.01；P99 都降约 99%</a:t>
             </a:r>
           </a:p>
         </p:txBody>
@@ -11830,7 +11830,7 @@
                           <a:latin typeface="Arial"/>
                           <a:ea typeface="微软雅黑"/>
                         </a:rPr>
-                        <a:t>ENO inst1→inst3</a:t>
+                        <a:t>ENO：inst1 → inst3</a:t>
                       </a:r>
                     </a:p>
                   </a:txBody>
@@ -11854,7 +11854,7 @@
                           <a:latin typeface="Arial"/>
                           <a:ea typeface="微软雅黑"/>
                         </a:rPr>
-                        <a:t>Gödel inst1→inst3</a:t>
+                        <a:t>Gödel：inst1 → inst3</a:t>
                       </a:r>
                     </a:p>
                   </a:txBody>
@@ -11880,7 +11880,7 @@
                           <a:latin typeface="Arial"/>
                           <a:ea typeface="微软雅黑"/>
                         </a:rPr>
-                        <a:t>有效吞吐</a:t>
+                        <a:t>有效吞吐 pods/s</a:t>
                       </a:r>
                     </a:p>
                   </a:txBody>
@@ -11904,7 +11904,7 @@
                           <a:latin typeface="Arial"/>
                           <a:ea typeface="微软雅黑"/>
                         </a:rPr>
-                        <a:t>297.6 → 349.7（+17.5%）</a:t>
+                        <a:t>297.6 → 349.7（×1.18）</a:t>
                       </a:r>
                     </a:p>
                   </a:txBody>
@@ -11928,7 +11928,7 @@
                           <a:latin typeface="Arial"/>
                           <a:ea typeface="微软雅黑"/>
                         </a:rPr>
-                        <a:t>283.3 → 287.4（+1.4%）</a:t>
+                        <a:t>283.3 → 287.4（×1.01）</a:t>
                       </a:r>
                     </a:p>
                   </a:txBody>
@@ -11954,7 +11954,7 @@
                           <a:latin typeface="Arial"/>
                           <a:ea typeface="微软雅黑"/>
                         </a:rPr>
-                        <a:t>P99 延迟</a:t>
+                        <a:t>P99 延迟 s</a:t>
                       </a:r>
                     </a:p>
                   </a:txBody>
@@ -11978,7 +11978,7 @@
                           <a:latin typeface="Arial"/>
                           <a:ea typeface="微软雅黑"/>
                         </a:rPr>
-                        <a:t>16.22 → 0.13 s（-99.2%）</a:t>
+                        <a:t>16.22 → 0.13（−99.2%）</a:t>
                       </a:r>
                     </a:p>
                   </a:txBody>
@@ -12002,7 +12002,7 @@
                           <a:latin typeface="Arial"/>
                           <a:ea typeface="微软雅黑"/>
                         </a:rPr>
-                        <a:t>32.57 → 0.15 s（-99.5%）</a:t>
+                        <a:t>32.57 → 0.15（−99.5%）</a:t>
                       </a:r>
                     </a:p>
                   </a:txBody>
@@ -12186,7 +12186,7 @@
                 <a:latin typeface="Arial"/>
                 <a:ea typeface="微软雅黑"/>
               </a:rPr>
-              <a:t>▪  延迟都降约 99%，但吞吐转化率差 12 倍</a:t>
+              <a:t>▪  同样的实例增量：ENO 多 52.1 pods/s，Gödel 只多 4.1 pods/s</a:t>
             </a:r>
           </a:p>
         </p:txBody>

--- a/docs/thesis/defense/答辩PPT-基于etcd的分布式Kubernetes调度器.pptx
+++ b/docs/thesis/defense/答辩PPT-基于etcd的分布式Kubernetes调度器.pptx
@@ -12467,7 +12467,7 @@
         </p:nvGraphicFramePr>
         <p:xfrm>
           <a:off x="566928" y="1828800"/>
-          <a:ext cx="11064240" cy="2560320"/>
+          <a:ext cx="11064240" cy="3291840"/>
         </p:xfrm>
         <a:graphic>
           <a:graphicData uri="http://schemas.openxmlformats.org/drawingml/2006/table">
@@ -12480,7 +12480,7 @@
                 <a:gridCol w="4160520"/>
                 <a:gridCol w="4480560"/>
               </a:tblGrid>
-              <a:tr h="512064">
+              <a:tr h="658368">
                 <a:tc>
                   <a:txBody>
                     <a:bodyPr wrap="square"/>
@@ -12488,7 +12488,7 @@
                     <a:p>
                       <a:pPr algn="l"/>
                       <a:r>
-                        <a:rPr sz="1150" b="1">
+                        <a:rPr sz="1250" b="1">
                           <a:solidFill>
                             <a:srgbClr val="FFFFFF"/>
                           </a:solidFill>
@@ -12512,7 +12512,7 @@
                     <a:p>
                       <a:pPr algn="ctr"/>
                       <a:r>
-                        <a:rPr sz="1150" b="1">
+                        <a:rPr sz="1250" b="1">
                           <a:solidFill>
                             <a:srgbClr val="FFFFFF"/>
                           </a:solidFill>
@@ -12536,7 +12536,7 @@
                     <a:p>
                       <a:pPr algn="ctr"/>
                       <a:r>
-                        <a:rPr sz="1150" b="1">
+                        <a:rPr sz="1250" b="1">
                           <a:solidFill>
                             <a:srgbClr val="FFFFFF"/>
                           </a:solidFill>
@@ -12554,7 +12554,7 @@
                   </a:tcPr>
                 </a:tc>
               </a:tr>
-              <a:tr h="512064">
+              <a:tr h="658368">
                 <a:tc>
                   <a:txBody>
                     <a:bodyPr wrap="square"/>
@@ -12562,7 +12562,7 @@
                     <a:p>
                       <a:pPr algn="l"/>
                       <a:r>
-                        <a:rPr sz="1150" b="0">
+                        <a:rPr sz="1250" b="0">
                           <a:solidFill>
                             <a:srgbClr val="333333"/>
                           </a:solidFill>
@@ -12586,7 +12586,7 @@
                     <a:p>
                       <a:pPr algn="ctr"/>
                       <a:r>
-                        <a:rPr sz="1150" b="0">
+                        <a:rPr sz="1250" b="0">
                           <a:solidFill>
                             <a:srgbClr val="333333"/>
                           </a:solidFill>
@@ -12610,7 +12610,7 @@
                     <a:p>
                       <a:pPr algn="ctr"/>
                       <a:r>
-                        <a:rPr sz="1150" b="0">
+                        <a:rPr sz="1250" b="0">
                           <a:solidFill>
                             <a:srgbClr val="333333"/>
                           </a:solidFill>
@@ -12628,7 +12628,7 @@
                   </a:tcPr>
                 </a:tc>
               </a:tr>
-              <a:tr h="512064">
+              <a:tr h="658368">
                 <a:tc>
                   <a:txBody>
                     <a:bodyPr wrap="square"/>
@@ -12636,7 +12636,7 @@
                     <a:p>
                       <a:pPr algn="l"/>
                       <a:r>
-                        <a:rPr sz="1150" b="0">
+                        <a:rPr sz="1250" b="0">
                           <a:solidFill>
                             <a:srgbClr val="333333"/>
                           </a:solidFill>
@@ -12660,7 +12660,7 @@
                     <a:p>
                       <a:pPr algn="ctr"/>
                       <a:r>
-                        <a:rPr sz="1150" b="0">
+                        <a:rPr sz="1250" b="0">
                           <a:solidFill>
                             <a:srgbClr val="333333"/>
                           </a:solidFill>
@@ -12684,7 +12684,7 @@
                     <a:p>
                       <a:pPr algn="ctr"/>
                       <a:r>
-                        <a:rPr sz="1150" b="0">
+                        <a:rPr sz="1250" b="0">
                           <a:solidFill>
                             <a:srgbClr val="333333"/>
                           </a:solidFill>
@@ -12702,7 +12702,7 @@
                   </a:tcPr>
                 </a:tc>
               </a:tr>
-              <a:tr h="512064">
+              <a:tr h="658368">
                 <a:tc>
                   <a:txBody>
                     <a:bodyPr wrap="square"/>
@@ -12710,7 +12710,7 @@
                     <a:p>
                       <a:pPr algn="l"/>
                       <a:r>
-                        <a:rPr sz="1150" b="0">
+                        <a:rPr sz="1250" b="0">
                           <a:solidFill>
                             <a:srgbClr val="333333"/>
                           </a:solidFill>
@@ -12734,7 +12734,7 @@
                     <a:p>
                       <a:pPr algn="ctr"/>
                       <a:r>
-                        <a:rPr sz="1150" b="0">
+                        <a:rPr sz="1250" b="0">
                           <a:solidFill>
                             <a:srgbClr val="333333"/>
                           </a:solidFill>
@@ -12758,7 +12758,7 @@
                     <a:p>
                       <a:pPr algn="ctr"/>
                       <a:r>
-                        <a:rPr sz="1150" b="0">
+                        <a:rPr sz="1250" b="0">
                           <a:solidFill>
                             <a:srgbClr val="333333"/>
                           </a:solidFill>
@@ -12776,7 +12776,7 @@
                   </a:tcPr>
                 </a:tc>
               </a:tr>
-              <a:tr h="512064">
+              <a:tr h="658368">
                 <a:tc>
                   <a:txBody>
                     <a:bodyPr wrap="square"/>
@@ -12784,7 +12784,7 @@
                     <a:p>
                       <a:pPr algn="l"/>
                       <a:r>
-                        <a:rPr sz="1150" b="0">
+                        <a:rPr sz="1250" b="0">
                           <a:solidFill>
                             <a:srgbClr val="333333"/>
                           </a:solidFill>
@@ -12808,7 +12808,7 @@
                     <a:p>
                       <a:pPr algn="ctr"/>
                       <a:r>
-                        <a:rPr sz="1150" b="0">
+                        <a:rPr sz="1250" b="0">
                           <a:solidFill>
                             <a:srgbClr val="333333"/>
                           </a:solidFill>
@@ -12832,7 +12832,7 @@
                     <a:p>
                       <a:pPr algn="ctr"/>
                       <a:r>
-                        <a:rPr sz="1150" b="0">
+                        <a:rPr sz="1250" b="0">
                           <a:solidFill>
                             <a:srgbClr val="333333"/>
                           </a:solidFill>
@@ -12862,86 +12862,6 @@
         </p:nvSpPr>
         <p:spPr>
           <a:xfrm>
-            <a:off x="566928" y="4718304"/>
-            <a:ext cx="10972800" cy="914400"/>
-          </a:xfrm>
-          <a:prstGeom prst="rect">
-            <a:avLst/>
-          </a:prstGeom>
-          <a:noFill/>
-        </p:spPr>
-        <p:txBody>
-          <a:bodyPr wrap="square" anchor="t" lIns="0" rIns="0" tIns="0" bIns="0">
-            <a:spAutoFit/>
-          </a:bodyPr>
-          <a:lstStyle/>
-          <a:p>
-            <a:pPr algn="l">
-              <a:lnSpc>
-                <a:spcPct val="115000"/>
-              </a:lnSpc>
-            </a:pPr>
-            <a:r>
-              <a:rPr sz="1300" b="0">
-                <a:solidFill>
-                  <a:srgbClr val="333333"/>
-                </a:solidFill>
-                <a:latin typeface="Arial"/>
-                <a:ea typeface="微软雅黑"/>
-              </a:rPr>
-              <a:t>▪  s4 队列堆积峰值 9 vs 61（低 85%），过载积压明显更少</a:t>
-            </a:r>
-          </a:p>
-          <a:p>
-            <a:pPr algn="l">
-              <a:lnSpc>
-                <a:spcPct val="115000"/>
-              </a:lnSpc>
-              <a:spcBef>
-                <a:spcPts val="600"/>
-              </a:spcBef>
-            </a:pPr>
-            <a:r>
-              <a:rPr sz="1300" b="0">
-                <a:solidFill>
-                  <a:srgbClr val="333333"/>
-                </a:solidFill>
-                <a:latin typeface="Arial"/>
-                <a:ea typeface="微软雅黑"/>
-              </a:rPr>
-              <a:t>▪  规模翻倍后两者都退化：ENO −15.2%、Gödel −2.3%，但 ENO 仍领先 5.6%</a:t>
-            </a:r>
-          </a:p>
-          <a:p>
-            <a:pPr algn="l">
-              <a:lnSpc>
-                <a:spcPct val="115000"/>
-              </a:lnSpc>
-              <a:spcBef>
-                <a:spcPts val="600"/>
-              </a:spcBef>
-            </a:pPr>
-            <a:r>
-              <a:rPr sz="1300" b="0">
-                <a:solidFill>
-                  <a:srgbClr val="333333"/>
-                </a:solidFill>
-                <a:latin typeface="Arial"/>
-                <a:ea typeface="微软雅黑"/>
-              </a:rPr>
-              <a:t>▪  s3/s4 均固定 3 实例，本页衡量规模增长，不构成扩展上限</a:t>
-            </a:r>
-          </a:p>
-        </p:txBody>
-      </p:sp>
-      <p:sp>
-        <p:nvSpPr>
-          <p:cNvPr id="8" name="TextBox 7"/>
-          <p:cNvSpPr txBox="1"/>
-          <p:nvPr/>
-        </p:nvSpPr>
-        <p:spPr>
-          <a:xfrm>
             <a:off x="566928" y="6309360"/>
             <a:ext cx="10104120" cy="201168"/>
           </a:xfrm>
@@ -12972,7 +12892,7 @@
       </p:sp>
       <p:sp>
         <p:nvSpPr>
-          <p:cNvPr id="9" name="TextBox 8"/>
+          <p:cNvPr id="8" name="TextBox 7"/>
           <p:cNvSpPr txBox="1"/>
           <p:nvPr/>
         </p:nvSpPr>

--- a/docs/thesis/defense/答辩PPT-基于etcd的分布式Kubernetes调度器.pptx
+++ b/docs/thesis/defense/答辩PPT-基于etcd的分布式Kubernetes调度器.pptx
@@ -12373,101 +12373,17 @@
           </a:p>
         </p:txBody>
       </p:sp>
-      <p:sp>
-        <p:nvSpPr>
-          <p:cNvPr id="4" name="Rectangle 3"/>
-          <p:cNvSpPr/>
-          <p:nvPr/>
-        </p:nvSpPr>
-        <p:spPr>
-          <a:xfrm>
-            <a:off x="566928" y="1298448"/>
-            <a:ext cx="32004" cy="365760"/>
-          </a:xfrm>
-          <a:prstGeom prst="rect">
-            <a:avLst/>
-          </a:prstGeom>
-          <a:solidFill>
-            <a:srgbClr val="1F5C99"/>
-          </a:solidFill>
-          <a:ln>
-            <a:noFill/>
-          </a:ln>
-          <a:effectLst/>
-        </p:spPr>
-        <p:style>
-          <a:lnRef idx="1">
-            <a:schemeClr val="accent1"/>
-          </a:lnRef>
-          <a:fillRef idx="3">
-            <a:schemeClr val="accent1"/>
-          </a:fillRef>
-          <a:effectRef idx="2">
-            <a:schemeClr val="accent1"/>
-          </a:effectRef>
-          <a:fontRef idx="minor">
-            <a:schemeClr val="lt1"/>
-          </a:fontRef>
-        </p:style>
-        <p:txBody>
-          <a:bodyPr rtlCol="0" anchor="ctr"/>
-          <a:lstStyle/>
-          <a:p>
-            <a:pPr algn="ctr"/>
-          </a:p>
-        </p:txBody>
-      </p:sp>
-      <p:sp>
-        <p:nvSpPr>
-          <p:cNvPr id="5" name="TextBox 4"/>
-          <p:cNvSpPr txBox="1"/>
-          <p:nvPr/>
-        </p:nvSpPr>
-        <p:spPr>
-          <a:xfrm>
-            <a:off x="713232" y="1261872"/>
-            <a:ext cx="10744200" cy="438912"/>
-          </a:xfrm>
-          <a:prstGeom prst="rect">
-            <a:avLst/>
-          </a:prstGeom>
-          <a:noFill/>
-        </p:spPr>
-        <p:txBody>
-          <a:bodyPr wrap="square" anchor="ctr" lIns="0" rIns="0" tIns="0" bIns="0">
-            <a:spAutoFit/>
-          </a:bodyPr>
-          <a:lstStyle/>
-          <a:p>
-            <a:pPr algn="l">
-              <a:lnSpc>
-                <a:spcPct val="110000"/>
-              </a:lnSpc>
-            </a:pPr>
-            <a:r>
-              <a:rPr sz="1800" b="1">
-                <a:solidFill>
-                  <a:srgbClr val="1F5C99"/>
-                </a:solidFill>
-                <a:latin typeface="Arial"/>
-                <a:ea typeface="微软雅黑"/>
-              </a:rPr>
-              <a:t>s4 规模下吞吐仍 +5.6%、P99 低 33.4%；突发、极限、异构均不落后</a:t>
-            </a:r>
-          </a:p>
-        </p:txBody>
-      </p:sp>
       <p:graphicFrame>
         <p:nvGraphicFramePr>
-          <p:cNvPr id="6" name="Table 5"/>
+          <p:cNvPr id="4" name="Table 3"/>
           <p:cNvGraphicFramePr>
             <a:graphicFrameLocks noGrp="1"/>
           </p:cNvGraphicFramePr>
           <p:nvPr/>
         </p:nvGraphicFramePr>
         <p:xfrm>
-          <a:off x="566928" y="1828800"/>
-          <a:ext cx="11064240" cy="3291840"/>
+          <a:off x="566928" y="1207008"/>
+          <a:ext cx="11064240" cy="3657600"/>
         </p:xfrm>
         <a:graphic>
           <a:graphicData uri="http://schemas.openxmlformats.org/drawingml/2006/table">
@@ -12480,7 +12396,7 @@
                 <a:gridCol w="4160520"/>
                 <a:gridCol w="4480560"/>
               </a:tblGrid>
-              <a:tr h="658368">
+              <a:tr h="731520">
                 <a:tc>
                   <a:txBody>
                     <a:bodyPr wrap="square"/>
@@ -12554,7 +12470,7 @@
                   </a:tcPr>
                 </a:tc>
               </a:tr>
-              <a:tr h="658368">
+              <a:tr h="731520">
                 <a:tc>
                   <a:txBody>
                     <a:bodyPr wrap="square"/>
@@ -12628,7 +12544,7 @@
                   </a:tcPr>
                 </a:tc>
               </a:tr>
-              <a:tr h="658368">
+              <a:tr h="731520">
                 <a:tc>
                   <a:txBody>
                     <a:bodyPr wrap="square"/>
@@ -12702,7 +12618,7 @@
                   </a:tcPr>
                 </a:tc>
               </a:tr>
-              <a:tr h="658368">
+              <a:tr h="731520">
                 <a:tc>
                   <a:txBody>
                     <a:bodyPr wrap="square"/>
@@ -12776,7 +12692,7 @@
                   </a:tcPr>
                 </a:tc>
               </a:tr>
-              <a:tr h="658368">
+              <a:tr h="731520">
                 <a:tc>
                   <a:txBody>
                     <a:bodyPr wrap="square"/>
@@ -12856,7 +12772,7 @@
       </p:graphicFrame>
       <p:sp>
         <p:nvSpPr>
-          <p:cNvPr id="7" name="TextBox 6"/>
+          <p:cNvPr id="5" name="TextBox 4"/>
           <p:cNvSpPr txBox="1"/>
           <p:nvPr/>
         </p:nvSpPr>
@@ -12892,7 +12808,7 @@
       </p:sp>
       <p:sp>
         <p:nvSpPr>
-          <p:cNvPr id="8" name="TextBox 7"/>
+          <p:cNvPr id="6" name="TextBox 5"/>
           <p:cNvSpPr txBox="1"/>
           <p:nvPr/>
         </p:nvSpPr>

--- a/docs/thesis/defense/答辩PPT-基于etcd的分布式Kubernetes调度器.pptx
+++ b/docs/thesis/defense/答辩PPT-基于etcd的分布式Kubernetes调度器.pptx
@@ -7761,6 +7761,56 @@
                   </a:txBody>
                   <a:tcPr marL="54864" marR="54864" marT="18288" marB="18288" anchor="ctr">
                     <a:solidFill>
+                      <a:srgbClr val="F5F7FA"/>
+                    </a:solidFill>
+                  </a:tcPr>
+                </a:tc>
+                <a:tc>
+                  <a:txBody>
+                    <a:bodyPr wrap="square"/>
+                    <a:lstStyle/>
+                    <a:p>
+                      <a:pPr algn="ctr"/>
+                      <a:r>
+                        <a:rPr sz="1150" b="0">
+                          <a:solidFill>
+                            <a:srgbClr val="333333"/>
+                          </a:solidFill>
+                          <a:latin typeface="Arial"/>
+                          <a:ea typeface="微软雅黑"/>
+                        </a:rPr>
+                        <a:t>100 / 1000 / 5000 / 10000 节点</a:t>
+                      </a:r>
+                    </a:p>
+                  </a:txBody>
+                  <a:tcPr marL="54864" marR="54864" marT="18288" marB="18288" anchor="ctr">
+                    <a:solidFill>
+                      <a:srgbClr val="F5F7FA"/>
+                    </a:solidFill>
+                  </a:tcPr>
+                </a:tc>
+              </a:tr>
+              <a:tr h="384048">
+                <a:tc>
+                  <a:txBody>
+                    <a:bodyPr wrap="square"/>
+                    <a:lstStyle/>
+                    <a:p>
+                      <a:pPr algn="l"/>
+                      <a:r>
+                        <a:rPr sz="1150" b="0">
+                          <a:solidFill>
+                            <a:srgbClr val="333333"/>
+                          </a:solidFill>
+                          <a:latin typeface="Arial"/>
+                          <a:ea typeface="微软雅黑"/>
+                        </a:rPr>
+                        <a:t>速率型 w1–w4</a:t>
+                      </a:r>
+                    </a:p>
+                  </a:txBody>
+                  <a:tcPr marL="54864" marR="54864" marT="18288" marB="18288" anchor="ctr">
+                    <a:solidFill>
                       <a:srgbClr val="FFFFFF"/>
                     </a:solidFill>
                   </a:tcPr>
@@ -7779,7 +7829,7 @@
                           <a:latin typeface="Arial"/>
                           <a:ea typeface="微软雅黑"/>
                         </a:rPr>
-                        <a:t>100 / 1000 / 5000 / 10000 节点</a:t>
+                        <a:t>100 / 500 / 1000 / 2000 pods/s（1 万 / 5 万 / 10 万 / 20 万 Pod，w4 为极限）</a:t>
                       </a:r>
                     </a:p>
                   </a:txBody>
@@ -7805,7 +7855,7 @@
                           <a:latin typeface="Arial"/>
                           <a:ea typeface="微软雅黑"/>
                         </a:rPr>
-                        <a:t>速率型 w1–w4</a:t>
+                        <a:t>突发 w5</a:t>
                       </a:r>
                     </a:p>
                   </a:txBody>
@@ -7829,7 +7879,7 @@
                           <a:latin typeface="Arial"/>
                           <a:ea typeface="微软雅黑"/>
                         </a:rPr>
-                        <a:t>100 / 500 / 1000 / 2000 pods/s（1 万 / 5 万 / 10 万 / 20 万 Pod，w4 为极限）</a:t>
+                        <a:t>0 → 2000 → 0 pods/s，5 万 Pod，考察涌入与退潮</a:t>
                       </a:r>
                     </a:p>
                   </a:txBody>
@@ -7855,7 +7905,7 @@
                           <a:latin typeface="Arial"/>
                           <a:ea typeface="微软雅黑"/>
                         </a:rPr>
-                        <a:t>突发 w5</a:t>
+                        <a:t>Gang w6</a:t>
                       </a:r>
                     </a:p>
                   </a:txBody>
@@ -7879,7 +7929,7 @@
                           <a:latin typeface="Arial"/>
                           <a:ea typeface="微软雅黑"/>
                         </a:rPr>
-                        <a:t>0 → 2000 → 0 pods/s，5 万 Pod，考察涌入与退潮</a:t>
+                        <a:t>200 组/s × 5 Pod，共 5 万 Pod，组内必须同时调度</a:t>
                       </a:r>
                     </a:p>
                   </a:txBody>
@@ -7905,7 +7955,7 @@
                           <a:latin typeface="Arial"/>
                           <a:ea typeface="微软雅黑"/>
                         </a:rPr>
-                        <a:t>Gang w6</a:t>
+                        <a:t>异构 w7</a:t>
                       </a:r>
                     </a:p>
                   </a:txBody>
@@ -7929,7 +7979,7 @@
                           <a:latin typeface="Arial"/>
                           <a:ea typeface="微软雅黑"/>
                         </a:rPr>
-                        <a:t>200 组/s × 5 Pod，共 5 万 Pod，组内必须同时调度</a:t>
+                        <a:t>500 pods/s，5 万 Pod，节点资源规格异构</a:t>
                       </a:r>
                     </a:p>
                   </a:txBody>
@@ -7955,7 +8005,7 @@
                           <a:latin typeface="Arial"/>
                           <a:ea typeface="微软雅黑"/>
                         </a:rPr>
-                        <a:t>异构 w7</a:t>
+                        <a:t>实例 inst</a:t>
                       </a:r>
                     </a:p>
                   </a:txBody>
@@ -7979,7 +8029,7 @@
                           <a:latin typeface="Arial"/>
                           <a:ea typeface="微软雅黑"/>
                         </a:rPr>
-                        <a:t>500 pods/s，5 万 Pod，节点资源规格异构</a:t>
+                        <a:t>inst1 = 1 个实例；inst3 = 3 个实例</a:t>
                       </a:r>
                     </a:p>
                   </a:txBody>
@@ -8005,7 +8055,7 @@
                           <a:latin typeface="Arial"/>
                           <a:ea typeface="微软雅黑"/>
                         </a:rPr>
-                        <a:t>实例 inst</a:t>
+                        <a:t>对比组</a:t>
                       </a:r>
                     </a:p>
                   </a:txBody>
@@ -8029,7 +8079,7 @@
                           <a:latin typeface="Arial"/>
                           <a:ea typeface="微软雅黑"/>
                         </a:rPr>
-                        <a:t>inst1 = 1 个实例；inst3 = 3 个实例</a:t>
+                        <a:t>a=ENO  b=Gödel  c=kube-scheduler  d=Volcano  e=Koordinator</a:t>
                       </a:r>
                     </a:p>
                   </a:txBody>
@@ -8055,7 +8105,7 @@
                           <a:latin typeface="Arial"/>
                           <a:ea typeface="微软雅黑"/>
                         </a:rPr>
-                        <a:t>对比组</a:t>
+                        <a:t>公平性</a:t>
                       </a:r>
                     </a:p>
                   </a:txBody>
@@ -8079,63 +8129,13 @@
                           <a:latin typeface="Arial"/>
                           <a:ea typeface="微软雅黑"/>
                         </a:rPr>
-                        <a:t>a=ENO  b=Gödel  c=kube-scheduler  d=Volcano  e=Koordinator</a:t>
+                        <a:t>每 Pod 2C/4G；各调度器 client-go QPS=Burst=10000（不设限流瓶颈）</a:t>
                       </a:r>
                     </a:p>
                   </a:txBody>
                   <a:tcPr marL="54864" marR="54864" marT="18288" marB="18288" anchor="ctr">
                     <a:solidFill>
                       <a:srgbClr val="FFFFFF"/>
-                    </a:solidFill>
-                  </a:tcPr>
-                </a:tc>
-              </a:tr>
-              <a:tr h="384048">
-                <a:tc>
-                  <a:txBody>
-                    <a:bodyPr wrap="square"/>
-                    <a:lstStyle/>
-                    <a:p>
-                      <a:pPr algn="l"/>
-                      <a:r>
-                        <a:rPr sz="1150" b="0">
-                          <a:solidFill>
-                            <a:srgbClr val="333333"/>
-                          </a:solidFill>
-                          <a:latin typeface="Arial"/>
-                          <a:ea typeface="微软雅黑"/>
-                        </a:rPr>
-                        <a:t>公平性</a:t>
-                      </a:r>
-                    </a:p>
-                  </a:txBody>
-                  <a:tcPr marL="54864" marR="54864" marT="18288" marB="18288" anchor="ctr">
-                    <a:solidFill>
-                      <a:srgbClr val="F5F7FA"/>
-                    </a:solidFill>
-                  </a:tcPr>
-                </a:tc>
-                <a:tc>
-                  <a:txBody>
-                    <a:bodyPr wrap="square"/>
-                    <a:lstStyle/>
-                    <a:p>
-                      <a:pPr algn="ctr"/>
-                      <a:r>
-                        <a:rPr sz="1150" b="0">
-                          <a:solidFill>
-                            <a:srgbClr val="333333"/>
-                          </a:solidFill>
-                          <a:latin typeface="Arial"/>
-                          <a:ea typeface="微软雅黑"/>
-                        </a:rPr>
-                        <a:t>每 Pod 2C/4G；各调度器 client-go QPS=Burst=10000（不设限流瓶颈）</a:t>
-                      </a:r>
-                    </a:p>
-                  </a:txBody>
-                  <a:tcPr marL="54864" marR="54864" marT="18288" marB="18288" anchor="ctr">
-                    <a:solidFill>
-                      <a:srgbClr val="F5F7FA"/>
                     </a:solidFill>
                   </a:tcPr>
                 </a:tc>
@@ -10487,7 +10487,7 @@
                   </a:txBody>
                   <a:tcPr marL="54864" marR="54864" marT="18288" marB="18288" anchor="ctr">
                     <a:solidFill>
-                      <a:srgbClr val="FFFFFF"/>
+                      <a:srgbClr val="F5F7FA"/>
                     </a:solidFill>
                   </a:tcPr>
                 </a:tc>
@@ -10511,7 +10511,7 @@
                   </a:txBody>
                   <a:tcPr marL="54864" marR="54864" marT="18288" marB="18288" anchor="ctr">
                     <a:solidFill>
-                      <a:srgbClr val="FFFFFF"/>
+                      <a:srgbClr val="F5F7FA"/>
                     </a:solidFill>
                   </a:tcPr>
                 </a:tc>
@@ -10535,6 +10535,104 @@
                   </a:txBody>
                   <a:tcPr marL="54864" marR="54864" marT="18288" marB="18288" anchor="ctr">
                     <a:solidFill>
+                      <a:srgbClr val="F5F7FA"/>
+                    </a:solidFill>
+                  </a:tcPr>
+                </a:tc>
+                <a:tc>
+                  <a:txBody>
+                    <a:bodyPr wrap="square"/>
+                    <a:lstStyle/>
+                    <a:p>
+                      <a:pPr algn="ctr"/>
+                      <a:r>
+                        <a:rPr sz="1050" b="0">
+                          <a:solidFill>
+                            <a:srgbClr val="333333"/>
+                          </a:solidFill>
+                          <a:latin typeface="Arial"/>
+                          <a:ea typeface="微软雅黑"/>
+                        </a:rPr>
+                        <a:t>≈297</a:t>
+                      </a:r>
+                    </a:p>
+                  </a:txBody>
+                  <a:tcPr marL="54864" marR="54864" marT="18288" marB="18288" anchor="ctr">
+                    <a:solidFill>
+                      <a:srgbClr val="F5F7FA"/>
+                    </a:solidFill>
+                  </a:tcPr>
+                </a:tc>
+                <a:tc>
+                  <a:txBody>
+                    <a:bodyPr wrap="square"/>
+                    <a:lstStyle/>
+                    <a:p>
+                      <a:pPr algn="ctr"/>
+                      <a:r>
+                        <a:rPr sz="1050" b="0">
+                          <a:solidFill>
+                            <a:srgbClr val="333333"/>
+                          </a:solidFill>
+                          <a:latin typeface="Arial"/>
+                          <a:ea typeface="微软雅黑"/>
+                        </a:rPr>
+                        <a:t>≈48</a:t>
+                      </a:r>
+                    </a:p>
+                  </a:txBody>
+                  <a:tcPr marL="54864" marR="54864" marT="18288" marB="18288" anchor="ctr">
+                    <a:solidFill>
+                      <a:srgbClr val="F5F7FA"/>
+                    </a:solidFill>
+                  </a:tcPr>
+                </a:tc>
+                <a:tc>
+                  <a:txBody>
+                    <a:bodyPr wrap="square"/>
+                    <a:lstStyle/>
+                    <a:p>
+                      <a:pPr algn="ctr"/>
+                      <a:r>
+                        <a:rPr sz="1050" b="0">
+                          <a:solidFill>
+                            <a:srgbClr val="333333"/>
+                          </a:solidFill>
+                          <a:latin typeface="Arial"/>
+                          <a:ea typeface="微软雅黑"/>
+                        </a:rPr>
+                        <a:t>≈16</a:t>
+                      </a:r>
+                    </a:p>
+                  </a:txBody>
+                  <a:tcPr marL="54864" marR="54864" marT="18288" marB="18288" anchor="ctr">
+                    <a:solidFill>
+                      <a:srgbClr val="F5F7FA"/>
+                    </a:solidFill>
+                  </a:tcPr>
+                </a:tc>
+              </a:tr>
+              <a:tr h="310896">
+                <a:tc>
+                  <a:txBody>
+                    <a:bodyPr wrap="square"/>
+                    <a:lstStyle/>
+                    <a:p>
+                      <a:pPr algn="l"/>
+                      <a:r>
+                        <a:rPr sz="1050" b="0">
+                          <a:solidFill>
+                            <a:srgbClr val="333333"/>
+                          </a:solidFill>
+                          <a:latin typeface="Arial"/>
+                          <a:ea typeface="微软雅黑"/>
+                        </a:rPr>
+                        <a:t>s3/w3</a:t>
+                      </a:r>
+                    </a:p>
+                  </a:txBody>
+                  <a:tcPr marL="54864" marR="54864" marT="18288" marB="18288" anchor="ctr">
+                    <a:solidFill>
                       <a:srgbClr val="FFFFFF"/>
                     </a:solidFill>
                   </a:tcPr>
@@ -10553,7 +10651,55 @@
                           <a:latin typeface="Arial"/>
                           <a:ea typeface="微软雅黑"/>
                         </a:rPr>
-                        <a:t>≈297</a:t>
+                        <a:t>297.6</a:t>
+                      </a:r>
+                    </a:p>
+                  </a:txBody>
+                  <a:tcPr marL="54864" marR="54864" marT="18288" marB="18288" anchor="ctr">
+                    <a:solidFill>
+                      <a:srgbClr val="FFFFFF"/>
+                    </a:solidFill>
+                  </a:tcPr>
+                </a:tc>
+                <a:tc>
+                  <a:txBody>
+                    <a:bodyPr wrap="square"/>
+                    <a:lstStyle/>
+                    <a:p>
+                      <a:pPr algn="ctr"/>
+                      <a:r>
+                        <a:rPr sz="1050" b="0">
+                          <a:solidFill>
+                            <a:srgbClr val="333333"/>
+                          </a:solidFill>
+                          <a:latin typeface="Arial"/>
+                          <a:ea typeface="微软雅黑"/>
+                        </a:rPr>
+                        <a:t>283.3</a:t>
+                      </a:r>
+                    </a:p>
+                  </a:txBody>
+                  <a:tcPr marL="54864" marR="54864" marT="18288" marB="18288" anchor="ctr">
+                    <a:solidFill>
+                      <a:srgbClr val="FFFFFF"/>
+                    </a:solidFill>
+                  </a:tcPr>
+                </a:tc>
+                <a:tc>
+                  <a:txBody>
+                    <a:bodyPr wrap="square"/>
+                    <a:lstStyle/>
+                    <a:p>
+                      <a:pPr algn="ctr"/>
+                      <a:r>
+                        <a:rPr sz="1050" b="0">
+                          <a:solidFill>
+                            <a:srgbClr val="333333"/>
+                          </a:solidFill>
+                          <a:latin typeface="Arial"/>
+                          <a:ea typeface="微软雅黑"/>
+                        </a:rPr>
+                        <a:t>≈292</a:t>
                       </a:r>
                     </a:p>
                   </a:txBody>
@@ -10601,159 +10747,13 @@
                           <a:latin typeface="Arial"/>
                           <a:ea typeface="微软雅黑"/>
                         </a:rPr>
-                        <a:t>≈16</a:t>
+                        <a:t>≈24</a:t>
                       </a:r>
                     </a:p>
                   </a:txBody>
                   <a:tcPr marL="54864" marR="54864" marT="18288" marB="18288" anchor="ctr">
                     <a:solidFill>
                       <a:srgbClr val="FFFFFF"/>
-                    </a:solidFill>
-                  </a:tcPr>
-                </a:tc>
-              </a:tr>
-              <a:tr h="310896">
-                <a:tc>
-                  <a:txBody>
-                    <a:bodyPr wrap="square"/>
-                    <a:lstStyle/>
-                    <a:p>
-                      <a:pPr algn="l"/>
-                      <a:r>
-                        <a:rPr sz="1050" b="0">
-                          <a:solidFill>
-                            <a:srgbClr val="333333"/>
-                          </a:solidFill>
-                          <a:latin typeface="Arial"/>
-                          <a:ea typeface="微软雅黑"/>
-                        </a:rPr>
-                        <a:t>s3/w3</a:t>
-                      </a:r>
-                    </a:p>
-                  </a:txBody>
-                  <a:tcPr marL="54864" marR="54864" marT="18288" marB="18288" anchor="ctr">
-                    <a:solidFill>
-                      <a:srgbClr val="F5F7FA"/>
-                    </a:solidFill>
-                  </a:tcPr>
-                </a:tc>
-                <a:tc>
-                  <a:txBody>
-                    <a:bodyPr wrap="square"/>
-                    <a:lstStyle/>
-                    <a:p>
-                      <a:pPr algn="ctr"/>
-                      <a:r>
-                        <a:rPr sz="1050" b="0">
-                          <a:solidFill>
-                            <a:srgbClr val="333333"/>
-                          </a:solidFill>
-                          <a:latin typeface="Arial"/>
-                          <a:ea typeface="微软雅黑"/>
-                        </a:rPr>
-                        <a:t>297.6</a:t>
-                      </a:r>
-                    </a:p>
-                  </a:txBody>
-                  <a:tcPr marL="54864" marR="54864" marT="18288" marB="18288" anchor="ctr">
-                    <a:solidFill>
-                      <a:srgbClr val="F5F7FA"/>
-                    </a:solidFill>
-                  </a:tcPr>
-                </a:tc>
-                <a:tc>
-                  <a:txBody>
-                    <a:bodyPr wrap="square"/>
-                    <a:lstStyle/>
-                    <a:p>
-                      <a:pPr algn="ctr"/>
-                      <a:r>
-                        <a:rPr sz="1050" b="0">
-                          <a:solidFill>
-                            <a:srgbClr val="333333"/>
-                          </a:solidFill>
-                          <a:latin typeface="Arial"/>
-                          <a:ea typeface="微软雅黑"/>
-                        </a:rPr>
-                        <a:t>283.3</a:t>
-                      </a:r>
-                    </a:p>
-                  </a:txBody>
-                  <a:tcPr marL="54864" marR="54864" marT="18288" marB="18288" anchor="ctr">
-                    <a:solidFill>
-                      <a:srgbClr val="F5F7FA"/>
-                    </a:solidFill>
-                  </a:tcPr>
-                </a:tc>
-                <a:tc>
-                  <a:txBody>
-                    <a:bodyPr wrap="square"/>
-                    <a:lstStyle/>
-                    <a:p>
-                      <a:pPr algn="ctr"/>
-                      <a:r>
-                        <a:rPr sz="1050" b="0">
-                          <a:solidFill>
-                            <a:srgbClr val="333333"/>
-                          </a:solidFill>
-                          <a:latin typeface="Arial"/>
-                          <a:ea typeface="微软雅黑"/>
-                        </a:rPr>
-                        <a:t>≈292</a:t>
-                      </a:r>
-                    </a:p>
-                  </a:txBody>
-                  <a:tcPr marL="54864" marR="54864" marT="18288" marB="18288" anchor="ctr">
-                    <a:solidFill>
-                      <a:srgbClr val="F5F7FA"/>
-                    </a:solidFill>
-                  </a:tcPr>
-                </a:tc>
-                <a:tc>
-                  <a:txBody>
-                    <a:bodyPr wrap="square"/>
-                    <a:lstStyle/>
-                    <a:p>
-                      <a:pPr algn="ctr"/>
-                      <a:r>
-                        <a:rPr sz="1050" b="0">
-                          <a:solidFill>
-                            <a:srgbClr val="333333"/>
-                          </a:solidFill>
-                          <a:latin typeface="Arial"/>
-                          <a:ea typeface="微软雅黑"/>
-                        </a:rPr>
-                        <a:t>≈48</a:t>
-                      </a:r>
-                    </a:p>
-                  </a:txBody>
-                  <a:tcPr marL="54864" marR="54864" marT="18288" marB="18288" anchor="ctr">
-                    <a:solidFill>
-                      <a:srgbClr val="F5F7FA"/>
-                    </a:solidFill>
-                  </a:tcPr>
-                </a:tc>
-                <a:tc>
-                  <a:txBody>
-                    <a:bodyPr wrap="square"/>
-                    <a:lstStyle/>
-                    <a:p>
-                      <a:pPr algn="ctr"/>
-                      <a:r>
-                        <a:rPr sz="1050" b="0">
-                          <a:solidFill>
-                            <a:srgbClr val="333333"/>
-                          </a:solidFill>
-                          <a:latin typeface="Arial"/>
-                          <a:ea typeface="微软雅黑"/>
-                        </a:rPr>
-                        <a:t>≈24</a:t>
-                      </a:r>
-                    </a:p>
-                  </a:txBody>
-                  <a:tcPr marL="54864" marR="54864" marT="18288" marB="18288" anchor="ctr">
-                    <a:solidFill>
-                      <a:srgbClr val="F5F7FA"/>
                     </a:solidFill>
                   </a:tcPr>
                 </a:tc>
@@ -11886,7 +11886,7 @@
                   </a:txBody>
                   <a:tcPr marL="54864" marR="54864" marT="18288" marB="18288" anchor="ctr">
                     <a:solidFill>
-                      <a:srgbClr val="FFFFFF"/>
+                      <a:srgbClr val="F5F7FA"/>
                     </a:solidFill>
                   </a:tcPr>
                 </a:tc>
@@ -11910,6 +11910,56 @@
                   </a:txBody>
                   <a:tcPr marL="54864" marR="54864" marT="18288" marB="18288" anchor="ctr">
                     <a:solidFill>
+                      <a:srgbClr val="F5F7FA"/>
+                    </a:solidFill>
+                  </a:tcPr>
+                </a:tc>
+                <a:tc>
+                  <a:txBody>
+                    <a:bodyPr wrap="square"/>
+                    <a:lstStyle/>
+                    <a:p>
+                      <a:pPr algn="ctr"/>
+                      <a:r>
+                        <a:rPr sz="1050" b="0">
+                          <a:solidFill>
+                            <a:srgbClr val="333333"/>
+                          </a:solidFill>
+                          <a:latin typeface="Arial"/>
+                          <a:ea typeface="微软雅黑"/>
+                        </a:rPr>
+                        <a:t>283.3 → 287.4（×1.01）</a:t>
+                      </a:r>
+                    </a:p>
+                  </a:txBody>
+                  <a:tcPr marL="54864" marR="54864" marT="18288" marB="18288" anchor="ctr">
+                    <a:solidFill>
+                      <a:srgbClr val="F5F7FA"/>
+                    </a:solidFill>
+                  </a:tcPr>
+                </a:tc>
+              </a:tr>
+              <a:tr h="548640">
+                <a:tc>
+                  <a:txBody>
+                    <a:bodyPr wrap="square"/>
+                    <a:lstStyle/>
+                    <a:p>
+                      <a:pPr algn="l"/>
+                      <a:r>
+                        <a:rPr sz="1050" b="0">
+                          <a:solidFill>
+                            <a:srgbClr val="333333"/>
+                          </a:solidFill>
+                          <a:latin typeface="Arial"/>
+                          <a:ea typeface="微软雅黑"/>
+                        </a:rPr>
+                        <a:t>P99 延迟 s</a:t>
+                      </a:r>
+                    </a:p>
+                  </a:txBody>
+                  <a:tcPr marL="54864" marR="54864" marT="18288" marB="18288" anchor="ctr">
+                    <a:solidFill>
                       <a:srgbClr val="FFFFFF"/>
                     </a:solidFill>
                   </a:tcPr>
@@ -11928,7 +11978,31 @@
                           <a:latin typeface="Arial"/>
                           <a:ea typeface="微软雅黑"/>
                         </a:rPr>
-                        <a:t>283.3 → 287.4（×1.01）</a:t>
+                        <a:t>16.22 → 0.13（−99.2%）</a:t>
+                      </a:r>
+                    </a:p>
+                  </a:txBody>
+                  <a:tcPr marL="54864" marR="54864" marT="18288" marB="18288" anchor="ctr">
+                    <a:solidFill>
+                      <a:srgbClr val="FFFFFF"/>
+                    </a:solidFill>
+                  </a:tcPr>
+                </a:tc>
+                <a:tc>
+                  <a:txBody>
+                    <a:bodyPr wrap="square"/>
+                    <a:lstStyle/>
+                    <a:p>
+                      <a:pPr algn="ctr"/>
+                      <a:r>
+                        <a:rPr sz="1050" b="0">
+                          <a:solidFill>
+                            <a:srgbClr val="333333"/>
+                          </a:solidFill>
+                          <a:latin typeface="Arial"/>
+                          <a:ea typeface="微软雅黑"/>
+                        </a:rPr>
+                        <a:t>32.57 → 0.15（−99.5%）</a:t>
                       </a:r>
                     </a:p>
                   </a:txBody>
@@ -11954,7 +12028,7 @@
                           <a:latin typeface="Arial"/>
                           <a:ea typeface="微软雅黑"/>
                         </a:rPr>
-                        <a:t>P99 延迟 s</a:t>
+                        <a:t>队列堆积峰值</a:t>
                       </a:r>
                     </a:p>
                   </a:txBody>
@@ -11978,7 +12052,7 @@
                           <a:latin typeface="Arial"/>
                           <a:ea typeface="微软雅黑"/>
                         </a:rPr>
-                        <a:t>16.22 → 0.13（−99.2%）</a:t>
+                        <a:t>14698 → 20</a:t>
                       </a:r>
                     </a:p>
                   </a:txBody>
@@ -12002,87 +12076,13 @@
                           <a:latin typeface="Arial"/>
                           <a:ea typeface="微软雅黑"/>
                         </a:rPr>
-                        <a:t>32.57 → 0.15（−99.5%）</a:t>
+                        <a:t>22652 → 16</a:t>
                       </a:r>
                     </a:p>
                   </a:txBody>
                   <a:tcPr marL="54864" marR="54864" marT="18288" marB="18288" anchor="ctr">
                     <a:solidFill>
                       <a:srgbClr val="F5F7FA"/>
-                    </a:solidFill>
-                  </a:tcPr>
-                </a:tc>
-              </a:tr>
-              <a:tr h="548640">
-                <a:tc>
-                  <a:txBody>
-                    <a:bodyPr wrap="square"/>
-                    <a:lstStyle/>
-                    <a:p>
-                      <a:pPr algn="l"/>
-                      <a:r>
-                        <a:rPr sz="1050" b="0">
-                          <a:solidFill>
-                            <a:srgbClr val="333333"/>
-                          </a:solidFill>
-                          <a:latin typeface="Arial"/>
-                          <a:ea typeface="微软雅黑"/>
-                        </a:rPr>
-                        <a:t>队列堆积峰值</a:t>
-                      </a:r>
-                    </a:p>
-                  </a:txBody>
-                  <a:tcPr marL="54864" marR="54864" marT="18288" marB="18288" anchor="ctr">
-                    <a:solidFill>
-                      <a:srgbClr val="FFFFFF"/>
-                    </a:solidFill>
-                  </a:tcPr>
-                </a:tc>
-                <a:tc>
-                  <a:txBody>
-                    <a:bodyPr wrap="square"/>
-                    <a:lstStyle/>
-                    <a:p>
-                      <a:pPr algn="ctr"/>
-                      <a:r>
-                        <a:rPr sz="1050" b="0">
-                          <a:solidFill>
-                            <a:srgbClr val="333333"/>
-                          </a:solidFill>
-                          <a:latin typeface="Arial"/>
-                          <a:ea typeface="微软雅黑"/>
-                        </a:rPr>
-                        <a:t>14698 → 20</a:t>
-                      </a:r>
-                    </a:p>
-                  </a:txBody>
-                  <a:tcPr marL="54864" marR="54864" marT="18288" marB="18288" anchor="ctr">
-                    <a:solidFill>
-                      <a:srgbClr val="FFFFFF"/>
-                    </a:solidFill>
-                  </a:tcPr>
-                </a:tc>
-                <a:tc>
-                  <a:txBody>
-                    <a:bodyPr wrap="square"/>
-                    <a:lstStyle/>
-                    <a:p>
-                      <a:pPr algn="ctr"/>
-                      <a:r>
-                        <a:rPr sz="1050" b="0">
-                          <a:solidFill>
-                            <a:srgbClr val="333333"/>
-                          </a:solidFill>
-                          <a:latin typeface="Arial"/>
-                          <a:ea typeface="微软雅黑"/>
-                        </a:rPr>
-                        <a:t>22652 → 16</a:t>
-                      </a:r>
-                    </a:p>
-                  </a:txBody>
-                  <a:tcPr marL="54864" marR="54864" marT="18288" marB="18288" anchor="ctr">
-                    <a:solidFill>
-                      <a:srgbClr val="FFFFFF"/>
                     </a:solidFill>
                   </a:tcPr>
                 </a:tc>
@@ -12383,7 +12383,7 @@
         </p:nvGraphicFramePr>
         <p:xfrm>
           <a:off x="566928" y="1207008"/>
-          <a:ext cx="11064240" cy="3657600"/>
+          <a:ext cx="11064240" cy="3621024"/>
         </p:xfrm>
         <a:graphic>
           <a:graphicData uri="http://schemas.openxmlformats.org/drawingml/2006/table">
@@ -12392,12 +12392,14 @@
                 <a:tableStyleId>{5C22544A-7EE6-4342-B048-85BDC9FD1C3A}</a:tableStyleId>
               </a:tblPr>
               <a:tblGrid>
-                <a:gridCol w="2423160"/>
-                <a:gridCol w="4160520"/>
-                <a:gridCol w="4480560"/>
+                <a:gridCol w="2286000"/>
+                <a:gridCol w="2011680"/>
+                <a:gridCol w="2011680"/>
+                <a:gridCol w="2377440"/>
+                <a:gridCol w="2377440"/>
               </a:tblGrid>
-              <a:tr h="731520">
-                <a:tc>
+              <a:tr h="603504">
+                <a:tc rowSpan="2">
                   <a:txBody>
                     <a:bodyPr wrap="square"/>
                     <a:lstStyle/>
@@ -12421,7 +12423,7 @@
                     </a:solidFill>
                   </a:tcPr>
                 </a:tc>
-                <a:tc>
+                <a:tc gridSpan="2">
                   <a:txBody>
                     <a:bodyPr wrap="square"/>
                     <a:lstStyle/>
@@ -12445,7 +12447,31 @@
                     </a:solidFill>
                   </a:tcPr>
                 </a:tc>
-                <a:tc>
+                <a:tc hMerge="1">
+                  <a:txBody>
+                    <a:bodyPr wrap="square"/>
+                    <a:lstStyle/>
+                    <a:p>
+                      <a:pPr algn="ctr"/>
+                      <a:r>
+                        <a:rPr sz="1250" b="1">
+                          <a:solidFill>
+                            <a:srgbClr val="FFFFFF"/>
+                          </a:solidFill>
+                          <a:latin typeface="Arial"/>
+                          <a:ea typeface="微软雅黑"/>
+                        </a:rPr>
+                        <a:t/>
+                      </a:r>
+                    </a:p>
+                  </a:txBody>
+                  <a:tcPr marL="54864" marR="54864" marT="18288" marB="18288" anchor="ctr">
+                    <a:solidFill>
+                      <a:srgbClr val="0B2A4A"/>
+                    </a:solidFill>
+                  </a:tcPr>
+                </a:tc>
+                <a:tc gridSpan="2">
                   <a:txBody>
                     <a:bodyPr wrap="square"/>
                     <a:lstStyle/>
@@ -12469,8 +12495,154 @@
                     </a:solidFill>
                   </a:tcPr>
                 </a:tc>
+                <a:tc hMerge="1">
+                  <a:txBody>
+                    <a:bodyPr wrap="square"/>
+                    <a:lstStyle/>
+                    <a:p>
+                      <a:pPr algn="ctr"/>
+                      <a:r>
+                        <a:rPr sz="1250" b="1">
+                          <a:solidFill>
+                            <a:srgbClr val="FFFFFF"/>
+                          </a:solidFill>
+                          <a:latin typeface="Arial"/>
+                          <a:ea typeface="微软雅黑"/>
+                        </a:rPr>
+                        <a:t/>
+                      </a:r>
+                    </a:p>
+                  </a:txBody>
+                  <a:tcPr marL="54864" marR="54864" marT="18288" marB="18288" anchor="ctr">
+                    <a:solidFill>
+                      <a:srgbClr val="0B2A4A"/>
+                    </a:solidFill>
+                  </a:tcPr>
+                </a:tc>
               </a:tr>
-              <a:tr h="731520">
+              <a:tr h="603504">
+                <a:tc vMerge="1">
+                  <a:txBody>
+                    <a:bodyPr wrap="square"/>
+                    <a:lstStyle/>
+                    <a:p>
+                      <a:pPr algn="l"/>
+                      <a:r>
+                        <a:rPr sz="1250" b="1">
+                          <a:solidFill>
+                            <a:srgbClr val="FFFFFF"/>
+                          </a:solidFill>
+                          <a:latin typeface="Arial"/>
+                          <a:ea typeface="微软雅黑"/>
+                        </a:rPr>
+                        <a:t/>
+                      </a:r>
+                    </a:p>
+                  </a:txBody>
+                  <a:tcPr marL="54864" marR="54864" marT="18288" marB="18288" anchor="ctr">
+                    <a:solidFill>
+                      <a:srgbClr val="0B2A4A"/>
+                    </a:solidFill>
+                  </a:tcPr>
+                </a:tc>
+                <a:tc>
+                  <a:txBody>
+                    <a:bodyPr wrap="square"/>
+                    <a:lstStyle/>
+                    <a:p>
+                      <a:pPr algn="ctr"/>
+                      <a:r>
+                        <a:rPr sz="1250" b="1">
+                          <a:solidFill>
+                            <a:srgbClr val="FFFFFF"/>
+                          </a:solidFill>
+                          <a:latin typeface="Arial"/>
+                          <a:ea typeface="微软雅黑"/>
+                        </a:rPr>
+                        <a:t>s3（5k）</a:t>
+                      </a:r>
+                    </a:p>
+                  </a:txBody>
+                  <a:tcPr marL="54864" marR="54864" marT="18288" marB="18288" anchor="ctr">
+                    <a:solidFill>
+                      <a:srgbClr val="0B2A4A"/>
+                    </a:solidFill>
+                  </a:tcPr>
+                </a:tc>
+                <a:tc>
+                  <a:txBody>
+                    <a:bodyPr wrap="square"/>
+                    <a:lstStyle/>
+                    <a:p>
+                      <a:pPr algn="ctr"/>
+                      <a:r>
+                        <a:rPr sz="1250" b="1">
+                          <a:solidFill>
+                            <a:srgbClr val="FFFFFF"/>
+                          </a:solidFill>
+                          <a:latin typeface="Arial"/>
+                          <a:ea typeface="微软雅黑"/>
+                        </a:rPr>
+                        <a:t>s4（10k）</a:t>
+                      </a:r>
+                    </a:p>
+                  </a:txBody>
+                  <a:tcPr marL="54864" marR="54864" marT="18288" marB="18288" anchor="ctr">
+                    <a:solidFill>
+                      <a:srgbClr val="0B2A4A"/>
+                    </a:solidFill>
+                  </a:tcPr>
+                </a:tc>
+                <a:tc>
+                  <a:txBody>
+                    <a:bodyPr wrap="square"/>
+                    <a:lstStyle/>
+                    <a:p>
+                      <a:pPr algn="ctr"/>
+                      <a:r>
+                        <a:rPr sz="1250" b="1">
+                          <a:solidFill>
+                            <a:srgbClr val="FFFFFF"/>
+                          </a:solidFill>
+                          <a:latin typeface="Arial"/>
+                          <a:ea typeface="微软雅黑"/>
+                        </a:rPr>
+                        <a:t>s3（5k）</a:t>
+                      </a:r>
+                    </a:p>
+                  </a:txBody>
+                  <a:tcPr marL="54864" marR="54864" marT="18288" marB="18288" anchor="ctr">
+                    <a:solidFill>
+                      <a:srgbClr val="0B2A4A"/>
+                    </a:solidFill>
+                  </a:tcPr>
+                </a:tc>
+                <a:tc>
+                  <a:txBody>
+                    <a:bodyPr wrap="square"/>
+                    <a:lstStyle/>
+                    <a:p>
+                      <a:pPr algn="ctr"/>
+                      <a:r>
+                        <a:rPr sz="1250" b="1">
+                          <a:solidFill>
+                            <a:srgbClr val="FFFFFF"/>
+                          </a:solidFill>
+                          <a:latin typeface="Arial"/>
+                          <a:ea typeface="微软雅黑"/>
+                        </a:rPr>
+                        <a:t>s4（10k）</a:t>
+                      </a:r>
+                    </a:p>
+                  </a:txBody>
+                  <a:tcPr marL="54864" marR="54864" marT="18288" marB="18288" anchor="ctr">
+                    <a:solidFill>
+                      <a:srgbClr val="0B2A4A"/>
+                    </a:solidFill>
+                  </a:tcPr>
+                </a:tc>
+              </a:tr>
+              <a:tr h="603504">
                 <a:tc>
                   <a:txBody>
                     <a:bodyPr wrap="square"/>
@@ -12485,7 +12657,129 @@
                           <a:latin typeface="Arial"/>
                           <a:ea typeface="微软雅黑"/>
                         </a:rPr>
-                        <a:t>w3 稳态（s3 / s4）</a:t>
+                        <a:t>w3 稳态</a:t>
+                      </a:r>
+                    </a:p>
+                  </a:txBody>
+                  <a:tcPr marL="54864" marR="54864" marT="18288" marB="18288" anchor="ctr">
+                    <a:solidFill>
+                      <a:srgbClr val="F5F7FA"/>
+                    </a:solidFill>
+                  </a:tcPr>
+                </a:tc>
+                <a:tc>
+                  <a:txBody>
+                    <a:bodyPr wrap="square"/>
+                    <a:lstStyle/>
+                    <a:p>
+                      <a:pPr algn="ctr"/>
+                      <a:r>
+                        <a:rPr sz="1250" b="0">
+                          <a:solidFill>
+                            <a:srgbClr val="333333"/>
+                          </a:solidFill>
+                          <a:latin typeface="Arial"/>
+                          <a:ea typeface="微软雅黑"/>
+                        </a:rPr>
+                        <a:t>+21.7%</a:t>
+                      </a:r>
+                    </a:p>
+                  </a:txBody>
+                  <a:tcPr marL="54864" marR="54864" marT="18288" marB="18288" anchor="ctr">
+                    <a:solidFill>
+                      <a:srgbClr val="F5F7FA"/>
+                    </a:solidFill>
+                  </a:tcPr>
+                </a:tc>
+                <a:tc>
+                  <a:txBody>
+                    <a:bodyPr wrap="square"/>
+                    <a:lstStyle/>
+                    <a:p>
+                      <a:pPr algn="ctr"/>
+                      <a:r>
+                        <a:rPr sz="1250" b="0">
+                          <a:solidFill>
+                            <a:srgbClr val="333333"/>
+                          </a:solidFill>
+                          <a:latin typeface="Arial"/>
+                          <a:ea typeface="微软雅黑"/>
+                        </a:rPr>
+                        <a:t>+5.6%</a:t>
+                      </a:r>
+                    </a:p>
+                  </a:txBody>
+                  <a:tcPr marL="54864" marR="54864" marT="18288" marB="18288" anchor="ctr">
+                    <a:solidFill>
+                      <a:srgbClr val="F5F7FA"/>
+                    </a:solidFill>
+                  </a:tcPr>
+                </a:tc>
+                <a:tc>
+                  <a:txBody>
+                    <a:bodyPr wrap="square"/>
+                    <a:lstStyle/>
+                    <a:p>
+                      <a:pPr algn="ctr"/>
+                      <a:r>
+                        <a:rPr sz="1250" b="0">
+                          <a:solidFill>
+                            <a:srgbClr val="333333"/>
+                          </a:solidFill>
+                          <a:latin typeface="Arial"/>
+                          <a:ea typeface="微软雅黑"/>
+                        </a:rPr>
+                        <a:t>−15.2%</a:t>
+                      </a:r>
+                    </a:p>
+                  </a:txBody>
+                  <a:tcPr marL="54864" marR="54864" marT="18288" marB="18288" anchor="ctr">
+                    <a:solidFill>
+                      <a:srgbClr val="F5F7FA"/>
+                    </a:solidFill>
+                  </a:tcPr>
+                </a:tc>
+                <a:tc>
+                  <a:txBody>
+                    <a:bodyPr wrap="square"/>
+                    <a:lstStyle/>
+                    <a:p>
+                      <a:pPr algn="ctr"/>
+                      <a:r>
+                        <a:rPr sz="1250" b="0">
+                          <a:solidFill>
+                            <a:srgbClr val="333333"/>
+                          </a:solidFill>
+                          <a:latin typeface="Arial"/>
+                          <a:ea typeface="微软雅黑"/>
+                        </a:rPr>
+                        <a:t>−33.4%</a:t>
+                      </a:r>
+                    </a:p>
+                  </a:txBody>
+                  <a:tcPr marL="54864" marR="54864" marT="18288" marB="18288" anchor="ctr">
+                    <a:solidFill>
+                      <a:srgbClr val="F5F7FA"/>
+                    </a:solidFill>
+                  </a:tcPr>
+                </a:tc>
+              </a:tr>
+              <a:tr h="603504">
+                <a:tc>
+                  <a:txBody>
+                    <a:bodyPr wrap="square"/>
+                    <a:lstStyle/>
+                    <a:p>
+                      <a:pPr algn="l"/>
+                      <a:r>
+                        <a:rPr sz="1250" b="0">
+                          <a:solidFill>
+                            <a:srgbClr val="333333"/>
+                          </a:solidFill>
+                          <a:latin typeface="Arial"/>
+                          <a:ea typeface="微软雅黑"/>
+                        </a:rPr>
+                        <a:t>w4 极限</a:t>
                       </a:r>
                     </a:p>
                   </a:txBody>
@@ -12509,7 +12803,7 @@
                           <a:latin typeface="Arial"/>
                           <a:ea typeface="微软雅黑"/>
                         </a:rPr>
-                        <a:t>+21.7% / +5.6%</a:t>
+                        <a:t>+9.3%</a:t>
                       </a:r>
                     </a:p>
                   </a:txBody>
@@ -12533,7 +12827,55 @@
                           <a:latin typeface="Arial"/>
                           <a:ea typeface="微软雅黑"/>
                         </a:rPr>
-                        <a:t>−15.2% / −33.4%</a:t>
+                        <a:t>+16.0%</a:t>
+                      </a:r>
+                    </a:p>
+                  </a:txBody>
+                  <a:tcPr marL="54864" marR="54864" marT="18288" marB="18288" anchor="ctr">
+                    <a:solidFill>
+                      <a:srgbClr val="FFFFFF"/>
+                    </a:solidFill>
+                  </a:tcPr>
+                </a:tc>
+                <a:tc>
+                  <a:txBody>
+                    <a:bodyPr wrap="square"/>
+                    <a:lstStyle/>
+                    <a:p>
+                      <a:pPr algn="ctr"/>
+                      <a:r>
+                        <a:rPr sz="1250" b="0">
+                          <a:solidFill>
+                            <a:srgbClr val="333333"/>
+                          </a:solidFill>
+                          <a:latin typeface="Arial"/>
+                          <a:ea typeface="微软雅黑"/>
+                        </a:rPr>
+                        <a:t>−49.7%</a:t>
+                      </a:r>
+                    </a:p>
+                  </a:txBody>
+                  <a:tcPr marL="54864" marR="54864" marT="18288" marB="18288" anchor="ctr">
+                    <a:solidFill>
+                      <a:srgbClr val="FFFFFF"/>
+                    </a:solidFill>
+                  </a:tcPr>
+                </a:tc>
+                <a:tc>
+                  <a:txBody>
+                    <a:bodyPr wrap="square"/>
+                    <a:lstStyle/>
+                    <a:p>
+                      <a:pPr algn="ctr"/>
+                      <a:r>
+                        <a:rPr sz="1250" b="0">
+                          <a:solidFill>
+                            <a:srgbClr val="333333"/>
+                          </a:solidFill>
+                          <a:latin typeface="Arial"/>
+                          <a:ea typeface="微软雅黑"/>
+                        </a:rPr>
+                        <a:t>−14.8%</a:t>
                       </a:r>
                     </a:p>
                   </a:txBody>
@@ -12544,7 +12886,7 @@
                   </a:tcPr>
                 </a:tc>
               </a:tr>
-              <a:tr h="731520">
+              <a:tr h="603504">
                 <a:tc>
                   <a:txBody>
                     <a:bodyPr wrap="square"/>
@@ -12559,7 +12901,7 @@
                           <a:latin typeface="Arial"/>
                           <a:ea typeface="微软雅黑"/>
                         </a:rPr>
-                        <a:t>w4 极限（s3 / s4）</a:t>
+                        <a:t>w5 突发</a:t>
                       </a:r>
                     </a:p>
                   </a:txBody>
@@ -12583,7 +12925,7 @@
                           <a:latin typeface="Arial"/>
                           <a:ea typeface="微软雅黑"/>
                         </a:rPr>
-                        <a:t>+9.3% / +16.0%</a:t>
+                        <a:t>+21.3%</a:t>
                       </a:r>
                     </a:p>
                   </a:txBody>
@@ -12607,7 +12949,55 @@
                           <a:latin typeface="Arial"/>
                           <a:ea typeface="微软雅黑"/>
                         </a:rPr>
-                        <a:t>−49.7% / −14.8%</a:t>
+                        <a:t>+2.8%</a:t>
+                      </a:r>
+                    </a:p>
+                  </a:txBody>
+                  <a:tcPr marL="54864" marR="54864" marT="18288" marB="18288" anchor="ctr">
+                    <a:solidFill>
+                      <a:srgbClr val="F5F7FA"/>
+                    </a:solidFill>
+                  </a:tcPr>
+                </a:tc>
+                <a:tc>
+                  <a:txBody>
+                    <a:bodyPr wrap="square"/>
+                    <a:lstStyle/>
+                    <a:p>
+                      <a:pPr algn="ctr"/>
+                      <a:r>
+                        <a:rPr sz="1250" b="0">
+                          <a:solidFill>
+                            <a:srgbClr val="333333"/>
+                          </a:solidFill>
+                          <a:latin typeface="Arial"/>
+                          <a:ea typeface="微软雅黑"/>
+                        </a:rPr>
+                        <a:t>−18.0%</a:t>
+                      </a:r>
+                    </a:p>
+                  </a:txBody>
+                  <a:tcPr marL="54864" marR="54864" marT="18288" marB="18288" anchor="ctr">
+                    <a:solidFill>
+                      <a:srgbClr val="F5F7FA"/>
+                    </a:solidFill>
+                  </a:tcPr>
+                </a:tc>
+                <a:tc>
+                  <a:txBody>
+                    <a:bodyPr wrap="square"/>
+                    <a:lstStyle/>
+                    <a:p>
+                      <a:pPr algn="ctr"/>
+                      <a:r>
+                        <a:rPr sz="1250" b="0">
+                          <a:solidFill>
+                            <a:srgbClr val="333333"/>
+                          </a:solidFill>
+                          <a:latin typeface="Arial"/>
+                          <a:ea typeface="微软雅黑"/>
+                        </a:rPr>
+                        <a:t>−0.3%</a:t>
                       </a:r>
                     </a:p>
                   </a:txBody>
@@ -12618,7 +13008,7 @@
                   </a:tcPr>
                 </a:tc>
               </a:tr>
-              <a:tr h="731520">
+              <a:tr h="603504">
                 <a:tc>
                   <a:txBody>
                     <a:bodyPr wrap="square"/>
@@ -12633,7 +13023,7 @@
                           <a:latin typeface="Arial"/>
                           <a:ea typeface="微软雅黑"/>
                         </a:rPr>
-                        <a:t>w5 突发（s3 / s4）</a:t>
+                        <a:t>w7 异构</a:t>
                       </a:r>
                     </a:p>
                   </a:txBody>
@@ -12657,7 +13047,7 @@
                           <a:latin typeface="Arial"/>
                           <a:ea typeface="微软雅黑"/>
                         </a:rPr>
-                        <a:t>+21.3% / +2.8%</a:t>
+                        <a:t>+21.2%</a:t>
                       </a:r>
                     </a:p>
                   </a:txBody>
@@ -12681,39 +13071,13 @@
                           <a:latin typeface="Arial"/>
                           <a:ea typeface="微软雅黑"/>
                         </a:rPr>
-                        <a:t>−18.0% / −0.3%</a:t>
+                        <a:t>持平</a:t>
                       </a:r>
                     </a:p>
                   </a:txBody>
                   <a:tcPr marL="54864" marR="54864" marT="18288" marB="18288" anchor="ctr">
                     <a:solidFill>
                       <a:srgbClr val="FFFFFF"/>
-                    </a:solidFill>
-                  </a:tcPr>
-                </a:tc>
-              </a:tr>
-              <a:tr h="731520">
-                <a:tc>
-                  <a:txBody>
-                    <a:bodyPr wrap="square"/>
-                    <a:lstStyle/>
-                    <a:p>
-                      <a:pPr algn="l"/>
-                      <a:r>
-                        <a:rPr sz="1250" b="0">
-                          <a:solidFill>
-                            <a:srgbClr val="333333"/>
-                          </a:solidFill>
-                          <a:latin typeface="Arial"/>
-                          <a:ea typeface="微软雅黑"/>
-                        </a:rPr>
-                        <a:t>w7 异构（s3 / s4）</a:t>
-                      </a:r>
-                    </a:p>
-                  </a:txBody>
-                  <a:tcPr marL="54864" marR="54864" marT="18288" marB="18288" anchor="ctr">
-                    <a:solidFill>
-                      <a:srgbClr val="F5F7FA"/>
                     </a:solidFill>
                   </a:tcPr>
                 </a:tc>
@@ -12731,13 +13095,13 @@
                           <a:latin typeface="Arial"/>
                           <a:ea typeface="微软雅黑"/>
                         </a:rPr>
-                        <a:t>+21.2% / 持平</a:t>
+                        <a:t>−22.1%</a:t>
                       </a:r>
                     </a:p>
                   </a:txBody>
                   <a:tcPr marL="54864" marR="54864" marT="18288" marB="18288" anchor="ctr">
                     <a:solidFill>
-                      <a:srgbClr val="F5F7FA"/>
+                      <a:srgbClr val="FFFFFF"/>
                     </a:solidFill>
                   </a:tcPr>
                 </a:tc>
@@ -12755,13 +13119,13 @@
                           <a:latin typeface="Arial"/>
                           <a:ea typeface="微软雅黑"/>
                         </a:rPr>
-                        <a:t>−22.1% / −3.9%</a:t>
+                        <a:t>−3.9%</a:t>
                       </a:r>
                     </a:p>
                   </a:txBody>
                   <a:tcPr marL="54864" marR="54864" marT="18288" marB="18288" anchor="ctr">
                     <a:solidFill>
-                      <a:srgbClr val="F5F7FA"/>
+                      <a:srgbClr val="FFFFFF"/>
                     </a:solidFill>
                   </a:tcPr>
                 </a:tc>
@@ -13862,7 +14226,7 @@
                   </a:txBody>
                   <a:tcPr marL="54864" marR="54864" marT="18288" marB="18288" anchor="ctr">
                     <a:solidFill>
-                      <a:srgbClr val="FFFFFF"/>
+                      <a:srgbClr val="F5F7FA"/>
                     </a:solidFill>
                   </a:tcPr>
                 </a:tc>
@@ -13886,6 +14250,56 @@
                   </a:txBody>
                   <a:tcPr marL="54864" marR="54864" marT="18288" marB="18288" anchor="ctr">
                     <a:solidFill>
+                      <a:srgbClr val="F5F7FA"/>
+                    </a:solidFill>
+                  </a:tcPr>
+                </a:tc>
+                <a:tc>
+                  <a:txBody>
+                    <a:bodyPr wrap="square"/>
+                    <a:lstStyle/>
+                    <a:p>
+                      <a:pPr algn="ctr"/>
+                      <a:r>
+                        <a:rPr sz="1200" b="0">
+                          <a:solidFill>
+                            <a:srgbClr val="333333"/>
+                          </a:solidFill>
+                          <a:latin typeface="Arial"/>
+                          <a:ea typeface="微软雅黑"/>
+                        </a:rPr>
+                        <a:t>s3/w3 inst3 0.45 vs 0.93 s（低 51.9%）</a:t>
+                      </a:r>
+                    </a:p>
+                  </a:txBody>
+                  <a:tcPr marL="54864" marR="54864" marT="18288" marB="18288" anchor="ctr">
+                    <a:solidFill>
+                      <a:srgbClr val="F5F7FA"/>
+                    </a:solidFill>
+                  </a:tcPr>
+                </a:tc>
+              </a:tr>
+              <a:tr h="420624">
+                <a:tc>
+                  <a:txBody>
+                    <a:bodyPr wrap="square"/>
+                    <a:lstStyle/>
+                    <a:p>
+                      <a:pPr algn="l"/>
+                      <a:r>
+                        <a:rPr sz="1200" b="0">
+                          <a:solidFill>
+                            <a:srgbClr val="333333"/>
+                          </a:solidFill>
+                          <a:latin typeface="Arial"/>
+                          <a:ea typeface="微软雅黑"/>
+                        </a:rPr>
+                        <a:t>CacheAdapter 零拷贝共享</a:t>
+                      </a:r>
+                    </a:p>
+                  </a:txBody>
+                  <a:tcPr marL="54864" marR="54864" marT="18288" marB="18288" anchor="ctr">
+                    <a:solidFill>
                       <a:srgbClr val="FFFFFF"/>
                     </a:solidFill>
                   </a:tcPr>
@@ -13904,7 +14318,31 @@
                           <a:latin typeface="Arial"/>
                           <a:ea typeface="微软雅黑"/>
                         </a:rPr>
-                        <a:t>s3/w3 inst3 0.45 vs 0.93 s（低 51.9%）</a:t>
+                        <a:t>状态复用 / 无同步延迟</a:t>
+                      </a:r>
+                    </a:p>
+                  </a:txBody>
+                  <a:tcPr marL="54864" marR="54864" marT="18288" marB="18288" anchor="ctr">
+                    <a:solidFill>
+                      <a:srgbClr val="FFFFFF"/>
+                    </a:solidFill>
+                  </a:tcPr>
+                </a:tc>
+                <a:tc>
+                  <a:txBody>
+                    <a:bodyPr wrap="square"/>
+                    <a:lstStyle/>
+                    <a:p>
+                      <a:pPr algn="ctr"/>
+                      <a:r>
+                        <a:rPr sz="1200" b="0">
+                          <a:solidFill>
+                            <a:srgbClr val="333333"/>
+                          </a:solidFill>
+                          <a:latin typeface="Arial"/>
+                          <a:ea typeface="微软雅黑"/>
+                        </a:rPr>
+                        <a:t>inst3 队列峰值 20 vs 16</a:t>
                       </a:r>
                     </a:p>
                   </a:txBody>
@@ -13930,7 +14368,7 @@
                           <a:latin typeface="Arial"/>
                           <a:ea typeface="微软雅黑"/>
                         </a:rPr>
-                        <a:t>CacheAdapter 零拷贝共享</a:t>
+                        <a:t>无独立 Binder 串行段</a:t>
                       </a:r>
                     </a:p>
                   </a:txBody>
@@ -13954,7 +14392,7 @@
                           <a:latin typeface="Arial"/>
                           <a:ea typeface="微软雅黑"/>
                         </a:rPr>
-                        <a:t>状态复用 / 无同步延迟</a:t>
+                        <a:t>有效吞吐随实例扩展</a:t>
                       </a:r>
                     </a:p>
                   </a:txBody>
@@ -13978,7 +14416,7 @@
                           <a:latin typeface="Arial"/>
                           <a:ea typeface="微软雅黑"/>
                         </a:rPr>
-                        <a:t>inst3 队列峰值 20 vs 16</a:t>
+                        <a:t>+17.5% vs +1.4%</a:t>
                       </a:r>
                     </a:p>
                   </a:txBody>
@@ -14004,7 +14442,7 @@
                           <a:latin typeface="Arial"/>
                           <a:ea typeface="微软雅黑"/>
                         </a:rPr>
-                        <a:t>无独立 Binder 串行段</a:t>
+                        <a:t>四层容错守住不变量 I</a:t>
                       </a:r>
                     </a:p>
                   </a:txBody>
@@ -14028,7 +14466,7 @@
                           <a:latin typeface="Arial"/>
                           <a:ea typeface="微软雅黑"/>
                         </a:rPr>
-                        <a:t>有效吞吐随实例扩展</a:t>
+                        <a:t>绑定成功率 / 断言</a:t>
                       </a:r>
                     </a:p>
                   </a:txBody>
@@ -14052,87 +14490,13 @@
                           <a:latin typeface="Arial"/>
                           <a:ea typeface="微软雅黑"/>
                         </a:rPr>
-                        <a:t>+17.5% vs +1.4%</a:t>
+                        <a:t>100%；144 次 run 全过</a:t>
                       </a:r>
                     </a:p>
                   </a:txBody>
                   <a:tcPr marL="54864" marR="54864" marT="18288" marB="18288" anchor="ctr">
                     <a:solidFill>
                       <a:srgbClr val="FFFFFF"/>
-                    </a:solidFill>
-                  </a:tcPr>
-                </a:tc>
-              </a:tr>
-              <a:tr h="420624">
-                <a:tc>
-                  <a:txBody>
-                    <a:bodyPr wrap="square"/>
-                    <a:lstStyle/>
-                    <a:p>
-                      <a:pPr algn="l"/>
-                      <a:r>
-                        <a:rPr sz="1200" b="0">
-                          <a:solidFill>
-                            <a:srgbClr val="333333"/>
-                          </a:solidFill>
-                          <a:latin typeface="Arial"/>
-                          <a:ea typeface="微软雅黑"/>
-                        </a:rPr>
-                        <a:t>四层容错守住不变量 I</a:t>
-                      </a:r>
-                    </a:p>
-                  </a:txBody>
-                  <a:tcPr marL="54864" marR="54864" marT="18288" marB="18288" anchor="ctr">
-                    <a:solidFill>
-                      <a:srgbClr val="F5F7FA"/>
-                    </a:solidFill>
-                  </a:tcPr>
-                </a:tc>
-                <a:tc>
-                  <a:txBody>
-                    <a:bodyPr wrap="square"/>
-                    <a:lstStyle/>
-                    <a:p>
-                      <a:pPr algn="ctr"/>
-                      <a:r>
-                        <a:rPr sz="1200" b="0">
-                          <a:solidFill>
-                            <a:srgbClr val="333333"/>
-                          </a:solidFill>
-                          <a:latin typeface="Arial"/>
-                          <a:ea typeface="微软雅黑"/>
-                        </a:rPr>
-                        <a:t>绑定成功率 / 断言</a:t>
-                      </a:r>
-                    </a:p>
-                  </a:txBody>
-                  <a:tcPr marL="54864" marR="54864" marT="18288" marB="18288" anchor="ctr">
-                    <a:solidFill>
-                      <a:srgbClr val="F5F7FA"/>
-                    </a:solidFill>
-                  </a:tcPr>
-                </a:tc>
-                <a:tc>
-                  <a:txBody>
-                    <a:bodyPr wrap="square"/>
-                    <a:lstStyle/>
-                    <a:p>
-                      <a:pPr algn="ctr"/>
-                      <a:r>
-                        <a:rPr sz="1200" b="0">
-                          <a:solidFill>
-                            <a:srgbClr val="333333"/>
-                          </a:solidFill>
-                          <a:latin typeface="Arial"/>
-                          <a:ea typeface="微软雅黑"/>
-                        </a:rPr>
-                        <a:t>100%；144 次 run 全过</a:t>
-                      </a:r>
-                    </a:p>
-                  </a:txBody>
-                  <a:tcPr marL="54864" marR="54864" marT="18288" marB="18288" anchor="ctr">
-                    <a:solidFill>
-                      <a:srgbClr val="F5F7FA"/>
                     </a:solidFill>
                   </a:tcPr>
                 </a:tc>
@@ -17926,7 +18290,7 @@
                   </a:txBody>
                   <a:tcPr marL="54864" marR="54864" marT="18288" marB="18288" anchor="ctr">
                     <a:solidFill>
-                      <a:srgbClr val="FFFFFF"/>
+                      <a:srgbClr val="F5F7FA"/>
                     </a:solidFill>
                   </a:tcPr>
                 </a:tc>
@@ -17950,7 +18314,7 @@
                   </a:txBody>
                   <a:tcPr marL="54864" marR="54864" marT="18288" marB="18288" anchor="ctr">
                     <a:solidFill>
-                      <a:srgbClr val="FFFFFF"/>
+                      <a:srgbClr val="F5F7FA"/>
                     </a:solidFill>
                   </a:tcPr>
                 </a:tc>
@@ -17974,7 +18338,7 @@
                   </a:txBody>
                   <a:tcPr marL="54864" marR="54864" marT="18288" marB="18288" anchor="ctr">
                     <a:solidFill>
-                      <a:srgbClr val="FFFFFF"/>
+                      <a:srgbClr val="F5F7FA"/>
                     </a:solidFill>
                   </a:tcPr>
                 </a:tc>
@@ -17998,6 +18362,56 @@
                   </a:txBody>
                   <a:tcPr marL="54864" marR="54864" marT="18288" marB="18288" anchor="ctr">
                     <a:solidFill>
+                      <a:srgbClr val="F5F7FA"/>
+                    </a:solidFill>
+                  </a:tcPr>
+                </a:tc>
+                <a:tc>
+                  <a:txBody>
+                    <a:bodyPr wrap="square"/>
+                    <a:lstStyle/>
+                    <a:p>
+                      <a:pPr algn="ctr"/>
+                      <a:r>
+                        <a:rPr sz="1200" b="0">
+                          <a:solidFill>
+                            <a:srgbClr val="333333"/>
+                          </a:solidFill>
+                          <a:latin typeface="Arial"/>
+                          <a:ea typeface="微软雅黑"/>
+                        </a:rPr>
+                        <a:t>0.11</a:t>
+                      </a:r>
+                    </a:p>
+                  </a:txBody>
+                  <a:tcPr marL="54864" marR="54864" marT="18288" marB="18288" anchor="ctr">
+                    <a:solidFill>
+                      <a:srgbClr val="F5F7FA"/>
+                    </a:solidFill>
+                  </a:tcPr>
+                </a:tc>
+              </a:tr>
+              <a:tr h="420624">
+                <a:tc>
+                  <a:txBody>
+                    <a:bodyPr wrap="square"/>
+                    <a:lstStyle/>
+                    <a:p>
+                      <a:pPr algn="l"/>
+                      <a:r>
+                        <a:rPr sz="1200" b="0">
+                          <a:solidFill>
+                            <a:srgbClr val="333333"/>
+                          </a:solidFill>
+                          <a:latin typeface="Arial"/>
+                          <a:ea typeface="微软雅黑"/>
+                        </a:rPr>
+                        <a:t>s2/w3</a:t>
+                      </a:r>
+                    </a:p>
+                  </a:txBody>
+                  <a:tcPr marL="54864" marR="54864" marT="18288" marB="18288" anchor="ctr">
+                    <a:solidFill>
                       <a:srgbClr val="FFFFFF"/>
                     </a:solidFill>
                   </a:tcPr>
@@ -18016,7 +18430,79 @@
                           <a:latin typeface="Arial"/>
                           <a:ea typeface="微软雅黑"/>
                         </a:rPr>
-                        <a:t>0.11</a:t>
+                        <a:t>352.1</a:t>
+                      </a:r>
+                    </a:p>
+                  </a:txBody>
+                  <a:tcPr marL="54864" marR="54864" marT="18288" marB="18288" anchor="ctr">
+                    <a:solidFill>
+                      <a:srgbClr val="FFFFFF"/>
+                    </a:solidFill>
+                  </a:tcPr>
+                </a:tc>
+                <a:tc>
+                  <a:txBody>
+                    <a:bodyPr wrap="square"/>
+                    <a:lstStyle/>
+                    <a:p>
+                      <a:pPr algn="ctr"/>
+                      <a:r>
+                        <a:rPr sz="1200" b="0">
+                          <a:solidFill>
+                            <a:srgbClr val="333333"/>
+                          </a:solidFill>
+                          <a:latin typeface="Arial"/>
+                          <a:ea typeface="微软雅黑"/>
+                        </a:rPr>
+                        <a:t>286.5</a:t>
+                      </a:r>
+                    </a:p>
+                  </a:txBody>
+                  <a:tcPr marL="54864" marR="54864" marT="18288" marB="18288" anchor="ctr">
+                    <a:solidFill>
+                      <a:srgbClr val="FFFFFF"/>
+                    </a:solidFill>
+                  </a:tcPr>
+                </a:tc>
+                <a:tc>
+                  <a:txBody>
+                    <a:bodyPr wrap="square"/>
+                    <a:lstStyle/>
+                    <a:p>
+                      <a:pPr algn="ctr"/>
+                      <a:r>
+                        <a:rPr sz="1200" b="0">
+                          <a:solidFill>
+                            <a:srgbClr val="333333"/>
+                          </a:solidFill>
+                          <a:latin typeface="Arial"/>
+                          <a:ea typeface="微软雅黑"/>
+                        </a:rPr>
+                        <a:t>4.00</a:t>
+                      </a:r>
+                    </a:p>
+                  </a:txBody>
+                  <a:tcPr marL="54864" marR="54864" marT="18288" marB="18288" anchor="ctr">
+                    <a:solidFill>
+                      <a:srgbClr val="FFFFFF"/>
+                    </a:solidFill>
+                  </a:tcPr>
+                </a:tc>
+                <a:tc>
+                  <a:txBody>
+                    <a:bodyPr wrap="square"/>
+                    <a:lstStyle/>
+                    <a:p>
+                      <a:pPr algn="ctr"/>
+                      <a:r>
+                        <a:rPr sz="1200" b="0">
+                          <a:solidFill>
+                            <a:srgbClr val="333333"/>
+                          </a:solidFill>
+                          <a:latin typeface="Arial"/>
+                          <a:ea typeface="微软雅黑"/>
+                        </a:rPr>
+                        <a:t>23.48</a:t>
                       </a:r>
                     </a:p>
                   </a:txBody>
@@ -18042,7 +18528,7 @@
                           <a:latin typeface="Arial"/>
                           <a:ea typeface="微软雅黑"/>
                         </a:rPr>
-                        <a:t>s2/w3</a:t>
+                        <a:t>s3/w3 inst1</a:t>
                       </a:r>
                     </a:p>
                   </a:txBody>
@@ -18066,7 +18552,7 @@
                           <a:latin typeface="Arial"/>
                           <a:ea typeface="微软雅黑"/>
                         </a:rPr>
-                        <a:t>352.1</a:t>
+                        <a:t>297.6</a:t>
                       </a:r>
                     </a:p>
                   </a:txBody>
@@ -18090,7 +18576,7 @@
                           <a:latin typeface="Arial"/>
                           <a:ea typeface="微软雅黑"/>
                         </a:rPr>
-                        <a:t>286.5</a:t>
+                        <a:t>283.3</a:t>
                       </a:r>
                     </a:p>
                   </a:txBody>
@@ -18114,7 +18600,7 @@
                           <a:latin typeface="Arial"/>
                           <a:ea typeface="微软雅黑"/>
                         </a:rPr>
-                        <a:t>4.00</a:t>
+                        <a:t>16.22</a:t>
                       </a:r>
                     </a:p>
                   </a:txBody>
@@ -18138,7 +18624,7 @@
                           <a:latin typeface="Arial"/>
                           <a:ea typeface="微软雅黑"/>
                         </a:rPr>
-                        <a:t>23.48</a:t>
+                        <a:t>32.57</a:t>
                       </a:r>
                     </a:p>
                   </a:txBody>
@@ -18164,7 +18650,7 @@
                           <a:latin typeface="Arial"/>
                           <a:ea typeface="微软雅黑"/>
                         </a:rPr>
-                        <a:t>s3/w3 inst1</a:t>
+                        <a:t>s3/w3 inst3</a:t>
                       </a:r>
                     </a:p>
                   </a:txBody>
@@ -18188,7 +18674,7 @@
                           <a:latin typeface="Arial"/>
                           <a:ea typeface="微软雅黑"/>
                         </a:rPr>
-                        <a:t>297.6</a:t>
+                        <a:t>349.7</a:t>
                       </a:r>
                     </a:p>
                   </a:txBody>
@@ -18212,7 +18698,7 @@
                           <a:latin typeface="Arial"/>
                           <a:ea typeface="微软雅黑"/>
                         </a:rPr>
-                        <a:t>283.3</a:t>
+                        <a:t>287.4</a:t>
                       </a:r>
                     </a:p>
                   </a:txBody>
@@ -18236,7 +18722,7 @@
                           <a:latin typeface="Arial"/>
                           <a:ea typeface="微软雅黑"/>
                         </a:rPr>
-                        <a:t>16.22</a:t>
+                        <a:t>0.13</a:t>
                       </a:r>
                     </a:p>
                   </a:txBody>
@@ -18260,7 +18746,7 @@
                           <a:latin typeface="Arial"/>
                           <a:ea typeface="微软雅黑"/>
                         </a:rPr>
-                        <a:t>32.57</a:t>
+                        <a:t>0.15</a:t>
                       </a:r>
                     </a:p>
                   </a:txBody>
@@ -18286,7 +18772,7 @@
                           <a:latin typeface="Arial"/>
                           <a:ea typeface="微软雅黑"/>
                         </a:rPr>
-                        <a:t>s3/w3 inst3</a:t>
+                        <a:t>s4/w3 inst3</a:t>
                       </a:r>
                     </a:p>
                   </a:txBody>
@@ -18310,7 +18796,7 @@
                           <a:latin typeface="Arial"/>
                           <a:ea typeface="微软雅黑"/>
                         </a:rPr>
-                        <a:t>349.7</a:t>
+                        <a:t>296.7</a:t>
                       </a:r>
                     </a:p>
                   </a:txBody>
@@ -18334,7 +18820,7 @@
                           <a:latin typeface="Arial"/>
                           <a:ea typeface="微软雅黑"/>
                         </a:rPr>
-                        <a:t>287.4</a:t>
+                        <a:t>280.9</a:t>
                       </a:r>
                     </a:p>
                   </a:txBody>
@@ -18358,7 +18844,7 @@
                           <a:latin typeface="Arial"/>
                           <a:ea typeface="微软雅黑"/>
                         </a:rPr>
-                        <a:t>0.13</a:t>
+                        <a:t>0.19</a:t>
                       </a:r>
                     </a:p>
                   </a:txBody>
@@ -18382,7 +18868,7 @@
                           <a:latin typeface="Arial"/>
                           <a:ea typeface="微软雅黑"/>
                         </a:rPr>
-                        <a:t>0.15</a:t>
+                        <a:t>0.28</a:t>
                       </a:r>
                     </a:p>
                   </a:txBody>
@@ -18408,7 +18894,7 @@
                           <a:latin typeface="Arial"/>
                           <a:ea typeface="微软雅黑"/>
                         </a:rPr>
-                        <a:t>s4/w3 inst3</a:t>
+                        <a:t>s4/w7 inst3</a:t>
                       </a:r>
                     </a:p>
                   </a:txBody>
@@ -18432,7 +18918,7 @@
                           <a:latin typeface="Arial"/>
                           <a:ea typeface="微软雅黑"/>
                         </a:rPr>
-                        <a:t>296.7</a:t>
+                        <a:t>271.7</a:t>
                       </a:r>
                     </a:p>
                   </a:txBody>
@@ -18456,7 +18942,7 @@
                           <a:latin typeface="Arial"/>
                           <a:ea typeface="微软雅黑"/>
                         </a:rPr>
-                        <a:t>280.9</a:t>
+                        <a:t>271.7</a:t>
                       </a:r>
                     </a:p>
                   </a:txBody>
@@ -18480,7 +18966,7 @@
                           <a:latin typeface="Arial"/>
                           <a:ea typeface="微软雅黑"/>
                         </a:rPr>
-                        <a:t>0.19</a:t>
+                        <a:t>0.06</a:t>
                       </a:r>
                     </a:p>
                   </a:txBody>
@@ -18504,135 +18990,13 @@
                           <a:latin typeface="Arial"/>
                           <a:ea typeface="微软雅黑"/>
                         </a:rPr>
-                        <a:t>0.28</a:t>
+                        <a:t>0.06</a:t>
                       </a:r>
                     </a:p>
                   </a:txBody>
                   <a:tcPr marL="54864" marR="54864" marT="18288" marB="18288" anchor="ctr">
                     <a:solidFill>
                       <a:srgbClr val="FFFFFF"/>
-                    </a:solidFill>
-                  </a:tcPr>
-                </a:tc>
-              </a:tr>
-              <a:tr h="420624">
-                <a:tc>
-                  <a:txBody>
-                    <a:bodyPr wrap="square"/>
-                    <a:lstStyle/>
-                    <a:p>
-                      <a:pPr algn="l"/>
-                      <a:r>
-                        <a:rPr sz="1200" b="0">
-                          <a:solidFill>
-                            <a:srgbClr val="333333"/>
-                          </a:solidFill>
-                          <a:latin typeface="Arial"/>
-                          <a:ea typeface="微软雅黑"/>
-                        </a:rPr>
-                        <a:t>s4/w7 inst3</a:t>
-                      </a:r>
-                    </a:p>
-                  </a:txBody>
-                  <a:tcPr marL="54864" marR="54864" marT="18288" marB="18288" anchor="ctr">
-                    <a:solidFill>
-                      <a:srgbClr val="F5F7FA"/>
-                    </a:solidFill>
-                  </a:tcPr>
-                </a:tc>
-                <a:tc>
-                  <a:txBody>
-                    <a:bodyPr wrap="square"/>
-                    <a:lstStyle/>
-                    <a:p>
-                      <a:pPr algn="ctr"/>
-                      <a:r>
-                        <a:rPr sz="1200" b="0">
-                          <a:solidFill>
-                            <a:srgbClr val="333333"/>
-                          </a:solidFill>
-                          <a:latin typeface="Arial"/>
-                          <a:ea typeface="微软雅黑"/>
-                        </a:rPr>
-                        <a:t>271.7</a:t>
-                      </a:r>
-                    </a:p>
-                  </a:txBody>
-                  <a:tcPr marL="54864" marR="54864" marT="18288" marB="18288" anchor="ctr">
-                    <a:solidFill>
-                      <a:srgbClr val="F5F7FA"/>
-                    </a:solidFill>
-                  </a:tcPr>
-                </a:tc>
-                <a:tc>
-                  <a:txBody>
-                    <a:bodyPr wrap="square"/>
-                    <a:lstStyle/>
-                    <a:p>
-                      <a:pPr algn="ctr"/>
-                      <a:r>
-                        <a:rPr sz="1200" b="0">
-                          <a:solidFill>
-                            <a:srgbClr val="333333"/>
-                          </a:solidFill>
-                          <a:latin typeface="Arial"/>
-                          <a:ea typeface="微软雅黑"/>
-                        </a:rPr>
-                        <a:t>271.7</a:t>
-                      </a:r>
-                    </a:p>
-                  </a:txBody>
-                  <a:tcPr marL="54864" marR="54864" marT="18288" marB="18288" anchor="ctr">
-                    <a:solidFill>
-                      <a:srgbClr val="F5F7FA"/>
-                    </a:solidFill>
-                  </a:tcPr>
-                </a:tc>
-                <a:tc>
-                  <a:txBody>
-                    <a:bodyPr wrap="square"/>
-                    <a:lstStyle/>
-                    <a:p>
-                      <a:pPr algn="ctr"/>
-                      <a:r>
-                        <a:rPr sz="1200" b="0">
-                          <a:solidFill>
-                            <a:srgbClr val="333333"/>
-                          </a:solidFill>
-                          <a:latin typeface="Arial"/>
-                          <a:ea typeface="微软雅黑"/>
-                        </a:rPr>
-                        <a:t>0.06</a:t>
-                      </a:r>
-                    </a:p>
-                  </a:txBody>
-                  <a:tcPr marL="54864" marR="54864" marT="18288" marB="18288" anchor="ctr">
-                    <a:solidFill>
-                      <a:srgbClr val="F5F7FA"/>
-                    </a:solidFill>
-                  </a:tcPr>
-                </a:tc>
-                <a:tc>
-                  <a:txBody>
-                    <a:bodyPr wrap="square"/>
-                    <a:lstStyle/>
-                    <a:p>
-                      <a:pPr algn="ctr"/>
-                      <a:r>
-                        <a:rPr sz="1200" b="0">
-                          <a:solidFill>
-                            <a:srgbClr val="333333"/>
-                          </a:solidFill>
-                          <a:latin typeface="Arial"/>
-                          <a:ea typeface="微软雅黑"/>
-                        </a:rPr>
-                        <a:t>0.06</a:t>
-                      </a:r>
-                    </a:p>
-                  </a:txBody>
-                  <a:tcPr marL="54864" marR="54864" marT="18288" marB="18288" anchor="ctr">
-                    <a:solidFill>
-                      <a:srgbClr val="F5F7FA"/>
                     </a:solidFill>
                   </a:tcPr>
                 </a:tc>
@@ -19069,7 +19433,7 @@
                   </a:txBody>
                   <a:tcPr marL="54864" marR="54864" marT="18288" marB="18288" anchor="ctr">
                     <a:solidFill>
-                      <a:srgbClr val="FFFFFF"/>
+                      <a:srgbClr val="F5F7FA"/>
                     </a:solidFill>
                   </a:tcPr>
                 </a:tc>
@@ -19093,6 +19457,56 @@
                   </a:txBody>
                   <a:tcPr marL="54864" marR="54864" marT="18288" marB="18288" anchor="ctr">
                     <a:solidFill>
+                      <a:srgbClr val="F5F7FA"/>
+                    </a:solidFill>
+                  </a:tcPr>
+                </a:tc>
+                <a:tc>
+                  <a:txBody>
+                    <a:bodyPr wrap="square"/>
+                    <a:lstStyle/>
+                    <a:p>
+                      <a:pPr algn="ctr"/>
+                      <a:r>
+                        <a:rPr sz="1200" b="0">
+                          <a:solidFill>
+                            <a:srgbClr val="333333"/>
+                          </a:solidFill>
+                          <a:latin typeface="Arial"/>
+                          <a:ea typeface="微软雅黑"/>
+                        </a:rPr>
+                        <a:t>每 run 算再取中位数</a:t>
+                      </a:r>
+                    </a:p>
+                  </a:txBody>
+                  <a:tcPr marL="54864" marR="54864" marT="18288" marB="18288" anchor="ctr">
+                    <a:solidFill>
+                      <a:srgbClr val="F5F7FA"/>
+                    </a:solidFill>
+                  </a:tcPr>
+                </a:tc>
+              </a:tr>
+              <a:tr h="420624">
+                <a:tc>
+                  <a:txBody>
+                    <a:bodyPr wrap="square"/>
+                    <a:lstStyle/>
+                    <a:p>
+                      <a:pPr algn="l"/>
+                      <a:r>
+                        <a:rPr sz="1200" b="0">
+                          <a:solidFill>
+                            <a:srgbClr val="333333"/>
+                          </a:solidFill>
+                          <a:latin typeface="Arial"/>
+                          <a:ea typeface="微软雅黑"/>
+                        </a:rPr>
+                        <a:t>峰值吞吐</a:t>
+                      </a:r>
+                    </a:p>
+                  </a:txBody>
+                  <a:tcPr marL="54864" marR="54864" marT="18288" marB="18288" anchor="ctr">
+                    <a:solidFill>
                       <a:srgbClr val="FFFFFF"/>
                     </a:solidFill>
                   </a:tcPr>
@@ -19111,7 +19525,31 @@
                           <a:latin typeface="Arial"/>
                           <a:ea typeface="微软雅黑"/>
                         </a:rPr>
-                        <a:t>每 run 算再取中位数</a:t>
+                        <a:t>scheduling_peak_throughput</a:t>
+                      </a:r>
+                    </a:p>
+                  </a:txBody>
+                  <a:tcPr marL="54864" marR="54864" marT="18288" marB="18288" anchor="ctr">
+                    <a:solidFill>
+                      <a:srgbClr val="FFFFFF"/>
+                    </a:solidFill>
+                  </a:tcPr>
+                </a:tc>
+                <a:tc>
+                  <a:txBody>
+                    <a:bodyPr wrap="square"/>
+                    <a:lstStyle/>
+                    <a:p>
+                      <a:pPr algn="ctr"/>
+                      <a:r>
+                        <a:rPr sz="1200" b="0">
+                          <a:solidFill>
+                            <a:srgbClr val="333333"/>
+                          </a:solidFill>
+                          <a:latin typeface="Arial"/>
+                          <a:ea typeface="微软雅黑"/>
+                        </a:rPr>
+                        <a:t>3 run 逐点中位数后取标量</a:t>
                       </a:r>
                     </a:p>
                   </a:txBody>
@@ -19137,7 +19575,7 @@
                           <a:latin typeface="Arial"/>
                           <a:ea typeface="微软雅黑"/>
                         </a:rPr>
-                        <a:t>峰值吞吐</a:t>
+                        <a:t>P90/P99</a:t>
                       </a:r>
                     </a:p>
                   </a:txBody>
@@ -19161,7 +19599,7 @@
                           <a:latin typeface="Arial"/>
                           <a:ea typeface="微软雅黑"/>
                         </a:rPr>
-                        <a:t>scheduling_peak_throughput</a:t>
+                        <a:t>activeQ 到 Bind 完成的分位</a:t>
                       </a:r>
                     </a:p>
                   </a:txBody>
@@ -19185,7 +19623,7 @@
                           <a:latin typeface="Arial"/>
                           <a:ea typeface="微软雅黑"/>
                         </a:rPr>
-                        <a:t>3 run 逐点中位数后取标量</a:t>
+                        <a:t>剔首尾各 2 点后取中位数</a:t>
                       </a:r>
                     </a:p>
                   </a:txBody>
@@ -19211,7 +19649,7 @@
                           <a:latin typeface="Arial"/>
                           <a:ea typeface="微软雅黑"/>
                         </a:rPr>
-                        <a:t>P90/P99</a:t>
+                        <a:t>Pod E2E P99</a:t>
                       </a:r>
                     </a:p>
                   </a:txBody>
@@ -19235,7 +19673,7 @@
                           <a:latin typeface="Arial"/>
                           <a:ea typeface="微软雅黑"/>
                         </a:rPr>
-                        <a:t>activeQ 到 Bind 完成的分位</a:t>
+                        <a:t>pod_e2e_latency_p99</a:t>
                       </a:r>
                     </a:p>
                   </a:txBody>
@@ -19259,7 +19697,7 @@
                           <a:latin typeface="Arial"/>
                           <a:ea typeface="微软雅黑"/>
                         </a:rPr>
-                        <a:t>剔首尾各 2 点后取中位数</a:t>
+                        <a:t>同上</a:t>
                       </a:r>
                     </a:p>
                   </a:txBody>
@@ -19285,7 +19723,7 @@
                           <a:latin typeface="Arial"/>
                           <a:ea typeface="微软雅黑"/>
                         </a:rPr>
-                        <a:t>Pod E2E P99</a:t>
+                        <a:t>绑定成功率</a:t>
                       </a:r>
                     </a:p>
                   </a:txBody>
@@ -19309,7 +19747,7 @@
                           <a:latin typeface="Arial"/>
                           <a:ea typeface="微软雅黑"/>
                         </a:rPr>
-                        <a:t>pod_e2e_latency_p99</a:t>
+                        <a:t>Bind 成功 / 尝试</a:t>
                       </a:r>
                     </a:p>
                   </a:txBody>
@@ -19333,7 +19771,7 @@
                           <a:latin typeface="Arial"/>
                           <a:ea typeface="微软雅黑"/>
                         </a:rPr>
-                        <a:t>同上</a:t>
+                        <a:t>比值</a:t>
                       </a:r>
                     </a:p>
                   </a:txBody>
@@ -19359,7 +19797,7 @@
                           <a:latin typeface="Arial"/>
                           <a:ea typeface="微软雅黑"/>
                         </a:rPr>
-                        <a:t>绑定成功率</a:t>
+                        <a:t>队列堆积峰值</a:t>
                       </a:r>
                     </a:p>
                   </a:txBody>
@@ -19383,7 +19821,7 @@
                           <a:latin typeface="Arial"/>
                           <a:ea typeface="微软雅黑"/>
                         </a:rPr>
-                        <a:t>Bind 成功 / 尝试</a:t>
+                        <a:t>pending_pods 最大值</a:t>
                       </a:r>
                     </a:p>
                   </a:txBody>
@@ -19407,87 +19845,13 @@
                           <a:latin typeface="Arial"/>
                           <a:ea typeface="微软雅黑"/>
                         </a:rPr>
-                        <a:t>比值</a:t>
+                        <a:t>取最大</a:t>
                       </a:r>
                     </a:p>
                   </a:txBody>
                   <a:tcPr marL="54864" marR="54864" marT="18288" marB="18288" anchor="ctr">
                     <a:solidFill>
                       <a:srgbClr val="FFFFFF"/>
-                    </a:solidFill>
-                  </a:tcPr>
-                </a:tc>
-              </a:tr>
-              <a:tr h="420624">
-                <a:tc>
-                  <a:txBody>
-                    <a:bodyPr wrap="square"/>
-                    <a:lstStyle/>
-                    <a:p>
-                      <a:pPr algn="l"/>
-                      <a:r>
-                        <a:rPr sz="1200" b="0">
-                          <a:solidFill>
-                            <a:srgbClr val="333333"/>
-                          </a:solidFill>
-                          <a:latin typeface="Arial"/>
-                          <a:ea typeface="微软雅黑"/>
-                        </a:rPr>
-                        <a:t>队列堆积峰值</a:t>
-                      </a:r>
-                    </a:p>
-                  </a:txBody>
-                  <a:tcPr marL="54864" marR="54864" marT="18288" marB="18288" anchor="ctr">
-                    <a:solidFill>
-                      <a:srgbClr val="F5F7FA"/>
-                    </a:solidFill>
-                  </a:tcPr>
-                </a:tc>
-                <a:tc>
-                  <a:txBody>
-                    <a:bodyPr wrap="square"/>
-                    <a:lstStyle/>
-                    <a:p>
-                      <a:pPr algn="ctr"/>
-                      <a:r>
-                        <a:rPr sz="1200" b="0">
-                          <a:solidFill>
-                            <a:srgbClr val="333333"/>
-                          </a:solidFill>
-                          <a:latin typeface="Arial"/>
-                          <a:ea typeface="微软雅黑"/>
-                        </a:rPr>
-                        <a:t>pending_pods 最大值</a:t>
-                      </a:r>
-                    </a:p>
-                  </a:txBody>
-                  <a:tcPr marL="54864" marR="54864" marT="18288" marB="18288" anchor="ctr">
-                    <a:solidFill>
-                      <a:srgbClr val="F5F7FA"/>
-                    </a:solidFill>
-                  </a:tcPr>
-                </a:tc>
-                <a:tc>
-                  <a:txBody>
-                    <a:bodyPr wrap="square"/>
-                    <a:lstStyle/>
-                    <a:p>
-                      <a:pPr algn="ctr"/>
-                      <a:r>
-                        <a:rPr sz="1200" b="0">
-                          <a:solidFill>
-                            <a:srgbClr val="333333"/>
-                          </a:solidFill>
-                          <a:latin typeface="Arial"/>
-                          <a:ea typeface="微软雅黑"/>
-                        </a:rPr>
-                        <a:t>取最大</a:t>
-                      </a:r>
-                    </a:p>
-                  </a:txBody>
-                  <a:tcPr marL="54864" marR="54864" marT="18288" marB="18288" anchor="ctr">
-                    <a:solidFill>
-                      <a:srgbClr val="F5F7FA"/>
                     </a:solidFill>
                   </a:tcPr>
                 </a:tc>
@@ -20284,7 +20648,7 @@
                   </a:txBody>
                   <a:tcPr marL="54864" marR="54864" marT="18288" marB="18288" anchor="ctr">
                     <a:solidFill>
-                      <a:srgbClr val="FFFFFF"/>
+                      <a:srgbClr val="F5F7FA"/>
                     </a:solidFill>
                   </a:tcPr>
                 </a:tc>
@@ -20308,7 +20672,7 @@
                   </a:txBody>
                   <a:tcPr marL="54864" marR="54864" marT="18288" marB="18288" anchor="ctr">
                     <a:solidFill>
-                      <a:srgbClr val="FFFFFF"/>
+                      <a:srgbClr val="F5F7FA"/>
                     </a:solidFill>
                   </a:tcPr>
                 </a:tc>
@@ -20332,7 +20696,7 @@
                   </a:txBody>
                   <a:tcPr marL="54864" marR="54864" marT="18288" marB="18288" anchor="ctr">
                     <a:solidFill>
-                      <a:srgbClr val="FFFFFF"/>
+                      <a:srgbClr val="F5F7FA"/>
                     </a:solidFill>
                   </a:tcPr>
                 </a:tc>
@@ -20356,6 +20720,56 @@
                   </a:txBody>
                   <a:tcPr marL="54864" marR="54864" marT="18288" marB="18288" anchor="ctr">
                     <a:solidFill>
+                      <a:srgbClr val="F5F7FA"/>
+                    </a:solidFill>
+                  </a:tcPr>
+                </a:tc>
+                <a:tc>
+                  <a:txBody>
+                    <a:bodyPr wrap="square"/>
+                    <a:lstStyle/>
+                    <a:p>
+                      <a:pPr algn="ctr"/>
+                      <a:r>
+                        <a:rPr sz="1200" b="0">
+                          <a:solidFill>
+                            <a:srgbClr val="333333"/>
+                          </a:solidFill>
+                          <a:latin typeface="Arial"/>
+                          <a:ea typeface="微软雅黑"/>
+                        </a:rPr>
+                        <a:t>0.175</a:t>
+                      </a:r>
+                    </a:p>
+                  </a:txBody>
+                  <a:tcPr marL="54864" marR="54864" marT="18288" marB="18288" anchor="ctr">
+                    <a:solidFill>
+                      <a:srgbClr val="F5F7FA"/>
+                    </a:solidFill>
+                  </a:tcPr>
+                </a:tc>
+              </a:tr>
+              <a:tr h="420624">
+                <a:tc>
+                  <a:txBody>
+                    <a:bodyPr wrap="square"/>
+                    <a:lstStyle/>
+                    <a:p>
+                      <a:pPr algn="l"/>
+                      <a:r>
+                        <a:rPr sz="1200" b="0">
+                          <a:solidFill>
+                            <a:srgbClr val="333333"/>
+                          </a:solidFill>
+                          <a:latin typeface="Arial"/>
+                          <a:ea typeface="微软雅黑"/>
+                        </a:rPr>
+                        <a:t>s3/w6 inst3</a:t>
+                      </a:r>
+                    </a:p>
+                  </a:txBody>
+                  <a:tcPr marL="54864" marR="54864" marT="18288" marB="18288" anchor="ctr">
+                    <a:solidFill>
                       <a:srgbClr val="FFFFFF"/>
                     </a:solidFill>
                   </a:tcPr>
@@ -20374,7 +20788,79 @@
                           <a:latin typeface="Arial"/>
                           <a:ea typeface="微软雅黑"/>
                         </a:rPr>
-                        <a:t>0.175</a:t>
+                        <a:t>215.5</a:t>
+                      </a:r>
+                    </a:p>
+                  </a:txBody>
+                  <a:tcPr marL="54864" marR="54864" marT="18288" marB="18288" anchor="ctr">
+                    <a:solidFill>
+                      <a:srgbClr val="FFFFFF"/>
+                    </a:solidFill>
+                  </a:tcPr>
+                </a:tc>
+                <a:tc>
+                  <a:txBody>
+                    <a:bodyPr wrap="square"/>
+                    <a:lstStyle/>
+                    <a:p>
+                      <a:pPr algn="ctr"/>
+                      <a:r>
+                        <a:rPr sz="1200" b="0">
+                          <a:solidFill>
+                            <a:srgbClr val="333333"/>
+                          </a:solidFill>
+                          <a:latin typeface="Arial"/>
+                          <a:ea typeface="微软雅黑"/>
+                        </a:rPr>
+                        <a:t>206.6</a:t>
+                      </a:r>
+                    </a:p>
+                  </a:txBody>
+                  <a:tcPr marL="54864" marR="54864" marT="18288" marB="18288" anchor="ctr">
+                    <a:solidFill>
+                      <a:srgbClr val="FFFFFF"/>
+                    </a:solidFill>
+                  </a:tcPr>
+                </a:tc>
+                <a:tc>
+                  <a:txBody>
+                    <a:bodyPr wrap="square"/>
+                    <a:lstStyle/>
+                    <a:p>
+                      <a:pPr algn="ctr"/>
+                      <a:r>
+                        <a:rPr sz="1200" b="0">
+                          <a:solidFill>
+                            <a:srgbClr val="333333"/>
+                          </a:solidFill>
+                          <a:latin typeface="Arial"/>
+                          <a:ea typeface="微软雅黑"/>
+                        </a:rPr>
+                        <a:t>0.892</a:t>
+                      </a:r>
+                    </a:p>
+                  </a:txBody>
+                  <a:tcPr marL="54864" marR="54864" marT="18288" marB="18288" anchor="ctr">
+                    <a:solidFill>
+                      <a:srgbClr val="FFFFFF"/>
+                    </a:solidFill>
+                  </a:tcPr>
+                </a:tc>
+                <a:tc>
+                  <a:txBody>
+                    <a:bodyPr wrap="square"/>
+                    <a:lstStyle/>
+                    <a:p>
+                      <a:pPr algn="ctr"/>
+                      <a:r>
+                        <a:rPr sz="1200" b="0">
+                          <a:solidFill>
+                            <a:srgbClr val="333333"/>
+                          </a:solidFill>
+                          <a:latin typeface="Arial"/>
+                          <a:ea typeface="微软雅黑"/>
+                        </a:rPr>
+                        <a:t>0.218</a:t>
                       </a:r>
                     </a:p>
                   </a:txBody>
@@ -20400,7 +20886,7 @@
                           <a:latin typeface="Arial"/>
                           <a:ea typeface="微软雅黑"/>
                         </a:rPr>
-                        <a:t>s3/w6 inst3</a:t>
+                        <a:t>s4/w6 inst3</a:t>
                       </a:r>
                     </a:p>
                   </a:txBody>
@@ -20424,7 +20910,7 @@
                           <a:latin typeface="Arial"/>
                           <a:ea typeface="微软雅黑"/>
                         </a:rPr>
-                        <a:t>215.5</a:t>
+                        <a:t>245.1</a:t>
                       </a:r>
                     </a:p>
                   </a:txBody>
@@ -20472,7 +20958,7 @@
                           <a:latin typeface="Arial"/>
                           <a:ea typeface="微软雅黑"/>
                         </a:rPr>
-                        <a:t>0.892</a:t>
+                        <a:t>0.576</a:t>
                       </a:r>
                     </a:p>
                   </a:txBody>
@@ -20496,135 +20982,13 @@
                           <a:latin typeface="Arial"/>
                           <a:ea typeface="微软雅黑"/>
                         </a:rPr>
-                        <a:t>0.218</a:t>
+                        <a:t>0.353</a:t>
                       </a:r>
                     </a:p>
                   </a:txBody>
                   <a:tcPr marL="54864" marR="54864" marT="18288" marB="18288" anchor="ctr">
                     <a:solidFill>
                       <a:srgbClr val="F5F7FA"/>
-                    </a:solidFill>
-                  </a:tcPr>
-                </a:tc>
-              </a:tr>
-              <a:tr h="420624">
-                <a:tc>
-                  <a:txBody>
-                    <a:bodyPr wrap="square"/>
-                    <a:lstStyle/>
-                    <a:p>
-                      <a:pPr algn="l"/>
-                      <a:r>
-                        <a:rPr sz="1200" b="0">
-                          <a:solidFill>
-                            <a:srgbClr val="333333"/>
-                          </a:solidFill>
-                          <a:latin typeface="Arial"/>
-                          <a:ea typeface="微软雅黑"/>
-                        </a:rPr>
-                        <a:t>s4/w6 inst3</a:t>
-                      </a:r>
-                    </a:p>
-                  </a:txBody>
-                  <a:tcPr marL="54864" marR="54864" marT="18288" marB="18288" anchor="ctr">
-                    <a:solidFill>
-                      <a:srgbClr val="FFFFFF"/>
-                    </a:solidFill>
-                  </a:tcPr>
-                </a:tc>
-                <a:tc>
-                  <a:txBody>
-                    <a:bodyPr wrap="square"/>
-                    <a:lstStyle/>
-                    <a:p>
-                      <a:pPr algn="ctr"/>
-                      <a:r>
-                        <a:rPr sz="1200" b="0">
-                          <a:solidFill>
-                            <a:srgbClr val="333333"/>
-                          </a:solidFill>
-                          <a:latin typeface="Arial"/>
-                          <a:ea typeface="微软雅黑"/>
-                        </a:rPr>
-                        <a:t>245.1</a:t>
-                      </a:r>
-                    </a:p>
-                  </a:txBody>
-                  <a:tcPr marL="54864" marR="54864" marT="18288" marB="18288" anchor="ctr">
-                    <a:solidFill>
-                      <a:srgbClr val="FFFFFF"/>
-                    </a:solidFill>
-                  </a:tcPr>
-                </a:tc>
-                <a:tc>
-                  <a:txBody>
-                    <a:bodyPr wrap="square"/>
-                    <a:lstStyle/>
-                    <a:p>
-                      <a:pPr algn="ctr"/>
-                      <a:r>
-                        <a:rPr sz="1200" b="0">
-                          <a:solidFill>
-                            <a:srgbClr val="333333"/>
-                          </a:solidFill>
-                          <a:latin typeface="Arial"/>
-                          <a:ea typeface="微软雅黑"/>
-                        </a:rPr>
-                        <a:t>206.6</a:t>
-                      </a:r>
-                    </a:p>
-                  </a:txBody>
-                  <a:tcPr marL="54864" marR="54864" marT="18288" marB="18288" anchor="ctr">
-                    <a:solidFill>
-                      <a:srgbClr val="FFFFFF"/>
-                    </a:solidFill>
-                  </a:tcPr>
-                </a:tc>
-                <a:tc>
-                  <a:txBody>
-                    <a:bodyPr wrap="square"/>
-                    <a:lstStyle/>
-                    <a:p>
-                      <a:pPr algn="ctr"/>
-                      <a:r>
-                        <a:rPr sz="1200" b="0">
-                          <a:solidFill>
-                            <a:srgbClr val="333333"/>
-                          </a:solidFill>
-                          <a:latin typeface="Arial"/>
-                          <a:ea typeface="微软雅黑"/>
-                        </a:rPr>
-                        <a:t>0.576</a:t>
-                      </a:r>
-                    </a:p>
-                  </a:txBody>
-                  <a:tcPr marL="54864" marR="54864" marT="18288" marB="18288" anchor="ctr">
-                    <a:solidFill>
-                      <a:srgbClr val="FFFFFF"/>
-                    </a:solidFill>
-                  </a:tcPr>
-                </a:tc>
-                <a:tc>
-                  <a:txBody>
-                    <a:bodyPr wrap="square"/>
-                    <a:lstStyle/>
-                    <a:p>
-                      <a:pPr algn="ctr"/>
-                      <a:r>
-                        <a:rPr sz="1200" b="0">
-                          <a:solidFill>
-                            <a:srgbClr val="333333"/>
-                          </a:solidFill>
-                          <a:latin typeface="Arial"/>
-                          <a:ea typeface="微软雅黑"/>
-                        </a:rPr>
-                        <a:t>0.353</a:t>
-                      </a:r>
-                    </a:p>
-                  </a:txBody>
-                  <a:tcPr marL="54864" marR="54864" marT="18288" marB="18288" anchor="ctr">
-                    <a:solidFill>
-                      <a:srgbClr val="FFFFFF"/>
                     </a:solidFill>
                   </a:tcPr>
                 </a:tc>
@@ -21086,6 +21450,104 @@
                   </a:txBody>
                   <a:tcPr marL="54864" marR="54864" marT="18288" marB="18288" anchor="ctr">
                     <a:solidFill>
+                      <a:srgbClr val="F5F7FA"/>
+                    </a:solidFill>
+                  </a:tcPr>
+                </a:tc>
+                <a:tc>
+                  <a:txBody>
+                    <a:bodyPr wrap="square"/>
+                    <a:lstStyle/>
+                    <a:p>
+                      <a:pPr algn="ctr"/>
+                      <a:r>
+                        <a:rPr sz="1100" b="0">
+                          <a:solidFill>
+                            <a:srgbClr val="333333"/>
+                          </a:solidFill>
+                          <a:latin typeface="Arial"/>
+                          <a:ea typeface="微软雅黑"/>
+                        </a:rPr>
+                        <a:t>国外</a:t>
+                      </a:r>
+                    </a:p>
+                  </a:txBody>
+                  <a:tcPr marL="54864" marR="54864" marT="18288" marB="18288" anchor="ctr">
+                    <a:solidFill>
+                      <a:srgbClr val="F5F7FA"/>
+                    </a:solidFill>
+                  </a:tcPr>
+                </a:tc>
+                <a:tc>
+                  <a:txBody>
+                    <a:bodyPr wrap="square"/>
+                    <a:lstStyle/>
+                    <a:p>
+                      <a:pPr algn="ctr"/>
+                      <a:r>
+                        <a:rPr sz="1100" b="0">
+                          <a:solidFill>
+                            <a:srgbClr val="333333"/>
+                          </a:solidFill>
+                          <a:latin typeface="Arial"/>
+                          <a:ea typeface="微软雅黑"/>
+                        </a:rPr>
+                        <a:t>集中式</a:t>
+                      </a:r>
+                    </a:p>
+                  </a:txBody>
+                  <a:tcPr marL="54864" marR="54864" marT="18288" marB="18288" anchor="ctr">
+                    <a:solidFill>
+                      <a:srgbClr val="F5F7FA"/>
+                    </a:solidFill>
+                  </a:tcPr>
+                </a:tc>
+                <a:tc>
+                  <a:txBody>
+                    <a:bodyPr wrap="square"/>
+                    <a:lstStyle/>
+                    <a:p>
+                      <a:pPr algn="ctr"/>
+                      <a:r>
+                        <a:rPr sz="1100" b="0">
+                          <a:solidFill>
+                            <a:srgbClr val="333333"/>
+                          </a:solidFill>
+                          <a:latin typeface="Arial"/>
+                          <a:ea typeface="微软雅黑"/>
+                        </a:rPr>
+                        <a:t>单点决策路径上限</a:t>
+                      </a:r>
+                    </a:p>
+                  </a:txBody>
+                  <a:tcPr marL="54864" marR="54864" marT="18288" marB="18288" anchor="ctr">
+                    <a:solidFill>
+                      <a:srgbClr val="F5F7FA"/>
+                    </a:solidFill>
+                  </a:tcPr>
+                </a:tc>
+              </a:tr>
+              <a:tr h="310896">
+                <a:tc>
+                  <a:txBody>
+                    <a:bodyPr wrap="square"/>
+                    <a:lstStyle/>
+                    <a:p>
+                      <a:pPr algn="l"/>
+                      <a:r>
+                        <a:rPr sz="1100" b="0">
+                          <a:solidFill>
+                            <a:srgbClr val="333333"/>
+                          </a:solidFill>
+                          <a:latin typeface="Arial"/>
+                          <a:ea typeface="微软雅黑"/>
+                        </a:rPr>
+                        <a:t>Omega</a:t>
+                      </a:r>
+                    </a:p>
+                  </a:txBody>
+                  <a:tcPr marL="54864" marR="54864" marT="18288" marB="18288" anchor="ctr">
+                    <a:solidFill>
                       <a:srgbClr val="FFFFFF"/>
                     </a:solidFill>
                   </a:tcPr>
@@ -21128,7 +21590,7 @@
                           <a:latin typeface="Arial"/>
                           <a:ea typeface="微软雅黑"/>
                         </a:rPr>
-                        <a:t>集中式</a:t>
+                        <a:t>共享状态 + 乐观并发</a:t>
                       </a:r>
                     </a:p>
                   </a:txBody>
@@ -21152,7 +21614,7 @@
                           <a:latin typeface="Arial"/>
                           <a:ea typeface="微软雅黑"/>
                         </a:rPr>
-                        <a:t>单点决策路径上限</a:t>
+                        <a:t>冲突处理复杂</a:t>
                       </a:r>
                     </a:p>
                   </a:txBody>
@@ -21178,7 +21640,7 @@
                           <a:latin typeface="Arial"/>
                           <a:ea typeface="微软雅黑"/>
                         </a:rPr>
-                        <a:t>Omega</a:t>
+                        <a:t>Mesos</a:t>
                       </a:r>
                     </a:p>
                   </a:txBody>
@@ -21226,7 +21688,7 @@
                           <a:latin typeface="Arial"/>
                           <a:ea typeface="微软雅黑"/>
                         </a:rPr>
-                        <a:t>共享状态 + 乐观并发</a:t>
+                        <a:t>两级资源调度</a:t>
                       </a:r>
                     </a:p>
                   </a:txBody>
@@ -21250,7 +21712,7 @@
                           <a:latin typeface="Arial"/>
                           <a:ea typeface="微软雅黑"/>
                         </a:rPr>
-                        <a:t>冲突处理复杂</a:t>
+                        <a:t>多框架共享开销</a:t>
                       </a:r>
                     </a:p>
                   </a:txBody>
@@ -21276,7 +21738,7 @@
                           <a:latin typeface="Arial"/>
                           <a:ea typeface="微软雅黑"/>
                         </a:rPr>
-                        <a:t>Mesos</a:t>
+                        <a:t>kube-scheduler</a:t>
                       </a:r>
                     </a:p>
                   </a:txBody>
@@ -21324,7 +21786,7 @@
                           <a:latin typeface="Arial"/>
                           <a:ea typeface="微软雅黑"/>
                         </a:rPr>
-                        <a:t>两级资源调度</a:t>
+                        <a:t>中心式插件框架</a:t>
                       </a:r>
                     </a:p>
                   </a:txBody>
@@ -21348,7 +21810,7 @@
                           <a:latin typeface="Arial"/>
                           <a:ea typeface="微软雅黑"/>
                         </a:rPr>
-                        <a:t>多框架共享开销</a:t>
+                        <a:t>超大规模扩展受限</a:t>
                       </a:r>
                     </a:p>
                   </a:txBody>
@@ -21374,7 +21836,7 @@
                           <a:latin typeface="Arial"/>
                           <a:ea typeface="微软雅黑"/>
                         </a:rPr>
-                        <a:t>kube-scheduler</a:t>
+                        <a:t>Gödel</a:t>
                       </a:r>
                     </a:p>
                   </a:txBody>
@@ -21398,7 +21860,7 @@
                           <a:latin typeface="Arial"/>
                           <a:ea typeface="微软雅黑"/>
                         </a:rPr>
-                        <a:t>国外</a:t>
+                        <a:t>国内</a:t>
                       </a:r>
                     </a:p>
                   </a:txBody>
@@ -21422,7 +21884,7 @@
                           <a:latin typeface="Arial"/>
                           <a:ea typeface="微软雅黑"/>
                         </a:rPr>
-                        <a:t>中心式插件框架</a:t>
+                        <a:t>分片式分布式（字节跳动）</a:t>
                       </a:r>
                     </a:p>
                   </a:txBody>
@@ -21446,7 +21908,7 @@
                           <a:latin typeface="Arial"/>
                           <a:ea typeface="微软雅黑"/>
                         </a:rPr>
-                        <a:t>超大规模扩展受限</a:t>
+                        <a:t>独立 Binder 存在瓶颈</a:t>
                       </a:r>
                     </a:p>
                   </a:txBody>
@@ -21472,7 +21934,7 @@
                           <a:latin typeface="Arial"/>
                           <a:ea typeface="微软雅黑"/>
                         </a:rPr>
-                        <a:t>Gödel</a:t>
+                        <a:t>Volcano</a:t>
                       </a:r>
                     </a:p>
                   </a:txBody>
@@ -21520,7 +21982,7 @@
                           <a:latin typeface="Arial"/>
                           <a:ea typeface="微软雅黑"/>
                         </a:rPr>
-                        <a:t>分片式分布式（字节跳动）</a:t>
+                        <a:t>插件增强（Gang/队列）</a:t>
                       </a:r>
                     </a:p>
                   </a:txBody>
@@ -21544,7 +22006,7 @@
                           <a:latin typeface="Arial"/>
                           <a:ea typeface="微软雅黑"/>
                         </a:rPr>
-                        <a:t>独立 Binder 存在瓶颈</a:t>
+                        <a:t>中心路径仍有瓶颈</a:t>
                       </a:r>
                     </a:p>
                   </a:txBody>
@@ -21570,7 +22032,7 @@
                           <a:latin typeface="Arial"/>
                           <a:ea typeface="微软雅黑"/>
                         </a:rPr>
-                        <a:t>Volcano</a:t>
+                        <a:t>Koordinator</a:t>
                       </a:r>
                     </a:p>
                   </a:txBody>
@@ -21618,7 +22080,7 @@
                           <a:latin typeface="Arial"/>
                           <a:ea typeface="微软雅黑"/>
                         </a:rPr>
-                        <a:t>插件增强（Gang/队列）</a:t>
+                        <a:t>插件增强（QoS/超卖）</a:t>
                       </a:r>
                     </a:p>
                   </a:txBody>
@@ -21642,111 +22104,13 @@
                           <a:latin typeface="Arial"/>
                           <a:ea typeface="微软雅黑"/>
                         </a:rPr>
-                        <a:t>中心路径仍有瓶颈</a:t>
+                        <a:t>单实例扩展受限</a:t>
                       </a:r>
                     </a:p>
                   </a:txBody>
                   <a:tcPr marL="54864" marR="54864" marT="18288" marB="18288" anchor="ctr">
                     <a:solidFill>
                       <a:srgbClr val="F5F7FA"/>
-                    </a:solidFill>
-                  </a:tcPr>
-                </a:tc>
-              </a:tr>
-              <a:tr h="310896">
-                <a:tc>
-                  <a:txBody>
-                    <a:bodyPr wrap="square"/>
-                    <a:lstStyle/>
-                    <a:p>
-                      <a:pPr algn="l"/>
-                      <a:r>
-                        <a:rPr sz="1100" b="0">
-                          <a:solidFill>
-                            <a:srgbClr val="333333"/>
-                          </a:solidFill>
-                          <a:latin typeface="Arial"/>
-                          <a:ea typeface="微软雅黑"/>
-                        </a:rPr>
-                        <a:t>Koordinator</a:t>
-                      </a:r>
-                    </a:p>
-                  </a:txBody>
-                  <a:tcPr marL="54864" marR="54864" marT="18288" marB="18288" anchor="ctr">
-                    <a:solidFill>
-                      <a:srgbClr val="FFFFFF"/>
-                    </a:solidFill>
-                  </a:tcPr>
-                </a:tc>
-                <a:tc>
-                  <a:txBody>
-                    <a:bodyPr wrap="square"/>
-                    <a:lstStyle/>
-                    <a:p>
-                      <a:pPr algn="ctr"/>
-                      <a:r>
-                        <a:rPr sz="1100" b="0">
-                          <a:solidFill>
-                            <a:srgbClr val="333333"/>
-                          </a:solidFill>
-                          <a:latin typeface="Arial"/>
-                          <a:ea typeface="微软雅黑"/>
-                        </a:rPr>
-                        <a:t>国内</a:t>
-                      </a:r>
-                    </a:p>
-                  </a:txBody>
-                  <a:tcPr marL="54864" marR="54864" marT="18288" marB="18288" anchor="ctr">
-                    <a:solidFill>
-                      <a:srgbClr val="FFFFFF"/>
-                    </a:solidFill>
-                  </a:tcPr>
-                </a:tc>
-                <a:tc>
-                  <a:txBody>
-                    <a:bodyPr wrap="square"/>
-                    <a:lstStyle/>
-                    <a:p>
-                      <a:pPr algn="ctr"/>
-                      <a:r>
-                        <a:rPr sz="1100" b="0">
-                          <a:solidFill>
-                            <a:srgbClr val="333333"/>
-                          </a:solidFill>
-                          <a:latin typeface="Arial"/>
-                          <a:ea typeface="微软雅黑"/>
-                        </a:rPr>
-                        <a:t>插件增强（QoS/超卖）</a:t>
-                      </a:r>
-                    </a:p>
-                  </a:txBody>
-                  <a:tcPr marL="54864" marR="54864" marT="18288" marB="18288" anchor="ctr">
-                    <a:solidFill>
-                      <a:srgbClr val="FFFFFF"/>
-                    </a:solidFill>
-                  </a:tcPr>
-                </a:tc>
-                <a:tc>
-                  <a:txBody>
-                    <a:bodyPr wrap="square"/>
-                    <a:lstStyle/>
-                    <a:p>
-                      <a:pPr algn="ctr"/>
-                      <a:r>
-                        <a:rPr sz="1100" b="0">
-                          <a:solidFill>
-                            <a:srgbClr val="333333"/>
-                          </a:solidFill>
-                          <a:latin typeface="Arial"/>
-                          <a:ea typeface="微软雅黑"/>
-                        </a:rPr>
-                        <a:t>单实例扩展受限</a:t>
-                      </a:r>
-                    </a:p>
-                  </a:txBody>
-                  <a:tcPr marL="54864" marR="54864" marT="18288" marB="18288" anchor="ctr">
-                    <a:solidFill>
-                      <a:srgbClr val="FFFFFF"/>
                     </a:solidFill>
                   </a:tcPr>
                 </a:tc>

--- a/docs/thesis/defense/答辩PPT-基于etcd的分布式Kubernetes调度器.pptx
+++ b/docs/thesis/defense/答辩PPT-基于etcd的分布式Kubernetes调度器.pptx
@@ -36,7 +36,6 @@
     <p:sldId id="284" r:id="rId36"/>
     <p:sldId id="285" r:id="rId37"/>
     <p:sldId id="286" r:id="rId38"/>
-    <p:sldId id="287" r:id="rId39"/>
   </p:sldIdLst>
   <p:sldSz cx="12191695" cy="6858000" type="screen4x3"/>
   <p:notesSz cx="6858000" cy="9144000"/>
@@ -1373,7 +1372,7 @@
           <a:lstStyle/>
           <a:p>
             <a:r>
-              <a:t>把机制和指标对齐。进程内绑定去掉事件传递，对应 E2E 降低，三实例 0.45 对 0.93 秒；零拷贝让状态复用无同步延迟；关键是第三行，没有独立 Binder 的串行段，吞吐才能随实例扩展，+17.5% 对 +1.4%；第四行四层容错守住不变量。也要说明相关与归因的区别：峰值吞吐不是每个场景都领先。如果评委追问某个数字，备用页里有完整口径与原始目录。四行对应四个机制，每一项都有可复核的字段。</a:t>
+              <a:t>第一场注入：s2/w2、三实例，第 30 秒把 10% 的节点、约 100 个，归属注解从 scheduler-0 改为 scheduler-1。NodeValidator 拦截 300 次，Dispatcher 回退 300 次，两条曲线重叠。拦截不等于丢弃：Pod 进回退队列被重分发，成功率仍是 1.00，总耗时 683 秒、只比基线多 3 秒。这组数字说明 Layer 0 只是把错误前置，不是把工作丢掉，代价几乎为零。拦截 300 次、回退 300 次，两边对得上，说明没有 Pod 被丢掉。</a:t>
             </a:r>
           </a:p>
         </p:txBody>
@@ -1443,7 +1442,7 @@
           <a:lstStyle/>
           <a:p>
             <a:r>
-              <a:t>第一场注入：s2/w2、三实例，第 30 秒把 10% 的节点、约 100 个，归属注解从 scheduler-0 改为 scheduler-1。NodeValidator 拦截 300 次，Dispatcher 回退 300 次，两条曲线重叠。拦截不等于丢弃：Pod 进回退队列被重分发，成功率仍是 1.00，总耗时 683 秒、只比基线多 3 秒。这组数字说明 Layer 0 只是把错误前置，不是把工作丢掉，代价几乎为零。拦截 300 次、回退 300 次，两边对得上，说明没有 Pod 被丢掉。</a:t>
+              <a:t>第二场注入：第 10 秒杀掉 scheduler-0，停机 180 秒，实测中断 189 秒。被杀实例未完成的绑定只占 68/8407，即 0.81%；两个存活实例接管 8407 个 Pod，队列峰值 353 后回落到 2。累计绑定 49607/50000，断言仍全过。代价是 784 秒、比基线多 104 秒，是工作量重排的代价，不是数据损坏。对比基线是同一场景下的无故障运行，680 秒。队列在 353 之后回落到 2，说明积压是瞬时的。</a:t>
             </a:r>
           </a:p>
         </p:txBody>
@@ -1513,7 +1512,7 @@
           <a:lstStyle/>
           <a:p>
             <a:r>
-              <a:t>第二场注入：第 10 秒杀掉 scheduler-0，停机 180 秒，实测中断 189 秒。被杀实例未完成的绑定只占 68/8407，即 0.81%；两个存活实例接管 8407 个 Pod，队列峰值 353 后回落到 2。累计绑定 49607/50000，断言仍全过。代价是 784 秒、比基线多 104 秒，是工作量重排的代价，不是数据损坏。对比基线是同一场景下的无故障运行，680 秒。队列在 353 之后回落到 2，说明积压是瞬时的。</a:t>
+              <a:t>局限六条，只讲关键。KWOK 是仿真，绝对数值不外推，但跨调度器相对比较成立。Gang 即 w6，ENO 尾延迟确实更高：吞吐高 4.3% 到 19.1%，单 Pod P99 高 1.6 到 4.1 倍，原因是同组预留等待与决策共用进程和队列。s3 到 s4 固定三实例，退化幅度不能读成上限。其余是资源公平、Volcano 口径、幸存者偏差。这六条不是免责声明，而是给结论划边界。在这个边界内，跨调度器的相对结论是稳的。</a:t>
             </a:r>
           </a:p>
         </p:txBody>
@@ -1583,7 +1582,7 @@
           <a:lstStyle/>
           <a:p>
             <a:r>
-              <a:t>局限六条，只讲关键。KWOK 是仿真，绝对数值不外推，但跨调度器相对比较成立。Gang 即 w6，ENO 尾延迟确实更高：吞吐高 4.3% 到 19.1%，单 Pod P99 高 1.6 到 4.1 倍，原因是同组预留等待与决策共用进程和队列。s3 到 s4 固定三实例，退化幅度不能读成上限。其余是资源公平、Volcano 口径、幸存者偏差。这六条不是免责声明，而是给结论划边界。在这个边界内，跨调度器的相对结论是稳的。</a:t>
+              <a:t>最后收束。两个创新：ENO 把 Binder 放进进程内并用 CacheAdapter 共享缓存；四层容错给出不变量 I 的证明要点。三组证据：16 场景 144 次 run 全成功、平均 +11.9%、P99 最高 -82.9%、实例扩展 +17.5% 对 +1.4%。价值：不改 API、保留开关、基准开源。</a:t>
             </a:r>
           </a:p>
         </p:txBody>
@@ -1653,7 +1652,7 @@
           <a:lstStyle/>
           <a:p>
             <a:r>
-              <a:t>最后收束。两个创新：ENO 把 Binder 放进进程内并用 CacheAdapter 共享缓存；四层容错给出不变量 I 的证明要点。三组证据：16 场景 144 次 run 全成功、平均 +11.9%、P99 最高 -82.9%、实例扩展 +17.5% 对 +1.4%。价值：不改 API、保留开关、基准开源。</a:t>
+              <a:t>汇报到这里。一句话总结：把 Binder 合并进 Scheduler 进程，用 etcd 原子语义上的四层容错守住“至多绑定一次”，在 16 个场景、144 次 run 上做到更高吞吐、更低尾延迟与 100% 绑定成功率。请各位老师批评指正。</a:t>
             </a:r>
           </a:p>
         </p:txBody>
@@ -1723,7 +1722,7 @@
           <a:lstStyle/>
           <a:p>
             <a:r>
-              <a:t>汇报到这里。一句话总结：把 Binder 合并进 Scheduler 进程，用 etcd 原子语义上的四层容错守住“至多绑定一次”，在 16 个场景、144 次 run 上做到更高吞吐、更低尾延迟与 100% 绑定成功率。请各位老师批评指正。</a:t>
+              <a:t>备用页：抽查任意场景的原始数值。</a:t>
             </a:r>
           </a:p>
         </p:txBody>
@@ -1793,7 +1792,7 @@
           <a:lstStyle/>
           <a:p>
             <a:r>
-              <a:t>备用页：抽查任意场景的原始数值。</a:t>
+              <a:t>备用页：如果评委追问某个数字怎么算出来的，用这页回答。</a:t>
             </a:r>
           </a:p>
         </p:txBody>
@@ -1863,7 +1862,7 @@
           <a:lstStyle/>
           <a:p>
             <a:r>
-              <a:t>备用页：如果评委追问某个数字怎么算出来的，用这页回答。</a:t>
+              <a:t>备用页：幸存者偏差的解释。过载时 Pod 根本没被处理，所以延迟看起来“很好”。</a:t>
             </a:r>
           </a:p>
         </p:txBody>
@@ -1933,7 +1932,7 @@
           <a:lstStyle/>
           <a:p>
             <a:r>
-              <a:t>备用页：幸存者偏差的解释。过载时 Pod 根本没被处理，所以延迟看起来“很好”。</a:t>
+              <a:t>备用页：w6 反向结果的完整数据与解释。</a:t>
             </a:r>
           </a:p>
         </p:txBody>
@@ -2003,7 +2002,7 @@
           <a:lstStyle/>
           <a:p>
             <a:r>
-              <a:t>备用页：w6 反向结果的完整数据与解释。</a:t>
+              <a:t>备用页：公平性与资源开销的口径说明。</a:t>
             </a:r>
           </a:p>
         </p:txBody>
@@ -2143,7 +2142,7 @@
           <a:lstStyle/>
           <a:p>
             <a:r>
-              <a:t>备用页：公平性与资源开销的口径说明。</a:t>
+              <a:t>备用页：评委问可复现性时展示。</a:t>
             </a:r>
           </a:p>
         </p:txBody>
@@ -2169,76 +2168,6 @@
 </file>
 
 <file path=ppt/notesSlides/notesSlide31.xml><?xml version="1.0" encoding="utf-8"?>
-<p:notes xmlns:a="http://schemas.openxmlformats.org/drawingml/2006/main" xmlns:p="http://schemas.openxmlformats.org/presentationml/2006/main" xmlns:r="http://schemas.openxmlformats.org/officeDocument/2006/relationships">
-  <p:cSld>
-    <p:spTree>
-      <p:nvGrpSpPr>
-        <p:cNvPr id="1" name=""/>
-        <p:cNvGrpSpPr/>
-        <p:nvPr/>
-      </p:nvGrpSpPr>
-      <p:grpSpPr>
-        <a:xfrm>
-          <a:off x="0" y="0"/>
-          <a:ext cx="0" cy="0"/>
-          <a:chOff x="0" y="0"/>
-          <a:chExt cx="0" cy="0"/>
-        </a:xfrm>
-      </p:grpSpPr>
-      <p:sp>
-        <p:nvSpPr>
-          <p:cNvPr id="2" name="Slide Image Placeholder 1"/>
-          <p:cNvSpPr>
-            <a:spLocks noGrp="1"/>
-          </p:cNvSpPr>
-          <p:nvPr>
-            <p:ph type="sldImg" idx="2"/>
-          </p:nvPr>
-        </p:nvSpPr>
-        <p:spPr/>
-      </p:sp>
-      <p:sp>
-        <p:nvSpPr>
-          <p:cNvPr id="3" name="Notes Placeholder 2"/>
-          <p:cNvSpPr>
-            <a:spLocks noGrp="1"/>
-          </p:cNvSpPr>
-          <p:nvPr>
-            <p:ph type="body" idx="3" sz="quarter"/>
-          </p:nvPr>
-        </p:nvSpPr>
-        <p:spPr/>
-        <p:txBody>
-          <a:bodyPr/>
-          <a:lstStyle/>
-          <a:p>
-            <a:r>
-              <a:t>备用页：评委问可复现性时展示。</a:t>
-            </a:r>
-          </a:p>
-        </p:txBody>
-      </p:sp>
-      <p:sp>
-        <p:nvSpPr>
-          <p:cNvPr id="4" name="Slide Number Placeholder 3"/>
-          <p:cNvSpPr>
-            <a:spLocks noGrp="1"/>
-          </p:cNvSpPr>
-          <p:nvPr>
-            <p:ph type="sldNum" idx="5" sz="quarter"/>
-          </p:nvPr>
-        </p:nvSpPr>
-        <p:spPr/>
-      </p:sp>
-    </p:spTree>
-  </p:cSld>
-  <p:clrMapOvr>
-    <a:masterClrMapping/>
-  </p:clrMapOvr>
-</p:notes>
-</file>
-
-<file path=ppt/notesSlides/notesSlide32.xml><?xml version="1.0" encoding="utf-8"?>
 <p:notes xmlns:a="http://schemas.openxmlformats.org/drawingml/2006/main" xmlns:p="http://schemas.openxmlformats.org/presentationml/2006/main" xmlns:r="http://schemas.openxmlformats.org/officeDocument/2006/relationships">
   <p:cSld>
     <p:spTree>
@@ -5981,7 +5910,7 @@
                 <a:latin typeface="Arial"/>
                 <a:ea typeface="微软雅黑"/>
               </a:rPr>
-              <a:t>1 / 25</a:t>
+              <a:t>1 / 24</a:t>
             </a:r>
           </a:p>
         </p:txBody>
@@ -7115,7 +7044,7 @@
                 <a:latin typeface="Arial"/>
                 <a:ea typeface="微软雅黑"/>
               </a:rPr>
-              <a:t>10 / 25</a:t>
+              <a:t>10 / 24</a:t>
             </a:r>
           </a:p>
         </p:txBody>
@@ -7469,7 +7398,7 @@
                 <a:latin typeface="Arial"/>
                 <a:ea typeface="微软雅黑"/>
               </a:rPr>
-              <a:t>11 / 25</a:t>
+              <a:t>11 / 24</a:t>
             </a:r>
           </a:p>
         </p:txBody>
@@ -8255,7 +8184,7 @@
                 <a:latin typeface="Arial"/>
                 <a:ea typeface="微软雅黑"/>
               </a:rPr>
-              <a:t>12 / 25</a:t>
+              <a:t>12 / 24</a:t>
             </a:r>
           </a:p>
         </p:txBody>
@@ -9347,7 +9276,7 @@
                 <a:latin typeface="Arial"/>
                 <a:ea typeface="微软雅黑"/>
               </a:rPr>
-              <a:t>13 / 25</a:t>
+              <a:t>13 / 24</a:t>
             </a:r>
           </a:p>
         </p:txBody>
@@ -9991,7 +9920,7 @@
                 <a:latin typeface="Arial"/>
                 <a:ea typeface="微软雅黑"/>
               </a:rPr>
-              <a:t>14 / 25</a:t>
+              <a:t>14 / 24</a:t>
             </a:r>
           </a:p>
         </p:txBody>
@@ -10829,7 +10758,7 @@
                 <a:latin typeface="Arial"/>
                 <a:ea typeface="微软雅黑"/>
               </a:rPr>
-              <a:t>15 / 25</a:t>
+              <a:t>15 / 24</a:t>
             </a:r>
           </a:p>
         </p:txBody>
@@ -11199,7 +11128,7 @@
                 <a:latin typeface="Arial"/>
                 <a:ea typeface="微软雅黑"/>
               </a:rPr>
-              <a:t>16 / 25</a:t>
+              <a:t>16 / 24</a:t>
             </a:r>
           </a:p>
         </p:txBody>
@@ -11569,7 +11498,7 @@
                 <a:latin typeface="Arial"/>
                 <a:ea typeface="微软雅黑"/>
               </a:rPr>
-              <a:t>17 / 25</a:t>
+              <a:t>17 / 24</a:t>
             </a:r>
           </a:p>
         </p:txBody>
@@ -12258,7 +12187,7 @@
                 <a:latin typeface="Arial"/>
                 <a:ea typeface="微软雅黑"/>
               </a:rPr>
-              <a:t>18 / 25</a:t>
+              <a:t>18 / 24</a:t>
             </a:r>
           </a:p>
         </p:txBody>
@@ -13201,7 +13130,7 @@
                 <a:latin typeface="Arial"/>
                 <a:ea typeface="微软雅黑"/>
               </a:rPr>
-              <a:t>19 / 25</a:t>
+              <a:t>19 / 24</a:t>
             </a:r>
           </a:p>
         </p:txBody>
@@ -13909,7 +13838,7 @@
                 <a:latin typeface="Arial"/>
                 <a:ea typeface="微软雅黑"/>
               </a:rPr>
-              <a:t>2 / 25</a:t>
+              <a:t>2 / 24</a:t>
             </a:r>
           </a:p>
         </p:txBody>
@@ -14019,7 +13948,7 @@
                 <a:latin typeface="Arial"/>
                 <a:ea typeface="微软雅黑"/>
               </a:rPr>
-              <a:t>归因闭环</a:t>
+              <a:t>故障注入 Layer 0</a:t>
             </a:r>
           </a:p>
         </p:txBody>
@@ -14103,408 +14032,35 @@
                 <a:latin typeface="Arial"/>
                 <a:ea typeface="微软雅黑"/>
               </a:rPr>
-              <a:t>去掉一次跨进程绑定链路，换来吞吐、尾延迟、队列深度的同步改善</a:t>
-            </a:r>
-          </a:p>
-        </p:txBody>
-      </p:sp>
-      <p:graphicFrame>
-        <p:nvGraphicFramePr>
-          <p:cNvPr id="6" name="Table 5"/>
-          <p:cNvGraphicFramePr>
-            <a:graphicFrameLocks noGrp="1"/>
-          </p:cNvGraphicFramePr>
-          <p:nvPr/>
-        </p:nvGraphicFramePr>
-        <p:xfrm>
-          <a:off x="566928" y="1828800"/>
-          <a:ext cx="11064240" cy="2103120"/>
-        </p:xfrm>
-        <a:graphic>
-          <a:graphicData uri="http://schemas.openxmlformats.org/drawingml/2006/table">
-            <a:tbl>
-              <a:tblPr firstRow="1" bandRow="1">
-                <a:tableStyleId>{5C22544A-7EE6-4342-B048-85BDC9FD1C3A}</a:tableStyleId>
-              </a:tblPr>
-              <a:tblGrid>
-                <a:gridCol w="3688080"/>
-                <a:gridCol w="3688080"/>
-                <a:gridCol w="3688080"/>
-              </a:tblGrid>
-              <a:tr h="420624">
-                <a:tc>
-                  <a:txBody>
-                    <a:bodyPr wrap="square"/>
-                    <a:lstStyle/>
-                    <a:p>
-                      <a:pPr algn="l"/>
-                      <a:r>
-                        <a:rPr sz="1200" b="1">
-                          <a:solidFill>
-                            <a:srgbClr val="FFFFFF"/>
-                          </a:solidFill>
-                          <a:latin typeface="Arial"/>
-                          <a:ea typeface="微软雅黑"/>
-                        </a:rPr>
-                        <a:t>机制差异</a:t>
-                      </a:r>
-                    </a:p>
-                  </a:txBody>
-                  <a:tcPr marL="54864" marR="54864" marT="18288" marB="18288" anchor="ctr">
-                    <a:solidFill>
-                      <a:srgbClr val="0B2A4A"/>
-                    </a:solidFill>
-                  </a:tcPr>
-                </a:tc>
-                <a:tc>
-                  <a:txBody>
-                    <a:bodyPr wrap="square"/>
-                    <a:lstStyle/>
-                    <a:p>
-                      <a:pPr algn="ctr"/>
-                      <a:r>
-                        <a:rPr sz="1200" b="1">
-                          <a:solidFill>
-                            <a:srgbClr val="FFFFFF"/>
-                          </a:solidFill>
-                          <a:latin typeface="Arial"/>
-                          <a:ea typeface="微软雅黑"/>
-                        </a:rPr>
-                        <a:t>对应指标</a:t>
-                      </a:r>
-                    </a:p>
-                  </a:txBody>
-                  <a:tcPr marL="54864" marR="54864" marT="18288" marB="18288" anchor="ctr">
-                    <a:solidFill>
-                      <a:srgbClr val="0B2A4A"/>
-                    </a:solidFill>
-                  </a:tcPr>
-                </a:tc>
-                <a:tc>
-                  <a:txBody>
-                    <a:bodyPr wrap="square"/>
-                    <a:lstStyle/>
-                    <a:p>
-                      <a:pPr algn="ctr"/>
-                      <a:r>
-                        <a:rPr sz="1200" b="1">
-                          <a:solidFill>
-                            <a:srgbClr val="FFFFFF"/>
-                          </a:solidFill>
-                          <a:latin typeface="Arial"/>
-                          <a:ea typeface="微软雅黑"/>
-                        </a:rPr>
-                        <a:t>实测证据</a:t>
-                      </a:r>
-                    </a:p>
-                  </a:txBody>
-                  <a:tcPr marL="54864" marR="54864" marT="18288" marB="18288" anchor="ctr">
-                    <a:solidFill>
-                      <a:srgbClr val="0B2A4A"/>
-                    </a:solidFill>
-                  </a:tcPr>
-                </a:tc>
-              </a:tr>
-              <a:tr h="420624">
-                <a:tc>
-                  <a:txBody>
-                    <a:bodyPr wrap="square"/>
-                    <a:lstStyle/>
-                    <a:p>
-                      <a:pPr algn="l"/>
-                      <a:r>
-                        <a:rPr sz="1200" b="0">
-                          <a:solidFill>
-                            <a:srgbClr val="333333"/>
-                          </a:solidFill>
-                          <a:latin typeface="Arial"/>
-                          <a:ea typeface="微软雅黑"/>
-                        </a:rPr>
-                        <a:t>进程内绑定，无事件传递</a:t>
-                      </a:r>
-                    </a:p>
-                  </a:txBody>
-                  <a:tcPr marL="54864" marR="54864" marT="18288" marB="18288" anchor="ctr">
-                    <a:solidFill>
-                      <a:srgbClr val="F5F7FA"/>
-                    </a:solidFill>
-                  </a:tcPr>
-                </a:tc>
-                <a:tc>
-                  <a:txBody>
-                    <a:bodyPr wrap="square"/>
-                    <a:lstStyle/>
-                    <a:p>
-                      <a:pPr algn="ctr"/>
-                      <a:r>
-                        <a:rPr sz="1200" b="0">
-                          <a:solidFill>
-                            <a:srgbClr val="333333"/>
-                          </a:solidFill>
-                          <a:latin typeface="Arial"/>
-                          <a:ea typeface="微软雅黑"/>
-                        </a:rPr>
-                        <a:t>Pod E2E P99</a:t>
-                      </a:r>
-                    </a:p>
-                  </a:txBody>
-                  <a:tcPr marL="54864" marR="54864" marT="18288" marB="18288" anchor="ctr">
-                    <a:solidFill>
-                      <a:srgbClr val="F5F7FA"/>
-                    </a:solidFill>
-                  </a:tcPr>
-                </a:tc>
-                <a:tc>
-                  <a:txBody>
-                    <a:bodyPr wrap="square"/>
-                    <a:lstStyle/>
-                    <a:p>
-                      <a:pPr algn="ctr"/>
-                      <a:r>
-                        <a:rPr sz="1200" b="0">
-                          <a:solidFill>
-                            <a:srgbClr val="333333"/>
-                          </a:solidFill>
-                          <a:latin typeface="Arial"/>
-                          <a:ea typeface="微软雅黑"/>
-                        </a:rPr>
-                        <a:t>s3/w3 inst3 0.45 vs 0.93 s（低 51.9%）</a:t>
-                      </a:r>
-                    </a:p>
-                  </a:txBody>
-                  <a:tcPr marL="54864" marR="54864" marT="18288" marB="18288" anchor="ctr">
-                    <a:solidFill>
-                      <a:srgbClr val="F5F7FA"/>
-                    </a:solidFill>
-                  </a:tcPr>
-                </a:tc>
-              </a:tr>
-              <a:tr h="420624">
-                <a:tc>
-                  <a:txBody>
-                    <a:bodyPr wrap="square"/>
-                    <a:lstStyle/>
-                    <a:p>
-                      <a:pPr algn="l"/>
-                      <a:r>
-                        <a:rPr sz="1200" b="0">
-                          <a:solidFill>
-                            <a:srgbClr val="333333"/>
-                          </a:solidFill>
-                          <a:latin typeface="Arial"/>
-                          <a:ea typeface="微软雅黑"/>
-                        </a:rPr>
-                        <a:t>CacheAdapter 零拷贝共享</a:t>
-                      </a:r>
-                    </a:p>
-                  </a:txBody>
-                  <a:tcPr marL="54864" marR="54864" marT="18288" marB="18288" anchor="ctr">
-                    <a:solidFill>
-                      <a:srgbClr val="FFFFFF"/>
-                    </a:solidFill>
-                  </a:tcPr>
-                </a:tc>
-                <a:tc>
-                  <a:txBody>
-                    <a:bodyPr wrap="square"/>
-                    <a:lstStyle/>
-                    <a:p>
-                      <a:pPr algn="ctr"/>
-                      <a:r>
-                        <a:rPr sz="1200" b="0">
-                          <a:solidFill>
-                            <a:srgbClr val="333333"/>
-                          </a:solidFill>
-                          <a:latin typeface="Arial"/>
-                          <a:ea typeface="微软雅黑"/>
-                        </a:rPr>
-                        <a:t>状态复用 / 无同步延迟</a:t>
-                      </a:r>
-                    </a:p>
-                  </a:txBody>
-                  <a:tcPr marL="54864" marR="54864" marT="18288" marB="18288" anchor="ctr">
-                    <a:solidFill>
-                      <a:srgbClr val="FFFFFF"/>
-                    </a:solidFill>
-                  </a:tcPr>
-                </a:tc>
-                <a:tc>
-                  <a:txBody>
-                    <a:bodyPr wrap="square"/>
-                    <a:lstStyle/>
-                    <a:p>
-                      <a:pPr algn="ctr"/>
-                      <a:r>
-                        <a:rPr sz="1200" b="0">
-                          <a:solidFill>
-                            <a:srgbClr val="333333"/>
-                          </a:solidFill>
-                          <a:latin typeface="Arial"/>
-                          <a:ea typeface="微软雅黑"/>
-                        </a:rPr>
-                        <a:t>inst3 队列峰值 20 vs 16</a:t>
-                      </a:r>
-                    </a:p>
-                  </a:txBody>
-                  <a:tcPr marL="54864" marR="54864" marT="18288" marB="18288" anchor="ctr">
-                    <a:solidFill>
-                      <a:srgbClr val="FFFFFF"/>
-                    </a:solidFill>
-                  </a:tcPr>
-                </a:tc>
-              </a:tr>
-              <a:tr h="420624">
-                <a:tc>
-                  <a:txBody>
-                    <a:bodyPr wrap="square"/>
-                    <a:lstStyle/>
-                    <a:p>
-                      <a:pPr algn="l"/>
-                      <a:r>
-                        <a:rPr sz="1200" b="0">
-                          <a:solidFill>
-                            <a:srgbClr val="333333"/>
-                          </a:solidFill>
-                          <a:latin typeface="Arial"/>
-                          <a:ea typeface="微软雅黑"/>
-                        </a:rPr>
-                        <a:t>无独立 Binder 串行段</a:t>
-                      </a:r>
-                    </a:p>
-                  </a:txBody>
-                  <a:tcPr marL="54864" marR="54864" marT="18288" marB="18288" anchor="ctr">
-                    <a:solidFill>
-                      <a:srgbClr val="F5F7FA"/>
-                    </a:solidFill>
-                  </a:tcPr>
-                </a:tc>
-                <a:tc>
-                  <a:txBody>
-                    <a:bodyPr wrap="square"/>
-                    <a:lstStyle/>
-                    <a:p>
-                      <a:pPr algn="ctr"/>
-                      <a:r>
-                        <a:rPr sz="1200" b="0">
-                          <a:solidFill>
-                            <a:srgbClr val="333333"/>
-                          </a:solidFill>
-                          <a:latin typeface="Arial"/>
-                          <a:ea typeface="微软雅黑"/>
-                        </a:rPr>
-                        <a:t>有效吞吐随实例扩展</a:t>
-                      </a:r>
-                    </a:p>
-                  </a:txBody>
-                  <a:tcPr marL="54864" marR="54864" marT="18288" marB="18288" anchor="ctr">
-                    <a:solidFill>
-                      <a:srgbClr val="F5F7FA"/>
-                    </a:solidFill>
-                  </a:tcPr>
-                </a:tc>
-                <a:tc>
-                  <a:txBody>
-                    <a:bodyPr wrap="square"/>
-                    <a:lstStyle/>
-                    <a:p>
-                      <a:pPr algn="ctr"/>
-                      <a:r>
-                        <a:rPr sz="1200" b="0">
-                          <a:solidFill>
-                            <a:srgbClr val="333333"/>
-                          </a:solidFill>
-                          <a:latin typeface="Arial"/>
-                          <a:ea typeface="微软雅黑"/>
-                        </a:rPr>
-                        <a:t>+17.5% vs +1.4%</a:t>
-                      </a:r>
-                    </a:p>
-                  </a:txBody>
-                  <a:tcPr marL="54864" marR="54864" marT="18288" marB="18288" anchor="ctr">
-                    <a:solidFill>
-                      <a:srgbClr val="F5F7FA"/>
-                    </a:solidFill>
-                  </a:tcPr>
-                </a:tc>
-              </a:tr>
-              <a:tr h="420624">
-                <a:tc>
-                  <a:txBody>
-                    <a:bodyPr wrap="square"/>
-                    <a:lstStyle/>
-                    <a:p>
-                      <a:pPr algn="l"/>
-                      <a:r>
-                        <a:rPr sz="1200" b="0">
-                          <a:solidFill>
-                            <a:srgbClr val="333333"/>
-                          </a:solidFill>
-                          <a:latin typeface="Arial"/>
-                          <a:ea typeface="微软雅黑"/>
-                        </a:rPr>
-                        <a:t>四层容错守住不变量 I</a:t>
-                      </a:r>
-                    </a:p>
-                  </a:txBody>
-                  <a:tcPr marL="54864" marR="54864" marT="18288" marB="18288" anchor="ctr">
-                    <a:solidFill>
-                      <a:srgbClr val="FFFFFF"/>
-                    </a:solidFill>
-                  </a:tcPr>
-                </a:tc>
-                <a:tc>
-                  <a:txBody>
-                    <a:bodyPr wrap="square"/>
-                    <a:lstStyle/>
-                    <a:p>
-                      <a:pPr algn="ctr"/>
-                      <a:r>
-                        <a:rPr sz="1200" b="0">
-                          <a:solidFill>
-                            <a:srgbClr val="333333"/>
-                          </a:solidFill>
-                          <a:latin typeface="Arial"/>
-                          <a:ea typeface="微软雅黑"/>
-                        </a:rPr>
-                        <a:t>绑定成功率 / 断言</a:t>
-                      </a:r>
-                    </a:p>
-                  </a:txBody>
-                  <a:tcPr marL="54864" marR="54864" marT="18288" marB="18288" anchor="ctr">
-                    <a:solidFill>
-                      <a:srgbClr val="FFFFFF"/>
-                    </a:solidFill>
-                  </a:tcPr>
-                </a:tc>
-                <a:tc>
-                  <a:txBody>
-                    <a:bodyPr wrap="square"/>
-                    <a:lstStyle/>
-                    <a:p>
-                      <a:pPr algn="ctr"/>
-                      <a:r>
-                        <a:rPr sz="1200" b="0">
-                          <a:solidFill>
-                            <a:srgbClr val="333333"/>
-                          </a:solidFill>
-                          <a:latin typeface="Arial"/>
-                          <a:ea typeface="微软雅黑"/>
-                        </a:rPr>
-                        <a:t>100%；144 次 run 全过</a:t>
-                      </a:r>
-                    </a:p>
-                  </a:txBody>
-                  <a:tcPr marL="54864" marR="54864" marT="18288" marB="18288" anchor="ctr">
-                    <a:solidFill>
-                      <a:srgbClr val="FFFFFF"/>
-                    </a:solidFill>
-                  </a:tcPr>
-                </a:tc>
-              </a:tr>
-            </a:tbl>
-          </a:graphicData>
-        </a:graphic>
-      </p:graphicFrame>
+              <a:t>10% 节点注解漂移，300 次拦截全部转为合规重排</a:t>
+            </a:r>
+          </a:p>
+        </p:txBody>
+      </p:sp>
+      <p:pic>
+        <p:nvPicPr>
+          <p:cNvPr id="6" name="Picture 5" descr="fig6-29a-layer0-timeseries.png"/>
+          <p:cNvPicPr>
+            <a:picLocks noChangeAspect="1"/>
+          </p:cNvPicPr>
+          <p:nvPr/>
+        </p:nvPicPr>
+        <p:blipFill>
+          <a:blip r:embed="rId2"/>
+          <a:stretch>
+            <a:fillRect/>
+          </a:stretch>
+        </p:blipFill>
+        <p:spPr>
+          <a:xfrm>
+            <a:off x="5806440" y="2657246"/>
+            <a:ext cx="5852160" cy="2457907"/>
+          </a:xfrm>
+          <a:prstGeom prst="rect">
+            <a:avLst/>
+          </a:prstGeom>
+        </p:spPr>
+      </p:pic>
       <p:sp>
         <p:nvSpPr>
           <p:cNvPr id="7" name="TextBox 6"/>
@@ -14513,8 +14069,8 @@
         </p:nvSpPr>
         <p:spPr>
           <a:xfrm>
-            <a:off x="566928" y="5074920"/>
-            <a:ext cx="10972800" cy="914400"/>
+            <a:off x="566928" y="2011680"/>
+            <a:ext cx="5029200" cy="1417320"/>
           </a:xfrm>
           <a:prstGeom prst="rect">
             <a:avLst/>
@@ -14533,14 +14089,14 @@
               </a:lnSpc>
             </a:pPr>
             <a:r>
-              <a:rPr sz="1300" b="0">
+              <a:rPr sz="1550" b="0">
                 <a:solidFill>
                   <a:srgbClr val="333333"/>
                 </a:solidFill>
                 <a:latin typeface="Arial"/>
                 <a:ea typeface="微软雅黑"/>
               </a:rPr>
-              <a:t>▪  相关不等于归因：峰值吞吐并非全面领先</a:t>
+              <a:t>▪  拦截 300 次 / 回退 300 次</a:t>
             </a:r>
           </a:p>
           <a:p>
@@ -14549,18 +14105,18 @@
                 <a:spcPct val="115000"/>
               </a:lnSpc>
               <a:spcBef>
-                <a:spcPts val="600"/>
+                <a:spcPts val="1400"/>
               </a:spcBef>
             </a:pPr>
             <a:r>
-              <a:rPr sz="1300" b="0">
+              <a:rPr sz="1550" b="0">
                 <a:solidFill>
                   <a:srgbClr val="333333"/>
                 </a:solidFill>
                 <a:latin typeface="Arial"/>
                 <a:ea typeface="微软雅黑"/>
               </a:rPr>
-              <a:t>▪  s3/w5、s4/w3 峰值吞吐低于 Gödel</a:t>
+              <a:t>▪  绑定成功率 1.00；断言 50000/50000</a:t>
             </a:r>
           </a:p>
           <a:p>
@@ -14569,18 +14125,18 @@
                 <a:spcPct val="115000"/>
               </a:lnSpc>
               <a:spcBef>
-                <a:spcPts val="600"/>
+                <a:spcPts val="1400"/>
               </a:spcBef>
             </a:pPr>
             <a:r>
-              <a:rPr sz="1300" b="0">
+              <a:rPr sz="1550" b="0">
                 <a:solidFill>
                   <a:srgbClr val="333333"/>
                 </a:solidFill>
                 <a:latin typeface="Arial"/>
                 <a:ea typeface="微软雅黑"/>
               </a:rPr>
-              <a:t>▪  收益部分来自启动更快（口径权衡）</a:t>
+              <a:t>▪  总耗时 683 s 对基线 680 s（+0.4%）</a:t>
             </a:r>
           </a:p>
         </p:txBody>
@@ -14652,7 +14208,7 @@
                 <a:latin typeface="Arial"/>
                 <a:ea typeface="微软雅黑"/>
               </a:rPr>
-              <a:t>20 / 25</a:t>
+              <a:t>20 / 24</a:t>
             </a:r>
           </a:p>
         </p:txBody>
@@ -14762,7 +14318,7 @@
                 <a:latin typeface="Arial"/>
                 <a:ea typeface="微软雅黑"/>
               </a:rPr>
-              <a:t>故障注入 Layer 0</a:t>
+              <a:t>故障注入 Layer 3</a:t>
             </a:r>
           </a:p>
         </p:txBody>
@@ -14846,14 +14402,14 @@
                 <a:latin typeface="Arial"/>
                 <a:ea typeface="微软雅黑"/>
               </a:rPr>
-              <a:t>10% 节点注解漂移，300 次拦截全部转为合规重排</a:t>
+              <a:t>杀掉 1/3 实例并停机 180 s，系统仍在 784 s 内完成全部绑定</a:t>
             </a:r>
           </a:p>
         </p:txBody>
       </p:sp>
       <p:pic>
         <p:nvPicPr>
-          <p:cNvPr id="6" name="Picture 5" descr="fig6-29a-layer0-timeseries.png"/>
+          <p:cNvPr id="6" name="Picture 5" descr="fig6-29b-layer3-timeseries.png"/>
           <p:cNvPicPr>
             <a:picLocks noChangeAspect="1"/>
           </p:cNvPicPr>
@@ -14910,7 +14466,7 @@
                 <a:latin typeface="Arial"/>
                 <a:ea typeface="微软雅黑"/>
               </a:rPr>
-              <a:t>▪  拦截 300 次 / 回退 300 次</a:t>
+              <a:t>▪  被杀实例绑定占比 68/8407 = 0.81%</a:t>
             </a:r>
           </a:p>
           <a:p>
@@ -14930,7 +14486,7 @@
                 <a:latin typeface="Arial"/>
                 <a:ea typeface="微软雅黑"/>
               </a:rPr>
-              <a:t>▪  绑定成功率 1.00；断言 50000/50000</a:t>
+              <a:t>▪  存活实例接管 8407 pods；pending 353→2</a:t>
             </a:r>
           </a:p>
           <a:p>
@@ -14950,7 +14506,7 @@
                 <a:latin typeface="Arial"/>
                 <a:ea typeface="微软雅黑"/>
               </a:rPr>
-              <a:t>▪  总耗时 683 s 对基线 680 s（+0.4%）</a:t>
+              <a:t>▪  总耗时 784 s，较基线 +15.3%</a:t>
             </a:r>
           </a:p>
         </p:txBody>
@@ -15022,7 +14578,7 @@
                 <a:latin typeface="Arial"/>
                 <a:ea typeface="微软雅黑"/>
               </a:rPr>
-              <a:t>21 / 25</a:t>
+              <a:t>21 / 24</a:t>
             </a:r>
           </a:p>
         </p:txBody>
@@ -15132,7 +14688,7 @@
                 <a:latin typeface="Arial"/>
                 <a:ea typeface="微软雅黑"/>
               </a:rPr>
-              <a:t>故障注入 Layer 3</a:t>
+              <a:t>局限性与威胁效力</a:t>
             </a:r>
           </a:p>
         </p:txBody>
@@ -15216,45 +14772,111 @@
                 <a:latin typeface="Arial"/>
                 <a:ea typeface="微软雅黑"/>
               </a:rPr>
-              <a:t>杀掉 1/3 实例并停机 180 s，系统仍在 784 s 内完成全部绑定</a:t>
-            </a:r>
-          </a:p>
-        </p:txBody>
-      </p:sp>
-      <p:pic>
-        <p:nvPicPr>
-          <p:cNvPr id="6" name="Picture 5" descr="fig6-29b-layer3-timeseries.png"/>
-          <p:cNvPicPr>
-            <a:picLocks noChangeAspect="1"/>
-          </p:cNvPicPr>
-          <p:nvPr/>
-        </p:nvPicPr>
-        <p:blipFill>
-          <a:blip r:embed="rId2"/>
-          <a:stretch>
-            <a:fillRect/>
-          </a:stretch>
-        </p:blipFill>
-        <p:spPr>
-          <a:xfrm>
-            <a:off x="5806440" y="2657246"/>
-            <a:ext cx="5852160" cy="2457907"/>
-          </a:xfrm>
-          <a:prstGeom prst="rect">
-            <a:avLst/>
-          </a:prstGeom>
-        </p:spPr>
-      </p:pic>
-      <p:sp>
-        <p:nvSpPr>
-          <p:cNvPr id="7" name="TextBox 6"/>
+              <a:t>结论在“跨调度器相对比较”上成立，绝对数值不外推到生产</a:t>
+            </a:r>
+          </a:p>
+        </p:txBody>
+      </p:sp>
+      <p:sp>
+        <p:nvSpPr>
+          <p:cNvPr id="6" name="Rounded Rectangle 5"/>
+          <p:cNvSpPr/>
+          <p:nvPr/>
+        </p:nvSpPr>
+        <p:spPr>
+          <a:xfrm>
+            <a:off x="566928" y="1874519"/>
+            <a:ext cx="3517391" cy="1051560"/>
+          </a:xfrm>
+          <a:prstGeom prst="roundRect">
+            <a:avLst/>
+          </a:prstGeom>
+          <a:solidFill>
+            <a:srgbClr val="F5F7FA"/>
+          </a:solidFill>
+          <a:ln w="9525">
+            <a:solidFill>
+              <a:srgbClr val="D8DFE8"/>
+            </a:solidFill>
+          </a:ln>
+          <a:effectLst/>
+        </p:spPr>
+        <p:style>
+          <a:lnRef idx="1">
+            <a:schemeClr val="accent1"/>
+          </a:lnRef>
+          <a:fillRef idx="3">
+            <a:schemeClr val="accent1"/>
+          </a:fillRef>
+          <a:effectRef idx="2">
+            <a:schemeClr val="accent1"/>
+          </a:effectRef>
+          <a:fontRef idx="minor">
+            <a:schemeClr val="lt1"/>
+          </a:fontRef>
+        </p:style>
+        <p:txBody>
+          <a:bodyPr rtlCol="0" anchor="ctr"/>
+          <a:lstStyle/>
+          <a:p>
+            <a:pPr algn="ctr"/>
+          </a:p>
+        </p:txBody>
+      </p:sp>
+      <p:sp>
+        <p:nvSpPr>
+          <p:cNvPr id="7" name="Rectangle 6"/>
+          <p:cNvSpPr/>
+          <p:nvPr/>
+        </p:nvSpPr>
+        <p:spPr>
+          <a:xfrm>
+            <a:off x="566928" y="1874519"/>
+            <a:ext cx="50292" cy="1051560"/>
+          </a:xfrm>
+          <a:prstGeom prst="rect">
+            <a:avLst/>
+          </a:prstGeom>
+          <a:solidFill>
+            <a:srgbClr val="1F5C99"/>
+          </a:solidFill>
+          <a:ln>
+            <a:noFill/>
+          </a:ln>
+          <a:effectLst/>
+        </p:spPr>
+        <p:style>
+          <a:lnRef idx="1">
+            <a:schemeClr val="accent1"/>
+          </a:lnRef>
+          <a:fillRef idx="3">
+            <a:schemeClr val="accent1"/>
+          </a:fillRef>
+          <a:effectRef idx="2">
+            <a:schemeClr val="accent1"/>
+          </a:effectRef>
+          <a:fontRef idx="minor">
+            <a:schemeClr val="lt1"/>
+          </a:fontRef>
+        </p:style>
+        <p:txBody>
+          <a:bodyPr rtlCol="0" anchor="ctr"/>
+          <a:lstStyle/>
+          <a:p>
+            <a:pPr algn="ctr"/>
+          </a:p>
+        </p:txBody>
+      </p:sp>
+      <p:sp>
+        <p:nvSpPr>
+          <p:cNvPr id="8" name="TextBox 7"/>
           <p:cNvSpPr txBox="1"/>
           <p:nvPr/>
         </p:nvSpPr>
         <p:spPr>
           <a:xfrm>
-            <a:off x="566928" y="2011680"/>
-            <a:ext cx="5029200" cy="1417320"/>
+            <a:off x="731520" y="2002536"/>
+            <a:ext cx="3243072" cy="868680"/>
           </a:xfrm>
           <a:prstGeom prst="rect">
             <a:avLst/>
@@ -15267,74 +14889,286 @@
           </a:bodyPr>
           <a:lstStyle/>
           <a:p>
-            <a:pPr algn="l">
-              <a:lnSpc>
-                <a:spcPct val="115000"/>
-              </a:lnSpc>
-            </a:pPr>
-            <a:r>
-              <a:rPr sz="1550" b="0">
-                <a:solidFill>
-                  <a:srgbClr val="333333"/>
+            <a:pPr algn="l"/>
+            <a:r>
+              <a:rPr sz="1400" b="1">
+                <a:solidFill>
+                  <a:srgbClr val="0B2A4A"/>
                 </a:solidFill>
                 <a:latin typeface="Arial"/>
                 <a:ea typeface="微软雅黑"/>
               </a:rPr>
-              <a:t>▪  被杀实例绑定占比 68/8407 = 0.81%</a:t>
+              <a:t>KWOK 仿真</a:t>
             </a:r>
           </a:p>
           <a:p>
             <a:pPr algn="l">
               <a:lnSpc>
-                <a:spcPct val="115000"/>
+                <a:spcPct val="110000"/>
               </a:lnSpc>
               <a:spcBef>
-                <a:spcPts val="1400"/>
+                <a:spcPts val="400"/>
               </a:spcBef>
             </a:pPr>
             <a:r>
-              <a:rPr sz="1550" b="0">
+              <a:rPr sz="1150" b="0">
                 <a:solidFill>
                   <a:srgbClr val="333333"/>
                 </a:solidFill>
                 <a:latin typeface="Arial"/>
                 <a:ea typeface="微软雅黑"/>
               </a:rPr>
-              <a:t>▪  存活实例接管 8407 pods；pending 353→2</a:t>
-            </a:r>
-          </a:p>
-          <a:p>
-            <a:pPr algn="l">
-              <a:lnSpc>
-                <a:spcPct val="115000"/>
-              </a:lnSpc>
-              <a:spcBef>
-                <a:spcPts val="1400"/>
-              </a:spcBef>
-            </a:pPr>
-            <a:r>
-              <a:rPr sz="1550" b="0">
-                <a:solidFill>
-                  <a:srgbClr val="333333"/>
+              <a:t>无法反映真实资源竞争与 IO</a:t>
+            </a:r>
+          </a:p>
+        </p:txBody>
+      </p:sp>
+      <p:sp>
+        <p:nvSpPr>
+          <p:cNvPr id="9" name="Rounded Rectangle 8"/>
+          <p:cNvSpPr/>
+          <p:nvPr/>
+        </p:nvSpPr>
+        <p:spPr>
+          <a:xfrm>
+            <a:off x="4340351" y="1874519"/>
+            <a:ext cx="3517391" cy="1051560"/>
+          </a:xfrm>
+          <a:prstGeom prst="roundRect">
+            <a:avLst/>
+          </a:prstGeom>
+          <a:solidFill>
+            <a:srgbClr val="F5F7FA"/>
+          </a:solidFill>
+          <a:ln w="9525">
+            <a:solidFill>
+              <a:srgbClr val="D8DFE8"/>
+            </a:solidFill>
+          </a:ln>
+          <a:effectLst/>
+        </p:spPr>
+        <p:style>
+          <a:lnRef idx="1">
+            <a:schemeClr val="accent1"/>
+          </a:lnRef>
+          <a:fillRef idx="3">
+            <a:schemeClr val="accent1"/>
+          </a:fillRef>
+          <a:effectRef idx="2">
+            <a:schemeClr val="accent1"/>
+          </a:effectRef>
+          <a:fontRef idx="minor">
+            <a:schemeClr val="lt1"/>
+          </a:fontRef>
+        </p:style>
+        <p:txBody>
+          <a:bodyPr rtlCol="0" anchor="ctr"/>
+          <a:lstStyle/>
+          <a:p>
+            <a:pPr algn="ctr"/>
+          </a:p>
+        </p:txBody>
+      </p:sp>
+      <p:sp>
+        <p:nvSpPr>
+          <p:cNvPr id="10" name="Rectangle 9"/>
+          <p:cNvSpPr/>
+          <p:nvPr/>
+        </p:nvSpPr>
+        <p:spPr>
+          <a:xfrm>
+            <a:off x="4340351" y="1874519"/>
+            <a:ext cx="50292" cy="1051560"/>
+          </a:xfrm>
+          <a:prstGeom prst="rect">
+            <a:avLst/>
+          </a:prstGeom>
+          <a:solidFill>
+            <a:srgbClr val="1F5C99"/>
+          </a:solidFill>
+          <a:ln>
+            <a:noFill/>
+          </a:ln>
+          <a:effectLst/>
+        </p:spPr>
+        <p:style>
+          <a:lnRef idx="1">
+            <a:schemeClr val="accent1"/>
+          </a:lnRef>
+          <a:fillRef idx="3">
+            <a:schemeClr val="accent1"/>
+          </a:fillRef>
+          <a:effectRef idx="2">
+            <a:schemeClr val="accent1"/>
+          </a:effectRef>
+          <a:fontRef idx="minor">
+            <a:schemeClr val="lt1"/>
+          </a:fontRef>
+        </p:style>
+        <p:txBody>
+          <a:bodyPr rtlCol="0" anchor="ctr"/>
+          <a:lstStyle/>
+          <a:p>
+            <a:pPr algn="ctr"/>
+          </a:p>
+        </p:txBody>
+      </p:sp>
+      <p:sp>
+        <p:nvSpPr>
+          <p:cNvPr id="11" name="TextBox 10"/>
+          <p:cNvSpPr txBox="1"/>
+          <p:nvPr/>
+        </p:nvSpPr>
+        <p:spPr>
+          <a:xfrm>
+            <a:off x="4504943" y="2002536"/>
+            <a:ext cx="3243072" cy="868680"/>
+          </a:xfrm>
+          <a:prstGeom prst="rect">
+            <a:avLst/>
+          </a:prstGeom>
+          <a:noFill/>
+        </p:spPr>
+        <p:txBody>
+          <a:bodyPr wrap="square" anchor="t" lIns="0" rIns="0" tIns="0" bIns="0">
+            <a:spAutoFit/>
+          </a:bodyPr>
+          <a:lstStyle/>
+          <a:p>
+            <a:pPr algn="l"/>
+            <a:r>
+              <a:rPr sz="1400" b="1">
+                <a:solidFill>
+                  <a:srgbClr val="0B2A4A"/>
                 </a:solidFill>
                 <a:latin typeface="Arial"/>
                 <a:ea typeface="微软雅黑"/>
               </a:rPr>
-              <a:t>▪  总耗时 784 s，较基线 +15.3%</a:t>
-            </a:r>
-          </a:p>
-        </p:txBody>
-      </p:sp>
-      <p:sp>
-        <p:nvSpPr>
-          <p:cNvPr id="8" name="TextBox 7"/>
+              <a:t>Gang 延迟口径</a:t>
+            </a:r>
+          </a:p>
+          <a:p>
+            <a:pPr algn="l">
+              <a:lnSpc>
+                <a:spcPct val="110000"/>
+              </a:lnSpc>
+              <a:spcBef>
+                <a:spcPts val="400"/>
+              </a:spcBef>
+            </a:pPr>
+            <a:r>
+              <a:rPr sz="1150" b="0">
+                <a:solidFill>
+                  <a:srgbClr val="333333"/>
+                </a:solidFill>
+                <a:latin typeface="Arial"/>
+                <a:ea typeface="微软雅黑"/>
+              </a:rPr>
+              <a:t>w6 尾延迟反向，未分离计时</a:t>
+            </a:r>
+          </a:p>
+        </p:txBody>
+      </p:sp>
+      <p:sp>
+        <p:nvSpPr>
+          <p:cNvPr id="12" name="Rounded Rectangle 11"/>
+          <p:cNvSpPr/>
+          <p:nvPr/>
+        </p:nvSpPr>
+        <p:spPr>
+          <a:xfrm>
+            <a:off x="8113775" y="1874519"/>
+            <a:ext cx="3517391" cy="1051560"/>
+          </a:xfrm>
+          <a:prstGeom prst="roundRect">
+            <a:avLst/>
+          </a:prstGeom>
+          <a:solidFill>
+            <a:srgbClr val="F5F7FA"/>
+          </a:solidFill>
+          <a:ln w="9525">
+            <a:solidFill>
+              <a:srgbClr val="D8DFE8"/>
+            </a:solidFill>
+          </a:ln>
+          <a:effectLst/>
+        </p:spPr>
+        <p:style>
+          <a:lnRef idx="1">
+            <a:schemeClr val="accent1"/>
+          </a:lnRef>
+          <a:fillRef idx="3">
+            <a:schemeClr val="accent1"/>
+          </a:fillRef>
+          <a:effectRef idx="2">
+            <a:schemeClr val="accent1"/>
+          </a:effectRef>
+          <a:fontRef idx="minor">
+            <a:schemeClr val="lt1"/>
+          </a:fontRef>
+        </p:style>
+        <p:txBody>
+          <a:bodyPr rtlCol="0" anchor="ctr"/>
+          <a:lstStyle/>
+          <a:p>
+            <a:pPr algn="ctr"/>
+          </a:p>
+        </p:txBody>
+      </p:sp>
+      <p:sp>
+        <p:nvSpPr>
+          <p:cNvPr id="13" name="Rectangle 12"/>
+          <p:cNvSpPr/>
+          <p:nvPr/>
+        </p:nvSpPr>
+        <p:spPr>
+          <a:xfrm>
+            <a:off x="8113775" y="1874519"/>
+            <a:ext cx="50292" cy="1051560"/>
+          </a:xfrm>
+          <a:prstGeom prst="rect">
+            <a:avLst/>
+          </a:prstGeom>
+          <a:solidFill>
+            <a:srgbClr val="1F5C99"/>
+          </a:solidFill>
+          <a:ln>
+            <a:noFill/>
+          </a:ln>
+          <a:effectLst/>
+        </p:spPr>
+        <p:style>
+          <a:lnRef idx="1">
+            <a:schemeClr val="accent1"/>
+          </a:lnRef>
+          <a:fillRef idx="3">
+            <a:schemeClr val="accent1"/>
+          </a:fillRef>
+          <a:effectRef idx="2">
+            <a:schemeClr val="accent1"/>
+          </a:effectRef>
+          <a:fontRef idx="minor">
+            <a:schemeClr val="lt1"/>
+          </a:fontRef>
+        </p:style>
+        <p:txBody>
+          <a:bodyPr rtlCol="0" anchor="ctr"/>
+          <a:lstStyle/>
+          <a:p>
+            <a:pPr algn="ctr"/>
+          </a:p>
+        </p:txBody>
+      </p:sp>
+      <p:sp>
+        <p:nvSpPr>
+          <p:cNvPr id="14" name="TextBox 13"/>
           <p:cNvSpPr txBox="1"/>
           <p:nvPr/>
         </p:nvSpPr>
         <p:spPr>
           <a:xfrm>
-            <a:off x="566928" y="6309360"/>
-            <a:ext cx="10104120" cy="201168"/>
+            <a:off x="8278367" y="2002536"/>
+            <a:ext cx="3243072" cy="868680"/>
           </a:xfrm>
           <a:prstGeom prst="rect">
             <a:avLst/>
@@ -15349,28 +15183,138 @@
           <a:p>
             <a:pPr algn="l"/>
             <a:r>
-              <a:rPr sz="850" b="0">
-                <a:solidFill>
-                  <a:srgbClr val="566474"/>
+              <a:rPr sz="1400" b="1">
+                <a:solidFill>
+                  <a:srgbClr val="0B2A4A"/>
                 </a:solidFill>
                 <a:latin typeface="Arial"/>
                 <a:ea typeface="微软雅黑"/>
               </a:rPr>
-              <a:t>编码：s1–s4 = 100 / 1000 / 5000 / 10000 节点；w1–w7 = 负载强度（w2 500、w3 1000、w4 2000 pods/s 极限、w5 突发、w6 Gang、w7 异构）；inst3 = 3 实例</a:t>
-            </a:r>
-          </a:p>
-        </p:txBody>
-      </p:sp>
-      <p:sp>
-        <p:nvSpPr>
-          <p:cNvPr id="9" name="TextBox 8"/>
+              <a:t>固定实例数</a:t>
+            </a:r>
+          </a:p>
+          <a:p>
+            <a:pPr algn="l">
+              <a:lnSpc>
+                <a:spcPct val="110000"/>
+              </a:lnSpc>
+              <a:spcBef>
+                <a:spcPts val="400"/>
+              </a:spcBef>
+            </a:pPr>
+            <a:r>
+              <a:rPr sz="1150" b="0">
+                <a:solidFill>
+                  <a:srgbClr val="333333"/>
+                </a:solidFill>
+                <a:latin typeface="Arial"/>
+                <a:ea typeface="微软雅黑"/>
+              </a:rPr>
+              <a:t>s3→s4 未同步扩容</a:t>
+            </a:r>
+          </a:p>
+        </p:txBody>
+      </p:sp>
+      <p:sp>
+        <p:nvSpPr>
+          <p:cNvPr id="15" name="Rounded Rectangle 14"/>
+          <p:cNvSpPr/>
+          <p:nvPr/>
+        </p:nvSpPr>
+        <p:spPr>
+          <a:xfrm>
+            <a:off x="566928" y="3182111"/>
+            <a:ext cx="3517391" cy="1051560"/>
+          </a:xfrm>
+          <a:prstGeom prst="roundRect">
+            <a:avLst/>
+          </a:prstGeom>
+          <a:solidFill>
+            <a:srgbClr val="F5F7FA"/>
+          </a:solidFill>
+          <a:ln w="9525">
+            <a:solidFill>
+              <a:srgbClr val="D8DFE8"/>
+            </a:solidFill>
+          </a:ln>
+          <a:effectLst/>
+        </p:spPr>
+        <p:style>
+          <a:lnRef idx="1">
+            <a:schemeClr val="accent1"/>
+          </a:lnRef>
+          <a:fillRef idx="3">
+            <a:schemeClr val="accent1"/>
+          </a:fillRef>
+          <a:effectRef idx="2">
+            <a:schemeClr val="accent1"/>
+          </a:effectRef>
+          <a:fontRef idx="minor">
+            <a:schemeClr val="lt1"/>
+          </a:fontRef>
+        </p:style>
+        <p:txBody>
+          <a:bodyPr rtlCol="0" anchor="ctr"/>
+          <a:lstStyle/>
+          <a:p>
+            <a:pPr algn="ctr"/>
+          </a:p>
+        </p:txBody>
+      </p:sp>
+      <p:sp>
+        <p:nvSpPr>
+          <p:cNvPr id="16" name="Rectangle 15"/>
+          <p:cNvSpPr/>
+          <p:nvPr/>
+        </p:nvSpPr>
+        <p:spPr>
+          <a:xfrm>
+            <a:off x="566928" y="3182111"/>
+            <a:ext cx="50292" cy="1051560"/>
+          </a:xfrm>
+          <a:prstGeom prst="rect">
+            <a:avLst/>
+          </a:prstGeom>
+          <a:solidFill>
+            <a:srgbClr val="1F5C99"/>
+          </a:solidFill>
+          <a:ln>
+            <a:noFill/>
+          </a:ln>
+          <a:effectLst/>
+        </p:spPr>
+        <p:style>
+          <a:lnRef idx="1">
+            <a:schemeClr val="accent1"/>
+          </a:lnRef>
+          <a:fillRef idx="3">
+            <a:schemeClr val="accent1"/>
+          </a:fillRef>
+          <a:effectRef idx="2">
+            <a:schemeClr val="accent1"/>
+          </a:effectRef>
+          <a:fontRef idx="minor">
+            <a:schemeClr val="lt1"/>
+          </a:fontRef>
+        </p:style>
+        <p:txBody>
+          <a:bodyPr rtlCol="0" anchor="ctr"/>
+          <a:lstStyle/>
+          <a:p>
+            <a:pPr algn="ctr"/>
+          </a:p>
+        </p:txBody>
+      </p:sp>
+      <p:sp>
+        <p:nvSpPr>
+          <p:cNvPr id="17" name="TextBox 16"/>
           <p:cNvSpPr txBox="1"/>
           <p:nvPr/>
         </p:nvSpPr>
         <p:spPr>
           <a:xfrm>
-            <a:off x="10780776" y="6345936"/>
-            <a:ext cx="850392" cy="219456"/>
+            <a:off x="731520" y="3310127"/>
+            <a:ext cx="3243072" cy="868680"/>
           </a:xfrm>
           <a:prstGeom prst="rect">
             <a:avLst/>
@@ -15383,16 +15327,364 @@
           </a:bodyPr>
           <a:lstStyle/>
           <a:p>
-            <a:pPr algn="r"/>
-            <a:r>
-              <a:rPr sz="950" b="0">
-                <a:solidFill>
-                  <a:srgbClr val="566474"/>
+            <a:pPr algn="l"/>
+            <a:r>
+              <a:rPr sz="1400" b="1">
+                <a:solidFill>
+                  <a:srgbClr val="0B2A4A"/>
                 </a:solidFill>
                 <a:latin typeface="Arial"/>
                 <a:ea typeface="微软雅黑"/>
               </a:rPr>
-              <a:t>22 / 25</a:t>
+              <a:t>资源公平</a:t>
+            </a:r>
+          </a:p>
+          <a:p>
+            <a:pPr algn="l">
+              <a:lnSpc>
+                <a:spcPct val="110000"/>
+              </a:lnSpc>
+              <a:spcBef>
+                <a:spcPts val="400"/>
+              </a:spcBef>
+            </a:pPr>
+            <a:r>
+              <a:rPr sz="1150" b="0">
+                <a:solidFill>
+                  <a:srgbClr val="333333"/>
+                </a:solidFill>
+                <a:latin typeface="Arial"/>
+                <a:ea typeface="微软雅黑"/>
+              </a:rPr>
+              <a:t>每 Deployment 同规格，对 ENO 略不利</a:t>
+            </a:r>
+          </a:p>
+        </p:txBody>
+      </p:sp>
+      <p:sp>
+        <p:nvSpPr>
+          <p:cNvPr id="18" name="Rounded Rectangle 17"/>
+          <p:cNvSpPr/>
+          <p:nvPr/>
+        </p:nvSpPr>
+        <p:spPr>
+          <a:xfrm>
+            <a:off x="4340351" y="3182111"/>
+            <a:ext cx="3517391" cy="1051560"/>
+          </a:xfrm>
+          <a:prstGeom prst="roundRect">
+            <a:avLst/>
+          </a:prstGeom>
+          <a:solidFill>
+            <a:srgbClr val="F5F7FA"/>
+          </a:solidFill>
+          <a:ln w="9525">
+            <a:solidFill>
+              <a:srgbClr val="D8DFE8"/>
+            </a:solidFill>
+          </a:ln>
+          <a:effectLst/>
+        </p:spPr>
+        <p:style>
+          <a:lnRef idx="1">
+            <a:schemeClr val="accent1"/>
+          </a:lnRef>
+          <a:fillRef idx="3">
+            <a:schemeClr val="accent1"/>
+          </a:fillRef>
+          <a:effectRef idx="2">
+            <a:schemeClr val="accent1"/>
+          </a:effectRef>
+          <a:fontRef idx="minor">
+            <a:schemeClr val="lt1"/>
+          </a:fontRef>
+        </p:style>
+        <p:txBody>
+          <a:bodyPr rtlCol="0" anchor="ctr"/>
+          <a:lstStyle/>
+          <a:p>
+            <a:pPr algn="ctr"/>
+          </a:p>
+        </p:txBody>
+      </p:sp>
+      <p:sp>
+        <p:nvSpPr>
+          <p:cNvPr id="19" name="Rectangle 18"/>
+          <p:cNvSpPr/>
+          <p:nvPr/>
+        </p:nvSpPr>
+        <p:spPr>
+          <a:xfrm>
+            <a:off x="4340351" y="3182111"/>
+            <a:ext cx="50292" cy="1051560"/>
+          </a:xfrm>
+          <a:prstGeom prst="rect">
+            <a:avLst/>
+          </a:prstGeom>
+          <a:solidFill>
+            <a:srgbClr val="1F5C99"/>
+          </a:solidFill>
+          <a:ln>
+            <a:noFill/>
+          </a:ln>
+          <a:effectLst/>
+        </p:spPr>
+        <p:style>
+          <a:lnRef idx="1">
+            <a:schemeClr val="accent1"/>
+          </a:lnRef>
+          <a:fillRef idx="3">
+            <a:schemeClr val="accent1"/>
+          </a:fillRef>
+          <a:effectRef idx="2">
+            <a:schemeClr val="accent1"/>
+          </a:effectRef>
+          <a:fontRef idx="minor">
+            <a:schemeClr val="lt1"/>
+          </a:fontRef>
+        </p:style>
+        <p:txBody>
+          <a:bodyPr rtlCol="0" anchor="ctr"/>
+          <a:lstStyle/>
+          <a:p>
+            <a:pPr algn="ctr"/>
+          </a:p>
+        </p:txBody>
+      </p:sp>
+      <p:sp>
+        <p:nvSpPr>
+          <p:cNvPr id="20" name="TextBox 19"/>
+          <p:cNvSpPr txBox="1"/>
+          <p:nvPr/>
+        </p:nvSpPr>
+        <p:spPr>
+          <a:xfrm>
+            <a:off x="4504943" y="3310127"/>
+            <a:ext cx="3243072" cy="868680"/>
+          </a:xfrm>
+          <a:prstGeom prst="rect">
+            <a:avLst/>
+          </a:prstGeom>
+          <a:noFill/>
+        </p:spPr>
+        <p:txBody>
+          <a:bodyPr wrap="square" anchor="t" lIns="0" rIns="0" tIns="0" bIns="0">
+            <a:spAutoFit/>
+          </a:bodyPr>
+          <a:lstStyle/>
+          <a:p>
+            <a:pPr algn="l"/>
+            <a:r>
+              <a:rPr sz="1400" b="1">
+                <a:solidFill>
+                  <a:srgbClr val="0B2A4A"/>
+                </a:solidFill>
+                <a:latin typeface="Arial"/>
+                <a:ea typeface="微软雅黑"/>
+              </a:rPr>
+              <a:t>Volcano 指标</a:t>
+            </a:r>
+          </a:p>
+          <a:p>
+            <a:pPr algn="l">
+              <a:lnSpc>
+                <a:spcPct val="110000"/>
+              </a:lnSpc>
+              <a:spcBef>
+                <a:spcPts val="400"/>
+              </a:spcBef>
+            </a:pPr>
+            <a:r>
+              <a:rPr sz="1150" b="0">
+                <a:solidFill>
+                  <a:srgbClr val="333333"/>
+                </a:solidFill>
+                <a:latin typeface="Arial"/>
+                <a:ea typeface="微软雅黑"/>
+              </a:rPr>
+              <a:t>测量对象与粒度不完全等价</a:t>
+            </a:r>
+          </a:p>
+        </p:txBody>
+      </p:sp>
+      <p:sp>
+        <p:nvSpPr>
+          <p:cNvPr id="21" name="Rounded Rectangle 20"/>
+          <p:cNvSpPr/>
+          <p:nvPr/>
+        </p:nvSpPr>
+        <p:spPr>
+          <a:xfrm>
+            <a:off x="8113775" y="3182111"/>
+            <a:ext cx="3517391" cy="1051560"/>
+          </a:xfrm>
+          <a:prstGeom prst="roundRect">
+            <a:avLst/>
+          </a:prstGeom>
+          <a:solidFill>
+            <a:srgbClr val="F5F7FA"/>
+          </a:solidFill>
+          <a:ln w="9525">
+            <a:solidFill>
+              <a:srgbClr val="D8DFE8"/>
+            </a:solidFill>
+          </a:ln>
+          <a:effectLst/>
+        </p:spPr>
+        <p:style>
+          <a:lnRef idx="1">
+            <a:schemeClr val="accent1"/>
+          </a:lnRef>
+          <a:fillRef idx="3">
+            <a:schemeClr val="accent1"/>
+          </a:fillRef>
+          <a:effectRef idx="2">
+            <a:schemeClr val="accent1"/>
+          </a:effectRef>
+          <a:fontRef idx="minor">
+            <a:schemeClr val="lt1"/>
+          </a:fontRef>
+        </p:style>
+        <p:txBody>
+          <a:bodyPr rtlCol="0" anchor="ctr"/>
+          <a:lstStyle/>
+          <a:p>
+            <a:pPr algn="ctr"/>
+          </a:p>
+        </p:txBody>
+      </p:sp>
+      <p:sp>
+        <p:nvSpPr>
+          <p:cNvPr id="22" name="Rectangle 21"/>
+          <p:cNvSpPr/>
+          <p:nvPr/>
+        </p:nvSpPr>
+        <p:spPr>
+          <a:xfrm>
+            <a:off x="8113775" y="3182111"/>
+            <a:ext cx="50292" cy="1051560"/>
+          </a:xfrm>
+          <a:prstGeom prst="rect">
+            <a:avLst/>
+          </a:prstGeom>
+          <a:solidFill>
+            <a:srgbClr val="1F5C99"/>
+          </a:solidFill>
+          <a:ln>
+            <a:noFill/>
+          </a:ln>
+          <a:effectLst/>
+        </p:spPr>
+        <p:style>
+          <a:lnRef idx="1">
+            <a:schemeClr val="accent1"/>
+          </a:lnRef>
+          <a:fillRef idx="3">
+            <a:schemeClr val="accent1"/>
+          </a:fillRef>
+          <a:effectRef idx="2">
+            <a:schemeClr val="accent1"/>
+          </a:effectRef>
+          <a:fontRef idx="minor">
+            <a:schemeClr val="lt1"/>
+          </a:fontRef>
+        </p:style>
+        <p:txBody>
+          <a:bodyPr rtlCol="0" anchor="ctr"/>
+          <a:lstStyle/>
+          <a:p>
+            <a:pPr algn="ctr"/>
+          </a:p>
+        </p:txBody>
+      </p:sp>
+      <p:sp>
+        <p:nvSpPr>
+          <p:cNvPr id="23" name="TextBox 22"/>
+          <p:cNvSpPr txBox="1"/>
+          <p:nvPr/>
+        </p:nvSpPr>
+        <p:spPr>
+          <a:xfrm>
+            <a:off x="8278367" y="3310127"/>
+            <a:ext cx="3243072" cy="868680"/>
+          </a:xfrm>
+          <a:prstGeom prst="rect">
+            <a:avLst/>
+          </a:prstGeom>
+          <a:noFill/>
+        </p:spPr>
+        <p:txBody>
+          <a:bodyPr wrap="square" anchor="t" lIns="0" rIns="0" tIns="0" bIns="0">
+            <a:spAutoFit/>
+          </a:bodyPr>
+          <a:lstStyle/>
+          <a:p>
+            <a:pPr algn="l"/>
+            <a:r>
+              <a:rPr sz="1400" b="1">
+                <a:solidFill>
+                  <a:srgbClr val="0B2A4A"/>
+                </a:solidFill>
+                <a:latin typeface="Arial"/>
+                <a:ea typeface="微软雅黑"/>
+              </a:rPr>
+              <a:t>幸存者偏差</a:t>
+            </a:r>
+          </a:p>
+          <a:p>
+            <a:pPr algn="l">
+              <a:lnSpc>
+                <a:spcPct val="110000"/>
+              </a:lnSpc>
+              <a:spcBef>
+                <a:spcPts val="400"/>
+              </a:spcBef>
+            </a:pPr>
+            <a:r>
+              <a:rPr sz="1150" b="0">
+                <a:solidFill>
+                  <a:srgbClr val="333333"/>
+                </a:solidFill>
+                <a:latin typeface="Arial"/>
+                <a:ea typeface="微软雅黑"/>
+              </a:rPr>
+              <a:t>c/d/e 的 P99 不做数值对齐</a:t>
+            </a:r>
+          </a:p>
+        </p:txBody>
+      </p:sp>
+      <p:sp>
+        <p:nvSpPr>
+          <p:cNvPr id="24" name="TextBox 23"/>
+          <p:cNvSpPr txBox="1"/>
+          <p:nvPr/>
+        </p:nvSpPr>
+        <p:spPr>
+          <a:xfrm>
+            <a:off x="10780776" y="6345936"/>
+            <a:ext cx="850392" cy="219456"/>
+          </a:xfrm>
+          <a:prstGeom prst="rect">
+            <a:avLst/>
+          </a:prstGeom>
+          <a:noFill/>
+        </p:spPr>
+        <p:txBody>
+          <a:bodyPr wrap="square" anchor="t" lIns="0" rIns="0" tIns="0" bIns="0">
+            <a:spAutoFit/>
+          </a:bodyPr>
+          <a:lstStyle/>
+          <a:p>
+            <a:pPr algn="r"/>
+            <a:r>
+              <a:rPr sz="950" b="0">
+                <a:solidFill>
+                  <a:srgbClr val="566474"/>
+                </a:solidFill>
+                <a:latin typeface="Arial"/>
+                <a:ea typeface="微软雅黑"/>
+              </a:rPr>
+              <a:t>22 / 24</a:t>
             </a:r>
           </a:p>
         </p:txBody>
@@ -15502,7 +15794,7 @@
                 <a:latin typeface="Arial"/>
                 <a:ea typeface="微软雅黑"/>
               </a:rPr>
-              <a:t>局限性与威胁效力</a:t>
+              <a:t>结论</a:t>
             </a:r>
           </a:p>
         </p:txBody>
@@ -15586,7 +15878,7 @@
                 <a:latin typeface="Arial"/>
                 <a:ea typeface="微软雅黑"/>
               </a:rPr>
-              <a:t>结论在“跨调度器相对比较”上成立，绝对数值不外推到生产</a:t>
+              <a:t>架构创新与一致性创新都有可复现实验支撑，且实现了向后兼容的工程落地</a:t>
             </a:r>
           </a:p>
         </p:txBody>
@@ -15712,7 +16004,7 @@
                 <a:latin typeface="Arial"/>
                 <a:ea typeface="微软雅黑"/>
               </a:rPr>
-              <a:t>KWOK 仿真</a:t>
+              <a:t>创新 1 · ENO</a:t>
             </a:r>
           </a:p>
           <a:p>
@@ -15732,7 +16024,7 @@
                 <a:latin typeface="Arial"/>
                 <a:ea typeface="微软雅黑"/>
               </a:rPr>
-              <a:t>无法反映真实资源竞争与 IO</a:t>
+              <a:t>Binder 进进程内 + CacheAdapter</a:t>
             </a:r>
           </a:p>
         </p:txBody>
@@ -15858,7 +16150,7 @@
                 <a:latin typeface="Arial"/>
                 <a:ea typeface="微软雅黑"/>
               </a:rPr>
-              <a:t>Gang 延迟口径</a:t>
+              <a:t>创新 2 · 四层容错</a:t>
             </a:r>
           </a:p>
           <a:p>
@@ -15878,7 +16170,7 @@
                 <a:latin typeface="Arial"/>
                 <a:ea typeface="微软雅黑"/>
               </a:rPr>
-              <a:t>w6 尾延迟反向，未分离计时</a:t>
+              <a:t>不变量 I 的完整证明要点</a:t>
             </a:r>
           </a:p>
         </p:txBody>
@@ -16004,7 +16296,7 @@
                 <a:latin typeface="Arial"/>
                 <a:ea typeface="微软雅黑"/>
               </a:rPr>
-              <a:t>固定实例数</a:t>
+              <a:t>证据 1 · 规模</a:t>
             </a:r>
           </a:p>
           <a:p>
@@ -16024,7 +16316,7 @@
                 <a:latin typeface="Arial"/>
                 <a:ea typeface="微软雅黑"/>
               </a:rPr>
-              <a:t>s3→s4 未同步扩容</a:t>
+              <a:t>16 场景 / 144 run / 100% 成功率</a:t>
             </a:r>
           </a:p>
         </p:txBody>
@@ -16150,7 +16442,7 @@
                 <a:latin typeface="Arial"/>
                 <a:ea typeface="微软雅黑"/>
               </a:rPr>
-              <a:t>资源公平</a:t>
+              <a:t>证据 2 · 性能</a:t>
             </a:r>
           </a:p>
           <a:p>
@@ -16170,7 +16462,7 @@
                 <a:latin typeface="Arial"/>
                 <a:ea typeface="微软雅黑"/>
               </a:rPr>
-              <a:t>每 Deployment 同规格，对 ENO 略不利</a:t>
+              <a:t>平均 +11.9%；P99 最高 -82.9%</a:t>
             </a:r>
           </a:p>
         </p:txBody>
@@ -16296,7 +16588,7 @@
                 <a:latin typeface="Arial"/>
                 <a:ea typeface="微软雅黑"/>
               </a:rPr>
-              <a:t>Volcano 指标</a:t>
+              <a:t>证据 3 · 扩展</a:t>
             </a:r>
           </a:p>
           <a:p>
@@ -16316,7 +16608,7 @@
                 <a:latin typeface="Arial"/>
                 <a:ea typeface="微软雅黑"/>
               </a:rPr>
-              <a:t>测量对象与粒度不完全等价</a:t>
+              <a:t>实例 1→3：+17.5% 对 +1.4%</a:t>
             </a:r>
           </a:p>
         </p:txBody>
@@ -16442,7 +16734,7 @@
                 <a:latin typeface="Arial"/>
                 <a:ea typeface="微软雅黑"/>
               </a:rPr>
-              <a:t>幸存者偏差</a:t>
+              <a:t>价值 · 落地</a:t>
             </a:r>
           </a:p>
           <a:p>
@@ -16462,7 +16754,7 @@
                 <a:latin typeface="Arial"/>
                 <a:ea typeface="微软雅黑"/>
               </a:rPr>
-              <a:t>c/d/e 的 P99 不做数值对齐</a:t>
+              <a:t>不改 API、可平滑替换、基准开源</a:t>
             </a:r>
           </a:p>
         </p:txBody>
@@ -16498,7 +16790,7 @@
                 <a:latin typeface="Arial"/>
                 <a:ea typeface="微软雅黑"/>
               </a:rPr>
-              <a:t>23 / 25</a:t>
+              <a:t>23 / 24</a:t>
             </a:r>
           </a:p>
         </p:txBody>
@@ -16537,14 +16829,14 @@
         </p:nvSpPr>
         <p:spPr>
           <a:xfrm>
-            <a:off x="384048" y="420624"/>
-            <a:ext cx="77724" cy="475488"/>
+            <a:off x="1197864" y="2212848"/>
+            <a:ext cx="9866376" cy="20116"/>
           </a:xfrm>
           <a:prstGeom prst="rect">
             <a:avLst/>
           </a:prstGeom>
           <a:solidFill>
-            <a:srgbClr val="E8833A"/>
+            <a:srgbClr val="0B2A4A"/>
           </a:solidFill>
           <a:ln>
             <a:noFill/>
@@ -16581,8 +16873,8 @@
         </p:nvSpPr>
         <p:spPr>
           <a:xfrm>
-            <a:off x="566928" y="329184"/>
-            <a:ext cx="11064240" cy="713232"/>
+            <a:off x="914400" y="2395728"/>
+            <a:ext cx="10332720" cy="914400"/>
           </a:xfrm>
           <a:prstGeom prst="rect">
             <a:avLst/>
@@ -16595,40 +16887,125 @@
           </a:bodyPr>
           <a:lstStyle/>
           <a:p>
-            <a:pPr algn="l">
-              <a:lnSpc>
-                <a:spcPct val="105000"/>
-              </a:lnSpc>
-            </a:pPr>
-            <a:r>
-              <a:rPr sz="2700" b="1">
+            <a:pPr algn="ctr"/>
+            <a:r>
+              <a:rPr sz="3400" b="1">
                 <a:solidFill>
                   <a:srgbClr val="0B2A4A"/>
                 </a:solidFill>
                 <a:latin typeface="Arial"/>
                 <a:ea typeface="微软雅黑"/>
               </a:rPr>
-              <a:t>结论</a:t>
-            </a:r>
-          </a:p>
-        </p:txBody>
-      </p:sp>
-      <p:sp>
-        <p:nvSpPr>
-          <p:cNvPr id="4" name="Rectangle 3"/>
+              <a:t>谢谢各位老师，请批评指正</a:t>
+            </a:r>
+          </a:p>
+        </p:txBody>
+      </p:sp>
+      <p:sp>
+        <p:nvSpPr>
+          <p:cNvPr id="4" name="TextBox 3"/>
+          <p:cNvSpPr txBox="1"/>
+          <p:nvPr/>
+        </p:nvSpPr>
+        <p:spPr>
+          <a:xfrm>
+            <a:off x="914400" y="3429000"/>
+            <a:ext cx="10332720" cy="457200"/>
+          </a:xfrm>
+          <a:prstGeom prst="rect">
+            <a:avLst/>
+          </a:prstGeom>
+          <a:noFill/>
+        </p:spPr>
+        <p:txBody>
+          <a:bodyPr wrap="square" anchor="t" lIns="0" rIns="0" tIns="0" bIns="0">
+            <a:spAutoFit/>
+          </a:bodyPr>
+          <a:lstStyle/>
+          <a:p>
+            <a:pPr algn="ctr"/>
+            <a:r>
+              <a:rPr sz="1600" b="0">
+                <a:solidFill>
+                  <a:srgbClr val="566474"/>
+                </a:solidFill>
+                <a:latin typeface="Arial"/>
+                <a:ea typeface="微软雅黑"/>
+              </a:rPr>
+              <a:t>基于 etcd 的分布式 Kubernetes 调度器研究与实现</a:t>
+            </a:r>
+          </a:p>
+        </p:txBody>
+      </p:sp>
+      <p:sp>
+        <p:nvSpPr>
+          <p:cNvPr id="5" name="TextBox 4"/>
+          <p:cNvSpPr txBox="1"/>
+          <p:nvPr/>
+        </p:nvSpPr>
+        <p:spPr>
+          <a:xfrm>
+            <a:off x="914400" y="4343400"/>
+            <a:ext cx="10332720" cy="731520"/>
+          </a:xfrm>
+          <a:prstGeom prst="rect">
+            <a:avLst/>
+          </a:prstGeom>
+          <a:noFill/>
+        </p:spPr>
+        <p:txBody>
+          <a:bodyPr wrap="square" anchor="t" lIns="0" rIns="0" tIns="0" bIns="0">
+            <a:spAutoFit/>
+          </a:bodyPr>
+          <a:lstStyle/>
+          <a:p>
+            <a:pPr algn="ctr"/>
+            <a:r>
+              <a:rPr sz="1300" b="0">
+                <a:solidFill>
+                  <a:srgbClr val="566474"/>
+                </a:solidFill>
+                <a:latin typeface="Arial"/>
+                <a:ea typeface="微软雅黑"/>
+              </a:rPr>
+              <a:t>答辩人：[姓名]</a:t>
+            </a:r>
+          </a:p>
+          <a:p>
+            <a:pPr algn="ctr">
+              <a:spcBef>
+                <a:spcPts val="400"/>
+              </a:spcBef>
+            </a:pPr>
+            <a:r>
+              <a:rPr sz="1300" b="0">
+                <a:solidFill>
+                  <a:srgbClr val="566474"/>
+                </a:solidFill>
+                <a:latin typeface="Arial"/>
+                <a:ea typeface="微软雅黑"/>
+              </a:rPr>
+              <a:t>联系方式：[邮箱]</a:t>
+            </a:r>
+          </a:p>
+        </p:txBody>
+      </p:sp>
+      <p:sp>
+        <p:nvSpPr>
+          <p:cNvPr id="6" name="Rectangle 5"/>
           <p:cNvSpPr/>
           <p:nvPr/>
         </p:nvSpPr>
         <p:spPr>
           <a:xfrm>
-            <a:off x="566928" y="1298448"/>
-            <a:ext cx="32004" cy="365760"/>
+            <a:off x="1197864" y="5074920"/>
+            <a:ext cx="9866376" cy="20116"/>
           </a:xfrm>
           <a:prstGeom prst="rect">
             <a:avLst/>
           </a:prstGeom>
           <a:solidFill>
-            <a:srgbClr val="1F5C99"/>
+            <a:srgbClr val="0B2A4A"/>
           </a:solidFill>
           <a:ln>
             <a:noFill/>
@@ -16659,65 +17036,23 @@
       </p:sp>
       <p:sp>
         <p:nvSpPr>
-          <p:cNvPr id="5" name="TextBox 4"/>
-          <p:cNvSpPr txBox="1"/>
-          <p:nvPr/>
-        </p:nvSpPr>
-        <p:spPr>
-          <a:xfrm>
-            <a:off x="713232" y="1261872"/>
-            <a:ext cx="10744200" cy="438912"/>
-          </a:xfrm>
-          <a:prstGeom prst="rect">
-            <a:avLst/>
-          </a:prstGeom>
-          <a:noFill/>
-        </p:spPr>
-        <p:txBody>
-          <a:bodyPr wrap="square" anchor="ctr" lIns="0" rIns="0" tIns="0" bIns="0">
-            <a:spAutoFit/>
-          </a:bodyPr>
-          <a:lstStyle/>
-          <a:p>
-            <a:pPr algn="l">
-              <a:lnSpc>
-                <a:spcPct val="110000"/>
-              </a:lnSpc>
-            </a:pPr>
-            <a:r>
-              <a:rPr sz="1800" b="1">
-                <a:solidFill>
-                  <a:srgbClr val="1F5C99"/>
-                </a:solidFill>
-                <a:latin typeface="Arial"/>
-                <a:ea typeface="微软雅黑"/>
-              </a:rPr>
-              <a:t>架构创新与一致性创新都有可复现实验支撑，且实现了向后兼容的工程落地</a:t>
-            </a:r>
-          </a:p>
-        </p:txBody>
-      </p:sp>
-      <p:sp>
-        <p:nvSpPr>
-          <p:cNvPr id="6" name="Rounded Rectangle 5"/>
+          <p:cNvPr id="7" name="Rectangle 6"/>
           <p:cNvSpPr/>
           <p:nvPr/>
         </p:nvSpPr>
         <p:spPr>
           <a:xfrm>
-            <a:off x="566928" y="1874519"/>
-            <a:ext cx="3517391" cy="1051560"/>
-          </a:xfrm>
-          <a:prstGeom prst="roundRect">
+            <a:off x="36576" y="6748272"/>
+            <a:ext cx="12088368" cy="45720"/>
+          </a:xfrm>
+          <a:prstGeom prst="rect">
             <a:avLst/>
           </a:prstGeom>
           <a:solidFill>
-            <a:srgbClr val="F5F7FA"/>
+            <a:srgbClr val="0B2A4A"/>
           </a:solidFill>
-          <a:ln w="9525">
-            <a:solidFill>
-              <a:srgbClr val="D8DFE8"/>
-            </a:solidFill>
+          <a:ln>
+            <a:noFill/>
           </a:ln>
           <a:effectLst/>
         </p:spPr>
@@ -16745,58 +17080,14 @@
       </p:sp>
       <p:sp>
         <p:nvSpPr>
-          <p:cNvPr id="7" name="Rectangle 6"/>
-          <p:cNvSpPr/>
-          <p:nvPr/>
-        </p:nvSpPr>
-        <p:spPr>
-          <a:xfrm>
-            <a:off x="566928" y="1874519"/>
-            <a:ext cx="50292" cy="1051560"/>
-          </a:xfrm>
-          <a:prstGeom prst="rect">
-            <a:avLst/>
-          </a:prstGeom>
-          <a:solidFill>
-            <a:srgbClr val="1F5C99"/>
-          </a:solidFill>
-          <a:ln>
-            <a:noFill/>
-          </a:ln>
-          <a:effectLst/>
-        </p:spPr>
-        <p:style>
-          <a:lnRef idx="1">
-            <a:schemeClr val="accent1"/>
-          </a:lnRef>
-          <a:fillRef idx="3">
-            <a:schemeClr val="accent1"/>
-          </a:fillRef>
-          <a:effectRef idx="2">
-            <a:schemeClr val="accent1"/>
-          </a:effectRef>
-          <a:fontRef idx="minor">
-            <a:schemeClr val="lt1"/>
-          </a:fontRef>
-        </p:style>
-        <p:txBody>
-          <a:bodyPr rtlCol="0" anchor="ctr"/>
-          <a:lstStyle/>
-          <a:p>
-            <a:pPr algn="ctr"/>
-          </a:p>
-        </p:txBody>
-      </p:sp>
-      <p:sp>
-        <p:nvSpPr>
           <p:cNvPr id="8" name="TextBox 7"/>
           <p:cNvSpPr txBox="1"/>
           <p:nvPr/>
         </p:nvSpPr>
         <p:spPr>
           <a:xfrm>
-            <a:off x="731520" y="2002536"/>
-            <a:ext cx="3243072" cy="868680"/>
+            <a:off x="10780776" y="6345936"/>
+            <a:ext cx="850392" cy="219456"/>
           </a:xfrm>
           <a:prstGeom prst="rect">
             <a:avLst/>
@@ -16809,802 +17100,16 @@
           </a:bodyPr>
           <a:lstStyle/>
           <a:p>
-            <a:pPr algn="l"/>
-            <a:r>
-              <a:rPr sz="1400" b="1">
-                <a:solidFill>
-                  <a:srgbClr val="0B2A4A"/>
+            <a:pPr algn="r"/>
+            <a:r>
+              <a:rPr sz="950" b="0">
+                <a:solidFill>
+                  <a:srgbClr val="566474"/>
                 </a:solidFill>
                 <a:latin typeface="Arial"/>
                 <a:ea typeface="微软雅黑"/>
               </a:rPr>
-              <a:t>创新 1 · ENO</a:t>
-            </a:r>
-          </a:p>
-          <a:p>
-            <a:pPr algn="l">
-              <a:lnSpc>
-                <a:spcPct val="110000"/>
-              </a:lnSpc>
-              <a:spcBef>
-                <a:spcPts val="400"/>
-              </a:spcBef>
-            </a:pPr>
-            <a:r>
-              <a:rPr sz="1150" b="0">
-                <a:solidFill>
-                  <a:srgbClr val="333333"/>
-                </a:solidFill>
-                <a:latin typeface="Arial"/>
-                <a:ea typeface="微软雅黑"/>
-              </a:rPr>
-              <a:t>Binder 进进程内 + CacheAdapter</a:t>
-            </a:r>
-          </a:p>
-        </p:txBody>
-      </p:sp>
-      <p:sp>
-        <p:nvSpPr>
-          <p:cNvPr id="9" name="Rounded Rectangle 8"/>
-          <p:cNvSpPr/>
-          <p:nvPr/>
-        </p:nvSpPr>
-        <p:spPr>
-          <a:xfrm>
-            <a:off x="4340351" y="1874519"/>
-            <a:ext cx="3517391" cy="1051560"/>
-          </a:xfrm>
-          <a:prstGeom prst="roundRect">
-            <a:avLst/>
-          </a:prstGeom>
-          <a:solidFill>
-            <a:srgbClr val="F5F7FA"/>
-          </a:solidFill>
-          <a:ln w="9525">
-            <a:solidFill>
-              <a:srgbClr val="D8DFE8"/>
-            </a:solidFill>
-          </a:ln>
-          <a:effectLst/>
-        </p:spPr>
-        <p:style>
-          <a:lnRef idx="1">
-            <a:schemeClr val="accent1"/>
-          </a:lnRef>
-          <a:fillRef idx="3">
-            <a:schemeClr val="accent1"/>
-          </a:fillRef>
-          <a:effectRef idx="2">
-            <a:schemeClr val="accent1"/>
-          </a:effectRef>
-          <a:fontRef idx="minor">
-            <a:schemeClr val="lt1"/>
-          </a:fontRef>
-        </p:style>
-        <p:txBody>
-          <a:bodyPr rtlCol="0" anchor="ctr"/>
-          <a:lstStyle/>
-          <a:p>
-            <a:pPr algn="ctr"/>
-          </a:p>
-        </p:txBody>
-      </p:sp>
-      <p:sp>
-        <p:nvSpPr>
-          <p:cNvPr id="10" name="Rectangle 9"/>
-          <p:cNvSpPr/>
-          <p:nvPr/>
-        </p:nvSpPr>
-        <p:spPr>
-          <a:xfrm>
-            <a:off x="4340351" y="1874519"/>
-            <a:ext cx="50292" cy="1051560"/>
-          </a:xfrm>
-          <a:prstGeom prst="rect">
-            <a:avLst/>
-          </a:prstGeom>
-          <a:solidFill>
-            <a:srgbClr val="1F5C99"/>
-          </a:solidFill>
-          <a:ln>
-            <a:noFill/>
-          </a:ln>
-          <a:effectLst/>
-        </p:spPr>
-        <p:style>
-          <a:lnRef idx="1">
-            <a:schemeClr val="accent1"/>
-          </a:lnRef>
-          <a:fillRef idx="3">
-            <a:schemeClr val="accent1"/>
-          </a:fillRef>
-          <a:effectRef idx="2">
-            <a:schemeClr val="accent1"/>
-          </a:effectRef>
-          <a:fontRef idx="minor">
-            <a:schemeClr val="lt1"/>
-          </a:fontRef>
-        </p:style>
-        <p:txBody>
-          <a:bodyPr rtlCol="0" anchor="ctr"/>
-          <a:lstStyle/>
-          <a:p>
-            <a:pPr algn="ctr"/>
-          </a:p>
-        </p:txBody>
-      </p:sp>
-      <p:sp>
-        <p:nvSpPr>
-          <p:cNvPr id="11" name="TextBox 10"/>
-          <p:cNvSpPr txBox="1"/>
-          <p:nvPr/>
-        </p:nvSpPr>
-        <p:spPr>
-          <a:xfrm>
-            <a:off x="4504943" y="2002536"/>
-            <a:ext cx="3243072" cy="868680"/>
-          </a:xfrm>
-          <a:prstGeom prst="rect">
-            <a:avLst/>
-          </a:prstGeom>
-          <a:noFill/>
-        </p:spPr>
-        <p:txBody>
-          <a:bodyPr wrap="square" anchor="t" lIns="0" rIns="0" tIns="0" bIns="0">
-            <a:spAutoFit/>
-          </a:bodyPr>
-          <a:lstStyle/>
-          <a:p>
-            <a:pPr algn="l"/>
-            <a:r>
-              <a:rPr sz="1400" b="1">
-                <a:solidFill>
-                  <a:srgbClr val="0B2A4A"/>
-                </a:solidFill>
-                <a:latin typeface="Arial"/>
-                <a:ea typeface="微软雅黑"/>
-              </a:rPr>
-              <a:t>创新 2 · 四层容错</a:t>
-            </a:r>
-          </a:p>
-          <a:p>
-            <a:pPr algn="l">
-              <a:lnSpc>
-                <a:spcPct val="110000"/>
-              </a:lnSpc>
-              <a:spcBef>
-                <a:spcPts val="400"/>
-              </a:spcBef>
-            </a:pPr>
-            <a:r>
-              <a:rPr sz="1150" b="0">
-                <a:solidFill>
-                  <a:srgbClr val="333333"/>
-                </a:solidFill>
-                <a:latin typeface="Arial"/>
-                <a:ea typeface="微软雅黑"/>
-              </a:rPr>
-              <a:t>不变量 I 的完整证明要点</a:t>
-            </a:r>
-          </a:p>
-        </p:txBody>
-      </p:sp>
-      <p:sp>
-        <p:nvSpPr>
-          <p:cNvPr id="12" name="Rounded Rectangle 11"/>
-          <p:cNvSpPr/>
-          <p:nvPr/>
-        </p:nvSpPr>
-        <p:spPr>
-          <a:xfrm>
-            <a:off x="8113775" y="1874519"/>
-            <a:ext cx="3517391" cy="1051560"/>
-          </a:xfrm>
-          <a:prstGeom prst="roundRect">
-            <a:avLst/>
-          </a:prstGeom>
-          <a:solidFill>
-            <a:srgbClr val="F5F7FA"/>
-          </a:solidFill>
-          <a:ln w="9525">
-            <a:solidFill>
-              <a:srgbClr val="D8DFE8"/>
-            </a:solidFill>
-          </a:ln>
-          <a:effectLst/>
-        </p:spPr>
-        <p:style>
-          <a:lnRef idx="1">
-            <a:schemeClr val="accent1"/>
-          </a:lnRef>
-          <a:fillRef idx="3">
-            <a:schemeClr val="accent1"/>
-          </a:fillRef>
-          <a:effectRef idx="2">
-            <a:schemeClr val="accent1"/>
-          </a:effectRef>
-          <a:fontRef idx="minor">
-            <a:schemeClr val="lt1"/>
-          </a:fontRef>
-        </p:style>
-        <p:txBody>
-          <a:bodyPr rtlCol="0" anchor="ctr"/>
-          <a:lstStyle/>
-          <a:p>
-            <a:pPr algn="ctr"/>
-          </a:p>
-        </p:txBody>
-      </p:sp>
-      <p:sp>
-        <p:nvSpPr>
-          <p:cNvPr id="13" name="Rectangle 12"/>
-          <p:cNvSpPr/>
-          <p:nvPr/>
-        </p:nvSpPr>
-        <p:spPr>
-          <a:xfrm>
-            <a:off x="8113775" y="1874519"/>
-            <a:ext cx="50292" cy="1051560"/>
-          </a:xfrm>
-          <a:prstGeom prst="rect">
-            <a:avLst/>
-          </a:prstGeom>
-          <a:solidFill>
-            <a:srgbClr val="1F5C99"/>
-          </a:solidFill>
-          <a:ln>
-            <a:noFill/>
-          </a:ln>
-          <a:effectLst/>
-        </p:spPr>
-        <p:style>
-          <a:lnRef idx="1">
-            <a:schemeClr val="accent1"/>
-          </a:lnRef>
-          <a:fillRef idx="3">
-            <a:schemeClr val="accent1"/>
-          </a:fillRef>
-          <a:effectRef idx="2">
-            <a:schemeClr val="accent1"/>
-          </a:effectRef>
-          <a:fontRef idx="minor">
-            <a:schemeClr val="lt1"/>
-          </a:fontRef>
-        </p:style>
-        <p:txBody>
-          <a:bodyPr rtlCol="0" anchor="ctr"/>
-          <a:lstStyle/>
-          <a:p>
-            <a:pPr algn="ctr"/>
-          </a:p>
-        </p:txBody>
-      </p:sp>
-      <p:sp>
-        <p:nvSpPr>
-          <p:cNvPr id="14" name="TextBox 13"/>
-          <p:cNvSpPr txBox="1"/>
-          <p:nvPr/>
-        </p:nvSpPr>
-        <p:spPr>
-          <a:xfrm>
-            <a:off x="8278367" y="2002536"/>
-            <a:ext cx="3243072" cy="868680"/>
-          </a:xfrm>
-          <a:prstGeom prst="rect">
-            <a:avLst/>
-          </a:prstGeom>
-          <a:noFill/>
-        </p:spPr>
-        <p:txBody>
-          <a:bodyPr wrap="square" anchor="t" lIns="0" rIns="0" tIns="0" bIns="0">
-            <a:spAutoFit/>
-          </a:bodyPr>
-          <a:lstStyle/>
-          <a:p>
-            <a:pPr algn="l"/>
-            <a:r>
-              <a:rPr sz="1400" b="1">
-                <a:solidFill>
-                  <a:srgbClr val="0B2A4A"/>
-                </a:solidFill>
-                <a:latin typeface="Arial"/>
-                <a:ea typeface="微软雅黑"/>
-              </a:rPr>
-              <a:t>证据 1 · 规模</a:t>
-            </a:r>
-          </a:p>
-          <a:p>
-            <a:pPr algn="l">
-              <a:lnSpc>
-                <a:spcPct val="110000"/>
-              </a:lnSpc>
-              <a:spcBef>
-                <a:spcPts val="400"/>
-              </a:spcBef>
-            </a:pPr>
-            <a:r>
-              <a:rPr sz="1150" b="0">
-                <a:solidFill>
-                  <a:srgbClr val="333333"/>
-                </a:solidFill>
-                <a:latin typeface="Arial"/>
-                <a:ea typeface="微软雅黑"/>
-              </a:rPr>
-              <a:t>16 场景 / 144 run / 100% 成功率</a:t>
-            </a:r>
-          </a:p>
-        </p:txBody>
-      </p:sp>
-      <p:sp>
-        <p:nvSpPr>
-          <p:cNvPr id="15" name="Rounded Rectangle 14"/>
-          <p:cNvSpPr/>
-          <p:nvPr/>
-        </p:nvSpPr>
-        <p:spPr>
-          <a:xfrm>
-            <a:off x="566928" y="3182111"/>
-            <a:ext cx="3517391" cy="1051560"/>
-          </a:xfrm>
-          <a:prstGeom prst="roundRect">
-            <a:avLst/>
-          </a:prstGeom>
-          <a:solidFill>
-            <a:srgbClr val="F5F7FA"/>
-          </a:solidFill>
-          <a:ln w="9525">
-            <a:solidFill>
-              <a:srgbClr val="D8DFE8"/>
-            </a:solidFill>
-          </a:ln>
-          <a:effectLst/>
-        </p:spPr>
-        <p:style>
-          <a:lnRef idx="1">
-            <a:schemeClr val="accent1"/>
-          </a:lnRef>
-          <a:fillRef idx="3">
-            <a:schemeClr val="accent1"/>
-          </a:fillRef>
-          <a:effectRef idx="2">
-            <a:schemeClr val="accent1"/>
-          </a:effectRef>
-          <a:fontRef idx="minor">
-            <a:schemeClr val="lt1"/>
-          </a:fontRef>
-        </p:style>
-        <p:txBody>
-          <a:bodyPr rtlCol="0" anchor="ctr"/>
-          <a:lstStyle/>
-          <a:p>
-            <a:pPr algn="ctr"/>
-          </a:p>
-        </p:txBody>
-      </p:sp>
-      <p:sp>
-        <p:nvSpPr>
-          <p:cNvPr id="16" name="Rectangle 15"/>
-          <p:cNvSpPr/>
-          <p:nvPr/>
-        </p:nvSpPr>
-        <p:spPr>
-          <a:xfrm>
-            <a:off x="566928" y="3182111"/>
-            <a:ext cx="50292" cy="1051560"/>
-          </a:xfrm>
-          <a:prstGeom prst="rect">
-            <a:avLst/>
-          </a:prstGeom>
-          <a:solidFill>
-            <a:srgbClr val="1F5C99"/>
-          </a:solidFill>
-          <a:ln>
-            <a:noFill/>
-          </a:ln>
-          <a:effectLst/>
-        </p:spPr>
-        <p:style>
-          <a:lnRef idx="1">
-            <a:schemeClr val="accent1"/>
-          </a:lnRef>
-          <a:fillRef idx="3">
-            <a:schemeClr val="accent1"/>
-          </a:fillRef>
-          <a:effectRef idx="2">
-            <a:schemeClr val="accent1"/>
-          </a:effectRef>
-          <a:fontRef idx="minor">
-            <a:schemeClr val="lt1"/>
-          </a:fontRef>
-        </p:style>
-        <p:txBody>
-          <a:bodyPr rtlCol="0" anchor="ctr"/>
-          <a:lstStyle/>
-          <a:p>
-            <a:pPr algn="ctr"/>
-          </a:p>
-        </p:txBody>
-      </p:sp>
-      <p:sp>
-        <p:nvSpPr>
-          <p:cNvPr id="17" name="TextBox 16"/>
-          <p:cNvSpPr txBox="1"/>
-          <p:nvPr/>
-        </p:nvSpPr>
-        <p:spPr>
-          <a:xfrm>
-            <a:off x="731520" y="3310127"/>
-            <a:ext cx="3243072" cy="868680"/>
-          </a:xfrm>
-          <a:prstGeom prst="rect">
-            <a:avLst/>
-          </a:prstGeom>
-          <a:noFill/>
-        </p:spPr>
-        <p:txBody>
-          <a:bodyPr wrap="square" anchor="t" lIns="0" rIns="0" tIns="0" bIns="0">
-            <a:spAutoFit/>
-          </a:bodyPr>
-          <a:lstStyle/>
-          <a:p>
-            <a:pPr algn="l"/>
-            <a:r>
-              <a:rPr sz="1400" b="1">
-                <a:solidFill>
-                  <a:srgbClr val="0B2A4A"/>
-                </a:solidFill>
-                <a:latin typeface="Arial"/>
-                <a:ea typeface="微软雅黑"/>
-              </a:rPr>
-              <a:t>证据 2 · 性能</a:t>
-            </a:r>
-          </a:p>
-          <a:p>
-            <a:pPr algn="l">
-              <a:lnSpc>
-                <a:spcPct val="110000"/>
-              </a:lnSpc>
-              <a:spcBef>
-                <a:spcPts val="400"/>
-              </a:spcBef>
-            </a:pPr>
-            <a:r>
-              <a:rPr sz="1150" b="0">
-                <a:solidFill>
-                  <a:srgbClr val="333333"/>
-                </a:solidFill>
-                <a:latin typeface="Arial"/>
-                <a:ea typeface="微软雅黑"/>
-              </a:rPr>
-              <a:t>平均 +11.9%；P99 最高 -82.9%</a:t>
-            </a:r>
-          </a:p>
-        </p:txBody>
-      </p:sp>
-      <p:sp>
-        <p:nvSpPr>
-          <p:cNvPr id="18" name="Rounded Rectangle 17"/>
-          <p:cNvSpPr/>
-          <p:nvPr/>
-        </p:nvSpPr>
-        <p:spPr>
-          <a:xfrm>
-            <a:off x="4340351" y="3182111"/>
-            <a:ext cx="3517391" cy="1051560"/>
-          </a:xfrm>
-          <a:prstGeom prst="roundRect">
-            <a:avLst/>
-          </a:prstGeom>
-          <a:solidFill>
-            <a:srgbClr val="F5F7FA"/>
-          </a:solidFill>
-          <a:ln w="9525">
-            <a:solidFill>
-              <a:srgbClr val="D8DFE8"/>
-            </a:solidFill>
-          </a:ln>
-          <a:effectLst/>
-        </p:spPr>
-        <p:style>
-          <a:lnRef idx="1">
-            <a:schemeClr val="accent1"/>
-          </a:lnRef>
-          <a:fillRef idx="3">
-            <a:schemeClr val="accent1"/>
-          </a:fillRef>
-          <a:effectRef idx="2">
-            <a:schemeClr val="accent1"/>
-          </a:effectRef>
-          <a:fontRef idx="minor">
-            <a:schemeClr val="lt1"/>
-          </a:fontRef>
-        </p:style>
-        <p:txBody>
-          <a:bodyPr rtlCol="0" anchor="ctr"/>
-          <a:lstStyle/>
-          <a:p>
-            <a:pPr algn="ctr"/>
-          </a:p>
-        </p:txBody>
-      </p:sp>
-      <p:sp>
-        <p:nvSpPr>
-          <p:cNvPr id="19" name="Rectangle 18"/>
-          <p:cNvSpPr/>
-          <p:nvPr/>
-        </p:nvSpPr>
-        <p:spPr>
-          <a:xfrm>
-            <a:off x="4340351" y="3182111"/>
-            <a:ext cx="50292" cy="1051560"/>
-          </a:xfrm>
-          <a:prstGeom prst="rect">
-            <a:avLst/>
-          </a:prstGeom>
-          <a:solidFill>
-            <a:srgbClr val="1F5C99"/>
-          </a:solidFill>
-          <a:ln>
-            <a:noFill/>
-          </a:ln>
-          <a:effectLst/>
-        </p:spPr>
-        <p:style>
-          <a:lnRef idx="1">
-            <a:schemeClr val="accent1"/>
-          </a:lnRef>
-          <a:fillRef idx="3">
-            <a:schemeClr val="accent1"/>
-          </a:fillRef>
-          <a:effectRef idx="2">
-            <a:schemeClr val="accent1"/>
-          </a:effectRef>
-          <a:fontRef idx="minor">
-            <a:schemeClr val="lt1"/>
-          </a:fontRef>
-        </p:style>
-        <p:txBody>
-          <a:bodyPr rtlCol="0" anchor="ctr"/>
-          <a:lstStyle/>
-          <a:p>
-            <a:pPr algn="ctr"/>
-          </a:p>
-        </p:txBody>
-      </p:sp>
-      <p:sp>
-        <p:nvSpPr>
-          <p:cNvPr id="20" name="TextBox 19"/>
-          <p:cNvSpPr txBox="1"/>
-          <p:nvPr/>
-        </p:nvSpPr>
-        <p:spPr>
-          <a:xfrm>
-            <a:off x="4504943" y="3310127"/>
-            <a:ext cx="3243072" cy="868680"/>
-          </a:xfrm>
-          <a:prstGeom prst="rect">
-            <a:avLst/>
-          </a:prstGeom>
-          <a:noFill/>
-        </p:spPr>
-        <p:txBody>
-          <a:bodyPr wrap="square" anchor="t" lIns="0" rIns="0" tIns="0" bIns="0">
-            <a:spAutoFit/>
-          </a:bodyPr>
-          <a:lstStyle/>
-          <a:p>
-            <a:pPr algn="l"/>
-            <a:r>
-              <a:rPr sz="1400" b="1">
-                <a:solidFill>
-                  <a:srgbClr val="0B2A4A"/>
-                </a:solidFill>
-                <a:latin typeface="Arial"/>
-                <a:ea typeface="微软雅黑"/>
-              </a:rPr>
-              <a:t>证据 3 · 扩展</a:t>
-            </a:r>
-          </a:p>
-          <a:p>
-            <a:pPr algn="l">
-              <a:lnSpc>
-                <a:spcPct val="110000"/>
-              </a:lnSpc>
-              <a:spcBef>
-                <a:spcPts val="400"/>
-              </a:spcBef>
-            </a:pPr>
-            <a:r>
-              <a:rPr sz="1150" b="0">
-                <a:solidFill>
-                  <a:srgbClr val="333333"/>
-                </a:solidFill>
-                <a:latin typeface="Arial"/>
-                <a:ea typeface="微软雅黑"/>
-              </a:rPr>
-              <a:t>实例 1→3：+17.5% 对 +1.4%</a:t>
-            </a:r>
-          </a:p>
-        </p:txBody>
-      </p:sp>
-      <p:sp>
-        <p:nvSpPr>
-          <p:cNvPr id="21" name="Rounded Rectangle 20"/>
-          <p:cNvSpPr/>
-          <p:nvPr/>
-        </p:nvSpPr>
-        <p:spPr>
-          <a:xfrm>
-            <a:off x="8113775" y="3182111"/>
-            <a:ext cx="3517391" cy="1051560"/>
-          </a:xfrm>
-          <a:prstGeom prst="roundRect">
-            <a:avLst/>
-          </a:prstGeom>
-          <a:solidFill>
-            <a:srgbClr val="F5F7FA"/>
-          </a:solidFill>
-          <a:ln w="9525">
-            <a:solidFill>
-              <a:srgbClr val="D8DFE8"/>
-            </a:solidFill>
-          </a:ln>
-          <a:effectLst/>
-        </p:spPr>
-        <p:style>
-          <a:lnRef idx="1">
-            <a:schemeClr val="accent1"/>
-          </a:lnRef>
-          <a:fillRef idx="3">
-            <a:schemeClr val="accent1"/>
-          </a:fillRef>
-          <a:effectRef idx="2">
-            <a:schemeClr val="accent1"/>
-          </a:effectRef>
-          <a:fontRef idx="minor">
-            <a:schemeClr val="lt1"/>
-          </a:fontRef>
-        </p:style>
-        <p:txBody>
-          <a:bodyPr rtlCol="0" anchor="ctr"/>
-          <a:lstStyle/>
-          <a:p>
-            <a:pPr algn="ctr"/>
-          </a:p>
-        </p:txBody>
-      </p:sp>
-      <p:sp>
-        <p:nvSpPr>
-          <p:cNvPr id="22" name="Rectangle 21"/>
-          <p:cNvSpPr/>
-          <p:nvPr/>
-        </p:nvSpPr>
-        <p:spPr>
-          <a:xfrm>
-            <a:off x="8113775" y="3182111"/>
-            <a:ext cx="50292" cy="1051560"/>
-          </a:xfrm>
-          <a:prstGeom prst="rect">
-            <a:avLst/>
-          </a:prstGeom>
-          <a:solidFill>
-            <a:srgbClr val="1F5C99"/>
-          </a:solidFill>
-          <a:ln>
-            <a:noFill/>
-          </a:ln>
-          <a:effectLst/>
-        </p:spPr>
-        <p:style>
-          <a:lnRef idx="1">
-            <a:schemeClr val="accent1"/>
-          </a:lnRef>
-          <a:fillRef idx="3">
-            <a:schemeClr val="accent1"/>
-          </a:fillRef>
-          <a:effectRef idx="2">
-            <a:schemeClr val="accent1"/>
-          </a:effectRef>
-          <a:fontRef idx="minor">
-            <a:schemeClr val="lt1"/>
-          </a:fontRef>
-        </p:style>
-        <p:txBody>
-          <a:bodyPr rtlCol="0" anchor="ctr"/>
-          <a:lstStyle/>
-          <a:p>
-            <a:pPr algn="ctr"/>
-          </a:p>
-        </p:txBody>
-      </p:sp>
-      <p:sp>
-        <p:nvSpPr>
-          <p:cNvPr id="23" name="TextBox 22"/>
-          <p:cNvSpPr txBox="1"/>
-          <p:nvPr/>
-        </p:nvSpPr>
-        <p:spPr>
-          <a:xfrm>
-            <a:off x="8278367" y="3310127"/>
-            <a:ext cx="3243072" cy="868680"/>
-          </a:xfrm>
-          <a:prstGeom prst="rect">
-            <a:avLst/>
-          </a:prstGeom>
-          <a:noFill/>
-        </p:spPr>
-        <p:txBody>
-          <a:bodyPr wrap="square" anchor="t" lIns="0" rIns="0" tIns="0" bIns="0">
-            <a:spAutoFit/>
-          </a:bodyPr>
-          <a:lstStyle/>
-          <a:p>
-            <a:pPr algn="l"/>
-            <a:r>
-              <a:rPr sz="1400" b="1">
-                <a:solidFill>
-                  <a:srgbClr val="0B2A4A"/>
-                </a:solidFill>
-                <a:latin typeface="Arial"/>
-                <a:ea typeface="微软雅黑"/>
-              </a:rPr>
-              <a:t>价值 · 落地</a:t>
-            </a:r>
-          </a:p>
-          <a:p>
-            <a:pPr algn="l">
-              <a:lnSpc>
-                <a:spcPct val="110000"/>
-              </a:lnSpc>
-              <a:spcBef>
-                <a:spcPts val="400"/>
-              </a:spcBef>
-            </a:pPr>
-            <a:r>
-              <a:rPr sz="1150" b="0">
-                <a:solidFill>
-                  <a:srgbClr val="333333"/>
-                </a:solidFill>
-                <a:latin typeface="Arial"/>
-                <a:ea typeface="微软雅黑"/>
-              </a:rPr>
-              <a:t>不改 API、可平滑替换、基准开源</a:t>
-            </a:r>
-          </a:p>
-        </p:txBody>
-      </p:sp>
-      <p:sp>
-        <p:nvSpPr>
-          <p:cNvPr id="24" name="TextBox 23"/>
-          <p:cNvSpPr txBox="1"/>
-          <p:nvPr/>
-        </p:nvSpPr>
-        <p:spPr>
-          <a:xfrm>
-            <a:off x="10780776" y="6345936"/>
-            <a:ext cx="850392" cy="219456"/>
-          </a:xfrm>
-          <a:prstGeom prst="rect">
-            <a:avLst/>
-          </a:prstGeom>
-          <a:noFill/>
-        </p:spPr>
-        <p:txBody>
-          <a:bodyPr wrap="square" anchor="t" lIns="0" rIns="0" tIns="0" bIns="0">
-            <a:spAutoFit/>
-          </a:bodyPr>
-          <a:lstStyle/>
-          <a:p>
-            <a:pPr algn="r"/>
-            <a:r>
-              <a:rPr sz="950" b="0">
-                <a:solidFill>
-                  <a:srgbClr val="566474"/>
-                </a:solidFill>
-                <a:latin typeface="Arial"/>
-                <a:ea typeface="微软雅黑"/>
-              </a:rPr>
-              <a:t>24 / 25</a:t>
+              <a:t>24 / 24</a:t>
             </a:r>
           </a:p>
         </p:txBody>
@@ -17618,325 +17123,6 @@
 </file>
 
 <file path=ppt/slides/slide25.xml><?xml version="1.0" encoding="utf-8"?>
-<p:sld xmlns:a="http://schemas.openxmlformats.org/drawingml/2006/main" xmlns:p="http://schemas.openxmlformats.org/presentationml/2006/main" xmlns:r="http://schemas.openxmlformats.org/officeDocument/2006/relationships">
-  <p:cSld>
-    <p:bg>
-      <p:bgPr>
-        <a:solidFill>
-          <a:srgbClr val="FFFFFF"/>
-        </a:solidFill>
-        <a:effectLst/>
-      </p:bgPr>
-    </p:bg>
-    <p:spTree>
-      <p:nvGrpSpPr>
-        <p:cNvPr id="1" name=""/>
-        <p:cNvGrpSpPr/>
-        <p:nvPr/>
-      </p:nvGrpSpPr>
-      <p:grpSpPr/>
-      <p:sp>
-        <p:nvSpPr>
-          <p:cNvPr id="2" name="Rectangle 1"/>
-          <p:cNvSpPr/>
-          <p:nvPr/>
-        </p:nvSpPr>
-        <p:spPr>
-          <a:xfrm>
-            <a:off x="1197864" y="2212848"/>
-            <a:ext cx="9866376" cy="20116"/>
-          </a:xfrm>
-          <a:prstGeom prst="rect">
-            <a:avLst/>
-          </a:prstGeom>
-          <a:solidFill>
-            <a:srgbClr val="0B2A4A"/>
-          </a:solidFill>
-          <a:ln>
-            <a:noFill/>
-          </a:ln>
-          <a:effectLst/>
-        </p:spPr>
-        <p:style>
-          <a:lnRef idx="1">
-            <a:schemeClr val="accent1"/>
-          </a:lnRef>
-          <a:fillRef idx="3">
-            <a:schemeClr val="accent1"/>
-          </a:fillRef>
-          <a:effectRef idx="2">
-            <a:schemeClr val="accent1"/>
-          </a:effectRef>
-          <a:fontRef idx="minor">
-            <a:schemeClr val="lt1"/>
-          </a:fontRef>
-        </p:style>
-        <p:txBody>
-          <a:bodyPr rtlCol="0" anchor="ctr"/>
-          <a:lstStyle/>
-          <a:p>
-            <a:pPr algn="ctr"/>
-          </a:p>
-        </p:txBody>
-      </p:sp>
-      <p:sp>
-        <p:nvSpPr>
-          <p:cNvPr id="3" name="TextBox 2"/>
-          <p:cNvSpPr txBox="1"/>
-          <p:nvPr/>
-        </p:nvSpPr>
-        <p:spPr>
-          <a:xfrm>
-            <a:off x="914400" y="2395728"/>
-            <a:ext cx="10332720" cy="914400"/>
-          </a:xfrm>
-          <a:prstGeom prst="rect">
-            <a:avLst/>
-          </a:prstGeom>
-          <a:noFill/>
-        </p:spPr>
-        <p:txBody>
-          <a:bodyPr wrap="square" anchor="ctr" lIns="0" rIns="0" tIns="0" bIns="0">
-            <a:spAutoFit/>
-          </a:bodyPr>
-          <a:lstStyle/>
-          <a:p>
-            <a:pPr algn="ctr"/>
-            <a:r>
-              <a:rPr sz="3400" b="1">
-                <a:solidFill>
-                  <a:srgbClr val="0B2A4A"/>
-                </a:solidFill>
-                <a:latin typeface="Arial"/>
-                <a:ea typeface="微软雅黑"/>
-              </a:rPr>
-              <a:t>谢谢各位老师，请批评指正</a:t>
-            </a:r>
-          </a:p>
-        </p:txBody>
-      </p:sp>
-      <p:sp>
-        <p:nvSpPr>
-          <p:cNvPr id="4" name="TextBox 3"/>
-          <p:cNvSpPr txBox="1"/>
-          <p:nvPr/>
-        </p:nvSpPr>
-        <p:spPr>
-          <a:xfrm>
-            <a:off x="914400" y="3429000"/>
-            <a:ext cx="10332720" cy="457200"/>
-          </a:xfrm>
-          <a:prstGeom prst="rect">
-            <a:avLst/>
-          </a:prstGeom>
-          <a:noFill/>
-        </p:spPr>
-        <p:txBody>
-          <a:bodyPr wrap="square" anchor="t" lIns="0" rIns="0" tIns="0" bIns="0">
-            <a:spAutoFit/>
-          </a:bodyPr>
-          <a:lstStyle/>
-          <a:p>
-            <a:pPr algn="ctr"/>
-            <a:r>
-              <a:rPr sz="1600" b="0">
-                <a:solidFill>
-                  <a:srgbClr val="566474"/>
-                </a:solidFill>
-                <a:latin typeface="Arial"/>
-                <a:ea typeface="微软雅黑"/>
-              </a:rPr>
-              <a:t>基于 etcd 的分布式 Kubernetes 调度器研究与实现</a:t>
-            </a:r>
-          </a:p>
-        </p:txBody>
-      </p:sp>
-      <p:sp>
-        <p:nvSpPr>
-          <p:cNvPr id="5" name="TextBox 4"/>
-          <p:cNvSpPr txBox="1"/>
-          <p:nvPr/>
-        </p:nvSpPr>
-        <p:spPr>
-          <a:xfrm>
-            <a:off x="914400" y="4343400"/>
-            <a:ext cx="10332720" cy="731520"/>
-          </a:xfrm>
-          <a:prstGeom prst="rect">
-            <a:avLst/>
-          </a:prstGeom>
-          <a:noFill/>
-        </p:spPr>
-        <p:txBody>
-          <a:bodyPr wrap="square" anchor="t" lIns="0" rIns="0" tIns="0" bIns="0">
-            <a:spAutoFit/>
-          </a:bodyPr>
-          <a:lstStyle/>
-          <a:p>
-            <a:pPr algn="ctr"/>
-            <a:r>
-              <a:rPr sz="1300" b="0">
-                <a:solidFill>
-                  <a:srgbClr val="566474"/>
-                </a:solidFill>
-                <a:latin typeface="Arial"/>
-                <a:ea typeface="微软雅黑"/>
-              </a:rPr>
-              <a:t>答辩人：[姓名]</a:t>
-            </a:r>
-          </a:p>
-          <a:p>
-            <a:pPr algn="ctr">
-              <a:spcBef>
-                <a:spcPts val="400"/>
-              </a:spcBef>
-            </a:pPr>
-            <a:r>
-              <a:rPr sz="1300" b="0">
-                <a:solidFill>
-                  <a:srgbClr val="566474"/>
-                </a:solidFill>
-                <a:latin typeface="Arial"/>
-                <a:ea typeface="微软雅黑"/>
-              </a:rPr>
-              <a:t>联系方式：[邮箱]</a:t>
-            </a:r>
-          </a:p>
-        </p:txBody>
-      </p:sp>
-      <p:sp>
-        <p:nvSpPr>
-          <p:cNvPr id="6" name="Rectangle 5"/>
-          <p:cNvSpPr/>
-          <p:nvPr/>
-        </p:nvSpPr>
-        <p:spPr>
-          <a:xfrm>
-            <a:off x="1197864" y="5074920"/>
-            <a:ext cx="9866376" cy="20116"/>
-          </a:xfrm>
-          <a:prstGeom prst="rect">
-            <a:avLst/>
-          </a:prstGeom>
-          <a:solidFill>
-            <a:srgbClr val="0B2A4A"/>
-          </a:solidFill>
-          <a:ln>
-            <a:noFill/>
-          </a:ln>
-          <a:effectLst/>
-        </p:spPr>
-        <p:style>
-          <a:lnRef idx="1">
-            <a:schemeClr val="accent1"/>
-          </a:lnRef>
-          <a:fillRef idx="3">
-            <a:schemeClr val="accent1"/>
-          </a:fillRef>
-          <a:effectRef idx="2">
-            <a:schemeClr val="accent1"/>
-          </a:effectRef>
-          <a:fontRef idx="minor">
-            <a:schemeClr val="lt1"/>
-          </a:fontRef>
-        </p:style>
-        <p:txBody>
-          <a:bodyPr rtlCol="0" anchor="ctr"/>
-          <a:lstStyle/>
-          <a:p>
-            <a:pPr algn="ctr"/>
-          </a:p>
-        </p:txBody>
-      </p:sp>
-      <p:sp>
-        <p:nvSpPr>
-          <p:cNvPr id="7" name="Rectangle 6"/>
-          <p:cNvSpPr/>
-          <p:nvPr/>
-        </p:nvSpPr>
-        <p:spPr>
-          <a:xfrm>
-            <a:off x="36576" y="6748272"/>
-            <a:ext cx="12088368" cy="45720"/>
-          </a:xfrm>
-          <a:prstGeom prst="rect">
-            <a:avLst/>
-          </a:prstGeom>
-          <a:solidFill>
-            <a:srgbClr val="0B2A4A"/>
-          </a:solidFill>
-          <a:ln>
-            <a:noFill/>
-          </a:ln>
-          <a:effectLst/>
-        </p:spPr>
-        <p:style>
-          <a:lnRef idx="1">
-            <a:schemeClr val="accent1"/>
-          </a:lnRef>
-          <a:fillRef idx="3">
-            <a:schemeClr val="accent1"/>
-          </a:fillRef>
-          <a:effectRef idx="2">
-            <a:schemeClr val="accent1"/>
-          </a:effectRef>
-          <a:fontRef idx="minor">
-            <a:schemeClr val="lt1"/>
-          </a:fontRef>
-        </p:style>
-        <p:txBody>
-          <a:bodyPr rtlCol="0" anchor="ctr"/>
-          <a:lstStyle/>
-          <a:p>
-            <a:pPr algn="ctr"/>
-          </a:p>
-        </p:txBody>
-      </p:sp>
-      <p:sp>
-        <p:nvSpPr>
-          <p:cNvPr id="8" name="TextBox 7"/>
-          <p:cNvSpPr txBox="1"/>
-          <p:nvPr/>
-        </p:nvSpPr>
-        <p:spPr>
-          <a:xfrm>
-            <a:off x="10780776" y="6345936"/>
-            <a:ext cx="850392" cy="219456"/>
-          </a:xfrm>
-          <a:prstGeom prst="rect">
-            <a:avLst/>
-          </a:prstGeom>
-          <a:noFill/>
-        </p:spPr>
-        <p:txBody>
-          <a:bodyPr wrap="square" anchor="t" lIns="0" rIns="0" tIns="0" bIns="0">
-            <a:spAutoFit/>
-          </a:bodyPr>
-          <a:lstStyle/>
-          <a:p>
-            <a:pPr algn="r"/>
-            <a:r>
-              <a:rPr sz="950" b="0">
-                <a:solidFill>
-                  <a:srgbClr val="566474"/>
-                </a:solidFill>
-                <a:latin typeface="Arial"/>
-                <a:ea typeface="微软雅黑"/>
-              </a:rPr>
-              <a:t>25 / 25</a:t>
-            </a:r>
-          </a:p>
-        </p:txBody>
-      </p:sp>
-    </p:spTree>
-  </p:cSld>
-  <p:clrMapOvr>
-    <a:masterClrMapping/>
-  </p:clrMapOvr>
-</p:sld>
-</file>
-
-<file path=ppt/slides/slide26.xml><?xml version="1.0" encoding="utf-8"?>
 <p:sld xmlns:a="http://schemas.openxmlformats.org/drawingml/2006/main" xmlns:p="http://schemas.openxmlformats.org/presentationml/2006/main" xmlns:r="http://schemas.openxmlformats.org/officeDocument/2006/relationships">
   <p:cSld>
     <p:bg>
@@ -19129,7 +18315,7 @@
 </p:sld>
 </file>
 
-<file path=ppt/slides/slide27.xml><?xml version="1.0" encoding="utf-8"?>
+<file path=ppt/slides/slide26.xml><?xml version="1.0" encoding="utf-8"?>
 <p:sld xmlns:a="http://schemas.openxmlformats.org/drawingml/2006/main" xmlns:p="http://schemas.openxmlformats.org/presentationml/2006/main" xmlns:r="http://schemas.openxmlformats.org/officeDocument/2006/relationships">
   <p:cSld>
     <p:bg>
@@ -19984,7 +19170,7 @@
 </p:sld>
 </file>
 
-<file path=ppt/slides/slide28.xml><?xml version="1.0" encoding="utf-8"?>
+<file path=ppt/slides/slide27.xml><?xml version="1.0" encoding="utf-8"?>
 <p:sld xmlns:a="http://schemas.openxmlformats.org/drawingml/2006/main" xmlns:p="http://schemas.openxmlformats.org/presentationml/2006/main" xmlns:r="http://schemas.openxmlformats.org/officeDocument/2006/relationships">
   <p:cSld>
     <p:bg>
@@ -20294,7 +19480,7 @@
 </p:sld>
 </file>
 
-<file path=ppt/slides/slide29.xml><?xml version="1.0" encoding="utf-8"?>
+<file path=ppt/slides/slide28.xml><?xml version="1.0" encoding="utf-8"?>
 <p:sld xmlns:a="http://schemas.openxmlformats.org/drawingml/2006/main" xmlns:p="http://schemas.openxmlformats.org/presentationml/2006/main" xmlns:r="http://schemas.openxmlformats.org/officeDocument/2006/relationships">
   <p:cSld>
     <p:bg>
@@ -21109,6 +20295,316 @@
                 <a:ea typeface="微软雅黑"/>
               </a:rPr>
               <a:t>B4</a:t>
+            </a:r>
+          </a:p>
+        </p:txBody>
+      </p:sp>
+    </p:spTree>
+  </p:cSld>
+  <p:clrMapOvr>
+    <a:masterClrMapping/>
+  </p:clrMapOvr>
+</p:sld>
+</file>
+
+<file path=ppt/slides/slide29.xml><?xml version="1.0" encoding="utf-8"?>
+<p:sld xmlns:a="http://schemas.openxmlformats.org/drawingml/2006/main" xmlns:p="http://schemas.openxmlformats.org/presentationml/2006/main" xmlns:r="http://schemas.openxmlformats.org/officeDocument/2006/relationships">
+  <p:cSld>
+    <p:bg>
+      <p:bgPr>
+        <a:solidFill>
+          <a:srgbClr val="FFFFFF"/>
+        </a:solidFill>
+        <a:effectLst/>
+      </p:bgPr>
+    </p:bg>
+    <p:spTree>
+      <p:nvGrpSpPr>
+        <p:cNvPr id="1" name=""/>
+        <p:cNvGrpSpPr/>
+        <p:nvPr/>
+      </p:nvGrpSpPr>
+      <p:grpSpPr/>
+      <p:sp>
+        <p:nvSpPr>
+          <p:cNvPr id="2" name="Rectangle 1"/>
+          <p:cNvSpPr/>
+          <p:nvPr/>
+        </p:nvSpPr>
+        <p:spPr>
+          <a:xfrm>
+            <a:off x="384048" y="420624"/>
+            <a:ext cx="77724" cy="475488"/>
+          </a:xfrm>
+          <a:prstGeom prst="rect">
+            <a:avLst/>
+          </a:prstGeom>
+          <a:solidFill>
+            <a:srgbClr val="E8833A"/>
+          </a:solidFill>
+          <a:ln>
+            <a:noFill/>
+          </a:ln>
+          <a:effectLst/>
+        </p:spPr>
+        <p:style>
+          <a:lnRef idx="1">
+            <a:schemeClr val="accent1"/>
+          </a:lnRef>
+          <a:fillRef idx="3">
+            <a:schemeClr val="accent1"/>
+          </a:fillRef>
+          <a:effectRef idx="2">
+            <a:schemeClr val="accent1"/>
+          </a:effectRef>
+          <a:fontRef idx="minor">
+            <a:schemeClr val="lt1"/>
+          </a:fontRef>
+        </p:style>
+        <p:txBody>
+          <a:bodyPr rtlCol="0" anchor="ctr"/>
+          <a:lstStyle/>
+          <a:p>
+            <a:pPr algn="ctr"/>
+          </a:p>
+        </p:txBody>
+      </p:sp>
+      <p:sp>
+        <p:nvSpPr>
+          <p:cNvPr id="3" name="TextBox 2"/>
+          <p:cNvSpPr txBox="1"/>
+          <p:nvPr/>
+        </p:nvSpPr>
+        <p:spPr>
+          <a:xfrm>
+            <a:off x="566928" y="329184"/>
+            <a:ext cx="11064240" cy="713232"/>
+          </a:xfrm>
+          <a:prstGeom prst="rect">
+            <a:avLst/>
+          </a:prstGeom>
+          <a:noFill/>
+        </p:spPr>
+        <p:txBody>
+          <a:bodyPr wrap="square" anchor="ctr" lIns="0" rIns="0" tIns="0" bIns="0">
+            <a:spAutoFit/>
+          </a:bodyPr>
+          <a:lstStyle/>
+          <a:p>
+            <a:pPr algn="l">
+              <a:lnSpc>
+                <a:spcPct val="105000"/>
+              </a:lnSpc>
+            </a:pPr>
+            <a:r>
+              <a:rPr sz="2700" b="1">
+                <a:solidFill>
+                  <a:srgbClr val="0B2A4A"/>
+                </a:solidFill>
+                <a:latin typeface="Arial"/>
+                <a:ea typeface="微软雅黑"/>
+              </a:rPr>
+              <a:t>资源公平性与未量化的资源收益</a:t>
+            </a:r>
+          </a:p>
+        </p:txBody>
+      </p:sp>
+      <p:sp>
+        <p:nvSpPr>
+          <p:cNvPr id="4" name="Rectangle 3"/>
+          <p:cNvSpPr/>
+          <p:nvPr/>
+        </p:nvSpPr>
+        <p:spPr>
+          <a:xfrm>
+            <a:off x="566928" y="1298448"/>
+            <a:ext cx="32004" cy="365760"/>
+          </a:xfrm>
+          <a:prstGeom prst="rect">
+            <a:avLst/>
+          </a:prstGeom>
+          <a:solidFill>
+            <a:srgbClr val="1F5C99"/>
+          </a:solidFill>
+          <a:ln>
+            <a:noFill/>
+          </a:ln>
+          <a:effectLst/>
+        </p:spPr>
+        <p:style>
+          <a:lnRef idx="1">
+            <a:schemeClr val="accent1"/>
+          </a:lnRef>
+          <a:fillRef idx="3">
+            <a:schemeClr val="accent1"/>
+          </a:fillRef>
+          <a:effectRef idx="2">
+            <a:schemeClr val="accent1"/>
+          </a:effectRef>
+          <a:fontRef idx="minor">
+            <a:schemeClr val="lt1"/>
+          </a:fontRef>
+        </p:style>
+        <p:txBody>
+          <a:bodyPr rtlCol="0" anchor="ctr"/>
+          <a:lstStyle/>
+          <a:p>
+            <a:pPr algn="ctr"/>
+          </a:p>
+        </p:txBody>
+      </p:sp>
+      <p:sp>
+        <p:nvSpPr>
+          <p:cNvPr id="5" name="TextBox 4"/>
+          <p:cNvSpPr txBox="1"/>
+          <p:nvPr/>
+        </p:nvSpPr>
+        <p:spPr>
+          <a:xfrm>
+            <a:off x="713232" y="1261872"/>
+            <a:ext cx="10744200" cy="438912"/>
+          </a:xfrm>
+          <a:prstGeom prst="rect">
+            <a:avLst/>
+          </a:prstGeom>
+          <a:noFill/>
+        </p:spPr>
+        <p:txBody>
+          <a:bodyPr wrap="square" anchor="ctr" lIns="0" rIns="0" tIns="0" bIns="0">
+            <a:spAutoFit/>
+          </a:bodyPr>
+          <a:lstStyle/>
+          <a:p>
+            <a:pPr algn="l">
+              <a:lnSpc>
+                <a:spcPct val="110000"/>
+              </a:lnSpc>
+            </a:pPr>
+            <a:r>
+              <a:rPr sz="1800" b="1">
+                <a:solidFill>
+                  <a:srgbClr val="1F5C99"/>
+                </a:solidFill>
+                <a:latin typeface="Arial"/>
+                <a:ea typeface="微软雅黑"/>
+              </a:rPr>
+              <a:t>每 Deployment 同规格，对 ENO 略不利</a:t>
+            </a:r>
+          </a:p>
+        </p:txBody>
+      </p:sp>
+      <p:sp>
+        <p:nvSpPr>
+          <p:cNvPr id="6" name="TextBox 5"/>
+          <p:cNvSpPr txBox="1"/>
+          <p:nvPr/>
+        </p:nvSpPr>
+        <p:spPr>
+          <a:xfrm>
+            <a:off x="566928" y="1965960"/>
+            <a:ext cx="10607040" cy="1417320"/>
+          </a:xfrm>
+          <a:prstGeom prst="rect">
+            <a:avLst/>
+          </a:prstGeom>
+          <a:noFill/>
+        </p:spPr>
+        <p:txBody>
+          <a:bodyPr wrap="square" anchor="t" lIns="0" rIns="0" tIns="0" bIns="0">
+            <a:spAutoFit/>
+          </a:bodyPr>
+          <a:lstStyle/>
+          <a:p>
+            <a:pPr algn="l">
+              <a:lnSpc>
+                <a:spcPct val="115000"/>
+              </a:lnSpc>
+            </a:pPr>
+            <a:r>
+              <a:rPr sz="1700" b="0">
+                <a:solidFill>
+                  <a:srgbClr val="333333"/>
+                </a:solidFill>
+                <a:latin typeface="Arial"/>
+                <a:ea typeface="微软雅黑"/>
+              </a:rPr>
+              <a:t>▪  Scheduler Pod 统一 2C/4G</a:t>
+            </a:r>
+          </a:p>
+          <a:p>
+            <a:pPr algn="l">
+              <a:lnSpc>
+                <a:spcPct val="115000"/>
+              </a:lnSpc>
+              <a:spcBef>
+                <a:spcPts val="1800"/>
+              </a:spcBef>
+            </a:pPr>
+            <a:r>
+              <a:rPr sz="1700" b="0">
+                <a:solidFill>
+                  <a:srgbClr val="333333"/>
+                </a:solidFill>
+                <a:latin typeface="Arial"/>
+                <a:ea typeface="微软雅黑"/>
+              </a:rPr>
+              <a:t>▪  ENO 少一个 Binder Deployment</a:t>
+            </a:r>
+          </a:p>
+          <a:p>
+            <a:pPr algn="l">
+              <a:lnSpc>
+                <a:spcPct val="115000"/>
+              </a:lnSpc>
+              <a:spcBef>
+                <a:spcPts val="1800"/>
+              </a:spcBef>
+            </a:pPr>
+            <a:r>
+              <a:rPr sz="1700" b="0">
+                <a:solidFill>
+                  <a:srgbClr val="333333"/>
+                </a:solidFill>
+                <a:latin typeface="Arial"/>
+                <a:ea typeface="微软雅黑"/>
+              </a:rPr>
+              <a:t>▪  集群总资源收益未量化</a:t>
+            </a:r>
+          </a:p>
+        </p:txBody>
+      </p:sp>
+      <p:sp>
+        <p:nvSpPr>
+          <p:cNvPr id="7" name="TextBox 6"/>
+          <p:cNvSpPr txBox="1"/>
+          <p:nvPr/>
+        </p:nvSpPr>
+        <p:spPr>
+          <a:xfrm>
+            <a:off x="10780776" y="6345936"/>
+            <a:ext cx="850392" cy="219456"/>
+          </a:xfrm>
+          <a:prstGeom prst="rect">
+            <a:avLst/>
+          </a:prstGeom>
+          <a:noFill/>
+        </p:spPr>
+        <p:txBody>
+          <a:bodyPr wrap="square" anchor="t" lIns="0" rIns="0" tIns="0" bIns="0">
+            <a:spAutoFit/>
+          </a:bodyPr>
+          <a:lstStyle/>
+          <a:p>
+            <a:pPr algn="r"/>
+            <a:r>
+              <a:rPr sz="950" b="0">
+                <a:solidFill>
+                  <a:srgbClr val="566474"/>
+                </a:solidFill>
+                <a:latin typeface="Arial"/>
+                <a:ea typeface="微软雅黑"/>
+              </a:rPr>
+              <a:t>B5</a:t>
             </a:r>
           </a:p>
         </p:txBody>
@@ -22230,7 +21726,7 @@
                 <a:latin typeface="Arial"/>
                 <a:ea typeface="微软雅黑"/>
               </a:rPr>
-              <a:t>3 / 25</a:t>
+              <a:t>3 / 24</a:t>
             </a:r>
           </a:p>
         </p:txBody>
@@ -22340,7 +21836,7 @@
                 <a:latin typeface="Arial"/>
                 <a:ea typeface="微软雅黑"/>
               </a:rPr>
-              <a:t>资源公平性与未量化的资源收益</a:t>
+              <a:t>一键复现</a:t>
             </a:r>
           </a:p>
         </p:txBody>
@@ -22424,7 +21920,7 @@
                 <a:latin typeface="Arial"/>
                 <a:ea typeface="微软雅黑"/>
               </a:rPr>
-              <a:t>每 Deployment 同规格，对 ENO 略不利</a:t>
+              <a:t>从零到结果的全部入口</a:t>
             </a:r>
           </a:p>
         </p:txBody>
@@ -22464,7 +21960,7 @@
                 <a:latin typeface="Arial"/>
                 <a:ea typeface="微软雅黑"/>
               </a:rPr>
-              <a:t>▪  Scheduler Pod 统一 2C/4G</a:t>
+              <a:t>▪  run-experiment.sh：12 步实验流程</a:t>
             </a:r>
           </a:p>
           <a:p>
@@ -22484,7 +21980,7 @@
                 <a:latin typeface="Arial"/>
                 <a:ea typeface="微软雅黑"/>
               </a:rPr>
-              <a:t>▪  ENO 少一个 Binder Deployment</a:t>
+              <a:t>▪  plot-results.py / collect/：聚合与出图</a:t>
             </a:r>
           </a:p>
           <a:p>
@@ -22504,7 +22000,7 @@
                 <a:latin typeface="Arial"/>
                 <a:ea typeface="微软雅黑"/>
               </a:rPr>
-              <a:t>▪  集群总资源收益未量化</a:t>
+              <a:t>▪  results/compare/：16 场景产物</a:t>
             </a:r>
           </a:p>
         </p:txBody>
@@ -22540,7 +22036,7 @@
                 <a:latin typeface="Arial"/>
                 <a:ea typeface="微软雅黑"/>
               </a:rPr>
-              <a:t>B5</a:t>
+              <a:t>B6</a:t>
             </a:r>
           </a:p>
         </p:txBody>
@@ -22650,316 +22146,6 @@
                 <a:latin typeface="Arial"/>
                 <a:ea typeface="微软雅黑"/>
               </a:rPr>
-              <a:t>一键复现</a:t>
-            </a:r>
-          </a:p>
-        </p:txBody>
-      </p:sp>
-      <p:sp>
-        <p:nvSpPr>
-          <p:cNvPr id="4" name="Rectangle 3"/>
-          <p:cNvSpPr/>
-          <p:nvPr/>
-        </p:nvSpPr>
-        <p:spPr>
-          <a:xfrm>
-            <a:off x="566928" y="1298448"/>
-            <a:ext cx="32004" cy="365760"/>
-          </a:xfrm>
-          <a:prstGeom prst="rect">
-            <a:avLst/>
-          </a:prstGeom>
-          <a:solidFill>
-            <a:srgbClr val="1F5C99"/>
-          </a:solidFill>
-          <a:ln>
-            <a:noFill/>
-          </a:ln>
-          <a:effectLst/>
-        </p:spPr>
-        <p:style>
-          <a:lnRef idx="1">
-            <a:schemeClr val="accent1"/>
-          </a:lnRef>
-          <a:fillRef idx="3">
-            <a:schemeClr val="accent1"/>
-          </a:fillRef>
-          <a:effectRef idx="2">
-            <a:schemeClr val="accent1"/>
-          </a:effectRef>
-          <a:fontRef idx="minor">
-            <a:schemeClr val="lt1"/>
-          </a:fontRef>
-        </p:style>
-        <p:txBody>
-          <a:bodyPr rtlCol="0" anchor="ctr"/>
-          <a:lstStyle/>
-          <a:p>
-            <a:pPr algn="ctr"/>
-          </a:p>
-        </p:txBody>
-      </p:sp>
-      <p:sp>
-        <p:nvSpPr>
-          <p:cNvPr id="5" name="TextBox 4"/>
-          <p:cNvSpPr txBox="1"/>
-          <p:nvPr/>
-        </p:nvSpPr>
-        <p:spPr>
-          <a:xfrm>
-            <a:off x="713232" y="1261872"/>
-            <a:ext cx="10744200" cy="438912"/>
-          </a:xfrm>
-          <a:prstGeom prst="rect">
-            <a:avLst/>
-          </a:prstGeom>
-          <a:noFill/>
-        </p:spPr>
-        <p:txBody>
-          <a:bodyPr wrap="square" anchor="ctr" lIns="0" rIns="0" tIns="0" bIns="0">
-            <a:spAutoFit/>
-          </a:bodyPr>
-          <a:lstStyle/>
-          <a:p>
-            <a:pPr algn="l">
-              <a:lnSpc>
-                <a:spcPct val="110000"/>
-              </a:lnSpc>
-            </a:pPr>
-            <a:r>
-              <a:rPr sz="1800" b="1">
-                <a:solidFill>
-                  <a:srgbClr val="1F5C99"/>
-                </a:solidFill>
-                <a:latin typeface="Arial"/>
-                <a:ea typeface="微软雅黑"/>
-              </a:rPr>
-              <a:t>从零到结果的全部入口</a:t>
-            </a:r>
-          </a:p>
-        </p:txBody>
-      </p:sp>
-      <p:sp>
-        <p:nvSpPr>
-          <p:cNvPr id="6" name="TextBox 5"/>
-          <p:cNvSpPr txBox="1"/>
-          <p:nvPr/>
-        </p:nvSpPr>
-        <p:spPr>
-          <a:xfrm>
-            <a:off x="566928" y="1965960"/>
-            <a:ext cx="10607040" cy="1417320"/>
-          </a:xfrm>
-          <a:prstGeom prst="rect">
-            <a:avLst/>
-          </a:prstGeom>
-          <a:noFill/>
-        </p:spPr>
-        <p:txBody>
-          <a:bodyPr wrap="square" anchor="t" lIns="0" rIns="0" tIns="0" bIns="0">
-            <a:spAutoFit/>
-          </a:bodyPr>
-          <a:lstStyle/>
-          <a:p>
-            <a:pPr algn="l">
-              <a:lnSpc>
-                <a:spcPct val="115000"/>
-              </a:lnSpc>
-            </a:pPr>
-            <a:r>
-              <a:rPr sz="1700" b="0">
-                <a:solidFill>
-                  <a:srgbClr val="333333"/>
-                </a:solidFill>
-                <a:latin typeface="Arial"/>
-                <a:ea typeface="微软雅黑"/>
-              </a:rPr>
-              <a:t>▪  run-experiment.sh：12 步实验流程</a:t>
-            </a:r>
-          </a:p>
-          <a:p>
-            <a:pPr algn="l">
-              <a:lnSpc>
-                <a:spcPct val="115000"/>
-              </a:lnSpc>
-              <a:spcBef>
-                <a:spcPts val="1800"/>
-              </a:spcBef>
-            </a:pPr>
-            <a:r>
-              <a:rPr sz="1700" b="0">
-                <a:solidFill>
-                  <a:srgbClr val="333333"/>
-                </a:solidFill>
-                <a:latin typeface="Arial"/>
-                <a:ea typeface="微软雅黑"/>
-              </a:rPr>
-              <a:t>▪  plot-results.py / collect/：聚合与出图</a:t>
-            </a:r>
-          </a:p>
-          <a:p>
-            <a:pPr algn="l">
-              <a:lnSpc>
-                <a:spcPct val="115000"/>
-              </a:lnSpc>
-              <a:spcBef>
-                <a:spcPts val="1800"/>
-              </a:spcBef>
-            </a:pPr>
-            <a:r>
-              <a:rPr sz="1700" b="0">
-                <a:solidFill>
-                  <a:srgbClr val="333333"/>
-                </a:solidFill>
-                <a:latin typeface="Arial"/>
-                <a:ea typeface="微软雅黑"/>
-              </a:rPr>
-              <a:t>▪  results/compare/：16 场景产物</a:t>
-            </a:r>
-          </a:p>
-        </p:txBody>
-      </p:sp>
-      <p:sp>
-        <p:nvSpPr>
-          <p:cNvPr id="7" name="TextBox 6"/>
-          <p:cNvSpPr txBox="1"/>
-          <p:nvPr/>
-        </p:nvSpPr>
-        <p:spPr>
-          <a:xfrm>
-            <a:off x="10780776" y="6345936"/>
-            <a:ext cx="850392" cy="219456"/>
-          </a:xfrm>
-          <a:prstGeom prst="rect">
-            <a:avLst/>
-          </a:prstGeom>
-          <a:noFill/>
-        </p:spPr>
-        <p:txBody>
-          <a:bodyPr wrap="square" anchor="t" lIns="0" rIns="0" tIns="0" bIns="0">
-            <a:spAutoFit/>
-          </a:bodyPr>
-          <a:lstStyle/>
-          <a:p>
-            <a:pPr algn="r"/>
-            <a:r>
-              <a:rPr sz="950" b="0">
-                <a:solidFill>
-                  <a:srgbClr val="566474"/>
-                </a:solidFill>
-                <a:latin typeface="Arial"/>
-                <a:ea typeface="微软雅黑"/>
-              </a:rPr>
-              <a:t>B6</a:t>
-            </a:r>
-          </a:p>
-        </p:txBody>
-      </p:sp>
-    </p:spTree>
-  </p:cSld>
-  <p:clrMapOvr>
-    <a:masterClrMapping/>
-  </p:clrMapOvr>
-</p:sld>
-</file>
-
-<file path=ppt/slides/slide32.xml><?xml version="1.0" encoding="utf-8"?>
-<p:sld xmlns:a="http://schemas.openxmlformats.org/drawingml/2006/main" xmlns:p="http://schemas.openxmlformats.org/presentationml/2006/main" xmlns:r="http://schemas.openxmlformats.org/officeDocument/2006/relationships">
-  <p:cSld>
-    <p:bg>
-      <p:bgPr>
-        <a:solidFill>
-          <a:srgbClr val="FFFFFF"/>
-        </a:solidFill>
-        <a:effectLst/>
-      </p:bgPr>
-    </p:bg>
-    <p:spTree>
-      <p:nvGrpSpPr>
-        <p:cNvPr id="1" name=""/>
-        <p:cNvGrpSpPr/>
-        <p:nvPr/>
-      </p:nvGrpSpPr>
-      <p:grpSpPr/>
-      <p:sp>
-        <p:nvSpPr>
-          <p:cNvPr id="2" name="Rectangle 1"/>
-          <p:cNvSpPr/>
-          <p:nvPr/>
-        </p:nvSpPr>
-        <p:spPr>
-          <a:xfrm>
-            <a:off x="384048" y="420624"/>
-            <a:ext cx="77724" cy="475488"/>
-          </a:xfrm>
-          <a:prstGeom prst="rect">
-            <a:avLst/>
-          </a:prstGeom>
-          <a:solidFill>
-            <a:srgbClr val="E8833A"/>
-          </a:solidFill>
-          <a:ln>
-            <a:noFill/>
-          </a:ln>
-          <a:effectLst/>
-        </p:spPr>
-        <p:style>
-          <a:lnRef idx="1">
-            <a:schemeClr val="accent1"/>
-          </a:lnRef>
-          <a:fillRef idx="3">
-            <a:schemeClr val="accent1"/>
-          </a:fillRef>
-          <a:effectRef idx="2">
-            <a:schemeClr val="accent1"/>
-          </a:effectRef>
-          <a:fontRef idx="minor">
-            <a:schemeClr val="lt1"/>
-          </a:fontRef>
-        </p:style>
-        <p:txBody>
-          <a:bodyPr rtlCol="0" anchor="ctr"/>
-          <a:lstStyle/>
-          <a:p>
-            <a:pPr algn="ctr"/>
-          </a:p>
-        </p:txBody>
-      </p:sp>
-      <p:sp>
-        <p:nvSpPr>
-          <p:cNvPr id="3" name="TextBox 2"/>
-          <p:cNvSpPr txBox="1"/>
-          <p:nvPr/>
-        </p:nvSpPr>
-        <p:spPr>
-          <a:xfrm>
-            <a:off x="566928" y="329184"/>
-            <a:ext cx="11064240" cy="713232"/>
-          </a:xfrm>
-          <a:prstGeom prst="rect">
-            <a:avLst/>
-          </a:prstGeom>
-          <a:noFill/>
-        </p:spPr>
-        <p:txBody>
-          <a:bodyPr wrap="square" anchor="ctr" lIns="0" rIns="0" tIns="0" bIns="0">
-            <a:spAutoFit/>
-          </a:bodyPr>
-          <a:lstStyle/>
-          <a:p>
-            <a:pPr algn="l">
-              <a:lnSpc>
-                <a:spcPct val="105000"/>
-              </a:lnSpc>
-            </a:pPr>
-            <a:r>
-              <a:rPr sz="2700" b="1">
-                <a:solidFill>
-                  <a:srgbClr val="0B2A4A"/>
-                </a:solidFill>
-                <a:latin typeface="Arial"/>
-                <a:ea typeface="微软雅黑"/>
-              </a:rPr>
               <a:t>主场景 s3/w3 的时序形态（备用）</a:t>
             </a:r>
           </a:p>
@@ -23766,7 +22952,7 @@
                 <a:latin typeface="Arial"/>
                 <a:ea typeface="微软雅黑"/>
               </a:rPr>
-              <a:t>4 / 25</a:t>
+              <a:t>4 / 24</a:t>
             </a:r>
           </a:p>
         </p:txBody>
@@ -24374,7 +23560,7 @@
                 <a:latin typeface="Arial"/>
                 <a:ea typeface="微软雅黑"/>
               </a:rPr>
-              <a:t>5 / 25</a:t>
+              <a:t>5 / 24</a:t>
             </a:r>
           </a:p>
         </p:txBody>
@@ -24982,7 +24168,7 @@
                 <a:latin typeface="Arial"/>
                 <a:ea typeface="微软雅黑"/>
               </a:rPr>
-              <a:t>6 / 25</a:t>
+              <a:t>6 / 24</a:t>
             </a:r>
           </a:p>
         </p:txBody>
@@ -25590,7 +24776,7 @@
                 <a:latin typeface="Arial"/>
                 <a:ea typeface="微软雅黑"/>
               </a:rPr>
-              <a:t>7 / 25</a:t>
+              <a:t>7 / 24</a:t>
             </a:r>
           </a:p>
         </p:txBody>
@@ -25921,7 +25107,7 @@
                 <a:latin typeface="Arial"/>
                 <a:ea typeface="微软雅黑"/>
               </a:rPr>
-              <a:t>8 / 25</a:t>
+              <a:t>8 / 24</a:t>
             </a:r>
           </a:p>
         </p:txBody>
@@ -26529,7 +25715,7 @@
                 <a:latin typeface="Arial"/>
                 <a:ea typeface="微软雅黑"/>
               </a:rPr>
-              <a:t>9 / 25</a:t>
+              <a:t>9 / 24</a:t>
             </a:r>
           </a:p>
         </p:txBody>

--- a/docs/thesis/defense/答辩PPT-基于etcd的分布式Kubernetes调度器.pptx
+++ b/docs/thesis/defense/答辩PPT-基于etcd的分布式Kubernetes调度器.pptx
@@ -952,7 +952,7 @@
           <a:lstStyle/>
           <a:p>
             <a:r>
-              <a:t>五组横向对比，结论是三档。第一档 ENO 与 Gödel，都是几百 pods/s；第二档 kube-scheduler；第三档 Volcano 与 Koordinator，只有约 48 和约 24 pods/s，几乎不随规模变化。主评估四场景里，ENO 比 kube-scheduler 高 1.8% 到 22.5%。唯一例外是 s1/w1 低负载低 7.2%，那个场景没饱和。柱状图按场景排序，第三档几乎是一条水平线，说明它们的瓶颈不在调度吞吐这一维。从 s1 到 s3，第一档的曲线始终压在最上面，第三档几乎不随规模变化。这个排序在 16 个场景上是一致的。</a:t>
+              <a:t>五组横向对比，结论是三档。第一档是 ENO 与 Gödel，单位都是几百 pods/s。第二档是 kube-scheduler。第三档是 Volcano 与 Koordinator，只有约 48 和约 24 pods/s，而且几乎不随规模变化——这是它们批处理与 QoS 感知调度的固有开销。主评估四场景里，ENO 比 kube-scheduler 高 1.8% 到 22.5%，比 Volcano 约 6 倍、比 Koordinator 12 倍以上。唯一的例外是 s1/w1 的低负载，比 kube-scheduler 低 7.2%，因为那个场景没饱和，完成时间由注入速率决定。柱状图按场景排序，第三档几乎是一条水平线，说明它们的瓶颈不在调度吞吐这一维。从 s1 到 s3，第一档的曲线始终压在最上面，第三档几乎不随规模变化。这个排序在 16 个场景上是一致的。</a:t>
             </a:r>
           </a:p>
         </p:txBody>
@@ -1442,7 +1442,7 @@
           <a:lstStyle/>
           <a:p>
             <a:r>
-              <a:t>第二场注入：第 10 秒杀掉 scheduler-0，停机 180 秒，实测中断 189 秒。被杀实例未完成的绑定只占 68/8407，即 0.81%；两个存活实例接管 8407 个 Pod，队列峰值 353 后回落到 2。累计绑定 49607/50000，断言仍全过。代价是 784 秒、比基线多 104 秒，是工作量重排的代价，不是数据损坏。对比基线是同一场景下的无故障运行，680 秒。队列在 353 之后回落到 2，说明积压是瞬时的。</a:t>
+              <a:t>第二场注入：第 10 秒杀掉 scheduler-0，停机 180 秒，实测中断 189 秒。看 kill 之后 90 秒的窗口：被杀实例只剩 68 次绑定，占该窗口 8407 次的 0.81%——它的份额被瞬间清零，而不是有 0.81% 的 Pod 丢了。同一窗口两个存活实例照常完成绑定，pending 峰值 353，之后 60 秒回落到 2；累计绑定 49607/50000，断言仍全过。代价是 784 秒、比基线多 104 秒。注意它比 180 秒停机短：另外三分之二的实例一直在工作，重排被并行吸收了。这是工作量重排的代价，不是数据损坏。对比基线是同一场景下的无故障运行，680 秒。队列在 353 之后回落到 2，说明积压是瞬时的。</a:t>
             </a:r>
           </a:p>
         </p:txBody>
@@ -14089,14 +14089,14 @@
               </a:lnSpc>
             </a:pPr>
             <a:r>
-              <a:rPr sz="1550" b="0">
+              <a:rPr sz="1400" b="0">
                 <a:solidFill>
                   <a:srgbClr val="333333"/>
                 </a:solidFill>
                 <a:latin typeface="Arial"/>
                 <a:ea typeface="微软雅黑"/>
               </a:rPr>
-              <a:t>▪  拦截 300 次 / 回退 300 次</a:t>
+              <a:t>▪  300 次拦截全部转为回退：不发 Bind，Pod 进 Dispatcher 回退队列</a:t>
             </a:r>
           </a:p>
           <a:p>
@@ -14109,14 +14109,14 @@
               </a:spcBef>
             </a:pPr>
             <a:r>
-              <a:rPr sz="1550" b="0">
+              <a:rPr sz="1400" b="0">
                 <a:solidFill>
                   <a:srgbClr val="333333"/>
                 </a:solidFill>
                 <a:latin typeface="Arial"/>
                 <a:ea typeface="微软雅黑"/>
               </a:rPr>
-              <a:t>▪  绑定成功率 1.00；断言 50000/50000</a:t>
+              <a:t>▪  回退后由新归属实例重新调度，15 s 内落到合法节点；累计 50000/50000 绑定成功</a:t>
             </a:r>
           </a:p>
           <a:p>
@@ -14129,14 +14129,14 @@
               </a:spcBef>
             </a:pPr>
             <a:r>
-              <a:rPr sz="1550" b="0">
+              <a:rPr sz="1400" b="0">
                 <a:solidFill>
                   <a:srgbClr val="333333"/>
                 </a:solidFill>
                 <a:latin typeface="Arial"/>
                 <a:ea typeface="微软雅黑"/>
               </a:rPr>
-              <a:t>▪  总耗时 683 s 对基线 680 s（+0.4%）</a:t>
+              <a:t>▪  代价：总耗时 683 s，对基线 680 s 多 3 s（+0.4%）</a:t>
             </a:r>
           </a:p>
         </p:txBody>
@@ -14466,7 +14466,7 @@
                 <a:latin typeface="Arial"/>
                 <a:ea typeface="微软雅黑"/>
               </a:rPr>
-              <a:t>▪  被杀实例绑定占比 68/8407 = 0.81%</a:t>
+              <a:t>▪  kill 后 90 s 窗口内，被杀实例只剩 68 次绑定，占该窗口 8407 次的 0.81%</a:t>
             </a:r>
           </a:p>
           <a:p>
@@ -14486,7 +14486,7 @@
                 <a:latin typeface="Arial"/>
                 <a:ea typeface="微软雅黑"/>
               </a:rPr>
-              <a:t>▪  存活实例接管 8407 pods；pending 353→2</a:t>
+              <a:t>▪  同一窗口共完成 8407 次绑定；pending 峰值 353，60 s 内回落到 2</a:t>
             </a:r>
           </a:p>
           <a:p>
@@ -14506,7 +14506,7 @@
                 <a:latin typeface="Arial"/>
                 <a:ea typeface="微软雅黑"/>
               </a:rPr>
-              <a:t>▪  总耗时 784 s，较基线 +15.3%</a:t>
+              <a:t>▪  整场耗时 784 s，比无故障基线 680 s 多 104 s（+15.3%）</a:t>
             </a:r>
           </a:p>
         </p:txBody>

--- a/docs/thesis/defense/答辩PPT-基于etcd的分布式Kubernetes调度器.pptx
+++ b/docs/thesis/defense/答辩PPT-基于etcd的分布式Kubernetes调度器.pptx
@@ -1512,7 +1512,7 @@
           <a:lstStyle/>
           <a:p>
             <a:r>
-              <a:t>局限六条，只讲关键。KWOK 是仿真，绝对数值不外推，但跨调度器相对比较成立。Gang 即 w6，ENO 尾延迟确实更高：吞吐高 4.3% 到 19.1%，单 Pod P99 高 1.6 到 4.1 倍，原因是同组预留等待与决策共用进程和队列。s3 到 s4 固定三实例，退化幅度不能读成上限。其余是资源公平、Volcano 口径、幸存者偏差。这六条不是免责声明，而是给结论划边界。在这个边界内，跨调度器的相对结论是稳的。</a:t>
+              <a:t>这一页的局限按论文第 7 章讲三条。第一，Gang 场景的尾延迟反向：w6 下 ENO 单 Pod P99 高于 Gödel，我们的解释是同组预留等待、绑定调用与后续决策共用同一个进程和队列，但还没有用独立计时实验把这两段耗时分离开，所以如实列为未证实的归因。第二，KWOK 仿真：去掉了 kubelet、运行时、真实网络与磁盘 IO，绝对数值不能外推到生产，只能用于跨调度器的相对比较。第三，资源开销：公平策略是每个 Deployment 同规格，所以没有量化 ENO 移除整个 Binder Deployment 在集群总资源上的收益。对应的三个延伸方向是生产灰度、多 Dispatcher 分区协同、以及在 ENO 上叠加具体调度策略。</a:t>
             </a:r>
           </a:p>
         </p:txBody>
@@ -14688,7 +14688,7 @@
                 <a:latin typeface="Arial"/>
                 <a:ea typeface="微软雅黑"/>
               </a:rPr>
-              <a:t>局限性与威胁效力</a:t>
+              <a:t>局限与展望</a:t>
             </a:r>
           </a:p>
         </p:txBody>
@@ -14772,7 +14772,7 @@
                 <a:latin typeface="Arial"/>
                 <a:ea typeface="微软雅黑"/>
               </a:rPr>
-              <a:t>结论在“跨调度器相对比较”上成立，绝对数值不外推到生产</a:t>
+              <a:t>三条局限有明确边界，三方向是本工作的自然延伸</a:t>
             </a:r>
           </a:p>
         </p:txBody>
@@ -14785,8 +14785,8 @@
         </p:nvSpPr>
         <p:spPr>
           <a:xfrm>
-            <a:off x="566928" y="1874519"/>
-            <a:ext cx="3517391" cy="1051560"/>
+            <a:off x="566928" y="1847088"/>
+            <a:ext cx="3517391" cy="2084831"/>
           </a:xfrm>
           <a:prstGeom prst="roundRect">
             <a:avLst/>
@@ -14831,8 +14831,8 @@
         </p:nvSpPr>
         <p:spPr>
           <a:xfrm>
-            <a:off x="566928" y="1874519"/>
-            <a:ext cx="50292" cy="1051560"/>
+            <a:off x="566928" y="1847088"/>
+            <a:ext cx="50292" cy="2084831"/>
           </a:xfrm>
           <a:prstGeom prst="rect">
             <a:avLst/>
@@ -14875,8 +14875,8 @@
         </p:nvSpPr>
         <p:spPr>
           <a:xfrm>
-            <a:off x="731520" y="2002536"/>
-            <a:ext cx="3243072" cy="868680"/>
+            <a:off x="731520" y="1975104"/>
+            <a:ext cx="3243072" cy="1901951"/>
           </a:xfrm>
           <a:prstGeom prst="rect">
             <a:avLst/>
@@ -14898,7 +14898,7 @@
                 <a:latin typeface="Arial"/>
                 <a:ea typeface="微软雅黑"/>
               </a:rPr>
-              <a:t>KWOK 仿真</a:t>
+              <a:t>Gang 尾延迟未分离归因</a:t>
             </a:r>
           </a:p>
           <a:p>
@@ -14918,7 +14918,7 @@
                 <a:latin typeface="Arial"/>
                 <a:ea typeface="微软雅黑"/>
               </a:rPr>
-              <a:t>无法反映真实资源竞争与 IO</a:t>
+              <a:t>w6 场景 ENO 单 Pod P99 高于 Gödel，归因是同组预留等待与后续决策共用进程与队列，尚未用独立计时实验把两段耗时分离开量化</a:t>
             </a:r>
           </a:p>
         </p:txBody>
@@ -14931,8 +14931,8 @@
         </p:nvSpPr>
         <p:spPr>
           <a:xfrm>
-            <a:off x="4340351" y="1874519"/>
-            <a:ext cx="3517391" cy="1051560"/>
+            <a:off x="4340351" y="1847088"/>
+            <a:ext cx="3517391" cy="2084831"/>
           </a:xfrm>
           <a:prstGeom prst="roundRect">
             <a:avLst/>
@@ -14977,8 +14977,8 @@
         </p:nvSpPr>
         <p:spPr>
           <a:xfrm>
-            <a:off x="4340351" y="1874519"/>
-            <a:ext cx="50292" cy="1051560"/>
+            <a:off x="4340351" y="1847088"/>
+            <a:ext cx="50292" cy="2084831"/>
           </a:xfrm>
           <a:prstGeom prst="rect">
             <a:avLst/>
@@ -15021,8 +15021,8 @@
         </p:nvSpPr>
         <p:spPr>
           <a:xfrm>
-            <a:off x="4504943" y="2002536"/>
-            <a:ext cx="3243072" cy="868680"/>
+            <a:off x="4504943" y="1975104"/>
+            <a:ext cx="3243072" cy="1901951"/>
           </a:xfrm>
           <a:prstGeom prst="rect">
             <a:avLst/>
@@ -15044,7 +15044,7 @@
                 <a:latin typeface="Arial"/>
                 <a:ea typeface="微软雅黑"/>
               </a:rPr>
-              <a:t>Gang 延迟口径</a:t>
+              <a:t>KWOK 仿真的外推边界</a:t>
             </a:r>
           </a:p>
           <a:p>
@@ -15064,7 +15064,7 @@
                 <a:latin typeface="Arial"/>
                 <a:ea typeface="微软雅黑"/>
               </a:rPr>
-              <a:t>w6 尾延迟反向，未分离计时</a:t>
+              <a:t>实验全部在 KWOK 下完成，去掉 kubelet、容器运行时、真实网络与磁盘 IO；绝对数值不能外推到生产，只能做跨调度器相对对比</a:t>
             </a:r>
           </a:p>
         </p:txBody>
@@ -15077,8 +15077,8 @@
         </p:nvSpPr>
         <p:spPr>
           <a:xfrm>
-            <a:off x="8113775" y="1874519"/>
-            <a:ext cx="3517391" cy="1051560"/>
+            <a:off x="8113775" y="1847088"/>
+            <a:ext cx="3517391" cy="2084831"/>
           </a:xfrm>
           <a:prstGeom prst="roundRect">
             <a:avLst/>
@@ -15123,8 +15123,8 @@
         </p:nvSpPr>
         <p:spPr>
           <a:xfrm>
-            <a:off x="8113775" y="1874519"/>
-            <a:ext cx="50292" cy="1051560"/>
+            <a:off x="8113775" y="1847088"/>
+            <a:ext cx="50292" cy="2084831"/>
           </a:xfrm>
           <a:prstGeom prst="rect">
             <a:avLst/>
@@ -15167,8 +15167,8 @@
         </p:nvSpPr>
         <p:spPr>
           <a:xfrm>
-            <a:off x="8278367" y="2002536"/>
-            <a:ext cx="3243072" cy="868680"/>
+            <a:off x="8278367" y="1975104"/>
+            <a:ext cx="3243072" cy="1901951"/>
           </a:xfrm>
           <a:prstGeom prst="rect">
             <a:avLst/>
@@ -15190,7 +15190,7 @@
                 <a:latin typeface="Arial"/>
                 <a:ea typeface="微软雅黑"/>
               </a:rPr>
-              <a:t>固定实例数</a:t>
+              <a:t>资源开销未量化</a:t>
             </a:r>
           </a:p>
           <a:p>
@@ -15210,111 +15210,21 @@
                 <a:latin typeface="Arial"/>
                 <a:ea typeface="微软雅黑"/>
               </a:rPr>
-              <a:t>s3→s4 未同步扩容</a:t>
-            </a:r>
-          </a:p>
-        </p:txBody>
-      </p:sp>
-      <p:sp>
-        <p:nvSpPr>
-          <p:cNvPr id="15" name="Rounded Rectangle 14"/>
-          <p:cNvSpPr/>
-          <p:nvPr/>
-        </p:nvSpPr>
-        <p:spPr>
-          <a:xfrm>
-            <a:off x="566928" y="3182111"/>
-            <a:ext cx="3517391" cy="1051560"/>
-          </a:xfrm>
-          <a:prstGeom prst="roundRect">
-            <a:avLst/>
-          </a:prstGeom>
-          <a:solidFill>
-            <a:srgbClr val="F5F7FA"/>
-          </a:solidFill>
-          <a:ln w="9525">
-            <a:solidFill>
-              <a:srgbClr val="D8DFE8"/>
-            </a:solidFill>
-          </a:ln>
-          <a:effectLst/>
-        </p:spPr>
-        <p:style>
-          <a:lnRef idx="1">
-            <a:schemeClr val="accent1"/>
-          </a:lnRef>
-          <a:fillRef idx="3">
-            <a:schemeClr val="accent1"/>
-          </a:fillRef>
-          <a:effectRef idx="2">
-            <a:schemeClr val="accent1"/>
-          </a:effectRef>
-          <a:fontRef idx="minor">
-            <a:schemeClr val="lt1"/>
-          </a:fontRef>
-        </p:style>
-        <p:txBody>
-          <a:bodyPr rtlCol="0" anchor="ctr"/>
-          <a:lstStyle/>
-          <a:p>
-            <a:pPr algn="ctr"/>
-          </a:p>
-        </p:txBody>
-      </p:sp>
-      <p:sp>
-        <p:nvSpPr>
-          <p:cNvPr id="16" name="Rectangle 15"/>
-          <p:cNvSpPr/>
-          <p:nvPr/>
-        </p:nvSpPr>
-        <p:spPr>
-          <a:xfrm>
-            <a:off x="566928" y="3182111"/>
-            <a:ext cx="50292" cy="1051560"/>
-          </a:xfrm>
-          <a:prstGeom prst="rect">
-            <a:avLst/>
-          </a:prstGeom>
-          <a:solidFill>
-            <a:srgbClr val="1F5C99"/>
-          </a:solidFill>
-          <a:ln>
-            <a:noFill/>
-          </a:ln>
-          <a:effectLst/>
-        </p:spPr>
-        <p:style>
-          <a:lnRef idx="1">
-            <a:schemeClr val="accent1"/>
-          </a:lnRef>
-          <a:fillRef idx="3">
-            <a:schemeClr val="accent1"/>
-          </a:fillRef>
-          <a:effectRef idx="2">
-            <a:schemeClr val="accent1"/>
-          </a:effectRef>
-          <a:fontRef idx="minor">
-            <a:schemeClr val="lt1"/>
-          </a:fontRef>
-        </p:style>
-        <p:txBody>
-          <a:bodyPr rtlCol="0" anchor="ctr"/>
-          <a:lstStyle/>
-          <a:p>
-            <a:pPr algn="ctr"/>
-          </a:p>
-        </p:txBody>
-      </p:sp>
-      <p:sp>
-        <p:nvSpPr>
-          <p:cNvPr id="17" name="TextBox 16"/>
+              <a:t>公平策略是各组 Deployment 同规格（2C/4G），因此没有量化 ENO 移除 Binder Deployment 后集群总资源开销的收益</a:t>
+            </a:r>
+          </a:p>
+        </p:txBody>
+      </p:sp>
+      <p:sp>
+        <p:nvSpPr>
+          <p:cNvPr id="15" name="TextBox 14"/>
           <p:cNvSpPr txBox="1"/>
           <p:nvPr/>
         </p:nvSpPr>
         <p:spPr>
           <a:xfrm>
-            <a:off x="731520" y="3310127"/>
-            <a:ext cx="3243072" cy="868680"/>
+            <a:off x="566928" y="4224528"/>
+            <a:ext cx="11064240" cy="777240"/>
           </a:xfrm>
           <a:prstGeom prst="rect">
             <a:avLst/>
@@ -15329,333 +15239,21 @@
           <a:p>
             <a:pPr algn="l"/>
             <a:r>
-              <a:rPr sz="1400" b="1">
-                <a:solidFill>
-                  <a:srgbClr val="0B2A4A"/>
+              <a:rPr sz="1200" b="0">
+                <a:solidFill>
+                  <a:srgbClr val="566474"/>
                 </a:solidFill>
                 <a:latin typeface="Arial"/>
                 <a:ea typeface="微软雅黑"/>
               </a:rPr>
-              <a:t>资源公平</a:t>
-            </a:r>
-          </a:p>
-          <a:p>
-            <a:pPr algn="l">
-              <a:lnSpc>
-                <a:spcPct val="110000"/>
-              </a:lnSpc>
-              <a:spcBef>
-                <a:spcPts val="400"/>
-              </a:spcBef>
-            </a:pPr>
-            <a:r>
-              <a:rPr sz="1150" b="0">
-                <a:solidFill>
-                  <a:srgbClr val="333333"/>
-                </a:solidFill>
-                <a:latin typeface="Arial"/>
-                <a:ea typeface="微软雅黑"/>
-              </a:rPr>
-              <a:t>每 Deployment 同规格，对 ENO 略不利</a:t>
-            </a:r>
-          </a:p>
-        </p:txBody>
-      </p:sp>
-      <p:sp>
-        <p:nvSpPr>
-          <p:cNvPr id="18" name="Rounded Rectangle 17"/>
-          <p:cNvSpPr/>
-          <p:nvPr/>
-        </p:nvSpPr>
-        <p:spPr>
-          <a:xfrm>
-            <a:off x="4340351" y="3182111"/>
-            <a:ext cx="3517391" cy="1051560"/>
-          </a:xfrm>
-          <a:prstGeom prst="roundRect">
-            <a:avLst/>
-          </a:prstGeom>
-          <a:solidFill>
-            <a:srgbClr val="F5F7FA"/>
-          </a:solidFill>
-          <a:ln w="9525">
-            <a:solidFill>
-              <a:srgbClr val="D8DFE8"/>
-            </a:solidFill>
-          </a:ln>
-          <a:effectLst/>
-        </p:spPr>
-        <p:style>
-          <a:lnRef idx="1">
-            <a:schemeClr val="accent1"/>
-          </a:lnRef>
-          <a:fillRef idx="3">
-            <a:schemeClr val="accent1"/>
-          </a:fillRef>
-          <a:effectRef idx="2">
-            <a:schemeClr val="accent1"/>
-          </a:effectRef>
-          <a:fontRef idx="minor">
-            <a:schemeClr val="lt1"/>
-          </a:fontRef>
-        </p:style>
-        <p:txBody>
-          <a:bodyPr rtlCol="0" anchor="ctr"/>
-          <a:lstStyle/>
-          <a:p>
-            <a:pPr algn="ctr"/>
-          </a:p>
-        </p:txBody>
-      </p:sp>
-      <p:sp>
-        <p:nvSpPr>
-          <p:cNvPr id="19" name="Rectangle 18"/>
-          <p:cNvSpPr/>
-          <p:nvPr/>
-        </p:nvSpPr>
-        <p:spPr>
-          <a:xfrm>
-            <a:off x="4340351" y="3182111"/>
-            <a:ext cx="50292" cy="1051560"/>
-          </a:xfrm>
-          <a:prstGeom prst="rect">
-            <a:avLst/>
-          </a:prstGeom>
-          <a:solidFill>
-            <a:srgbClr val="1F5C99"/>
-          </a:solidFill>
-          <a:ln>
-            <a:noFill/>
-          </a:ln>
-          <a:effectLst/>
-        </p:spPr>
-        <p:style>
-          <a:lnRef idx="1">
-            <a:schemeClr val="accent1"/>
-          </a:lnRef>
-          <a:fillRef idx="3">
-            <a:schemeClr val="accent1"/>
-          </a:fillRef>
-          <a:effectRef idx="2">
-            <a:schemeClr val="accent1"/>
-          </a:effectRef>
-          <a:fontRef idx="minor">
-            <a:schemeClr val="lt1"/>
-          </a:fontRef>
-        </p:style>
-        <p:txBody>
-          <a:bodyPr rtlCol="0" anchor="ctr"/>
-          <a:lstStyle/>
-          <a:p>
-            <a:pPr algn="ctr"/>
-          </a:p>
-        </p:txBody>
-      </p:sp>
-      <p:sp>
-        <p:nvSpPr>
-          <p:cNvPr id="20" name="TextBox 19"/>
-          <p:cNvSpPr txBox="1"/>
-          <p:nvPr/>
-        </p:nvSpPr>
-        <p:spPr>
-          <a:xfrm>
-            <a:off x="4504943" y="3310127"/>
-            <a:ext cx="3243072" cy="868680"/>
-          </a:xfrm>
-          <a:prstGeom prst="rect">
-            <a:avLst/>
-          </a:prstGeom>
-          <a:noFill/>
-        </p:spPr>
-        <p:txBody>
-          <a:bodyPr wrap="square" anchor="t" lIns="0" rIns="0" tIns="0" bIns="0">
-            <a:spAutoFit/>
-          </a:bodyPr>
-          <a:lstStyle/>
-          <a:p>
-            <a:pPr algn="l"/>
-            <a:r>
-              <a:rPr sz="1400" b="1">
-                <a:solidFill>
-                  <a:srgbClr val="0B2A4A"/>
-                </a:solidFill>
-                <a:latin typeface="Arial"/>
-                <a:ea typeface="微软雅黑"/>
-              </a:rPr>
-              <a:t>Volcano 指标</a:t>
-            </a:r>
-          </a:p>
-          <a:p>
-            <a:pPr algn="l">
-              <a:lnSpc>
-                <a:spcPct val="110000"/>
-              </a:lnSpc>
-              <a:spcBef>
-                <a:spcPts val="400"/>
-              </a:spcBef>
-            </a:pPr>
-            <a:r>
-              <a:rPr sz="1150" b="0">
-                <a:solidFill>
-                  <a:srgbClr val="333333"/>
-                </a:solidFill>
-                <a:latin typeface="Arial"/>
-                <a:ea typeface="微软雅黑"/>
-              </a:rPr>
-              <a:t>测量对象与粒度不完全等价</a:t>
-            </a:r>
-          </a:p>
-        </p:txBody>
-      </p:sp>
-      <p:sp>
-        <p:nvSpPr>
-          <p:cNvPr id="21" name="Rounded Rectangle 20"/>
-          <p:cNvSpPr/>
-          <p:nvPr/>
-        </p:nvSpPr>
-        <p:spPr>
-          <a:xfrm>
-            <a:off x="8113775" y="3182111"/>
-            <a:ext cx="3517391" cy="1051560"/>
-          </a:xfrm>
-          <a:prstGeom prst="roundRect">
-            <a:avLst/>
-          </a:prstGeom>
-          <a:solidFill>
-            <a:srgbClr val="F5F7FA"/>
-          </a:solidFill>
-          <a:ln w="9525">
-            <a:solidFill>
-              <a:srgbClr val="D8DFE8"/>
-            </a:solidFill>
-          </a:ln>
-          <a:effectLst/>
-        </p:spPr>
-        <p:style>
-          <a:lnRef idx="1">
-            <a:schemeClr val="accent1"/>
-          </a:lnRef>
-          <a:fillRef idx="3">
-            <a:schemeClr val="accent1"/>
-          </a:fillRef>
-          <a:effectRef idx="2">
-            <a:schemeClr val="accent1"/>
-          </a:effectRef>
-          <a:fontRef idx="minor">
-            <a:schemeClr val="lt1"/>
-          </a:fontRef>
-        </p:style>
-        <p:txBody>
-          <a:bodyPr rtlCol="0" anchor="ctr"/>
-          <a:lstStyle/>
-          <a:p>
-            <a:pPr algn="ctr"/>
-          </a:p>
-        </p:txBody>
-      </p:sp>
-      <p:sp>
-        <p:nvSpPr>
-          <p:cNvPr id="22" name="Rectangle 21"/>
-          <p:cNvSpPr/>
-          <p:nvPr/>
-        </p:nvSpPr>
-        <p:spPr>
-          <a:xfrm>
-            <a:off x="8113775" y="3182111"/>
-            <a:ext cx="50292" cy="1051560"/>
-          </a:xfrm>
-          <a:prstGeom prst="rect">
-            <a:avLst/>
-          </a:prstGeom>
-          <a:solidFill>
-            <a:srgbClr val="1F5C99"/>
-          </a:solidFill>
-          <a:ln>
-            <a:noFill/>
-          </a:ln>
-          <a:effectLst/>
-        </p:spPr>
-        <p:style>
-          <a:lnRef idx="1">
-            <a:schemeClr val="accent1"/>
-          </a:lnRef>
-          <a:fillRef idx="3">
-            <a:schemeClr val="accent1"/>
-          </a:fillRef>
-          <a:effectRef idx="2">
-            <a:schemeClr val="accent1"/>
-          </a:effectRef>
-          <a:fontRef idx="minor">
-            <a:schemeClr val="lt1"/>
-          </a:fontRef>
-        </p:style>
-        <p:txBody>
-          <a:bodyPr rtlCol="0" anchor="ctr"/>
-          <a:lstStyle/>
-          <a:p>
-            <a:pPr algn="ctr"/>
-          </a:p>
-        </p:txBody>
-      </p:sp>
-      <p:sp>
-        <p:nvSpPr>
-          <p:cNvPr id="23" name="TextBox 22"/>
-          <p:cNvSpPr txBox="1"/>
-          <p:nvPr/>
-        </p:nvSpPr>
-        <p:spPr>
-          <a:xfrm>
-            <a:off x="8278367" y="3310127"/>
-            <a:ext cx="3243072" cy="868680"/>
-          </a:xfrm>
-          <a:prstGeom prst="rect">
-            <a:avLst/>
-          </a:prstGeom>
-          <a:noFill/>
-        </p:spPr>
-        <p:txBody>
-          <a:bodyPr wrap="square" anchor="t" lIns="0" rIns="0" tIns="0" bIns="0">
-            <a:spAutoFit/>
-          </a:bodyPr>
-          <a:lstStyle/>
-          <a:p>
-            <a:pPr algn="l"/>
-            <a:r>
-              <a:rPr sz="1400" b="1">
-                <a:solidFill>
-                  <a:srgbClr val="0B2A4A"/>
-                </a:solidFill>
-                <a:latin typeface="Arial"/>
-                <a:ea typeface="微软雅黑"/>
-              </a:rPr>
-              <a:t>幸存者偏差</a:t>
-            </a:r>
-          </a:p>
-          <a:p>
-            <a:pPr algn="l">
-              <a:lnSpc>
-                <a:spcPct val="110000"/>
-              </a:lnSpc>
-              <a:spcBef>
-                <a:spcPts val="400"/>
-              </a:spcBef>
-            </a:pPr>
-            <a:r>
-              <a:rPr sz="1150" b="0">
-                <a:solidFill>
-                  <a:srgbClr val="333333"/>
-                </a:solidFill>
-                <a:latin typeface="Arial"/>
-                <a:ea typeface="微软雅黑"/>
-              </a:rPr>
-              <a:t>c/d/e 的 P99 不做数值对齐</a:t>
-            </a:r>
-          </a:p>
-        </p:txBody>
-      </p:sp>
-      <p:sp>
-        <p:nvSpPr>
-          <p:cNvPr id="24" name="TextBox 23"/>
+              <a:t>▪  展望：生产环境灰度验证 · 多 Dispatcher 分区协同 · 在 ENO 上叠加资源感知与拓扑亲和策略</a:t>
+            </a:r>
+          </a:p>
+        </p:txBody>
+      </p:sp>
+      <p:sp>
+        <p:nvSpPr>
+          <p:cNvPr id="16" name="TextBox 15"/>
           <p:cNvSpPr txBox="1"/>
           <p:nvPr/>
         </p:nvSpPr>

--- a/docs/thesis/defense/答辩PPT-基于etcd的分布式Kubernetes调度器.pptx
+++ b/docs/thesis/defense/答辩PPT-基于etcd的分布式Kubernetes调度器.pptx
@@ -15044,7 +15044,7 @@
                 <a:latin typeface="Arial"/>
                 <a:ea typeface="微软雅黑"/>
               </a:rPr>
-              <a:t>KWOK 仿真的外推边界</a:t>
+              <a:t>仿真环境的测量边界</a:t>
             </a:r>
           </a:p>
           <a:p>
@@ -15064,7 +15064,7 @@
                 <a:latin typeface="Arial"/>
                 <a:ea typeface="微软雅黑"/>
               </a:rPr>
-              <a:t>实验全部在 KWOK 下完成，去掉 kubelet、容器运行时、真实网络与磁盘 IO；绝对数值不能外推到生产，只能做跨调度器相对对比</a:t>
+              <a:t>KWOK 用模拟 kubelet 让 Pod 直接进入 Running，省掉镜像拉取、容器启动与真实 IO：好处是测的是调度器本身、可复现；代价是绝对数值不能外推到生产，只能做相对对比</a:t>
             </a:r>
           </a:p>
         </p:txBody>

--- a/docs/thesis/defense/答辩PPT-基于etcd的分布式Kubernetes调度器.pptx
+++ b/docs/thesis/defense/答辩PPT-基于etcd的分布式Kubernetes调度器.pptx
@@ -15476,7 +15476,7 @@
                 <a:latin typeface="Arial"/>
                 <a:ea typeface="微软雅黑"/>
               </a:rPr>
-              <a:t>架构创新与一致性创新都有可复现实验支撑，且实现了向后兼容的工程落地</a:t>
+              <a:t>三项工作、两个创新，都有可复现实验支撑，且保持了向后兼容</a:t>
             </a:r>
           </a:p>
         </p:txBody>
@@ -15489,8 +15489,8 @@
         </p:nvSpPr>
         <p:spPr>
           <a:xfrm>
-            <a:off x="566928" y="1874519"/>
-            <a:ext cx="3517391" cy="1051560"/>
+            <a:off x="566928" y="1810512"/>
+            <a:ext cx="3517391" cy="1444752"/>
           </a:xfrm>
           <a:prstGeom prst="roundRect">
             <a:avLst/>
@@ -15535,8 +15535,8 @@
         </p:nvSpPr>
         <p:spPr>
           <a:xfrm>
-            <a:off x="566928" y="1874519"/>
-            <a:ext cx="50292" cy="1051560"/>
+            <a:off x="566928" y="1810512"/>
+            <a:ext cx="50292" cy="1444752"/>
           </a:xfrm>
           <a:prstGeom prst="rect">
             <a:avLst/>
@@ -15579,8 +15579,8 @@
         </p:nvSpPr>
         <p:spPr>
           <a:xfrm>
-            <a:off x="731520" y="2002536"/>
-            <a:ext cx="3243072" cy="868680"/>
+            <a:off x="731520" y="1938528"/>
+            <a:ext cx="3243072" cy="1261872"/>
           </a:xfrm>
           <a:prstGeom prst="rect">
             <a:avLst/>
@@ -15602,7 +15602,7 @@
                 <a:latin typeface="Arial"/>
                 <a:ea typeface="微软雅黑"/>
               </a:rPr>
-              <a:t>创新 1 · ENO</a:t>
+              <a:t>工作 1 · 架构梳理</a:t>
             </a:r>
           </a:p>
           <a:p>
@@ -15622,7 +15622,7 @@
                 <a:latin typeface="Arial"/>
                 <a:ea typeface="微软雅黑"/>
               </a:rPr>
-              <a:t>Binder 进进程内 + CacheAdapter</a:t>
+              <a:t>Dispatcher / Scheduler / Binder 三层与 Pod 完整流转；不依赖自研协调机制，全部建立在三种 etcd 原子语义上</a:t>
             </a:r>
           </a:p>
         </p:txBody>
@@ -15635,8 +15635,8 @@
         </p:nvSpPr>
         <p:spPr>
           <a:xfrm>
-            <a:off x="4340351" y="1874519"/>
-            <a:ext cx="3517391" cy="1051560"/>
+            <a:off x="4340351" y="1810512"/>
+            <a:ext cx="3517391" cy="1444752"/>
           </a:xfrm>
           <a:prstGeom prst="roundRect">
             <a:avLst/>
@@ -15681,8 +15681,8 @@
         </p:nvSpPr>
         <p:spPr>
           <a:xfrm>
-            <a:off x="4340351" y="1874519"/>
-            <a:ext cx="50292" cy="1051560"/>
+            <a:off x="4340351" y="1810512"/>
+            <a:ext cx="50292" cy="1444752"/>
           </a:xfrm>
           <a:prstGeom prst="rect">
             <a:avLst/>
@@ -15725,8 +15725,8 @@
         </p:nvSpPr>
         <p:spPr>
           <a:xfrm>
-            <a:off x="4504943" y="2002536"/>
-            <a:ext cx="3243072" cy="868680"/>
+            <a:off x="4504943" y="1938528"/>
+            <a:ext cx="3243072" cy="1261872"/>
           </a:xfrm>
           <a:prstGeom prst="rect">
             <a:avLst/>
@@ -15748,7 +15748,7 @@
                 <a:latin typeface="Arial"/>
                 <a:ea typeface="微软雅黑"/>
               </a:rPr>
-              <a:t>创新 2 · 四层容错</a:t>
+              <a:t>工作 2 · 四层容错</a:t>
             </a:r>
           </a:p>
           <a:p>
@@ -15768,7 +15768,7 @@
                 <a:latin typeface="Arial"/>
                 <a:ea typeface="微软雅黑"/>
               </a:rPr>
-              <a:t>不变量 I 的完整证明要点</a:t>
+              <a:t>L0 前置校验、L1 同步重试、L2 异步回收、L3 跨实例回退，并给出不变量 I 的证明要点</a:t>
             </a:r>
           </a:p>
         </p:txBody>
@@ -15781,8 +15781,8 @@
         </p:nvSpPr>
         <p:spPr>
           <a:xfrm>
-            <a:off x="8113775" y="1874519"/>
-            <a:ext cx="3517391" cy="1051560"/>
+            <a:off x="8113775" y="1810512"/>
+            <a:ext cx="3517391" cy="1444752"/>
           </a:xfrm>
           <a:prstGeom prst="roundRect">
             <a:avLst/>
@@ -15827,8 +15827,8 @@
         </p:nvSpPr>
         <p:spPr>
           <a:xfrm>
-            <a:off x="8113775" y="1874519"/>
-            <a:ext cx="50292" cy="1051560"/>
+            <a:off x="8113775" y="1810512"/>
+            <a:ext cx="50292" cy="1444752"/>
           </a:xfrm>
           <a:prstGeom prst="rect">
             <a:avLst/>
@@ -15871,8 +15871,8 @@
         </p:nvSpPr>
         <p:spPr>
           <a:xfrm>
-            <a:off x="8278367" y="2002536"/>
-            <a:ext cx="3243072" cy="868680"/>
+            <a:off x="8278367" y="1938528"/>
+            <a:ext cx="3243072" cy="1261872"/>
           </a:xfrm>
           <a:prstGeom prst="rect">
             <a:avLst/>
@@ -15894,7 +15894,7 @@
                 <a:latin typeface="Arial"/>
                 <a:ea typeface="微软雅黑"/>
               </a:rPr>
-              <a:t>证据 1 · 规模</a:t>
+              <a:t>工作 3 · ENO 优化</a:t>
             </a:r>
           </a:p>
           <a:p>
@@ -15914,7 +15914,7 @@
                 <a:latin typeface="Arial"/>
                 <a:ea typeface="微软雅黑"/>
               </a:rPr>
-              <a:t>16 场景 / 144 run / 100% 成功率</a:t>
+              <a:t>Binder 合并进 Scheduler 进程，CacheAdapter 零拷贝共享缓存，消除跨进程调用与序列化</a:t>
             </a:r>
           </a:p>
         </p:txBody>
@@ -15927,8 +15927,8 @@
         </p:nvSpPr>
         <p:spPr>
           <a:xfrm>
-            <a:off x="566928" y="3182111"/>
-            <a:ext cx="3517391" cy="1051560"/>
+            <a:off x="566928" y="3511296"/>
+            <a:ext cx="3517391" cy="1444752"/>
           </a:xfrm>
           <a:prstGeom prst="roundRect">
             <a:avLst/>
@@ -15973,8 +15973,8 @@
         </p:nvSpPr>
         <p:spPr>
           <a:xfrm>
-            <a:off x="566928" y="3182111"/>
-            <a:ext cx="50292" cy="1051560"/>
+            <a:off x="566928" y="3511296"/>
+            <a:ext cx="50292" cy="1444752"/>
           </a:xfrm>
           <a:prstGeom prst="rect">
             <a:avLst/>
@@ -16017,8 +16017,8 @@
         </p:nvSpPr>
         <p:spPr>
           <a:xfrm>
-            <a:off x="731520" y="3310127"/>
-            <a:ext cx="3243072" cy="868680"/>
+            <a:off x="731520" y="3639312"/>
+            <a:ext cx="3243072" cy="1261872"/>
           </a:xfrm>
           <a:prstGeom prst="rect">
             <a:avLst/>
@@ -16040,7 +16040,7 @@
                 <a:latin typeface="Arial"/>
                 <a:ea typeface="微软雅黑"/>
               </a:rPr>
-              <a:t>证据 2 · 性能</a:t>
+              <a:t>创新 1 · ENO 架构</a:t>
             </a:r>
           </a:p>
           <a:p>
@@ -16060,7 +16060,7 @@
                 <a:latin typeface="Arial"/>
                 <a:ea typeface="微软雅黑"/>
               </a:rPr>
-              <a:t>平均 +11.9%；P99 最高 -82.9%</a:t>
+              <a:t>单 Dispatcher、多独立 Scheduler；吞吐提升来自去掉跨进程绑定链路，不是换调度算法</a:t>
             </a:r>
           </a:p>
         </p:txBody>
@@ -16073,8 +16073,8 @@
         </p:nvSpPr>
         <p:spPr>
           <a:xfrm>
-            <a:off x="4340351" y="3182111"/>
-            <a:ext cx="3517391" cy="1051560"/>
+            <a:off x="4340351" y="3511296"/>
+            <a:ext cx="3517391" cy="1444752"/>
           </a:xfrm>
           <a:prstGeom prst="roundRect">
             <a:avLst/>
@@ -16119,8 +16119,8 @@
         </p:nvSpPr>
         <p:spPr>
           <a:xfrm>
-            <a:off x="4340351" y="3182111"/>
-            <a:ext cx="50292" cy="1051560"/>
+            <a:off x="4340351" y="3511296"/>
+            <a:ext cx="50292" cy="1444752"/>
           </a:xfrm>
           <a:prstGeom prst="rect">
             <a:avLst/>
@@ -16163,8 +16163,8 @@
         </p:nvSpPr>
         <p:spPr>
           <a:xfrm>
-            <a:off x="4504943" y="3310127"/>
-            <a:ext cx="3243072" cy="868680"/>
+            <a:off x="4504943" y="3639312"/>
+            <a:ext cx="3243072" cy="1261872"/>
           </a:xfrm>
           <a:prstGeom prst="rect">
             <a:avLst/>
@@ -16186,7 +16186,7 @@
                 <a:latin typeface="Arial"/>
                 <a:ea typeface="微软雅黑"/>
               </a:rPr>
-              <a:t>证据 3 · 扩展</a:t>
+              <a:t>创新 2 · 四层容错</a:t>
             </a:r>
           </a:p>
           <a:p>
@@ -16206,7 +16206,7 @@
                 <a:latin typeface="Arial"/>
                 <a:ea typeface="微软雅黑"/>
               </a:rPr>
-              <a:t>实例 1→3：+17.5% 对 +1.4%</a:t>
+              <a:t>面向分区归属漂移与实例失活；每层对应一类 etcd 语义，守住至多绑定一次</a:t>
             </a:r>
           </a:p>
         </p:txBody>
@@ -16219,8 +16219,8 @@
         </p:nvSpPr>
         <p:spPr>
           <a:xfrm>
-            <a:off x="8113775" y="3182111"/>
-            <a:ext cx="3517391" cy="1051560"/>
+            <a:off x="8113775" y="3511296"/>
+            <a:ext cx="3517391" cy="1444752"/>
           </a:xfrm>
           <a:prstGeom prst="roundRect">
             <a:avLst/>
@@ -16265,8 +16265,8 @@
         </p:nvSpPr>
         <p:spPr>
           <a:xfrm>
-            <a:off x="8113775" y="3182111"/>
-            <a:ext cx="50292" cy="1051560"/>
+            <a:off x="8113775" y="3511296"/>
+            <a:ext cx="50292" cy="1444752"/>
           </a:xfrm>
           <a:prstGeom prst="rect">
             <a:avLst/>
@@ -16309,8 +16309,8 @@
         </p:nvSpPr>
         <p:spPr>
           <a:xfrm>
-            <a:off x="8278367" y="3310127"/>
-            <a:ext cx="3243072" cy="868680"/>
+            <a:off x="8278367" y="3639312"/>
+            <a:ext cx="3243072" cy="1261872"/>
           </a:xfrm>
           <a:prstGeom prst="rect">
             <a:avLst/>
@@ -16332,7 +16332,7 @@
                 <a:latin typeface="Arial"/>
                 <a:ea typeface="微软雅黑"/>
               </a:rPr>
-              <a:t>价值 · 落地</a:t>
+              <a:t>主场景读数（s3/w3）</a:t>
             </a:r>
           </a:p>
           <a:p>
@@ -16352,7 +16352,7 @@
                 <a:latin typeface="Arial"/>
                 <a:ea typeface="微软雅黑"/>
               </a:rPr>
-              <a:t>不改 API、可平滑替换、基准开源</a:t>
+              <a:t>P99 32.57 → 16.22 s（inst1）、0.13 vs 0.15 s（inst3）；有效吞吐 +5.1%~+21.7%</a:t>
             </a:r>
           </a:p>
         </p:txBody>
@@ -16360,6 +16360,42 @@
       <p:sp>
         <p:nvSpPr>
           <p:cNvPr id="24" name="TextBox 23"/>
+          <p:cNvSpPr txBox="1"/>
+          <p:nvPr/>
+        </p:nvSpPr>
+        <p:spPr>
+          <a:xfrm>
+            <a:off x="566928" y="5175504"/>
+            <a:ext cx="11064240" cy="777240"/>
+          </a:xfrm>
+          <a:prstGeom prst="rect">
+            <a:avLst/>
+          </a:prstGeom>
+          <a:noFill/>
+        </p:spPr>
+        <p:txBody>
+          <a:bodyPr wrap="square" anchor="t" lIns="0" rIns="0" tIns="0" bIns="0">
+            <a:spAutoFit/>
+          </a:bodyPr>
+          <a:lstStyle/>
+          <a:p>
+            <a:pPr algn="l"/>
+            <a:r>
+              <a:rPr sz="1200" b="0">
+                <a:solidFill>
+                  <a:srgbClr val="566474"/>
+                </a:solidFill>
+                <a:latin typeface="Arial"/>
+                <a:ea typeface="微软雅黑"/>
+              </a:rPr>
+              <a:t>▪  副产出：16 个场景、144 次 run 的原始数据与脚本随本文开源</a:t>
+            </a:r>
+          </a:p>
+        </p:txBody>
+      </p:sp>
+      <p:sp>
+        <p:nvSpPr>
+          <p:cNvPr id="25" name="TextBox 24"/>
           <p:cNvSpPr txBox="1"/>
           <p:nvPr/>
         </p:nvSpPr>

--- a/docs/thesis/defense/答辩PPT-基于etcd的分布式Kubernetes调度器.pptx
+++ b/docs/thesis/defense/答辩PPT-基于etcd的分布式Kubernetes调度器.pptx
@@ -35,7 +35,6 @@
     <p:sldId id="283" r:id="rId35"/>
     <p:sldId id="284" r:id="rId36"/>
     <p:sldId id="285" r:id="rId37"/>
-    <p:sldId id="286" r:id="rId38"/>
   </p:sldIdLst>
   <p:sldSz cx="12191695" cy="6858000" type="screen4x3"/>
   <p:notesSz cx="6858000" cy="9144000"/>
@@ -1582,7 +1581,7 @@
           <a:lstStyle/>
           <a:p>
             <a:r>
-              <a:t>最后收束。两个创新：ENO 把 Binder 放进进程内并用 CacheAdapter 共享缓存；四层容错给出不变量 I 的证明要点。三组证据：16 场景 144 次 run 全成功、平均 +11.9%、P99 最高 -82.9%、实例扩展 +17.5% 对 +1.4%。价值：不改 API、保留开关、基准开源。</a:t>
+              <a:t>汇报到这里。一句话总结：把 Binder 合并进 Scheduler 进程，用 etcd 原子语义上的四层容错守住“至多绑定一次”，在 16 个场景、144 次 run 上做到更高吞吐、更低尾延迟与 100% 绑定成功率。请各位老师批评指正。</a:t>
             </a:r>
           </a:p>
         </p:txBody>
@@ -1652,7 +1651,7 @@
           <a:lstStyle/>
           <a:p>
             <a:r>
-              <a:t>汇报到这里。一句话总结：把 Binder 合并进 Scheduler 进程，用 etcd 原子语义上的四层容错守住“至多绑定一次”，在 16 个场景、144 次 run 上做到更高吞吐、更低尾延迟与 100% 绑定成功率。请各位老师批评指正。</a:t>
+              <a:t>备用页：抽查任意场景的原始数值。</a:t>
             </a:r>
           </a:p>
         </p:txBody>
@@ -1722,7 +1721,7 @@
           <a:lstStyle/>
           <a:p>
             <a:r>
-              <a:t>备用页：抽查任意场景的原始数值。</a:t>
+              <a:t>备用页：如果评委追问某个数字怎么算出来的，用这页回答。</a:t>
             </a:r>
           </a:p>
         </p:txBody>
@@ -1792,7 +1791,7 @@
           <a:lstStyle/>
           <a:p>
             <a:r>
-              <a:t>备用页：如果评委追问某个数字怎么算出来的，用这页回答。</a:t>
+              <a:t>备用页：幸存者偏差的解释。过载时 Pod 根本没被处理，所以延迟看起来“很好”。</a:t>
             </a:r>
           </a:p>
         </p:txBody>
@@ -1862,7 +1861,7 @@
           <a:lstStyle/>
           <a:p>
             <a:r>
-              <a:t>备用页：幸存者偏差的解释。过载时 Pod 根本没被处理，所以延迟看起来“很好”。</a:t>
+              <a:t>备用页：w6 反向结果的完整数据与解释。</a:t>
             </a:r>
           </a:p>
         </p:txBody>
@@ -1932,7 +1931,7 @@
           <a:lstStyle/>
           <a:p>
             <a:r>
-              <a:t>备用页：w6 反向结果的完整数据与解释。</a:t>
+              <a:t>备用页：公平性与资源开销的口径说明。</a:t>
             </a:r>
           </a:p>
         </p:txBody>
@@ -2002,7 +2001,7 @@
           <a:lstStyle/>
           <a:p>
             <a:r>
-              <a:t>备用页：公平性与资源开销的口径说明。</a:t>
+              <a:t>备用页：评委问可复现性时展示。</a:t>
             </a:r>
           </a:p>
         </p:txBody>
@@ -2098,76 +2097,6 @@
 </file>
 
 <file path=ppt/notesSlides/notesSlide30.xml><?xml version="1.0" encoding="utf-8"?>
-<p:notes xmlns:a="http://schemas.openxmlformats.org/drawingml/2006/main" xmlns:p="http://schemas.openxmlformats.org/presentationml/2006/main" xmlns:r="http://schemas.openxmlformats.org/officeDocument/2006/relationships">
-  <p:cSld>
-    <p:spTree>
-      <p:nvGrpSpPr>
-        <p:cNvPr id="1" name=""/>
-        <p:cNvGrpSpPr/>
-        <p:nvPr/>
-      </p:nvGrpSpPr>
-      <p:grpSpPr>
-        <a:xfrm>
-          <a:off x="0" y="0"/>
-          <a:ext cx="0" cy="0"/>
-          <a:chOff x="0" y="0"/>
-          <a:chExt cx="0" cy="0"/>
-        </a:xfrm>
-      </p:grpSpPr>
-      <p:sp>
-        <p:nvSpPr>
-          <p:cNvPr id="2" name="Slide Image Placeholder 1"/>
-          <p:cNvSpPr>
-            <a:spLocks noGrp="1"/>
-          </p:cNvSpPr>
-          <p:nvPr>
-            <p:ph type="sldImg" idx="2"/>
-          </p:nvPr>
-        </p:nvSpPr>
-        <p:spPr/>
-      </p:sp>
-      <p:sp>
-        <p:nvSpPr>
-          <p:cNvPr id="3" name="Notes Placeholder 2"/>
-          <p:cNvSpPr>
-            <a:spLocks noGrp="1"/>
-          </p:cNvSpPr>
-          <p:nvPr>
-            <p:ph type="body" idx="3" sz="quarter"/>
-          </p:nvPr>
-        </p:nvSpPr>
-        <p:spPr/>
-        <p:txBody>
-          <a:bodyPr/>
-          <a:lstStyle/>
-          <a:p>
-            <a:r>
-              <a:t>备用页：评委问可复现性时展示。</a:t>
-            </a:r>
-          </a:p>
-        </p:txBody>
-      </p:sp>
-      <p:sp>
-        <p:nvSpPr>
-          <p:cNvPr id="4" name="Slide Number Placeholder 3"/>
-          <p:cNvSpPr>
-            <a:spLocks noGrp="1"/>
-          </p:cNvSpPr>
-          <p:nvPr>
-            <p:ph type="sldNum" idx="5" sz="quarter"/>
-          </p:nvPr>
-        </p:nvSpPr>
-        <p:spPr/>
-      </p:sp>
-    </p:spTree>
-  </p:cSld>
-  <p:clrMapOvr>
-    <a:masterClrMapping/>
-  </p:clrMapOvr>
-</p:notes>
-</file>
-
-<file path=ppt/notesSlides/notesSlide31.xml><?xml version="1.0" encoding="utf-8"?>
 <p:notes xmlns:a="http://schemas.openxmlformats.org/drawingml/2006/main" xmlns:p="http://schemas.openxmlformats.org/presentationml/2006/main" xmlns:r="http://schemas.openxmlformats.org/officeDocument/2006/relationships">
   <p:cSld>
     <p:spTree>
@@ -5910,7 +5839,7 @@
                 <a:latin typeface="Arial"/>
                 <a:ea typeface="微软雅黑"/>
               </a:rPr>
-              <a:t>1 / 24</a:t>
+              <a:t>1 / 23</a:t>
             </a:r>
           </a:p>
         </p:txBody>
@@ -7044,7 +6973,7 @@
                 <a:latin typeface="Arial"/>
                 <a:ea typeface="微软雅黑"/>
               </a:rPr>
-              <a:t>10 / 24</a:t>
+              <a:t>10 / 23</a:t>
             </a:r>
           </a:p>
         </p:txBody>
@@ -7398,7 +7327,7 @@
                 <a:latin typeface="Arial"/>
                 <a:ea typeface="微软雅黑"/>
               </a:rPr>
-              <a:t>11 / 24</a:t>
+              <a:t>11 / 23</a:t>
             </a:r>
           </a:p>
         </p:txBody>
@@ -8184,7 +8113,7 @@
                 <a:latin typeface="Arial"/>
                 <a:ea typeface="微软雅黑"/>
               </a:rPr>
-              <a:t>12 / 24</a:t>
+              <a:t>12 / 23</a:t>
             </a:r>
           </a:p>
         </p:txBody>
@@ -9276,7 +9205,7 @@
                 <a:latin typeface="Arial"/>
                 <a:ea typeface="微软雅黑"/>
               </a:rPr>
-              <a:t>13 / 24</a:t>
+              <a:t>13 / 23</a:t>
             </a:r>
           </a:p>
         </p:txBody>
@@ -9920,7 +9849,7 @@
                 <a:latin typeface="Arial"/>
                 <a:ea typeface="微软雅黑"/>
               </a:rPr>
-              <a:t>14 / 24</a:t>
+              <a:t>14 / 23</a:t>
             </a:r>
           </a:p>
         </p:txBody>
@@ -10758,7 +10687,7 @@
                 <a:latin typeface="Arial"/>
                 <a:ea typeface="微软雅黑"/>
               </a:rPr>
-              <a:t>15 / 24</a:t>
+              <a:t>15 / 23</a:t>
             </a:r>
           </a:p>
         </p:txBody>
@@ -11128,7 +11057,7 @@
                 <a:latin typeface="Arial"/>
                 <a:ea typeface="微软雅黑"/>
               </a:rPr>
-              <a:t>16 / 24</a:t>
+              <a:t>16 / 23</a:t>
             </a:r>
           </a:p>
         </p:txBody>
@@ -11498,7 +11427,7 @@
                 <a:latin typeface="Arial"/>
                 <a:ea typeface="微软雅黑"/>
               </a:rPr>
-              <a:t>17 / 24</a:t>
+              <a:t>17 / 23</a:t>
             </a:r>
           </a:p>
         </p:txBody>
@@ -12187,7 +12116,7 @@
                 <a:latin typeface="Arial"/>
                 <a:ea typeface="微软雅黑"/>
               </a:rPr>
-              <a:t>18 / 24</a:t>
+              <a:t>18 / 23</a:t>
             </a:r>
           </a:p>
         </p:txBody>
@@ -13130,7 +13059,7 @@
                 <a:latin typeface="Arial"/>
                 <a:ea typeface="微软雅黑"/>
               </a:rPr>
-              <a:t>19 / 24</a:t>
+              <a:t>19 / 23</a:t>
             </a:r>
           </a:p>
         </p:txBody>
@@ -13838,7 +13767,7 @@
                 <a:latin typeface="Arial"/>
                 <a:ea typeface="微软雅黑"/>
               </a:rPr>
-              <a:t>2 / 24</a:t>
+              <a:t>2 / 23</a:t>
             </a:r>
           </a:p>
         </p:txBody>
@@ -14208,7 +14137,7 @@
                 <a:latin typeface="Arial"/>
                 <a:ea typeface="微软雅黑"/>
               </a:rPr>
-              <a:t>20 / 24</a:t>
+              <a:t>20 / 23</a:t>
             </a:r>
           </a:p>
         </p:txBody>
@@ -14578,7 +14507,7 @@
                 <a:latin typeface="Arial"/>
                 <a:ea typeface="微软雅黑"/>
               </a:rPr>
-              <a:t>21 / 24</a:t>
+              <a:t>21 / 23</a:t>
             </a:r>
           </a:p>
         </p:txBody>
@@ -15282,7 +15211,7 @@
                 <a:latin typeface="Arial"/>
                 <a:ea typeface="微软雅黑"/>
               </a:rPr>
-              <a:t>22 / 24</a:t>
+              <a:t>22 / 23</a:t>
             </a:r>
           </a:p>
         </p:txBody>
@@ -15321,14 +15250,14 @@
         </p:nvSpPr>
         <p:spPr>
           <a:xfrm>
-            <a:off x="384048" y="420624"/>
-            <a:ext cx="77724" cy="475488"/>
+            <a:off x="1197864" y="2212848"/>
+            <a:ext cx="9866376" cy="20116"/>
           </a:xfrm>
           <a:prstGeom prst="rect">
             <a:avLst/>
           </a:prstGeom>
           <a:solidFill>
-            <a:srgbClr val="E8833A"/>
+            <a:srgbClr val="0B2A4A"/>
           </a:solidFill>
           <a:ln>
             <a:noFill/>
@@ -15365,8 +15294,8 @@
         </p:nvSpPr>
         <p:spPr>
           <a:xfrm>
-            <a:off x="566928" y="329184"/>
-            <a:ext cx="11064240" cy="713232"/>
+            <a:off x="914400" y="2395728"/>
+            <a:ext cx="10332720" cy="914400"/>
           </a:xfrm>
           <a:prstGeom prst="rect">
             <a:avLst/>
@@ -15379,40 +15308,125 @@
           </a:bodyPr>
           <a:lstStyle/>
           <a:p>
-            <a:pPr algn="l">
-              <a:lnSpc>
-                <a:spcPct val="105000"/>
-              </a:lnSpc>
-            </a:pPr>
-            <a:r>
-              <a:rPr sz="2700" b="1">
+            <a:pPr algn="ctr"/>
+            <a:r>
+              <a:rPr sz="3400" b="1">
                 <a:solidFill>
                   <a:srgbClr val="0B2A4A"/>
                 </a:solidFill>
                 <a:latin typeface="Arial"/>
                 <a:ea typeface="微软雅黑"/>
               </a:rPr>
-              <a:t>结论</a:t>
-            </a:r>
-          </a:p>
-        </p:txBody>
-      </p:sp>
-      <p:sp>
-        <p:nvSpPr>
-          <p:cNvPr id="4" name="Rectangle 3"/>
+              <a:t>谢谢各位老师，请批评指正</a:t>
+            </a:r>
+          </a:p>
+        </p:txBody>
+      </p:sp>
+      <p:sp>
+        <p:nvSpPr>
+          <p:cNvPr id="4" name="TextBox 3"/>
+          <p:cNvSpPr txBox="1"/>
+          <p:nvPr/>
+        </p:nvSpPr>
+        <p:spPr>
+          <a:xfrm>
+            <a:off x="914400" y="3429000"/>
+            <a:ext cx="10332720" cy="457200"/>
+          </a:xfrm>
+          <a:prstGeom prst="rect">
+            <a:avLst/>
+          </a:prstGeom>
+          <a:noFill/>
+        </p:spPr>
+        <p:txBody>
+          <a:bodyPr wrap="square" anchor="t" lIns="0" rIns="0" tIns="0" bIns="0">
+            <a:spAutoFit/>
+          </a:bodyPr>
+          <a:lstStyle/>
+          <a:p>
+            <a:pPr algn="ctr"/>
+            <a:r>
+              <a:rPr sz="1600" b="0">
+                <a:solidFill>
+                  <a:srgbClr val="566474"/>
+                </a:solidFill>
+                <a:latin typeface="Arial"/>
+                <a:ea typeface="微软雅黑"/>
+              </a:rPr>
+              <a:t>基于 etcd 的分布式 Kubernetes 调度器研究与实现</a:t>
+            </a:r>
+          </a:p>
+        </p:txBody>
+      </p:sp>
+      <p:sp>
+        <p:nvSpPr>
+          <p:cNvPr id="5" name="TextBox 4"/>
+          <p:cNvSpPr txBox="1"/>
+          <p:nvPr/>
+        </p:nvSpPr>
+        <p:spPr>
+          <a:xfrm>
+            <a:off x="914400" y="4343400"/>
+            <a:ext cx="10332720" cy="731520"/>
+          </a:xfrm>
+          <a:prstGeom prst="rect">
+            <a:avLst/>
+          </a:prstGeom>
+          <a:noFill/>
+        </p:spPr>
+        <p:txBody>
+          <a:bodyPr wrap="square" anchor="t" lIns="0" rIns="0" tIns="0" bIns="0">
+            <a:spAutoFit/>
+          </a:bodyPr>
+          <a:lstStyle/>
+          <a:p>
+            <a:pPr algn="ctr"/>
+            <a:r>
+              <a:rPr sz="1300" b="0">
+                <a:solidFill>
+                  <a:srgbClr val="566474"/>
+                </a:solidFill>
+                <a:latin typeface="Arial"/>
+                <a:ea typeface="微软雅黑"/>
+              </a:rPr>
+              <a:t>答辩人：[姓名]</a:t>
+            </a:r>
+          </a:p>
+          <a:p>
+            <a:pPr algn="ctr">
+              <a:spcBef>
+                <a:spcPts val="400"/>
+              </a:spcBef>
+            </a:pPr>
+            <a:r>
+              <a:rPr sz="1300" b="0">
+                <a:solidFill>
+                  <a:srgbClr val="566474"/>
+                </a:solidFill>
+                <a:latin typeface="Arial"/>
+                <a:ea typeface="微软雅黑"/>
+              </a:rPr>
+              <a:t>联系方式：[邮箱]</a:t>
+            </a:r>
+          </a:p>
+        </p:txBody>
+      </p:sp>
+      <p:sp>
+        <p:nvSpPr>
+          <p:cNvPr id="6" name="Rectangle 5"/>
           <p:cNvSpPr/>
           <p:nvPr/>
         </p:nvSpPr>
         <p:spPr>
           <a:xfrm>
-            <a:off x="566928" y="1298448"/>
-            <a:ext cx="32004" cy="365760"/>
+            <a:off x="1197864" y="5074920"/>
+            <a:ext cx="9866376" cy="20116"/>
           </a:xfrm>
           <a:prstGeom prst="rect">
             <a:avLst/>
           </a:prstGeom>
           <a:solidFill>
-            <a:srgbClr val="1F5C99"/>
+            <a:srgbClr val="0B2A4A"/>
           </a:solidFill>
           <a:ln>
             <a:noFill/>
@@ -15443,65 +15457,23 @@
       </p:sp>
       <p:sp>
         <p:nvSpPr>
-          <p:cNvPr id="5" name="TextBox 4"/>
-          <p:cNvSpPr txBox="1"/>
-          <p:nvPr/>
-        </p:nvSpPr>
-        <p:spPr>
-          <a:xfrm>
-            <a:off x="713232" y="1261872"/>
-            <a:ext cx="10744200" cy="438912"/>
-          </a:xfrm>
-          <a:prstGeom prst="rect">
-            <a:avLst/>
-          </a:prstGeom>
-          <a:noFill/>
-        </p:spPr>
-        <p:txBody>
-          <a:bodyPr wrap="square" anchor="ctr" lIns="0" rIns="0" tIns="0" bIns="0">
-            <a:spAutoFit/>
-          </a:bodyPr>
-          <a:lstStyle/>
-          <a:p>
-            <a:pPr algn="l">
-              <a:lnSpc>
-                <a:spcPct val="110000"/>
-              </a:lnSpc>
-            </a:pPr>
-            <a:r>
-              <a:rPr sz="1800" b="1">
-                <a:solidFill>
-                  <a:srgbClr val="1F5C99"/>
-                </a:solidFill>
-                <a:latin typeface="Arial"/>
-                <a:ea typeface="微软雅黑"/>
-              </a:rPr>
-              <a:t>三项工作、两个创新，都有可复现实验支撑，且保持了向后兼容</a:t>
-            </a:r>
-          </a:p>
-        </p:txBody>
-      </p:sp>
-      <p:sp>
-        <p:nvSpPr>
-          <p:cNvPr id="6" name="Rounded Rectangle 5"/>
+          <p:cNvPr id="7" name="Rectangle 6"/>
           <p:cNvSpPr/>
           <p:nvPr/>
         </p:nvSpPr>
         <p:spPr>
           <a:xfrm>
-            <a:off x="566928" y="1810512"/>
-            <a:ext cx="3517391" cy="1444752"/>
-          </a:xfrm>
-          <a:prstGeom prst="roundRect">
+            <a:off x="36576" y="6748272"/>
+            <a:ext cx="12088368" cy="45720"/>
+          </a:xfrm>
+          <a:prstGeom prst="rect">
             <a:avLst/>
           </a:prstGeom>
           <a:solidFill>
-            <a:srgbClr val="F5F7FA"/>
+            <a:srgbClr val="0B2A4A"/>
           </a:solidFill>
-          <a:ln w="9525">
-            <a:solidFill>
-              <a:srgbClr val="D8DFE8"/>
-            </a:solidFill>
+          <a:ln>
+            <a:noFill/>
           </a:ln>
           <a:effectLst/>
         </p:spPr>
@@ -15529,58 +15501,14 @@
       </p:sp>
       <p:sp>
         <p:nvSpPr>
-          <p:cNvPr id="7" name="Rectangle 6"/>
-          <p:cNvSpPr/>
-          <p:nvPr/>
-        </p:nvSpPr>
-        <p:spPr>
-          <a:xfrm>
-            <a:off x="566928" y="1810512"/>
-            <a:ext cx="50292" cy="1444752"/>
-          </a:xfrm>
-          <a:prstGeom prst="rect">
-            <a:avLst/>
-          </a:prstGeom>
-          <a:solidFill>
-            <a:srgbClr val="1F5C99"/>
-          </a:solidFill>
-          <a:ln>
-            <a:noFill/>
-          </a:ln>
-          <a:effectLst/>
-        </p:spPr>
-        <p:style>
-          <a:lnRef idx="1">
-            <a:schemeClr val="accent1"/>
-          </a:lnRef>
-          <a:fillRef idx="3">
-            <a:schemeClr val="accent1"/>
-          </a:fillRef>
-          <a:effectRef idx="2">
-            <a:schemeClr val="accent1"/>
-          </a:effectRef>
-          <a:fontRef idx="minor">
-            <a:schemeClr val="lt1"/>
-          </a:fontRef>
-        </p:style>
-        <p:txBody>
-          <a:bodyPr rtlCol="0" anchor="ctr"/>
-          <a:lstStyle/>
-          <a:p>
-            <a:pPr algn="ctr"/>
-          </a:p>
-        </p:txBody>
-      </p:sp>
-      <p:sp>
-        <p:nvSpPr>
           <p:cNvPr id="8" name="TextBox 7"/>
           <p:cNvSpPr txBox="1"/>
           <p:nvPr/>
         </p:nvSpPr>
         <p:spPr>
           <a:xfrm>
-            <a:off x="731520" y="1938528"/>
-            <a:ext cx="3243072" cy="1261872"/>
+            <a:off x="10780776" y="6345936"/>
+            <a:ext cx="850392" cy="219456"/>
           </a:xfrm>
           <a:prstGeom prst="rect">
             <a:avLst/>
@@ -15593,838 +15521,16 @@
           </a:bodyPr>
           <a:lstStyle/>
           <a:p>
-            <a:pPr algn="l"/>
-            <a:r>
-              <a:rPr sz="1400" b="1">
-                <a:solidFill>
-                  <a:srgbClr val="0B2A4A"/>
+            <a:pPr algn="r"/>
+            <a:r>
+              <a:rPr sz="950" b="0">
+                <a:solidFill>
+                  <a:srgbClr val="566474"/>
                 </a:solidFill>
                 <a:latin typeface="Arial"/>
                 <a:ea typeface="微软雅黑"/>
               </a:rPr>
-              <a:t>工作 1 · 架构梳理</a:t>
-            </a:r>
-          </a:p>
-          <a:p>
-            <a:pPr algn="l">
-              <a:lnSpc>
-                <a:spcPct val="110000"/>
-              </a:lnSpc>
-              <a:spcBef>
-                <a:spcPts val="400"/>
-              </a:spcBef>
-            </a:pPr>
-            <a:r>
-              <a:rPr sz="1150" b="0">
-                <a:solidFill>
-                  <a:srgbClr val="333333"/>
-                </a:solidFill>
-                <a:latin typeface="Arial"/>
-                <a:ea typeface="微软雅黑"/>
-              </a:rPr>
-              <a:t>Dispatcher / Scheduler / Binder 三层与 Pod 完整流转；不依赖自研协调机制，全部建立在三种 etcd 原子语义上</a:t>
-            </a:r>
-          </a:p>
-        </p:txBody>
-      </p:sp>
-      <p:sp>
-        <p:nvSpPr>
-          <p:cNvPr id="9" name="Rounded Rectangle 8"/>
-          <p:cNvSpPr/>
-          <p:nvPr/>
-        </p:nvSpPr>
-        <p:spPr>
-          <a:xfrm>
-            <a:off x="4340351" y="1810512"/>
-            <a:ext cx="3517391" cy="1444752"/>
-          </a:xfrm>
-          <a:prstGeom prst="roundRect">
-            <a:avLst/>
-          </a:prstGeom>
-          <a:solidFill>
-            <a:srgbClr val="F5F7FA"/>
-          </a:solidFill>
-          <a:ln w="9525">
-            <a:solidFill>
-              <a:srgbClr val="D8DFE8"/>
-            </a:solidFill>
-          </a:ln>
-          <a:effectLst/>
-        </p:spPr>
-        <p:style>
-          <a:lnRef idx="1">
-            <a:schemeClr val="accent1"/>
-          </a:lnRef>
-          <a:fillRef idx="3">
-            <a:schemeClr val="accent1"/>
-          </a:fillRef>
-          <a:effectRef idx="2">
-            <a:schemeClr val="accent1"/>
-          </a:effectRef>
-          <a:fontRef idx="minor">
-            <a:schemeClr val="lt1"/>
-          </a:fontRef>
-        </p:style>
-        <p:txBody>
-          <a:bodyPr rtlCol="0" anchor="ctr"/>
-          <a:lstStyle/>
-          <a:p>
-            <a:pPr algn="ctr"/>
-          </a:p>
-        </p:txBody>
-      </p:sp>
-      <p:sp>
-        <p:nvSpPr>
-          <p:cNvPr id="10" name="Rectangle 9"/>
-          <p:cNvSpPr/>
-          <p:nvPr/>
-        </p:nvSpPr>
-        <p:spPr>
-          <a:xfrm>
-            <a:off x="4340351" y="1810512"/>
-            <a:ext cx="50292" cy="1444752"/>
-          </a:xfrm>
-          <a:prstGeom prst="rect">
-            <a:avLst/>
-          </a:prstGeom>
-          <a:solidFill>
-            <a:srgbClr val="1F5C99"/>
-          </a:solidFill>
-          <a:ln>
-            <a:noFill/>
-          </a:ln>
-          <a:effectLst/>
-        </p:spPr>
-        <p:style>
-          <a:lnRef idx="1">
-            <a:schemeClr val="accent1"/>
-          </a:lnRef>
-          <a:fillRef idx="3">
-            <a:schemeClr val="accent1"/>
-          </a:fillRef>
-          <a:effectRef idx="2">
-            <a:schemeClr val="accent1"/>
-          </a:effectRef>
-          <a:fontRef idx="minor">
-            <a:schemeClr val="lt1"/>
-          </a:fontRef>
-        </p:style>
-        <p:txBody>
-          <a:bodyPr rtlCol="0" anchor="ctr"/>
-          <a:lstStyle/>
-          <a:p>
-            <a:pPr algn="ctr"/>
-          </a:p>
-        </p:txBody>
-      </p:sp>
-      <p:sp>
-        <p:nvSpPr>
-          <p:cNvPr id="11" name="TextBox 10"/>
-          <p:cNvSpPr txBox="1"/>
-          <p:nvPr/>
-        </p:nvSpPr>
-        <p:spPr>
-          <a:xfrm>
-            <a:off x="4504943" y="1938528"/>
-            <a:ext cx="3243072" cy="1261872"/>
-          </a:xfrm>
-          <a:prstGeom prst="rect">
-            <a:avLst/>
-          </a:prstGeom>
-          <a:noFill/>
-        </p:spPr>
-        <p:txBody>
-          <a:bodyPr wrap="square" anchor="t" lIns="0" rIns="0" tIns="0" bIns="0">
-            <a:spAutoFit/>
-          </a:bodyPr>
-          <a:lstStyle/>
-          <a:p>
-            <a:pPr algn="l"/>
-            <a:r>
-              <a:rPr sz="1400" b="1">
-                <a:solidFill>
-                  <a:srgbClr val="0B2A4A"/>
-                </a:solidFill>
-                <a:latin typeface="Arial"/>
-                <a:ea typeface="微软雅黑"/>
-              </a:rPr>
-              <a:t>工作 2 · 四层容错</a:t>
-            </a:r>
-          </a:p>
-          <a:p>
-            <a:pPr algn="l">
-              <a:lnSpc>
-                <a:spcPct val="110000"/>
-              </a:lnSpc>
-              <a:spcBef>
-                <a:spcPts val="400"/>
-              </a:spcBef>
-            </a:pPr>
-            <a:r>
-              <a:rPr sz="1150" b="0">
-                <a:solidFill>
-                  <a:srgbClr val="333333"/>
-                </a:solidFill>
-                <a:latin typeface="Arial"/>
-                <a:ea typeface="微软雅黑"/>
-              </a:rPr>
-              <a:t>L0 前置校验、L1 同步重试、L2 异步回收、L3 跨实例回退，并给出不变量 I 的证明要点</a:t>
-            </a:r>
-          </a:p>
-        </p:txBody>
-      </p:sp>
-      <p:sp>
-        <p:nvSpPr>
-          <p:cNvPr id="12" name="Rounded Rectangle 11"/>
-          <p:cNvSpPr/>
-          <p:nvPr/>
-        </p:nvSpPr>
-        <p:spPr>
-          <a:xfrm>
-            <a:off x="8113775" y="1810512"/>
-            <a:ext cx="3517391" cy="1444752"/>
-          </a:xfrm>
-          <a:prstGeom prst="roundRect">
-            <a:avLst/>
-          </a:prstGeom>
-          <a:solidFill>
-            <a:srgbClr val="F5F7FA"/>
-          </a:solidFill>
-          <a:ln w="9525">
-            <a:solidFill>
-              <a:srgbClr val="D8DFE8"/>
-            </a:solidFill>
-          </a:ln>
-          <a:effectLst/>
-        </p:spPr>
-        <p:style>
-          <a:lnRef idx="1">
-            <a:schemeClr val="accent1"/>
-          </a:lnRef>
-          <a:fillRef idx="3">
-            <a:schemeClr val="accent1"/>
-          </a:fillRef>
-          <a:effectRef idx="2">
-            <a:schemeClr val="accent1"/>
-          </a:effectRef>
-          <a:fontRef idx="minor">
-            <a:schemeClr val="lt1"/>
-          </a:fontRef>
-        </p:style>
-        <p:txBody>
-          <a:bodyPr rtlCol="0" anchor="ctr"/>
-          <a:lstStyle/>
-          <a:p>
-            <a:pPr algn="ctr"/>
-          </a:p>
-        </p:txBody>
-      </p:sp>
-      <p:sp>
-        <p:nvSpPr>
-          <p:cNvPr id="13" name="Rectangle 12"/>
-          <p:cNvSpPr/>
-          <p:nvPr/>
-        </p:nvSpPr>
-        <p:spPr>
-          <a:xfrm>
-            <a:off x="8113775" y="1810512"/>
-            <a:ext cx="50292" cy="1444752"/>
-          </a:xfrm>
-          <a:prstGeom prst="rect">
-            <a:avLst/>
-          </a:prstGeom>
-          <a:solidFill>
-            <a:srgbClr val="1F5C99"/>
-          </a:solidFill>
-          <a:ln>
-            <a:noFill/>
-          </a:ln>
-          <a:effectLst/>
-        </p:spPr>
-        <p:style>
-          <a:lnRef idx="1">
-            <a:schemeClr val="accent1"/>
-          </a:lnRef>
-          <a:fillRef idx="3">
-            <a:schemeClr val="accent1"/>
-          </a:fillRef>
-          <a:effectRef idx="2">
-            <a:schemeClr val="accent1"/>
-          </a:effectRef>
-          <a:fontRef idx="minor">
-            <a:schemeClr val="lt1"/>
-          </a:fontRef>
-        </p:style>
-        <p:txBody>
-          <a:bodyPr rtlCol="0" anchor="ctr"/>
-          <a:lstStyle/>
-          <a:p>
-            <a:pPr algn="ctr"/>
-          </a:p>
-        </p:txBody>
-      </p:sp>
-      <p:sp>
-        <p:nvSpPr>
-          <p:cNvPr id="14" name="TextBox 13"/>
-          <p:cNvSpPr txBox="1"/>
-          <p:nvPr/>
-        </p:nvSpPr>
-        <p:spPr>
-          <a:xfrm>
-            <a:off x="8278367" y="1938528"/>
-            <a:ext cx="3243072" cy="1261872"/>
-          </a:xfrm>
-          <a:prstGeom prst="rect">
-            <a:avLst/>
-          </a:prstGeom>
-          <a:noFill/>
-        </p:spPr>
-        <p:txBody>
-          <a:bodyPr wrap="square" anchor="t" lIns="0" rIns="0" tIns="0" bIns="0">
-            <a:spAutoFit/>
-          </a:bodyPr>
-          <a:lstStyle/>
-          <a:p>
-            <a:pPr algn="l"/>
-            <a:r>
-              <a:rPr sz="1400" b="1">
-                <a:solidFill>
-                  <a:srgbClr val="0B2A4A"/>
-                </a:solidFill>
-                <a:latin typeface="Arial"/>
-                <a:ea typeface="微软雅黑"/>
-              </a:rPr>
-              <a:t>工作 3 · ENO 优化</a:t>
-            </a:r>
-          </a:p>
-          <a:p>
-            <a:pPr algn="l">
-              <a:lnSpc>
-                <a:spcPct val="110000"/>
-              </a:lnSpc>
-              <a:spcBef>
-                <a:spcPts val="400"/>
-              </a:spcBef>
-            </a:pPr>
-            <a:r>
-              <a:rPr sz="1150" b="0">
-                <a:solidFill>
-                  <a:srgbClr val="333333"/>
-                </a:solidFill>
-                <a:latin typeface="Arial"/>
-                <a:ea typeface="微软雅黑"/>
-              </a:rPr>
-              <a:t>Binder 合并进 Scheduler 进程，CacheAdapter 零拷贝共享缓存，消除跨进程调用与序列化</a:t>
-            </a:r>
-          </a:p>
-        </p:txBody>
-      </p:sp>
-      <p:sp>
-        <p:nvSpPr>
-          <p:cNvPr id="15" name="Rounded Rectangle 14"/>
-          <p:cNvSpPr/>
-          <p:nvPr/>
-        </p:nvSpPr>
-        <p:spPr>
-          <a:xfrm>
-            <a:off x="566928" y="3511296"/>
-            <a:ext cx="3517391" cy="1444752"/>
-          </a:xfrm>
-          <a:prstGeom prst="roundRect">
-            <a:avLst/>
-          </a:prstGeom>
-          <a:solidFill>
-            <a:srgbClr val="F5F7FA"/>
-          </a:solidFill>
-          <a:ln w="9525">
-            <a:solidFill>
-              <a:srgbClr val="D8DFE8"/>
-            </a:solidFill>
-          </a:ln>
-          <a:effectLst/>
-        </p:spPr>
-        <p:style>
-          <a:lnRef idx="1">
-            <a:schemeClr val="accent1"/>
-          </a:lnRef>
-          <a:fillRef idx="3">
-            <a:schemeClr val="accent1"/>
-          </a:fillRef>
-          <a:effectRef idx="2">
-            <a:schemeClr val="accent1"/>
-          </a:effectRef>
-          <a:fontRef idx="minor">
-            <a:schemeClr val="lt1"/>
-          </a:fontRef>
-        </p:style>
-        <p:txBody>
-          <a:bodyPr rtlCol="0" anchor="ctr"/>
-          <a:lstStyle/>
-          <a:p>
-            <a:pPr algn="ctr"/>
-          </a:p>
-        </p:txBody>
-      </p:sp>
-      <p:sp>
-        <p:nvSpPr>
-          <p:cNvPr id="16" name="Rectangle 15"/>
-          <p:cNvSpPr/>
-          <p:nvPr/>
-        </p:nvSpPr>
-        <p:spPr>
-          <a:xfrm>
-            <a:off x="566928" y="3511296"/>
-            <a:ext cx="50292" cy="1444752"/>
-          </a:xfrm>
-          <a:prstGeom prst="rect">
-            <a:avLst/>
-          </a:prstGeom>
-          <a:solidFill>
-            <a:srgbClr val="1F5C99"/>
-          </a:solidFill>
-          <a:ln>
-            <a:noFill/>
-          </a:ln>
-          <a:effectLst/>
-        </p:spPr>
-        <p:style>
-          <a:lnRef idx="1">
-            <a:schemeClr val="accent1"/>
-          </a:lnRef>
-          <a:fillRef idx="3">
-            <a:schemeClr val="accent1"/>
-          </a:fillRef>
-          <a:effectRef idx="2">
-            <a:schemeClr val="accent1"/>
-          </a:effectRef>
-          <a:fontRef idx="minor">
-            <a:schemeClr val="lt1"/>
-          </a:fontRef>
-        </p:style>
-        <p:txBody>
-          <a:bodyPr rtlCol="0" anchor="ctr"/>
-          <a:lstStyle/>
-          <a:p>
-            <a:pPr algn="ctr"/>
-          </a:p>
-        </p:txBody>
-      </p:sp>
-      <p:sp>
-        <p:nvSpPr>
-          <p:cNvPr id="17" name="TextBox 16"/>
-          <p:cNvSpPr txBox="1"/>
-          <p:nvPr/>
-        </p:nvSpPr>
-        <p:spPr>
-          <a:xfrm>
-            <a:off x="731520" y="3639312"/>
-            <a:ext cx="3243072" cy="1261872"/>
-          </a:xfrm>
-          <a:prstGeom prst="rect">
-            <a:avLst/>
-          </a:prstGeom>
-          <a:noFill/>
-        </p:spPr>
-        <p:txBody>
-          <a:bodyPr wrap="square" anchor="t" lIns="0" rIns="0" tIns="0" bIns="0">
-            <a:spAutoFit/>
-          </a:bodyPr>
-          <a:lstStyle/>
-          <a:p>
-            <a:pPr algn="l"/>
-            <a:r>
-              <a:rPr sz="1400" b="1">
-                <a:solidFill>
-                  <a:srgbClr val="0B2A4A"/>
-                </a:solidFill>
-                <a:latin typeface="Arial"/>
-                <a:ea typeface="微软雅黑"/>
-              </a:rPr>
-              <a:t>创新 1 · ENO 架构</a:t>
-            </a:r>
-          </a:p>
-          <a:p>
-            <a:pPr algn="l">
-              <a:lnSpc>
-                <a:spcPct val="110000"/>
-              </a:lnSpc>
-              <a:spcBef>
-                <a:spcPts val="400"/>
-              </a:spcBef>
-            </a:pPr>
-            <a:r>
-              <a:rPr sz="1150" b="0">
-                <a:solidFill>
-                  <a:srgbClr val="333333"/>
-                </a:solidFill>
-                <a:latin typeface="Arial"/>
-                <a:ea typeface="微软雅黑"/>
-              </a:rPr>
-              <a:t>单 Dispatcher、多独立 Scheduler；吞吐提升来自去掉跨进程绑定链路，不是换调度算法</a:t>
-            </a:r>
-          </a:p>
-        </p:txBody>
-      </p:sp>
-      <p:sp>
-        <p:nvSpPr>
-          <p:cNvPr id="18" name="Rounded Rectangle 17"/>
-          <p:cNvSpPr/>
-          <p:nvPr/>
-        </p:nvSpPr>
-        <p:spPr>
-          <a:xfrm>
-            <a:off x="4340351" y="3511296"/>
-            <a:ext cx="3517391" cy="1444752"/>
-          </a:xfrm>
-          <a:prstGeom prst="roundRect">
-            <a:avLst/>
-          </a:prstGeom>
-          <a:solidFill>
-            <a:srgbClr val="F5F7FA"/>
-          </a:solidFill>
-          <a:ln w="9525">
-            <a:solidFill>
-              <a:srgbClr val="D8DFE8"/>
-            </a:solidFill>
-          </a:ln>
-          <a:effectLst/>
-        </p:spPr>
-        <p:style>
-          <a:lnRef idx="1">
-            <a:schemeClr val="accent1"/>
-          </a:lnRef>
-          <a:fillRef idx="3">
-            <a:schemeClr val="accent1"/>
-          </a:fillRef>
-          <a:effectRef idx="2">
-            <a:schemeClr val="accent1"/>
-          </a:effectRef>
-          <a:fontRef idx="minor">
-            <a:schemeClr val="lt1"/>
-          </a:fontRef>
-        </p:style>
-        <p:txBody>
-          <a:bodyPr rtlCol="0" anchor="ctr"/>
-          <a:lstStyle/>
-          <a:p>
-            <a:pPr algn="ctr"/>
-          </a:p>
-        </p:txBody>
-      </p:sp>
-      <p:sp>
-        <p:nvSpPr>
-          <p:cNvPr id="19" name="Rectangle 18"/>
-          <p:cNvSpPr/>
-          <p:nvPr/>
-        </p:nvSpPr>
-        <p:spPr>
-          <a:xfrm>
-            <a:off x="4340351" y="3511296"/>
-            <a:ext cx="50292" cy="1444752"/>
-          </a:xfrm>
-          <a:prstGeom prst="rect">
-            <a:avLst/>
-          </a:prstGeom>
-          <a:solidFill>
-            <a:srgbClr val="1F5C99"/>
-          </a:solidFill>
-          <a:ln>
-            <a:noFill/>
-          </a:ln>
-          <a:effectLst/>
-        </p:spPr>
-        <p:style>
-          <a:lnRef idx="1">
-            <a:schemeClr val="accent1"/>
-          </a:lnRef>
-          <a:fillRef idx="3">
-            <a:schemeClr val="accent1"/>
-          </a:fillRef>
-          <a:effectRef idx="2">
-            <a:schemeClr val="accent1"/>
-          </a:effectRef>
-          <a:fontRef idx="minor">
-            <a:schemeClr val="lt1"/>
-          </a:fontRef>
-        </p:style>
-        <p:txBody>
-          <a:bodyPr rtlCol="0" anchor="ctr"/>
-          <a:lstStyle/>
-          <a:p>
-            <a:pPr algn="ctr"/>
-          </a:p>
-        </p:txBody>
-      </p:sp>
-      <p:sp>
-        <p:nvSpPr>
-          <p:cNvPr id="20" name="TextBox 19"/>
-          <p:cNvSpPr txBox="1"/>
-          <p:nvPr/>
-        </p:nvSpPr>
-        <p:spPr>
-          <a:xfrm>
-            <a:off x="4504943" y="3639312"/>
-            <a:ext cx="3243072" cy="1261872"/>
-          </a:xfrm>
-          <a:prstGeom prst="rect">
-            <a:avLst/>
-          </a:prstGeom>
-          <a:noFill/>
-        </p:spPr>
-        <p:txBody>
-          <a:bodyPr wrap="square" anchor="t" lIns="0" rIns="0" tIns="0" bIns="0">
-            <a:spAutoFit/>
-          </a:bodyPr>
-          <a:lstStyle/>
-          <a:p>
-            <a:pPr algn="l"/>
-            <a:r>
-              <a:rPr sz="1400" b="1">
-                <a:solidFill>
-                  <a:srgbClr val="0B2A4A"/>
-                </a:solidFill>
-                <a:latin typeface="Arial"/>
-                <a:ea typeface="微软雅黑"/>
-              </a:rPr>
-              <a:t>创新 2 · 四层容错</a:t>
-            </a:r>
-          </a:p>
-          <a:p>
-            <a:pPr algn="l">
-              <a:lnSpc>
-                <a:spcPct val="110000"/>
-              </a:lnSpc>
-              <a:spcBef>
-                <a:spcPts val="400"/>
-              </a:spcBef>
-            </a:pPr>
-            <a:r>
-              <a:rPr sz="1150" b="0">
-                <a:solidFill>
-                  <a:srgbClr val="333333"/>
-                </a:solidFill>
-                <a:latin typeface="Arial"/>
-                <a:ea typeface="微软雅黑"/>
-              </a:rPr>
-              <a:t>面向分区归属漂移与实例失活；每层对应一类 etcd 语义，守住至多绑定一次</a:t>
-            </a:r>
-          </a:p>
-        </p:txBody>
-      </p:sp>
-      <p:sp>
-        <p:nvSpPr>
-          <p:cNvPr id="21" name="Rounded Rectangle 20"/>
-          <p:cNvSpPr/>
-          <p:nvPr/>
-        </p:nvSpPr>
-        <p:spPr>
-          <a:xfrm>
-            <a:off x="8113775" y="3511296"/>
-            <a:ext cx="3517391" cy="1444752"/>
-          </a:xfrm>
-          <a:prstGeom prst="roundRect">
-            <a:avLst/>
-          </a:prstGeom>
-          <a:solidFill>
-            <a:srgbClr val="F5F7FA"/>
-          </a:solidFill>
-          <a:ln w="9525">
-            <a:solidFill>
-              <a:srgbClr val="D8DFE8"/>
-            </a:solidFill>
-          </a:ln>
-          <a:effectLst/>
-        </p:spPr>
-        <p:style>
-          <a:lnRef idx="1">
-            <a:schemeClr val="accent1"/>
-          </a:lnRef>
-          <a:fillRef idx="3">
-            <a:schemeClr val="accent1"/>
-          </a:fillRef>
-          <a:effectRef idx="2">
-            <a:schemeClr val="accent1"/>
-          </a:effectRef>
-          <a:fontRef idx="minor">
-            <a:schemeClr val="lt1"/>
-          </a:fontRef>
-        </p:style>
-        <p:txBody>
-          <a:bodyPr rtlCol="0" anchor="ctr"/>
-          <a:lstStyle/>
-          <a:p>
-            <a:pPr algn="ctr"/>
-          </a:p>
-        </p:txBody>
-      </p:sp>
-      <p:sp>
-        <p:nvSpPr>
-          <p:cNvPr id="22" name="Rectangle 21"/>
-          <p:cNvSpPr/>
-          <p:nvPr/>
-        </p:nvSpPr>
-        <p:spPr>
-          <a:xfrm>
-            <a:off x="8113775" y="3511296"/>
-            <a:ext cx="50292" cy="1444752"/>
-          </a:xfrm>
-          <a:prstGeom prst="rect">
-            <a:avLst/>
-          </a:prstGeom>
-          <a:solidFill>
-            <a:srgbClr val="1F5C99"/>
-          </a:solidFill>
-          <a:ln>
-            <a:noFill/>
-          </a:ln>
-          <a:effectLst/>
-        </p:spPr>
-        <p:style>
-          <a:lnRef idx="1">
-            <a:schemeClr val="accent1"/>
-          </a:lnRef>
-          <a:fillRef idx="3">
-            <a:schemeClr val="accent1"/>
-          </a:fillRef>
-          <a:effectRef idx="2">
-            <a:schemeClr val="accent1"/>
-          </a:effectRef>
-          <a:fontRef idx="minor">
-            <a:schemeClr val="lt1"/>
-          </a:fontRef>
-        </p:style>
-        <p:txBody>
-          <a:bodyPr rtlCol="0" anchor="ctr"/>
-          <a:lstStyle/>
-          <a:p>
-            <a:pPr algn="ctr"/>
-          </a:p>
-        </p:txBody>
-      </p:sp>
-      <p:sp>
-        <p:nvSpPr>
-          <p:cNvPr id="23" name="TextBox 22"/>
-          <p:cNvSpPr txBox="1"/>
-          <p:nvPr/>
-        </p:nvSpPr>
-        <p:spPr>
-          <a:xfrm>
-            <a:off x="8278367" y="3639312"/>
-            <a:ext cx="3243072" cy="1261872"/>
-          </a:xfrm>
-          <a:prstGeom prst="rect">
-            <a:avLst/>
-          </a:prstGeom>
-          <a:noFill/>
-        </p:spPr>
-        <p:txBody>
-          <a:bodyPr wrap="square" anchor="t" lIns="0" rIns="0" tIns="0" bIns="0">
-            <a:spAutoFit/>
-          </a:bodyPr>
-          <a:lstStyle/>
-          <a:p>
-            <a:pPr algn="l"/>
-            <a:r>
-              <a:rPr sz="1400" b="1">
-                <a:solidFill>
-                  <a:srgbClr val="0B2A4A"/>
-                </a:solidFill>
-                <a:latin typeface="Arial"/>
-                <a:ea typeface="微软雅黑"/>
-              </a:rPr>
-              <a:t>主场景读数（s3/w3）</a:t>
-            </a:r>
-          </a:p>
-          <a:p>
-            <a:pPr algn="l">
-              <a:lnSpc>
-                <a:spcPct val="110000"/>
-              </a:lnSpc>
-              <a:spcBef>
-                <a:spcPts val="400"/>
-              </a:spcBef>
-            </a:pPr>
-            <a:r>
-              <a:rPr sz="1150" b="0">
-                <a:solidFill>
-                  <a:srgbClr val="333333"/>
-                </a:solidFill>
-                <a:latin typeface="Arial"/>
-                <a:ea typeface="微软雅黑"/>
-              </a:rPr>
-              <a:t>P99 32.57 → 16.22 s（inst1）、0.13 vs 0.15 s（inst3）；有效吞吐 +5.1%~+21.7%</a:t>
-            </a:r>
-          </a:p>
-        </p:txBody>
-      </p:sp>
-      <p:sp>
-        <p:nvSpPr>
-          <p:cNvPr id="24" name="TextBox 23"/>
-          <p:cNvSpPr txBox="1"/>
-          <p:nvPr/>
-        </p:nvSpPr>
-        <p:spPr>
-          <a:xfrm>
-            <a:off x="566928" y="5175504"/>
-            <a:ext cx="11064240" cy="777240"/>
-          </a:xfrm>
-          <a:prstGeom prst="rect">
-            <a:avLst/>
-          </a:prstGeom>
-          <a:noFill/>
-        </p:spPr>
-        <p:txBody>
-          <a:bodyPr wrap="square" anchor="t" lIns="0" rIns="0" tIns="0" bIns="0">
-            <a:spAutoFit/>
-          </a:bodyPr>
-          <a:lstStyle/>
-          <a:p>
-            <a:pPr algn="l"/>
-            <a:r>
-              <a:rPr sz="1200" b="0">
-                <a:solidFill>
-                  <a:srgbClr val="566474"/>
-                </a:solidFill>
-                <a:latin typeface="Arial"/>
-                <a:ea typeface="微软雅黑"/>
-              </a:rPr>
-              <a:t>▪  副产出：16 个场景、144 次 run 的原始数据与脚本随本文开源</a:t>
-            </a:r>
-          </a:p>
-        </p:txBody>
-      </p:sp>
-      <p:sp>
-        <p:nvSpPr>
-          <p:cNvPr id="25" name="TextBox 24"/>
-          <p:cNvSpPr txBox="1"/>
-          <p:nvPr/>
-        </p:nvSpPr>
-        <p:spPr>
-          <a:xfrm>
-            <a:off x="10780776" y="6345936"/>
-            <a:ext cx="850392" cy="219456"/>
-          </a:xfrm>
-          <a:prstGeom prst="rect">
-            <a:avLst/>
-          </a:prstGeom>
-          <a:noFill/>
-        </p:spPr>
-        <p:txBody>
-          <a:bodyPr wrap="square" anchor="t" lIns="0" rIns="0" tIns="0" bIns="0">
-            <a:spAutoFit/>
-          </a:bodyPr>
-          <a:lstStyle/>
-          <a:p>
-            <a:pPr algn="r"/>
-            <a:r>
-              <a:rPr sz="950" b="0">
-                <a:solidFill>
-                  <a:srgbClr val="566474"/>
-                </a:solidFill>
-                <a:latin typeface="Arial"/>
-                <a:ea typeface="微软雅黑"/>
-              </a:rPr>
-              <a:t>23 / 24</a:t>
+              <a:t>23 / 23</a:t>
             </a:r>
           </a:p>
         </p:txBody>
@@ -16438,325 +15544,6 @@
 </file>
 
 <file path=ppt/slides/slide24.xml><?xml version="1.0" encoding="utf-8"?>
-<p:sld xmlns:a="http://schemas.openxmlformats.org/drawingml/2006/main" xmlns:p="http://schemas.openxmlformats.org/presentationml/2006/main" xmlns:r="http://schemas.openxmlformats.org/officeDocument/2006/relationships">
-  <p:cSld>
-    <p:bg>
-      <p:bgPr>
-        <a:solidFill>
-          <a:srgbClr val="FFFFFF"/>
-        </a:solidFill>
-        <a:effectLst/>
-      </p:bgPr>
-    </p:bg>
-    <p:spTree>
-      <p:nvGrpSpPr>
-        <p:cNvPr id="1" name=""/>
-        <p:cNvGrpSpPr/>
-        <p:nvPr/>
-      </p:nvGrpSpPr>
-      <p:grpSpPr/>
-      <p:sp>
-        <p:nvSpPr>
-          <p:cNvPr id="2" name="Rectangle 1"/>
-          <p:cNvSpPr/>
-          <p:nvPr/>
-        </p:nvSpPr>
-        <p:spPr>
-          <a:xfrm>
-            <a:off x="1197864" y="2212848"/>
-            <a:ext cx="9866376" cy="20116"/>
-          </a:xfrm>
-          <a:prstGeom prst="rect">
-            <a:avLst/>
-          </a:prstGeom>
-          <a:solidFill>
-            <a:srgbClr val="0B2A4A"/>
-          </a:solidFill>
-          <a:ln>
-            <a:noFill/>
-          </a:ln>
-          <a:effectLst/>
-        </p:spPr>
-        <p:style>
-          <a:lnRef idx="1">
-            <a:schemeClr val="accent1"/>
-          </a:lnRef>
-          <a:fillRef idx="3">
-            <a:schemeClr val="accent1"/>
-          </a:fillRef>
-          <a:effectRef idx="2">
-            <a:schemeClr val="accent1"/>
-          </a:effectRef>
-          <a:fontRef idx="minor">
-            <a:schemeClr val="lt1"/>
-          </a:fontRef>
-        </p:style>
-        <p:txBody>
-          <a:bodyPr rtlCol="0" anchor="ctr"/>
-          <a:lstStyle/>
-          <a:p>
-            <a:pPr algn="ctr"/>
-          </a:p>
-        </p:txBody>
-      </p:sp>
-      <p:sp>
-        <p:nvSpPr>
-          <p:cNvPr id="3" name="TextBox 2"/>
-          <p:cNvSpPr txBox="1"/>
-          <p:nvPr/>
-        </p:nvSpPr>
-        <p:spPr>
-          <a:xfrm>
-            <a:off x="914400" y="2395728"/>
-            <a:ext cx="10332720" cy="914400"/>
-          </a:xfrm>
-          <a:prstGeom prst="rect">
-            <a:avLst/>
-          </a:prstGeom>
-          <a:noFill/>
-        </p:spPr>
-        <p:txBody>
-          <a:bodyPr wrap="square" anchor="ctr" lIns="0" rIns="0" tIns="0" bIns="0">
-            <a:spAutoFit/>
-          </a:bodyPr>
-          <a:lstStyle/>
-          <a:p>
-            <a:pPr algn="ctr"/>
-            <a:r>
-              <a:rPr sz="3400" b="1">
-                <a:solidFill>
-                  <a:srgbClr val="0B2A4A"/>
-                </a:solidFill>
-                <a:latin typeface="Arial"/>
-                <a:ea typeface="微软雅黑"/>
-              </a:rPr>
-              <a:t>谢谢各位老师，请批评指正</a:t>
-            </a:r>
-          </a:p>
-        </p:txBody>
-      </p:sp>
-      <p:sp>
-        <p:nvSpPr>
-          <p:cNvPr id="4" name="TextBox 3"/>
-          <p:cNvSpPr txBox="1"/>
-          <p:nvPr/>
-        </p:nvSpPr>
-        <p:spPr>
-          <a:xfrm>
-            <a:off x="914400" y="3429000"/>
-            <a:ext cx="10332720" cy="457200"/>
-          </a:xfrm>
-          <a:prstGeom prst="rect">
-            <a:avLst/>
-          </a:prstGeom>
-          <a:noFill/>
-        </p:spPr>
-        <p:txBody>
-          <a:bodyPr wrap="square" anchor="t" lIns="0" rIns="0" tIns="0" bIns="0">
-            <a:spAutoFit/>
-          </a:bodyPr>
-          <a:lstStyle/>
-          <a:p>
-            <a:pPr algn="ctr"/>
-            <a:r>
-              <a:rPr sz="1600" b="0">
-                <a:solidFill>
-                  <a:srgbClr val="566474"/>
-                </a:solidFill>
-                <a:latin typeface="Arial"/>
-                <a:ea typeface="微软雅黑"/>
-              </a:rPr>
-              <a:t>基于 etcd 的分布式 Kubernetes 调度器研究与实现</a:t>
-            </a:r>
-          </a:p>
-        </p:txBody>
-      </p:sp>
-      <p:sp>
-        <p:nvSpPr>
-          <p:cNvPr id="5" name="TextBox 4"/>
-          <p:cNvSpPr txBox="1"/>
-          <p:nvPr/>
-        </p:nvSpPr>
-        <p:spPr>
-          <a:xfrm>
-            <a:off x="914400" y="4343400"/>
-            <a:ext cx="10332720" cy="731520"/>
-          </a:xfrm>
-          <a:prstGeom prst="rect">
-            <a:avLst/>
-          </a:prstGeom>
-          <a:noFill/>
-        </p:spPr>
-        <p:txBody>
-          <a:bodyPr wrap="square" anchor="t" lIns="0" rIns="0" tIns="0" bIns="0">
-            <a:spAutoFit/>
-          </a:bodyPr>
-          <a:lstStyle/>
-          <a:p>
-            <a:pPr algn="ctr"/>
-            <a:r>
-              <a:rPr sz="1300" b="0">
-                <a:solidFill>
-                  <a:srgbClr val="566474"/>
-                </a:solidFill>
-                <a:latin typeface="Arial"/>
-                <a:ea typeface="微软雅黑"/>
-              </a:rPr>
-              <a:t>答辩人：[姓名]</a:t>
-            </a:r>
-          </a:p>
-          <a:p>
-            <a:pPr algn="ctr">
-              <a:spcBef>
-                <a:spcPts val="400"/>
-              </a:spcBef>
-            </a:pPr>
-            <a:r>
-              <a:rPr sz="1300" b="0">
-                <a:solidFill>
-                  <a:srgbClr val="566474"/>
-                </a:solidFill>
-                <a:latin typeface="Arial"/>
-                <a:ea typeface="微软雅黑"/>
-              </a:rPr>
-              <a:t>联系方式：[邮箱]</a:t>
-            </a:r>
-          </a:p>
-        </p:txBody>
-      </p:sp>
-      <p:sp>
-        <p:nvSpPr>
-          <p:cNvPr id="6" name="Rectangle 5"/>
-          <p:cNvSpPr/>
-          <p:nvPr/>
-        </p:nvSpPr>
-        <p:spPr>
-          <a:xfrm>
-            <a:off x="1197864" y="5074920"/>
-            <a:ext cx="9866376" cy="20116"/>
-          </a:xfrm>
-          <a:prstGeom prst="rect">
-            <a:avLst/>
-          </a:prstGeom>
-          <a:solidFill>
-            <a:srgbClr val="0B2A4A"/>
-          </a:solidFill>
-          <a:ln>
-            <a:noFill/>
-          </a:ln>
-          <a:effectLst/>
-        </p:spPr>
-        <p:style>
-          <a:lnRef idx="1">
-            <a:schemeClr val="accent1"/>
-          </a:lnRef>
-          <a:fillRef idx="3">
-            <a:schemeClr val="accent1"/>
-          </a:fillRef>
-          <a:effectRef idx="2">
-            <a:schemeClr val="accent1"/>
-          </a:effectRef>
-          <a:fontRef idx="minor">
-            <a:schemeClr val="lt1"/>
-          </a:fontRef>
-        </p:style>
-        <p:txBody>
-          <a:bodyPr rtlCol="0" anchor="ctr"/>
-          <a:lstStyle/>
-          <a:p>
-            <a:pPr algn="ctr"/>
-          </a:p>
-        </p:txBody>
-      </p:sp>
-      <p:sp>
-        <p:nvSpPr>
-          <p:cNvPr id="7" name="Rectangle 6"/>
-          <p:cNvSpPr/>
-          <p:nvPr/>
-        </p:nvSpPr>
-        <p:spPr>
-          <a:xfrm>
-            <a:off x="36576" y="6748272"/>
-            <a:ext cx="12088368" cy="45720"/>
-          </a:xfrm>
-          <a:prstGeom prst="rect">
-            <a:avLst/>
-          </a:prstGeom>
-          <a:solidFill>
-            <a:srgbClr val="0B2A4A"/>
-          </a:solidFill>
-          <a:ln>
-            <a:noFill/>
-          </a:ln>
-          <a:effectLst/>
-        </p:spPr>
-        <p:style>
-          <a:lnRef idx="1">
-            <a:schemeClr val="accent1"/>
-          </a:lnRef>
-          <a:fillRef idx="3">
-            <a:schemeClr val="accent1"/>
-          </a:fillRef>
-          <a:effectRef idx="2">
-            <a:schemeClr val="accent1"/>
-          </a:effectRef>
-          <a:fontRef idx="minor">
-            <a:schemeClr val="lt1"/>
-          </a:fontRef>
-        </p:style>
-        <p:txBody>
-          <a:bodyPr rtlCol="0" anchor="ctr"/>
-          <a:lstStyle/>
-          <a:p>
-            <a:pPr algn="ctr"/>
-          </a:p>
-        </p:txBody>
-      </p:sp>
-      <p:sp>
-        <p:nvSpPr>
-          <p:cNvPr id="8" name="TextBox 7"/>
-          <p:cNvSpPr txBox="1"/>
-          <p:nvPr/>
-        </p:nvSpPr>
-        <p:spPr>
-          <a:xfrm>
-            <a:off x="10780776" y="6345936"/>
-            <a:ext cx="850392" cy="219456"/>
-          </a:xfrm>
-          <a:prstGeom prst="rect">
-            <a:avLst/>
-          </a:prstGeom>
-          <a:noFill/>
-        </p:spPr>
-        <p:txBody>
-          <a:bodyPr wrap="square" anchor="t" lIns="0" rIns="0" tIns="0" bIns="0">
-            <a:spAutoFit/>
-          </a:bodyPr>
-          <a:lstStyle/>
-          <a:p>
-            <a:pPr algn="r"/>
-            <a:r>
-              <a:rPr sz="950" b="0">
-                <a:solidFill>
-                  <a:srgbClr val="566474"/>
-                </a:solidFill>
-                <a:latin typeface="Arial"/>
-                <a:ea typeface="微软雅黑"/>
-              </a:rPr>
-              <a:t>24 / 24</a:t>
-            </a:r>
-          </a:p>
-        </p:txBody>
-      </p:sp>
-    </p:spTree>
-  </p:cSld>
-  <p:clrMapOvr>
-    <a:masterClrMapping/>
-  </p:clrMapOvr>
-</p:sld>
-</file>
-
-<file path=ppt/slides/slide25.xml><?xml version="1.0" encoding="utf-8"?>
 <p:sld xmlns:a="http://schemas.openxmlformats.org/drawingml/2006/main" xmlns:p="http://schemas.openxmlformats.org/presentationml/2006/main" xmlns:r="http://schemas.openxmlformats.org/officeDocument/2006/relationships">
   <p:cSld>
     <p:bg>
@@ -17949,7 +16736,7 @@
 </p:sld>
 </file>
 
-<file path=ppt/slides/slide26.xml><?xml version="1.0" encoding="utf-8"?>
+<file path=ppt/slides/slide25.xml><?xml version="1.0" encoding="utf-8"?>
 <p:sld xmlns:a="http://schemas.openxmlformats.org/drawingml/2006/main" xmlns:p="http://schemas.openxmlformats.org/presentationml/2006/main" xmlns:r="http://schemas.openxmlformats.org/officeDocument/2006/relationships">
   <p:cSld>
     <p:bg>
@@ -18804,7 +17591,7 @@
 </p:sld>
 </file>
 
-<file path=ppt/slides/slide27.xml><?xml version="1.0" encoding="utf-8"?>
+<file path=ppt/slides/slide26.xml><?xml version="1.0" encoding="utf-8"?>
 <p:sld xmlns:a="http://schemas.openxmlformats.org/drawingml/2006/main" xmlns:p="http://schemas.openxmlformats.org/presentationml/2006/main" xmlns:r="http://schemas.openxmlformats.org/officeDocument/2006/relationships">
   <p:cSld>
     <p:bg>
@@ -19114,7 +17901,7 @@
 </p:sld>
 </file>
 
-<file path=ppt/slides/slide28.xml><?xml version="1.0" encoding="utf-8"?>
+<file path=ppt/slides/slide27.xml><?xml version="1.0" encoding="utf-8"?>
 <p:sld xmlns:a="http://schemas.openxmlformats.org/drawingml/2006/main" xmlns:p="http://schemas.openxmlformats.org/presentationml/2006/main" xmlns:r="http://schemas.openxmlformats.org/officeDocument/2006/relationships">
   <p:cSld>
     <p:bg>
@@ -19941,6 +18728,316 @@
 </p:sld>
 </file>
 
+<file path=ppt/slides/slide28.xml><?xml version="1.0" encoding="utf-8"?>
+<p:sld xmlns:a="http://schemas.openxmlformats.org/drawingml/2006/main" xmlns:p="http://schemas.openxmlformats.org/presentationml/2006/main" xmlns:r="http://schemas.openxmlformats.org/officeDocument/2006/relationships">
+  <p:cSld>
+    <p:bg>
+      <p:bgPr>
+        <a:solidFill>
+          <a:srgbClr val="FFFFFF"/>
+        </a:solidFill>
+        <a:effectLst/>
+      </p:bgPr>
+    </p:bg>
+    <p:spTree>
+      <p:nvGrpSpPr>
+        <p:cNvPr id="1" name=""/>
+        <p:cNvGrpSpPr/>
+        <p:nvPr/>
+      </p:nvGrpSpPr>
+      <p:grpSpPr/>
+      <p:sp>
+        <p:nvSpPr>
+          <p:cNvPr id="2" name="Rectangle 1"/>
+          <p:cNvSpPr/>
+          <p:nvPr/>
+        </p:nvSpPr>
+        <p:spPr>
+          <a:xfrm>
+            <a:off x="384048" y="420624"/>
+            <a:ext cx="77724" cy="475488"/>
+          </a:xfrm>
+          <a:prstGeom prst="rect">
+            <a:avLst/>
+          </a:prstGeom>
+          <a:solidFill>
+            <a:srgbClr val="E8833A"/>
+          </a:solidFill>
+          <a:ln>
+            <a:noFill/>
+          </a:ln>
+          <a:effectLst/>
+        </p:spPr>
+        <p:style>
+          <a:lnRef idx="1">
+            <a:schemeClr val="accent1"/>
+          </a:lnRef>
+          <a:fillRef idx="3">
+            <a:schemeClr val="accent1"/>
+          </a:fillRef>
+          <a:effectRef idx="2">
+            <a:schemeClr val="accent1"/>
+          </a:effectRef>
+          <a:fontRef idx="minor">
+            <a:schemeClr val="lt1"/>
+          </a:fontRef>
+        </p:style>
+        <p:txBody>
+          <a:bodyPr rtlCol="0" anchor="ctr"/>
+          <a:lstStyle/>
+          <a:p>
+            <a:pPr algn="ctr"/>
+          </a:p>
+        </p:txBody>
+      </p:sp>
+      <p:sp>
+        <p:nvSpPr>
+          <p:cNvPr id="3" name="TextBox 2"/>
+          <p:cNvSpPr txBox="1"/>
+          <p:nvPr/>
+        </p:nvSpPr>
+        <p:spPr>
+          <a:xfrm>
+            <a:off x="566928" y="329184"/>
+            <a:ext cx="11064240" cy="713232"/>
+          </a:xfrm>
+          <a:prstGeom prst="rect">
+            <a:avLst/>
+          </a:prstGeom>
+          <a:noFill/>
+        </p:spPr>
+        <p:txBody>
+          <a:bodyPr wrap="square" anchor="ctr" lIns="0" rIns="0" tIns="0" bIns="0">
+            <a:spAutoFit/>
+          </a:bodyPr>
+          <a:lstStyle/>
+          <a:p>
+            <a:pPr algn="l">
+              <a:lnSpc>
+                <a:spcPct val="105000"/>
+              </a:lnSpc>
+            </a:pPr>
+            <a:r>
+              <a:rPr sz="2700" b="1">
+                <a:solidFill>
+                  <a:srgbClr val="0B2A4A"/>
+                </a:solidFill>
+                <a:latin typeface="Arial"/>
+                <a:ea typeface="微软雅黑"/>
+              </a:rPr>
+              <a:t>资源公平性与未量化的资源收益</a:t>
+            </a:r>
+          </a:p>
+        </p:txBody>
+      </p:sp>
+      <p:sp>
+        <p:nvSpPr>
+          <p:cNvPr id="4" name="Rectangle 3"/>
+          <p:cNvSpPr/>
+          <p:nvPr/>
+        </p:nvSpPr>
+        <p:spPr>
+          <a:xfrm>
+            <a:off x="566928" y="1298448"/>
+            <a:ext cx="32004" cy="365760"/>
+          </a:xfrm>
+          <a:prstGeom prst="rect">
+            <a:avLst/>
+          </a:prstGeom>
+          <a:solidFill>
+            <a:srgbClr val="1F5C99"/>
+          </a:solidFill>
+          <a:ln>
+            <a:noFill/>
+          </a:ln>
+          <a:effectLst/>
+        </p:spPr>
+        <p:style>
+          <a:lnRef idx="1">
+            <a:schemeClr val="accent1"/>
+          </a:lnRef>
+          <a:fillRef idx="3">
+            <a:schemeClr val="accent1"/>
+          </a:fillRef>
+          <a:effectRef idx="2">
+            <a:schemeClr val="accent1"/>
+          </a:effectRef>
+          <a:fontRef idx="minor">
+            <a:schemeClr val="lt1"/>
+          </a:fontRef>
+        </p:style>
+        <p:txBody>
+          <a:bodyPr rtlCol="0" anchor="ctr"/>
+          <a:lstStyle/>
+          <a:p>
+            <a:pPr algn="ctr"/>
+          </a:p>
+        </p:txBody>
+      </p:sp>
+      <p:sp>
+        <p:nvSpPr>
+          <p:cNvPr id="5" name="TextBox 4"/>
+          <p:cNvSpPr txBox="1"/>
+          <p:nvPr/>
+        </p:nvSpPr>
+        <p:spPr>
+          <a:xfrm>
+            <a:off x="713232" y="1261872"/>
+            <a:ext cx="10744200" cy="438912"/>
+          </a:xfrm>
+          <a:prstGeom prst="rect">
+            <a:avLst/>
+          </a:prstGeom>
+          <a:noFill/>
+        </p:spPr>
+        <p:txBody>
+          <a:bodyPr wrap="square" anchor="ctr" lIns="0" rIns="0" tIns="0" bIns="0">
+            <a:spAutoFit/>
+          </a:bodyPr>
+          <a:lstStyle/>
+          <a:p>
+            <a:pPr algn="l">
+              <a:lnSpc>
+                <a:spcPct val="110000"/>
+              </a:lnSpc>
+            </a:pPr>
+            <a:r>
+              <a:rPr sz="1800" b="1">
+                <a:solidFill>
+                  <a:srgbClr val="1F5C99"/>
+                </a:solidFill>
+                <a:latin typeface="Arial"/>
+                <a:ea typeface="微软雅黑"/>
+              </a:rPr>
+              <a:t>每 Deployment 同规格，对 ENO 略不利</a:t>
+            </a:r>
+          </a:p>
+        </p:txBody>
+      </p:sp>
+      <p:sp>
+        <p:nvSpPr>
+          <p:cNvPr id="6" name="TextBox 5"/>
+          <p:cNvSpPr txBox="1"/>
+          <p:nvPr/>
+        </p:nvSpPr>
+        <p:spPr>
+          <a:xfrm>
+            <a:off x="566928" y="1965960"/>
+            <a:ext cx="10607040" cy="1417320"/>
+          </a:xfrm>
+          <a:prstGeom prst="rect">
+            <a:avLst/>
+          </a:prstGeom>
+          <a:noFill/>
+        </p:spPr>
+        <p:txBody>
+          <a:bodyPr wrap="square" anchor="t" lIns="0" rIns="0" tIns="0" bIns="0">
+            <a:spAutoFit/>
+          </a:bodyPr>
+          <a:lstStyle/>
+          <a:p>
+            <a:pPr algn="l">
+              <a:lnSpc>
+                <a:spcPct val="115000"/>
+              </a:lnSpc>
+            </a:pPr>
+            <a:r>
+              <a:rPr sz="1700" b="0">
+                <a:solidFill>
+                  <a:srgbClr val="333333"/>
+                </a:solidFill>
+                <a:latin typeface="Arial"/>
+                <a:ea typeface="微软雅黑"/>
+              </a:rPr>
+              <a:t>▪  Scheduler Pod 统一 2C/4G</a:t>
+            </a:r>
+          </a:p>
+          <a:p>
+            <a:pPr algn="l">
+              <a:lnSpc>
+                <a:spcPct val="115000"/>
+              </a:lnSpc>
+              <a:spcBef>
+                <a:spcPts val="1800"/>
+              </a:spcBef>
+            </a:pPr>
+            <a:r>
+              <a:rPr sz="1700" b="0">
+                <a:solidFill>
+                  <a:srgbClr val="333333"/>
+                </a:solidFill>
+                <a:latin typeface="Arial"/>
+                <a:ea typeface="微软雅黑"/>
+              </a:rPr>
+              <a:t>▪  ENO 少一个 Binder Deployment</a:t>
+            </a:r>
+          </a:p>
+          <a:p>
+            <a:pPr algn="l">
+              <a:lnSpc>
+                <a:spcPct val="115000"/>
+              </a:lnSpc>
+              <a:spcBef>
+                <a:spcPts val="1800"/>
+              </a:spcBef>
+            </a:pPr>
+            <a:r>
+              <a:rPr sz="1700" b="0">
+                <a:solidFill>
+                  <a:srgbClr val="333333"/>
+                </a:solidFill>
+                <a:latin typeface="Arial"/>
+                <a:ea typeface="微软雅黑"/>
+              </a:rPr>
+              <a:t>▪  集群总资源收益未量化</a:t>
+            </a:r>
+          </a:p>
+        </p:txBody>
+      </p:sp>
+      <p:sp>
+        <p:nvSpPr>
+          <p:cNvPr id="7" name="TextBox 6"/>
+          <p:cNvSpPr txBox="1"/>
+          <p:nvPr/>
+        </p:nvSpPr>
+        <p:spPr>
+          <a:xfrm>
+            <a:off x="10780776" y="6345936"/>
+            <a:ext cx="850392" cy="219456"/>
+          </a:xfrm>
+          <a:prstGeom prst="rect">
+            <a:avLst/>
+          </a:prstGeom>
+          <a:noFill/>
+        </p:spPr>
+        <p:txBody>
+          <a:bodyPr wrap="square" anchor="t" lIns="0" rIns="0" tIns="0" bIns="0">
+            <a:spAutoFit/>
+          </a:bodyPr>
+          <a:lstStyle/>
+          <a:p>
+            <a:pPr algn="r"/>
+            <a:r>
+              <a:rPr sz="950" b="0">
+                <a:solidFill>
+                  <a:srgbClr val="566474"/>
+                </a:solidFill>
+                <a:latin typeface="Arial"/>
+                <a:ea typeface="微软雅黑"/>
+              </a:rPr>
+              <a:t>B5</a:t>
+            </a:r>
+          </a:p>
+        </p:txBody>
+      </p:sp>
+    </p:spTree>
+  </p:cSld>
+  <p:clrMapOvr>
+    <a:masterClrMapping/>
+  </p:clrMapOvr>
+</p:sld>
+</file>
+
 <file path=ppt/slides/slide29.xml><?xml version="1.0" encoding="utf-8"?>
 <p:sld xmlns:a="http://schemas.openxmlformats.org/drawingml/2006/main" xmlns:p="http://schemas.openxmlformats.org/presentationml/2006/main" xmlns:r="http://schemas.openxmlformats.org/officeDocument/2006/relationships">
   <p:cSld>
@@ -20038,7 +19135,7 @@
                 <a:latin typeface="Arial"/>
                 <a:ea typeface="微软雅黑"/>
               </a:rPr>
-              <a:t>资源公平性与未量化的资源收益</a:t>
+              <a:t>一键复现</a:t>
             </a:r>
           </a:p>
         </p:txBody>
@@ -20122,7 +19219,7 @@
                 <a:latin typeface="Arial"/>
                 <a:ea typeface="微软雅黑"/>
               </a:rPr>
-              <a:t>每 Deployment 同规格，对 ENO 略不利</a:t>
+              <a:t>从零到结果的全部入口</a:t>
             </a:r>
           </a:p>
         </p:txBody>
@@ -20162,7 +19259,7 @@
                 <a:latin typeface="Arial"/>
                 <a:ea typeface="微软雅黑"/>
               </a:rPr>
-              <a:t>▪  Scheduler Pod 统一 2C/4G</a:t>
+              <a:t>▪  run-experiment.sh：12 步实验流程</a:t>
             </a:r>
           </a:p>
           <a:p>
@@ -20182,7 +19279,7 @@
                 <a:latin typeface="Arial"/>
                 <a:ea typeface="微软雅黑"/>
               </a:rPr>
-              <a:t>▪  ENO 少一个 Binder Deployment</a:t>
+              <a:t>▪  plot-results.py / collect/：聚合与出图</a:t>
             </a:r>
           </a:p>
           <a:p>
@@ -20202,7 +19299,7 @@
                 <a:latin typeface="Arial"/>
                 <a:ea typeface="微软雅黑"/>
               </a:rPr>
-              <a:t>▪  集群总资源收益未量化</a:t>
+              <a:t>▪  results/compare/：16 场景产物</a:t>
             </a:r>
           </a:p>
         </p:txBody>
@@ -20238,7 +19335,7 @@
                 <a:latin typeface="Arial"/>
                 <a:ea typeface="微软雅黑"/>
               </a:rPr>
-              <a:t>B5</a:t>
+              <a:t>B6</a:t>
             </a:r>
           </a:p>
         </p:txBody>
@@ -21360,7 +20457,7 @@
                 <a:latin typeface="Arial"/>
                 <a:ea typeface="微软雅黑"/>
               </a:rPr>
-              <a:t>3 / 24</a:t>
+              <a:t>3 / 23</a:t>
             </a:r>
           </a:p>
         </p:txBody>
@@ -21470,316 +20567,6 @@
                 <a:latin typeface="Arial"/>
                 <a:ea typeface="微软雅黑"/>
               </a:rPr>
-              <a:t>一键复现</a:t>
-            </a:r>
-          </a:p>
-        </p:txBody>
-      </p:sp>
-      <p:sp>
-        <p:nvSpPr>
-          <p:cNvPr id="4" name="Rectangle 3"/>
-          <p:cNvSpPr/>
-          <p:nvPr/>
-        </p:nvSpPr>
-        <p:spPr>
-          <a:xfrm>
-            <a:off x="566928" y="1298448"/>
-            <a:ext cx="32004" cy="365760"/>
-          </a:xfrm>
-          <a:prstGeom prst="rect">
-            <a:avLst/>
-          </a:prstGeom>
-          <a:solidFill>
-            <a:srgbClr val="1F5C99"/>
-          </a:solidFill>
-          <a:ln>
-            <a:noFill/>
-          </a:ln>
-          <a:effectLst/>
-        </p:spPr>
-        <p:style>
-          <a:lnRef idx="1">
-            <a:schemeClr val="accent1"/>
-          </a:lnRef>
-          <a:fillRef idx="3">
-            <a:schemeClr val="accent1"/>
-          </a:fillRef>
-          <a:effectRef idx="2">
-            <a:schemeClr val="accent1"/>
-          </a:effectRef>
-          <a:fontRef idx="minor">
-            <a:schemeClr val="lt1"/>
-          </a:fontRef>
-        </p:style>
-        <p:txBody>
-          <a:bodyPr rtlCol="0" anchor="ctr"/>
-          <a:lstStyle/>
-          <a:p>
-            <a:pPr algn="ctr"/>
-          </a:p>
-        </p:txBody>
-      </p:sp>
-      <p:sp>
-        <p:nvSpPr>
-          <p:cNvPr id="5" name="TextBox 4"/>
-          <p:cNvSpPr txBox="1"/>
-          <p:nvPr/>
-        </p:nvSpPr>
-        <p:spPr>
-          <a:xfrm>
-            <a:off x="713232" y="1261872"/>
-            <a:ext cx="10744200" cy="438912"/>
-          </a:xfrm>
-          <a:prstGeom prst="rect">
-            <a:avLst/>
-          </a:prstGeom>
-          <a:noFill/>
-        </p:spPr>
-        <p:txBody>
-          <a:bodyPr wrap="square" anchor="ctr" lIns="0" rIns="0" tIns="0" bIns="0">
-            <a:spAutoFit/>
-          </a:bodyPr>
-          <a:lstStyle/>
-          <a:p>
-            <a:pPr algn="l">
-              <a:lnSpc>
-                <a:spcPct val="110000"/>
-              </a:lnSpc>
-            </a:pPr>
-            <a:r>
-              <a:rPr sz="1800" b="1">
-                <a:solidFill>
-                  <a:srgbClr val="1F5C99"/>
-                </a:solidFill>
-                <a:latin typeface="Arial"/>
-                <a:ea typeface="微软雅黑"/>
-              </a:rPr>
-              <a:t>从零到结果的全部入口</a:t>
-            </a:r>
-          </a:p>
-        </p:txBody>
-      </p:sp>
-      <p:sp>
-        <p:nvSpPr>
-          <p:cNvPr id="6" name="TextBox 5"/>
-          <p:cNvSpPr txBox="1"/>
-          <p:nvPr/>
-        </p:nvSpPr>
-        <p:spPr>
-          <a:xfrm>
-            <a:off x="566928" y="1965960"/>
-            <a:ext cx="10607040" cy="1417320"/>
-          </a:xfrm>
-          <a:prstGeom prst="rect">
-            <a:avLst/>
-          </a:prstGeom>
-          <a:noFill/>
-        </p:spPr>
-        <p:txBody>
-          <a:bodyPr wrap="square" anchor="t" lIns="0" rIns="0" tIns="0" bIns="0">
-            <a:spAutoFit/>
-          </a:bodyPr>
-          <a:lstStyle/>
-          <a:p>
-            <a:pPr algn="l">
-              <a:lnSpc>
-                <a:spcPct val="115000"/>
-              </a:lnSpc>
-            </a:pPr>
-            <a:r>
-              <a:rPr sz="1700" b="0">
-                <a:solidFill>
-                  <a:srgbClr val="333333"/>
-                </a:solidFill>
-                <a:latin typeface="Arial"/>
-                <a:ea typeface="微软雅黑"/>
-              </a:rPr>
-              <a:t>▪  run-experiment.sh：12 步实验流程</a:t>
-            </a:r>
-          </a:p>
-          <a:p>
-            <a:pPr algn="l">
-              <a:lnSpc>
-                <a:spcPct val="115000"/>
-              </a:lnSpc>
-              <a:spcBef>
-                <a:spcPts val="1800"/>
-              </a:spcBef>
-            </a:pPr>
-            <a:r>
-              <a:rPr sz="1700" b="0">
-                <a:solidFill>
-                  <a:srgbClr val="333333"/>
-                </a:solidFill>
-                <a:latin typeface="Arial"/>
-                <a:ea typeface="微软雅黑"/>
-              </a:rPr>
-              <a:t>▪  plot-results.py / collect/：聚合与出图</a:t>
-            </a:r>
-          </a:p>
-          <a:p>
-            <a:pPr algn="l">
-              <a:lnSpc>
-                <a:spcPct val="115000"/>
-              </a:lnSpc>
-              <a:spcBef>
-                <a:spcPts val="1800"/>
-              </a:spcBef>
-            </a:pPr>
-            <a:r>
-              <a:rPr sz="1700" b="0">
-                <a:solidFill>
-                  <a:srgbClr val="333333"/>
-                </a:solidFill>
-                <a:latin typeface="Arial"/>
-                <a:ea typeface="微软雅黑"/>
-              </a:rPr>
-              <a:t>▪  results/compare/：16 场景产物</a:t>
-            </a:r>
-          </a:p>
-        </p:txBody>
-      </p:sp>
-      <p:sp>
-        <p:nvSpPr>
-          <p:cNvPr id="7" name="TextBox 6"/>
-          <p:cNvSpPr txBox="1"/>
-          <p:nvPr/>
-        </p:nvSpPr>
-        <p:spPr>
-          <a:xfrm>
-            <a:off x="10780776" y="6345936"/>
-            <a:ext cx="850392" cy="219456"/>
-          </a:xfrm>
-          <a:prstGeom prst="rect">
-            <a:avLst/>
-          </a:prstGeom>
-          <a:noFill/>
-        </p:spPr>
-        <p:txBody>
-          <a:bodyPr wrap="square" anchor="t" lIns="0" rIns="0" tIns="0" bIns="0">
-            <a:spAutoFit/>
-          </a:bodyPr>
-          <a:lstStyle/>
-          <a:p>
-            <a:pPr algn="r"/>
-            <a:r>
-              <a:rPr sz="950" b="0">
-                <a:solidFill>
-                  <a:srgbClr val="566474"/>
-                </a:solidFill>
-                <a:latin typeface="Arial"/>
-                <a:ea typeface="微软雅黑"/>
-              </a:rPr>
-              <a:t>B6</a:t>
-            </a:r>
-          </a:p>
-        </p:txBody>
-      </p:sp>
-    </p:spTree>
-  </p:cSld>
-  <p:clrMapOvr>
-    <a:masterClrMapping/>
-  </p:clrMapOvr>
-</p:sld>
-</file>
-
-<file path=ppt/slides/slide31.xml><?xml version="1.0" encoding="utf-8"?>
-<p:sld xmlns:a="http://schemas.openxmlformats.org/drawingml/2006/main" xmlns:p="http://schemas.openxmlformats.org/presentationml/2006/main" xmlns:r="http://schemas.openxmlformats.org/officeDocument/2006/relationships">
-  <p:cSld>
-    <p:bg>
-      <p:bgPr>
-        <a:solidFill>
-          <a:srgbClr val="FFFFFF"/>
-        </a:solidFill>
-        <a:effectLst/>
-      </p:bgPr>
-    </p:bg>
-    <p:spTree>
-      <p:nvGrpSpPr>
-        <p:cNvPr id="1" name=""/>
-        <p:cNvGrpSpPr/>
-        <p:nvPr/>
-      </p:nvGrpSpPr>
-      <p:grpSpPr/>
-      <p:sp>
-        <p:nvSpPr>
-          <p:cNvPr id="2" name="Rectangle 1"/>
-          <p:cNvSpPr/>
-          <p:nvPr/>
-        </p:nvSpPr>
-        <p:spPr>
-          <a:xfrm>
-            <a:off x="384048" y="420624"/>
-            <a:ext cx="77724" cy="475488"/>
-          </a:xfrm>
-          <a:prstGeom prst="rect">
-            <a:avLst/>
-          </a:prstGeom>
-          <a:solidFill>
-            <a:srgbClr val="E8833A"/>
-          </a:solidFill>
-          <a:ln>
-            <a:noFill/>
-          </a:ln>
-          <a:effectLst/>
-        </p:spPr>
-        <p:style>
-          <a:lnRef idx="1">
-            <a:schemeClr val="accent1"/>
-          </a:lnRef>
-          <a:fillRef idx="3">
-            <a:schemeClr val="accent1"/>
-          </a:fillRef>
-          <a:effectRef idx="2">
-            <a:schemeClr val="accent1"/>
-          </a:effectRef>
-          <a:fontRef idx="minor">
-            <a:schemeClr val="lt1"/>
-          </a:fontRef>
-        </p:style>
-        <p:txBody>
-          <a:bodyPr rtlCol="0" anchor="ctr"/>
-          <a:lstStyle/>
-          <a:p>
-            <a:pPr algn="ctr"/>
-          </a:p>
-        </p:txBody>
-      </p:sp>
-      <p:sp>
-        <p:nvSpPr>
-          <p:cNvPr id="3" name="TextBox 2"/>
-          <p:cNvSpPr txBox="1"/>
-          <p:nvPr/>
-        </p:nvSpPr>
-        <p:spPr>
-          <a:xfrm>
-            <a:off x="566928" y="329184"/>
-            <a:ext cx="11064240" cy="713232"/>
-          </a:xfrm>
-          <a:prstGeom prst="rect">
-            <a:avLst/>
-          </a:prstGeom>
-          <a:noFill/>
-        </p:spPr>
-        <p:txBody>
-          <a:bodyPr wrap="square" anchor="ctr" lIns="0" rIns="0" tIns="0" bIns="0">
-            <a:spAutoFit/>
-          </a:bodyPr>
-          <a:lstStyle/>
-          <a:p>
-            <a:pPr algn="l">
-              <a:lnSpc>
-                <a:spcPct val="105000"/>
-              </a:lnSpc>
-            </a:pPr>
-            <a:r>
-              <a:rPr sz="2700" b="1">
-                <a:solidFill>
-                  <a:srgbClr val="0B2A4A"/>
-                </a:solidFill>
-                <a:latin typeface="Arial"/>
-                <a:ea typeface="微软雅黑"/>
-              </a:rPr>
               <a:t>主场景 s3/w3 的时序形态（备用）</a:t>
             </a:r>
           </a:p>
@@ -22586,7 +21373,7 @@
                 <a:latin typeface="Arial"/>
                 <a:ea typeface="微软雅黑"/>
               </a:rPr>
-              <a:t>4 / 24</a:t>
+              <a:t>4 / 23</a:t>
             </a:r>
           </a:p>
         </p:txBody>
@@ -23194,7 +21981,7 @@
                 <a:latin typeface="Arial"/>
                 <a:ea typeface="微软雅黑"/>
               </a:rPr>
-              <a:t>5 / 24</a:t>
+              <a:t>5 / 23</a:t>
             </a:r>
           </a:p>
         </p:txBody>
@@ -23802,7 +22589,7 @@
                 <a:latin typeface="Arial"/>
                 <a:ea typeface="微软雅黑"/>
               </a:rPr>
-              <a:t>6 / 24</a:t>
+              <a:t>6 / 23</a:t>
             </a:r>
           </a:p>
         </p:txBody>
@@ -24410,7 +23197,7 @@
                 <a:latin typeface="Arial"/>
                 <a:ea typeface="微软雅黑"/>
               </a:rPr>
-              <a:t>7 / 24</a:t>
+              <a:t>7 / 23</a:t>
             </a:r>
           </a:p>
         </p:txBody>
@@ -24741,7 +23528,7 @@
                 <a:latin typeface="Arial"/>
                 <a:ea typeface="微软雅黑"/>
               </a:rPr>
-              <a:t>8 / 24</a:t>
+              <a:t>8 / 23</a:t>
             </a:r>
           </a:p>
         </p:txBody>
@@ -25349,7 +24136,7 @@
                 <a:latin typeface="Arial"/>
                 <a:ea typeface="微软雅黑"/>
               </a:rPr>
-              <a:t>9 / 24</a:t>
+              <a:t>9 / 23</a:t>
             </a:r>
           </a:p>
         </p:txBody>

--- a/docs/thesis/defense/答辩PPT-基于etcd的分布式Kubernetes调度器.pptx
+++ b/docs/thesis/defense/答辩PPT-基于etcd的分布式Kubernetes调度器.pptx
@@ -1021,7 +1021,7 @@
           <a:lstStyle/>
           <a:p>
             <a:r>
-              <a:t>和 Gödel 逐场景对比：16 个场景里 14 个领先，2 个持平，没有落后的，提升 2.0% 到 22.9%，平均 11.9%。优势最大的是高负载与多实例：s2/w3 高 22.9%，s3/w3 三实例高 21.7%。两个持平场景都没饱和，完成时间由注入速率决定。两个持平场景说明，未饱和时调度器再快也压不出更多吞吐。平均 11.9% 是 14 个领先场景提升幅度的均值。</a:t>
+              <a:t>这一页是给评委看“形态”的。左边吞吐，右边 P99，共享同一条时间轴。ENO 的平台更高、更早稳定；右边的 P99 峰值更低、回落更快。这两张图放在一起的意义是：我们的优势不是某个瞬时点上的抖动，而是整段完成时间都更短——这也正好解释了为什么有效吞吐这个口径对我们有利，因为它衡量的是固定工作量做多久做完。</a:t>
             </a:r>
           </a:p>
         </p:txBody>
@@ -1231,7 +1231,7 @@
           <a:lstStyle/>
           <a:p>
             <a:r>
-              <a:t>两件事。第一，规模从 5000 到 10000、实例数不变，两边都退化：ENO -15.2%，Gödel -2.3%；但 ENO 仍领先，吞吐 296.7 对 280.9 高 5.6%，P99 0.19 对 0.28 秒低 33.4%，队列峰值 9 对 61。第二，复杂负载：极限 +9.3% 与 +16.0%，突发 +21.3% 与 +2.8%，异构 s3 高 21.2%、s4 持平。s4 的退化与固定三实例有关，这写在局限里。规模翻倍而实例不扩，本身就是一个更苛刻的设定，不能当作扩展上限。</a:t>
+              <a:t>和 Gödel 逐场景对比：16 个场景里 14 个领先，2 个持平，没有落后的，提升 2.0% 到 22.9%，平均 11.9%。优势最大的是高负载与多实例：s2/w3 高 22.9%，s3/w3 三实例高 21.7%。两个持平场景都没饱和，完成时间由注入速率决定。两个持平场景说明，未饱和时调度器再快也压不出更多吞吐。平均 11.9% 是 14 个领先场景提升幅度的均值。</a:t>
             </a:r>
           </a:p>
         </p:txBody>
@@ -1371,7 +1371,7 @@
           <a:lstStyle/>
           <a:p>
             <a:r>
-              <a:t>第一场注入：s2/w2、三实例，第 30 秒把 10% 的节点、约 100 个，归属注解从 scheduler-0 改为 scheduler-1。NodeValidator 拦截 300 次，Dispatcher 回退 300 次，两条曲线重叠。拦截不等于丢弃：Pod 进回退队列被重分发，成功率仍是 1.00，总耗时 683 秒、只比基线多 3 秒。这组数字说明 Layer 0 只是把错误前置，不是把工作丢掉，代价几乎为零。拦截 300 次、回退 300 次，两边对得上，说明没有 Pod 被丢掉。</a:t>
+              <a:t>两件事。第一，规模从 5000 到 10000、实例数不变，两边都退化：ENO -15.2%，Gödel -2.3%；但 ENO 仍领先，吞吐 296.7 对 280.9 高 5.6%，P99 0.19 对 0.28 秒低 33.4%，队列峰值 9 对 61。第二，复杂负载：极限 +9.3% 与 +16.0%，突发 +21.3% 与 +2.8%，异构 s3 高 21.2%、s4 持平。s4 的退化与固定三实例有关，这写在局限里。规模翻倍而实例不扩，本身就是一个更苛刻的设定，不能当作扩展上限。</a:t>
             </a:r>
           </a:p>
         </p:txBody>
@@ -1441,7 +1441,7 @@
           <a:lstStyle/>
           <a:p>
             <a:r>
-              <a:t>第二场注入：第 10 秒杀掉 scheduler-0，停机 180 秒，实测中断 189 秒。看 kill 之后 90 秒的窗口：被杀实例只剩 68 次绑定，占该窗口 8407 次的 0.81%——它的份额被瞬间清零，而不是有 0.81% 的 Pod 丢了。同一窗口两个存活实例照常完成绑定，pending 峰值 353，之后 60 秒回落到 2；累计绑定 49607/50000，断言仍全过。代价是 784 秒、比基线多 104 秒。注意它比 180 秒停机短：另外三分之二的实例一直在工作，重排被并行吸收了。这是工作量重排的代价，不是数据损坏。对比基线是同一场景下的无故障运行，680 秒。队列在 353 之后回落到 2，说明积压是瞬时的。</a:t>
+              <a:t>第一场注入：s2/w2、三实例，第 30 秒把 10% 的节点、约 100 个，归属注解从 scheduler-0 改为 scheduler-1。NodeValidator 拦截 300 次，Dispatcher 回退 300 次，两条曲线重叠。拦截不等于丢弃：Pod 进回退队列被重分发，成功率仍是 1.00，总耗时 683 秒、只比基线多 3 秒。这组数字说明 Layer 0 只是把错误前置，不是把工作丢掉，代价几乎为零。拦截 300 次、回退 300 次，两边对得上，说明没有 Pod 被丢掉。</a:t>
             </a:r>
           </a:p>
         </p:txBody>
@@ -1511,7 +1511,7 @@
           <a:lstStyle/>
           <a:p>
             <a:r>
-              <a:t>这一页的局限按论文第 7 章讲三条。第一，Gang 场景的尾延迟反向：w6 下 ENO 单 Pod P99 高于 Gödel，我们的解释是同组预留等待、绑定调用与后续决策共用同一个进程和队列，但还没有用独立计时实验把这两段耗时分离开，所以如实列为未证实的归因。第二，KWOK 仿真：去掉了 kubelet、运行时、真实网络与磁盘 IO，绝对数值不能外推到生产，只能用于跨调度器的相对比较。第三，资源开销：公平策略是每个 Deployment 同规格，所以没有量化 ENO 移除整个 Binder Deployment 在集群总资源上的收益。对应的三个延伸方向是生产灰度、多 Dispatcher 分区协同、以及在 ENO 上叠加具体调度策略。</a:t>
+              <a:t>第二场注入：第 10 秒杀掉 scheduler-0，停机 180 秒，实测中断 189 秒。看 kill 之后 90 秒的窗口：被杀实例只剩 68 次绑定，占该窗口 8407 次的 0.81%——它的份额被瞬间清零，而不是有 0.81% 的 Pod 丢了。同一窗口两个存活实例照常完成绑定，pending 峰值 353，之后 60 秒回落到 2；累计绑定 49607/50000，断言仍全过。代价是 784 秒、比基线多 104 秒。注意它比 180 秒停机短：另外三分之二的实例一直在工作，重排被并行吸收了。这是工作量重排的代价，不是数据损坏。对比基线是同一场景下的无故障运行，680 秒。队列在 353 之后回落到 2，说明积压是瞬时的。</a:t>
             </a:r>
           </a:p>
         </p:txBody>
@@ -1581,7 +1581,7 @@
           <a:lstStyle/>
           <a:p>
             <a:r>
-              <a:t>汇报到这里。一句话总结：把 Binder 合并进 Scheduler 进程，用 etcd 原子语义上的四层容错守住“至多绑定一次”，在 16 个场景、144 次 run 上做到更高吞吐、更低尾延迟与 100% 绑定成功率。请各位老师批评指正。</a:t>
+              <a:t>这一页的局限按论文第 7 章讲三条。第一，Gang 场景的尾延迟反向：w6 下 ENO 单 Pod P99 高于 Gödel，我们的解释是同组预留等待、绑定调用与后续决策共用同一个进程和队列，但还没有用独立计时实验把这两段耗时分离开，所以如实列为未证实的归因。第二，KWOK 仿真：去掉了 kubelet、运行时、真实网络与磁盘 IO，绝对数值不能外推到生产，只能用于跨调度器的相对比较。第三，资源开销：公平策略是每个 Deployment 同规格，所以没有量化 ENO 移除整个 Binder Deployment 在集群总资源上的收益。对应的三个延伸方向是生产灰度、多 Dispatcher 分区协同、以及在 ENO 上叠加具体调度策略。</a:t>
             </a:r>
           </a:p>
         </p:txBody>
@@ -1651,7 +1651,7 @@
           <a:lstStyle/>
           <a:p>
             <a:r>
-              <a:t>备用页：抽查任意场景的原始数值。</a:t>
+              <a:t>汇报到这里。一句话总结：把 Binder 合并进 Scheduler 进程，用 etcd 原子语义上的四层容错守住“至多绑定一次”，在 16 个场景、144 次 run 上做到更高吞吐、更低尾延迟与 100% 绑定成功率。请各位老师批评指正。</a:t>
             </a:r>
           </a:p>
         </p:txBody>
@@ -1721,7 +1721,7 @@
           <a:lstStyle/>
           <a:p>
             <a:r>
-              <a:t>备用页：如果评委追问某个数字怎么算出来的，用这页回答。</a:t>
+              <a:t>备用页：抽查任意场景的原始数值。</a:t>
             </a:r>
           </a:p>
         </p:txBody>
@@ -1791,7 +1791,7 @@
           <a:lstStyle/>
           <a:p>
             <a:r>
-              <a:t>备用页：幸存者偏差的解释。过载时 Pod 根本没被处理，所以延迟看起来“很好”。</a:t>
+              <a:t>备用页：如果评委追问某个数字怎么算出来的，用这页回答。</a:t>
             </a:r>
           </a:p>
         </p:txBody>
@@ -1861,7 +1861,7 @@
           <a:lstStyle/>
           <a:p>
             <a:r>
-              <a:t>备用页：w6 反向结果的完整数据与解释。</a:t>
+              <a:t>备用页：幸存者偏差的解释。过载时 Pod 根本没被处理，所以延迟看起来“很好”。</a:t>
             </a:r>
           </a:p>
         </p:txBody>
@@ -1931,7 +1931,7 @@
           <a:lstStyle/>
           <a:p>
             <a:r>
-              <a:t>备用页：公平性与资源开销的口径说明。</a:t>
+              <a:t>备用页：w6 反向结果的完整数据与解释。</a:t>
             </a:r>
           </a:p>
         </p:txBody>
@@ -2001,7 +2001,7 @@
           <a:lstStyle/>
           <a:p>
             <a:r>
-              <a:t>备用页：评委问可复现性时展示。</a:t>
+              <a:t>备用页：公平性与资源开销的口径说明。</a:t>
             </a:r>
           </a:p>
         </p:txBody>
@@ -2141,7 +2141,7 @@
           <a:lstStyle/>
           <a:p>
             <a:r>
-              <a:t>备用页：这一页是给评委看“形态”的。左边吞吐，右边 P99，共享同一条时间轴。ENO 的平台更高、更早稳定；右边的 P99 峰值更低、回落更快。这两张图放在一起的意义是：我们的优势不是某个瞬时点上的抖动，而是整段完成时间都更短——这也正好解释了为什么有效吞吐这个口径对我们有利，因为它衡量的是固定工作量做多久做完。</a:t>
+              <a:t>备用页：评委问可复现性时展示。</a:t>
             </a:r>
           </a:p>
         </p:txBody>
@@ -5839,7 +5839,7 @@
                 <a:latin typeface="Arial"/>
                 <a:ea typeface="微软雅黑"/>
               </a:rPr>
-              <a:t>1 / 23</a:t>
+              <a:t>1 / 24</a:t>
             </a:r>
           </a:p>
         </p:txBody>
@@ -6973,7 +6973,7 @@
                 <a:latin typeface="Arial"/>
                 <a:ea typeface="微软雅黑"/>
               </a:rPr>
-              <a:t>10 / 23</a:t>
+              <a:t>10 / 24</a:t>
             </a:r>
           </a:p>
         </p:txBody>
@@ -7327,7 +7327,7 @@
                 <a:latin typeface="Arial"/>
                 <a:ea typeface="微软雅黑"/>
               </a:rPr>
-              <a:t>11 / 23</a:t>
+              <a:t>11 / 24</a:t>
             </a:r>
           </a:p>
         </p:txBody>
@@ -8113,7 +8113,7 @@
                 <a:latin typeface="Arial"/>
                 <a:ea typeface="微软雅黑"/>
               </a:rPr>
-              <a:t>12 / 23</a:t>
+              <a:t>12 / 24</a:t>
             </a:r>
           </a:p>
         </p:txBody>
@@ -9205,7 +9205,7 @@
                 <a:latin typeface="Arial"/>
                 <a:ea typeface="微软雅黑"/>
               </a:rPr>
-              <a:t>13 / 23</a:t>
+              <a:t>13 / 24</a:t>
             </a:r>
           </a:p>
         </p:txBody>
@@ -9849,7 +9849,7 @@
                 <a:latin typeface="Arial"/>
                 <a:ea typeface="微软雅黑"/>
               </a:rPr>
-              <a:t>14 / 23</a:t>
+              <a:t>14 / 24</a:t>
             </a:r>
           </a:p>
         </p:txBody>
@@ -10687,7 +10687,7 @@
                 <a:latin typeface="Arial"/>
                 <a:ea typeface="微软雅黑"/>
               </a:rPr>
-              <a:t>15 / 23</a:t>
+              <a:t>15 / 24</a:t>
             </a:r>
           </a:p>
         </p:txBody>
@@ -10797,7 +10797,7 @@
                 <a:latin typeface="Arial"/>
                 <a:ea typeface="微软雅黑"/>
               </a:rPr>
-              <a:t>ENO vs Gödel 各场景吞吐对比</a:t>
+              <a:t>主场景 s3/w3 的时序形态</a:t>
             </a:r>
           </a:p>
         </p:txBody>
@@ -10881,14 +10881,14 @@
                 <a:latin typeface="Arial"/>
                 <a:ea typeface="微软雅黑"/>
               </a:rPr>
-              <a:t>平均 +11.9%，高负载与多实例场景优势最大</a:t>
+              <a:t>ENO 更早进入平台、平台更高、结束更早</a:t>
             </a:r>
           </a:p>
         </p:txBody>
       </p:sp>
       <p:pic>
         <p:nvPicPr>
-          <p:cNvPr id="6" name="Picture 5" descr="fig6-2-effective-throughput.png"/>
+          <p:cNvPr id="6" name="Picture 5" descr="fig6-throughput-s3-w3.png"/>
           <p:cNvPicPr>
             <a:picLocks noChangeAspect="1"/>
           </p:cNvPicPr>
@@ -10902,24 +10902,48 @@
         </p:blipFill>
         <p:spPr>
           <a:xfrm>
-            <a:off x="5806440" y="2535701"/>
-            <a:ext cx="5852160" cy="2700996"/>
+            <a:off x="566928" y="2322730"/>
+            <a:ext cx="5394960" cy="2212539"/>
           </a:xfrm>
           <a:prstGeom prst="rect">
             <a:avLst/>
           </a:prstGeom>
         </p:spPr>
       </p:pic>
-      <p:sp>
-        <p:nvSpPr>
-          <p:cNvPr id="7" name="TextBox 6"/>
+      <p:pic>
+        <p:nvPicPr>
+          <p:cNvPr id="7" name="Picture 6" descr="fig6-6-latency-p99-s3-w3.png"/>
+          <p:cNvPicPr>
+            <a:picLocks noChangeAspect="1"/>
+          </p:cNvPicPr>
+          <p:nvPr/>
+        </p:nvPicPr>
+        <p:blipFill>
+          <a:blip r:embed="rId3"/>
+          <a:stretch>
+            <a:fillRect/>
+          </a:stretch>
+        </p:blipFill>
+        <p:spPr>
+          <a:xfrm>
+            <a:off x="6172200" y="2323351"/>
+            <a:ext cx="5394960" cy="2211297"/>
+          </a:xfrm>
+          <a:prstGeom prst="rect">
+            <a:avLst/>
+          </a:prstGeom>
+        </p:spPr>
+      </p:pic>
+      <p:sp>
+        <p:nvSpPr>
+          <p:cNvPr id="8" name="TextBox 7"/>
           <p:cNvSpPr txBox="1"/>
           <p:nvPr/>
         </p:nvSpPr>
         <p:spPr>
           <a:xfrm>
-            <a:off x="566928" y="2011680"/>
-            <a:ext cx="5029200" cy="1417320"/>
+            <a:off x="566928" y="5138928"/>
+            <a:ext cx="11064240" cy="1097280"/>
           </a:xfrm>
           <a:prstGeom prst="rect">
             <a:avLst/>
@@ -10932,74 +10956,64 @@
           </a:bodyPr>
           <a:lstStyle/>
           <a:p>
-            <a:pPr algn="l">
-              <a:lnSpc>
-                <a:spcPct val="115000"/>
-              </a:lnSpc>
-            </a:pPr>
-            <a:r>
-              <a:rPr sz="1550" b="0">
+            <a:pPr algn="l"/>
+            <a:r>
+              <a:rPr sz="1400" b="0">
                 <a:solidFill>
                   <a:srgbClr val="333333"/>
                 </a:solidFill>
                 <a:latin typeface="Arial"/>
                 <a:ea typeface="微软雅黑"/>
               </a:rPr>
-              <a:t>▪  14 领先、2 持平（s1/w1、s4/w7）</a:t>
+              <a:t>▪  吞吐平台更高且更早稳定</a:t>
             </a:r>
           </a:p>
           <a:p>
             <a:pPr algn="l">
-              <a:lnSpc>
-                <a:spcPct val="115000"/>
-              </a:lnSpc>
               <a:spcBef>
-                <a:spcPts val="1400"/>
+                <a:spcPts val="600"/>
               </a:spcBef>
             </a:pPr>
             <a:r>
-              <a:rPr sz="1550" b="0">
+              <a:rPr sz="1400" b="0">
                 <a:solidFill>
                   <a:srgbClr val="333333"/>
                 </a:solidFill>
                 <a:latin typeface="Arial"/>
                 <a:ea typeface="微软雅黑"/>
               </a:rPr>
-              <a:t>▪  提升 +2.0%~+22.9%，平均 +11.9%</a:t>
+              <a:t>▪  P99 峰值更低、回落更快</a:t>
             </a:r>
           </a:p>
           <a:p>
             <a:pPr algn="l">
-              <a:lnSpc>
-                <a:spcPct val="115000"/>
-              </a:lnSpc>
               <a:spcBef>
-                <a:spcPts val="1400"/>
+                <a:spcPts val="600"/>
               </a:spcBef>
             </a:pPr>
             <a:r>
-              <a:rPr sz="1550" b="0">
+              <a:rPr sz="1400" b="0">
                 <a:solidFill>
                   <a:srgbClr val="333333"/>
                 </a:solidFill>
                 <a:latin typeface="Arial"/>
                 <a:ea typeface="微软雅黑"/>
               </a:rPr>
-              <a:t>▪  亮点：s2/w3 +22.9%、s3/w3 inst3 +21.7%</a:t>
-            </a:r>
-          </a:p>
-        </p:txBody>
-      </p:sp>
-      <p:sp>
-        <p:nvSpPr>
-          <p:cNvPr id="8" name="TextBox 7"/>
+              <a:t>▪  整体完成时间更短</a:t>
+            </a:r>
+          </a:p>
+        </p:txBody>
+      </p:sp>
+      <p:sp>
+        <p:nvSpPr>
+          <p:cNvPr id="9" name="TextBox 8"/>
           <p:cNvSpPr txBox="1"/>
           <p:nvPr/>
         </p:nvSpPr>
         <p:spPr>
           <a:xfrm>
-            <a:off x="566928" y="6309360"/>
-            <a:ext cx="10104120" cy="201168"/>
+            <a:off x="10780776" y="6345936"/>
+            <a:ext cx="850392" cy="219456"/>
           </a:xfrm>
           <a:prstGeom prst="rect">
             <a:avLst/>
@@ -11012,52 +11026,16 @@
           </a:bodyPr>
           <a:lstStyle/>
           <a:p>
-            <a:pPr algn="l"/>
-            <a:r>
-              <a:rPr sz="850" b="0">
+            <a:pPr algn="r"/>
+            <a:r>
+              <a:rPr sz="950" b="0">
                 <a:solidFill>
                   <a:srgbClr val="566474"/>
                 </a:solidFill>
                 <a:latin typeface="Arial"/>
                 <a:ea typeface="微软雅黑"/>
               </a:rPr>
-              <a:t>编码：s1–s4 = 100 / 1000 / 5000 / 10000 节点；w1–w7 = 负载强度（w2 500、w3 1000、w4 2000 pods/s 极限、w5 突发、w6 Gang、w7 异构）；inst3 = 3 实例</a:t>
-            </a:r>
-          </a:p>
-        </p:txBody>
-      </p:sp>
-      <p:sp>
-        <p:nvSpPr>
-          <p:cNvPr id="9" name="TextBox 8"/>
-          <p:cNvSpPr txBox="1"/>
-          <p:nvPr/>
-        </p:nvSpPr>
-        <p:spPr>
-          <a:xfrm>
-            <a:off x="10780776" y="6345936"/>
-            <a:ext cx="850392" cy="219456"/>
-          </a:xfrm>
-          <a:prstGeom prst="rect">
-            <a:avLst/>
-          </a:prstGeom>
-          <a:noFill/>
-        </p:spPr>
-        <p:txBody>
-          <a:bodyPr wrap="square" anchor="t" lIns="0" rIns="0" tIns="0" bIns="0">
-            <a:spAutoFit/>
-          </a:bodyPr>
-          <a:lstStyle/>
-          <a:p>
-            <a:pPr algn="r"/>
-            <a:r>
-              <a:rPr sz="950" b="0">
-                <a:solidFill>
-                  <a:srgbClr val="566474"/>
-                </a:solidFill>
-                <a:latin typeface="Arial"/>
-                <a:ea typeface="微软雅黑"/>
-              </a:rPr>
-              <a:t>16 / 23</a:t>
+              <a:t>16 / 24</a:t>
             </a:r>
           </a:p>
         </p:txBody>
@@ -11167,7 +11145,7 @@
                 <a:latin typeface="Arial"/>
                 <a:ea typeface="微软雅黑"/>
               </a:rPr>
-              <a:t>ENO vs Gödel 各场景尾延迟对比</a:t>
+              <a:t>ENO vs Gödel 各场景吞吐对比</a:t>
             </a:r>
           </a:p>
         </p:txBody>
@@ -11251,14 +11229,14 @@
                 <a:latin typeface="Arial"/>
                 <a:ea typeface="微软雅黑"/>
               </a:rPr>
-              <a:t>s2/w3 从 23.48 s 降到 4.00 s，降幅 82.9%</a:t>
+              <a:t>平均 +11.9%，高负载与多实例场景优势最大</a:t>
             </a:r>
           </a:p>
         </p:txBody>
       </p:sp>
       <p:pic>
         <p:nvPicPr>
-          <p:cNvPr id="6" name="Picture 5" descr="fig6-4-latency-p99-all.png"/>
+          <p:cNvPr id="6" name="Picture 5" descr="fig6-2-effective-throughput.png"/>
           <p:cNvPicPr>
             <a:picLocks noChangeAspect="1"/>
           </p:cNvPicPr>
@@ -11272,8 +11250,8 @@
         </p:blipFill>
         <p:spPr>
           <a:xfrm>
-            <a:off x="5806440" y="2527662"/>
-            <a:ext cx="5852160" cy="2717074"/>
+            <a:off x="5806440" y="2535701"/>
+            <a:ext cx="5852160" cy="2700996"/>
           </a:xfrm>
           <a:prstGeom prst="rect">
             <a:avLst/>
@@ -11308,14 +11286,14 @@
               </a:lnSpc>
             </a:pPr>
             <a:r>
-              <a:rPr sz="1350" b="0">
+              <a:rPr sz="1550" b="0">
                 <a:solidFill>
                   <a:srgbClr val="333333"/>
                 </a:solidFill>
                 <a:latin typeface="Arial"/>
                 <a:ea typeface="微软雅黑"/>
               </a:rPr>
-              <a:t>▪  15 个场景：11 好、1 持平（s2/w2）、3 个 Gang 反向</a:t>
+              <a:t>▪  14 领先、2 持平（s1/w1、s4/w7）</a:t>
             </a:r>
           </a:p>
           <a:p>
@@ -11324,18 +11302,18 @@
                 <a:spcPct val="115000"/>
               </a:lnSpc>
               <a:spcBef>
-                <a:spcPts val="1000"/>
+                <a:spcPts val="1400"/>
               </a:spcBef>
             </a:pPr>
             <a:r>
-              <a:rPr sz="1350" b="0">
+              <a:rPr sz="1550" b="0">
                 <a:solidFill>
                   <a:srgbClr val="333333"/>
                 </a:solidFill>
                 <a:latin typeface="Arial"/>
                 <a:ea typeface="微软雅黑"/>
               </a:rPr>
-              <a:t>▪  Gang（w6）3 个场景全部偏差：P99 高 1.6~4.1 倍，但吞吐仍 +4.3%~+19.1%</a:t>
+              <a:t>▪  提升 +2.0%~+22.9%，平均 +11.9%</a:t>
             </a:r>
           </a:p>
           <a:p>
@@ -11344,18 +11322,18 @@
                 <a:spcPct val="115000"/>
               </a:lnSpc>
               <a:spcBef>
-                <a:spcPts val="1000"/>
+                <a:spcPts val="1400"/>
               </a:spcBef>
             </a:pPr>
             <a:r>
-              <a:rPr sz="1350" b="0">
+              <a:rPr sz="1550" b="0">
                 <a:solidFill>
                   <a:srgbClr val="333333"/>
                 </a:solidFill>
                 <a:latin typeface="Arial"/>
                 <a:ea typeface="微软雅黑"/>
               </a:rPr>
-              <a:t>▪  Pod E2E P99：12 个非 Gang 改善 0.6%~75.3%，3 个 Gang 高 11.9%~122.2%</a:t>
+              <a:t>▪  亮点：s2/w3 +22.9%、s3/w3 inst3 +21.7%</a:t>
             </a:r>
           </a:p>
         </p:txBody>
@@ -11427,7 +11405,7 @@
                 <a:latin typeface="Arial"/>
                 <a:ea typeface="微软雅黑"/>
               </a:rPr>
-              <a:t>17 / 23</a:t>
+              <a:t>17 / 24</a:t>
             </a:r>
           </a:p>
         </p:txBody>
@@ -11441,6 +11419,376 @@
 </file>
 
 <file path=ppt/slides/slide18.xml><?xml version="1.0" encoding="utf-8"?>
+<p:sld xmlns:a="http://schemas.openxmlformats.org/drawingml/2006/main" xmlns:p="http://schemas.openxmlformats.org/presentationml/2006/main" xmlns:r="http://schemas.openxmlformats.org/officeDocument/2006/relationships">
+  <p:cSld>
+    <p:bg>
+      <p:bgPr>
+        <a:solidFill>
+          <a:srgbClr val="FFFFFF"/>
+        </a:solidFill>
+        <a:effectLst/>
+      </p:bgPr>
+    </p:bg>
+    <p:spTree>
+      <p:nvGrpSpPr>
+        <p:cNvPr id="1" name=""/>
+        <p:cNvGrpSpPr/>
+        <p:nvPr/>
+      </p:nvGrpSpPr>
+      <p:grpSpPr/>
+      <p:sp>
+        <p:nvSpPr>
+          <p:cNvPr id="2" name="Rectangle 1"/>
+          <p:cNvSpPr/>
+          <p:nvPr/>
+        </p:nvSpPr>
+        <p:spPr>
+          <a:xfrm>
+            <a:off x="384048" y="420624"/>
+            <a:ext cx="77724" cy="475488"/>
+          </a:xfrm>
+          <a:prstGeom prst="rect">
+            <a:avLst/>
+          </a:prstGeom>
+          <a:solidFill>
+            <a:srgbClr val="E8833A"/>
+          </a:solidFill>
+          <a:ln>
+            <a:noFill/>
+          </a:ln>
+          <a:effectLst/>
+        </p:spPr>
+        <p:style>
+          <a:lnRef idx="1">
+            <a:schemeClr val="accent1"/>
+          </a:lnRef>
+          <a:fillRef idx="3">
+            <a:schemeClr val="accent1"/>
+          </a:fillRef>
+          <a:effectRef idx="2">
+            <a:schemeClr val="accent1"/>
+          </a:effectRef>
+          <a:fontRef idx="minor">
+            <a:schemeClr val="lt1"/>
+          </a:fontRef>
+        </p:style>
+        <p:txBody>
+          <a:bodyPr rtlCol="0" anchor="ctr"/>
+          <a:lstStyle/>
+          <a:p>
+            <a:pPr algn="ctr"/>
+          </a:p>
+        </p:txBody>
+      </p:sp>
+      <p:sp>
+        <p:nvSpPr>
+          <p:cNvPr id="3" name="TextBox 2"/>
+          <p:cNvSpPr txBox="1"/>
+          <p:nvPr/>
+        </p:nvSpPr>
+        <p:spPr>
+          <a:xfrm>
+            <a:off x="566928" y="329184"/>
+            <a:ext cx="11064240" cy="713232"/>
+          </a:xfrm>
+          <a:prstGeom prst="rect">
+            <a:avLst/>
+          </a:prstGeom>
+          <a:noFill/>
+        </p:spPr>
+        <p:txBody>
+          <a:bodyPr wrap="square" anchor="ctr" lIns="0" rIns="0" tIns="0" bIns="0">
+            <a:spAutoFit/>
+          </a:bodyPr>
+          <a:lstStyle/>
+          <a:p>
+            <a:pPr algn="l">
+              <a:lnSpc>
+                <a:spcPct val="105000"/>
+              </a:lnSpc>
+            </a:pPr>
+            <a:r>
+              <a:rPr sz="2700" b="1">
+                <a:solidFill>
+                  <a:srgbClr val="0B2A4A"/>
+                </a:solidFill>
+                <a:latin typeface="Arial"/>
+                <a:ea typeface="微软雅黑"/>
+              </a:rPr>
+              <a:t>ENO vs Gödel 各场景尾延迟对比</a:t>
+            </a:r>
+          </a:p>
+        </p:txBody>
+      </p:sp>
+      <p:sp>
+        <p:nvSpPr>
+          <p:cNvPr id="4" name="Rectangle 3"/>
+          <p:cNvSpPr/>
+          <p:nvPr/>
+        </p:nvSpPr>
+        <p:spPr>
+          <a:xfrm>
+            <a:off x="566928" y="1298448"/>
+            <a:ext cx="32004" cy="365760"/>
+          </a:xfrm>
+          <a:prstGeom prst="rect">
+            <a:avLst/>
+          </a:prstGeom>
+          <a:solidFill>
+            <a:srgbClr val="1F5C99"/>
+          </a:solidFill>
+          <a:ln>
+            <a:noFill/>
+          </a:ln>
+          <a:effectLst/>
+        </p:spPr>
+        <p:style>
+          <a:lnRef idx="1">
+            <a:schemeClr val="accent1"/>
+          </a:lnRef>
+          <a:fillRef idx="3">
+            <a:schemeClr val="accent1"/>
+          </a:fillRef>
+          <a:effectRef idx="2">
+            <a:schemeClr val="accent1"/>
+          </a:effectRef>
+          <a:fontRef idx="minor">
+            <a:schemeClr val="lt1"/>
+          </a:fontRef>
+        </p:style>
+        <p:txBody>
+          <a:bodyPr rtlCol="0" anchor="ctr"/>
+          <a:lstStyle/>
+          <a:p>
+            <a:pPr algn="ctr"/>
+          </a:p>
+        </p:txBody>
+      </p:sp>
+      <p:sp>
+        <p:nvSpPr>
+          <p:cNvPr id="5" name="TextBox 4"/>
+          <p:cNvSpPr txBox="1"/>
+          <p:nvPr/>
+        </p:nvSpPr>
+        <p:spPr>
+          <a:xfrm>
+            <a:off x="713232" y="1261872"/>
+            <a:ext cx="10744200" cy="438912"/>
+          </a:xfrm>
+          <a:prstGeom prst="rect">
+            <a:avLst/>
+          </a:prstGeom>
+          <a:noFill/>
+        </p:spPr>
+        <p:txBody>
+          <a:bodyPr wrap="square" anchor="ctr" lIns="0" rIns="0" tIns="0" bIns="0">
+            <a:spAutoFit/>
+          </a:bodyPr>
+          <a:lstStyle/>
+          <a:p>
+            <a:pPr algn="l">
+              <a:lnSpc>
+                <a:spcPct val="110000"/>
+              </a:lnSpc>
+            </a:pPr>
+            <a:r>
+              <a:rPr sz="1800" b="1">
+                <a:solidFill>
+                  <a:srgbClr val="1F5C99"/>
+                </a:solidFill>
+                <a:latin typeface="Arial"/>
+                <a:ea typeface="微软雅黑"/>
+              </a:rPr>
+              <a:t>s2/w3 从 23.48 s 降到 4.00 s，降幅 82.9%</a:t>
+            </a:r>
+          </a:p>
+        </p:txBody>
+      </p:sp>
+      <p:pic>
+        <p:nvPicPr>
+          <p:cNvPr id="6" name="Picture 5" descr="fig6-4-latency-p99-all.png"/>
+          <p:cNvPicPr>
+            <a:picLocks noChangeAspect="1"/>
+          </p:cNvPicPr>
+          <p:nvPr/>
+        </p:nvPicPr>
+        <p:blipFill>
+          <a:blip r:embed="rId2"/>
+          <a:stretch>
+            <a:fillRect/>
+          </a:stretch>
+        </p:blipFill>
+        <p:spPr>
+          <a:xfrm>
+            <a:off x="5806440" y="2527662"/>
+            <a:ext cx="5852160" cy="2717074"/>
+          </a:xfrm>
+          <a:prstGeom prst="rect">
+            <a:avLst/>
+          </a:prstGeom>
+        </p:spPr>
+      </p:pic>
+      <p:sp>
+        <p:nvSpPr>
+          <p:cNvPr id="7" name="TextBox 6"/>
+          <p:cNvSpPr txBox="1"/>
+          <p:nvPr/>
+        </p:nvSpPr>
+        <p:spPr>
+          <a:xfrm>
+            <a:off x="566928" y="2011680"/>
+            <a:ext cx="5029200" cy="1417320"/>
+          </a:xfrm>
+          <a:prstGeom prst="rect">
+            <a:avLst/>
+          </a:prstGeom>
+          <a:noFill/>
+        </p:spPr>
+        <p:txBody>
+          <a:bodyPr wrap="square" anchor="t" lIns="0" rIns="0" tIns="0" bIns="0">
+            <a:spAutoFit/>
+          </a:bodyPr>
+          <a:lstStyle/>
+          <a:p>
+            <a:pPr algn="l">
+              <a:lnSpc>
+                <a:spcPct val="115000"/>
+              </a:lnSpc>
+            </a:pPr>
+            <a:r>
+              <a:rPr sz="1350" b="0">
+                <a:solidFill>
+                  <a:srgbClr val="333333"/>
+                </a:solidFill>
+                <a:latin typeface="Arial"/>
+                <a:ea typeface="微软雅黑"/>
+              </a:rPr>
+              <a:t>▪  15 个场景：11 好、1 持平（s2/w2）、3 个 Gang 反向</a:t>
+            </a:r>
+          </a:p>
+          <a:p>
+            <a:pPr algn="l">
+              <a:lnSpc>
+                <a:spcPct val="115000"/>
+              </a:lnSpc>
+              <a:spcBef>
+                <a:spcPts val="1000"/>
+              </a:spcBef>
+            </a:pPr>
+            <a:r>
+              <a:rPr sz="1350" b="0">
+                <a:solidFill>
+                  <a:srgbClr val="333333"/>
+                </a:solidFill>
+                <a:latin typeface="Arial"/>
+                <a:ea typeface="微软雅黑"/>
+              </a:rPr>
+              <a:t>▪  Gang（w6）3 个场景全部偏差：P99 高 1.6~4.1 倍，但吞吐仍 +4.3%~+19.1%</a:t>
+            </a:r>
+          </a:p>
+          <a:p>
+            <a:pPr algn="l">
+              <a:lnSpc>
+                <a:spcPct val="115000"/>
+              </a:lnSpc>
+              <a:spcBef>
+                <a:spcPts val="1000"/>
+              </a:spcBef>
+            </a:pPr>
+            <a:r>
+              <a:rPr sz="1350" b="0">
+                <a:solidFill>
+                  <a:srgbClr val="333333"/>
+                </a:solidFill>
+                <a:latin typeface="Arial"/>
+                <a:ea typeface="微软雅黑"/>
+              </a:rPr>
+              <a:t>▪  Pod E2E P99：12 个非 Gang 改善 0.6%~75.3%，3 个 Gang 高 11.9%~122.2%</a:t>
+            </a:r>
+          </a:p>
+        </p:txBody>
+      </p:sp>
+      <p:sp>
+        <p:nvSpPr>
+          <p:cNvPr id="8" name="TextBox 7"/>
+          <p:cNvSpPr txBox="1"/>
+          <p:nvPr/>
+        </p:nvSpPr>
+        <p:spPr>
+          <a:xfrm>
+            <a:off x="566928" y="6309360"/>
+            <a:ext cx="10104120" cy="201168"/>
+          </a:xfrm>
+          <a:prstGeom prst="rect">
+            <a:avLst/>
+          </a:prstGeom>
+          <a:noFill/>
+        </p:spPr>
+        <p:txBody>
+          <a:bodyPr wrap="square" anchor="t" lIns="0" rIns="0" tIns="0" bIns="0">
+            <a:spAutoFit/>
+          </a:bodyPr>
+          <a:lstStyle/>
+          <a:p>
+            <a:pPr algn="l"/>
+            <a:r>
+              <a:rPr sz="850" b="0">
+                <a:solidFill>
+                  <a:srgbClr val="566474"/>
+                </a:solidFill>
+                <a:latin typeface="Arial"/>
+                <a:ea typeface="微软雅黑"/>
+              </a:rPr>
+              <a:t>编码：s1–s4 = 100 / 1000 / 5000 / 10000 节点；w1–w7 = 负载强度（w2 500、w3 1000、w4 2000 pods/s 极限、w5 突发、w6 Gang、w7 异构）；inst3 = 3 实例</a:t>
+            </a:r>
+          </a:p>
+        </p:txBody>
+      </p:sp>
+      <p:sp>
+        <p:nvSpPr>
+          <p:cNvPr id="9" name="TextBox 8"/>
+          <p:cNvSpPr txBox="1"/>
+          <p:nvPr/>
+        </p:nvSpPr>
+        <p:spPr>
+          <a:xfrm>
+            <a:off x="10780776" y="6345936"/>
+            <a:ext cx="850392" cy="219456"/>
+          </a:xfrm>
+          <a:prstGeom prst="rect">
+            <a:avLst/>
+          </a:prstGeom>
+          <a:noFill/>
+        </p:spPr>
+        <p:txBody>
+          <a:bodyPr wrap="square" anchor="t" lIns="0" rIns="0" tIns="0" bIns="0">
+            <a:spAutoFit/>
+          </a:bodyPr>
+          <a:lstStyle/>
+          <a:p>
+            <a:pPr algn="r"/>
+            <a:r>
+              <a:rPr sz="950" b="0">
+                <a:solidFill>
+                  <a:srgbClr val="566474"/>
+                </a:solidFill>
+                <a:latin typeface="Arial"/>
+                <a:ea typeface="微软雅黑"/>
+              </a:rPr>
+              <a:t>18 / 24</a:t>
+            </a:r>
+          </a:p>
+        </p:txBody>
+      </p:sp>
+    </p:spTree>
+  </p:cSld>
+  <p:clrMapOvr>
+    <a:masterClrMapping/>
+  </p:clrMapOvr>
+</p:sld>
+</file>
+
+<file path=ppt/slides/slide19.xml><?xml version="1.0" encoding="utf-8"?>
 <p:sld xmlns:a="http://schemas.openxmlformats.org/drawingml/2006/main" xmlns:p="http://schemas.openxmlformats.org/presentationml/2006/main" xmlns:r="http://schemas.openxmlformats.org/officeDocument/2006/relationships">
   <p:cSld>
     <p:bg>
@@ -12116,7 +12464,7 @@
                 <a:latin typeface="Arial"/>
                 <a:ea typeface="微软雅黑"/>
               </a:rPr>
-              <a:t>18 / 23</a:t>
+              <a:t>19 / 24</a:t>
             </a:r>
           </a:p>
         </p:txBody>
@@ -12129,7 +12477,715 @@
 </p:sld>
 </file>
 
-<file path=ppt/slides/slide19.xml><?xml version="1.0" encoding="utf-8"?>
+<file path=ppt/slides/slide2.xml><?xml version="1.0" encoding="utf-8"?>
+<p:sld xmlns:a="http://schemas.openxmlformats.org/drawingml/2006/main" xmlns:p="http://schemas.openxmlformats.org/presentationml/2006/main" xmlns:r="http://schemas.openxmlformats.org/officeDocument/2006/relationships">
+  <p:cSld>
+    <p:bg>
+      <p:bgPr>
+        <a:solidFill>
+          <a:srgbClr val="FFFFFF"/>
+        </a:solidFill>
+        <a:effectLst/>
+      </p:bgPr>
+    </p:bg>
+    <p:spTree>
+      <p:nvGrpSpPr>
+        <p:cNvPr id="1" name=""/>
+        <p:cNvGrpSpPr/>
+        <p:nvPr/>
+      </p:nvGrpSpPr>
+      <p:grpSpPr/>
+      <p:sp>
+        <p:nvSpPr>
+          <p:cNvPr id="2" name="Rectangle 1"/>
+          <p:cNvSpPr/>
+          <p:nvPr/>
+        </p:nvSpPr>
+        <p:spPr>
+          <a:xfrm>
+            <a:off x="384048" y="420624"/>
+            <a:ext cx="77724" cy="475488"/>
+          </a:xfrm>
+          <a:prstGeom prst="rect">
+            <a:avLst/>
+          </a:prstGeom>
+          <a:solidFill>
+            <a:srgbClr val="E8833A"/>
+          </a:solidFill>
+          <a:ln>
+            <a:noFill/>
+          </a:ln>
+          <a:effectLst/>
+        </p:spPr>
+        <p:style>
+          <a:lnRef idx="1">
+            <a:schemeClr val="accent1"/>
+          </a:lnRef>
+          <a:fillRef idx="3">
+            <a:schemeClr val="accent1"/>
+          </a:fillRef>
+          <a:effectRef idx="2">
+            <a:schemeClr val="accent1"/>
+          </a:effectRef>
+          <a:fontRef idx="minor">
+            <a:schemeClr val="lt1"/>
+          </a:fontRef>
+        </p:style>
+        <p:txBody>
+          <a:bodyPr rtlCol="0" anchor="ctr"/>
+          <a:lstStyle/>
+          <a:p>
+            <a:pPr algn="ctr"/>
+          </a:p>
+        </p:txBody>
+      </p:sp>
+      <p:sp>
+        <p:nvSpPr>
+          <p:cNvPr id="3" name="TextBox 2"/>
+          <p:cNvSpPr txBox="1"/>
+          <p:nvPr/>
+        </p:nvSpPr>
+        <p:spPr>
+          <a:xfrm>
+            <a:off x="566928" y="329184"/>
+            <a:ext cx="11064240" cy="713232"/>
+          </a:xfrm>
+          <a:prstGeom prst="rect">
+            <a:avLst/>
+          </a:prstGeom>
+          <a:noFill/>
+        </p:spPr>
+        <p:txBody>
+          <a:bodyPr wrap="square" anchor="ctr" lIns="0" rIns="0" tIns="0" bIns="0">
+            <a:spAutoFit/>
+          </a:bodyPr>
+          <a:lstStyle/>
+          <a:p>
+            <a:pPr algn="l">
+              <a:lnSpc>
+                <a:spcPct val="105000"/>
+              </a:lnSpc>
+            </a:pPr>
+            <a:r>
+              <a:rPr sz="2700" b="1">
+                <a:solidFill>
+                  <a:srgbClr val="0B2A4A"/>
+                </a:solidFill>
+                <a:latin typeface="Arial"/>
+                <a:ea typeface="微软雅黑"/>
+              </a:rPr>
+              <a:t>研究背景</a:t>
+            </a:r>
+          </a:p>
+        </p:txBody>
+      </p:sp>
+      <p:sp>
+        <p:nvSpPr>
+          <p:cNvPr id="4" name="Rectangle 3"/>
+          <p:cNvSpPr/>
+          <p:nvPr/>
+        </p:nvSpPr>
+        <p:spPr>
+          <a:xfrm>
+            <a:off x="566928" y="1298448"/>
+            <a:ext cx="32004" cy="365760"/>
+          </a:xfrm>
+          <a:prstGeom prst="rect">
+            <a:avLst/>
+          </a:prstGeom>
+          <a:solidFill>
+            <a:srgbClr val="1F5C99"/>
+          </a:solidFill>
+          <a:ln>
+            <a:noFill/>
+          </a:ln>
+          <a:effectLst/>
+        </p:spPr>
+        <p:style>
+          <a:lnRef idx="1">
+            <a:schemeClr val="accent1"/>
+          </a:lnRef>
+          <a:fillRef idx="3">
+            <a:schemeClr val="accent1"/>
+          </a:fillRef>
+          <a:effectRef idx="2">
+            <a:schemeClr val="accent1"/>
+          </a:effectRef>
+          <a:fontRef idx="minor">
+            <a:schemeClr val="lt1"/>
+          </a:fontRef>
+        </p:style>
+        <p:txBody>
+          <a:bodyPr rtlCol="0" anchor="ctr"/>
+          <a:lstStyle/>
+          <a:p>
+            <a:pPr algn="ctr"/>
+          </a:p>
+        </p:txBody>
+      </p:sp>
+      <p:sp>
+        <p:nvSpPr>
+          <p:cNvPr id="5" name="TextBox 4"/>
+          <p:cNvSpPr txBox="1"/>
+          <p:nvPr/>
+        </p:nvSpPr>
+        <p:spPr>
+          <a:xfrm>
+            <a:off x="713232" y="1261872"/>
+            <a:ext cx="10744200" cy="438912"/>
+          </a:xfrm>
+          <a:prstGeom prst="rect">
+            <a:avLst/>
+          </a:prstGeom>
+          <a:noFill/>
+        </p:spPr>
+        <p:txBody>
+          <a:bodyPr wrap="square" anchor="ctr" lIns="0" rIns="0" tIns="0" bIns="0">
+            <a:spAutoFit/>
+          </a:bodyPr>
+          <a:lstStyle/>
+          <a:p>
+            <a:pPr algn="l">
+              <a:lnSpc>
+                <a:spcPct val="110000"/>
+              </a:lnSpc>
+            </a:pPr>
+            <a:r>
+              <a:rPr sz="1800" b="1">
+                <a:solidFill>
+                  <a:srgbClr val="1F5C99"/>
+                </a:solidFill>
+                <a:latin typeface="Arial"/>
+                <a:ea typeface="微软雅黑"/>
+              </a:rPr>
+              <a:t>生产集群进入万节点量级，单实例架构在吞吐与高可用上同时受制</a:t>
+            </a:r>
+          </a:p>
+        </p:txBody>
+      </p:sp>
+      <p:sp>
+        <p:nvSpPr>
+          <p:cNvPr id="6" name="TextBox 5"/>
+          <p:cNvSpPr txBox="1"/>
+          <p:nvPr/>
+        </p:nvSpPr>
+        <p:spPr>
+          <a:xfrm>
+            <a:off x="566928" y="1783080"/>
+            <a:ext cx="10881360" cy="1234440"/>
+          </a:xfrm>
+          <a:prstGeom prst="rect">
+            <a:avLst/>
+          </a:prstGeom>
+          <a:noFill/>
+        </p:spPr>
+        <p:txBody>
+          <a:bodyPr wrap="square" anchor="t" lIns="0" rIns="0" tIns="0" bIns="0">
+            <a:spAutoFit/>
+          </a:bodyPr>
+          <a:lstStyle/>
+          <a:p>
+            <a:pPr algn="l">
+              <a:lnSpc>
+                <a:spcPct val="135000"/>
+              </a:lnSpc>
+            </a:pPr>
+            <a:r>
+              <a:rPr sz="1500" b="0">
+                <a:solidFill>
+                  <a:srgbClr val="333333"/>
+                </a:solidFill>
+                <a:latin typeface="Arial"/>
+                <a:ea typeface="微软雅黑"/>
+              </a:rPr>
+              <a:t>Kubernetes 已成为云原生的事实标准，调度器处在 Pod 生命周期的关键路径上：它的吞吐与延迟直接决定集群资源利用率与业务响应速度。千节点规模下单实例尚可支撑，集群进入万节点量级后，三个瓶颈同时显现。</a:t>
+            </a:r>
+          </a:p>
+        </p:txBody>
+      </p:sp>
+      <p:sp>
+        <p:nvSpPr>
+          <p:cNvPr id="7" name="Rounded Rectangle 6"/>
+          <p:cNvSpPr/>
+          <p:nvPr/>
+        </p:nvSpPr>
+        <p:spPr>
+          <a:xfrm>
+            <a:off x="566928" y="2880360"/>
+            <a:ext cx="3517391" cy="2103120"/>
+          </a:xfrm>
+          <a:prstGeom prst="roundRect">
+            <a:avLst/>
+          </a:prstGeom>
+          <a:solidFill>
+            <a:srgbClr val="F5F7FA"/>
+          </a:solidFill>
+          <a:ln w="9525">
+            <a:solidFill>
+              <a:srgbClr val="D8DFE8"/>
+            </a:solidFill>
+          </a:ln>
+          <a:effectLst/>
+        </p:spPr>
+        <p:style>
+          <a:lnRef idx="1">
+            <a:schemeClr val="accent1"/>
+          </a:lnRef>
+          <a:fillRef idx="3">
+            <a:schemeClr val="accent1"/>
+          </a:fillRef>
+          <a:effectRef idx="2">
+            <a:schemeClr val="accent1"/>
+          </a:effectRef>
+          <a:fontRef idx="minor">
+            <a:schemeClr val="lt1"/>
+          </a:fontRef>
+        </p:style>
+        <p:txBody>
+          <a:bodyPr rtlCol="0" anchor="ctr"/>
+          <a:lstStyle/>
+          <a:p>
+            <a:pPr algn="ctr"/>
+          </a:p>
+        </p:txBody>
+      </p:sp>
+      <p:sp>
+        <p:nvSpPr>
+          <p:cNvPr id="8" name="Rectangle 7"/>
+          <p:cNvSpPr/>
+          <p:nvPr/>
+        </p:nvSpPr>
+        <p:spPr>
+          <a:xfrm>
+            <a:off x="566928" y="2880360"/>
+            <a:ext cx="50292" cy="2103120"/>
+          </a:xfrm>
+          <a:prstGeom prst="rect">
+            <a:avLst/>
+          </a:prstGeom>
+          <a:solidFill>
+            <a:srgbClr val="1F5C99"/>
+          </a:solidFill>
+          <a:ln>
+            <a:noFill/>
+          </a:ln>
+          <a:effectLst/>
+        </p:spPr>
+        <p:style>
+          <a:lnRef idx="1">
+            <a:schemeClr val="accent1"/>
+          </a:lnRef>
+          <a:fillRef idx="3">
+            <a:schemeClr val="accent1"/>
+          </a:fillRef>
+          <a:effectRef idx="2">
+            <a:schemeClr val="accent1"/>
+          </a:effectRef>
+          <a:fontRef idx="minor">
+            <a:schemeClr val="lt1"/>
+          </a:fontRef>
+        </p:style>
+        <p:txBody>
+          <a:bodyPr rtlCol="0" anchor="ctr"/>
+          <a:lstStyle/>
+          <a:p>
+            <a:pPr algn="ctr"/>
+          </a:p>
+        </p:txBody>
+      </p:sp>
+      <p:sp>
+        <p:nvSpPr>
+          <p:cNvPr id="9" name="TextBox 8"/>
+          <p:cNvSpPr txBox="1"/>
+          <p:nvPr/>
+        </p:nvSpPr>
+        <p:spPr>
+          <a:xfrm>
+            <a:off x="731520" y="3008376"/>
+            <a:ext cx="3243072" cy="1920239"/>
+          </a:xfrm>
+          <a:prstGeom prst="rect">
+            <a:avLst/>
+          </a:prstGeom>
+          <a:noFill/>
+        </p:spPr>
+        <p:txBody>
+          <a:bodyPr wrap="square" anchor="t" lIns="0" rIns="0" tIns="0" bIns="0">
+            <a:spAutoFit/>
+          </a:bodyPr>
+          <a:lstStyle/>
+          <a:p>
+            <a:pPr algn="l"/>
+            <a:r>
+              <a:rPr sz="1400" b="1">
+                <a:solidFill>
+                  <a:srgbClr val="0B2A4A"/>
+                </a:solidFill>
+                <a:latin typeface="Arial"/>
+                <a:ea typeface="微软雅黑"/>
+              </a:rPr>
+              <a:t>吞吐存在上限</a:t>
+            </a:r>
+          </a:p>
+          <a:p>
+            <a:pPr algn="l">
+              <a:lnSpc>
+                <a:spcPct val="110000"/>
+              </a:lnSpc>
+              <a:spcBef>
+                <a:spcPts val="400"/>
+              </a:spcBef>
+            </a:pPr>
+            <a:r>
+              <a:rPr sz="1150" b="0">
+                <a:solidFill>
+                  <a:srgbClr val="333333"/>
+                </a:solidFill>
+                <a:latin typeface="Arial"/>
+                <a:ea typeface="微软雅黑"/>
+              </a:rPr>
+              <a:t>activeQ 串行处理 Pod，大规模弹性伸缩与批任务启动被拖慢</a:t>
+            </a:r>
+          </a:p>
+        </p:txBody>
+      </p:sp>
+      <p:sp>
+        <p:nvSpPr>
+          <p:cNvPr id="10" name="Rounded Rectangle 9"/>
+          <p:cNvSpPr/>
+          <p:nvPr/>
+        </p:nvSpPr>
+        <p:spPr>
+          <a:xfrm>
+            <a:off x="4340351" y="2880360"/>
+            <a:ext cx="3517391" cy="2103120"/>
+          </a:xfrm>
+          <a:prstGeom prst="roundRect">
+            <a:avLst/>
+          </a:prstGeom>
+          <a:solidFill>
+            <a:srgbClr val="F5F7FA"/>
+          </a:solidFill>
+          <a:ln w="9525">
+            <a:solidFill>
+              <a:srgbClr val="D8DFE8"/>
+            </a:solidFill>
+          </a:ln>
+          <a:effectLst/>
+        </p:spPr>
+        <p:style>
+          <a:lnRef idx="1">
+            <a:schemeClr val="accent1"/>
+          </a:lnRef>
+          <a:fillRef idx="3">
+            <a:schemeClr val="accent1"/>
+          </a:fillRef>
+          <a:effectRef idx="2">
+            <a:schemeClr val="accent1"/>
+          </a:effectRef>
+          <a:fontRef idx="minor">
+            <a:schemeClr val="lt1"/>
+          </a:fontRef>
+        </p:style>
+        <p:txBody>
+          <a:bodyPr rtlCol="0" anchor="ctr"/>
+          <a:lstStyle/>
+          <a:p>
+            <a:pPr algn="ctr"/>
+          </a:p>
+        </p:txBody>
+      </p:sp>
+      <p:sp>
+        <p:nvSpPr>
+          <p:cNvPr id="11" name="Rectangle 10"/>
+          <p:cNvSpPr/>
+          <p:nvPr/>
+        </p:nvSpPr>
+        <p:spPr>
+          <a:xfrm>
+            <a:off x="4340351" y="2880360"/>
+            <a:ext cx="50292" cy="2103120"/>
+          </a:xfrm>
+          <a:prstGeom prst="rect">
+            <a:avLst/>
+          </a:prstGeom>
+          <a:solidFill>
+            <a:srgbClr val="1F5C99"/>
+          </a:solidFill>
+          <a:ln>
+            <a:noFill/>
+          </a:ln>
+          <a:effectLst/>
+        </p:spPr>
+        <p:style>
+          <a:lnRef idx="1">
+            <a:schemeClr val="accent1"/>
+          </a:lnRef>
+          <a:fillRef idx="3">
+            <a:schemeClr val="accent1"/>
+          </a:fillRef>
+          <a:effectRef idx="2">
+            <a:schemeClr val="accent1"/>
+          </a:effectRef>
+          <a:fontRef idx="minor">
+            <a:schemeClr val="lt1"/>
+          </a:fontRef>
+        </p:style>
+        <p:txBody>
+          <a:bodyPr rtlCol="0" anchor="ctr"/>
+          <a:lstStyle/>
+          <a:p>
+            <a:pPr algn="ctr"/>
+          </a:p>
+        </p:txBody>
+      </p:sp>
+      <p:sp>
+        <p:nvSpPr>
+          <p:cNvPr id="12" name="TextBox 11"/>
+          <p:cNvSpPr txBox="1"/>
+          <p:nvPr/>
+        </p:nvSpPr>
+        <p:spPr>
+          <a:xfrm>
+            <a:off x="4504943" y="3008376"/>
+            <a:ext cx="3243072" cy="1920239"/>
+          </a:xfrm>
+          <a:prstGeom prst="rect">
+            <a:avLst/>
+          </a:prstGeom>
+          <a:noFill/>
+        </p:spPr>
+        <p:txBody>
+          <a:bodyPr wrap="square" anchor="t" lIns="0" rIns="0" tIns="0" bIns="0">
+            <a:spAutoFit/>
+          </a:bodyPr>
+          <a:lstStyle/>
+          <a:p>
+            <a:pPr algn="l"/>
+            <a:r>
+              <a:rPr sz="1400" b="1">
+                <a:solidFill>
+                  <a:srgbClr val="0B2A4A"/>
+                </a:solidFill>
+                <a:latin typeface="Arial"/>
+                <a:ea typeface="微软雅黑"/>
+              </a:rPr>
+              <a:t>尾延迟持续抬升</a:t>
+            </a:r>
+          </a:p>
+          <a:p>
+            <a:pPr algn="l">
+              <a:lnSpc>
+                <a:spcPct val="110000"/>
+              </a:lnSpc>
+              <a:spcBef>
+                <a:spcPts val="400"/>
+              </a:spcBef>
+            </a:pPr>
+            <a:r>
+              <a:rPr sz="1150" b="0">
+                <a:solidFill>
+                  <a:srgbClr val="333333"/>
+                </a:solidFill>
+                <a:latin typeface="Arial"/>
+                <a:ea typeface="微软雅黑"/>
+              </a:rPr>
+              <a:t>Filter/Score 遍历节点开销随规模线性上升，5000 节点下 P99 明显恶化</a:t>
+            </a:r>
+          </a:p>
+        </p:txBody>
+      </p:sp>
+      <p:sp>
+        <p:nvSpPr>
+          <p:cNvPr id="13" name="Rounded Rectangle 12"/>
+          <p:cNvSpPr/>
+          <p:nvPr/>
+        </p:nvSpPr>
+        <p:spPr>
+          <a:xfrm>
+            <a:off x="8113775" y="2880360"/>
+            <a:ext cx="3517391" cy="2103120"/>
+          </a:xfrm>
+          <a:prstGeom prst="roundRect">
+            <a:avLst/>
+          </a:prstGeom>
+          <a:solidFill>
+            <a:srgbClr val="F5F7FA"/>
+          </a:solidFill>
+          <a:ln w="9525">
+            <a:solidFill>
+              <a:srgbClr val="D8DFE8"/>
+            </a:solidFill>
+          </a:ln>
+          <a:effectLst/>
+        </p:spPr>
+        <p:style>
+          <a:lnRef idx="1">
+            <a:schemeClr val="accent1"/>
+          </a:lnRef>
+          <a:fillRef idx="3">
+            <a:schemeClr val="accent1"/>
+          </a:fillRef>
+          <a:effectRef idx="2">
+            <a:schemeClr val="accent1"/>
+          </a:effectRef>
+          <a:fontRef idx="minor">
+            <a:schemeClr val="lt1"/>
+          </a:fontRef>
+        </p:style>
+        <p:txBody>
+          <a:bodyPr rtlCol="0" anchor="ctr"/>
+          <a:lstStyle/>
+          <a:p>
+            <a:pPr algn="ctr"/>
+          </a:p>
+        </p:txBody>
+      </p:sp>
+      <p:sp>
+        <p:nvSpPr>
+          <p:cNvPr id="14" name="Rectangle 13"/>
+          <p:cNvSpPr/>
+          <p:nvPr/>
+        </p:nvSpPr>
+        <p:spPr>
+          <a:xfrm>
+            <a:off x="8113775" y="2880360"/>
+            <a:ext cx="50292" cy="2103120"/>
+          </a:xfrm>
+          <a:prstGeom prst="rect">
+            <a:avLst/>
+          </a:prstGeom>
+          <a:solidFill>
+            <a:srgbClr val="1F5C99"/>
+          </a:solidFill>
+          <a:ln>
+            <a:noFill/>
+          </a:ln>
+          <a:effectLst/>
+        </p:spPr>
+        <p:style>
+          <a:lnRef idx="1">
+            <a:schemeClr val="accent1"/>
+          </a:lnRef>
+          <a:fillRef idx="3">
+            <a:schemeClr val="accent1"/>
+          </a:fillRef>
+          <a:effectRef idx="2">
+            <a:schemeClr val="accent1"/>
+          </a:effectRef>
+          <a:fontRef idx="minor">
+            <a:schemeClr val="lt1"/>
+          </a:fontRef>
+        </p:style>
+        <p:txBody>
+          <a:bodyPr rtlCol="0" anchor="ctr"/>
+          <a:lstStyle/>
+          <a:p>
+            <a:pPr algn="ctr"/>
+          </a:p>
+        </p:txBody>
+      </p:sp>
+      <p:sp>
+        <p:nvSpPr>
+          <p:cNvPr id="15" name="TextBox 14"/>
+          <p:cNvSpPr txBox="1"/>
+          <p:nvPr/>
+        </p:nvSpPr>
+        <p:spPr>
+          <a:xfrm>
+            <a:off x="8278367" y="3008376"/>
+            <a:ext cx="3243072" cy="1920239"/>
+          </a:xfrm>
+          <a:prstGeom prst="rect">
+            <a:avLst/>
+          </a:prstGeom>
+          <a:noFill/>
+        </p:spPr>
+        <p:txBody>
+          <a:bodyPr wrap="square" anchor="t" lIns="0" rIns="0" tIns="0" bIns="0">
+            <a:spAutoFit/>
+          </a:bodyPr>
+          <a:lstStyle/>
+          <a:p>
+            <a:pPr algn="l"/>
+            <a:r>
+              <a:rPr sz="1400" b="1">
+                <a:solidFill>
+                  <a:srgbClr val="0B2A4A"/>
+                </a:solidFill>
+                <a:latin typeface="Arial"/>
+                <a:ea typeface="微软雅黑"/>
+              </a:rPr>
+              <a:t>单点故障风险</a:t>
+            </a:r>
+          </a:p>
+          <a:p>
+            <a:pPr algn="l">
+              <a:lnSpc>
+                <a:spcPct val="110000"/>
+              </a:lnSpc>
+              <a:spcBef>
+                <a:spcPts val="400"/>
+              </a:spcBef>
+            </a:pPr>
+            <a:r>
+              <a:rPr sz="1150" b="0">
+                <a:solidFill>
+                  <a:srgbClr val="333333"/>
+                </a:solidFill>
+                <a:latin typeface="Arial"/>
+                <a:ea typeface="微软雅黑"/>
+              </a:rPr>
+              <a:t>Leader 崩溃后需等待 Standby 接管，这段窗口内集群完全无法调度</a:t>
+            </a:r>
+          </a:p>
+        </p:txBody>
+      </p:sp>
+      <p:sp>
+        <p:nvSpPr>
+          <p:cNvPr id="16" name="TextBox 15"/>
+          <p:cNvSpPr txBox="1"/>
+          <p:nvPr/>
+        </p:nvSpPr>
+        <p:spPr>
+          <a:xfrm>
+            <a:off x="10780776" y="6345936"/>
+            <a:ext cx="850392" cy="219456"/>
+          </a:xfrm>
+          <a:prstGeom prst="rect">
+            <a:avLst/>
+          </a:prstGeom>
+          <a:noFill/>
+        </p:spPr>
+        <p:txBody>
+          <a:bodyPr wrap="square" anchor="t" lIns="0" rIns="0" tIns="0" bIns="0">
+            <a:spAutoFit/>
+          </a:bodyPr>
+          <a:lstStyle/>
+          <a:p>
+            <a:pPr algn="r"/>
+            <a:r>
+              <a:rPr sz="950" b="0">
+                <a:solidFill>
+                  <a:srgbClr val="566474"/>
+                </a:solidFill>
+                <a:latin typeface="Arial"/>
+                <a:ea typeface="微软雅黑"/>
+              </a:rPr>
+              <a:t>2 / 24</a:t>
+            </a:r>
+          </a:p>
+        </p:txBody>
+      </p:sp>
+    </p:spTree>
+  </p:cSld>
+  <p:clrMapOvr>
+    <a:masterClrMapping/>
+  </p:clrMapOvr>
+</p:sld>
+</file>
+
+<file path=ppt/slides/slide20.xml><?xml version="1.0" encoding="utf-8"?>
 <p:sld xmlns:a="http://schemas.openxmlformats.org/drawingml/2006/main" xmlns:p="http://schemas.openxmlformats.org/presentationml/2006/main" xmlns:r="http://schemas.openxmlformats.org/officeDocument/2006/relationships">
   <p:cSld>
     <p:bg>
@@ -13059,1085 +14115,7 @@
                 <a:latin typeface="Arial"/>
                 <a:ea typeface="微软雅黑"/>
               </a:rPr>
-              <a:t>19 / 23</a:t>
-            </a:r>
-          </a:p>
-        </p:txBody>
-      </p:sp>
-    </p:spTree>
-  </p:cSld>
-  <p:clrMapOvr>
-    <a:masterClrMapping/>
-  </p:clrMapOvr>
-</p:sld>
-</file>
-
-<file path=ppt/slides/slide2.xml><?xml version="1.0" encoding="utf-8"?>
-<p:sld xmlns:a="http://schemas.openxmlformats.org/drawingml/2006/main" xmlns:p="http://schemas.openxmlformats.org/presentationml/2006/main" xmlns:r="http://schemas.openxmlformats.org/officeDocument/2006/relationships">
-  <p:cSld>
-    <p:bg>
-      <p:bgPr>
-        <a:solidFill>
-          <a:srgbClr val="FFFFFF"/>
-        </a:solidFill>
-        <a:effectLst/>
-      </p:bgPr>
-    </p:bg>
-    <p:spTree>
-      <p:nvGrpSpPr>
-        <p:cNvPr id="1" name=""/>
-        <p:cNvGrpSpPr/>
-        <p:nvPr/>
-      </p:nvGrpSpPr>
-      <p:grpSpPr/>
-      <p:sp>
-        <p:nvSpPr>
-          <p:cNvPr id="2" name="Rectangle 1"/>
-          <p:cNvSpPr/>
-          <p:nvPr/>
-        </p:nvSpPr>
-        <p:spPr>
-          <a:xfrm>
-            <a:off x="384048" y="420624"/>
-            <a:ext cx="77724" cy="475488"/>
-          </a:xfrm>
-          <a:prstGeom prst="rect">
-            <a:avLst/>
-          </a:prstGeom>
-          <a:solidFill>
-            <a:srgbClr val="E8833A"/>
-          </a:solidFill>
-          <a:ln>
-            <a:noFill/>
-          </a:ln>
-          <a:effectLst/>
-        </p:spPr>
-        <p:style>
-          <a:lnRef idx="1">
-            <a:schemeClr val="accent1"/>
-          </a:lnRef>
-          <a:fillRef idx="3">
-            <a:schemeClr val="accent1"/>
-          </a:fillRef>
-          <a:effectRef idx="2">
-            <a:schemeClr val="accent1"/>
-          </a:effectRef>
-          <a:fontRef idx="minor">
-            <a:schemeClr val="lt1"/>
-          </a:fontRef>
-        </p:style>
-        <p:txBody>
-          <a:bodyPr rtlCol="0" anchor="ctr"/>
-          <a:lstStyle/>
-          <a:p>
-            <a:pPr algn="ctr"/>
-          </a:p>
-        </p:txBody>
-      </p:sp>
-      <p:sp>
-        <p:nvSpPr>
-          <p:cNvPr id="3" name="TextBox 2"/>
-          <p:cNvSpPr txBox="1"/>
-          <p:nvPr/>
-        </p:nvSpPr>
-        <p:spPr>
-          <a:xfrm>
-            <a:off x="566928" y="329184"/>
-            <a:ext cx="11064240" cy="713232"/>
-          </a:xfrm>
-          <a:prstGeom prst="rect">
-            <a:avLst/>
-          </a:prstGeom>
-          <a:noFill/>
-        </p:spPr>
-        <p:txBody>
-          <a:bodyPr wrap="square" anchor="ctr" lIns="0" rIns="0" tIns="0" bIns="0">
-            <a:spAutoFit/>
-          </a:bodyPr>
-          <a:lstStyle/>
-          <a:p>
-            <a:pPr algn="l">
-              <a:lnSpc>
-                <a:spcPct val="105000"/>
-              </a:lnSpc>
-            </a:pPr>
-            <a:r>
-              <a:rPr sz="2700" b="1">
-                <a:solidFill>
-                  <a:srgbClr val="0B2A4A"/>
-                </a:solidFill>
-                <a:latin typeface="Arial"/>
-                <a:ea typeface="微软雅黑"/>
-              </a:rPr>
-              <a:t>研究背景</a:t>
-            </a:r>
-          </a:p>
-        </p:txBody>
-      </p:sp>
-      <p:sp>
-        <p:nvSpPr>
-          <p:cNvPr id="4" name="Rectangle 3"/>
-          <p:cNvSpPr/>
-          <p:nvPr/>
-        </p:nvSpPr>
-        <p:spPr>
-          <a:xfrm>
-            <a:off x="566928" y="1298448"/>
-            <a:ext cx="32004" cy="365760"/>
-          </a:xfrm>
-          <a:prstGeom prst="rect">
-            <a:avLst/>
-          </a:prstGeom>
-          <a:solidFill>
-            <a:srgbClr val="1F5C99"/>
-          </a:solidFill>
-          <a:ln>
-            <a:noFill/>
-          </a:ln>
-          <a:effectLst/>
-        </p:spPr>
-        <p:style>
-          <a:lnRef idx="1">
-            <a:schemeClr val="accent1"/>
-          </a:lnRef>
-          <a:fillRef idx="3">
-            <a:schemeClr val="accent1"/>
-          </a:fillRef>
-          <a:effectRef idx="2">
-            <a:schemeClr val="accent1"/>
-          </a:effectRef>
-          <a:fontRef idx="minor">
-            <a:schemeClr val="lt1"/>
-          </a:fontRef>
-        </p:style>
-        <p:txBody>
-          <a:bodyPr rtlCol="0" anchor="ctr"/>
-          <a:lstStyle/>
-          <a:p>
-            <a:pPr algn="ctr"/>
-          </a:p>
-        </p:txBody>
-      </p:sp>
-      <p:sp>
-        <p:nvSpPr>
-          <p:cNvPr id="5" name="TextBox 4"/>
-          <p:cNvSpPr txBox="1"/>
-          <p:nvPr/>
-        </p:nvSpPr>
-        <p:spPr>
-          <a:xfrm>
-            <a:off x="713232" y="1261872"/>
-            <a:ext cx="10744200" cy="438912"/>
-          </a:xfrm>
-          <a:prstGeom prst="rect">
-            <a:avLst/>
-          </a:prstGeom>
-          <a:noFill/>
-        </p:spPr>
-        <p:txBody>
-          <a:bodyPr wrap="square" anchor="ctr" lIns="0" rIns="0" tIns="0" bIns="0">
-            <a:spAutoFit/>
-          </a:bodyPr>
-          <a:lstStyle/>
-          <a:p>
-            <a:pPr algn="l">
-              <a:lnSpc>
-                <a:spcPct val="110000"/>
-              </a:lnSpc>
-            </a:pPr>
-            <a:r>
-              <a:rPr sz="1800" b="1">
-                <a:solidFill>
-                  <a:srgbClr val="1F5C99"/>
-                </a:solidFill>
-                <a:latin typeface="Arial"/>
-                <a:ea typeface="微软雅黑"/>
-              </a:rPr>
-              <a:t>生产集群进入万节点量级，单实例架构在吞吐与高可用上同时受制</a:t>
-            </a:r>
-          </a:p>
-        </p:txBody>
-      </p:sp>
-      <p:sp>
-        <p:nvSpPr>
-          <p:cNvPr id="6" name="TextBox 5"/>
-          <p:cNvSpPr txBox="1"/>
-          <p:nvPr/>
-        </p:nvSpPr>
-        <p:spPr>
-          <a:xfrm>
-            <a:off x="566928" y="1783080"/>
-            <a:ext cx="10881360" cy="1234440"/>
-          </a:xfrm>
-          <a:prstGeom prst="rect">
-            <a:avLst/>
-          </a:prstGeom>
-          <a:noFill/>
-        </p:spPr>
-        <p:txBody>
-          <a:bodyPr wrap="square" anchor="t" lIns="0" rIns="0" tIns="0" bIns="0">
-            <a:spAutoFit/>
-          </a:bodyPr>
-          <a:lstStyle/>
-          <a:p>
-            <a:pPr algn="l">
-              <a:lnSpc>
-                <a:spcPct val="135000"/>
-              </a:lnSpc>
-            </a:pPr>
-            <a:r>
-              <a:rPr sz="1500" b="0">
-                <a:solidFill>
-                  <a:srgbClr val="333333"/>
-                </a:solidFill>
-                <a:latin typeface="Arial"/>
-                <a:ea typeface="微软雅黑"/>
-              </a:rPr>
-              <a:t>Kubernetes 已成为云原生的事实标准，调度器处在 Pod 生命周期的关键路径上：它的吞吐与延迟直接决定集群资源利用率与业务响应速度。千节点规模下单实例尚可支撑，集群进入万节点量级后，三个瓶颈同时显现。</a:t>
-            </a:r>
-          </a:p>
-        </p:txBody>
-      </p:sp>
-      <p:sp>
-        <p:nvSpPr>
-          <p:cNvPr id="7" name="Rounded Rectangle 6"/>
-          <p:cNvSpPr/>
-          <p:nvPr/>
-        </p:nvSpPr>
-        <p:spPr>
-          <a:xfrm>
-            <a:off x="566928" y="2880360"/>
-            <a:ext cx="3517391" cy="2103120"/>
-          </a:xfrm>
-          <a:prstGeom prst="roundRect">
-            <a:avLst/>
-          </a:prstGeom>
-          <a:solidFill>
-            <a:srgbClr val="F5F7FA"/>
-          </a:solidFill>
-          <a:ln w="9525">
-            <a:solidFill>
-              <a:srgbClr val="D8DFE8"/>
-            </a:solidFill>
-          </a:ln>
-          <a:effectLst/>
-        </p:spPr>
-        <p:style>
-          <a:lnRef idx="1">
-            <a:schemeClr val="accent1"/>
-          </a:lnRef>
-          <a:fillRef idx="3">
-            <a:schemeClr val="accent1"/>
-          </a:fillRef>
-          <a:effectRef idx="2">
-            <a:schemeClr val="accent1"/>
-          </a:effectRef>
-          <a:fontRef idx="minor">
-            <a:schemeClr val="lt1"/>
-          </a:fontRef>
-        </p:style>
-        <p:txBody>
-          <a:bodyPr rtlCol="0" anchor="ctr"/>
-          <a:lstStyle/>
-          <a:p>
-            <a:pPr algn="ctr"/>
-          </a:p>
-        </p:txBody>
-      </p:sp>
-      <p:sp>
-        <p:nvSpPr>
-          <p:cNvPr id="8" name="Rectangle 7"/>
-          <p:cNvSpPr/>
-          <p:nvPr/>
-        </p:nvSpPr>
-        <p:spPr>
-          <a:xfrm>
-            <a:off x="566928" y="2880360"/>
-            <a:ext cx="50292" cy="2103120"/>
-          </a:xfrm>
-          <a:prstGeom prst="rect">
-            <a:avLst/>
-          </a:prstGeom>
-          <a:solidFill>
-            <a:srgbClr val="1F5C99"/>
-          </a:solidFill>
-          <a:ln>
-            <a:noFill/>
-          </a:ln>
-          <a:effectLst/>
-        </p:spPr>
-        <p:style>
-          <a:lnRef idx="1">
-            <a:schemeClr val="accent1"/>
-          </a:lnRef>
-          <a:fillRef idx="3">
-            <a:schemeClr val="accent1"/>
-          </a:fillRef>
-          <a:effectRef idx="2">
-            <a:schemeClr val="accent1"/>
-          </a:effectRef>
-          <a:fontRef idx="minor">
-            <a:schemeClr val="lt1"/>
-          </a:fontRef>
-        </p:style>
-        <p:txBody>
-          <a:bodyPr rtlCol="0" anchor="ctr"/>
-          <a:lstStyle/>
-          <a:p>
-            <a:pPr algn="ctr"/>
-          </a:p>
-        </p:txBody>
-      </p:sp>
-      <p:sp>
-        <p:nvSpPr>
-          <p:cNvPr id="9" name="TextBox 8"/>
-          <p:cNvSpPr txBox="1"/>
-          <p:nvPr/>
-        </p:nvSpPr>
-        <p:spPr>
-          <a:xfrm>
-            <a:off x="731520" y="3008376"/>
-            <a:ext cx="3243072" cy="1920239"/>
-          </a:xfrm>
-          <a:prstGeom prst="rect">
-            <a:avLst/>
-          </a:prstGeom>
-          <a:noFill/>
-        </p:spPr>
-        <p:txBody>
-          <a:bodyPr wrap="square" anchor="t" lIns="0" rIns="0" tIns="0" bIns="0">
-            <a:spAutoFit/>
-          </a:bodyPr>
-          <a:lstStyle/>
-          <a:p>
-            <a:pPr algn="l"/>
-            <a:r>
-              <a:rPr sz="1400" b="1">
-                <a:solidFill>
-                  <a:srgbClr val="0B2A4A"/>
-                </a:solidFill>
-                <a:latin typeface="Arial"/>
-                <a:ea typeface="微软雅黑"/>
-              </a:rPr>
-              <a:t>吞吐存在上限</a:t>
-            </a:r>
-          </a:p>
-          <a:p>
-            <a:pPr algn="l">
-              <a:lnSpc>
-                <a:spcPct val="110000"/>
-              </a:lnSpc>
-              <a:spcBef>
-                <a:spcPts val="400"/>
-              </a:spcBef>
-            </a:pPr>
-            <a:r>
-              <a:rPr sz="1150" b="0">
-                <a:solidFill>
-                  <a:srgbClr val="333333"/>
-                </a:solidFill>
-                <a:latin typeface="Arial"/>
-                <a:ea typeface="微软雅黑"/>
-              </a:rPr>
-              <a:t>activeQ 串行处理 Pod，大规模弹性伸缩与批任务启动被拖慢</a:t>
-            </a:r>
-          </a:p>
-        </p:txBody>
-      </p:sp>
-      <p:sp>
-        <p:nvSpPr>
-          <p:cNvPr id="10" name="Rounded Rectangle 9"/>
-          <p:cNvSpPr/>
-          <p:nvPr/>
-        </p:nvSpPr>
-        <p:spPr>
-          <a:xfrm>
-            <a:off x="4340351" y="2880360"/>
-            <a:ext cx="3517391" cy="2103120"/>
-          </a:xfrm>
-          <a:prstGeom prst="roundRect">
-            <a:avLst/>
-          </a:prstGeom>
-          <a:solidFill>
-            <a:srgbClr val="F5F7FA"/>
-          </a:solidFill>
-          <a:ln w="9525">
-            <a:solidFill>
-              <a:srgbClr val="D8DFE8"/>
-            </a:solidFill>
-          </a:ln>
-          <a:effectLst/>
-        </p:spPr>
-        <p:style>
-          <a:lnRef idx="1">
-            <a:schemeClr val="accent1"/>
-          </a:lnRef>
-          <a:fillRef idx="3">
-            <a:schemeClr val="accent1"/>
-          </a:fillRef>
-          <a:effectRef idx="2">
-            <a:schemeClr val="accent1"/>
-          </a:effectRef>
-          <a:fontRef idx="minor">
-            <a:schemeClr val="lt1"/>
-          </a:fontRef>
-        </p:style>
-        <p:txBody>
-          <a:bodyPr rtlCol="0" anchor="ctr"/>
-          <a:lstStyle/>
-          <a:p>
-            <a:pPr algn="ctr"/>
-          </a:p>
-        </p:txBody>
-      </p:sp>
-      <p:sp>
-        <p:nvSpPr>
-          <p:cNvPr id="11" name="Rectangle 10"/>
-          <p:cNvSpPr/>
-          <p:nvPr/>
-        </p:nvSpPr>
-        <p:spPr>
-          <a:xfrm>
-            <a:off x="4340351" y="2880360"/>
-            <a:ext cx="50292" cy="2103120"/>
-          </a:xfrm>
-          <a:prstGeom prst="rect">
-            <a:avLst/>
-          </a:prstGeom>
-          <a:solidFill>
-            <a:srgbClr val="1F5C99"/>
-          </a:solidFill>
-          <a:ln>
-            <a:noFill/>
-          </a:ln>
-          <a:effectLst/>
-        </p:spPr>
-        <p:style>
-          <a:lnRef idx="1">
-            <a:schemeClr val="accent1"/>
-          </a:lnRef>
-          <a:fillRef idx="3">
-            <a:schemeClr val="accent1"/>
-          </a:fillRef>
-          <a:effectRef idx="2">
-            <a:schemeClr val="accent1"/>
-          </a:effectRef>
-          <a:fontRef idx="minor">
-            <a:schemeClr val="lt1"/>
-          </a:fontRef>
-        </p:style>
-        <p:txBody>
-          <a:bodyPr rtlCol="0" anchor="ctr"/>
-          <a:lstStyle/>
-          <a:p>
-            <a:pPr algn="ctr"/>
-          </a:p>
-        </p:txBody>
-      </p:sp>
-      <p:sp>
-        <p:nvSpPr>
-          <p:cNvPr id="12" name="TextBox 11"/>
-          <p:cNvSpPr txBox="1"/>
-          <p:nvPr/>
-        </p:nvSpPr>
-        <p:spPr>
-          <a:xfrm>
-            <a:off x="4504943" y="3008376"/>
-            <a:ext cx="3243072" cy="1920239"/>
-          </a:xfrm>
-          <a:prstGeom prst="rect">
-            <a:avLst/>
-          </a:prstGeom>
-          <a:noFill/>
-        </p:spPr>
-        <p:txBody>
-          <a:bodyPr wrap="square" anchor="t" lIns="0" rIns="0" tIns="0" bIns="0">
-            <a:spAutoFit/>
-          </a:bodyPr>
-          <a:lstStyle/>
-          <a:p>
-            <a:pPr algn="l"/>
-            <a:r>
-              <a:rPr sz="1400" b="1">
-                <a:solidFill>
-                  <a:srgbClr val="0B2A4A"/>
-                </a:solidFill>
-                <a:latin typeface="Arial"/>
-                <a:ea typeface="微软雅黑"/>
-              </a:rPr>
-              <a:t>尾延迟持续抬升</a:t>
-            </a:r>
-          </a:p>
-          <a:p>
-            <a:pPr algn="l">
-              <a:lnSpc>
-                <a:spcPct val="110000"/>
-              </a:lnSpc>
-              <a:spcBef>
-                <a:spcPts val="400"/>
-              </a:spcBef>
-            </a:pPr>
-            <a:r>
-              <a:rPr sz="1150" b="0">
-                <a:solidFill>
-                  <a:srgbClr val="333333"/>
-                </a:solidFill>
-                <a:latin typeface="Arial"/>
-                <a:ea typeface="微软雅黑"/>
-              </a:rPr>
-              <a:t>Filter/Score 遍历节点开销随规模线性上升，5000 节点下 P99 明显恶化</a:t>
-            </a:r>
-          </a:p>
-        </p:txBody>
-      </p:sp>
-      <p:sp>
-        <p:nvSpPr>
-          <p:cNvPr id="13" name="Rounded Rectangle 12"/>
-          <p:cNvSpPr/>
-          <p:nvPr/>
-        </p:nvSpPr>
-        <p:spPr>
-          <a:xfrm>
-            <a:off x="8113775" y="2880360"/>
-            <a:ext cx="3517391" cy="2103120"/>
-          </a:xfrm>
-          <a:prstGeom prst="roundRect">
-            <a:avLst/>
-          </a:prstGeom>
-          <a:solidFill>
-            <a:srgbClr val="F5F7FA"/>
-          </a:solidFill>
-          <a:ln w="9525">
-            <a:solidFill>
-              <a:srgbClr val="D8DFE8"/>
-            </a:solidFill>
-          </a:ln>
-          <a:effectLst/>
-        </p:spPr>
-        <p:style>
-          <a:lnRef idx="1">
-            <a:schemeClr val="accent1"/>
-          </a:lnRef>
-          <a:fillRef idx="3">
-            <a:schemeClr val="accent1"/>
-          </a:fillRef>
-          <a:effectRef idx="2">
-            <a:schemeClr val="accent1"/>
-          </a:effectRef>
-          <a:fontRef idx="minor">
-            <a:schemeClr val="lt1"/>
-          </a:fontRef>
-        </p:style>
-        <p:txBody>
-          <a:bodyPr rtlCol="0" anchor="ctr"/>
-          <a:lstStyle/>
-          <a:p>
-            <a:pPr algn="ctr"/>
-          </a:p>
-        </p:txBody>
-      </p:sp>
-      <p:sp>
-        <p:nvSpPr>
-          <p:cNvPr id="14" name="Rectangle 13"/>
-          <p:cNvSpPr/>
-          <p:nvPr/>
-        </p:nvSpPr>
-        <p:spPr>
-          <a:xfrm>
-            <a:off x="8113775" y="2880360"/>
-            <a:ext cx="50292" cy="2103120"/>
-          </a:xfrm>
-          <a:prstGeom prst="rect">
-            <a:avLst/>
-          </a:prstGeom>
-          <a:solidFill>
-            <a:srgbClr val="1F5C99"/>
-          </a:solidFill>
-          <a:ln>
-            <a:noFill/>
-          </a:ln>
-          <a:effectLst/>
-        </p:spPr>
-        <p:style>
-          <a:lnRef idx="1">
-            <a:schemeClr val="accent1"/>
-          </a:lnRef>
-          <a:fillRef idx="3">
-            <a:schemeClr val="accent1"/>
-          </a:fillRef>
-          <a:effectRef idx="2">
-            <a:schemeClr val="accent1"/>
-          </a:effectRef>
-          <a:fontRef idx="minor">
-            <a:schemeClr val="lt1"/>
-          </a:fontRef>
-        </p:style>
-        <p:txBody>
-          <a:bodyPr rtlCol="0" anchor="ctr"/>
-          <a:lstStyle/>
-          <a:p>
-            <a:pPr algn="ctr"/>
-          </a:p>
-        </p:txBody>
-      </p:sp>
-      <p:sp>
-        <p:nvSpPr>
-          <p:cNvPr id="15" name="TextBox 14"/>
-          <p:cNvSpPr txBox="1"/>
-          <p:nvPr/>
-        </p:nvSpPr>
-        <p:spPr>
-          <a:xfrm>
-            <a:off x="8278367" y="3008376"/>
-            <a:ext cx="3243072" cy="1920239"/>
-          </a:xfrm>
-          <a:prstGeom prst="rect">
-            <a:avLst/>
-          </a:prstGeom>
-          <a:noFill/>
-        </p:spPr>
-        <p:txBody>
-          <a:bodyPr wrap="square" anchor="t" lIns="0" rIns="0" tIns="0" bIns="0">
-            <a:spAutoFit/>
-          </a:bodyPr>
-          <a:lstStyle/>
-          <a:p>
-            <a:pPr algn="l"/>
-            <a:r>
-              <a:rPr sz="1400" b="1">
-                <a:solidFill>
-                  <a:srgbClr val="0B2A4A"/>
-                </a:solidFill>
-                <a:latin typeface="Arial"/>
-                <a:ea typeface="微软雅黑"/>
-              </a:rPr>
-              <a:t>单点故障风险</a:t>
-            </a:r>
-          </a:p>
-          <a:p>
-            <a:pPr algn="l">
-              <a:lnSpc>
-                <a:spcPct val="110000"/>
-              </a:lnSpc>
-              <a:spcBef>
-                <a:spcPts val="400"/>
-              </a:spcBef>
-            </a:pPr>
-            <a:r>
-              <a:rPr sz="1150" b="0">
-                <a:solidFill>
-                  <a:srgbClr val="333333"/>
-                </a:solidFill>
-                <a:latin typeface="Arial"/>
-                <a:ea typeface="微软雅黑"/>
-              </a:rPr>
-              <a:t>Leader 崩溃后需等待 Standby 接管，这段窗口内集群完全无法调度</a:t>
-            </a:r>
-          </a:p>
-        </p:txBody>
-      </p:sp>
-      <p:sp>
-        <p:nvSpPr>
-          <p:cNvPr id="16" name="TextBox 15"/>
-          <p:cNvSpPr txBox="1"/>
-          <p:nvPr/>
-        </p:nvSpPr>
-        <p:spPr>
-          <a:xfrm>
-            <a:off x="10780776" y="6345936"/>
-            <a:ext cx="850392" cy="219456"/>
-          </a:xfrm>
-          <a:prstGeom prst="rect">
-            <a:avLst/>
-          </a:prstGeom>
-          <a:noFill/>
-        </p:spPr>
-        <p:txBody>
-          <a:bodyPr wrap="square" anchor="t" lIns="0" rIns="0" tIns="0" bIns="0">
-            <a:spAutoFit/>
-          </a:bodyPr>
-          <a:lstStyle/>
-          <a:p>
-            <a:pPr algn="r"/>
-            <a:r>
-              <a:rPr sz="950" b="0">
-                <a:solidFill>
-                  <a:srgbClr val="566474"/>
-                </a:solidFill>
-                <a:latin typeface="Arial"/>
-                <a:ea typeface="微软雅黑"/>
-              </a:rPr>
-              <a:t>2 / 23</a:t>
-            </a:r>
-          </a:p>
-        </p:txBody>
-      </p:sp>
-    </p:spTree>
-  </p:cSld>
-  <p:clrMapOvr>
-    <a:masterClrMapping/>
-  </p:clrMapOvr>
-</p:sld>
-</file>
-
-<file path=ppt/slides/slide20.xml><?xml version="1.0" encoding="utf-8"?>
-<p:sld xmlns:a="http://schemas.openxmlformats.org/drawingml/2006/main" xmlns:p="http://schemas.openxmlformats.org/presentationml/2006/main" xmlns:r="http://schemas.openxmlformats.org/officeDocument/2006/relationships">
-  <p:cSld>
-    <p:bg>
-      <p:bgPr>
-        <a:solidFill>
-          <a:srgbClr val="FFFFFF"/>
-        </a:solidFill>
-        <a:effectLst/>
-      </p:bgPr>
-    </p:bg>
-    <p:spTree>
-      <p:nvGrpSpPr>
-        <p:cNvPr id="1" name=""/>
-        <p:cNvGrpSpPr/>
-        <p:nvPr/>
-      </p:nvGrpSpPr>
-      <p:grpSpPr/>
-      <p:sp>
-        <p:nvSpPr>
-          <p:cNvPr id="2" name="Rectangle 1"/>
-          <p:cNvSpPr/>
-          <p:nvPr/>
-        </p:nvSpPr>
-        <p:spPr>
-          <a:xfrm>
-            <a:off x="384048" y="420624"/>
-            <a:ext cx="77724" cy="475488"/>
-          </a:xfrm>
-          <a:prstGeom prst="rect">
-            <a:avLst/>
-          </a:prstGeom>
-          <a:solidFill>
-            <a:srgbClr val="E8833A"/>
-          </a:solidFill>
-          <a:ln>
-            <a:noFill/>
-          </a:ln>
-          <a:effectLst/>
-        </p:spPr>
-        <p:style>
-          <a:lnRef idx="1">
-            <a:schemeClr val="accent1"/>
-          </a:lnRef>
-          <a:fillRef idx="3">
-            <a:schemeClr val="accent1"/>
-          </a:fillRef>
-          <a:effectRef idx="2">
-            <a:schemeClr val="accent1"/>
-          </a:effectRef>
-          <a:fontRef idx="minor">
-            <a:schemeClr val="lt1"/>
-          </a:fontRef>
-        </p:style>
-        <p:txBody>
-          <a:bodyPr rtlCol="0" anchor="ctr"/>
-          <a:lstStyle/>
-          <a:p>
-            <a:pPr algn="ctr"/>
-          </a:p>
-        </p:txBody>
-      </p:sp>
-      <p:sp>
-        <p:nvSpPr>
-          <p:cNvPr id="3" name="TextBox 2"/>
-          <p:cNvSpPr txBox="1"/>
-          <p:nvPr/>
-        </p:nvSpPr>
-        <p:spPr>
-          <a:xfrm>
-            <a:off x="566928" y="329184"/>
-            <a:ext cx="11064240" cy="713232"/>
-          </a:xfrm>
-          <a:prstGeom prst="rect">
-            <a:avLst/>
-          </a:prstGeom>
-          <a:noFill/>
-        </p:spPr>
-        <p:txBody>
-          <a:bodyPr wrap="square" anchor="ctr" lIns="0" rIns="0" tIns="0" bIns="0">
-            <a:spAutoFit/>
-          </a:bodyPr>
-          <a:lstStyle/>
-          <a:p>
-            <a:pPr algn="l">
-              <a:lnSpc>
-                <a:spcPct val="105000"/>
-              </a:lnSpc>
-            </a:pPr>
-            <a:r>
-              <a:rPr sz="2700" b="1">
-                <a:solidFill>
-                  <a:srgbClr val="0B2A4A"/>
-                </a:solidFill>
-                <a:latin typeface="Arial"/>
-                <a:ea typeface="微软雅黑"/>
-              </a:rPr>
-              <a:t>故障注入 Layer 0</a:t>
-            </a:r>
-          </a:p>
-        </p:txBody>
-      </p:sp>
-      <p:sp>
-        <p:nvSpPr>
-          <p:cNvPr id="4" name="Rectangle 3"/>
-          <p:cNvSpPr/>
-          <p:nvPr/>
-        </p:nvSpPr>
-        <p:spPr>
-          <a:xfrm>
-            <a:off x="566928" y="1298448"/>
-            <a:ext cx="32004" cy="365760"/>
-          </a:xfrm>
-          <a:prstGeom prst="rect">
-            <a:avLst/>
-          </a:prstGeom>
-          <a:solidFill>
-            <a:srgbClr val="1F5C99"/>
-          </a:solidFill>
-          <a:ln>
-            <a:noFill/>
-          </a:ln>
-          <a:effectLst/>
-        </p:spPr>
-        <p:style>
-          <a:lnRef idx="1">
-            <a:schemeClr val="accent1"/>
-          </a:lnRef>
-          <a:fillRef idx="3">
-            <a:schemeClr val="accent1"/>
-          </a:fillRef>
-          <a:effectRef idx="2">
-            <a:schemeClr val="accent1"/>
-          </a:effectRef>
-          <a:fontRef idx="minor">
-            <a:schemeClr val="lt1"/>
-          </a:fontRef>
-        </p:style>
-        <p:txBody>
-          <a:bodyPr rtlCol="0" anchor="ctr"/>
-          <a:lstStyle/>
-          <a:p>
-            <a:pPr algn="ctr"/>
-          </a:p>
-        </p:txBody>
-      </p:sp>
-      <p:sp>
-        <p:nvSpPr>
-          <p:cNvPr id="5" name="TextBox 4"/>
-          <p:cNvSpPr txBox="1"/>
-          <p:nvPr/>
-        </p:nvSpPr>
-        <p:spPr>
-          <a:xfrm>
-            <a:off x="713232" y="1261872"/>
-            <a:ext cx="10744200" cy="438912"/>
-          </a:xfrm>
-          <a:prstGeom prst="rect">
-            <a:avLst/>
-          </a:prstGeom>
-          <a:noFill/>
-        </p:spPr>
-        <p:txBody>
-          <a:bodyPr wrap="square" anchor="ctr" lIns="0" rIns="0" tIns="0" bIns="0">
-            <a:spAutoFit/>
-          </a:bodyPr>
-          <a:lstStyle/>
-          <a:p>
-            <a:pPr algn="l">
-              <a:lnSpc>
-                <a:spcPct val="110000"/>
-              </a:lnSpc>
-            </a:pPr>
-            <a:r>
-              <a:rPr sz="1800" b="1">
-                <a:solidFill>
-                  <a:srgbClr val="1F5C99"/>
-                </a:solidFill>
-                <a:latin typeface="Arial"/>
-                <a:ea typeface="微软雅黑"/>
-              </a:rPr>
-              <a:t>10% 节点注解漂移，300 次拦截全部转为合规重排</a:t>
-            </a:r>
-          </a:p>
-        </p:txBody>
-      </p:sp>
-      <p:pic>
-        <p:nvPicPr>
-          <p:cNvPr id="6" name="Picture 5" descr="fig6-29a-layer0-timeseries.png"/>
-          <p:cNvPicPr>
-            <a:picLocks noChangeAspect="1"/>
-          </p:cNvPicPr>
-          <p:nvPr/>
-        </p:nvPicPr>
-        <p:blipFill>
-          <a:blip r:embed="rId2"/>
-          <a:stretch>
-            <a:fillRect/>
-          </a:stretch>
-        </p:blipFill>
-        <p:spPr>
-          <a:xfrm>
-            <a:off x="5806440" y="2657246"/>
-            <a:ext cx="5852160" cy="2457907"/>
-          </a:xfrm>
-          <a:prstGeom prst="rect">
-            <a:avLst/>
-          </a:prstGeom>
-        </p:spPr>
-      </p:pic>
-      <p:sp>
-        <p:nvSpPr>
-          <p:cNvPr id="7" name="TextBox 6"/>
-          <p:cNvSpPr txBox="1"/>
-          <p:nvPr/>
-        </p:nvSpPr>
-        <p:spPr>
-          <a:xfrm>
-            <a:off x="566928" y="2011680"/>
-            <a:ext cx="5029200" cy="1417320"/>
-          </a:xfrm>
-          <a:prstGeom prst="rect">
-            <a:avLst/>
-          </a:prstGeom>
-          <a:noFill/>
-        </p:spPr>
-        <p:txBody>
-          <a:bodyPr wrap="square" anchor="t" lIns="0" rIns="0" tIns="0" bIns="0">
-            <a:spAutoFit/>
-          </a:bodyPr>
-          <a:lstStyle/>
-          <a:p>
-            <a:pPr algn="l">
-              <a:lnSpc>
-                <a:spcPct val="115000"/>
-              </a:lnSpc>
-            </a:pPr>
-            <a:r>
-              <a:rPr sz="1400" b="0">
-                <a:solidFill>
-                  <a:srgbClr val="333333"/>
-                </a:solidFill>
-                <a:latin typeface="Arial"/>
-                <a:ea typeface="微软雅黑"/>
-              </a:rPr>
-              <a:t>▪  300 次拦截全部转为回退：不发 Bind，Pod 进 Dispatcher 回退队列</a:t>
-            </a:r>
-          </a:p>
-          <a:p>
-            <a:pPr algn="l">
-              <a:lnSpc>
-                <a:spcPct val="115000"/>
-              </a:lnSpc>
-              <a:spcBef>
-                <a:spcPts val="1400"/>
-              </a:spcBef>
-            </a:pPr>
-            <a:r>
-              <a:rPr sz="1400" b="0">
-                <a:solidFill>
-                  <a:srgbClr val="333333"/>
-                </a:solidFill>
-                <a:latin typeface="Arial"/>
-                <a:ea typeface="微软雅黑"/>
-              </a:rPr>
-              <a:t>▪  回退后由新归属实例重新调度，15 s 内落到合法节点；累计 50000/50000 绑定成功</a:t>
-            </a:r>
-          </a:p>
-          <a:p>
-            <a:pPr algn="l">
-              <a:lnSpc>
-                <a:spcPct val="115000"/>
-              </a:lnSpc>
-              <a:spcBef>
-                <a:spcPts val="1400"/>
-              </a:spcBef>
-            </a:pPr>
-            <a:r>
-              <a:rPr sz="1400" b="0">
-                <a:solidFill>
-                  <a:srgbClr val="333333"/>
-                </a:solidFill>
-                <a:latin typeface="Arial"/>
-                <a:ea typeface="微软雅黑"/>
-              </a:rPr>
-              <a:t>▪  代价：总耗时 683 s，对基线 680 s 多 3 s（+0.4%）</a:t>
-            </a:r>
-          </a:p>
-        </p:txBody>
-      </p:sp>
-      <p:sp>
-        <p:nvSpPr>
-          <p:cNvPr id="8" name="TextBox 7"/>
-          <p:cNvSpPr txBox="1"/>
-          <p:nvPr/>
-        </p:nvSpPr>
-        <p:spPr>
-          <a:xfrm>
-            <a:off x="566928" y="6309360"/>
-            <a:ext cx="10104120" cy="201168"/>
-          </a:xfrm>
-          <a:prstGeom prst="rect">
-            <a:avLst/>
-          </a:prstGeom>
-          <a:noFill/>
-        </p:spPr>
-        <p:txBody>
-          <a:bodyPr wrap="square" anchor="t" lIns="0" rIns="0" tIns="0" bIns="0">
-            <a:spAutoFit/>
-          </a:bodyPr>
-          <a:lstStyle/>
-          <a:p>
-            <a:pPr algn="l"/>
-            <a:r>
-              <a:rPr sz="850" b="0">
-                <a:solidFill>
-                  <a:srgbClr val="566474"/>
-                </a:solidFill>
-                <a:latin typeface="Arial"/>
-                <a:ea typeface="微软雅黑"/>
-              </a:rPr>
-              <a:t>编码：s1–s4 = 100 / 1000 / 5000 / 10000 节点；w1–w7 = 负载强度（w2 500、w3 1000、w4 2000 pods/s 极限、w5 突发、w6 Gang、w7 异构）；inst3 = 3 实例</a:t>
-            </a:r>
-          </a:p>
-        </p:txBody>
-      </p:sp>
-      <p:sp>
-        <p:nvSpPr>
-          <p:cNvPr id="9" name="TextBox 8"/>
-          <p:cNvSpPr txBox="1"/>
-          <p:nvPr/>
-        </p:nvSpPr>
-        <p:spPr>
-          <a:xfrm>
-            <a:off x="10780776" y="6345936"/>
-            <a:ext cx="850392" cy="219456"/>
-          </a:xfrm>
-          <a:prstGeom prst="rect">
-            <a:avLst/>
-          </a:prstGeom>
-          <a:noFill/>
-        </p:spPr>
-        <p:txBody>
-          <a:bodyPr wrap="square" anchor="t" lIns="0" rIns="0" tIns="0" bIns="0">
-            <a:spAutoFit/>
-          </a:bodyPr>
-          <a:lstStyle/>
-          <a:p>
-            <a:pPr algn="r"/>
-            <a:r>
-              <a:rPr sz="950" b="0">
-                <a:solidFill>
-                  <a:srgbClr val="566474"/>
-                </a:solidFill>
-                <a:latin typeface="Arial"/>
-                <a:ea typeface="微软雅黑"/>
-              </a:rPr>
-              <a:t>20 / 23</a:t>
+              <a:t>20 / 24</a:t>
             </a:r>
           </a:p>
         </p:txBody>
@@ -14247,7 +14225,7 @@
                 <a:latin typeface="Arial"/>
                 <a:ea typeface="微软雅黑"/>
               </a:rPr>
-              <a:t>故障注入 Layer 3</a:t>
+              <a:t>故障注入 Layer 0</a:t>
             </a:r>
           </a:p>
         </p:txBody>
@@ -14331,14 +14309,14 @@
                 <a:latin typeface="Arial"/>
                 <a:ea typeface="微软雅黑"/>
               </a:rPr>
-              <a:t>杀掉 1/3 实例并停机 180 s，系统仍在 784 s 内完成全部绑定</a:t>
+              <a:t>10% 节点注解漂移，300 次拦截全部转为合规重排</a:t>
             </a:r>
           </a:p>
         </p:txBody>
       </p:sp>
       <p:pic>
         <p:nvPicPr>
-          <p:cNvPr id="6" name="Picture 5" descr="fig6-29b-layer3-timeseries.png"/>
+          <p:cNvPr id="6" name="Picture 5" descr="fig6-29a-layer0-timeseries.png"/>
           <p:cNvPicPr>
             <a:picLocks noChangeAspect="1"/>
           </p:cNvPicPr>
@@ -14388,14 +14366,14 @@
               </a:lnSpc>
             </a:pPr>
             <a:r>
-              <a:rPr sz="1550" b="0">
+              <a:rPr sz="1400" b="0">
                 <a:solidFill>
                   <a:srgbClr val="333333"/>
                 </a:solidFill>
                 <a:latin typeface="Arial"/>
                 <a:ea typeface="微软雅黑"/>
               </a:rPr>
-              <a:t>▪  kill 后 90 s 窗口内，被杀实例只剩 68 次绑定，占该窗口 8407 次的 0.81%</a:t>
+              <a:t>▪  300 次拦截全部转为回退：不发 Bind，Pod 进 Dispatcher 回退队列</a:t>
             </a:r>
           </a:p>
           <a:p>
@@ -14408,14 +14386,14 @@
               </a:spcBef>
             </a:pPr>
             <a:r>
-              <a:rPr sz="1550" b="0">
+              <a:rPr sz="1400" b="0">
                 <a:solidFill>
                   <a:srgbClr val="333333"/>
                 </a:solidFill>
                 <a:latin typeface="Arial"/>
                 <a:ea typeface="微软雅黑"/>
               </a:rPr>
-              <a:t>▪  同一窗口共完成 8407 次绑定；pending 峰值 353，60 s 内回落到 2</a:t>
+              <a:t>▪  回退后由新归属实例重新调度，15 s 内落到合法节点；累计 50000/50000 绑定成功</a:t>
             </a:r>
           </a:p>
           <a:p>
@@ -14428,14 +14406,14 @@
               </a:spcBef>
             </a:pPr>
             <a:r>
-              <a:rPr sz="1550" b="0">
+              <a:rPr sz="1400" b="0">
                 <a:solidFill>
                   <a:srgbClr val="333333"/>
                 </a:solidFill>
                 <a:latin typeface="Arial"/>
                 <a:ea typeface="微软雅黑"/>
               </a:rPr>
-              <a:t>▪  整场耗时 784 s，比无故障基线 680 s 多 104 s（+15.3%）</a:t>
+              <a:t>▪  代价：总耗时 683 s，对基线 680 s 多 3 s（+0.4%）</a:t>
             </a:r>
           </a:p>
         </p:txBody>
@@ -14507,7 +14485,7 @@
                 <a:latin typeface="Arial"/>
                 <a:ea typeface="微软雅黑"/>
               </a:rPr>
-              <a:t>21 / 23</a:t>
+              <a:t>21 / 24</a:t>
             </a:r>
           </a:p>
         </p:txBody>
@@ -14617,7 +14595,7 @@
                 <a:latin typeface="Arial"/>
                 <a:ea typeface="微软雅黑"/>
               </a:rPr>
-              <a:t>局限与展望</a:t>
+              <a:t>故障注入 Layer 3</a:t>
             </a:r>
           </a:p>
         </p:txBody>
@@ -14701,111 +14679,45 @@
                 <a:latin typeface="Arial"/>
                 <a:ea typeface="微软雅黑"/>
               </a:rPr>
-              <a:t>三条局限有明确边界，三方向是本工作的自然延伸</a:t>
-            </a:r>
-          </a:p>
-        </p:txBody>
-      </p:sp>
-      <p:sp>
-        <p:nvSpPr>
-          <p:cNvPr id="6" name="Rounded Rectangle 5"/>
-          <p:cNvSpPr/>
-          <p:nvPr/>
-        </p:nvSpPr>
-        <p:spPr>
-          <a:xfrm>
-            <a:off x="566928" y="1847088"/>
-            <a:ext cx="3517391" cy="2084831"/>
-          </a:xfrm>
-          <a:prstGeom prst="roundRect">
-            <a:avLst/>
-          </a:prstGeom>
-          <a:solidFill>
-            <a:srgbClr val="F5F7FA"/>
-          </a:solidFill>
-          <a:ln w="9525">
-            <a:solidFill>
-              <a:srgbClr val="D8DFE8"/>
-            </a:solidFill>
-          </a:ln>
-          <a:effectLst/>
-        </p:spPr>
-        <p:style>
-          <a:lnRef idx="1">
-            <a:schemeClr val="accent1"/>
-          </a:lnRef>
-          <a:fillRef idx="3">
-            <a:schemeClr val="accent1"/>
-          </a:fillRef>
-          <a:effectRef idx="2">
-            <a:schemeClr val="accent1"/>
-          </a:effectRef>
-          <a:fontRef idx="minor">
-            <a:schemeClr val="lt1"/>
-          </a:fontRef>
-        </p:style>
-        <p:txBody>
-          <a:bodyPr rtlCol="0" anchor="ctr"/>
-          <a:lstStyle/>
-          <a:p>
-            <a:pPr algn="ctr"/>
-          </a:p>
-        </p:txBody>
-      </p:sp>
-      <p:sp>
-        <p:nvSpPr>
-          <p:cNvPr id="7" name="Rectangle 6"/>
-          <p:cNvSpPr/>
-          <p:nvPr/>
-        </p:nvSpPr>
-        <p:spPr>
-          <a:xfrm>
-            <a:off x="566928" y="1847088"/>
-            <a:ext cx="50292" cy="2084831"/>
-          </a:xfrm>
-          <a:prstGeom prst="rect">
-            <a:avLst/>
-          </a:prstGeom>
-          <a:solidFill>
-            <a:srgbClr val="1F5C99"/>
-          </a:solidFill>
-          <a:ln>
-            <a:noFill/>
-          </a:ln>
-          <a:effectLst/>
-        </p:spPr>
-        <p:style>
-          <a:lnRef idx="1">
-            <a:schemeClr val="accent1"/>
-          </a:lnRef>
-          <a:fillRef idx="3">
-            <a:schemeClr val="accent1"/>
-          </a:fillRef>
-          <a:effectRef idx="2">
-            <a:schemeClr val="accent1"/>
-          </a:effectRef>
-          <a:fontRef idx="minor">
-            <a:schemeClr val="lt1"/>
-          </a:fontRef>
-        </p:style>
-        <p:txBody>
-          <a:bodyPr rtlCol="0" anchor="ctr"/>
-          <a:lstStyle/>
-          <a:p>
-            <a:pPr algn="ctr"/>
-          </a:p>
-        </p:txBody>
-      </p:sp>
-      <p:sp>
-        <p:nvSpPr>
-          <p:cNvPr id="8" name="TextBox 7"/>
+              <a:t>杀掉 1/3 实例并停机 180 s，系统仍在 784 s 内完成全部绑定</a:t>
+            </a:r>
+          </a:p>
+        </p:txBody>
+      </p:sp>
+      <p:pic>
+        <p:nvPicPr>
+          <p:cNvPr id="6" name="Picture 5" descr="fig6-29b-layer3-timeseries.png"/>
+          <p:cNvPicPr>
+            <a:picLocks noChangeAspect="1"/>
+          </p:cNvPicPr>
+          <p:nvPr/>
+        </p:nvPicPr>
+        <p:blipFill>
+          <a:blip r:embed="rId2"/>
+          <a:stretch>
+            <a:fillRect/>
+          </a:stretch>
+        </p:blipFill>
+        <p:spPr>
+          <a:xfrm>
+            <a:off x="5806440" y="2657246"/>
+            <a:ext cx="5852160" cy="2457907"/>
+          </a:xfrm>
+          <a:prstGeom prst="rect">
+            <a:avLst/>
+          </a:prstGeom>
+        </p:spPr>
+      </p:pic>
+      <p:sp>
+        <p:nvSpPr>
+          <p:cNvPr id="7" name="TextBox 6"/>
           <p:cNvSpPr txBox="1"/>
           <p:nvPr/>
         </p:nvSpPr>
         <p:spPr>
           <a:xfrm>
-            <a:off x="731520" y="1975104"/>
-            <a:ext cx="3243072" cy="1901951"/>
+            <a:off x="566928" y="2011680"/>
+            <a:ext cx="5029200" cy="1417320"/>
           </a:xfrm>
           <a:prstGeom prst="rect">
             <a:avLst/>
@@ -14818,140 +14730,74 @@
           </a:bodyPr>
           <a:lstStyle/>
           <a:p>
-            <a:pPr algn="l"/>
-            <a:r>
-              <a:rPr sz="1400" b="1">
-                <a:solidFill>
-                  <a:srgbClr val="0B2A4A"/>
+            <a:pPr algn="l">
+              <a:lnSpc>
+                <a:spcPct val="115000"/>
+              </a:lnSpc>
+            </a:pPr>
+            <a:r>
+              <a:rPr sz="1550" b="0">
+                <a:solidFill>
+                  <a:srgbClr val="333333"/>
                 </a:solidFill>
                 <a:latin typeface="Arial"/>
                 <a:ea typeface="微软雅黑"/>
               </a:rPr>
-              <a:t>Gang 尾延迟未分离归因</a:t>
+              <a:t>▪  kill 后 90 s 窗口内，被杀实例只剩 68 次绑定，占该窗口 8407 次的 0.81%</a:t>
             </a:r>
           </a:p>
           <a:p>
             <a:pPr algn="l">
               <a:lnSpc>
-                <a:spcPct val="110000"/>
+                <a:spcPct val="115000"/>
               </a:lnSpc>
               <a:spcBef>
-                <a:spcPts val="400"/>
+                <a:spcPts val="1400"/>
               </a:spcBef>
             </a:pPr>
             <a:r>
-              <a:rPr sz="1150" b="0">
+              <a:rPr sz="1550" b="0">
                 <a:solidFill>
                   <a:srgbClr val="333333"/>
                 </a:solidFill>
                 <a:latin typeface="Arial"/>
                 <a:ea typeface="微软雅黑"/>
               </a:rPr>
-              <a:t>w6 场景 ENO 单 Pod P99 高于 Gödel，归因是同组预留等待与后续决策共用进程与队列，尚未用独立计时实验把两段耗时分离开量化</a:t>
-            </a:r>
-          </a:p>
-        </p:txBody>
-      </p:sp>
-      <p:sp>
-        <p:nvSpPr>
-          <p:cNvPr id="9" name="Rounded Rectangle 8"/>
-          <p:cNvSpPr/>
-          <p:nvPr/>
-        </p:nvSpPr>
-        <p:spPr>
-          <a:xfrm>
-            <a:off x="4340351" y="1847088"/>
-            <a:ext cx="3517391" cy="2084831"/>
-          </a:xfrm>
-          <a:prstGeom prst="roundRect">
-            <a:avLst/>
-          </a:prstGeom>
-          <a:solidFill>
-            <a:srgbClr val="F5F7FA"/>
-          </a:solidFill>
-          <a:ln w="9525">
-            <a:solidFill>
-              <a:srgbClr val="D8DFE8"/>
-            </a:solidFill>
-          </a:ln>
-          <a:effectLst/>
-        </p:spPr>
-        <p:style>
-          <a:lnRef idx="1">
-            <a:schemeClr val="accent1"/>
-          </a:lnRef>
-          <a:fillRef idx="3">
-            <a:schemeClr val="accent1"/>
-          </a:fillRef>
-          <a:effectRef idx="2">
-            <a:schemeClr val="accent1"/>
-          </a:effectRef>
-          <a:fontRef idx="minor">
-            <a:schemeClr val="lt1"/>
-          </a:fontRef>
-        </p:style>
-        <p:txBody>
-          <a:bodyPr rtlCol="0" anchor="ctr"/>
-          <a:lstStyle/>
-          <a:p>
-            <a:pPr algn="ctr"/>
-          </a:p>
-        </p:txBody>
-      </p:sp>
-      <p:sp>
-        <p:nvSpPr>
-          <p:cNvPr id="10" name="Rectangle 9"/>
-          <p:cNvSpPr/>
-          <p:nvPr/>
-        </p:nvSpPr>
-        <p:spPr>
-          <a:xfrm>
-            <a:off x="4340351" y="1847088"/>
-            <a:ext cx="50292" cy="2084831"/>
-          </a:xfrm>
-          <a:prstGeom prst="rect">
-            <a:avLst/>
-          </a:prstGeom>
-          <a:solidFill>
-            <a:srgbClr val="1F5C99"/>
-          </a:solidFill>
-          <a:ln>
-            <a:noFill/>
-          </a:ln>
-          <a:effectLst/>
-        </p:spPr>
-        <p:style>
-          <a:lnRef idx="1">
-            <a:schemeClr val="accent1"/>
-          </a:lnRef>
-          <a:fillRef idx="3">
-            <a:schemeClr val="accent1"/>
-          </a:fillRef>
-          <a:effectRef idx="2">
-            <a:schemeClr val="accent1"/>
-          </a:effectRef>
-          <a:fontRef idx="minor">
-            <a:schemeClr val="lt1"/>
-          </a:fontRef>
-        </p:style>
-        <p:txBody>
-          <a:bodyPr rtlCol="0" anchor="ctr"/>
-          <a:lstStyle/>
-          <a:p>
-            <a:pPr algn="ctr"/>
-          </a:p>
-        </p:txBody>
-      </p:sp>
-      <p:sp>
-        <p:nvSpPr>
-          <p:cNvPr id="11" name="TextBox 10"/>
+              <a:t>▪  同一窗口共完成 8407 次绑定；pending 峰值 353，60 s 内回落到 2</a:t>
+            </a:r>
+          </a:p>
+          <a:p>
+            <a:pPr algn="l">
+              <a:lnSpc>
+                <a:spcPct val="115000"/>
+              </a:lnSpc>
+              <a:spcBef>
+                <a:spcPts val="1400"/>
+              </a:spcBef>
+            </a:pPr>
+            <a:r>
+              <a:rPr sz="1550" b="0">
+                <a:solidFill>
+                  <a:srgbClr val="333333"/>
+                </a:solidFill>
+                <a:latin typeface="Arial"/>
+                <a:ea typeface="微软雅黑"/>
+              </a:rPr>
+              <a:t>▪  整场耗时 784 s，比无故障基线 680 s 多 104 s（+15.3%）</a:t>
+            </a:r>
+          </a:p>
+        </p:txBody>
+      </p:sp>
+      <p:sp>
+        <p:nvSpPr>
+          <p:cNvPr id="8" name="TextBox 7"/>
           <p:cNvSpPr txBox="1"/>
           <p:nvPr/>
         </p:nvSpPr>
         <p:spPr>
           <a:xfrm>
-            <a:off x="4504943" y="1975104"/>
-            <a:ext cx="3243072" cy="1901951"/>
+            <a:off x="566928" y="6309360"/>
+            <a:ext cx="10104120" cy="201168"/>
           </a:xfrm>
           <a:prstGeom prst="rect">
             <a:avLst/>
@@ -14966,252 +14812,50 @@
           <a:p>
             <a:pPr algn="l"/>
             <a:r>
-              <a:rPr sz="1400" b="1">
-                <a:solidFill>
-                  <a:srgbClr val="0B2A4A"/>
+              <a:rPr sz="850" b="0">
+                <a:solidFill>
+                  <a:srgbClr val="566474"/>
                 </a:solidFill>
                 <a:latin typeface="Arial"/>
                 <a:ea typeface="微软雅黑"/>
               </a:rPr>
-              <a:t>仿真环境的测量边界</a:t>
-            </a:r>
-          </a:p>
-          <a:p>
-            <a:pPr algn="l">
-              <a:lnSpc>
-                <a:spcPct val="110000"/>
-              </a:lnSpc>
-              <a:spcBef>
-                <a:spcPts val="400"/>
-              </a:spcBef>
-            </a:pPr>
-            <a:r>
-              <a:rPr sz="1150" b="0">
-                <a:solidFill>
-                  <a:srgbClr val="333333"/>
+              <a:t>编码：s1–s4 = 100 / 1000 / 5000 / 10000 节点；w1–w7 = 负载强度（w2 500、w3 1000、w4 2000 pods/s 极限、w5 突发、w6 Gang、w7 异构）；inst3 = 3 实例</a:t>
+            </a:r>
+          </a:p>
+        </p:txBody>
+      </p:sp>
+      <p:sp>
+        <p:nvSpPr>
+          <p:cNvPr id="9" name="TextBox 8"/>
+          <p:cNvSpPr txBox="1"/>
+          <p:nvPr/>
+        </p:nvSpPr>
+        <p:spPr>
+          <a:xfrm>
+            <a:off x="10780776" y="6345936"/>
+            <a:ext cx="850392" cy="219456"/>
+          </a:xfrm>
+          <a:prstGeom prst="rect">
+            <a:avLst/>
+          </a:prstGeom>
+          <a:noFill/>
+        </p:spPr>
+        <p:txBody>
+          <a:bodyPr wrap="square" anchor="t" lIns="0" rIns="0" tIns="0" bIns="0">
+            <a:spAutoFit/>
+          </a:bodyPr>
+          <a:lstStyle/>
+          <a:p>
+            <a:pPr algn="r"/>
+            <a:r>
+              <a:rPr sz="950" b="0">
+                <a:solidFill>
+                  <a:srgbClr val="566474"/>
                 </a:solidFill>
                 <a:latin typeface="Arial"/>
                 <a:ea typeface="微软雅黑"/>
               </a:rPr>
-              <a:t>KWOK 用模拟 kubelet 让 Pod 直接进入 Running，省掉镜像拉取、容器启动与真实 IO：好处是测的是调度器本身、可复现；代价是绝对数值不能外推到生产，只能做相对对比</a:t>
-            </a:r>
-          </a:p>
-        </p:txBody>
-      </p:sp>
-      <p:sp>
-        <p:nvSpPr>
-          <p:cNvPr id="12" name="Rounded Rectangle 11"/>
-          <p:cNvSpPr/>
-          <p:nvPr/>
-        </p:nvSpPr>
-        <p:spPr>
-          <a:xfrm>
-            <a:off x="8113775" y="1847088"/>
-            <a:ext cx="3517391" cy="2084831"/>
-          </a:xfrm>
-          <a:prstGeom prst="roundRect">
-            <a:avLst/>
-          </a:prstGeom>
-          <a:solidFill>
-            <a:srgbClr val="F5F7FA"/>
-          </a:solidFill>
-          <a:ln w="9525">
-            <a:solidFill>
-              <a:srgbClr val="D8DFE8"/>
-            </a:solidFill>
-          </a:ln>
-          <a:effectLst/>
-        </p:spPr>
-        <p:style>
-          <a:lnRef idx="1">
-            <a:schemeClr val="accent1"/>
-          </a:lnRef>
-          <a:fillRef idx="3">
-            <a:schemeClr val="accent1"/>
-          </a:fillRef>
-          <a:effectRef idx="2">
-            <a:schemeClr val="accent1"/>
-          </a:effectRef>
-          <a:fontRef idx="minor">
-            <a:schemeClr val="lt1"/>
-          </a:fontRef>
-        </p:style>
-        <p:txBody>
-          <a:bodyPr rtlCol="0" anchor="ctr"/>
-          <a:lstStyle/>
-          <a:p>
-            <a:pPr algn="ctr"/>
-          </a:p>
-        </p:txBody>
-      </p:sp>
-      <p:sp>
-        <p:nvSpPr>
-          <p:cNvPr id="13" name="Rectangle 12"/>
-          <p:cNvSpPr/>
-          <p:nvPr/>
-        </p:nvSpPr>
-        <p:spPr>
-          <a:xfrm>
-            <a:off x="8113775" y="1847088"/>
-            <a:ext cx="50292" cy="2084831"/>
-          </a:xfrm>
-          <a:prstGeom prst="rect">
-            <a:avLst/>
-          </a:prstGeom>
-          <a:solidFill>
-            <a:srgbClr val="1F5C99"/>
-          </a:solidFill>
-          <a:ln>
-            <a:noFill/>
-          </a:ln>
-          <a:effectLst/>
-        </p:spPr>
-        <p:style>
-          <a:lnRef idx="1">
-            <a:schemeClr val="accent1"/>
-          </a:lnRef>
-          <a:fillRef idx="3">
-            <a:schemeClr val="accent1"/>
-          </a:fillRef>
-          <a:effectRef idx="2">
-            <a:schemeClr val="accent1"/>
-          </a:effectRef>
-          <a:fontRef idx="minor">
-            <a:schemeClr val="lt1"/>
-          </a:fontRef>
-        </p:style>
-        <p:txBody>
-          <a:bodyPr rtlCol="0" anchor="ctr"/>
-          <a:lstStyle/>
-          <a:p>
-            <a:pPr algn="ctr"/>
-          </a:p>
-        </p:txBody>
-      </p:sp>
-      <p:sp>
-        <p:nvSpPr>
-          <p:cNvPr id="14" name="TextBox 13"/>
-          <p:cNvSpPr txBox="1"/>
-          <p:nvPr/>
-        </p:nvSpPr>
-        <p:spPr>
-          <a:xfrm>
-            <a:off x="8278367" y="1975104"/>
-            <a:ext cx="3243072" cy="1901951"/>
-          </a:xfrm>
-          <a:prstGeom prst="rect">
-            <a:avLst/>
-          </a:prstGeom>
-          <a:noFill/>
-        </p:spPr>
-        <p:txBody>
-          <a:bodyPr wrap="square" anchor="t" lIns="0" rIns="0" tIns="0" bIns="0">
-            <a:spAutoFit/>
-          </a:bodyPr>
-          <a:lstStyle/>
-          <a:p>
-            <a:pPr algn="l"/>
-            <a:r>
-              <a:rPr sz="1400" b="1">
-                <a:solidFill>
-                  <a:srgbClr val="0B2A4A"/>
-                </a:solidFill>
-                <a:latin typeface="Arial"/>
-                <a:ea typeface="微软雅黑"/>
-              </a:rPr>
-              <a:t>资源开销未量化</a:t>
-            </a:r>
-          </a:p>
-          <a:p>
-            <a:pPr algn="l">
-              <a:lnSpc>
-                <a:spcPct val="110000"/>
-              </a:lnSpc>
-              <a:spcBef>
-                <a:spcPts val="400"/>
-              </a:spcBef>
-            </a:pPr>
-            <a:r>
-              <a:rPr sz="1150" b="0">
-                <a:solidFill>
-                  <a:srgbClr val="333333"/>
-                </a:solidFill>
-                <a:latin typeface="Arial"/>
-                <a:ea typeface="微软雅黑"/>
-              </a:rPr>
-              <a:t>公平策略是各组 Deployment 同规格（2C/4G），因此没有量化 ENO 移除 Binder Deployment 后集群总资源开销的收益</a:t>
-            </a:r>
-          </a:p>
-        </p:txBody>
-      </p:sp>
-      <p:sp>
-        <p:nvSpPr>
-          <p:cNvPr id="15" name="TextBox 14"/>
-          <p:cNvSpPr txBox="1"/>
-          <p:nvPr/>
-        </p:nvSpPr>
-        <p:spPr>
-          <a:xfrm>
-            <a:off x="566928" y="4224528"/>
-            <a:ext cx="11064240" cy="777240"/>
-          </a:xfrm>
-          <a:prstGeom prst="rect">
-            <a:avLst/>
-          </a:prstGeom>
-          <a:noFill/>
-        </p:spPr>
-        <p:txBody>
-          <a:bodyPr wrap="square" anchor="t" lIns="0" rIns="0" tIns="0" bIns="0">
-            <a:spAutoFit/>
-          </a:bodyPr>
-          <a:lstStyle/>
-          <a:p>
-            <a:pPr algn="l"/>
-            <a:r>
-              <a:rPr sz="1200" b="0">
-                <a:solidFill>
-                  <a:srgbClr val="566474"/>
-                </a:solidFill>
-                <a:latin typeface="Arial"/>
-                <a:ea typeface="微软雅黑"/>
-              </a:rPr>
-              <a:t>▪  展望：生产环境灰度验证 · 多 Dispatcher 分区协同 · 在 ENO 上叠加资源感知与拓扑亲和策略</a:t>
-            </a:r>
-          </a:p>
-        </p:txBody>
-      </p:sp>
-      <p:sp>
-        <p:nvSpPr>
-          <p:cNvPr id="16" name="TextBox 15"/>
-          <p:cNvSpPr txBox="1"/>
-          <p:nvPr/>
-        </p:nvSpPr>
-        <p:spPr>
-          <a:xfrm>
-            <a:off x="10780776" y="6345936"/>
-            <a:ext cx="850392" cy="219456"/>
-          </a:xfrm>
-          <a:prstGeom prst="rect">
-            <a:avLst/>
-          </a:prstGeom>
-          <a:noFill/>
-        </p:spPr>
-        <p:txBody>
-          <a:bodyPr wrap="square" anchor="t" lIns="0" rIns="0" tIns="0" bIns="0">
-            <a:spAutoFit/>
-          </a:bodyPr>
-          <a:lstStyle/>
-          <a:p>
-            <a:pPr algn="r"/>
-            <a:r>
-              <a:rPr sz="950" b="0">
-                <a:solidFill>
-                  <a:srgbClr val="566474"/>
-                </a:solidFill>
-                <a:latin typeface="Arial"/>
-                <a:ea typeface="微软雅黑"/>
-              </a:rPr>
-              <a:t>22 / 23</a:t>
+              <a:t>22 / 24</a:t>
             </a:r>
           </a:p>
         </p:txBody>
@@ -15250,14 +14894,14 @@
         </p:nvSpPr>
         <p:spPr>
           <a:xfrm>
-            <a:off x="1197864" y="2212848"/>
-            <a:ext cx="9866376" cy="20116"/>
+            <a:off x="384048" y="420624"/>
+            <a:ext cx="77724" cy="475488"/>
           </a:xfrm>
           <a:prstGeom prst="rect">
             <a:avLst/>
           </a:prstGeom>
           <a:solidFill>
-            <a:srgbClr val="0B2A4A"/>
+            <a:srgbClr val="E8833A"/>
           </a:solidFill>
           <a:ln>
             <a:noFill/>
@@ -15294,8 +14938,8 @@
         </p:nvSpPr>
         <p:spPr>
           <a:xfrm>
-            <a:off x="914400" y="2395728"/>
-            <a:ext cx="10332720" cy="914400"/>
+            <a:off x="566928" y="329184"/>
+            <a:ext cx="11064240" cy="713232"/>
           </a:xfrm>
           <a:prstGeom prst="rect">
             <a:avLst/>
@@ -15308,125 +14952,40 @@
           </a:bodyPr>
           <a:lstStyle/>
           <a:p>
-            <a:pPr algn="ctr"/>
-            <a:r>
-              <a:rPr sz="3400" b="1">
+            <a:pPr algn="l">
+              <a:lnSpc>
+                <a:spcPct val="105000"/>
+              </a:lnSpc>
+            </a:pPr>
+            <a:r>
+              <a:rPr sz="2700" b="1">
                 <a:solidFill>
                   <a:srgbClr val="0B2A4A"/>
                 </a:solidFill>
                 <a:latin typeface="Arial"/>
                 <a:ea typeface="微软雅黑"/>
               </a:rPr>
-              <a:t>谢谢各位老师，请批评指正</a:t>
-            </a:r>
-          </a:p>
-        </p:txBody>
-      </p:sp>
-      <p:sp>
-        <p:nvSpPr>
-          <p:cNvPr id="4" name="TextBox 3"/>
-          <p:cNvSpPr txBox="1"/>
-          <p:nvPr/>
-        </p:nvSpPr>
-        <p:spPr>
-          <a:xfrm>
-            <a:off x="914400" y="3429000"/>
-            <a:ext cx="10332720" cy="457200"/>
-          </a:xfrm>
-          <a:prstGeom prst="rect">
-            <a:avLst/>
-          </a:prstGeom>
-          <a:noFill/>
-        </p:spPr>
-        <p:txBody>
-          <a:bodyPr wrap="square" anchor="t" lIns="0" rIns="0" tIns="0" bIns="0">
-            <a:spAutoFit/>
-          </a:bodyPr>
-          <a:lstStyle/>
-          <a:p>
-            <a:pPr algn="ctr"/>
-            <a:r>
-              <a:rPr sz="1600" b="0">
-                <a:solidFill>
-                  <a:srgbClr val="566474"/>
-                </a:solidFill>
-                <a:latin typeface="Arial"/>
-                <a:ea typeface="微软雅黑"/>
-              </a:rPr>
-              <a:t>基于 etcd 的分布式 Kubernetes 调度器研究与实现</a:t>
-            </a:r>
-          </a:p>
-        </p:txBody>
-      </p:sp>
-      <p:sp>
-        <p:nvSpPr>
-          <p:cNvPr id="5" name="TextBox 4"/>
-          <p:cNvSpPr txBox="1"/>
-          <p:nvPr/>
-        </p:nvSpPr>
-        <p:spPr>
-          <a:xfrm>
-            <a:off x="914400" y="4343400"/>
-            <a:ext cx="10332720" cy="731520"/>
-          </a:xfrm>
-          <a:prstGeom prst="rect">
-            <a:avLst/>
-          </a:prstGeom>
-          <a:noFill/>
-        </p:spPr>
-        <p:txBody>
-          <a:bodyPr wrap="square" anchor="t" lIns="0" rIns="0" tIns="0" bIns="0">
-            <a:spAutoFit/>
-          </a:bodyPr>
-          <a:lstStyle/>
-          <a:p>
-            <a:pPr algn="ctr"/>
-            <a:r>
-              <a:rPr sz="1300" b="0">
-                <a:solidFill>
-                  <a:srgbClr val="566474"/>
-                </a:solidFill>
-                <a:latin typeface="Arial"/>
-                <a:ea typeface="微软雅黑"/>
-              </a:rPr>
-              <a:t>答辩人：[姓名]</a:t>
-            </a:r>
-          </a:p>
-          <a:p>
-            <a:pPr algn="ctr">
-              <a:spcBef>
-                <a:spcPts val="400"/>
-              </a:spcBef>
-            </a:pPr>
-            <a:r>
-              <a:rPr sz="1300" b="0">
-                <a:solidFill>
-                  <a:srgbClr val="566474"/>
-                </a:solidFill>
-                <a:latin typeface="Arial"/>
-                <a:ea typeface="微软雅黑"/>
-              </a:rPr>
-              <a:t>联系方式：[邮箱]</a:t>
-            </a:r>
-          </a:p>
-        </p:txBody>
-      </p:sp>
-      <p:sp>
-        <p:nvSpPr>
-          <p:cNvPr id="6" name="Rectangle 5"/>
+              <a:t>局限与展望</a:t>
+            </a:r>
+          </a:p>
+        </p:txBody>
+      </p:sp>
+      <p:sp>
+        <p:nvSpPr>
+          <p:cNvPr id="4" name="Rectangle 3"/>
           <p:cNvSpPr/>
           <p:nvPr/>
         </p:nvSpPr>
         <p:spPr>
           <a:xfrm>
-            <a:off x="1197864" y="5074920"/>
-            <a:ext cx="9866376" cy="20116"/>
+            <a:off x="566928" y="1298448"/>
+            <a:ext cx="32004" cy="365760"/>
           </a:xfrm>
           <a:prstGeom prst="rect">
             <a:avLst/>
           </a:prstGeom>
           <a:solidFill>
-            <a:srgbClr val="0B2A4A"/>
+            <a:srgbClr val="1F5C99"/>
           </a:solidFill>
           <a:ln>
             <a:noFill/>
@@ -15457,20 +15016,106 @@
       </p:sp>
       <p:sp>
         <p:nvSpPr>
+          <p:cNvPr id="5" name="TextBox 4"/>
+          <p:cNvSpPr txBox="1"/>
+          <p:nvPr/>
+        </p:nvSpPr>
+        <p:spPr>
+          <a:xfrm>
+            <a:off x="713232" y="1261872"/>
+            <a:ext cx="10744200" cy="438912"/>
+          </a:xfrm>
+          <a:prstGeom prst="rect">
+            <a:avLst/>
+          </a:prstGeom>
+          <a:noFill/>
+        </p:spPr>
+        <p:txBody>
+          <a:bodyPr wrap="square" anchor="ctr" lIns="0" rIns="0" tIns="0" bIns="0">
+            <a:spAutoFit/>
+          </a:bodyPr>
+          <a:lstStyle/>
+          <a:p>
+            <a:pPr algn="l">
+              <a:lnSpc>
+                <a:spcPct val="110000"/>
+              </a:lnSpc>
+            </a:pPr>
+            <a:r>
+              <a:rPr sz="1800" b="1">
+                <a:solidFill>
+                  <a:srgbClr val="1F5C99"/>
+                </a:solidFill>
+                <a:latin typeface="Arial"/>
+                <a:ea typeface="微软雅黑"/>
+              </a:rPr>
+              <a:t>三条局限有明确边界，三方向是本工作的自然延伸</a:t>
+            </a:r>
+          </a:p>
+        </p:txBody>
+      </p:sp>
+      <p:sp>
+        <p:nvSpPr>
+          <p:cNvPr id="6" name="Rounded Rectangle 5"/>
+          <p:cNvSpPr/>
+          <p:nvPr/>
+        </p:nvSpPr>
+        <p:spPr>
+          <a:xfrm>
+            <a:off x="566928" y="1847088"/>
+            <a:ext cx="3517391" cy="2084831"/>
+          </a:xfrm>
+          <a:prstGeom prst="roundRect">
+            <a:avLst/>
+          </a:prstGeom>
+          <a:solidFill>
+            <a:srgbClr val="F5F7FA"/>
+          </a:solidFill>
+          <a:ln w="9525">
+            <a:solidFill>
+              <a:srgbClr val="D8DFE8"/>
+            </a:solidFill>
+          </a:ln>
+          <a:effectLst/>
+        </p:spPr>
+        <p:style>
+          <a:lnRef idx="1">
+            <a:schemeClr val="accent1"/>
+          </a:lnRef>
+          <a:fillRef idx="3">
+            <a:schemeClr val="accent1"/>
+          </a:fillRef>
+          <a:effectRef idx="2">
+            <a:schemeClr val="accent1"/>
+          </a:effectRef>
+          <a:fontRef idx="minor">
+            <a:schemeClr val="lt1"/>
+          </a:fontRef>
+        </p:style>
+        <p:txBody>
+          <a:bodyPr rtlCol="0" anchor="ctr"/>
+          <a:lstStyle/>
+          <a:p>
+            <a:pPr algn="ctr"/>
+          </a:p>
+        </p:txBody>
+      </p:sp>
+      <p:sp>
+        <p:nvSpPr>
           <p:cNvPr id="7" name="Rectangle 6"/>
           <p:cNvSpPr/>
           <p:nvPr/>
         </p:nvSpPr>
         <p:spPr>
           <a:xfrm>
-            <a:off x="36576" y="6748272"/>
-            <a:ext cx="12088368" cy="45720"/>
+            <a:off x="566928" y="1847088"/>
+            <a:ext cx="50292" cy="2084831"/>
           </a:xfrm>
           <a:prstGeom prst="rect">
             <a:avLst/>
           </a:prstGeom>
           <a:solidFill>
-            <a:srgbClr val="0B2A4A"/>
+            <a:srgbClr val="1F5C99"/>
           </a:solidFill>
           <a:ln>
             <a:noFill/>
@@ -15507,8 +15152,8 @@
         </p:nvSpPr>
         <p:spPr>
           <a:xfrm>
-            <a:off x="10780776" y="6345936"/>
-            <a:ext cx="850392" cy="219456"/>
+            <a:off x="731520" y="1975104"/>
+            <a:ext cx="3243072" cy="1901951"/>
           </a:xfrm>
           <a:prstGeom prst="rect">
             <a:avLst/>
@@ -15521,16 +15166,400 @@
           </a:bodyPr>
           <a:lstStyle/>
           <a:p>
-            <a:pPr algn="r"/>
-            <a:r>
-              <a:rPr sz="950" b="0">
-                <a:solidFill>
-                  <a:srgbClr val="566474"/>
+            <a:pPr algn="l"/>
+            <a:r>
+              <a:rPr sz="1400" b="1">
+                <a:solidFill>
+                  <a:srgbClr val="0B2A4A"/>
                 </a:solidFill>
                 <a:latin typeface="Arial"/>
                 <a:ea typeface="微软雅黑"/>
               </a:rPr>
-              <a:t>23 / 23</a:t>
+              <a:t>Gang 尾延迟未分离归因</a:t>
+            </a:r>
+          </a:p>
+          <a:p>
+            <a:pPr algn="l">
+              <a:lnSpc>
+                <a:spcPct val="110000"/>
+              </a:lnSpc>
+              <a:spcBef>
+                <a:spcPts val="400"/>
+              </a:spcBef>
+            </a:pPr>
+            <a:r>
+              <a:rPr sz="1150" b="0">
+                <a:solidFill>
+                  <a:srgbClr val="333333"/>
+                </a:solidFill>
+                <a:latin typeface="Arial"/>
+                <a:ea typeface="微软雅黑"/>
+              </a:rPr>
+              <a:t>w6 场景 ENO 单 Pod P99 高于 Gödel，归因是同组预留等待与后续决策共用进程与队列，尚未用独立计时实验把两段耗时分离开量化</a:t>
+            </a:r>
+          </a:p>
+        </p:txBody>
+      </p:sp>
+      <p:sp>
+        <p:nvSpPr>
+          <p:cNvPr id="9" name="Rounded Rectangle 8"/>
+          <p:cNvSpPr/>
+          <p:nvPr/>
+        </p:nvSpPr>
+        <p:spPr>
+          <a:xfrm>
+            <a:off x="4340351" y="1847088"/>
+            <a:ext cx="3517391" cy="2084831"/>
+          </a:xfrm>
+          <a:prstGeom prst="roundRect">
+            <a:avLst/>
+          </a:prstGeom>
+          <a:solidFill>
+            <a:srgbClr val="F5F7FA"/>
+          </a:solidFill>
+          <a:ln w="9525">
+            <a:solidFill>
+              <a:srgbClr val="D8DFE8"/>
+            </a:solidFill>
+          </a:ln>
+          <a:effectLst/>
+        </p:spPr>
+        <p:style>
+          <a:lnRef idx="1">
+            <a:schemeClr val="accent1"/>
+          </a:lnRef>
+          <a:fillRef idx="3">
+            <a:schemeClr val="accent1"/>
+          </a:fillRef>
+          <a:effectRef idx="2">
+            <a:schemeClr val="accent1"/>
+          </a:effectRef>
+          <a:fontRef idx="minor">
+            <a:schemeClr val="lt1"/>
+          </a:fontRef>
+        </p:style>
+        <p:txBody>
+          <a:bodyPr rtlCol="0" anchor="ctr"/>
+          <a:lstStyle/>
+          <a:p>
+            <a:pPr algn="ctr"/>
+          </a:p>
+        </p:txBody>
+      </p:sp>
+      <p:sp>
+        <p:nvSpPr>
+          <p:cNvPr id="10" name="Rectangle 9"/>
+          <p:cNvSpPr/>
+          <p:nvPr/>
+        </p:nvSpPr>
+        <p:spPr>
+          <a:xfrm>
+            <a:off x="4340351" y="1847088"/>
+            <a:ext cx="50292" cy="2084831"/>
+          </a:xfrm>
+          <a:prstGeom prst="rect">
+            <a:avLst/>
+          </a:prstGeom>
+          <a:solidFill>
+            <a:srgbClr val="1F5C99"/>
+          </a:solidFill>
+          <a:ln>
+            <a:noFill/>
+          </a:ln>
+          <a:effectLst/>
+        </p:spPr>
+        <p:style>
+          <a:lnRef idx="1">
+            <a:schemeClr val="accent1"/>
+          </a:lnRef>
+          <a:fillRef idx="3">
+            <a:schemeClr val="accent1"/>
+          </a:fillRef>
+          <a:effectRef idx="2">
+            <a:schemeClr val="accent1"/>
+          </a:effectRef>
+          <a:fontRef idx="minor">
+            <a:schemeClr val="lt1"/>
+          </a:fontRef>
+        </p:style>
+        <p:txBody>
+          <a:bodyPr rtlCol="0" anchor="ctr"/>
+          <a:lstStyle/>
+          <a:p>
+            <a:pPr algn="ctr"/>
+          </a:p>
+        </p:txBody>
+      </p:sp>
+      <p:sp>
+        <p:nvSpPr>
+          <p:cNvPr id="11" name="TextBox 10"/>
+          <p:cNvSpPr txBox="1"/>
+          <p:nvPr/>
+        </p:nvSpPr>
+        <p:spPr>
+          <a:xfrm>
+            <a:off x="4504943" y="1975104"/>
+            <a:ext cx="3243072" cy="1901951"/>
+          </a:xfrm>
+          <a:prstGeom prst="rect">
+            <a:avLst/>
+          </a:prstGeom>
+          <a:noFill/>
+        </p:spPr>
+        <p:txBody>
+          <a:bodyPr wrap="square" anchor="t" lIns="0" rIns="0" tIns="0" bIns="0">
+            <a:spAutoFit/>
+          </a:bodyPr>
+          <a:lstStyle/>
+          <a:p>
+            <a:pPr algn="l"/>
+            <a:r>
+              <a:rPr sz="1400" b="1">
+                <a:solidFill>
+                  <a:srgbClr val="0B2A4A"/>
+                </a:solidFill>
+                <a:latin typeface="Arial"/>
+                <a:ea typeface="微软雅黑"/>
+              </a:rPr>
+              <a:t>仿真环境的测量边界</a:t>
+            </a:r>
+          </a:p>
+          <a:p>
+            <a:pPr algn="l">
+              <a:lnSpc>
+                <a:spcPct val="110000"/>
+              </a:lnSpc>
+              <a:spcBef>
+                <a:spcPts val="400"/>
+              </a:spcBef>
+            </a:pPr>
+            <a:r>
+              <a:rPr sz="1150" b="0">
+                <a:solidFill>
+                  <a:srgbClr val="333333"/>
+                </a:solidFill>
+                <a:latin typeface="Arial"/>
+                <a:ea typeface="微软雅黑"/>
+              </a:rPr>
+              <a:t>KWOK 用模拟 kubelet 让 Pod 直接进入 Running，省掉镜像拉取、容器启动与真实 IO：好处是测的是调度器本身、可复现；代价是绝对数值不能外推到生产，只能做相对对比</a:t>
+            </a:r>
+          </a:p>
+        </p:txBody>
+      </p:sp>
+      <p:sp>
+        <p:nvSpPr>
+          <p:cNvPr id="12" name="Rounded Rectangle 11"/>
+          <p:cNvSpPr/>
+          <p:nvPr/>
+        </p:nvSpPr>
+        <p:spPr>
+          <a:xfrm>
+            <a:off x="8113775" y="1847088"/>
+            <a:ext cx="3517391" cy="2084831"/>
+          </a:xfrm>
+          <a:prstGeom prst="roundRect">
+            <a:avLst/>
+          </a:prstGeom>
+          <a:solidFill>
+            <a:srgbClr val="F5F7FA"/>
+          </a:solidFill>
+          <a:ln w="9525">
+            <a:solidFill>
+              <a:srgbClr val="D8DFE8"/>
+            </a:solidFill>
+          </a:ln>
+          <a:effectLst/>
+        </p:spPr>
+        <p:style>
+          <a:lnRef idx="1">
+            <a:schemeClr val="accent1"/>
+          </a:lnRef>
+          <a:fillRef idx="3">
+            <a:schemeClr val="accent1"/>
+          </a:fillRef>
+          <a:effectRef idx="2">
+            <a:schemeClr val="accent1"/>
+          </a:effectRef>
+          <a:fontRef idx="minor">
+            <a:schemeClr val="lt1"/>
+          </a:fontRef>
+        </p:style>
+        <p:txBody>
+          <a:bodyPr rtlCol="0" anchor="ctr"/>
+          <a:lstStyle/>
+          <a:p>
+            <a:pPr algn="ctr"/>
+          </a:p>
+        </p:txBody>
+      </p:sp>
+      <p:sp>
+        <p:nvSpPr>
+          <p:cNvPr id="13" name="Rectangle 12"/>
+          <p:cNvSpPr/>
+          <p:nvPr/>
+        </p:nvSpPr>
+        <p:spPr>
+          <a:xfrm>
+            <a:off x="8113775" y="1847088"/>
+            <a:ext cx="50292" cy="2084831"/>
+          </a:xfrm>
+          <a:prstGeom prst="rect">
+            <a:avLst/>
+          </a:prstGeom>
+          <a:solidFill>
+            <a:srgbClr val="1F5C99"/>
+          </a:solidFill>
+          <a:ln>
+            <a:noFill/>
+          </a:ln>
+          <a:effectLst/>
+        </p:spPr>
+        <p:style>
+          <a:lnRef idx="1">
+            <a:schemeClr val="accent1"/>
+          </a:lnRef>
+          <a:fillRef idx="3">
+            <a:schemeClr val="accent1"/>
+          </a:fillRef>
+          <a:effectRef idx="2">
+            <a:schemeClr val="accent1"/>
+          </a:effectRef>
+          <a:fontRef idx="minor">
+            <a:schemeClr val="lt1"/>
+          </a:fontRef>
+        </p:style>
+        <p:txBody>
+          <a:bodyPr rtlCol="0" anchor="ctr"/>
+          <a:lstStyle/>
+          <a:p>
+            <a:pPr algn="ctr"/>
+          </a:p>
+        </p:txBody>
+      </p:sp>
+      <p:sp>
+        <p:nvSpPr>
+          <p:cNvPr id="14" name="TextBox 13"/>
+          <p:cNvSpPr txBox="1"/>
+          <p:nvPr/>
+        </p:nvSpPr>
+        <p:spPr>
+          <a:xfrm>
+            <a:off x="8278367" y="1975104"/>
+            <a:ext cx="3243072" cy="1901951"/>
+          </a:xfrm>
+          <a:prstGeom prst="rect">
+            <a:avLst/>
+          </a:prstGeom>
+          <a:noFill/>
+        </p:spPr>
+        <p:txBody>
+          <a:bodyPr wrap="square" anchor="t" lIns="0" rIns="0" tIns="0" bIns="0">
+            <a:spAutoFit/>
+          </a:bodyPr>
+          <a:lstStyle/>
+          <a:p>
+            <a:pPr algn="l"/>
+            <a:r>
+              <a:rPr sz="1400" b="1">
+                <a:solidFill>
+                  <a:srgbClr val="0B2A4A"/>
+                </a:solidFill>
+                <a:latin typeface="Arial"/>
+                <a:ea typeface="微软雅黑"/>
+              </a:rPr>
+              <a:t>资源开销未量化</a:t>
+            </a:r>
+          </a:p>
+          <a:p>
+            <a:pPr algn="l">
+              <a:lnSpc>
+                <a:spcPct val="110000"/>
+              </a:lnSpc>
+              <a:spcBef>
+                <a:spcPts val="400"/>
+              </a:spcBef>
+            </a:pPr>
+            <a:r>
+              <a:rPr sz="1150" b="0">
+                <a:solidFill>
+                  <a:srgbClr val="333333"/>
+                </a:solidFill>
+                <a:latin typeface="Arial"/>
+                <a:ea typeface="微软雅黑"/>
+              </a:rPr>
+              <a:t>公平策略是各组 Deployment 同规格（2C/4G），因此没有量化 ENO 移除 Binder Deployment 后集群总资源开销的收益</a:t>
+            </a:r>
+          </a:p>
+        </p:txBody>
+      </p:sp>
+      <p:sp>
+        <p:nvSpPr>
+          <p:cNvPr id="15" name="TextBox 14"/>
+          <p:cNvSpPr txBox="1"/>
+          <p:nvPr/>
+        </p:nvSpPr>
+        <p:spPr>
+          <a:xfrm>
+            <a:off x="566928" y="4224528"/>
+            <a:ext cx="11064240" cy="777240"/>
+          </a:xfrm>
+          <a:prstGeom prst="rect">
+            <a:avLst/>
+          </a:prstGeom>
+          <a:noFill/>
+        </p:spPr>
+        <p:txBody>
+          <a:bodyPr wrap="square" anchor="t" lIns="0" rIns="0" tIns="0" bIns="0">
+            <a:spAutoFit/>
+          </a:bodyPr>
+          <a:lstStyle/>
+          <a:p>
+            <a:pPr algn="l"/>
+            <a:r>
+              <a:rPr sz="1200" b="0">
+                <a:solidFill>
+                  <a:srgbClr val="566474"/>
+                </a:solidFill>
+                <a:latin typeface="Arial"/>
+                <a:ea typeface="微软雅黑"/>
+              </a:rPr>
+              <a:t>▪  展望：生产环境灰度验证 · 多 Dispatcher 分区协同 · 在 ENO 上叠加资源感知与拓扑亲和策略</a:t>
+            </a:r>
+          </a:p>
+        </p:txBody>
+      </p:sp>
+      <p:sp>
+        <p:nvSpPr>
+          <p:cNvPr id="16" name="TextBox 15"/>
+          <p:cNvSpPr txBox="1"/>
+          <p:nvPr/>
+        </p:nvSpPr>
+        <p:spPr>
+          <a:xfrm>
+            <a:off x="10780776" y="6345936"/>
+            <a:ext cx="850392" cy="219456"/>
+          </a:xfrm>
+          <a:prstGeom prst="rect">
+            <a:avLst/>
+          </a:prstGeom>
+          <a:noFill/>
+        </p:spPr>
+        <p:txBody>
+          <a:bodyPr wrap="square" anchor="t" lIns="0" rIns="0" tIns="0" bIns="0">
+            <a:spAutoFit/>
+          </a:bodyPr>
+          <a:lstStyle/>
+          <a:p>
+            <a:pPr algn="r"/>
+            <a:r>
+              <a:rPr sz="950" b="0">
+                <a:solidFill>
+                  <a:srgbClr val="566474"/>
+                </a:solidFill>
+                <a:latin typeface="Arial"/>
+                <a:ea typeface="微软雅黑"/>
+              </a:rPr>
+              <a:t>23 / 24</a:t>
             </a:r>
           </a:p>
         </p:txBody>
@@ -15544,6 +15573,325 @@
 </file>
 
 <file path=ppt/slides/slide24.xml><?xml version="1.0" encoding="utf-8"?>
+<p:sld xmlns:a="http://schemas.openxmlformats.org/drawingml/2006/main" xmlns:p="http://schemas.openxmlformats.org/presentationml/2006/main" xmlns:r="http://schemas.openxmlformats.org/officeDocument/2006/relationships">
+  <p:cSld>
+    <p:bg>
+      <p:bgPr>
+        <a:solidFill>
+          <a:srgbClr val="FFFFFF"/>
+        </a:solidFill>
+        <a:effectLst/>
+      </p:bgPr>
+    </p:bg>
+    <p:spTree>
+      <p:nvGrpSpPr>
+        <p:cNvPr id="1" name=""/>
+        <p:cNvGrpSpPr/>
+        <p:nvPr/>
+      </p:nvGrpSpPr>
+      <p:grpSpPr/>
+      <p:sp>
+        <p:nvSpPr>
+          <p:cNvPr id="2" name="Rectangle 1"/>
+          <p:cNvSpPr/>
+          <p:nvPr/>
+        </p:nvSpPr>
+        <p:spPr>
+          <a:xfrm>
+            <a:off x="1197864" y="2212848"/>
+            <a:ext cx="9866376" cy="20116"/>
+          </a:xfrm>
+          <a:prstGeom prst="rect">
+            <a:avLst/>
+          </a:prstGeom>
+          <a:solidFill>
+            <a:srgbClr val="0B2A4A"/>
+          </a:solidFill>
+          <a:ln>
+            <a:noFill/>
+          </a:ln>
+          <a:effectLst/>
+        </p:spPr>
+        <p:style>
+          <a:lnRef idx="1">
+            <a:schemeClr val="accent1"/>
+          </a:lnRef>
+          <a:fillRef idx="3">
+            <a:schemeClr val="accent1"/>
+          </a:fillRef>
+          <a:effectRef idx="2">
+            <a:schemeClr val="accent1"/>
+          </a:effectRef>
+          <a:fontRef idx="minor">
+            <a:schemeClr val="lt1"/>
+          </a:fontRef>
+        </p:style>
+        <p:txBody>
+          <a:bodyPr rtlCol="0" anchor="ctr"/>
+          <a:lstStyle/>
+          <a:p>
+            <a:pPr algn="ctr"/>
+          </a:p>
+        </p:txBody>
+      </p:sp>
+      <p:sp>
+        <p:nvSpPr>
+          <p:cNvPr id="3" name="TextBox 2"/>
+          <p:cNvSpPr txBox="1"/>
+          <p:nvPr/>
+        </p:nvSpPr>
+        <p:spPr>
+          <a:xfrm>
+            <a:off x="914400" y="2395728"/>
+            <a:ext cx="10332720" cy="914400"/>
+          </a:xfrm>
+          <a:prstGeom prst="rect">
+            <a:avLst/>
+          </a:prstGeom>
+          <a:noFill/>
+        </p:spPr>
+        <p:txBody>
+          <a:bodyPr wrap="square" anchor="ctr" lIns="0" rIns="0" tIns="0" bIns="0">
+            <a:spAutoFit/>
+          </a:bodyPr>
+          <a:lstStyle/>
+          <a:p>
+            <a:pPr algn="ctr"/>
+            <a:r>
+              <a:rPr sz="3400" b="1">
+                <a:solidFill>
+                  <a:srgbClr val="0B2A4A"/>
+                </a:solidFill>
+                <a:latin typeface="Arial"/>
+                <a:ea typeface="微软雅黑"/>
+              </a:rPr>
+              <a:t>谢谢各位老师，请批评指正</a:t>
+            </a:r>
+          </a:p>
+        </p:txBody>
+      </p:sp>
+      <p:sp>
+        <p:nvSpPr>
+          <p:cNvPr id="4" name="TextBox 3"/>
+          <p:cNvSpPr txBox="1"/>
+          <p:nvPr/>
+        </p:nvSpPr>
+        <p:spPr>
+          <a:xfrm>
+            <a:off x="914400" y="3429000"/>
+            <a:ext cx="10332720" cy="457200"/>
+          </a:xfrm>
+          <a:prstGeom prst="rect">
+            <a:avLst/>
+          </a:prstGeom>
+          <a:noFill/>
+        </p:spPr>
+        <p:txBody>
+          <a:bodyPr wrap="square" anchor="t" lIns="0" rIns="0" tIns="0" bIns="0">
+            <a:spAutoFit/>
+          </a:bodyPr>
+          <a:lstStyle/>
+          <a:p>
+            <a:pPr algn="ctr"/>
+            <a:r>
+              <a:rPr sz="1600" b="0">
+                <a:solidFill>
+                  <a:srgbClr val="566474"/>
+                </a:solidFill>
+                <a:latin typeface="Arial"/>
+                <a:ea typeface="微软雅黑"/>
+              </a:rPr>
+              <a:t>基于 etcd 的分布式 Kubernetes 调度器研究与实现</a:t>
+            </a:r>
+          </a:p>
+        </p:txBody>
+      </p:sp>
+      <p:sp>
+        <p:nvSpPr>
+          <p:cNvPr id="5" name="TextBox 4"/>
+          <p:cNvSpPr txBox="1"/>
+          <p:nvPr/>
+        </p:nvSpPr>
+        <p:spPr>
+          <a:xfrm>
+            <a:off x="914400" y="4343400"/>
+            <a:ext cx="10332720" cy="731520"/>
+          </a:xfrm>
+          <a:prstGeom prst="rect">
+            <a:avLst/>
+          </a:prstGeom>
+          <a:noFill/>
+        </p:spPr>
+        <p:txBody>
+          <a:bodyPr wrap="square" anchor="t" lIns="0" rIns="0" tIns="0" bIns="0">
+            <a:spAutoFit/>
+          </a:bodyPr>
+          <a:lstStyle/>
+          <a:p>
+            <a:pPr algn="ctr"/>
+            <a:r>
+              <a:rPr sz="1300" b="0">
+                <a:solidFill>
+                  <a:srgbClr val="566474"/>
+                </a:solidFill>
+                <a:latin typeface="Arial"/>
+                <a:ea typeface="微软雅黑"/>
+              </a:rPr>
+              <a:t>答辩人：[姓名]</a:t>
+            </a:r>
+          </a:p>
+          <a:p>
+            <a:pPr algn="ctr">
+              <a:spcBef>
+                <a:spcPts val="400"/>
+              </a:spcBef>
+            </a:pPr>
+            <a:r>
+              <a:rPr sz="1300" b="0">
+                <a:solidFill>
+                  <a:srgbClr val="566474"/>
+                </a:solidFill>
+                <a:latin typeface="Arial"/>
+                <a:ea typeface="微软雅黑"/>
+              </a:rPr>
+              <a:t>联系方式：[邮箱]</a:t>
+            </a:r>
+          </a:p>
+        </p:txBody>
+      </p:sp>
+      <p:sp>
+        <p:nvSpPr>
+          <p:cNvPr id="6" name="Rectangle 5"/>
+          <p:cNvSpPr/>
+          <p:nvPr/>
+        </p:nvSpPr>
+        <p:spPr>
+          <a:xfrm>
+            <a:off x="1197864" y="5074920"/>
+            <a:ext cx="9866376" cy="20116"/>
+          </a:xfrm>
+          <a:prstGeom prst="rect">
+            <a:avLst/>
+          </a:prstGeom>
+          <a:solidFill>
+            <a:srgbClr val="0B2A4A"/>
+          </a:solidFill>
+          <a:ln>
+            <a:noFill/>
+          </a:ln>
+          <a:effectLst/>
+        </p:spPr>
+        <p:style>
+          <a:lnRef idx="1">
+            <a:schemeClr val="accent1"/>
+          </a:lnRef>
+          <a:fillRef idx="3">
+            <a:schemeClr val="accent1"/>
+          </a:fillRef>
+          <a:effectRef idx="2">
+            <a:schemeClr val="accent1"/>
+          </a:effectRef>
+          <a:fontRef idx="minor">
+            <a:schemeClr val="lt1"/>
+          </a:fontRef>
+        </p:style>
+        <p:txBody>
+          <a:bodyPr rtlCol="0" anchor="ctr"/>
+          <a:lstStyle/>
+          <a:p>
+            <a:pPr algn="ctr"/>
+          </a:p>
+        </p:txBody>
+      </p:sp>
+      <p:sp>
+        <p:nvSpPr>
+          <p:cNvPr id="7" name="Rectangle 6"/>
+          <p:cNvSpPr/>
+          <p:nvPr/>
+        </p:nvSpPr>
+        <p:spPr>
+          <a:xfrm>
+            <a:off x="36576" y="6748272"/>
+            <a:ext cx="12088368" cy="45720"/>
+          </a:xfrm>
+          <a:prstGeom prst="rect">
+            <a:avLst/>
+          </a:prstGeom>
+          <a:solidFill>
+            <a:srgbClr val="0B2A4A"/>
+          </a:solidFill>
+          <a:ln>
+            <a:noFill/>
+          </a:ln>
+          <a:effectLst/>
+        </p:spPr>
+        <p:style>
+          <a:lnRef idx="1">
+            <a:schemeClr val="accent1"/>
+          </a:lnRef>
+          <a:fillRef idx="3">
+            <a:schemeClr val="accent1"/>
+          </a:fillRef>
+          <a:effectRef idx="2">
+            <a:schemeClr val="accent1"/>
+          </a:effectRef>
+          <a:fontRef idx="minor">
+            <a:schemeClr val="lt1"/>
+          </a:fontRef>
+        </p:style>
+        <p:txBody>
+          <a:bodyPr rtlCol="0" anchor="ctr"/>
+          <a:lstStyle/>
+          <a:p>
+            <a:pPr algn="ctr"/>
+          </a:p>
+        </p:txBody>
+      </p:sp>
+      <p:sp>
+        <p:nvSpPr>
+          <p:cNvPr id="8" name="TextBox 7"/>
+          <p:cNvSpPr txBox="1"/>
+          <p:nvPr/>
+        </p:nvSpPr>
+        <p:spPr>
+          <a:xfrm>
+            <a:off x="10780776" y="6345936"/>
+            <a:ext cx="850392" cy="219456"/>
+          </a:xfrm>
+          <a:prstGeom prst="rect">
+            <a:avLst/>
+          </a:prstGeom>
+          <a:noFill/>
+        </p:spPr>
+        <p:txBody>
+          <a:bodyPr wrap="square" anchor="t" lIns="0" rIns="0" tIns="0" bIns="0">
+            <a:spAutoFit/>
+          </a:bodyPr>
+          <a:lstStyle/>
+          <a:p>
+            <a:pPr algn="r"/>
+            <a:r>
+              <a:rPr sz="950" b="0">
+                <a:solidFill>
+                  <a:srgbClr val="566474"/>
+                </a:solidFill>
+                <a:latin typeface="Arial"/>
+                <a:ea typeface="微软雅黑"/>
+              </a:rPr>
+              <a:t>24 / 24</a:t>
+            </a:r>
+          </a:p>
+        </p:txBody>
+      </p:sp>
+    </p:spTree>
+  </p:cSld>
+  <p:clrMapOvr>
+    <a:masterClrMapping/>
+  </p:clrMapOvr>
+</p:sld>
+</file>
+
+<file path=ppt/slides/slide25.xml><?xml version="1.0" encoding="utf-8"?>
 <p:sld xmlns:a="http://schemas.openxmlformats.org/drawingml/2006/main" xmlns:p="http://schemas.openxmlformats.org/presentationml/2006/main" xmlns:r="http://schemas.openxmlformats.org/officeDocument/2006/relationships">
   <p:cSld>
     <p:bg>
@@ -16736,7 +17084,7 @@
 </p:sld>
 </file>
 
-<file path=ppt/slides/slide25.xml><?xml version="1.0" encoding="utf-8"?>
+<file path=ppt/slides/slide26.xml><?xml version="1.0" encoding="utf-8"?>
 <p:sld xmlns:a="http://schemas.openxmlformats.org/drawingml/2006/main" xmlns:p="http://schemas.openxmlformats.org/presentationml/2006/main" xmlns:r="http://schemas.openxmlformats.org/officeDocument/2006/relationships">
   <p:cSld>
     <p:bg>
@@ -17591,7 +17939,7 @@
 </p:sld>
 </file>
 
-<file path=ppt/slides/slide26.xml><?xml version="1.0" encoding="utf-8"?>
+<file path=ppt/slides/slide27.xml><?xml version="1.0" encoding="utf-8"?>
 <p:sld xmlns:a="http://schemas.openxmlformats.org/drawingml/2006/main" xmlns:p="http://schemas.openxmlformats.org/presentationml/2006/main" xmlns:r="http://schemas.openxmlformats.org/officeDocument/2006/relationships">
   <p:cSld>
     <p:bg>
@@ -17901,7 +18249,7 @@
 </p:sld>
 </file>
 
-<file path=ppt/slides/slide27.xml><?xml version="1.0" encoding="utf-8"?>
+<file path=ppt/slides/slide28.xml><?xml version="1.0" encoding="utf-8"?>
 <p:sld xmlns:a="http://schemas.openxmlformats.org/drawingml/2006/main" xmlns:p="http://schemas.openxmlformats.org/presentationml/2006/main" xmlns:r="http://schemas.openxmlformats.org/officeDocument/2006/relationships">
   <p:cSld>
     <p:bg>
@@ -18728,316 +19076,6 @@
 </p:sld>
 </file>
 
-<file path=ppt/slides/slide28.xml><?xml version="1.0" encoding="utf-8"?>
-<p:sld xmlns:a="http://schemas.openxmlformats.org/drawingml/2006/main" xmlns:p="http://schemas.openxmlformats.org/presentationml/2006/main" xmlns:r="http://schemas.openxmlformats.org/officeDocument/2006/relationships">
-  <p:cSld>
-    <p:bg>
-      <p:bgPr>
-        <a:solidFill>
-          <a:srgbClr val="FFFFFF"/>
-        </a:solidFill>
-        <a:effectLst/>
-      </p:bgPr>
-    </p:bg>
-    <p:spTree>
-      <p:nvGrpSpPr>
-        <p:cNvPr id="1" name=""/>
-        <p:cNvGrpSpPr/>
-        <p:nvPr/>
-      </p:nvGrpSpPr>
-      <p:grpSpPr/>
-      <p:sp>
-        <p:nvSpPr>
-          <p:cNvPr id="2" name="Rectangle 1"/>
-          <p:cNvSpPr/>
-          <p:nvPr/>
-        </p:nvSpPr>
-        <p:spPr>
-          <a:xfrm>
-            <a:off x="384048" y="420624"/>
-            <a:ext cx="77724" cy="475488"/>
-          </a:xfrm>
-          <a:prstGeom prst="rect">
-            <a:avLst/>
-          </a:prstGeom>
-          <a:solidFill>
-            <a:srgbClr val="E8833A"/>
-          </a:solidFill>
-          <a:ln>
-            <a:noFill/>
-          </a:ln>
-          <a:effectLst/>
-        </p:spPr>
-        <p:style>
-          <a:lnRef idx="1">
-            <a:schemeClr val="accent1"/>
-          </a:lnRef>
-          <a:fillRef idx="3">
-            <a:schemeClr val="accent1"/>
-          </a:fillRef>
-          <a:effectRef idx="2">
-            <a:schemeClr val="accent1"/>
-          </a:effectRef>
-          <a:fontRef idx="minor">
-            <a:schemeClr val="lt1"/>
-          </a:fontRef>
-        </p:style>
-        <p:txBody>
-          <a:bodyPr rtlCol="0" anchor="ctr"/>
-          <a:lstStyle/>
-          <a:p>
-            <a:pPr algn="ctr"/>
-          </a:p>
-        </p:txBody>
-      </p:sp>
-      <p:sp>
-        <p:nvSpPr>
-          <p:cNvPr id="3" name="TextBox 2"/>
-          <p:cNvSpPr txBox="1"/>
-          <p:nvPr/>
-        </p:nvSpPr>
-        <p:spPr>
-          <a:xfrm>
-            <a:off x="566928" y="329184"/>
-            <a:ext cx="11064240" cy="713232"/>
-          </a:xfrm>
-          <a:prstGeom prst="rect">
-            <a:avLst/>
-          </a:prstGeom>
-          <a:noFill/>
-        </p:spPr>
-        <p:txBody>
-          <a:bodyPr wrap="square" anchor="ctr" lIns="0" rIns="0" tIns="0" bIns="0">
-            <a:spAutoFit/>
-          </a:bodyPr>
-          <a:lstStyle/>
-          <a:p>
-            <a:pPr algn="l">
-              <a:lnSpc>
-                <a:spcPct val="105000"/>
-              </a:lnSpc>
-            </a:pPr>
-            <a:r>
-              <a:rPr sz="2700" b="1">
-                <a:solidFill>
-                  <a:srgbClr val="0B2A4A"/>
-                </a:solidFill>
-                <a:latin typeface="Arial"/>
-                <a:ea typeface="微软雅黑"/>
-              </a:rPr>
-              <a:t>资源公平性与未量化的资源收益</a:t>
-            </a:r>
-          </a:p>
-        </p:txBody>
-      </p:sp>
-      <p:sp>
-        <p:nvSpPr>
-          <p:cNvPr id="4" name="Rectangle 3"/>
-          <p:cNvSpPr/>
-          <p:nvPr/>
-        </p:nvSpPr>
-        <p:spPr>
-          <a:xfrm>
-            <a:off x="566928" y="1298448"/>
-            <a:ext cx="32004" cy="365760"/>
-          </a:xfrm>
-          <a:prstGeom prst="rect">
-            <a:avLst/>
-          </a:prstGeom>
-          <a:solidFill>
-            <a:srgbClr val="1F5C99"/>
-          </a:solidFill>
-          <a:ln>
-            <a:noFill/>
-          </a:ln>
-          <a:effectLst/>
-        </p:spPr>
-        <p:style>
-          <a:lnRef idx="1">
-            <a:schemeClr val="accent1"/>
-          </a:lnRef>
-          <a:fillRef idx="3">
-            <a:schemeClr val="accent1"/>
-          </a:fillRef>
-          <a:effectRef idx="2">
-            <a:schemeClr val="accent1"/>
-          </a:effectRef>
-          <a:fontRef idx="minor">
-            <a:schemeClr val="lt1"/>
-          </a:fontRef>
-        </p:style>
-        <p:txBody>
-          <a:bodyPr rtlCol="0" anchor="ctr"/>
-          <a:lstStyle/>
-          <a:p>
-            <a:pPr algn="ctr"/>
-          </a:p>
-        </p:txBody>
-      </p:sp>
-      <p:sp>
-        <p:nvSpPr>
-          <p:cNvPr id="5" name="TextBox 4"/>
-          <p:cNvSpPr txBox="1"/>
-          <p:nvPr/>
-        </p:nvSpPr>
-        <p:spPr>
-          <a:xfrm>
-            <a:off x="713232" y="1261872"/>
-            <a:ext cx="10744200" cy="438912"/>
-          </a:xfrm>
-          <a:prstGeom prst="rect">
-            <a:avLst/>
-          </a:prstGeom>
-          <a:noFill/>
-        </p:spPr>
-        <p:txBody>
-          <a:bodyPr wrap="square" anchor="ctr" lIns="0" rIns="0" tIns="0" bIns="0">
-            <a:spAutoFit/>
-          </a:bodyPr>
-          <a:lstStyle/>
-          <a:p>
-            <a:pPr algn="l">
-              <a:lnSpc>
-                <a:spcPct val="110000"/>
-              </a:lnSpc>
-            </a:pPr>
-            <a:r>
-              <a:rPr sz="1800" b="1">
-                <a:solidFill>
-                  <a:srgbClr val="1F5C99"/>
-                </a:solidFill>
-                <a:latin typeface="Arial"/>
-                <a:ea typeface="微软雅黑"/>
-              </a:rPr>
-              <a:t>每 Deployment 同规格，对 ENO 略不利</a:t>
-            </a:r>
-          </a:p>
-        </p:txBody>
-      </p:sp>
-      <p:sp>
-        <p:nvSpPr>
-          <p:cNvPr id="6" name="TextBox 5"/>
-          <p:cNvSpPr txBox="1"/>
-          <p:nvPr/>
-        </p:nvSpPr>
-        <p:spPr>
-          <a:xfrm>
-            <a:off x="566928" y="1965960"/>
-            <a:ext cx="10607040" cy="1417320"/>
-          </a:xfrm>
-          <a:prstGeom prst="rect">
-            <a:avLst/>
-          </a:prstGeom>
-          <a:noFill/>
-        </p:spPr>
-        <p:txBody>
-          <a:bodyPr wrap="square" anchor="t" lIns="0" rIns="0" tIns="0" bIns="0">
-            <a:spAutoFit/>
-          </a:bodyPr>
-          <a:lstStyle/>
-          <a:p>
-            <a:pPr algn="l">
-              <a:lnSpc>
-                <a:spcPct val="115000"/>
-              </a:lnSpc>
-            </a:pPr>
-            <a:r>
-              <a:rPr sz="1700" b="0">
-                <a:solidFill>
-                  <a:srgbClr val="333333"/>
-                </a:solidFill>
-                <a:latin typeface="Arial"/>
-                <a:ea typeface="微软雅黑"/>
-              </a:rPr>
-              <a:t>▪  Scheduler Pod 统一 2C/4G</a:t>
-            </a:r>
-          </a:p>
-          <a:p>
-            <a:pPr algn="l">
-              <a:lnSpc>
-                <a:spcPct val="115000"/>
-              </a:lnSpc>
-              <a:spcBef>
-                <a:spcPts val="1800"/>
-              </a:spcBef>
-            </a:pPr>
-            <a:r>
-              <a:rPr sz="1700" b="0">
-                <a:solidFill>
-                  <a:srgbClr val="333333"/>
-                </a:solidFill>
-                <a:latin typeface="Arial"/>
-                <a:ea typeface="微软雅黑"/>
-              </a:rPr>
-              <a:t>▪  ENO 少一个 Binder Deployment</a:t>
-            </a:r>
-          </a:p>
-          <a:p>
-            <a:pPr algn="l">
-              <a:lnSpc>
-                <a:spcPct val="115000"/>
-              </a:lnSpc>
-              <a:spcBef>
-                <a:spcPts val="1800"/>
-              </a:spcBef>
-            </a:pPr>
-            <a:r>
-              <a:rPr sz="1700" b="0">
-                <a:solidFill>
-                  <a:srgbClr val="333333"/>
-                </a:solidFill>
-                <a:latin typeface="Arial"/>
-                <a:ea typeface="微软雅黑"/>
-              </a:rPr>
-              <a:t>▪  集群总资源收益未量化</a:t>
-            </a:r>
-          </a:p>
-        </p:txBody>
-      </p:sp>
-      <p:sp>
-        <p:nvSpPr>
-          <p:cNvPr id="7" name="TextBox 6"/>
-          <p:cNvSpPr txBox="1"/>
-          <p:nvPr/>
-        </p:nvSpPr>
-        <p:spPr>
-          <a:xfrm>
-            <a:off x="10780776" y="6345936"/>
-            <a:ext cx="850392" cy="219456"/>
-          </a:xfrm>
-          <a:prstGeom prst="rect">
-            <a:avLst/>
-          </a:prstGeom>
-          <a:noFill/>
-        </p:spPr>
-        <p:txBody>
-          <a:bodyPr wrap="square" anchor="t" lIns="0" rIns="0" tIns="0" bIns="0">
-            <a:spAutoFit/>
-          </a:bodyPr>
-          <a:lstStyle/>
-          <a:p>
-            <a:pPr algn="r"/>
-            <a:r>
-              <a:rPr sz="950" b="0">
-                <a:solidFill>
-                  <a:srgbClr val="566474"/>
-                </a:solidFill>
-                <a:latin typeface="Arial"/>
-                <a:ea typeface="微软雅黑"/>
-              </a:rPr>
-              <a:t>B5</a:t>
-            </a:r>
-          </a:p>
-        </p:txBody>
-      </p:sp>
-    </p:spTree>
-  </p:cSld>
-  <p:clrMapOvr>
-    <a:masterClrMapping/>
-  </p:clrMapOvr>
-</p:sld>
-</file>
-
 <file path=ppt/slides/slide29.xml><?xml version="1.0" encoding="utf-8"?>
 <p:sld xmlns:a="http://schemas.openxmlformats.org/drawingml/2006/main" xmlns:p="http://schemas.openxmlformats.org/presentationml/2006/main" xmlns:r="http://schemas.openxmlformats.org/officeDocument/2006/relationships">
   <p:cSld>
@@ -19135,7 +19173,7 @@
                 <a:latin typeface="Arial"/>
                 <a:ea typeface="微软雅黑"/>
               </a:rPr>
-              <a:t>一键复现</a:t>
+              <a:t>资源公平性与未量化的资源收益</a:t>
             </a:r>
           </a:p>
         </p:txBody>
@@ -19219,7 +19257,7 @@
                 <a:latin typeface="Arial"/>
                 <a:ea typeface="微软雅黑"/>
               </a:rPr>
-              <a:t>从零到结果的全部入口</a:t>
+              <a:t>每 Deployment 同规格，对 ENO 略不利</a:t>
             </a:r>
           </a:p>
         </p:txBody>
@@ -19259,7 +19297,7 @@
                 <a:latin typeface="Arial"/>
                 <a:ea typeface="微软雅黑"/>
               </a:rPr>
-              <a:t>▪  run-experiment.sh：12 步实验流程</a:t>
+              <a:t>▪  Scheduler Pod 统一 2C/4G</a:t>
             </a:r>
           </a:p>
           <a:p>
@@ -19279,7 +19317,7 @@
                 <a:latin typeface="Arial"/>
                 <a:ea typeface="微软雅黑"/>
               </a:rPr>
-              <a:t>▪  plot-results.py / collect/：聚合与出图</a:t>
+              <a:t>▪  ENO 少一个 Binder Deployment</a:t>
             </a:r>
           </a:p>
           <a:p>
@@ -19299,7 +19337,7 @@
                 <a:latin typeface="Arial"/>
                 <a:ea typeface="微软雅黑"/>
               </a:rPr>
-              <a:t>▪  results/compare/：16 场景产物</a:t>
+              <a:t>▪  集群总资源收益未量化</a:t>
             </a:r>
           </a:p>
         </p:txBody>
@@ -19335,7 +19373,7 @@
                 <a:latin typeface="Arial"/>
                 <a:ea typeface="微软雅黑"/>
               </a:rPr>
-              <a:t>B6</a:t>
+              <a:t>B5</a:t>
             </a:r>
           </a:p>
         </p:txBody>
@@ -20457,7 +20495,7 @@
                 <a:latin typeface="Arial"/>
                 <a:ea typeface="微软雅黑"/>
               </a:rPr>
-              <a:t>3 / 23</a:t>
+              <a:t>3 / 24</a:t>
             </a:r>
           </a:p>
         </p:txBody>
@@ -20567,7 +20605,7 @@
                 <a:latin typeface="Arial"/>
                 <a:ea typeface="微软雅黑"/>
               </a:rPr>
-              <a:t>主场景 s3/w3 的时序形态（备用）</a:t>
+              <a:t>一键复现</a:t>
             </a:r>
           </a:p>
         </p:txBody>
@@ -20651,69 +20689,21 @@
                 <a:latin typeface="Arial"/>
                 <a:ea typeface="微软雅黑"/>
               </a:rPr>
-              <a:t>ENO 更早进入平台、平台更高、结束更早</a:t>
-            </a:r>
-          </a:p>
-        </p:txBody>
-      </p:sp>
-      <p:pic>
-        <p:nvPicPr>
-          <p:cNvPr id="6" name="Picture 5" descr="fig6-throughput-s3-w3.png"/>
-          <p:cNvPicPr>
-            <a:picLocks noChangeAspect="1"/>
-          </p:cNvPicPr>
-          <p:nvPr/>
-        </p:nvPicPr>
-        <p:blipFill>
-          <a:blip r:embed="rId2"/>
-          <a:stretch>
-            <a:fillRect/>
-          </a:stretch>
-        </p:blipFill>
-        <p:spPr>
-          <a:xfrm>
-            <a:off x="566928" y="2322730"/>
-            <a:ext cx="5394960" cy="2212539"/>
-          </a:xfrm>
-          <a:prstGeom prst="rect">
-            <a:avLst/>
-          </a:prstGeom>
-        </p:spPr>
-      </p:pic>
-      <p:pic>
-        <p:nvPicPr>
-          <p:cNvPr id="7" name="Picture 6" descr="fig6-6-latency-p99-s3-w3.png"/>
-          <p:cNvPicPr>
-            <a:picLocks noChangeAspect="1"/>
-          </p:cNvPicPr>
-          <p:nvPr/>
-        </p:nvPicPr>
-        <p:blipFill>
-          <a:blip r:embed="rId3"/>
-          <a:stretch>
-            <a:fillRect/>
-          </a:stretch>
-        </p:blipFill>
-        <p:spPr>
-          <a:xfrm>
-            <a:off x="6172200" y="2323351"/>
-            <a:ext cx="5394960" cy="2211297"/>
-          </a:xfrm>
-          <a:prstGeom prst="rect">
-            <a:avLst/>
-          </a:prstGeom>
-        </p:spPr>
-      </p:pic>
-      <p:sp>
-        <p:nvSpPr>
-          <p:cNvPr id="8" name="TextBox 7"/>
+              <a:t>从零到结果的全部入口</a:t>
+            </a:r>
+          </a:p>
+        </p:txBody>
+      </p:sp>
+      <p:sp>
+        <p:nvSpPr>
+          <p:cNvPr id="6" name="TextBox 5"/>
           <p:cNvSpPr txBox="1"/>
           <p:nvPr/>
         </p:nvSpPr>
         <p:spPr>
           <a:xfrm>
-            <a:off x="566928" y="5138928"/>
-            <a:ext cx="11064240" cy="1097280"/>
+            <a:off x="566928" y="1965960"/>
+            <a:ext cx="10607040" cy="1417320"/>
           </a:xfrm>
           <a:prstGeom prst="rect">
             <a:avLst/>
@@ -20726,57 +20716,67 @@
           </a:bodyPr>
           <a:lstStyle/>
           <a:p>
-            <a:pPr algn="l"/>
-            <a:r>
-              <a:rPr sz="1400" b="0">
+            <a:pPr algn="l">
+              <a:lnSpc>
+                <a:spcPct val="115000"/>
+              </a:lnSpc>
+            </a:pPr>
+            <a:r>
+              <a:rPr sz="1700" b="0">
                 <a:solidFill>
                   <a:srgbClr val="333333"/>
                 </a:solidFill>
                 <a:latin typeface="Arial"/>
                 <a:ea typeface="微软雅黑"/>
               </a:rPr>
-              <a:t>▪  吞吐平台更高且更早稳定</a:t>
+              <a:t>▪  run-experiment.sh：12 步实验流程</a:t>
             </a:r>
           </a:p>
           <a:p>
             <a:pPr algn="l">
+              <a:lnSpc>
+                <a:spcPct val="115000"/>
+              </a:lnSpc>
               <a:spcBef>
-                <a:spcPts val="600"/>
+                <a:spcPts val="1800"/>
               </a:spcBef>
             </a:pPr>
             <a:r>
-              <a:rPr sz="1400" b="0">
+              <a:rPr sz="1700" b="0">
                 <a:solidFill>
                   <a:srgbClr val="333333"/>
                 </a:solidFill>
                 <a:latin typeface="Arial"/>
                 <a:ea typeface="微软雅黑"/>
               </a:rPr>
-              <a:t>▪  P99 峰值更低、回落更快</a:t>
+              <a:t>▪  plot-results.py / collect/：聚合与出图</a:t>
             </a:r>
           </a:p>
           <a:p>
             <a:pPr algn="l">
+              <a:lnSpc>
+                <a:spcPct val="115000"/>
+              </a:lnSpc>
               <a:spcBef>
-                <a:spcPts val="600"/>
+                <a:spcPts val="1800"/>
               </a:spcBef>
             </a:pPr>
             <a:r>
-              <a:rPr sz="1400" b="0">
+              <a:rPr sz="1700" b="0">
                 <a:solidFill>
                   <a:srgbClr val="333333"/>
                 </a:solidFill>
                 <a:latin typeface="Arial"/>
                 <a:ea typeface="微软雅黑"/>
               </a:rPr>
-              <a:t>▪  整体完成时间更短</a:t>
-            </a:r>
-          </a:p>
-        </p:txBody>
-      </p:sp>
-      <p:sp>
-        <p:nvSpPr>
-          <p:cNvPr id="9" name="TextBox 8"/>
+              <a:t>▪  results/compare/：16 场景产物</a:t>
+            </a:r>
+          </a:p>
+        </p:txBody>
+      </p:sp>
+      <p:sp>
+        <p:nvSpPr>
+          <p:cNvPr id="7" name="TextBox 6"/>
           <p:cNvSpPr txBox="1"/>
           <p:nvPr/>
         </p:nvSpPr>
@@ -20805,7 +20805,7 @@
                 <a:latin typeface="Arial"/>
                 <a:ea typeface="微软雅黑"/>
               </a:rPr>
-              <a:t>B7</a:t>
+              <a:t>B6</a:t>
             </a:r>
           </a:p>
         </p:txBody>
@@ -21373,7 +21373,7 @@
                 <a:latin typeface="Arial"/>
                 <a:ea typeface="微软雅黑"/>
               </a:rPr>
-              <a:t>4 / 23</a:t>
+              <a:t>4 / 24</a:t>
             </a:r>
           </a:p>
         </p:txBody>
@@ -21981,7 +21981,7 @@
                 <a:latin typeface="Arial"/>
                 <a:ea typeface="微软雅黑"/>
               </a:rPr>
-              <a:t>5 / 23</a:t>
+              <a:t>5 / 24</a:t>
             </a:r>
           </a:p>
         </p:txBody>
@@ -22589,7 +22589,7 @@
                 <a:latin typeface="Arial"/>
                 <a:ea typeface="微软雅黑"/>
               </a:rPr>
-              <a:t>6 / 23</a:t>
+              <a:t>6 / 24</a:t>
             </a:r>
           </a:p>
         </p:txBody>
@@ -23197,7 +23197,7 @@
                 <a:latin typeface="Arial"/>
                 <a:ea typeface="微软雅黑"/>
               </a:rPr>
-              <a:t>7 / 23</a:t>
+              <a:t>7 / 24</a:t>
             </a:r>
           </a:p>
         </p:txBody>
@@ -23528,7 +23528,7 @@
                 <a:latin typeface="Arial"/>
                 <a:ea typeface="微软雅黑"/>
               </a:rPr>
-              <a:t>8 / 23</a:t>
+              <a:t>8 / 24</a:t>
             </a:r>
           </a:p>
         </p:txBody>
@@ -24136,7 +24136,7 @@
                 <a:latin typeface="Arial"/>
                 <a:ea typeface="微软雅黑"/>
               </a:rPr>
-              <a:t>9 / 23</a:t>
+              <a:t>9 / 24</a:t>
             </a:r>
           </a:p>
         </p:txBody>

--- a/docs/thesis/defense/答辩PPT-基于etcd的分布式Kubernetes调度器.pptx
+++ b/docs/thesis/defense/答辩PPT-基于etcd的分布式Kubernetes调度器.pptx
@@ -29,12 +29,6 @@
     <p:sldId id="277" r:id="rId29"/>
     <p:sldId id="278" r:id="rId30"/>
     <p:sldId id="279" r:id="rId31"/>
-    <p:sldId id="280" r:id="rId32"/>
-    <p:sldId id="281" r:id="rId33"/>
-    <p:sldId id="282" r:id="rId34"/>
-    <p:sldId id="283" r:id="rId35"/>
-    <p:sldId id="284" r:id="rId36"/>
-    <p:sldId id="285" r:id="rId37"/>
   </p:sldIdLst>
   <p:sldSz cx="12191695" cy="6858000" type="screen4x3"/>
   <p:notesSz cx="6858000" cy="9144000"/>
@@ -1676,356 +1670,6 @@
 </p:notes>
 </file>
 
-<file path=ppt/notesSlides/notesSlide25.xml><?xml version="1.0" encoding="utf-8"?>
-<p:notes xmlns:a="http://schemas.openxmlformats.org/drawingml/2006/main" xmlns:p="http://schemas.openxmlformats.org/presentationml/2006/main" xmlns:r="http://schemas.openxmlformats.org/officeDocument/2006/relationships">
-  <p:cSld>
-    <p:spTree>
-      <p:nvGrpSpPr>
-        <p:cNvPr id="1" name=""/>
-        <p:cNvGrpSpPr/>
-        <p:nvPr/>
-      </p:nvGrpSpPr>
-      <p:grpSpPr>
-        <a:xfrm>
-          <a:off x="0" y="0"/>
-          <a:ext cx="0" cy="0"/>
-          <a:chOff x="0" y="0"/>
-          <a:chExt cx="0" cy="0"/>
-        </a:xfrm>
-      </p:grpSpPr>
-      <p:sp>
-        <p:nvSpPr>
-          <p:cNvPr id="2" name="Slide Image Placeholder 1"/>
-          <p:cNvSpPr>
-            <a:spLocks noGrp="1"/>
-          </p:cNvSpPr>
-          <p:nvPr>
-            <p:ph type="sldImg" idx="2"/>
-          </p:nvPr>
-        </p:nvSpPr>
-        <p:spPr/>
-      </p:sp>
-      <p:sp>
-        <p:nvSpPr>
-          <p:cNvPr id="3" name="Notes Placeholder 2"/>
-          <p:cNvSpPr>
-            <a:spLocks noGrp="1"/>
-          </p:cNvSpPr>
-          <p:nvPr>
-            <p:ph type="body" idx="3" sz="quarter"/>
-          </p:nvPr>
-        </p:nvSpPr>
-        <p:spPr/>
-        <p:txBody>
-          <a:bodyPr/>
-          <a:lstStyle/>
-          <a:p>
-            <a:r>
-              <a:t>备用页：抽查任意场景的原始数值。</a:t>
-            </a:r>
-          </a:p>
-        </p:txBody>
-      </p:sp>
-      <p:sp>
-        <p:nvSpPr>
-          <p:cNvPr id="4" name="Slide Number Placeholder 3"/>
-          <p:cNvSpPr>
-            <a:spLocks noGrp="1"/>
-          </p:cNvSpPr>
-          <p:nvPr>
-            <p:ph type="sldNum" idx="5" sz="quarter"/>
-          </p:nvPr>
-        </p:nvSpPr>
-        <p:spPr/>
-      </p:sp>
-    </p:spTree>
-  </p:cSld>
-  <p:clrMapOvr>
-    <a:masterClrMapping/>
-  </p:clrMapOvr>
-</p:notes>
-</file>
-
-<file path=ppt/notesSlides/notesSlide26.xml><?xml version="1.0" encoding="utf-8"?>
-<p:notes xmlns:a="http://schemas.openxmlformats.org/drawingml/2006/main" xmlns:p="http://schemas.openxmlformats.org/presentationml/2006/main" xmlns:r="http://schemas.openxmlformats.org/officeDocument/2006/relationships">
-  <p:cSld>
-    <p:spTree>
-      <p:nvGrpSpPr>
-        <p:cNvPr id="1" name=""/>
-        <p:cNvGrpSpPr/>
-        <p:nvPr/>
-      </p:nvGrpSpPr>
-      <p:grpSpPr>
-        <a:xfrm>
-          <a:off x="0" y="0"/>
-          <a:ext cx="0" cy="0"/>
-          <a:chOff x="0" y="0"/>
-          <a:chExt cx="0" cy="0"/>
-        </a:xfrm>
-      </p:grpSpPr>
-      <p:sp>
-        <p:nvSpPr>
-          <p:cNvPr id="2" name="Slide Image Placeholder 1"/>
-          <p:cNvSpPr>
-            <a:spLocks noGrp="1"/>
-          </p:cNvSpPr>
-          <p:nvPr>
-            <p:ph type="sldImg" idx="2"/>
-          </p:nvPr>
-        </p:nvSpPr>
-        <p:spPr/>
-      </p:sp>
-      <p:sp>
-        <p:nvSpPr>
-          <p:cNvPr id="3" name="Notes Placeholder 2"/>
-          <p:cNvSpPr>
-            <a:spLocks noGrp="1"/>
-          </p:cNvSpPr>
-          <p:nvPr>
-            <p:ph type="body" idx="3" sz="quarter"/>
-          </p:nvPr>
-        </p:nvSpPr>
-        <p:spPr/>
-        <p:txBody>
-          <a:bodyPr/>
-          <a:lstStyle/>
-          <a:p>
-            <a:r>
-              <a:t>备用页：如果评委追问某个数字怎么算出来的，用这页回答。</a:t>
-            </a:r>
-          </a:p>
-        </p:txBody>
-      </p:sp>
-      <p:sp>
-        <p:nvSpPr>
-          <p:cNvPr id="4" name="Slide Number Placeholder 3"/>
-          <p:cNvSpPr>
-            <a:spLocks noGrp="1"/>
-          </p:cNvSpPr>
-          <p:nvPr>
-            <p:ph type="sldNum" idx="5" sz="quarter"/>
-          </p:nvPr>
-        </p:nvSpPr>
-        <p:spPr/>
-      </p:sp>
-    </p:spTree>
-  </p:cSld>
-  <p:clrMapOvr>
-    <a:masterClrMapping/>
-  </p:clrMapOvr>
-</p:notes>
-</file>
-
-<file path=ppt/notesSlides/notesSlide27.xml><?xml version="1.0" encoding="utf-8"?>
-<p:notes xmlns:a="http://schemas.openxmlformats.org/drawingml/2006/main" xmlns:p="http://schemas.openxmlformats.org/presentationml/2006/main" xmlns:r="http://schemas.openxmlformats.org/officeDocument/2006/relationships">
-  <p:cSld>
-    <p:spTree>
-      <p:nvGrpSpPr>
-        <p:cNvPr id="1" name=""/>
-        <p:cNvGrpSpPr/>
-        <p:nvPr/>
-      </p:nvGrpSpPr>
-      <p:grpSpPr>
-        <a:xfrm>
-          <a:off x="0" y="0"/>
-          <a:ext cx="0" cy="0"/>
-          <a:chOff x="0" y="0"/>
-          <a:chExt cx="0" cy="0"/>
-        </a:xfrm>
-      </p:grpSpPr>
-      <p:sp>
-        <p:nvSpPr>
-          <p:cNvPr id="2" name="Slide Image Placeholder 1"/>
-          <p:cNvSpPr>
-            <a:spLocks noGrp="1"/>
-          </p:cNvSpPr>
-          <p:nvPr>
-            <p:ph type="sldImg" idx="2"/>
-          </p:nvPr>
-        </p:nvSpPr>
-        <p:spPr/>
-      </p:sp>
-      <p:sp>
-        <p:nvSpPr>
-          <p:cNvPr id="3" name="Notes Placeholder 2"/>
-          <p:cNvSpPr>
-            <a:spLocks noGrp="1"/>
-          </p:cNvSpPr>
-          <p:nvPr>
-            <p:ph type="body" idx="3" sz="quarter"/>
-          </p:nvPr>
-        </p:nvSpPr>
-        <p:spPr/>
-        <p:txBody>
-          <a:bodyPr/>
-          <a:lstStyle/>
-          <a:p>
-            <a:r>
-              <a:t>备用页：幸存者偏差的解释。过载时 Pod 根本没被处理，所以延迟看起来“很好”。</a:t>
-            </a:r>
-          </a:p>
-        </p:txBody>
-      </p:sp>
-      <p:sp>
-        <p:nvSpPr>
-          <p:cNvPr id="4" name="Slide Number Placeholder 3"/>
-          <p:cNvSpPr>
-            <a:spLocks noGrp="1"/>
-          </p:cNvSpPr>
-          <p:nvPr>
-            <p:ph type="sldNum" idx="5" sz="quarter"/>
-          </p:nvPr>
-        </p:nvSpPr>
-        <p:spPr/>
-      </p:sp>
-    </p:spTree>
-  </p:cSld>
-  <p:clrMapOvr>
-    <a:masterClrMapping/>
-  </p:clrMapOvr>
-</p:notes>
-</file>
-
-<file path=ppt/notesSlides/notesSlide28.xml><?xml version="1.0" encoding="utf-8"?>
-<p:notes xmlns:a="http://schemas.openxmlformats.org/drawingml/2006/main" xmlns:p="http://schemas.openxmlformats.org/presentationml/2006/main" xmlns:r="http://schemas.openxmlformats.org/officeDocument/2006/relationships">
-  <p:cSld>
-    <p:spTree>
-      <p:nvGrpSpPr>
-        <p:cNvPr id="1" name=""/>
-        <p:cNvGrpSpPr/>
-        <p:nvPr/>
-      </p:nvGrpSpPr>
-      <p:grpSpPr>
-        <a:xfrm>
-          <a:off x="0" y="0"/>
-          <a:ext cx="0" cy="0"/>
-          <a:chOff x="0" y="0"/>
-          <a:chExt cx="0" cy="0"/>
-        </a:xfrm>
-      </p:grpSpPr>
-      <p:sp>
-        <p:nvSpPr>
-          <p:cNvPr id="2" name="Slide Image Placeholder 1"/>
-          <p:cNvSpPr>
-            <a:spLocks noGrp="1"/>
-          </p:cNvSpPr>
-          <p:nvPr>
-            <p:ph type="sldImg" idx="2"/>
-          </p:nvPr>
-        </p:nvSpPr>
-        <p:spPr/>
-      </p:sp>
-      <p:sp>
-        <p:nvSpPr>
-          <p:cNvPr id="3" name="Notes Placeholder 2"/>
-          <p:cNvSpPr>
-            <a:spLocks noGrp="1"/>
-          </p:cNvSpPr>
-          <p:nvPr>
-            <p:ph type="body" idx="3" sz="quarter"/>
-          </p:nvPr>
-        </p:nvSpPr>
-        <p:spPr/>
-        <p:txBody>
-          <a:bodyPr/>
-          <a:lstStyle/>
-          <a:p>
-            <a:r>
-              <a:t>备用页：w6 反向结果的完整数据与解释。</a:t>
-            </a:r>
-          </a:p>
-        </p:txBody>
-      </p:sp>
-      <p:sp>
-        <p:nvSpPr>
-          <p:cNvPr id="4" name="Slide Number Placeholder 3"/>
-          <p:cNvSpPr>
-            <a:spLocks noGrp="1"/>
-          </p:cNvSpPr>
-          <p:nvPr>
-            <p:ph type="sldNum" idx="5" sz="quarter"/>
-          </p:nvPr>
-        </p:nvSpPr>
-        <p:spPr/>
-      </p:sp>
-    </p:spTree>
-  </p:cSld>
-  <p:clrMapOvr>
-    <a:masterClrMapping/>
-  </p:clrMapOvr>
-</p:notes>
-</file>
-
-<file path=ppt/notesSlides/notesSlide29.xml><?xml version="1.0" encoding="utf-8"?>
-<p:notes xmlns:a="http://schemas.openxmlformats.org/drawingml/2006/main" xmlns:p="http://schemas.openxmlformats.org/presentationml/2006/main" xmlns:r="http://schemas.openxmlformats.org/officeDocument/2006/relationships">
-  <p:cSld>
-    <p:spTree>
-      <p:nvGrpSpPr>
-        <p:cNvPr id="1" name=""/>
-        <p:cNvGrpSpPr/>
-        <p:nvPr/>
-      </p:nvGrpSpPr>
-      <p:grpSpPr>
-        <a:xfrm>
-          <a:off x="0" y="0"/>
-          <a:ext cx="0" cy="0"/>
-          <a:chOff x="0" y="0"/>
-          <a:chExt cx="0" cy="0"/>
-        </a:xfrm>
-      </p:grpSpPr>
-      <p:sp>
-        <p:nvSpPr>
-          <p:cNvPr id="2" name="Slide Image Placeholder 1"/>
-          <p:cNvSpPr>
-            <a:spLocks noGrp="1"/>
-          </p:cNvSpPr>
-          <p:nvPr>
-            <p:ph type="sldImg" idx="2"/>
-          </p:nvPr>
-        </p:nvSpPr>
-        <p:spPr/>
-      </p:sp>
-      <p:sp>
-        <p:nvSpPr>
-          <p:cNvPr id="3" name="Notes Placeholder 2"/>
-          <p:cNvSpPr>
-            <a:spLocks noGrp="1"/>
-          </p:cNvSpPr>
-          <p:nvPr>
-            <p:ph type="body" idx="3" sz="quarter"/>
-          </p:nvPr>
-        </p:nvSpPr>
-        <p:spPr/>
-        <p:txBody>
-          <a:bodyPr/>
-          <a:lstStyle/>
-          <a:p>
-            <a:r>
-              <a:t>备用页：公平性与资源开销的口径说明。</a:t>
-            </a:r>
-          </a:p>
-        </p:txBody>
-      </p:sp>
-      <p:sp>
-        <p:nvSpPr>
-          <p:cNvPr id="4" name="Slide Number Placeholder 3"/>
-          <p:cNvSpPr>
-            <a:spLocks noGrp="1"/>
-          </p:cNvSpPr>
-          <p:nvPr>
-            <p:ph type="sldNum" idx="5" sz="quarter"/>
-          </p:nvPr>
-        </p:nvSpPr>
-        <p:spPr/>
-      </p:sp>
-    </p:spTree>
-  </p:cSld>
-  <p:clrMapOvr>
-    <a:masterClrMapping/>
-  </p:clrMapOvr>
-</p:notes>
-</file>
-
 <file path=ppt/notesSlides/notesSlide3.xml><?xml version="1.0" encoding="utf-8"?>
 <p:notes xmlns:a="http://schemas.openxmlformats.org/drawingml/2006/main" xmlns:p="http://schemas.openxmlformats.org/presentationml/2006/main" xmlns:r="http://schemas.openxmlformats.org/officeDocument/2006/relationships">
   <p:cSld>
@@ -2072,76 +1716,6 @@
           <a:p>
             <a:r>
               <a:t>第二章分国外与国内两条线。国外从集中式走到共享状态：Borg、Omega、Mesos，再到 kube-scheduler 的插件框架。国内代表是 Gödel，字节跳动开源，用节点分区做分片式多实例；Volcano 与 Koordinator 走插件增强。共同缺口在落盘侧。</a:t>
-            </a:r>
-          </a:p>
-        </p:txBody>
-      </p:sp>
-      <p:sp>
-        <p:nvSpPr>
-          <p:cNvPr id="4" name="Slide Number Placeholder 3"/>
-          <p:cNvSpPr>
-            <a:spLocks noGrp="1"/>
-          </p:cNvSpPr>
-          <p:nvPr>
-            <p:ph type="sldNum" idx="5" sz="quarter"/>
-          </p:nvPr>
-        </p:nvSpPr>
-        <p:spPr/>
-      </p:sp>
-    </p:spTree>
-  </p:cSld>
-  <p:clrMapOvr>
-    <a:masterClrMapping/>
-  </p:clrMapOvr>
-</p:notes>
-</file>
-
-<file path=ppt/notesSlides/notesSlide30.xml><?xml version="1.0" encoding="utf-8"?>
-<p:notes xmlns:a="http://schemas.openxmlformats.org/drawingml/2006/main" xmlns:p="http://schemas.openxmlformats.org/presentationml/2006/main" xmlns:r="http://schemas.openxmlformats.org/officeDocument/2006/relationships">
-  <p:cSld>
-    <p:spTree>
-      <p:nvGrpSpPr>
-        <p:cNvPr id="1" name=""/>
-        <p:cNvGrpSpPr/>
-        <p:nvPr/>
-      </p:nvGrpSpPr>
-      <p:grpSpPr>
-        <a:xfrm>
-          <a:off x="0" y="0"/>
-          <a:ext cx="0" cy="0"/>
-          <a:chOff x="0" y="0"/>
-          <a:chExt cx="0" cy="0"/>
-        </a:xfrm>
-      </p:grpSpPr>
-      <p:sp>
-        <p:nvSpPr>
-          <p:cNvPr id="2" name="Slide Image Placeholder 1"/>
-          <p:cNvSpPr>
-            <a:spLocks noGrp="1"/>
-          </p:cNvSpPr>
-          <p:nvPr>
-            <p:ph type="sldImg" idx="2"/>
-          </p:nvPr>
-        </p:nvSpPr>
-        <p:spPr/>
-      </p:sp>
-      <p:sp>
-        <p:nvSpPr>
-          <p:cNvPr id="3" name="Notes Placeholder 2"/>
-          <p:cNvSpPr>
-            <a:spLocks noGrp="1"/>
-          </p:cNvSpPr>
-          <p:nvPr>
-            <p:ph type="body" idx="3" sz="quarter"/>
-          </p:nvPr>
-        </p:nvSpPr>
-        <p:spPr/>
-        <p:txBody>
-          <a:bodyPr/>
-          <a:lstStyle/>
-          <a:p>
-            <a:r>
-              <a:t>备用页：评委问可复现性时展示。</a:t>
             </a:r>
           </a:p>
         </p:txBody>
@@ -15879,3501 +15453,6 @@
                 <a:ea typeface="微软雅黑"/>
               </a:rPr>
               <a:t>24 / 24</a:t>
-            </a:r>
-          </a:p>
-        </p:txBody>
-      </p:sp>
-    </p:spTree>
-  </p:cSld>
-  <p:clrMapOvr>
-    <a:masterClrMapping/>
-  </p:clrMapOvr>
-</p:sld>
-</file>
-
-<file path=ppt/slides/slide25.xml><?xml version="1.0" encoding="utf-8"?>
-<p:sld xmlns:a="http://schemas.openxmlformats.org/drawingml/2006/main" xmlns:p="http://schemas.openxmlformats.org/presentationml/2006/main" xmlns:r="http://schemas.openxmlformats.org/officeDocument/2006/relationships">
-  <p:cSld>
-    <p:bg>
-      <p:bgPr>
-        <a:solidFill>
-          <a:srgbClr val="FFFFFF"/>
-        </a:solidFill>
-        <a:effectLst/>
-      </p:bgPr>
-    </p:bg>
-    <p:spTree>
-      <p:nvGrpSpPr>
-        <p:cNvPr id="1" name=""/>
-        <p:cNvGrpSpPr/>
-        <p:nvPr/>
-      </p:nvGrpSpPr>
-      <p:grpSpPr/>
-      <p:sp>
-        <p:nvSpPr>
-          <p:cNvPr id="2" name="Rectangle 1"/>
-          <p:cNvSpPr/>
-          <p:nvPr/>
-        </p:nvSpPr>
-        <p:spPr>
-          <a:xfrm>
-            <a:off x="384048" y="420624"/>
-            <a:ext cx="77724" cy="475488"/>
-          </a:xfrm>
-          <a:prstGeom prst="rect">
-            <a:avLst/>
-          </a:prstGeom>
-          <a:solidFill>
-            <a:srgbClr val="E8833A"/>
-          </a:solidFill>
-          <a:ln>
-            <a:noFill/>
-          </a:ln>
-          <a:effectLst/>
-        </p:spPr>
-        <p:style>
-          <a:lnRef idx="1">
-            <a:schemeClr val="accent1"/>
-          </a:lnRef>
-          <a:fillRef idx="3">
-            <a:schemeClr val="accent1"/>
-          </a:fillRef>
-          <a:effectRef idx="2">
-            <a:schemeClr val="accent1"/>
-          </a:effectRef>
-          <a:fontRef idx="minor">
-            <a:schemeClr val="lt1"/>
-          </a:fontRef>
-        </p:style>
-        <p:txBody>
-          <a:bodyPr rtlCol="0" anchor="ctr"/>
-          <a:lstStyle/>
-          <a:p>
-            <a:pPr algn="ctr"/>
-          </a:p>
-        </p:txBody>
-      </p:sp>
-      <p:sp>
-        <p:nvSpPr>
-          <p:cNvPr id="3" name="TextBox 2"/>
-          <p:cNvSpPr txBox="1"/>
-          <p:nvPr/>
-        </p:nvSpPr>
-        <p:spPr>
-          <a:xfrm>
-            <a:off x="566928" y="329184"/>
-            <a:ext cx="11064240" cy="713232"/>
-          </a:xfrm>
-          <a:prstGeom prst="rect">
-            <a:avLst/>
-          </a:prstGeom>
-          <a:noFill/>
-        </p:spPr>
-        <p:txBody>
-          <a:bodyPr wrap="square" anchor="ctr" lIns="0" rIns="0" tIns="0" bIns="0">
-            <a:spAutoFit/>
-          </a:bodyPr>
-          <a:lstStyle/>
-          <a:p>
-            <a:pPr algn="l">
-              <a:lnSpc>
-                <a:spcPct val="105000"/>
-              </a:lnSpc>
-            </a:pPr>
-            <a:r>
-              <a:rPr sz="2700" b="1">
-                <a:solidFill>
-                  <a:srgbClr val="0B2A4A"/>
-                </a:solidFill>
-                <a:latin typeface="Arial"/>
-                <a:ea typeface="微软雅黑"/>
-              </a:rPr>
-              <a:t>16 场景完整数据（摘要）</a:t>
-            </a:r>
-          </a:p>
-        </p:txBody>
-      </p:sp>
-      <p:sp>
-        <p:nvSpPr>
-          <p:cNvPr id="4" name="Rectangle 3"/>
-          <p:cNvSpPr/>
-          <p:nvPr/>
-        </p:nvSpPr>
-        <p:spPr>
-          <a:xfrm>
-            <a:off x="566928" y="1298448"/>
-            <a:ext cx="32004" cy="365760"/>
-          </a:xfrm>
-          <a:prstGeom prst="rect">
-            <a:avLst/>
-          </a:prstGeom>
-          <a:solidFill>
-            <a:srgbClr val="1F5C99"/>
-          </a:solidFill>
-          <a:ln>
-            <a:noFill/>
-          </a:ln>
-          <a:effectLst/>
-        </p:spPr>
-        <p:style>
-          <a:lnRef idx="1">
-            <a:schemeClr val="accent1"/>
-          </a:lnRef>
-          <a:fillRef idx="3">
-            <a:schemeClr val="accent1"/>
-          </a:fillRef>
-          <a:effectRef idx="2">
-            <a:schemeClr val="accent1"/>
-          </a:effectRef>
-          <a:fontRef idx="minor">
-            <a:schemeClr val="lt1"/>
-          </a:fontRef>
-        </p:style>
-        <p:txBody>
-          <a:bodyPr rtlCol="0" anchor="ctr"/>
-          <a:lstStyle/>
-          <a:p>
-            <a:pPr algn="ctr"/>
-          </a:p>
-        </p:txBody>
-      </p:sp>
-      <p:sp>
-        <p:nvSpPr>
-          <p:cNvPr id="5" name="TextBox 4"/>
-          <p:cNvSpPr txBox="1"/>
-          <p:nvPr/>
-        </p:nvSpPr>
-        <p:spPr>
-          <a:xfrm>
-            <a:off x="713232" y="1261872"/>
-            <a:ext cx="10744200" cy="438912"/>
-          </a:xfrm>
-          <a:prstGeom prst="rect">
-            <a:avLst/>
-          </a:prstGeom>
-          <a:noFill/>
-        </p:spPr>
-        <p:txBody>
-          <a:bodyPr wrap="square" anchor="ctr" lIns="0" rIns="0" tIns="0" bIns="0">
-            <a:spAutoFit/>
-          </a:bodyPr>
-          <a:lstStyle/>
-          <a:p>
-            <a:pPr algn="l">
-              <a:lnSpc>
-                <a:spcPct val="110000"/>
-              </a:lnSpc>
-            </a:pPr>
-            <a:r>
-              <a:rPr sz="1800" b="1">
-                <a:solidFill>
-                  <a:srgbClr val="1F5C99"/>
-                </a:solidFill>
-                <a:latin typeface="Arial"/>
-                <a:ea typeface="微软雅黑"/>
-              </a:rPr>
-              <a:t>有效吞吐 / P99 / Pod E2E P99 / 队列堆积峰值（n=3 中位数）</a:t>
-            </a:r>
-          </a:p>
-        </p:txBody>
-      </p:sp>
-      <p:graphicFrame>
-        <p:nvGraphicFramePr>
-          <p:cNvPr id="6" name="Table 5"/>
-          <p:cNvGraphicFramePr>
-            <a:graphicFrameLocks noGrp="1"/>
-          </p:cNvGraphicFramePr>
-          <p:nvPr/>
-        </p:nvGraphicFramePr>
-        <p:xfrm>
-          <a:off x="566928" y="1828800"/>
-          <a:ext cx="11064240" cy="2944368"/>
-        </p:xfrm>
-        <a:graphic>
-          <a:graphicData uri="http://schemas.openxmlformats.org/drawingml/2006/table">
-            <a:tbl>
-              <a:tblPr firstRow="1" bandRow="1">
-                <a:tableStyleId>{5C22544A-7EE6-4342-B048-85BDC9FD1C3A}</a:tableStyleId>
-              </a:tblPr>
-              <a:tblGrid>
-                <a:gridCol w="2212848"/>
-                <a:gridCol w="2212848"/>
-                <a:gridCol w="2212848"/>
-                <a:gridCol w="2212848"/>
-                <a:gridCol w="2212848"/>
-              </a:tblGrid>
-              <a:tr h="420624">
-                <a:tc>
-                  <a:txBody>
-                    <a:bodyPr wrap="square"/>
-                    <a:lstStyle/>
-                    <a:p>
-                      <a:pPr algn="l"/>
-                      <a:r>
-                        <a:rPr sz="1200" b="1">
-                          <a:solidFill>
-                            <a:srgbClr val="FFFFFF"/>
-                          </a:solidFill>
-                          <a:latin typeface="Arial"/>
-                          <a:ea typeface="微软雅黑"/>
-                        </a:rPr>
-                        <a:t>场景</a:t>
-                      </a:r>
-                    </a:p>
-                  </a:txBody>
-                  <a:tcPr marL="54864" marR="54864" marT="18288" marB="18288" anchor="ctr">
-                    <a:solidFill>
-                      <a:srgbClr val="0B2A4A"/>
-                    </a:solidFill>
-                  </a:tcPr>
-                </a:tc>
-                <a:tc>
-                  <a:txBody>
-                    <a:bodyPr wrap="square"/>
-                    <a:lstStyle/>
-                    <a:p>
-                      <a:pPr algn="ctr"/>
-                      <a:r>
-                        <a:rPr sz="1200" b="1">
-                          <a:solidFill>
-                            <a:srgbClr val="FFFFFF"/>
-                          </a:solidFill>
-                          <a:latin typeface="Arial"/>
-                          <a:ea typeface="微软雅黑"/>
-                        </a:rPr>
-                        <a:t>ENO 吞吐</a:t>
-                      </a:r>
-                    </a:p>
-                  </a:txBody>
-                  <a:tcPr marL="54864" marR="54864" marT="18288" marB="18288" anchor="ctr">
-                    <a:solidFill>
-                      <a:srgbClr val="0B2A4A"/>
-                    </a:solidFill>
-                  </a:tcPr>
-                </a:tc>
-                <a:tc>
-                  <a:txBody>
-                    <a:bodyPr wrap="square"/>
-                    <a:lstStyle/>
-                    <a:p>
-                      <a:pPr algn="ctr"/>
-                      <a:r>
-                        <a:rPr sz="1200" b="1">
-                          <a:solidFill>
-                            <a:srgbClr val="FFFFFF"/>
-                          </a:solidFill>
-                          <a:latin typeface="Arial"/>
-                          <a:ea typeface="微软雅黑"/>
-                        </a:rPr>
-                        <a:t>Gödel 吞吐</a:t>
-                      </a:r>
-                    </a:p>
-                  </a:txBody>
-                  <a:tcPr marL="54864" marR="54864" marT="18288" marB="18288" anchor="ctr">
-                    <a:solidFill>
-                      <a:srgbClr val="0B2A4A"/>
-                    </a:solidFill>
-                  </a:tcPr>
-                </a:tc>
-                <a:tc>
-                  <a:txBody>
-                    <a:bodyPr wrap="square"/>
-                    <a:lstStyle/>
-                    <a:p>
-                      <a:pPr algn="ctr"/>
-                      <a:r>
-                        <a:rPr sz="1200" b="1">
-                          <a:solidFill>
-                            <a:srgbClr val="FFFFFF"/>
-                          </a:solidFill>
-                          <a:latin typeface="Arial"/>
-                          <a:ea typeface="微软雅黑"/>
-                        </a:rPr>
-                        <a:t>ENO P99</a:t>
-                      </a:r>
-                    </a:p>
-                  </a:txBody>
-                  <a:tcPr marL="54864" marR="54864" marT="18288" marB="18288" anchor="ctr">
-                    <a:solidFill>
-                      <a:srgbClr val="0B2A4A"/>
-                    </a:solidFill>
-                  </a:tcPr>
-                </a:tc>
-                <a:tc>
-                  <a:txBody>
-                    <a:bodyPr wrap="square"/>
-                    <a:lstStyle/>
-                    <a:p>
-                      <a:pPr algn="ctr"/>
-                      <a:r>
-                        <a:rPr sz="1200" b="1">
-                          <a:solidFill>
-                            <a:srgbClr val="FFFFFF"/>
-                          </a:solidFill>
-                          <a:latin typeface="Arial"/>
-                          <a:ea typeface="微软雅黑"/>
-                        </a:rPr>
-                        <a:t>Gödel P99</a:t>
-                      </a:r>
-                    </a:p>
-                  </a:txBody>
-                  <a:tcPr marL="54864" marR="54864" marT="18288" marB="18288" anchor="ctr">
-                    <a:solidFill>
-                      <a:srgbClr val="0B2A4A"/>
-                    </a:solidFill>
-                  </a:tcPr>
-                </a:tc>
-              </a:tr>
-              <a:tr h="420624">
-                <a:tc>
-                  <a:txBody>
-                    <a:bodyPr wrap="square"/>
-                    <a:lstStyle/>
-                    <a:p>
-                      <a:pPr algn="l"/>
-                      <a:r>
-                        <a:rPr sz="1200" b="0">
-                          <a:solidFill>
-                            <a:srgbClr val="333333"/>
-                          </a:solidFill>
-                          <a:latin typeface="Arial"/>
-                          <a:ea typeface="微软雅黑"/>
-                        </a:rPr>
-                        <a:t>s2/w2</a:t>
-                      </a:r>
-                    </a:p>
-                  </a:txBody>
-                  <a:tcPr marL="54864" marR="54864" marT="18288" marB="18288" anchor="ctr">
-                    <a:solidFill>
-                      <a:srgbClr val="F5F7FA"/>
-                    </a:solidFill>
-                  </a:tcPr>
-                </a:tc>
-                <a:tc>
-                  <a:txBody>
-                    <a:bodyPr wrap="square"/>
-                    <a:lstStyle/>
-                    <a:p>
-                      <a:pPr algn="ctr"/>
-                      <a:r>
-                        <a:rPr sz="1200" b="0">
-                          <a:solidFill>
-                            <a:srgbClr val="333333"/>
-                          </a:solidFill>
-                          <a:latin typeface="Arial"/>
-                          <a:ea typeface="微软雅黑"/>
-                        </a:rPr>
-                        <a:t>331.1</a:t>
-                      </a:r>
-                    </a:p>
-                  </a:txBody>
-                  <a:tcPr marL="54864" marR="54864" marT="18288" marB="18288" anchor="ctr">
-                    <a:solidFill>
-                      <a:srgbClr val="F5F7FA"/>
-                    </a:solidFill>
-                  </a:tcPr>
-                </a:tc>
-                <a:tc>
-                  <a:txBody>
-                    <a:bodyPr wrap="square"/>
-                    <a:lstStyle/>
-                    <a:p>
-                      <a:pPr algn="ctr"/>
-                      <a:r>
-                        <a:rPr sz="1200" b="0">
-                          <a:solidFill>
-                            <a:srgbClr val="333333"/>
-                          </a:solidFill>
-                          <a:latin typeface="Arial"/>
-                          <a:ea typeface="微软雅黑"/>
-                        </a:rPr>
-                        <a:t>324.7</a:t>
-                      </a:r>
-                    </a:p>
-                  </a:txBody>
-                  <a:tcPr marL="54864" marR="54864" marT="18288" marB="18288" anchor="ctr">
-                    <a:solidFill>
-                      <a:srgbClr val="F5F7FA"/>
-                    </a:solidFill>
-                  </a:tcPr>
-                </a:tc>
-                <a:tc>
-                  <a:txBody>
-                    <a:bodyPr wrap="square"/>
-                    <a:lstStyle/>
-                    <a:p>
-                      <a:pPr algn="ctr"/>
-                      <a:r>
-                        <a:rPr sz="1200" b="0">
-                          <a:solidFill>
-                            <a:srgbClr val="333333"/>
-                          </a:solidFill>
-                          <a:latin typeface="Arial"/>
-                          <a:ea typeface="微软雅黑"/>
-                        </a:rPr>
-                        <a:t>0.16</a:t>
-                      </a:r>
-                    </a:p>
-                  </a:txBody>
-                  <a:tcPr marL="54864" marR="54864" marT="18288" marB="18288" anchor="ctr">
-                    <a:solidFill>
-                      <a:srgbClr val="F5F7FA"/>
-                    </a:solidFill>
-                  </a:tcPr>
-                </a:tc>
-                <a:tc>
-                  <a:txBody>
-                    <a:bodyPr wrap="square"/>
-                    <a:lstStyle/>
-                    <a:p>
-                      <a:pPr algn="ctr"/>
-                      <a:r>
-                        <a:rPr sz="1200" b="0">
-                          <a:solidFill>
-                            <a:srgbClr val="333333"/>
-                          </a:solidFill>
-                          <a:latin typeface="Arial"/>
-                          <a:ea typeface="微软雅黑"/>
-                        </a:rPr>
-                        <a:t>0.11</a:t>
-                      </a:r>
-                    </a:p>
-                  </a:txBody>
-                  <a:tcPr marL="54864" marR="54864" marT="18288" marB="18288" anchor="ctr">
-                    <a:solidFill>
-                      <a:srgbClr val="F5F7FA"/>
-                    </a:solidFill>
-                  </a:tcPr>
-                </a:tc>
-              </a:tr>
-              <a:tr h="420624">
-                <a:tc>
-                  <a:txBody>
-                    <a:bodyPr wrap="square"/>
-                    <a:lstStyle/>
-                    <a:p>
-                      <a:pPr algn="l"/>
-                      <a:r>
-                        <a:rPr sz="1200" b="0">
-                          <a:solidFill>
-                            <a:srgbClr val="333333"/>
-                          </a:solidFill>
-                          <a:latin typeface="Arial"/>
-                          <a:ea typeface="微软雅黑"/>
-                        </a:rPr>
-                        <a:t>s2/w3</a:t>
-                      </a:r>
-                    </a:p>
-                  </a:txBody>
-                  <a:tcPr marL="54864" marR="54864" marT="18288" marB="18288" anchor="ctr">
-                    <a:solidFill>
-                      <a:srgbClr val="FFFFFF"/>
-                    </a:solidFill>
-                  </a:tcPr>
-                </a:tc>
-                <a:tc>
-                  <a:txBody>
-                    <a:bodyPr wrap="square"/>
-                    <a:lstStyle/>
-                    <a:p>
-                      <a:pPr algn="ctr"/>
-                      <a:r>
-                        <a:rPr sz="1200" b="0">
-                          <a:solidFill>
-                            <a:srgbClr val="333333"/>
-                          </a:solidFill>
-                          <a:latin typeface="Arial"/>
-                          <a:ea typeface="微软雅黑"/>
-                        </a:rPr>
-                        <a:t>352.1</a:t>
-                      </a:r>
-                    </a:p>
-                  </a:txBody>
-                  <a:tcPr marL="54864" marR="54864" marT="18288" marB="18288" anchor="ctr">
-                    <a:solidFill>
-                      <a:srgbClr val="FFFFFF"/>
-                    </a:solidFill>
-                  </a:tcPr>
-                </a:tc>
-                <a:tc>
-                  <a:txBody>
-                    <a:bodyPr wrap="square"/>
-                    <a:lstStyle/>
-                    <a:p>
-                      <a:pPr algn="ctr"/>
-                      <a:r>
-                        <a:rPr sz="1200" b="0">
-                          <a:solidFill>
-                            <a:srgbClr val="333333"/>
-                          </a:solidFill>
-                          <a:latin typeface="Arial"/>
-                          <a:ea typeface="微软雅黑"/>
-                        </a:rPr>
-                        <a:t>286.5</a:t>
-                      </a:r>
-                    </a:p>
-                  </a:txBody>
-                  <a:tcPr marL="54864" marR="54864" marT="18288" marB="18288" anchor="ctr">
-                    <a:solidFill>
-                      <a:srgbClr val="FFFFFF"/>
-                    </a:solidFill>
-                  </a:tcPr>
-                </a:tc>
-                <a:tc>
-                  <a:txBody>
-                    <a:bodyPr wrap="square"/>
-                    <a:lstStyle/>
-                    <a:p>
-                      <a:pPr algn="ctr"/>
-                      <a:r>
-                        <a:rPr sz="1200" b="0">
-                          <a:solidFill>
-                            <a:srgbClr val="333333"/>
-                          </a:solidFill>
-                          <a:latin typeface="Arial"/>
-                          <a:ea typeface="微软雅黑"/>
-                        </a:rPr>
-                        <a:t>4.00</a:t>
-                      </a:r>
-                    </a:p>
-                  </a:txBody>
-                  <a:tcPr marL="54864" marR="54864" marT="18288" marB="18288" anchor="ctr">
-                    <a:solidFill>
-                      <a:srgbClr val="FFFFFF"/>
-                    </a:solidFill>
-                  </a:tcPr>
-                </a:tc>
-                <a:tc>
-                  <a:txBody>
-                    <a:bodyPr wrap="square"/>
-                    <a:lstStyle/>
-                    <a:p>
-                      <a:pPr algn="ctr"/>
-                      <a:r>
-                        <a:rPr sz="1200" b="0">
-                          <a:solidFill>
-                            <a:srgbClr val="333333"/>
-                          </a:solidFill>
-                          <a:latin typeface="Arial"/>
-                          <a:ea typeface="微软雅黑"/>
-                        </a:rPr>
-                        <a:t>23.48</a:t>
-                      </a:r>
-                    </a:p>
-                  </a:txBody>
-                  <a:tcPr marL="54864" marR="54864" marT="18288" marB="18288" anchor="ctr">
-                    <a:solidFill>
-                      <a:srgbClr val="FFFFFF"/>
-                    </a:solidFill>
-                  </a:tcPr>
-                </a:tc>
-              </a:tr>
-              <a:tr h="420624">
-                <a:tc>
-                  <a:txBody>
-                    <a:bodyPr wrap="square"/>
-                    <a:lstStyle/>
-                    <a:p>
-                      <a:pPr algn="l"/>
-                      <a:r>
-                        <a:rPr sz="1200" b="0">
-                          <a:solidFill>
-                            <a:srgbClr val="333333"/>
-                          </a:solidFill>
-                          <a:latin typeface="Arial"/>
-                          <a:ea typeface="微软雅黑"/>
-                        </a:rPr>
-                        <a:t>s3/w3 inst1</a:t>
-                      </a:r>
-                    </a:p>
-                  </a:txBody>
-                  <a:tcPr marL="54864" marR="54864" marT="18288" marB="18288" anchor="ctr">
-                    <a:solidFill>
-                      <a:srgbClr val="F5F7FA"/>
-                    </a:solidFill>
-                  </a:tcPr>
-                </a:tc>
-                <a:tc>
-                  <a:txBody>
-                    <a:bodyPr wrap="square"/>
-                    <a:lstStyle/>
-                    <a:p>
-                      <a:pPr algn="ctr"/>
-                      <a:r>
-                        <a:rPr sz="1200" b="0">
-                          <a:solidFill>
-                            <a:srgbClr val="333333"/>
-                          </a:solidFill>
-                          <a:latin typeface="Arial"/>
-                          <a:ea typeface="微软雅黑"/>
-                        </a:rPr>
-                        <a:t>297.6</a:t>
-                      </a:r>
-                    </a:p>
-                  </a:txBody>
-                  <a:tcPr marL="54864" marR="54864" marT="18288" marB="18288" anchor="ctr">
-                    <a:solidFill>
-                      <a:srgbClr val="F5F7FA"/>
-                    </a:solidFill>
-                  </a:tcPr>
-                </a:tc>
-                <a:tc>
-                  <a:txBody>
-                    <a:bodyPr wrap="square"/>
-                    <a:lstStyle/>
-                    <a:p>
-                      <a:pPr algn="ctr"/>
-                      <a:r>
-                        <a:rPr sz="1200" b="0">
-                          <a:solidFill>
-                            <a:srgbClr val="333333"/>
-                          </a:solidFill>
-                          <a:latin typeface="Arial"/>
-                          <a:ea typeface="微软雅黑"/>
-                        </a:rPr>
-                        <a:t>283.3</a:t>
-                      </a:r>
-                    </a:p>
-                  </a:txBody>
-                  <a:tcPr marL="54864" marR="54864" marT="18288" marB="18288" anchor="ctr">
-                    <a:solidFill>
-                      <a:srgbClr val="F5F7FA"/>
-                    </a:solidFill>
-                  </a:tcPr>
-                </a:tc>
-                <a:tc>
-                  <a:txBody>
-                    <a:bodyPr wrap="square"/>
-                    <a:lstStyle/>
-                    <a:p>
-                      <a:pPr algn="ctr"/>
-                      <a:r>
-                        <a:rPr sz="1200" b="0">
-                          <a:solidFill>
-                            <a:srgbClr val="333333"/>
-                          </a:solidFill>
-                          <a:latin typeface="Arial"/>
-                          <a:ea typeface="微软雅黑"/>
-                        </a:rPr>
-                        <a:t>16.22</a:t>
-                      </a:r>
-                    </a:p>
-                  </a:txBody>
-                  <a:tcPr marL="54864" marR="54864" marT="18288" marB="18288" anchor="ctr">
-                    <a:solidFill>
-                      <a:srgbClr val="F5F7FA"/>
-                    </a:solidFill>
-                  </a:tcPr>
-                </a:tc>
-                <a:tc>
-                  <a:txBody>
-                    <a:bodyPr wrap="square"/>
-                    <a:lstStyle/>
-                    <a:p>
-                      <a:pPr algn="ctr"/>
-                      <a:r>
-                        <a:rPr sz="1200" b="0">
-                          <a:solidFill>
-                            <a:srgbClr val="333333"/>
-                          </a:solidFill>
-                          <a:latin typeface="Arial"/>
-                          <a:ea typeface="微软雅黑"/>
-                        </a:rPr>
-                        <a:t>32.57</a:t>
-                      </a:r>
-                    </a:p>
-                  </a:txBody>
-                  <a:tcPr marL="54864" marR="54864" marT="18288" marB="18288" anchor="ctr">
-                    <a:solidFill>
-                      <a:srgbClr val="F5F7FA"/>
-                    </a:solidFill>
-                  </a:tcPr>
-                </a:tc>
-              </a:tr>
-              <a:tr h="420624">
-                <a:tc>
-                  <a:txBody>
-                    <a:bodyPr wrap="square"/>
-                    <a:lstStyle/>
-                    <a:p>
-                      <a:pPr algn="l"/>
-                      <a:r>
-                        <a:rPr sz="1200" b="0">
-                          <a:solidFill>
-                            <a:srgbClr val="333333"/>
-                          </a:solidFill>
-                          <a:latin typeface="Arial"/>
-                          <a:ea typeface="微软雅黑"/>
-                        </a:rPr>
-                        <a:t>s3/w3 inst3</a:t>
-                      </a:r>
-                    </a:p>
-                  </a:txBody>
-                  <a:tcPr marL="54864" marR="54864" marT="18288" marB="18288" anchor="ctr">
-                    <a:solidFill>
-                      <a:srgbClr val="FFFFFF"/>
-                    </a:solidFill>
-                  </a:tcPr>
-                </a:tc>
-                <a:tc>
-                  <a:txBody>
-                    <a:bodyPr wrap="square"/>
-                    <a:lstStyle/>
-                    <a:p>
-                      <a:pPr algn="ctr"/>
-                      <a:r>
-                        <a:rPr sz="1200" b="0">
-                          <a:solidFill>
-                            <a:srgbClr val="333333"/>
-                          </a:solidFill>
-                          <a:latin typeface="Arial"/>
-                          <a:ea typeface="微软雅黑"/>
-                        </a:rPr>
-                        <a:t>349.7</a:t>
-                      </a:r>
-                    </a:p>
-                  </a:txBody>
-                  <a:tcPr marL="54864" marR="54864" marT="18288" marB="18288" anchor="ctr">
-                    <a:solidFill>
-                      <a:srgbClr val="FFFFFF"/>
-                    </a:solidFill>
-                  </a:tcPr>
-                </a:tc>
-                <a:tc>
-                  <a:txBody>
-                    <a:bodyPr wrap="square"/>
-                    <a:lstStyle/>
-                    <a:p>
-                      <a:pPr algn="ctr"/>
-                      <a:r>
-                        <a:rPr sz="1200" b="0">
-                          <a:solidFill>
-                            <a:srgbClr val="333333"/>
-                          </a:solidFill>
-                          <a:latin typeface="Arial"/>
-                          <a:ea typeface="微软雅黑"/>
-                        </a:rPr>
-                        <a:t>287.4</a:t>
-                      </a:r>
-                    </a:p>
-                  </a:txBody>
-                  <a:tcPr marL="54864" marR="54864" marT="18288" marB="18288" anchor="ctr">
-                    <a:solidFill>
-                      <a:srgbClr val="FFFFFF"/>
-                    </a:solidFill>
-                  </a:tcPr>
-                </a:tc>
-                <a:tc>
-                  <a:txBody>
-                    <a:bodyPr wrap="square"/>
-                    <a:lstStyle/>
-                    <a:p>
-                      <a:pPr algn="ctr"/>
-                      <a:r>
-                        <a:rPr sz="1200" b="0">
-                          <a:solidFill>
-                            <a:srgbClr val="333333"/>
-                          </a:solidFill>
-                          <a:latin typeface="Arial"/>
-                          <a:ea typeface="微软雅黑"/>
-                        </a:rPr>
-                        <a:t>0.13</a:t>
-                      </a:r>
-                    </a:p>
-                  </a:txBody>
-                  <a:tcPr marL="54864" marR="54864" marT="18288" marB="18288" anchor="ctr">
-                    <a:solidFill>
-                      <a:srgbClr val="FFFFFF"/>
-                    </a:solidFill>
-                  </a:tcPr>
-                </a:tc>
-                <a:tc>
-                  <a:txBody>
-                    <a:bodyPr wrap="square"/>
-                    <a:lstStyle/>
-                    <a:p>
-                      <a:pPr algn="ctr"/>
-                      <a:r>
-                        <a:rPr sz="1200" b="0">
-                          <a:solidFill>
-                            <a:srgbClr val="333333"/>
-                          </a:solidFill>
-                          <a:latin typeface="Arial"/>
-                          <a:ea typeface="微软雅黑"/>
-                        </a:rPr>
-                        <a:t>0.15</a:t>
-                      </a:r>
-                    </a:p>
-                  </a:txBody>
-                  <a:tcPr marL="54864" marR="54864" marT="18288" marB="18288" anchor="ctr">
-                    <a:solidFill>
-                      <a:srgbClr val="FFFFFF"/>
-                    </a:solidFill>
-                  </a:tcPr>
-                </a:tc>
-              </a:tr>
-              <a:tr h="420624">
-                <a:tc>
-                  <a:txBody>
-                    <a:bodyPr wrap="square"/>
-                    <a:lstStyle/>
-                    <a:p>
-                      <a:pPr algn="l"/>
-                      <a:r>
-                        <a:rPr sz="1200" b="0">
-                          <a:solidFill>
-                            <a:srgbClr val="333333"/>
-                          </a:solidFill>
-                          <a:latin typeface="Arial"/>
-                          <a:ea typeface="微软雅黑"/>
-                        </a:rPr>
-                        <a:t>s4/w3 inst3</a:t>
-                      </a:r>
-                    </a:p>
-                  </a:txBody>
-                  <a:tcPr marL="54864" marR="54864" marT="18288" marB="18288" anchor="ctr">
-                    <a:solidFill>
-                      <a:srgbClr val="F5F7FA"/>
-                    </a:solidFill>
-                  </a:tcPr>
-                </a:tc>
-                <a:tc>
-                  <a:txBody>
-                    <a:bodyPr wrap="square"/>
-                    <a:lstStyle/>
-                    <a:p>
-                      <a:pPr algn="ctr"/>
-                      <a:r>
-                        <a:rPr sz="1200" b="0">
-                          <a:solidFill>
-                            <a:srgbClr val="333333"/>
-                          </a:solidFill>
-                          <a:latin typeface="Arial"/>
-                          <a:ea typeface="微软雅黑"/>
-                        </a:rPr>
-                        <a:t>296.7</a:t>
-                      </a:r>
-                    </a:p>
-                  </a:txBody>
-                  <a:tcPr marL="54864" marR="54864" marT="18288" marB="18288" anchor="ctr">
-                    <a:solidFill>
-                      <a:srgbClr val="F5F7FA"/>
-                    </a:solidFill>
-                  </a:tcPr>
-                </a:tc>
-                <a:tc>
-                  <a:txBody>
-                    <a:bodyPr wrap="square"/>
-                    <a:lstStyle/>
-                    <a:p>
-                      <a:pPr algn="ctr"/>
-                      <a:r>
-                        <a:rPr sz="1200" b="0">
-                          <a:solidFill>
-                            <a:srgbClr val="333333"/>
-                          </a:solidFill>
-                          <a:latin typeface="Arial"/>
-                          <a:ea typeface="微软雅黑"/>
-                        </a:rPr>
-                        <a:t>280.9</a:t>
-                      </a:r>
-                    </a:p>
-                  </a:txBody>
-                  <a:tcPr marL="54864" marR="54864" marT="18288" marB="18288" anchor="ctr">
-                    <a:solidFill>
-                      <a:srgbClr val="F5F7FA"/>
-                    </a:solidFill>
-                  </a:tcPr>
-                </a:tc>
-                <a:tc>
-                  <a:txBody>
-                    <a:bodyPr wrap="square"/>
-                    <a:lstStyle/>
-                    <a:p>
-                      <a:pPr algn="ctr"/>
-                      <a:r>
-                        <a:rPr sz="1200" b="0">
-                          <a:solidFill>
-                            <a:srgbClr val="333333"/>
-                          </a:solidFill>
-                          <a:latin typeface="Arial"/>
-                          <a:ea typeface="微软雅黑"/>
-                        </a:rPr>
-                        <a:t>0.19</a:t>
-                      </a:r>
-                    </a:p>
-                  </a:txBody>
-                  <a:tcPr marL="54864" marR="54864" marT="18288" marB="18288" anchor="ctr">
-                    <a:solidFill>
-                      <a:srgbClr val="F5F7FA"/>
-                    </a:solidFill>
-                  </a:tcPr>
-                </a:tc>
-                <a:tc>
-                  <a:txBody>
-                    <a:bodyPr wrap="square"/>
-                    <a:lstStyle/>
-                    <a:p>
-                      <a:pPr algn="ctr"/>
-                      <a:r>
-                        <a:rPr sz="1200" b="0">
-                          <a:solidFill>
-                            <a:srgbClr val="333333"/>
-                          </a:solidFill>
-                          <a:latin typeface="Arial"/>
-                          <a:ea typeface="微软雅黑"/>
-                        </a:rPr>
-                        <a:t>0.28</a:t>
-                      </a:r>
-                    </a:p>
-                  </a:txBody>
-                  <a:tcPr marL="54864" marR="54864" marT="18288" marB="18288" anchor="ctr">
-                    <a:solidFill>
-                      <a:srgbClr val="F5F7FA"/>
-                    </a:solidFill>
-                  </a:tcPr>
-                </a:tc>
-              </a:tr>
-              <a:tr h="420624">
-                <a:tc>
-                  <a:txBody>
-                    <a:bodyPr wrap="square"/>
-                    <a:lstStyle/>
-                    <a:p>
-                      <a:pPr algn="l"/>
-                      <a:r>
-                        <a:rPr sz="1200" b="0">
-                          <a:solidFill>
-                            <a:srgbClr val="333333"/>
-                          </a:solidFill>
-                          <a:latin typeface="Arial"/>
-                          <a:ea typeface="微软雅黑"/>
-                        </a:rPr>
-                        <a:t>s4/w7 inst3</a:t>
-                      </a:r>
-                    </a:p>
-                  </a:txBody>
-                  <a:tcPr marL="54864" marR="54864" marT="18288" marB="18288" anchor="ctr">
-                    <a:solidFill>
-                      <a:srgbClr val="FFFFFF"/>
-                    </a:solidFill>
-                  </a:tcPr>
-                </a:tc>
-                <a:tc>
-                  <a:txBody>
-                    <a:bodyPr wrap="square"/>
-                    <a:lstStyle/>
-                    <a:p>
-                      <a:pPr algn="ctr"/>
-                      <a:r>
-                        <a:rPr sz="1200" b="0">
-                          <a:solidFill>
-                            <a:srgbClr val="333333"/>
-                          </a:solidFill>
-                          <a:latin typeface="Arial"/>
-                          <a:ea typeface="微软雅黑"/>
-                        </a:rPr>
-                        <a:t>271.7</a:t>
-                      </a:r>
-                    </a:p>
-                  </a:txBody>
-                  <a:tcPr marL="54864" marR="54864" marT="18288" marB="18288" anchor="ctr">
-                    <a:solidFill>
-                      <a:srgbClr val="FFFFFF"/>
-                    </a:solidFill>
-                  </a:tcPr>
-                </a:tc>
-                <a:tc>
-                  <a:txBody>
-                    <a:bodyPr wrap="square"/>
-                    <a:lstStyle/>
-                    <a:p>
-                      <a:pPr algn="ctr"/>
-                      <a:r>
-                        <a:rPr sz="1200" b="0">
-                          <a:solidFill>
-                            <a:srgbClr val="333333"/>
-                          </a:solidFill>
-                          <a:latin typeface="Arial"/>
-                          <a:ea typeface="微软雅黑"/>
-                        </a:rPr>
-                        <a:t>271.7</a:t>
-                      </a:r>
-                    </a:p>
-                  </a:txBody>
-                  <a:tcPr marL="54864" marR="54864" marT="18288" marB="18288" anchor="ctr">
-                    <a:solidFill>
-                      <a:srgbClr val="FFFFFF"/>
-                    </a:solidFill>
-                  </a:tcPr>
-                </a:tc>
-                <a:tc>
-                  <a:txBody>
-                    <a:bodyPr wrap="square"/>
-                    <a:lstStyle/>
-                    <a:p>
-                      <a:pPr algn="ctr"/>
-                      <a:r>
-                        <a:rPr sz="1200" b="0">
-                          <a:solidFill>
-                            <a:srgbClr val="333333"/>
-                          </a:solidFill>
-                          <a:latin typeface="Arial"/>
-                          <a:ea typeface="微软雅黑"/>
-                        </a:rPr>
-                        <a:t>0.06</a:t>
-                      </a:r>
-                    </a:p>
-                  </a:txBody>
-                  <a:tcPr marL="54864" marR="54864" marT="18288" marB="18288" anchor="ctr">
-                    <a:solidFill>
-                      <a:srgbClr val="FFFFFF"/>
-                    </a:solidFill>
-                  </a:tcPr>
-                </a:tc>
-                <a:tc>
-                  <a:txBody>
-                    <a:bodyPr wrap="square"/>
-                    <a:lstStyle/>
-                    <a:p>
-                      <a:pPr algn="ctr"/>
-                      <a:r>
-                        <a:rPr sz="1200" b="0">
-                          <a:solidFill>
-                            <a:srgbClr val="333333"/>
-                          </a:solidFill>
-                          <a:latin typeface="Arial"/>
-                          <a:ea typeface="微软雅黑"/>
-                        </a:rPr>
-                        <a:t>0.06</a:t>
-                      </a:r>
-                    </a:p>
-                  </a:txBody>
-                  <a:tcPr marL="54864" marR="54864" marT="18288" marB="18288" anchor="ctr">
-                    <a:solidFill>
-                      <a:srgbClr val="FFFFFF"/>
-                    </a:solidFill>
-                  </a:tcPr>
-                </a:tc>
-              </a:tr>
-            </a:tbl>
-          </a:graphicData>
-        </a:graphic>
-      </p:graphicFrame>
-      <p:sp>
-        <p:nvSpPr>
-          <p:cNvPr id="7" name="TextBox 6"/>
-          <p:cNvSpPr txBox="1"/>
-          <p:nvPr/>
-        </p:nvSpPr>
-        <p:spPr>
-          <a:xfrm>
-            <a:off x="566928" y="5074920"/>
-            <a:ext cx="10972800" cy="914400"/>
-          </a:xfrm>
-          <a:prstGeom prst="rect">
-            <a:avLst/>
-          </a:prstGeom>
-          <a:noFill/>
-        </p:spPr>
-        <p:txBody>
-          <a:bodyPr wrap="square" anchor="t" lIns="0" rIns="0" tIns="0" bIns="0">
-            <a:spAutoFit/>
-          </a:bodyPr>
-          <a:lstStyle/>
-          <a:p>
-            <a:pPr algn="l">
-              <a:lnSpc>
-                <a:spcPct val="115000"/>
-              </a:lnSpc>
-            </a:pPr>
-            <a:r>
-              <a:rPr sz="1300" b="0">
-                <a:solidFill>
-                  <a:srgbClr val="333333"/>
-                </a:solidFill>
-                <a:latin typeface="Arial"/>
-                <a:ea typeface="微软雅黑"/>
-              </a:rPr>
-              <a:t>▪  完整 16 行见论文表 6-6/6-7/6-8</a:t>
-            </a:r>
-          </a:p>
-          <a:p>
-            <a:pPr algn="l">
-              <a:lnSpc>
-                <a:spcPct val="115000"/>
-              </a:lnSpc>
-              <a:spcBef>
-                <a:spcPts val="600"/>
-              </a:spcBef>
-            </a:pPr>
-            <a:r>
-              <a:rPr sz="1300" b="0">
-                <a:solidFill>
-                  <a:srgbClr val="333333"/>
-                </a:solidFill>
-                <a:latin typeface="Arial"/>
-                <a:ea typeface="微软雅黑"/>
-              </a:rPr>
-              <a:t>▪  数据目录：results/compare/</a:t>
-            </a:r>
-          </a:p>
-          <a:p>
-            <a:pPr algn="l">
-              <a:lnSpc>
-                <a:spcPct val="115000"/>
-              </a:lnSpc>
-              <a:spcBef>
-                <a:spcPts val="600"/>
-              </a:spcBef>
-            </a:pPr>
-            <a:r>
-              <a:rPr sz="1300" b="0">
-                <a:solidFill>
-                  <a:srgbClr val="333333"/>
-                </a:solidFill>
-                <a:latin typeface="Arial"/>
-                <a:ea typeface="微软雅黑"/>
-              </a:rPr>
-              <a:t>▪  统计口径：n=3 中位数</a:t>
-            </a:r>
-          </a:p>
-        </p:txBody>
-      </p:sp>
-      <p:sp>
-        <p:nvSpPr>
-          <p:cNvPr id="8" name="TextBox 7"/>
-          <p:cNvSpPr txBox="1"/>
-          <p:nvPr/>
-        </p:nvSpPr>
-        <p:spPr>
-          <a:xfrm>
-            <a:off x="10780776" y="6345936"/>
-            <a:ext cx="850392" cy="219456"/>
-          </a:xfrm>
-          <a:prstGeom prst="rect">
-            <a:avLst/>
-          </a:prstGeom>
-          <a:noFill/>
-        </p:spPr>
-        <p:txBody>
-          <a:bodyPr wrap="square" anchor="t" lIns="0" rIns="0" tIns="0" bIns="0">
-            <a:spAutoFit/>
-          </a:bodyPr>
-          <a:lstStyle/>
-          <a:p>
-            <a:pPr algn="r"/>
-            <a:r>
-              <a:rPr sz="950" b="0">
-                <a:solidFill>
-                  <a:srgbClr val="566474"/>
-                </a:solidFill>
-                <a:latin typeface="Arial"/>
-                <a:ea typeface="微软雅黑"/>
-              </a:rPr>
-              <a:t>B1</a:t>
-            </a:r>
-          </a:p>
-        </p:txBody>
-      </p:sp>
-    </p:spTree>
-  </p:cSld>
-  <p:clrMapOvr>
-    <a:masterClrMapping/>
-  </p:clrMapOvr>
-</p:sld>
-</file>
-
-<file path=ppt/slides/slide26.xml><?xml version="1.0" encoding="utf-8"?>
-<p:sld xmlns:a="http://schemas.openxmlformats.org/drawingml/2006/main" xmlns:p="http://schemas.openxmlformats.org/presentationml/2006/main" xmlns:r="http://schemas.openxmlformats.org/officeDocument/2006/relationships">
-  <p:cSld>
-    <p:bg>
-      <p:bgPr>
-        <a:solidFill>
-          <a:srgbClr val="FFFFFF"/>
-        </a:solidFill>
-        <a:effectLst/>
-      </p:bgPr>
-    </p:bg>
-    <p:spTree>
-      <p:nvGrpSpPr>
-        <p:cNvPr id="1" name=""/>
-        <p:cNvGrpSpPr/>
-        <p:nvPr/>
-      </p:nvGrpSpPr>
-      <p:grpSpPr/>
-      <p:sp>
-        <p:nvSpPr>
-          <p:cNvPr id="2" name="Rectangle 1"/>
-          <p:cNvSpPr/>
-          <p:nvPr/>
-        </p:nvSpPr>
-        <p:spPr>
-          <a:xfrm>
-            <a:off x="384048" y="420624"/>
-            <a:ext cx="77724" cy="475488"/>
-          </a:xfrm>
-          <a:prstGeom prst="rect">
-            <a:avLst/>
-          </a:prstGeom>
-          <a:solidFill>
-            <a:srgbClr val="E8833A"/>
-          </a:solidFill>
-          <a:ln>
-            <a:noFill/>
-          </a:ln>
-          <a:effectLst/>
-        </p:spPr>
-        <p:style>
-          <a:lnRef idx="1">
-            <a:schemeClr val="accent1"/>
-          </a:lnRef>
-          <a:fillRef idx="3">
-            <a:schemeClr val="accent1"/>
-          </a:fillRef>
-          <a:effectRef idx="2">
-            <a:schemeClr val="accent1"/>
-          </a:effectRef>
-          <a:fontRef idx="minor">
-            <a:schemeClr val="lt1"/>
-          </a:fontRef>
-        </p:style>
-        <p:txBody>
-          <a:bodyPr rtlCol="0" anchor="ctr"/>
-          <a:lstStyle/>
-          <a:p>
-            <a:pPr algn="ctr"/>
-          </a:p>
-        </p:txBody>
-      </p:sp>
-      <p:sp>
-        <p:nvSpPr>
-          <p:cNvPr id="3" name="TextBox 2"/>
-          <p:cNvSpPr txBox="1"/>
-          <p:nvPr/>
-        </p:nvSpPr>
-        <p:spPr>
-          <a:xfrm>
-            <a:off x="566928" y="329184"/>
-            <a:ext cx="11064240" cy="713232"/>
-          </a:xfrm>
-          <a:prstGeom prst="rect">
-            <a:avLst/>
-          </a:prstGeom>
-          <a:noFill/>
-        </p:spPr>
-        <p:txBody>
-          <a:bodyPr wrap="square" anchor="ctr" lIns="0" rIns="0" tIns="0" bIns="0">
-            <a:spAutoFit/>
-          </a:bodyPr>
-          <a:lstStyle/>
-          <a:p>
-            <a:pPr algn="l">
-              <a:lnSpc>
-                <a:spcPct val="105000"/>
-              </a:lnSpc>
-            </a:pPr>
-            <a:r>
-              <a:rPr sz="2700" b="1">
-                <a:solidFill>
-                  <a:srgbClr val="0B2A4A"/>
-                </a:solidFill>
-                <a:latin typeface="Arial"/>
-                <a:ea typeface="微软雅黑"/>
-              </a:rPr>
-              <a:t>6 个指标的精确口径与来源</a:t>
-            </a:r>
-          </a:p>
-        </p:txBody>
-      </p:sp>
-      <p:sp>
-        <p:nvSpPr>
-          <p:cNvPr id="4" name="Rectangle 3"/>
-          <p:cNvSpPr/>
-          <p:nvPr/>
-        </p:nvSpPr>
-        <p:spPr>
-          <a:xfrm>
-            <a:off x="566928" y="1298448"/>
-            <a:ext cx="32004" cy="365760"/>
-          </a:xfrm>
-          <a:prstGeom prst="rect">
-            <a:avLst/>
-          </a:prstGeom>
-          <a:solidFill>
-            <a:srgbClr val="1F5C99"/>
-          </a:solidFill>
-          <a:ln>
-            <a:noFill/>
-          </a:ln>
-          <a:effectLst/>
-        </p:spPr>
-        <p:style>
-          <a:lnRef idx="1">
-            <a:schemeClr val="accent1"/>
-          </a:lnRef>
-          <a:fillRef idx="3">
-            <a:schemeClr val="accent1"/>
-          </a:fillRef>
-          <a:effectRef idx="2">
-            <a:schemeClr val="accent1"/>
-          </a:effectRef>
-          <a:fontRef idx="minor">
-            <a:schemeClr val="lt1"/>
-          </a:fontRef>
-        </p:style>
-        <p:txBody>
-          <a:bodyPr rtlCol="0" anchor="ctr"/>
-          <a:lstStyle/>
-          <a:p>
-            <a:pPr algn="ctr"/>
-          </a:p>
-        </p:txBody>
-      </p:sp>
-      <p:sp>
-        <p:nvSpPr>
-          <p:cNvPr id="5" name="TextBox 4"/>
-          <p:cNvSpPr txBox="1"/>
-          <p:nvPr/>
-        </p:nvSpPr>
-        <p:spPr>
-          <a:xfrm>
-            <a:off x="713232" y="1261872"/>
-            <a:ext cx="10744200" cy="438912"/>
-          </a:xfrm>
-          <a:prstGeom prst="rect">
-            <a:avLst/>
-          </a:prstGeom>
-          <a:noFill/>
-        </p:spPr>
-        <p:txBody>
-          <a:bodyPr wrap="square" anchor="ctr" lIns="0" rIns="0" tIns="0" bIns="0">
-            <a:spAutoFit/>
-          </a:bodyPr>
-          <a:lstStyle/>
-          <a:p>
-            <a:pPr algn="l">
-              <a:lnSpc>
-                <a:spcPct val="110000"/>
-              </a:lnSpc>
-            </a:pPr>
-            <a:r>
-              <a:rPr sz="1800" b="1">
-                <a:solidFill>
-                  <a:srgbClr val="1F5C99"/>
-                </a:solidFill>
-                <a:latin typeface="Arial"/>
-                <a:ea typeface="微软雅黑"/>
-              </a:rPr>
-              <a:t>定义、聚合方式与对应的可复核字段</a:t>
-            </a:r>
-          </a:p>
-        </p:txBody>
-      </p:sp>
-      <p:graphicFrame>
-        <p:nvGraphicFramePr>
-          <p:cNvPr id="6" name="Table 5"/>
-          <p:cNvGraphicFramePr>
-            <a:graphicFrameLocks noGrp="1"/>
-          </p:cNvGraphicFramePr>
-          <p:nvPr/>
-        </p:nvGraphicFramePr>
-        <p:xfrm>
-          <a:off x="566928" y="1828800"/>
-          <a:ext cx="11064240" cy="2944368"/>
-        </p:xfrm>
-        <a:graphic>
-          <a:graphicData uri="http://schemas.openxmlformats.org/drawingml/2006/table">
-            <a:tbl>
-              <a:tblPr firstRow="1" bandRow="1">
-                <a:tableStyleId>{5C22544A-7EE6-4342-B048-85BDC9FD1C3A}</a:tableStyleId>
-              </a:tblPr>
-              <a:tblGrid>
-                <a:gridCol w="3688080"/>
-                <a:gridCol w="3688080"/>
-                <a:gridCol w="3688080"/>
-              </a:tblGrid>
-              <a:tr h="420624">
-                <a:tc>
-                  <a:txBody>
-                    <a:bodyPr wrap="square"/>
-                    <a:lstStyle/>
-                    <a:p>
-                      <a:pPr algn="l"/>
-                      <a:r>
-                        <a:rPr sz="1200" b="1">
-                          <a:solidFill>
-                            <a:srgbClr val="FFFFFF"/>
-                          </a:solidFill>
-                          <a:latin typeface="Arial"/>
-                          <a:ea typeface="微软雅黑"/>
-                        </a:rPr>
-                        <a:t>指标</a:t>
-                      </a:r>
-                    </a:p>
-                  </a:txBody>
-                  <a:tcPr marL="54864" marR="54864" marT="18288" marB="18288" anchor="ctr">
-                    <a:solidFill>
-                      <a:srgbClr val="0B2A4A"/>
-                    </a:solidFill>
-                  </a:tcPr>
-                </a:tc>
-                <a:tc>
-                  <a:txBody>
-                    <a:bodyPr wrap="square"/>
-                    <a:lstStyle/>
-                    <a:p>
-                      <a:pPr algn="ctr"/>
-                      <a:r>
-                        <a:rPr sz="1200" b="1">
-                          <a:solidFill>
-                            <a:srgbClr val="FFFFFF"/>
-                          </a:solidFill>
-                          <a:latin typeface="Arial"/>
-                          <a:ea typeface="微软雅黑"/>
-                        </a:rPr>
-                        <a:t>字段 / 定义</a:t>
-                      </a:r>
-                    </a:p>
-                  </a:txBody>
-                  <a:tcPr marL="54864" marR="54864" marT="18288" marB="18288" anchor="ctr">
-                    <a:solidFill>
-                      <a:srgbClr val="0B2A4A"/>
-                    </a:solidFill>
-                  </a:tcPr>
-                </a:tc>
-                <a:tc>
-                  <a:txBody>
-                    <a:bodyPr wrap="square"/>
-                    <a:lstStyle/>
-                    <a:p>
-                      <a:pPr algn="ctr"/>
-                      <a:r>
-                        <a:rPr sz="1200" b="1">
-                          <a:solidFill>
-                            <a:srgbClr val="FFFFFF"/>
-                          </a:solidFill>
-                          <a:latin typeface="Arial"/>
-                          <a:ea typeface="微软雅黑"/>
-                        </a:rPr>
-                        <a:t>聚合</a:t>
-                      </a:r>
-                    </a:p>
-                  </a:txBody>
-                  <a:tcPr marL="54864" marR="54864" marT="18288" marB="18288" anchor="ctr">
-                    <a:solidFill>
-                      <a:srgbClr val="0B2A4A"/>
-                    </a:solidFill>
-                  </a:tcPr>
-                </a:tc>
-              </a:tr>
-              <a:tr h="420624">
-                <a:tc>
-                  <a:txBody>
-                    <a:bodyPr wrap="square"/>
-                    <a:lstStyle/>
-                    <a:p>
-                      <a:pPr algn="l"/>
-                      <a:r>
-                        <a:rPr sz="1200" b="0">
-                          <a:solidFill>
-                            <a:srgbClr val="333333"/>
-                          </a:solidFill>
-                          <a:latin typeface="Arial"/>
-                          <a:ea typeface="微软雅黑"/>
-                        </a:rPr>
-                        <a:t>有效吞吐</a:t>
-                      </a:r>
-                    </a:p>
-                  </a:txBody>
-                  <a:tcPr marL="54864" marR="54864" marT="18288" marB="18288" anchor="ctr">
-                    <a:solidFill>
-                      <a:srgbClr val="F5F7FA"/>
-                    </a:solidFill>
-                  </a:tcPr>
-                </a:tc>
-                <a:tc>
-                  <a:txBody>
-                    <a:bodyPr wrap="square"/>
-                    <a:lstStyle/>
-                    <a:p>
-                      <a:pPr algn="ctr"/>
-                      <a:r>
-                        <a:rPr sz="1200" b="0">
-                          <a:solidFill>
-                            <a:srgbClr val="333333"/>
-                          </a:solidFill>
-                          <a:latin typeface="Arial"/>
-                          <a:ea typeface="微软雅黑"/>
-                        </a:rPr>
-                        <a:t>名义工作量 ÷ metadata.duration</a:t>
-                      </a:r>
-                    </a:p>
-                  </a:txBody>
-                  <a:tcPr marL="54864" marR="54864" marT="18288" marB="18288" anchor="ctr">
-                    <a:solidFill>
-                      <a:srgbClr val="F5F7FA"/>
-                    </a:solidFill>
-                  </a:tcPr>
-                </a:tc>
-                <a:tc>
-                  <a:txBody>
-                    <a:bodyPr wrap="square"/>
-                    <a:lstStyle/>
-                    <a:p>
-                      <a:pPr algn="ctr"/>
-                      <a:r>
-                        <a:rPr sz="1200" b="0">
-                          <a:solidFill>
-                            <a:srgbClr val="333333"/>
-                          </a:solidFill>
-                          <a:latin typeface="Arial"/>
-                          <a:ea typeface="微软雅黑"/>
-                        </a:rPr>
-                        <a:t>每 run 算再取中位数</a:t>
-                      </a:r>
-                    </a:p>
-                  </a:txBody>
-                  <a:tcPr marL="54864" marR="54864" marT="18288" marB="18288" anchor="ctr">
-                    <a:solidFill>
-                      <a:srgbClr val="F5F7FA"/>
-                    </a:solidFill>
-                  </a:tcPr>
-                </a:tc>
-              </a:tr>
-              <a:tr h="420624">
-                <a:tc>
-                  <a:txBody>
-                    <a:bodyPr wrap="square"/>
-                    <a:lstStyle/>
-                    <a:p>
-                      <a:pPr algn="l"/>
-                      <a:r>
-                        <a:rPr sz="1200" b="0">
-                          <a:solidFill>
-                            <a:srgbClr val="333333"/>
-                          </a:solidFill>
-                          <a:latin typeface="Arial"/>
-                          <a:ea typeface="微软雅黑"/>
-                        </a:rPr>
-                        <a:t>峰值吞吐</a:t>
-                      </a:r>
-                    </a:p>
-                  </a:txBody>
-                  <a:tcPr marL="54864" marR="54864" marT="18288" marB="18288" anchor="ctr">
-                    <a:solidFill>
-                      <a:srgbClr val="FFFFFF"/>
-                    </a:solidFill>
-                  </a:tcPr>
-                </a:tc>
-                <a:tc>
-                  <a:txBody>
-                    <a:bodyPr wrap="square"/>
-                    <a:lstStyle/>
-                    <a:p>
-                      <a:pPr algn="ctr"/>
-                      <a:r>
-                        <a:rPr sz="1200" b="0">
-                          <a:solidFill>
-                            <a:srgbClr val="333333"/>
-                          </a:solidFill>
-                          <a:latin typeface="Arial"/>
-                          <a:ea typeface="微软雅黑"/>
-                        </a:rPr>
-                        <a:t>scheduling_peak_throughput</a:t>
-                      </a:r>
-                    </a:p>
-                  </a:txBody>
-                  <a:tcPr marL="54864" marR="54864" marT="18288" marB="18288" anchor="ctr">
-                    <a:solidFill>
-                      <a:srgbClr val="FFFFFF"/>
-                    </a:solidFill>
-                  </a:tcPr>
-                </a:tc>
-                <a:tc>
-                  <a:txBody>
-                    <a:bodyPr wrap="square"/>
-                    <a:lstStyle/>
-                    <a:p>
-                      <a:pPr algn="ctr"/>
-                      <a:r>
-                        <a:rPr sz="1200" b="0">
-                          <a:solidFill>
-                            <a:srgbClr val="333333"/>
-                          </a:solidFill>
-                          <a:latin typeface="Arial"/>
-                          <a:ea typeface="微软雅黑"/>
-                        </a:rPr>
-                        <a:t>3 run 逐点中位数后取标量</a:t>
-                      </a:r>
-                    </a:p>
-                  </a:txBody>
-                  <a:tcPr marL="54864" marR="54864" marT="18288" marB="18288" anchor="ctr">
-                    <a:solidFill>
-                      <a:srgbClr val="FFFFFF"/>
-                    </a:solidFill>
-                  </a:tcPr>
-                </a:tc>
-              </a:tr>
-              <a:tr h="420624">
-                <a:tc>
-                  <a:txBody>
-                    <a:bodyPr wrap="square"/>
-                    <a:lstStyle/>
-                    <a:p>
-                      <a:pPr algn="l"/>
-                      <a:r>
-                        <a:rPr sz="1200" b="0">
-                          <a:solidFill>
-                            <a:srgbClr val="333333"/>
-                          </a:solidFill>
-                          <a:latin typeface="Arial"/>
-                          <a:ea typeface="微软雅黑"/>
-                        </a:rPr>
-                        <a:t>P90/P99</a:t>
-                      </a:r>
-                    </a:p>
-                  </a:txBody>
-                  <a:tcPr marL="54864" marR="54864" marT="18288" marB="18288" anchor="ctr">
-                    <a:solidFill>
-                      <a:srgbClr val="F5F7FA"/>
-                    </a:solidFill>
-                  </a:tcPr>
-                </a:tc>
-                <a:tc>
-                  <a:txBody>
-                    <a:bodyPr wrap="square"/>
-                    <a:lstStyle/>
-                    <a:p>
-                      <a:pPr algn="ctr"/>
-                      <a:r>
-                        <a:rPr sz="1200" b="0">
-                          <a:solidFill>
-                            <a:srgbClr val="333333"/>
-                          </a:solidFill>
-                          <a:latin typeface="Arial"/>
-                          <a:ea typeface="微软雅黑"/>
-                        </a:rPr>
-                        <a:t>activeQ 到 Bind 完成的分位</a:t>
-                      </a:r>
-                    </a:p>
-                  </a:txBody>
-                  <a:tcPr marL="54864" marR="54864" marT="18288" marB="18288" anchor="ctr">
-                    <a:solidFill>
-                      <a:srgbClr val="F5F7FA"/>
-                    </a:solidFill>
-                  </a:tcPr>
-                </a:tc>
-                <a:tc>
-                  <a:txBody>
-                    <a:bodyPr wrap="square"/>
-                    <a:lstStyle/>
-                    <a:p>
-                      <a:pPr algn="ctr"/>
-                      <a:r>
-                        <a:rPr sz="1200" b="0">
-                          <a:solidFill>
-                            <a:srgbClr val="333333"/>
-                          </a:solidFill>
-                          <a:latin typeface="Arial"/>
-                          <a:ea typeface="微软雅黑"/>
-                        </a:rPr>
-                        <a:t>剔首尾各 2 点后取中位数</a:t>
-                      </a:r>
-                    </a:p>
-                  </a:txBody>
-                  <a:tcPr marL="54864" marR="54864" marT="18288" marB="18288" anchor="ctr">
-                    <a:solidFill>
-                      <a:srgbClr val="F5F7FA"/>
-                    </a:solidFill>
-                  </a:tcPr>
-                </a:tc>
-              </a:tr>
-              <a:tr h="420624">
-                <a:tc>
-                  <a:txBody>
-                    <a:bodyPr wrap="square"/>
-                    <a:lstStyle/>
-                    <a:p>
-                      <a:pPr algn="l"/>
-                      <a:r>
-                        <a:rPr sz="1200" b="0">
-                          <a:solidFill>
-                            <a:srgbClr val="333333"/>
-                          </a:solidFill>
-                          <a:latin typeface="Arial"/>
-                          <a:ea typeface="微软雅黑"/>
-                        </a:rPr>
-                        <a:t>Pod E2E P99</a:t>
-                      </a:r>
-                    </a:p>
-                  </a:txBody>
-                  <a:tcPr marL="54864" marR="54864" marT="18288" marB="18288" anchor="ctr">
-                    <a:solidFill>
-                      <a:srgbClr val="FFFFFF"/>
-                    </a:solidFill>
-                  </a:tcPr>
-                </a:tc>
-                <a:tc>
-                  <a:txBody>
-                    <a:bodyPr wrap="square"/>
-                    <a:lstStyle/>
-                    <a:p>
-                      <a:pPr algn="ctr"/>
-                      <a:r>
-                        <a:rPr sz="1200" b="0">
-                          <a:solidFill>
-                            <a:srgbClr val="333333"/>
-                          </a:solidFill>
-                          <a:latin typeface="Arial"/>
-                          <a:ea typeface="微软雅黑"/>
-                        </a:rPr>
-                        <a:t>pod_e2e_latency_p99</a:t>
-                      </a:r>
-                    </a:p>
-                  </a:txBody>
-                  <a:tcPr marL="54864" marR="54864" marT="18288" marB="18288" anchor="ctr">
-                    <a:solidFill>
-                      <a:srgbClr val="FFFFFF"/>
-                    </a:solidFill>
-                  </a:tcPr>
-                </a:tc>
-                <a:tc>
-                  <a:txBody>
-                    <a:bodyPr wrap="square"/>
-                    <a:lstStyle/>
-                    <a:p>
-                      <a:pPr algn="ctr"/>
-                      <a:r>
-                        <a:rPr sz="1200" b="0">
-                          <a:solidFill>
-                            <a:srgbClr val="333333"/>
-                          </a:solidFill>
-                          <a:latin typeface="Arial"/>
-                          <a:ea typeface="微软雅黑"/>
-                        </a:rPr>
-                        <a:t>同上</a:t>
-                      </a:r>
-                    </a:p>
-                  </a:txBody>
-                  <a:tcPr marL="54864" marR="54864" marT="18288" marB="18288" anchor="ctr">
-                    <a:solidFill>
-                      <a:srgbClr val="FFFFFF"/>
-                    </a:solidFill>
-                  </a:tcPr>
-                </a:tc>
-              </a:tr>
-              <a:tr h="420624">
-                <a:tc>
-                  <a:txBody>
-                    <a:bodyPr wrap="square"/>
-                    <a:lstStyle/>
-                    <a:p>
-                      <a:pPr algn="l"/>
-                      <a:r>
-                        <a:rPr sz="1200" b="0">
-                          <a:solidFill>
-                            <a:srgbClr val="333333"/>
-                          </a:solidFill>
-                          <a:latin typeface="Arial"/>
-                          <a:ea typeface="微软雅黑"/>
-                        </a:rPr>
-                        <a:t>绑定成功率</a:t>
-                      </a:r>
-                    </a:p>
-                  </a:txBody>
-                  <a:tcPr marL="54864" marR="54864" marT="18288" marB="18288" anchor="ctr">
-                    <a:solidFill>
-                      <a:srgbClr val="F5F7FA"/>
-                    </a:solidFill>
-                  </a:tcPr>
-                </a:tc>
-                <a:tc>
-                  <a:txBody>
-                    <a:bodyPr wrap="square"/>
-                    <a:lstStyle/>
-                    <a:p>
-                      <a:pPr algn="ctr"/>
-                      <a:r>
-                        <a:rPr sz="1200" b="0">
-                          <a:solidFill>
-                            <a:srgbClr val="333333"/>
-                          </a:solidFill>
-                          <a:latin typeface="Arial"/>
-                          <a:ea typeface="微软雅黑"/>
-                        </a:rPr>
-                        <a:t>Bind 成功 / 尝试</a:t>
-                      </a:r>
-                    </a:p>
-                  </a:txBody>
-                  <a:tcPr marL="54864" marR="54864" marT="18288" marB="18288" anchor="ctr">
-                    <a:solidFill>
-                      <a:srgbClr val="F5F7FA"/>
-                    </a:solidFill>
-                  </a:tcPr>
-                </a:tc>
-                <a:tc>
-                  <a:txBody>
-                    <a:bodyPr wrap="square"/>
-                    <a:lstStyle/>
-                    <a:p>
-                      <a:pPr algn="ctr"/>
-                      <a:r>
-                        <a:rPr sz="1200" b="0">
-                          <a:solidFill>
-                            <a:srgbClr val="333333"/>
-                          </a:solidFill>
-                          <a:latin typeface="Arial"/>
-                          <a:ea typeface="微软雅黑"/>
-                        </a:rPr>
-                        <a:t>比值</a:t>
-                      </a:r>
-                    </a:p>
-                  </a:txBody>
-                  <a:tcPr marL="54864" marR="54864" marT="18288" marB="18288" anchor="ctr">
-                    <a:solidFill>
-                      <a:srgbClr val="F5F7FA"/>
-                    </a:solidFill>
-                  </a:tcPr>
-                </a:tc>
-              </a:tr>
-              <a:tr h="420624">
-                <a:tc>
-                  <a:txBody>
-                    <a:bodyPr wrap="square"/>
-                    <a:lstStyle/>
-                    <a:p>
-                      <a:pPr algn="l"/>
-                      <a:r>
-                        <a:rPr sz="1200" b="0">
-                          <a:solidFill>
-                            <a:srgbClr val="333333"/>
-                          </a:solidFill>
-                          <a:latin typeface="Arial"/>
-                          <a:ea typeface="微软雅黑"/>
-                        </a:rPr>
-                        <a:t>队列堆积峰值</a:t>
-                      </a:r>
-                    </a:p>
-                  </a:txBody>
-                  <a:tcPr marL="54864" marR="54864" marT="18288" marB="18288" anchor="ctr">
-                    <a:solidFill>
-                      <a:srgbClr val="FFFFFF"/>
-                    </a:solidFill>
-                  </a:tcPr>
-                </a:tc>
-                <a:tc>
-                  <a:txBody>
-                    <a:bodyPr wrap="square"/>
-                    <a:lstStyle/>
-                    <a:p>
-                      <a:pPr algn="ctr"/>
-                      <a:r>
-                        <a:rPr sz="1200" b="0">
-                          <a:solidFill>
-                            <a:srgbClr val="333333"/>
-                          </a:solidFill>
-                          <a:latin typeface="Arial"/>
-                          <a:ea typeface="微软雅黑"/>
-                        </a:rPr>
-                        <a:t>pending_pods 最大值</a:t>
-                      </a:r>
-                    </a:p>
-                  </a:txBody>
-                  <a:tcPr marL="54864" marR="54864" marT="18288" marB="18288" anchor="ctr">
-                    <a:solidFill>
-                      <a:srgbClr val="FFFFFF"/>
-                    </a:solidFill>
-                  </a:tcPr>
-                </a:tc>
-                <a:tc>
-                  <a:txBody>
-                    <a:bodyPr wrap="square"/>
-                    <a:lstStyle/>
-                    <a:p>
-                      <a:pPr algn="ctr"/>
-                      <a:r>
-                        <a:rPr sz="1200" b="0">
-                          <a:solidFill>
-                            <a:srgbClr val="333333"/>
-                          </a:solidFill>
-                          <a:latin typeface="Arial"/>
-                          <a:ea typeface="微软雅黑"/>
-                        </a:rPr>
-                        <a:t>取最大</a:t>
-                      </a:r>
-                    </a:p>
-                  </a:txBody>
-                  <a:tcPr marL="54864" marR="54864" marT="18288" marB="18288" anchor="ctr">
-                    <a:solidFill>
-                      <a:srgbClr val="FFFFFF"/>
-                    </a:solidFill>
-                  </a:tcPr>
-                </a:tc>
-              </a:tr>
-            </a:tbl>
-          </a:graphicData>
-        </a:graphic>
-      </p:graphicFrame>
-      <p:sp>
-        <p:nvSpPr>
-          <p:cNvPr id="7" name="TextBox 6"/>
-          <p:cNvSpPr txBox="1"/>
-          <p:nvPr/>
-        </p:nvSpPr>
-        <p:spPr>
-          <a:xfrm>
-            <a:off x="566928" y="5074920"/>
-            <a:ext cx="10972800" cy="914400"/>
-          </a:xfrm>
-          <a:prstGeom prst="rect">
-            <a:avLst/>
-          </a:prstGeom>
-          <a:noFill/>
-        </p:spPr>
-        <p:txBody>
-          <a:bodyPr wrap="square" anchor="t" lIns="0" rIns="0" tIns="0" bIns="0">
-            <a:spAutoFit/>
-          </a:bodyPr>
-          <a:lstStyle/>
-          <a:p>
-            <a:pPr algn="l">
-              <a:lnSpc>
-                <a:spcPct val="115000"/>
-              </a:lnSpc>
-            </a:pPr>
-            <a:r>
-              <a:rPr sz="1300" b="0">
-                <a:solidFill>
-                  <a:srgbClr val="333333"/>
-                </a:solidFill>
-                <a:latin typeface="Arial"/>
-                <a:ea typeface="微软雅黑"/>
-              </a:rPr>
-              <a:t>▪  recording rules 归一化跨组指标名</a:t>
-            </a:r>
-          </a:p>
-          <a:p>
-            <a:pPr algn="l">
-              <a:lnSpc>
-                <a:spcPct val="115000"/>
-              </a:lnSpc>
-              <a:spcBef>
-                <a:spcPts val="600"/>
-              </a:spcBef>
-            </a:pPr>
-            <a:r>
-              <a:rPr sz="1300" b="0">
-                <a:solidFill>
-                  <a:srgbClr val="333333"/>
-                </a:solidFill>
-                <a:latin typeface="Arial"/>
-                <a:ea typeface="微软雅黑"/>
-              </a:rPr>
-              <a:t>▪  提取脚本：collect/latency-compare.py</a:t>
-            </a:r>
-          </a:p>
-          <a:p>
-            <a:pPr algn="l">
-              <a:lnSpc>
-                <a:spcPct val="115000"/>
-              </a:lnSpc>
-              <a:spcBef>
-                <a:spcPts val="600"/>
-              </a:spcBef>
-            </a:pPr>
-            <a:r>
-              <a:rPr sz="1300" b="0">
-                <a:solidFill>
-                  <a:srgbClr val="333333"/>
-                </a:solidFill>
-                <a:latin typeface="Arial"/>
-                <a:ea typeface="微软雅黑"/>
-              </a:rPr>
-              <a:t>▪  场景清单：results/compare/</a:t>
-            </a:r>
-          </a:p>
-        </p:txBody>
-      </p:sp>
-      <p:sp>
-        <p:nvSpPr>
-          <p:cNvPr id="8" name="TextBox 7"/>
-          <p:cNvSpPr txBox="1"/>
-          <p:nvPr/>
-        </p:nvSpPr>
-        <p:spPr>
-          <a:xfrm>
-            <a:off x="10780776" y="6345936"/>
-            <a:ext cx="850392" cy="219456"/>
-          </a:xfrm>
-          <a:prstGeom prst="rect">
-            <a:avLst/>
-          </a:prstGeom>
-          <a:noFill/>
-        </p:spPr>
-        <p:txBody>
-          <a:bodyPr wrap="square" anchor="t" lIns="0" rIns="0" tIns="0" bIns="0">
-            <a:spAutoFit/>
-          </a:bodyPr>
-          <a:lstStyle/>
-          <a:p>
-            <a:pPr algn="r"/>
-            <a:r>
-              <a:rPr sz="950" b="0">
-                <a:solidFill>
-                  <a:srgbClr val="566474"/>
-                </a:solidFill>
-                <a:latin typeface="Arial"/>
-                <a:ea typeface="微软雅黑"/>
-              </a:rPr>
-              <a:t>B2</a:t>
-            </a:r>
-          </a:p>
-        </p:txBody>
-      </p:sp>
-    </p:spTree>
-  </p:cSld>
-  <p:clrMapOvr>
-    <a:masterClrMapping/>
-  </p:clrMapOvr>
-</p:sld>
-</file>
-
-<file path=ppt/slides/slide27.xml><?xml version="1.0" encoding="utf-8"?>
-<p:sld xmlns:a="http://schemas.openxmlformats.org/drawingml/2006/main" xmlns:p="http://schemas.openxmlformats.org/presentationml/2006/main" xmlns:r="http://schemas.openxmlformats.org/officeDocument/2006/relationships">
-  <p:cSld>
-    <p:bg>
-      <p:bgPr>
-        <a:solidFill>
-          <a:srgbClr val="FFFFFF"/>
-        </a:solidFill>
-        <a:effectLst/>
-      </p:bgPr>
-    </p:bg>
-    <p:spTree>
-      <p:nvGrpSpPr>
-        <p:cNvPr id="1" name=""/>
-        <p:cNvGrpSpPr/>
-        <p:nvPr/>
-      </p:nvGrpSpPr>
-      <p:grpSpPr/>
-      <p:sp>
-        <p:nvSpPr>
-          <p:cNvPr id="2" name="Rectangle 1"/>
-          <p:cNvSpPr/>
-          <p:nvPr/>
-        </p:nvSpPr>
-        <p:spPr>
-          <a:xfrm>
-            <a:off x="384048" y="420624"/>
-            <a:ext cx="77724" cy="475488"/>
-          </a:xfrm>
-          <a:prstGeom prst="rect">
-            <a:avLst/>
-          </a:prstGeom>
-          <a:solidFill>
-            <a:srgbClr val="E8833A"/>
-          </a:solidFill>
-          <a:ln>
-            <a:noFill/>
-          </a:ln>
-          <a:effectLst/>
-        </p:spPr>
-        <p:style>
-          <a:lnRef idx="1">
-            <a:schemeClr val="accent1"/>
-          </a:lnRef>
-          <a:fillRef idx="3">
-            <a:schemeClr val="accent1"/>
-          </a:fillRef>
-          <a:effectRef idx="2">
-            <a:schemeClr val="accent1"/>
-          </a:effectRef>
-          <a:fontRef idx="minor">
-            <a:schemeClr val="lt1"/>
-          </a:fontRef>
-        </p:style>
-        <p:txBody>
-          <a:bodyPr rtlCol="0" anchor="ctr"/>
-          <a:lstStyle/>
-          <a:p>
-            <a:pPr algn="ctr"/>
-          </a:p>
-        </p:txBody>
-      </p:sp>
-      <p:sp>
-        <p:nvSpPr>
-          <p:cNvPr id="3" name="TextBox 2"/>
-          <p:cNvSpPr txBox="1"/>
-          <p:nvPr/>
-        </p:nvSpPr>
-        <p:spPr>
-          <a:xfrm>
-            <a:off x="566928" y="329184"/>
-            <a:ext cx="11064240" cy="713232"/>
-          </a:xfrm>
-          <a:prstGeom prst="rect">
-            <a:avLst/>
-          </a:prstGeom>
-          <a:noFill/>
-        </p:spPr>
-        <p:txBody>
-          <a:bodyPr wrap="square" anchor="ctr" lIns="0" rIns="0" tIns="0" bIns="0">
-            <a:spAutoFit/>
-          </a:bodyPr>
-          <a:lstStyle/>
-          <a:p>
-            <a:pPr algn="l">
-              <a:lnSpc>
-                <a:spcPct val="105000"/>
-              </a:lnSpc>
-            </a:pPr>
-            <a:r>
-              <a:rPr sz="2700" b="1">
-                <a:solidFill>
-                  <a:srgbClr val="0B2A4A"/>
-                </a:solidFill>
-                <a:latin typeface="Arial"/>
-                <a:ea typeface="微软雅黑"/>
-              </a:rPr>
-              <a:t>为什么 c/d/e 的 P99 不能与 a/b 直接比</a:t>
-            </a:r>
-          </a:p>
-        </p:txBody>
-      </p:sp>
-      <p:sp>
-        <p:nvSpPr>
-          <p:cNvPr id="4" name="Rectangle 3"/>
-          <p:cNvSpPr/>
-          <p:nvPr/>
-        </p:nvSpPr>
-        <p:spPr>
-          <a:xfrm>
-            <a:off x="566928" y="1298448"/>
-            <a:ext cx="32004" cy="365760"/>
-          </a:xfrm>
-          <a:prstGeom prst="rect">
-            <a:avLst/>
-          </a:prstGeom>
-          <a:solidFill>
-            <a:srgbClr val="1F5C99"/>
-          </a:solidFill>
-          <a:ln>
-            <a:noFill/>
-          </a:ln>
-          <a:effectLst/>
-        </p:spPr>
-        <p:style>
-          <a:lnRef idx="1">
-            <a:schemeClr val="accent1"/>
-          </a:lnRef>
-          <a:fillRef idx="3">
-            <a:schemeClr val="accent1"/>
-          </a:fillRef>
-          <a:effectRef idx="2">
-            <a:schemeClr val="accent1"/>
-          </a:effectRef>
-          <a:fontRef idx="minor">
-            <a:schemeClr val="lt1"/>
-          </a:fontRef>
-        </p:style>
-        <p:txBody>
-          <a:bodyPr rtlCol="0" anchor="ctr"/>
-          <a:lstStyle/>
-          <a:p>
-            <a:pPr algn="ctr"/>
-          </a:p>
-        </p:txBody>
-      </p:sp>
-      <p:sp>
-        <p:nvSpPr>
-          <p:cNvPr id="5" name="TextBox 4"/>
-          <p:cNvSpPr txBox="1"/>
-          <p:nvPr/>
-        </p:nvSpPr>
-        <p:spPr>
-          <a:xfrm>
-            <a:off x="713232" y="1261872"/>
-            <a:ext cx="10744200" cy="438912"/>
-          </a:xfrm>
-          <a:prstGeom prst="rect">
-            <a:avLst/>
-          </a:prstGeom>
-          <a:noFill/>
-        </p:spPr>
-        <p:txBody>
-          <a:bodyPr wrap="square" anchor="ctr" lIns="0" rIns="0" tIns="0" bIns="0">
-            <a:spAutoFit/>
-          </a:bodyPr>
-          <a:lstStyle/>
-          <a:p>
-            <a:pPr algn="l">
-              <a:lnSpc>
-                <a:spcPct val="110000"/>
-              </a:lnSpc>
-            </a:pPr>
-            <a:r>
-              <a:rPr sz="1800" b="1">
-                <a:solidFill>
-                  <a:srgbClr val="1F5C99"/>
-                </a:solidFill>
-                <a:latin typeface="Arial"/>
-                <a:ea typeface="微软雅黑"/>
-              </a:rPr>
-              <a:t>单实例过载 → Pod 长期堵在 activeQ → 未进入延迟直方图</a:t>
-            </a:r>
-          </a:p>
-        </p:txBody>
-      </p:sp>
-      <p:sp>
-        <p:nvSpPr>
-          <p:cNvPr id="6" name="TextBox 5"/>
-          <p:cNvSpPr txBox="1"/>
-          <p:nvPr/>
-        </p:nvSpPr>
-        <p:spPr>
-          <a:xfrm>
-            <a:off x="566928" y="1965960"/>
-            <a:ext cx="10607040" cy="1417320"/>
-          </a:xfrm>
-          <a:prstGeom prst="rect">
-            <a:avLst/>
-          </a:prstGeom>
-          <a:noFill/>
-        </p:spPr>
-        <p:txBody>
-          <a:bodyPr wrap="square" anchor="t" lIns="0" rIns="0" tIns="0" bIns="0">
-            <a:spAutoFit/>
-          </a:bodyPr>
-          <a:lstStyle/>
-          <a:p>
-            <a:pPr algn="l">
-              <a:lnSpc>
-                <a:spcPct val="115000"/>
-              </a:lnSpc>
-            </a:pPr>
-            <a:r>
-              <a:rPr sz="1700" b="0">
-                <a:solidFill>
-                  <a:srgbClr val="333333"/>
-                </a:solidFill>
-                <a:latin typeface="Arial"/>
-                <a:ea typeface="微软雅黑"/>
-              </a:rPr>
-              <a:t>▪  直方图只覆盖“已被 pop 处理”的子集</a:t>
-            </a:r>
-          </a:p>
-          <a:p>
-            <a:pPr algn="l">
-              <a:lnSpc>
-                <a:spcPct val="115000"/>
-              </a:lnSpc>
-              <a:spcBef>
-                <a:spcPts val="1800"/>
-              </a:spcBef>
-            </a:pPr>
-            <a:r>
-              <a:rPr sz="1700" b="0">
-                <a:solidFill>
-                  <a:srgbClr val="333333"/>
-                </a:solidFill>
-                <a:latin typeface="Arial"/>
-                <a:ea typeface="微软雅黑"/>
-              </a:rPr>
-              <a:t>▪  数值对该子集准确，但样本群体不同</a:t>
-            </a:r>
-          </a:p>
-          <a:p>
-            <a:pPr algn="l">
-              <a:lnSpc>
-                <a:spcPct val="115000"/>
-              </a:lnSpc>
-              <a:spcBef>
-                <a:spcPts val="1800"/>
-              </a:spcBef>
-            </a:pPr>
-            <a:r>
-              <a:rPr sz="1700" b="0">
-                <a:solidFill>
-                  <a:srgbClr val="333333"/>
-                </a:solidFill>
-                <a:latin typeface="Arial"/>
-                <a:ea typeface="微软雅黑"/>
-              </a:rPr>
-              <a:t>▪  故只比吞吐 / 队列 / 成功率</a:t>
-            </a:r>
-          </a:p>
-        </p:txBody>
-      </p:sp>
-      <p:sp>
-        <p:nvSpPr>
-          <p:cNvPr id="7" name="TextBox 6"/>
-          <p:cNvSpPr txBox="1"/>
-          <p:nvPr/>
-        </p:nvSpPr>
-        <p:spPr>
-          <a:xfrm>
-            <a:off x="10780776" y="6345936"/>
-            <a:ext cx="850392" cy="219456"/>
-          </a:xfrm>
-          <a:prstGeom prst="rect">
-            <a:avLst/>
-          </a:prstGeom>
-          <a:noFill/>
-        </p:spPr>
-        <p:txBody>
-          <a:bodyPr wrap="square" anchor="t" lIns="0" rIns="0" tIns="0" bIns="0">
-            <a:spAutoFit/>
-          </a:bodyPr>
-          <a:lstStyle/>
-          <a:p>
-            <a:pPr algn="r"/>
-            <a:r>
-              <a:rPr sz="950" b="0">
-                <a:solidFill>
-                  <a:srgbClr val="566474"/>
-                </a:solidFill>
-                <a:latin typeface="Arial"/>
-                <a:ea typeface="微软雅黑"/>
-              </a:rPr>
-              <a:t>B3</a:t>
-            </a:r>
-          </a:p>
-        </p:txBody>
-      </p:sp>
-    </p:spTree>
-  </p:cSld>
-  <p:clrMapOvr>
-    <a:masterClrMapping/>
-  </p:clrMapOvr>
-</p:sld>
-</file>
-
-<file path=ppt/slides/slide28.xml><?xml version="1.0" encoding="utf-8"?>
-<p:sld xmlns:a="http://schemas.openxmlformats.org/drawingml/2006/main" xmlns:p="http://schemas.openxmlformats.org/presentationml/2006/main" xmlns:r="http://schemas.openxmlformats.org/officeDocument/2006/relationships">
-  <p:cSld>
-    <p:bg>
-      <p:bgPr>
-        <a:solidFill>
-          <a:srgbClr val="FFFFFF"/>
-        </a:solidFill>
-        <a:effectLst/>
-      </p:bgPr>
-    </p:bg>
-    <p:spTree>
-      <p:nvGrpSpPr>
-        <p:cNvPr id="1" name=""/>
-        <p:cNvGrpSpPr/>
-        <p:nvPr/>
-      </p:nvGrpSpPr>
-      <p:grpSpPr/>
-      <p:sp>
-        <p:nvSpPr>
-          <p:cNvPr id="2" name="Rectangle 1"/>
-          <p:cNvSpPr/>
-          <p:nvPr/>
-        </p:nvSpPr>
-        <p:spPr>
-          <a:xfrm>
-            <a:off x="384048" y="420624"/>
-            <a:ext cx="77724" cy="475488"/>
-          </a:xfrm>
-          <a:prstGeom prst="rect">
-            <a:avLst/>
-          </a:prstGeom>
-          <a:solidFill>
-            <a:srgbClr val="E8833A"/>
-          </a:solidFill>
-          <a:ln>
-            <a:noFill/>
-          </a:ln>
-          <a:effectLst/>
-        </p:spPr>
-        <p:style>
-          <a:lnRef idx="1">
-            <a:schemeClr val="accent1"/>
-          </a:lnRef>
-          <a:fillRef idx="3">
-            <a:schemeClr val="accent1"/>
-          </a:fillRef>
-          <a:effectRef idx="2">
-            <a:schemeClr val="accent1"/>
-          </a:effectRef>
-          <a:fontRef idx="minor">
-            <a:schemeClr val="lt1"/>
-          </a:fontRef>
-        </p:style>
-        <p:txBody>
-          <a:bodyPr rtlCol="0" anchor="ctr"/>
-          <a:lstStyle/>
-          <a:p>
-            <a:pPr algn="ctr"/>
-          </a:p>
-        </p:txBody>
-      </p:sp>
-      <p:sp>
-        <p:nvSpPr>
-          <p:cNvPr id="3" name="TextBox 2"/>
-          <p:cNvSpPr txBox="1"/>
-          <p:nvPr/>
-        </p:nvSpPr>
-        <p:spPr>
-          <a:xfrm>
-            <a:off x="566928" y="329184"/>
-            <a:ext cx="11064240" cy="713232"/>
-          </a:xfrm>
-          <a:prstGeom prst="rect">
-            <a:avLst/>
-          </a:prstGeom>
-          <a:noFill/>
-        </p:spPr>
-        <p:txBody>
-          <a:bodyPr wrap="square" anchor="ctr" lIns="0" rIns="0" tIns="0" bIns="0">
-            <a:spAutoFit/>
-          </a:bodyPr>
-          <a:lstStyle/>
-          <a:p>
-            <a:pPr algn="l">
-              <a:lnSpc>
-                <a:spcPct val="105000"/>
-              </a:lnSpc>
-            </a:pPr>
-            <a:r>
-              <a:rPr sz="2700" b="1">
-                <a:solidFill>
-                  <a:srgbClr val="0B2A4A"/>
-                </a:solidFill>
-                <a:latin typeface="Arial"/>
-                <a:ea typeface="微软雅黑"/>
-              </a:rPr>
-              <a:t>Gang（w6）尾延迟反向的机理与边界</a:t>
-            </a:r>
-          </a:p>
-        </p:txBody>
-      </p:sp>
-      <p:sp>
-        <p:nvSpPr>
-          <p:cNvPr id="4" name="Rectangle 3"/>
-          <p:cNvSpPr/>
-          <p:nvPr/>
-        </p:nvSpPr>
-        <p:spPr>
-          <a:xfrm>
-            <a:off x="566928" y="1298448"/>
-            <a:ext cx="32004" cy="365760"/>
-          </a:xfrm>
-          <a:prstGeom prst="rect">
-            <a:avLst/>
-          </a:prstGeom>
-          <a:solidFill>
-            <a:srgbClr val="1F5C99"/>
-          </a:solidFill>
-          <a:ln>
-            <a:noFill/>
-          </a:ln>
-          <a:effectLst/>
-        </p:spPr>
-        <p:style>
-          <a:lnRef idx="1">
-            <a:schemeClr val="accent1"/>
-          </a:lnRef>
-          <a:fillRef idx="3">
-            <a:schemeClr val="accent1"/>
-          </a:fillRef>
-          <a:effectRef idx="2">
-            <a:schemeClr val="accent1"/>
-          </a:effectRef>
-          <a:fontRef idx="minor">
-            <a:schemeClr val="lt1"/>
-          </a:fontRef>
-        </p:style>
-        <p:txBody>
-          <a:bodyPr rtlCol="0" anchor="ctr"/>
-          <a:lstStyle/>
-          <a:p>
-            <a:pPr algn="ctr"/>
-          </a:p>
-        </p:txBody>
-      </p:sp>
-      <p:sp>
-        <p:nvSpPr>
-          <p:cNvPr id="5" name="TextBox 4"/>
-          <p:cNvSpPr txBox="1"/>
-          <p:nvPr/>
-        </p:nvSpPr>
-        <p:spPr>
-          <a:xfrm>
-            <a:off x="713232" y="1261872"/>
-            <a:ext cx="10744200" cy="438912"/>
-          </a:xfrm>
-          <a:prstGeom prst="rect">
-            <a:avLst/>
-          </a:prstGeom>
-          <a:noFill/>
-        </p:spPr>
-        <p:txBody>
-          <a:bodyPr wrap="square" anchor="ctr" lIns="0" rIns="0" tIns="0" bIns="0">
-            <a:spAutoFit/>
-          </a:bodyPr>
-          <a:lstStyle/>
-          <a:p>
-            <a:pPr algn="l">
-              <a:lnSpc>
-                <a:spcPct val="110000"/>
-              </a:lnSpc>
-            </a:pPr>
-            <a:r>
-              <a:rPr sz="1800" b="1">
-                <a:solidFill>
-                  <a:srgbClr val="1F5C99"/>
-                </a:solidFill>
-                <a:latin typeface="Arial"/>
-                <a:ea typeface="微软雅黑"/>
-              </a:rPr>
-              <a:t>吞吐仍领先，但单 Pod 尾延迟高出 1.6~4.1 倍</a:t>
-            </a:r>
-          </a:p>
-        </p:txBody>
-      </p:sp>
-      <p:graphicFrame>
-        <p:nvGraphicFramePr>
-          <p:cNvPr id="6" name="Table 5"/>
-          <p:cNvGraphicFramePr>
-            <a:graphicFrameLocks noGrp="1"/>
-          </p:cNvGraphicFramePr>
-          <p:nvPr/>
-        </p:nvGraphicFramePr>
-        <p:xfrm>
-          <a:off x="566928" y="1828800"/>
-          <a:ext cx="11064240" cy="1682496"/>
-        </p:xfrm>
-        <a:graphic>
-          <a:graphicData uri="http://schemas.openxmlformats.org/drawingml/2006/table">
-            <a:tbl>
-              <a:tblPr firstRow="1" bandRow="1">
-                <a:tableStyleId>{5C22544A-7EE6-4342-B048-85BDC9FD1C3A}</a:tableStyleId>
-              </a:tblPr>
-              <a:tblGrid>
-                <a:gridCol w="2212848"/>
-                <a:gridCol w="2212848"/>
-                <a:gridCol w="2212848"/>
-                <a:gridCol w="2212848"/>
-                <a:gridCol w="2212848"/>
-              </a:tblGrid>
-              <a:tr h="420624">
-                <a:tc>
-                  <a:txBody>
-                    <a:bodyPr wrap="square"/>
-                    <a:lstStyle/>
-                    <a:p>
-                      <a:pPr algn="l"/>
-                      <a:r>
-                        <a:rPr sz="1200" b="1">
-                          <a:solidFill>
-                            <a:srgbClr val="FFFFFF"/>
-                          </a:solidFill>
-                          <a:latin typeface="Arial"/>
-                          <a:ea typeface="微软雅黑"/>
-                        </a:rPr>
-                        <a:t>场景</a:t>
-                      </a:r>
-                    </a:p>
-                  </a:txBody>
-                  <a:tcPr marL="54864" marR="54864" marT="18288" marB="18288" anchor="ctr">
-                    <a:solidFill>
-                      <a:srgbClr val="0B2A4A"/>
-                    </a:solidFill>
-                  </a:tcPr>
-                </a:tc>
-                <a:tc>
-                  <a:txBody>
-                    <a:bodyPr wrap="square"/>
-                    <a:lstStyle/>
-                    <a:p>
-                      <a:pPr algn="ctr"/>
-                      <a:r>
-                        <a:rPr sz="1200" b="1">
-                          <a:solidFill>
-                            <a:srgbClr val="FFFFFF"/>
-                          </a:solidFill>
-                          <a:latin typeface="Arial"/>
-                          <a:ea typeface="微软雅黑"/>
-                        </a:rPr>
-                        <a:t>ENO 吞吐</a:t>
-                      </a:r>
-                    </a:p>
-                  </a:txBody>
-                  <a:tcPr marL="54864" marR="54864" marT="18288" marB="18288" anchor="ctr">
-                    <a:solidFill>
-                      <a:srgbClr val="0B2A4A"/>
-                    </a:solidFill>
-                  </a:tcPr>
-                </a:tc>
-                <a:tc>
-                  <a:txBody>
-                    <a:bodyPr wrap="square"/>
-                    <a:lstStyle/>
-                    <a:p>
-                      <a:pPr algn="ctr"/>
-                      <a:r>
-                        <a:rPr sz="1200" b="1">
-                          <a:solidFill>
-                            <a:srgbClr val="FFFFFF"/>
-                          </a:solidFill>
-                          <a:latin typeface="Arial"/>
-                          <a:ea typeface="微软雅黑"/>
-                        </a:rPr>
-                        <a:t>Gödel 吞吐</a:t>
-                      </a:r>
-                    </a:p>
-                  </a:txBody>
-                  <a:tcPr marL="54864" marR="54864" marT="18288" marB="18288" anchor="ctr">
-                    <a:solidFill>
-                      <a:srgbClr val="0B2A4A"/>
-                    </a:solidFill>
-                  </a:tcPr>
-                </a:tc>
-                <a:tc>
-                  <a:txBody>
-                    <a:bodyPr wrap="square"/>
-                    <a:lstStyle/>
-                    <a:p>
-                      <a:pPr algn="ctr"/>
-                      <a:r>
-                        <a:rPr sz="1200" b="1">
-                          <a:solidFill>
-                            <a:srgbClr val="FFFFFF"/>
-                          </a:solidFill>
-                          <a:latin typeface="Arial"/>
-                          <a:ea typeface="微软雅黑"/>
-                        </a:rPr>
-                        <a:t>ENO P99</a:t>
-                      </a:r>
-                    </a:p>
-                  </a:txBody>
-                  <a:tcPr marL="54864" marR="54864" marT="18288" marB="18288" anchor="ctr">
-                    <a:solidFill>
-                      <a:srgbClr val="0B2A4A"/>
-                    </a:solidFill>
-                  </a:tcPr>
-                </a:tc>
-                <a:tc>
-                  <a:txBody>
-                    <a:bodyPr wrap="square"/>
-                    <a:lstStyle/>
-                    <a:p>
-                      <a:pPr algn="ctr"/>
-                      <a:r>
-                        <a:rPr sz="1200" b="1">
-                          <a:solidFill>
-                            <a:srgbClr val="FFFFFF"/>
-                          </a:solidFill>
-                          <a:latin typeface="Arial"/>
-                          <a:ea typeface="微软雅黑"/>
-                        </a:rPr>
-                        <a:t>Gödel P99</a:t>
-                      </a:r>
-                    </a:p>
-                  </a:txBody>
-                  <a:tcPr marL="54864" marR="54864" marT="18288" marB="18288" anchor="ctr">
-                    <a:solidFill>
-                      <a:srgbClr val="0B2A4A"/>
-                    </a:solidFill>
-                  </a:tcPr>
-                </a:tc>
-              </a:tr>
-              <a:tr h="420624">
-                <a:tc>
-                  <a:txBody>
-                    <a:bodyPr wrap="square"/>
-                    <a:lstStyle/>
-                    <a:p>
-                      <a:pPr algn="l"/>
-                      <a:r>
-                        <a:rPr sz="1200" b="0">
-                          <a:solidFill>
-                            <a:srgbClr val="333333"/>
-                          </a:solidFill>
-                          <a:latin typeface="Arial"/>
-                          <a:ea typeface="微软雅黑"/>
-                        </a:rPr>
-                        <a:t>s3/w6 inst1</a:t>
-                      </a:r>
-                    </a:p>
-                  </a:txBody>
-                  <a:tcPr marL="54864" marR="54864" marT="18288" marB="18288" anchor="ctr">
-                    <a:solidFill>
-                      <a:srgbClr val="F5F7FA"/>
-                    </a:solidFill>
-                  </a:tcPr>
-                </a:tc>
-                <a:tc>
-                  <a:txBody>
-                    <a:bodyPr wrap="square"/>
-                    <a:lstStyle/>
-                    <a:p>
-                      <a:pPr algn="ctr"/>
-                      <a:r>
-                        <a:rPr sz="1200" b="0">
-                          <a:solidFill>
-                            <a:srgbClr val="333333"/>
-                          </a:solidFill>
-                          <a:latin typeface="Arial"/>
-                          <a:ea typeface="微软雅黑"/>
-                        </a:rPr>
-                        <a:t>251.3</a:t>
-                      </a:r>
-                    </a:p>
-                  </a:txBody>
-                  <a:tcPr marL="54864" marR="54864" marT="18288" marB="18288" anchor="ctr">
-                    <a:solidFill>
-                      <a:srgbClr val="F5F7FA"/>
-                    </a:solidFill>
-                  </a:tcPr>
-                </a:tc>
-                <a:tc>
-                  <a:txBody>
-                    <a:bodyPr wrap="square"/>
-                    <a:lstStyle/>
-                    <a:p>
-                      <a:pPr algn="ctr"/>
-                      <a:r>
-                        <a:rPr sz="1200" b="0">
-                          <a:solidFill>
-                            <a:srgbClr val="333333"/>
-                          </a:solidFill>
-                          <a:latin typeface="Arial"/>
-                          <a:ea typeface="微软雅黑"/>
-                        </a:rPr>
-                        <a:t>211.0</a:t>
-                      </a:r>
-                    </a:p>
-                  </a:txBody>
-                  <a:tcPr marL="54864" marR="54864" marT="18288" marB="18288" anchor="ctr">
-                    <a:solidFill>
-                      <a:srgbClr val="F5F7FA"/>
-                    </a:solidFill>
-                  </a:tcPr>
-                </a:tc>
-                <a:tc>
-                  <a:txBody>
-                    <a:bodyPr wrap="square"/>
-                    <a:lstStyle/>
-                    <a:p>
-                      <a:pPr algn="ctr"/>
-                      <a:r>
-                        <a:rPr sz="1200" b="0">
-                          <a:solidFill>
-                            <a:srgbClr val="333333"/>
-                          </a:solidFill>
-                          <a:latin typeface="Arial"/>
-                          <a:ea typeface="微软雅黑"/>
-                        </a:rPr>
-                        <a:t>0.428</a:t>
-                      </a:r>
-                    </a:p>
-                  </a:txBody>
-                  <a:tcPr marL="54864" marR="54864" marT="18288" marB="18288" anchor="ctr">
-                    <a:solidFill>
-                      <a:srgbClr val="F5F7FA"/>
-                    </a:solidFill>
-                  </a:tcPr>
-                </a:tc>
-                <a:tc>
-                  <a:txBody>
-                    <a:bodyPr wrap="square"/>
-                    <a:lstStyle/>
-                    <a:p>
-                      <a:pPr algn="ctr"/>
-                      <a:r>
-                        <a:rPr sz="1200" b="0">
-                          <a:solidFill>
-                            <a:srgbClr val="333333"/>
-                          </a:solidFill>
-                          <a:latin typeface="Arial"/>
-                          <a:ea typeface="微软雅黑"/>
-                        </a:rPr>
-                        <a:t>0.175</a:t>
-                      </a:r>
-                    </a:p>
-                  </a:txBody>
-                  <a:tcPr marL="54864" marR="54864" marT="18288" marB="18288" anchor="ctr">
-                    <a:solidFill>
-                      <a:srgbClr val="F5F7FA"/>
-                    </a:solidFill>
-                  </a:tcPr>
-                </a:tc>
-              </a:tr>
-              <a:tr h="420624">
-                <a:tc>
-                  <a:txBody>
-                    <a:bodyPr wrap="square"/>
-                    <a:lstStyle/>
-                    <a:p>
-                      <a:pPr algn="l"/>
-                      <a:r>
-                        <a:rPr sz="1200" b="0">
-                          <a:solidFill>
-                            <a:srgbClr val="333333"/>
-                          </a:solidFill>
-                          <a:latin typeface="Arial"/>
-                          <a:ea typeface="微软雅黑"/>
-                        </a:rPr>
-                        <a:t>s3/w6 inst3</a:t>
-                      </a:r>
-                    </a:p>
-                  </a:txBody>
-                  <a:tcPr marL="54864" marR="54864" marT="18288" marB="18288" anchor="ctr">
-                    <a:solidFill>
-                      <a:srgbClr val="FFFFFF"/>
-                    </a:solidFill>
-                  </a:tcPr>
-                </a:tc>
-                <a:tc>
-                  <a:txBody>
-                    <a:bodyPr wrap="square"/>
-                    <a:lstStyle/>
-                    <a:p>
-                      <a:pPr algn="ctr"/>
-                      <a:r>
-                        <a:rPr sz="1200" b="0">
-                          <a:solidFill>
-                            <a:srgbClr val="333333"/>
-                          </a:solidFill>
-                          <a:latin typeface="Arial"/>
-                          <a:ea typeface="微软雅黑"/>
-                        </a:rPr>
-                        <a:t>215.5</a:t>
-                      </a:r>
-                    </a:p>
-                  </a:txBody>
-                  <a:tcPr marL="54864" marR="54864" marT="18288" marB="18288" anchor="ctr">
-                    <a:solidFill>
-                      <a:srgbClr val="FFFFFF"/>
-                    </a:solidFill>
-                  </a:tcPr>
-                </a:tc>
-                <a:tc>
-                  <a:txBody>
-                    <a:bodyPr wrap="square"/>
-                    <a:lstStyle/>
-                    <a:p>
-                      <a:pPr algn="ctr"/>
-                      <a:r>
-                        <a:rPr sz="1200" b="0">
-                          <a:solidFill>
-                            <a:srgbClr val="333333"/>
-                          </a:solidFill>
-                          <a:latin typeface="Arial"/>
-                          <a:ea typeface="微软雅黑"/>
-                        </a:rPr>
-                        <a:t>206.6</a:t>
-                      </a:r>
-                    </a:p>
-                  </a:txBody>
-                  <a:tcPr marL="54864" marR="54864" marT="18288" marB="18288" anchor="ctr">
-                    <a:solidFill>
-                      <a:srgbClr val="FFFFFF"/>
-                    </a:solidFill>
-                  </a:tcPr>
-                </a:tc>
-                <a:tc>
-                  <a:txBody>
-                    <a:bodyPr wrap="square"/>
-                    <a:lstStyle/>
-                    <a:p>
-                      <a:pPr algn="ctr"/>
-                      <a:r>
-                        <a:rPr sz="1200" b="0">
-                          <a:solidFill>
-                            <a:srgbClr val="333333"/>
-                          </a:solidFill>
-                          <a:latin typeface="Arial"/>
-                          <a:ea typeface="微软雅黑"/>
-                        </a:rPr>
-                        <a:t>0.892</a:t>
-                      </a:r>
-                    </a:p>
-                  </a:txBody>
-                  <a:tcPr marL="54864" marR="54864" marT="18288" marB="18288" anchor="ctr">
-                    <a:solidFill>
-                      <a:srgbClr val="FFFFFF"/>
-                    </a:solidFill>
-                  </a:tcPr>
-                </a:tc>
-                <a:tc>
-                  <a:txBody>
-                    <a:bodyPr wrap="square"/>
-                    <a:lstStyle/>
-                    <a:p>
-                      <a:pPr algn="ctr"/>
-                      <a:r>
-                        <a:rPr sz="1200" b="0">
-                          <a:solidFill>
-                            <a:srgbClr val="333333"/>
-                          </a:solidFill>
-                          <a:latin typeface="Arial"/>
-                          <a:ea typeface="微软雅黑"/>
-                        </a:rPr>
-                        <a:t>0.218</a:t>
-                      </a:r>
-                    </a:p>
-                  </a:txBody>
-                  <a:tcPr marL="54864" marR="54864" marT="18288" marB="18288" anchor="ctr">
-                    <a:solidFill>
-                      <a:srgbClr val="FFFFFF"/>
-                    </a:solidFill>
-                  </a:tcPr>
-                </a:tc>
-              </a:tr>
-              <a:tr h="420624">
-                <a:tc>
-                  <a:txBody>
-                    <a:bodyPr wrap="square"/>
-                    <a:lstStyle/>
-                    <a:p>
-                      <a:pPr algn="l"/>
-                      <a:r>
-                        <a:rPr sz="1200" b="0">
-                          <a:solidFill>
-                            <a:srgbClr val="333333"/>
-                          </a:solidFill>
-                          <a:latin typeface="Arial"/>
-                          <a:ea typeface="微软雅黑"/>
-                        </a:rPr>
-                        <a:t>s4/w6 inst3</a:t>
-                      </a:r>
-                    </a:p>
-                  </a:txBody>
-                  <a:tcPr marL="54864" marR="54864" marT="18288" marB="18288" anchor="ctr">
-                    <a:solidFill>
-                      <a:srgbClr val="F5F7FA"/>
-                    </a:solidFill>
-                  </a:tcPr>
-                </a:tc>
-                <a:tc>
-                  <a:txBody>
-                    <a:bodyPr wrap="square"/>
-                    <a:lstStyle/>
-                    <a:p>
-                      <a:pPr algn="ctr"/>
-                      <a:r>
-                        <a:rPr sz="1200" b="0">
-                          <a:solidFill>
-                            <a:srgbClr val="333333"/>
-                          </a:solidFill>
-                          <a:latin typeface="Arial"/>
-                          <a:ea typeface="微软雅黑"/>
-                        </a:rPr>
-                        <a:t>245.1</a:t>
-                      </a:r>
-                    </a:p>
-                  </a:txBody>
-                  <a:tcPr marL="54864" marR="54864" marT="18288" marB="18288" anchor="ctr">
-                    <a:solidFill>
-                      <a:srgbClr val="F5F7FA"/>
-                    </a:solidFill>
-                  </a:tcPr>
-                </a:tc>
-                <a:tc>
-                  <a:txBody>
-                    <a:bodyPr wrap="square"/>
-                    <a:lstStyle/>
-                    <a:p>
-                      <a:pPr algn="ctr"/>
-                      <a:r>
-                        <a:rPr sz="1200" b="0">
-                          <a:solidFill>
-                            <a:srgbClr val="333333"/>
-                          </a:solidFill>
-                          <a:latin typeface="Arial"/>
-                          <a:ea typeface="微软雅黑"/>
-                        </a:rPr>
-                        <a:t>206.6</a:t>
-                      </a:r>
-                    </a:p>
-                  </a:txBody>
-                  <a:tcPr marL="54864" marR="54864" marT="18288" marB="18288" anchor="ctr">
-                    <a:solidFill>
-                      <a:srgbClr val="F5F7FA"/>
-                    </a:solidFill>
-                  </a:tcPr>
-                </a:tc>
-                <a:tc>
-                  <a:txBody>
-                    <a:bodyPr wrap="square"/>
-                    <a:lstStyle/>
-                    <a:p>
-                      <a:pPr algn="ctr"/>
-                      <a:r>
-                        <a:rPr sz="1200" b="0">
-                          <a:solidFill>
-                            <a:srgbClr val="333333"/>
-                          </a:solidFill>
-                          <a:latin typeface="Arial"/>
-                          <a:ea typeface="微软雅黑"/>
-                        </a:rPr>
-                        <a:t>0.576</a:t>
-                      </a:r>
-                    </a:p>
-                  </a:txBody>
-                  <a:tcPr marL="54864" marR="54864" marT="18288" marB="18288" anchor="ctr">
-                    <a:solidFill>
-                      <a:srgbClr val="F5F7FA"/>
-                    </a:solidFill>
-                  </a:tcPr>
-                </a:tc>
-                <a:tc>
-                  <a:txBody>
-                    <a:bodyPr wrap="square"/>
-                    <a:lstStyle/>
-                    <a:p>
-                      <a:pPr algn="ctr"/>
-                      <a:r>
-                        <a:rPr sz="1200" b="0">
-                          <a:solidFill>
-                            <a:srgbClr val="333333"/>
-                          </a:solidFill>
-                          <a:latin typeface="Arial"/>
-                          <a:ea typeface="微软雅黑"/>
-                        </a:rPr>
-                        <a:t>0.353</a:t>
-                      </a:r>
-                    </a:p>
-                  </a:txBody>
-                  <a:tcPr marL="54864" marR="54864" marT="18288" marB="18288" anchor="ctr">
-                    <a:solidFill>
-                      <a:srgbClr val="F5F7FA"/>
-                    </a:solidFill>
-                  </a:tcPr>
-                </a:tc>
-              </a:tr>
-            </a:tbl>
-          </a:graphicData>
-        </a:graphic>
-      </p:graphicFrame>
-      <p:sp>
-        <p:nvSpPr>
-          <p:cNvPr id="7" name="TextBox 6"/>
-          <p:cNvSpPr txBox="1"/>
-          <p:nvPr/>
-        </p:nvSpPr>
-        <p:spPr>
-          <a:xfrm>
-            <a:off x="566928" y="5074920"/>
-            <a:ext cx="10972800" cy="914400"/>
-          </a:xfrm>
-          <a:prstGeom prst="rect">
-            <a:avLst/>
-          </a:prstGeom>
-          <a:noFill/>
-        </p:spPr>
-        <p:txBody>
-          <a:bodyPr wrap="square" anchor="t" lIns="0" rIns="0" tIns="0" bIns="0">
-            <a:spAutoFit/>
-          </a:bodyPr>
-          <a:lstStyle/>
-          <a:p>
-            <a:pPr algn="l">
-              <a:lnSpc>
-                <a:spcPct val="115000"/>
-              </a:lnSpc>
-            </a:pPr>
-            <a:r>
-              <a:rPr sz="1300" b="0">
-                <a:solidFill>
-                  <a:srgbClr val="333333"/>
-                </a:solidFill>
-                <a:latin typeface="Arial"/>
-                <a:ea typeface="微软雅黑"/>
-              </a:rPr>
-              <a:t>▪  同组预留等待与决策共用进程与队列</a:t>
-            </a:r>
-          </a:p>
-          <a:p>
-            <a:pPr algn="l">
-              <a:lnSpc>
-                <a:spcPct val="115000"/>
-              </a:lnSpc>
-              <a:spcBef>
-                <a:spcPts val="600"/>
-              </a:spcBef>
-            </a:pPr>
-            <a:r>
-              <a:rPr sz="1300" b="0">
-                <a:solidFill>
-                  <a:srgbClr val="333333"/>
-                </a:solidFill>
-                <a:latin typeface="Arial"/>
-                <a:ea typeface="微软雅黑"/>
-              </a:rPr>
-              <a:t>▪  未用独立计时实验分离两段耗时</a:t>
-            </a:r>
-          </a:p>
-          <a:p>
-            <a:pPr algn="l">
-              <a:lnSpc>
-                <a:spcPct val="115000"/>
-              </a:lnSpc>
-              <a:spcBef>
-                <a:spcPts val="600"/>
-              </a:spcBef>
-            </a:pPr>
-            <a:r>
-              <a:rPr sz="1300" b="0">
-                <a:solidFill>
-                  <a:srgbClr val="333333"/>
-                </a:solidFill>
-                <a:latin typeface="Arial"/>
-                <a:ea typeface="微软雅黑"/>
-              </a:rPr>
-              <a:t>▪  已在论文 §6.8 列为局限</a:t>
-            </a:r>
-          </a:p>
-        </p:txBody>
-      </p:sp>
-      <p:sp>
-        <p:nvSpPr>
-          <p:cNvPr id="8" name="TextBox 7"/>
-          <p:cNvSpPr txBox="1"/>
-          <p:nvPr/>
-        </p:nvSpPr>
-        <p:spPr>
-          <a:xfrm>
-            <a:off x="10780776" y="6345936"/>
-            <a:ext cx="850392" cy="219456"/>
-          </a:xfrm>
-          <a:prstGeom prst="rect">
-            <a:avLst/>
-          </a:prstGeom>
-          <a:noFill/>
-        </p:spPr>
-        <p:txBody>
-          <a:bodyPr wrap="square" anchor="t" lIns="0" rIns="0" tIns="0" bIns="0">
-            <a:spAutoFit/>
-          </a:bodyPr>
-          <a:lstStyle/>
-          <a:p>
-            <a:pPr algn="r"/>
-            <a:r>
-              <a:rPr sz="950" b="0">
-                <a:solidFill>
-                  <a:srgbClr val="566474"/>
-                </a:solidFill>
-                <a:latin typeface="Arial"/>
-                <a:ea typeface="微软雅黑"/>
-              </a:rPr>
-              <a:t>B4</a:t>
-            </a:r>
-          </a:p>
-        </p:txBody>
-      </p:sp>
-    </p:spTree>
-  </p:cSld>
-  <p:clrMapOvr>
-    <a:masterClrMapping/>
-  </p:clrMapOvr>
-</p:sld>
-</file>
-
-<file path=ppt/slides/slide29.xml><?xml version="1.0" encoding="utf-8"?>
-<p:sld xmlns:a="http://schemas.openxmlformats.org/drawingml/2006/main" xmlns:p="http://schemas.openxmlformats.org/presentationml/2006/main" xmlns:r="http://schemas.openxmlformats.org/officeDocument/2006/relationships">
-  <p:cSld>
-    <p:bg>
-      <p:bgPr>
-        <a:solidFill>
-          <a:srgbClr val="FFFFFF"/>
-        </a:solidFill>
-        <a:effectLst/>
-      </p:bgPr>
-    </p:bg>
-    <p:spTree>
-      <p:nvGrpSpPr>
-        <p:cNvPr id="1" name=""/>
-        <p:cNvGrpSpPr/>
-        <p:nvPr/>
-      </p:nvGrpSpPr>
-      <p:grpSpPr/>
-      <p:sp>
-        <p:nvSpPr>
-          <p:cNvPr id="2" name="Rectangle 1"/>
-          <p:cNvSpPr/>
-          <p:nvPr/>
-        </p:nvSpPr>
-        <p:spPr>
-          <a:xfrm>
-            <a:off x="384048" y="420624"/>
-            <a:ext cx="77724" cy="475488"/>
-          </a:xfrm>
-          <a:prstGeom prst="rect">
-            <a:avLst/>
-          </a:prstGeom>
-          <a:solidFill>
-            <a:srgbClr val="E8833A"/>
-          </a:solidFill>
-          <a:ln>
-            <a:noFill/>
-          </a:ln>
-          <a:effectLst/>
-        </p:spPr>
-        <p:style>
-          <a:lnRef idx="1">
-            <a:schemeClr val="accent1"/>
-          </a:lnRef>
-          <a:fillRef idx="3">
-            <a:schemeClr val="accent1"/>
-          </a:fillRef>
-          <a:effectRef idx="2">
-            <a:schemeClr val="accent1"/>
-          </a:effectRef>
-          <a:fontRef idx="minor">
-            <a:schemeClr val="lt1"/>
-          </a:fontRef>
-        </p:style>
-        <p:txBody>
-          <a:bodyPr rtlCol="0" anchor="ctr"/>
-          <a:lstStyle/>
-          <a:p>
-            <a:pPr algn="ctr"/>
-          </a:p>
-        </p:txBody>
-      </p:sp>
-      <p:sp>
-        <p:nvSpPr>
-          <p:cNvPr id="3" name="TextBox 2"/>
-          <p:cNvSpPr txBox="1"/>
-          <p:nvPr/>
-        </p:nvSpPr>
-        <p:spPr>
-          <a:xfrm>
-            <a:off x="566928" y="329184"/>
-            <a:ext cx="11064240" cy="713232"/>
-          </a:xfrm>
-          <a:prstGeom prst="rect">
-            <a:avLst/>
-          </a:prstGeom>
-          <a:noFill/>
-        </p:spPr>
-        <p:txBody>
-          <a:bodyPr wrap="square" anchor="ctr" lIns="0" rIns="0" tIns="0" bIns="0">
-            <a:spAutoFit/>
-          </a:bodyPr>
-          <a:lstStyle/>
-          <a:p>
-            <a:pPr algn="l">
-              <a:lnSpc>
-                <a:spcPct val="105000"/>
-              </a:lnSpc>
-            </a:pPr>
-            <a:r>
-              <a:rPr sz="2700" b="1">
-                <a:solidFill>
-                  <a:srgbClr val="0B2A4A"/>
-                </a:solidFill>
-                <a:latin typeface="Arial"/>
-                <a:ea typeface="微软雅黑"/>
-              </a:rPr>
-              <a:t>资源公平性与未量化的资源收益</a:t>
-            </a:r>
-          </a:p>
-        </p:txBody>
-      </p:sp>
-      <p:sp>
-        <p:nvSpPr>
-          <p:cNvPr id="4" name="Rectangle 3"/>
-          <p:cNvSpPr/>
-          <p:nvPr/>
-        </p:nvSpPr>
-        <p:spPr>
-          <a:xfrm>
-            <a:off x="566928" y="1298448"/>
-            <a:ext cx="32004" cy="365760"/>
-          </a:xfrm>
-          <a:prstGeom prst="rect">
-            <a:avLst/>
-          </a:prstGeom>
-          <a:solidFill>
-            <a:srgbClr val="1F5C99"/>
-          </a:solidFill>
-          <a:ln>
-            <a:noFill/>
-          </a:ln>
-          <a:effectLst/>
-        </p:spPr>
-        <p:style>
-          <a:lnRef idx="1">
-            <a:schemeClr val="accent1"/>
-          </a:lnRef>
-          <a:fillRef idx="3">
-            <a:schemeClr val="accent1"/>
-          </a:fillRef>
-          <a:effectRef idx="2">
-            <a:schemeClr val="accent1"/>
-          </a:effectRef>
-          <a:fontRef idx="minor">
-            <a:schemeClr val="lt1"/>
-          </a:fontRef>
-        </p:style>
-        <p:txBody>
-          <a:bodyPr rtlCol="0" anchor="ctr"/>
-          <a:lstStyle/>
-          <a:p>
-            <a:pPr algn="ctr"/>
-          </a:p>
-        </p:txBody>
-      </p:sp>
-      <p:sp>
-        <p:nvSpPr>
-          <p:cNvPr id="5" name="TextBox 4"/>
-          <p:cNvSpPr txBox="1"/>
-          <p:nvPr/>
-        </p:nvSpPr>
-        <p:spPr>
-          <a:xfrm>
-            <a:off x="713232" y="1261872"/>
-            <a:ext cx="10744200" cy="438912"/>
-          </a:xfrm>
-          <a:prstGeom prst="rect">
-            <a:avLst/>
-          </a:prstGeom>
-          <a:noFill/>
-        </p:spPr>
-        <p:txBody>
-          <a:bodyPr wrap="square" anchor="ctr" lIns="0" rIns="0" tIns="0" bIns="0">
-            <a:spAutoFit/>
-          </a:bodyPr>
-          <a:lstStyle/>
-          <a:p>
-            <a:pPr algn="l">
-              <a:lnSpc>
-                <a:spcPct val="110000"/>
-              </a:lnSpc>
-            </a:pPr>
-            <a:r>
-              <a:rPr sz="1800" b="1">
-                <a:solidFill>
-                  <a:srgbClr val="1F5C99"/>
-                </a:solidFill>
-                <a:latin typeface="Arial"/>
-                <a:ea typeface="微软雅黑"/>
-              </a:rPr>
-              <a:t>每 Deployment 同规格，对 ENO 略不利</a:t>
-            </a:r>
-          </a:p>
-        </p:txBody>
-      </p:sp>
-      <p:sp>
-        <p:nvSpPr>
-          <p:cNvPr id="6" name="TextBox 5"/>
-          <p:cNvSpPr txBox="1"/>
-          <p:nvPr/>
-        </p:nvSpPr>
-        <p:spPr>
-          <a:xfrm>
-            <a:off x="566928" y="1965960"/>
-            <a:ext cx="10607040" cy="1417320"/>
-          </a:xfrm>
-          <a:prstGeom prst="rect">
-            <a:avLst/>
-          </a:prstGeom>
-          <a:noFill/>
-        </p:spPr>
-        <p:txBody>
-          <a:bodyPr wrap="square" anchor="t" lIns="0" rIns="0" tIns="0" bIns="0">
-            <a:spAutoFit/>
-          </a:bodyPr>
-          <a:lstStyle/>
-          <a:p>
-            <a:pPr algn="l">
-              <a:lnSpc>
-                <a:spcPct val="115000"/>
-              </a:lnSpc>
-            </a:pPr>
-            <a:r>
-              <a:rPr sz="1700" b="0">
-                <a:solidFill>
-                  <a:srgbClr val="333333"/>
-                </a:solidFill>
-                <a:latin typeface="Arial"/>
-                <a:ea typeface="微软雅黑"/>
-              </a:rPr>
-              <a:t>▪  Scheduler Pod 统一 2C/4G</a:t>
-            </a:r>
-          </a:p>
-          <a:p>
-            <a:pPr algn="l">
-              <a:lnSpc>
-                <a:spcPct val="115000"/>
-              </a:lnSpc>
-              <a:spcBef>
-                <a:spcPts val="1800"/>
-              </a:spcBef>
-            </a:pPr>
-            <a:r>
-              <a:rPr sz="1700" b="0">
-                <a:solidFill>
-                  <a:srgbClr val="333333"/>
-                </a:solidFill>
-                <a:latin typeface="Arial"/>
-                <a:ea typeface="微软雅黑"/>
-              </a:rPr>
-              <a:t>▪  ENO 少一个 Binder Deployment</a:t>
-            </a:r>
-          </a:p>
-          <a:p>
-            <a:pPr algn="l">
-              <a:lnSpc>
-                <a:spcPct val="115000"/>
-              </a:lnSpc>
-              <a:spcBef>
-                <a:spcPts val="1800"/>
-              </a:spcBef>
-            </a:pPr>
-            <a:r>
-              <a:rPr sz="1700" b="0">
-                <a:solidFill>
-                  <a:srgbClr val="333333"/>
-                </a:solidFill>
-                <a:latin typeface="Arial"/>
-                <a:ea typeface="微软雅黑"/>
-              </a:rPr>
-              <a:t>▪  集群总资源收益未量化</a:t>
-            </a:r>
-          </a:p>
-        </p:txBody>
-      </p:sp>
-      <p:sp>
-        <p:nvSpPr>
-          <p:cNvPr id="7" name="TextBox 6"/>
-          <p:cNvSpPr txBox="1"/>
-          <p:nvPr/>
-        </p:nvSpPr>
-        <p:spPr>
-          <a:xfrm>
-            <a:off x="10780776" y="6345936"/>
-            <a:ext cx="850392" cy="219456"/>
-          </a:xfrm>
-          <a:prstGeom prst="rect">
-            <a:avLst/>
-          </a:prstGeom>
-          <a:noFill/>
-        </p:spPr>
-        <p:txBody>
-          <a:bodyPr wrap="square" anchor="t" lIns="0" rIns="0" tIns="0" bIns="0">
-            <a:spAutoFit/>
-          </a:bodyPr>
-          <a:lstStyle/>
-          <a:p>
-            <a:pPr algn="r"/>
-            <a:r>
-              <a:rPr sz="950" b="0">
-                <a:solidFill>
-                  <a:srgbClr val="566474"/>
-                </a:solidFill>
-                <a:latin typeface="Arial"/>
-                <a:ea typeface="微软雅黑"/>
-              </a:rPr>
-              <a:t>B5</a:t>
             </a:r>
           </a:p>
         </p:txBody>
@@ -20508,316 +16587,6 @@
 </p:sld>
 </file>
 
-<file path=ppt/slides/slide30.xml><?xml version="1.0" encoding="utf-8"?>
-<p:sld xmlns:a="http://schemas.openxmlformats.org/drawingml/2006/main" xmlns:p="http://schemas.openxmlformats.org/presentationml/2006/main" xmlns:r="http://schemas.openxmlformats.org/officeDocument/2006/relationships">
-  <p:cSld>
-    <p:bg>
-      <p:bgPr>
-        <a:solidFill>
-          <a:srgbClr val="FFFFFF"/>
-        </a:solidFill>
-        <a:effectLst/>
-      </p:bgPr>
-    </p:bg>
-    <p:spTree>
-      <p:nvGrpSpPr>
-        <p:cNvPr id="1" name=""/>
-        <p:cNvGrpSpPr/>
-        <p:nvPr/>
-      </p:nvGrpSpPr>
-      <p:grpSpPr/>
-      <p:sp>
-        <p:nvSpPr>
-          <p:cNvPr id="2" name="Rectangle 1"/>
-          <p:cNvSpPr/>
-          <p:nvPr/>
-        </p:nvSpPr>
-        <p:spPr>
-          <a:xfrm>
-            <a:off x="384048" y="420624"/>
-            <a:ext cx="77724" cy="475488"/>
-          </a:xfrm>
-          <a:prstGeom prst="rect">
-            <a:avLst/>
-          </a:prstGeom>
-          <a:solidFill>
-            <a:srgbClr val="E8833A"/>
-          </a:solidFill>
-          <a:ln>
-            <a:noFill/>
-          </a:ln>
-          <a:effectLst/>
-        </p:spPr>
-        <p:style>
-          <a:lnRef idx="1">
-            <a:schemeClr val="accent1"/>
-          </a:lnRef>
-          <a:fillRef idx="3">
-            <a:schemeClr val="accent1"/>
-          </a:fillRef>
-          <a:effectRef idx="2">
-            <a:schemeClr val="accent1"/>
-          </a:effectRef>
-          <a:fontRef idx="minor">
-            <a:schemeClr val="lt1"/>
-          </a:fontRef>
-        </p:style>
-        <p:txBody>
-          <a:bodyPr rtlCol="0" anchor="ctr"/>
-          <a:lstStyle/>
-          <a:p>
-            <a:pPr algn="ctr"/>
-          </a:p>
-        </p:txBody>
-      </p:sp>
-      <p:sp>
-        <p:nvSpPr>
-          <p:cNvPr id="3" name="TextBox 2"/>
-          <p:cNvSpPr txBox="1"/>
-          <p:nvPr/>
-        </p:nvSpPr>
-        <p:spPr>
-          <a:xfrm>
-            <a:off x="566928" y="329184"/>
-            <a:ext cx="11064240" cy="713232"/>
-          </a:xfrm>
-          <a:prstGeom prst="rect">
-            <a:avLst/>
-          </a:prstGeom>
-          <a:noFill/>
-        </p:spPr>
-        <p:txBody>
-          <a:bodyPr wrap="square" anchor="ctr" lIns="0" rIns="0" tIns="0" bIns="0">
-            <a:spAutoFit/>
-          </a:bodyPr>
-          <a:lstStyle/>
-          <a:p>
-            <a:pPr algn="l">
-              <a:lnSpc>
-                <a:spcPct val="105000"/>
-              </a:lnSpc>
-            </a:pPr>
-            <a:r>
-              <a:rPr sz="2700" b="1">
-                <a:solidFill>
-                  <a:srgbClr val="0B2A4A"/>
-                </a:solidFill>
-                <a:latin typeface="Arial"/>
-                <a:ea typeface="微软雅黑"/>
-              </a:rPr>
-              <a:t>一键复现</a:t>
-            </a:r>
-          </a:p>
-        </p:txBody>
-      </p:sp>
-      <p:sp>
-        <p:nvSpPr>
-          <p:cNvPr id="4" name="Rectangle 3"/>
-          <p:cNvSpPr/>
-          <p:nvPr/>
-        </p:nvSpPr>
-        <p:spPr>
-          <a:xfrm>
-            <a:off x="566928" y="1298448"/>
-            <a:ext cx="32004" cy="365760"/>
-          </a:xfrm>
-          <a:prstGeom prst="rect">
-            <a:avLst/>
-          </a:prstGeom>
-          <a:solidFill>
-            <a:srgbClr val="1F5C99"/>
-          </a:solidFill>
-          <a:ln>
-            <a:noFill/>
-          </a:ln>
-          <a:effectLst/>
-        </p:spPr>
-        <p:style>
-          <a:lnRef idx="1">
-            <a:schemeClr val="accent1"/>
-          </a:lnRef>
-          <a:fillRef idx="3">
-            <a:schemeClr val="accent1"/>
-          </a:fillRef>
-          <a:effectRef idx="2">
-            <a:schemeClr val="accent1"/>
-          </a:effectRef>
-          <a:fontRef idx="minor">
-            <a:schemeClr val="lt1"/>
-          </a:fontRef>
-        </p:style>
-        <p:txBody>
-          <a:bodyPr rtlCol="0" anchor="ctr"/>
-          <a:lstStyle/>
-          <a:p>
-            <a:pPr algn="ctr"/>
-          </a:p>
-        </p:txBody>
-      </p:sp>
-      <p:sp>
-        <p:nvSpPr>
-          <p:cNvPr id="5" name="TextBox 4"/>
-          <p:cNvSpPr txBox="1"/>
-          <p:nvPr/>
-        </p:nvSpPr>
-        <p:spPr>
-          <a:xfrm>
-            <a:off x="713232" y="1261872"/>
-            <a:ext cx="10744200" cy="438912"/>
-          </a:xfrm>
-          <a:prstGeom prst="rect">
-            <a:avLst/>
-          </a:prstGeom>
-          <a:noFill/>
-        </p:spPr>
-        <p:txBody>
-          <a:bodyPr wrap="square" anchor="ctr" lIns="0" rIns="0" tIns="0" bIns="0">
-            <a:spAutoFit/>
-          </a:bodyPr>
-          <a:lstStyle/>
-          <a:p>
-            <a:pPr algn="l">
-              <a:lnSpc>
-                <a:spcPct val="110000"/>
-              </a:lnSpc>
-            </a:pPr>
-            <a:r>
-              <a:rPr sz="1800" b="1">
-                <a:solidFill>
-                  <a:srgbClr val="1F5C99"/>
-                </a:solidFill>
-                <a:latin typeface="Arial"/>
-                <a:ea typeface="微软雅黑"/>
-              </a:rPr>
-              <a:t>从零到结果的全部入口</a:t>
-            </a:r>
-          </a:p>
-        </p:txBody>
-      </p:sp>
-      <p:sp>
-        <p:nvSpPr>
-          <p:cNvPr id="6" name="TextBox 5"/>
-          <p:cNvSpPr txBox="1"/>
-          <p:nvPr/>
-        </p:nvSpPr>
-        <p:spPr>
-          <a:xfrm>
-            <a:off x="566928" y="1965960"/>
-            <a:ext cx="10607040" cy="1417320"/>
-          </a:xfrm>
-          <a:prstGeom prst="rect">
-            <a:avLst/>
-          </a:prstGeom>
-          <a:noFill/>
-        </p:spPr>
-        <p:txBody>
-          <a:bodyPr wrap="square" anchor="t" lIns="0" rIns="0" tIns="0" bIns="0">
-            <a:spAutoFit/>
-          </a:bodyPr>
-          <a:lstStyle/>
-          <a:p>
-            <a:pPr algn="l">
-              <a:lnSpc>
-                <a:spcPct val="115000"/>
-              </a:lnSpc>
-            </a:pPr>
-            <a:r>
-              <a:rPr sz="1700" b="0">
-                <a:solidFill>
-                  <a:srgbClr val="333333"/>
-                </a:solidFill>
-                <a:latin typeface="Arial"/>
-                <a:ea typeface="微软雅黑"/>
-              </a:rPr>
-              <a:t>▪  run-experiment.sh：12 步实验流程</a:t>
-            </a:r>
-          </a:p>
-          <a:p>
-            <a:pPr algn="l">
-              <a:lnSpc>
-                <a:spcPct val="115000"/>
-              </a:lnSpc>
-              <a:spcBef>
-                <a:spcPts val="1800"/>
-              </a:spcBef>
-            </a:pPr>
-            <a:r>
-              <a:rPr sz="1700" b="0">
-                <a:solidFill>
-                  <a:srgbClr val="333333"/>
-                </a:solidFill>
-                <a:latin typeface="Arial"/>
-                <a:ea typeface="微软雅黑"/>
-              </a:rPr>
-              <a:t>▪  plot-results.py / collect/：聚合与出图</a:t>
-            </a:r>
-          </a:p>
-          <a:p>
-            <a:pPr algn="l">
-              <a:lnSpc>
-                <a:spcPct val="115000"/>
-              </a:lnSpc>
-              <a:spcBef>
-                <a:spcPts val="1800"/>
-              </a:spcBef>
-            </a:pPr>
-            <a:r>
-              <a:rPr sz="1700" b="0">
-                <a:solidFill>
-                  <a:srgbClr val="333333"/>
-                </a:solidFill>
-                <a:latin typeface="Arial"/>
-                <a:ea typeface="微软雅黑"/>
-              </a:rPr>
-              <a:t>▪  results/compare/：16 场景产物</a:t>
-            </a:r>
-          </a:p>
-        </p:txBody>
-      </p:sp>
-      <p:sp>
-        <p:nvSpPr>
-          <p:cNvPr id="7" name="TextBox 6"/>
-          <p:cNvSpPr txBox="1"/>
-          <p:nvPr/>
-        </p:nvSpPr>
-        <p:spPr>
-          <a:xfrm>
-            <a:off x="10780776" y="6345936"/>
-            <a:ext cx="850392" cy="219456"/>
-          </a:xfrm>
-          <a:prstGeom prst="rect">
-            <a:avLst/>
-          </a:prstGeom>
-          <a:noFill/>
-        </p:spPr>
-        <p:txBody>
-          <a:bodyPr wrap="square" anchor="t" lIns="0" rIns="0" tIns="0" bIns="0">
-            <a:spAutoFit/>
-          </a:bodyPr>
-          <a:lstStyle/>
-          <a:p>
-            <a:pPr algn="r"/>
-            <a:r>
-              <a:rPr sz="950" b="0">
-                <a:solidFill>
-                  <a:srgbClr val="566474"/>
-                </a:solidFill>
-                <a:latin typeface="Arial"/>
-                <a:ea typeface="微软雅黑"/>
-              </a:rPr>
-              <a:t>B6</a:t>
-            </a:r>
-          </a:p>
-        </p:txBody>
-      </p:sp>
-    </p:spTree>
-  </p:cSld>
-  <p:clrMapOvr>
-    <a:masterClrMapping/>
-  </p:clrMapOvr>
-</p:sld>
-</file>
-
 <file path=ppt/slides/slide4.xml><?xml version="1.0" encoding="utf-8"?>
 <p:sld xmlns:a="http://schemas.openxmlformats.org/drawingml/2006/main" xmlns:p="http://schemas.openxmlformats.org/presentationml/2006/main" xmlns:r="http://schemas.openxmlformats.org/officeDocument/2006/relationships">
   <p:cSld>

--- a/docs/thesis/defense/答辩PPT-基于etcd的分布式Kubernetes调度器.pptx
+++ b/docs/thesis/defense/答辩PPT-基于etcd的分布式Kubernetes调度器.pptx
@@ -5282,7 +5282,7 @@
                 <a:latin typeface="Arial"/>
                 <a:ea typeface="微软雅黑"/>
               </a:rPr>
-              <a:t>答辩人：[姓名]</a:t>
+              <a:t>答辩人：高铜</a:t>
             </a:r>
           </a:p>
           <a:p>
@@ -5299,41 +5299,7 @@
                 <a:latin typeface="Arial"/>
                 <a:ea typeface="微软雅黑"/>
               </a:rPr>
-              <a:t>指导教师：[导师]</a:t>
-            </a:r>
-          </a:p>
-          <a:p>
-            <a:pPr algn="l">
-              <a:spcBef>
-                <a:spcPts val="500"/>
-              </a:spcBef>
-            </a:pPr>
-            <a:r>
-              <a:rPr sz="1250" b="0">
-                <a:solidFill>
-                  <a:srgbClr val="566474"/>
-                </a:solidFill>
-                <a:latin typeface="Arial"/>
-                <a:ea typeface="微软雅黑"/>
-              </a:rPr>
-              <a:t>学院：[学院]</a:t>
-            </a:r>
-          </a:p>
-          <a:p>
-            <a:pPr algn="l">
-              <a:spcBef>
-                <a:spcPts val="500"/>
-              </a:spcBef>
-            </a:pPr>
-            <a:r>
-              <a:rPr sz="1250" b="0">
-                <a:solidFill>
-                  <a:srgbClr val="566474"/>
-                </a:solidFill>
-                <a:latin typeface="Arial"/>
-                <a:ea typeface="微软雅黑"/>
-              </a:rPr>
-              <a:t>日期：[日期]</a:t>
+              <a:t>学院：北京航空航天大学</a:t>
             </a:r>
           </a:p>
         </p:txBody>
@@ -15311,7 +15277,7 @@
                 <a:latin typeface="Arial"/>
                 <a:ea typeface="微软雅黑"/>
               </a:rPr>
-              <a:t>答辩人：[姓名]</a:t>
+              <a:t>答辩人：高铜</a:t>
             </a:r>
           </a:p>
           <a:p>
@@ -15328,7 +15294,7 @@
                 <a:latin typeface="Arial"/>
                 <a:ea typeface="微软雅黑"/>
               </a:rPr>
-              <a:t>联系方式：[邮箱]</a:t>
+              <a:t>北京航空航天大学</a:t>
             </a:r>
           </a:p>
         </p:txBody>

--- a/docs/thesis/defense/答辩PPT-基于etcd的分布式Kubernetes调度器.pptx
+++ b/docs/thesis/defense/答辩PPT-基于etcd的分布式Kubernetes调度器.pptx
@@ -5283,23 +5283,6 @@
                 <a:ea typeface="微软雅黑"/>
               </a:rPr>
               <a:t>答辩人：高铜</a:t>
-            </a:r>
-          </a:p>
-          <a:p>
-            <a:pPr algn="l">
-              <a:spcBef>
-                <a:spcPts val="500"/>
-              </a:spcBef>
-            </a:pPr>
-            <a:r>
-              <a:rPr sz="1250" b="0">
-                <a:solidFill>
-                  <a:srgbClr val="566474"/>
-                </a:solidFill>
-                <a:latin typeface="Arial"/>
-                <a:ea typeface="微软雅黑"/>
-              </a:rPr>
-              <a:t>学院：北京航空航天大学</a:t>
             </a:r>
           </a:p>
         </p:txBody>
@@ -15278,23 +15261,6 @@
                 <a:ea typeface="微软雅黑"/>
               </a:rPr>
               <a:t>答辩人：高铜</a:t>
-            </a:r>
-          </a:p>
-          <a:p>
-            <a:pPr algn="ctr">
-              <a:spcBef>
-                <a:spcPts val="400"/>
-              </a:spcBef>
-            </a:pPr>
-            <a:r>
-              <a:rPr sz="1300" b="0">
-                <a:solidFill>
-                  <a:srgbClr val="566474"/>
-                </a:solidFill>
-                <a:latin typeface="Arial"/>
-                <a:ea typeface="微软雅黑"/>
-              </a:rPr>
-              <a:t>北京航空航天大学</a:t>
             </a:r>
           </a:p>
         </p:txBody>

--- a/docs/thesis/defense/答辩PPT-基于etcd的分布式Kubernetes调度器.pptx
+++ b/docs/thesis/defense/答辩PPT-基于etcd的分布式Kubernetes调度器.pptx
@@ -5283,6 +5283,23 @@
                 <a:ea typeface="微软雅黑"/>
               </a:rPr>
               <a:t>答辩人：高铜</a:t>
+            </a:r>
+          </a:p>
+          <a:p>
+            <a:pPr algn="l">
+              <a:spcBef>
+                <a:spcPts val="500"/>
+              </a:spcBef>
+            </a:pPr>
+            <a:r>
+              <a:rPr sz="1250" b="0">
+                <a:solidFill>
+                  <a:srgbClr val="566474"/>
+                </a:solidFill>
+                <a:latin typeface="Arial"/>
+                <a:ea typeface="微软雅黑"/>
+              </a:rPr>
+              <a:t>指导教师：兰雨晴 教授</a:t>
             </a:r>
           </a:p>
         </p:txBody>
@@ -15261,6 +15278,23 @@
                 <a:ea typeface="微软雅黑"/>
               </a:rPr>
               <a:t>答辩人：高铜</a:t>
+            </a:r>
+          </a:p>
+          <a:p>
+            <a:pPr algn="ctr">
+              <a:spcBef>
+                <a:spcPts val="400"/>
+              </a:spcBef>
+            </a:pPr>
+            <a:r>
+              <a:rPr sz="1300" b="0">
+                <a:solidFill>
+                  <a:srgbClr val="566474"/>
+                </a:solidFill>
+                <a:latin typeface="Arial"/>
+                <a:ea typeface="微软雅黑"/>
+              </a:rPr>
+              <a:t>指导教师：兰雨晴 教授</a:t>
             </a:r>
           </a:p>
         </p:txBody>

--- a/docs/thesis/defense/答辩PPT-基于etcd的分布式Kubernetes调度器.pptx
+++ b/docs/thesis/defense/答辩PPT-基于etcd的分布式Kubernetes调度器.pptx
@@ -12588,7 +12588,7 @@
                 <a:latin typeface="Arial"/>
                 <a:ea typeface="微软雅黑"/>
               </a:rPr>
-              <a:t>进程内 Binder 与 CacheAdapter；四层绑定容错与不变量 I</a:t>
+              <a:t>两项创新：进程内 Binder 与零拷贝缓存；四层容错与不变量证明</a:t>
             </a:r>
           </a:p>
         </p:txBody>

--- a/docs/thesis/defense/答辩PPT-基于etcd的分布式Kubernetes调度器.pptx
+++ b/docs/thesis/defense/答辩PPT-基于etcd的分布式Kubernetes调度器.pptx
@@ -12552,7 +12552,7 @@
                 <a:latin typeface="Arial"/>
                 <a:ea typeface="微软雅黑"/>
               </a:rPr>
-              <a:t>两项创新</a:t>
+              <a:t>方案与证明</a:t>
             </a:r>
           </a:p>
         </p:txBody>
@@ -12588,7 +12588,7 @@
                 <a:latin typeface="Arial"/>
                 <a:ea typeface="微软雅黑"/>
               </a:rPr>
-              <a:t>两项创新：进程内 Binder 与零拷贝缓存；四层容错与不变量证明</a:t>
+              <a:t>把 Binder 合并进 Scheduler、缓存零拷贝共享；四层容错守住至多绑定一次</a:t>
             </a:r>
           </a:p>
         </p:txBody>

--- a/docs/thesis/defense/答辩PPT-基于etcd的分布式Kubernetes调度器.pptx
+++ b/docs/thesis/defense/答辩PPT-基于etcd的分布式Kubernetes调度器.pptx
@@ -12552,7 +12552,7 @@
                 <a:latin typeface="Arial"/>
                 <a:ea typeface="微软雅黑"/>
               </a:rPr>
-              <a:t>方案与证明</a:t>
+              <a:t>核心方案</a:t>
             </a:r>
           </a:p>
         </p:txBody>
@@ -12588,7 +12588,7 @@
                 <a:latin typeface="Arial"/>
                 <a:ea typeface="微软雅黑"/>
               </a:rPr>
-              <a:t>把 Binder 合并进 Scheduler、缓存零拷贝共享；四层容错守住至多绑定一次</a:t>
+              <a:t>把 Binder 合并进 Scheduler、缓存零拷贝共享；四层容错 + 不变量证明</a:t>
             </a:r>
           </a:p>
         </p:txBody>

--- a/docs/thesis/defense/答辩PPT-基于etcd的分布式Kubernetes调度器.pptx
+++ b/docs/thesis/defense/答辩PPT-基于etcd的分布式Kubernetes调度器.pptx
@@ -12117,7 +12117,7 @@
         </p:nvSpPr>
         <p:spPr>
           <a:xfrm>
-            <a:off x="566928" y="1417320"/>
+            <a:off x="566928" y="1472184"/>
             <a:ext cx="658368" cy="420624"/>
           </a:xfrm>
           <a:prstGeom prst="rect">
@@ -12153,7 +12153,7 @@
         </p:nvSpPr>
         <p:spPr>
           <a:xfrm>
-            <a:off x="1261872" y="1371600"/>
+            <a:off x="1261872" y="1426464"/>
             <a:ext cx="3154680" cy="420624"/>
           </a:xfrm>
           <a:prstGeom prst="rect">
@@ -12189,7 +12189,7 @@
         </p:nvSpPr>
         <p:spPr>
           <a:xfrm>
-            <a:off x="4480560" y="1426464"/>
+            <a:off x="4480560" y="1481328"/>
             <a:ext cx="5486400" cy="384048"/>
           </a:xfrm>
           <a:prstGeom prst="rect">
@@ -12225,7 +12225,7 @@
         </p:nvSpPr>
         <p:spPr>
           <a:xfrm>
-            <a:off x="9985248" y="1399032"/>
+            <a:off x="9985248" y="1453896"/>
             <a:ext cx="1078992" cy="384048"/>
           </a:xfrm>
           <a:prstGeom prst="rect">
@@ -12261,7 +12261,7 @@
         </p:nvSpPr>
         <p:spPr>
           <a:xfrm>
-            <a:off x="566928" y="2066543"/>
+            <a:off x="566928" y="2121408"/>
             <a:ext cx="10497312" cy="7315"/>
           </a:xfrm>
           <a:prstGeom prst="rect">
@@ -12305,7 +12305,7 @@
         </p:nvSpPr>
         <p:spPr>
           <a:xfrm>
-            <a:off x="566928" y="2203703"/>
+            <a:off x="566928" y="2423160"/>
             <a:ext cx="658368" cy="420624"/>
           </a:xfrm>
           <a:prstGeom prst="rect">
@@ -12341,7 +12341,7 @@
         </p:nvSpPr>
         <p:spPr>
           <a:xfrm>
-            <a:off x="1261872" y="2157984"/>
+            <a:off x="1261872" y="2377440"/>
             <a:ext cx="3154680" cy="420624"/>
           </a:xfrm>
           <a:prstGeom prst="rect">
@@ -12377,7 +12377,7 @@
         </p:nvSpPr>
         <p:spPr>
           <a:xfrm>
-            <a:off x="4480560" y="2212848"/>
+            <a:off x="4480560" y="2432304"/>
             <a:ext cx="5486400" cy="384048"/>
           </a:xfrm>
           <a:prstGeom prst="rect">
@@ -12413,7 +12413,7 @@
         </p:nvSpPr>
         <p:spPr>
           <a:xfrm>
-            <a:off x="9985248" y="2185415"/>
+            <a:off x="9985248" y="2404872"/>
             <a:ext cx="1078992" cy="384048"/>
           </a:xfrm>
           <a:prstGeom prst="rect">
@@ -12449,7 +12449,7 @@
         </p:nvSpPr>
         <p:spPr>
           <a:xfrm>
-            <a:off x="566928" y="2852928"/>
+            <a:off x="566928" y="3072384"/>
             <a:ext cx="10497312" cy="7315"/>
           </a:xfrm>
           <a:prstGeom prst="rect">
@@ -12493,7 +12493,7 @@
         </p:nvSpPr>
         <p:spPr>
           <a:xfrm>
-            <a:off x="566928" y="2990087"/>
+            <a:off x="566928" y="3374136"/>
             <a:ext cx="658368" cy="420624"/>
           </a:xfrm>
           <a:prstGeom prst="rect">
@@ -12529,7 +12529,7 @@
         </p:nvSpPr>
         <p:spPr>
           <a:xfrm>
-            <a:off x="1261872" y="2944368"/>
+            <a:off x="1261872" y="3328416"/>
             <a:ext cx="3154680" cy="420624"/>
           </a:xfrm>
           <a:prstGeom prst="rect">
@@ -12565,7 +12565,7 @@
         </p:nvSpPr>
         <p:spPr>
           <a:xfrm>
-            <a:off x="4480560" y="2999232"/>
+            <a:off x="4480560" y="3383280"/>
             <a:ext cx="5486400" cy="384048"/>
           </a:xfrm>
           <a:prstGeom prst="rect">
@@ -12601,7 +12601,7 @@
         </p:nvSpPr>
         <p:spPr>
           <a:xfrm>
-            <a:off x="9985248" y="2971799"/>
+            <a:off x="9985248" y="3355848"/>
             <a:ext cx="1078992" cy="384048"/>
           </a:xfrm>
           <a:prstGeom prst="rect">
@@ -12637,7 +12637,7 @@
         </p:nvSpPr>
         <p:spPr>
           <a:xfrm>
-            <a:off x="566928" y="3639311"/>
+            <a:off x="566928" y="4023360"/>
             <a:ext cx="10497312" cy="7315"/>
           </a:xfrm>
           <a:prstGeom prst="rect">
@@ -12681,7 +12681,7 @@
         </p:nvSpPr>
         <p:spPr>
           <a:xfrm>
-            <a:off x="566928" y="3776472"/>
+            <a:off x="566928" y="4325112"/>
             <a:ext cx="658368" cy="420624"/>
           </a:xfrm>
           <a:prstGeom prst="rect">
@@ -12717,7 +12717,7 @@
         </p:nvSpPr>
         <p:spPr>
           <a:xfrm>
-            <a:off x="1261872" y="3730752"/>
+            <a:off x="1261872" y="4279392"/>
             <a:ext cx="3154680" cy="420624"/>
           </a:xfrm>
           <a:prstGeom prst="rect">
@@ -12740,7 +12740,7 @@
                 <a:latin typeface="Arial"/>
                 <a:ea typeface="微软雅黑"/>
               </a:rPr>
-              <a:t>实验设计与正确性</a:t>
+              <a:t>实验与结果</a:t>
             </a:r>
           </a:p>
         </p:txBody>
@@ -12753,7 +12753,7 @@
         </p:nvSpPr>
         <p:spPr>
           <a:xfrm>
-            <a:off x="4480560" y="3785615"/>
+            <a:off x="4480560" y="4334255"/>
             <a:ext cx="5486400" cy="384048"/>
           </a:xfrm>
           <a:prstGeom prst="rect">
@@ -12776,7 +12776,7 @@
                 <a:latin typeface="Arial"/>
                 <a:ea typeface="微软雅黑"/>
               </a:rPr>
-              <a:t>16 场景 144 次 run 的编码、六项指标口径与不变量断言</a:t>
+              <a:t>144 次 run 的口径与断言；五组基线、逐场景吞吐与尾延迟、扩展与复杂负载</a:t>
             </a:r>
           </a:p>
         </p:txBody>
@@ -12789,7 +12789,7 @@
         </p:nvSpPr>
         <p:spPr>
           <a:xfrm>
-            <a:off x="9985248" y="3758184"/>
+            <a:off x="9985248" y="4306824"/>
             <a:ext cx="1078992" cy="384048"/>
           </a:xfrm>
           <a:prstGeom prst="rect">
@@ -12812,7 +12812,7 @@
                 <a:latin typeface="Arial"/>
                 <a:ea typeface="微软雅黑"/>
               </a:rPr>
-              <a:t>P13–P15</a:t>
+              <a:t>P13–P21</a:t>
             </a:r>
           </a:p>
         </p:txBody>
@@ -12825,7 +12825,7 @@
         </p:nvSpPr>
         <p:spPr>
           <a:xfrm>
-            <a:off x="566928" y="4425696"/>
+            <a:off x="566928" y="4974336"/>
             <a:ext cx="10497312" cy="7315"/>
           </a:xfrm>
           <a:prstGeom prst="rect">
@@ -12869,7 +12869,7 @@
         </p:nvSpPr>
         <p:spPr>
           <a:xfrm>
-            <a:off x="566928" y="4562855"/>
+            <a:off x="566928" y="5276088"/>
             <a:ext cx="658368" cy="420624"/>
           </a:xfrm>
           <a:prstGeom prst="rect">
@@ -12905,7 +12905,7 @@
         </p:nvSpPr>
         <p:spPr>
           <a:xfrm>
-            <a:off x="1261872" y="4517136"/>
+            <a:off x="1261872" y="5230368"/>
             <a:ext cx="3154680" cy="420624"/>
           </a:xfrm>
           <a:prstGeom prst="rect">
@@ -12928,7 +12928,7 @@
                 <a:latin typeface="Arial"/>
                 <a:ea typeface="微软雅黑"/>
               </a:rPr>
-              <a:t>性能结果</a:t>
+              <a:t>故障注入与局限</a:t>
             </a:r>
           </a:p>
         </p:txBody>
@@ -12941,7 +12941,7 @@
         </p:nvSpPr>
         <p:spPr>
           <a:xfrm>
-            <a:off x="4480560" y="4571999"/>
+            <a:off x="4480560" y="5285232"/>
             <a:ext cx="5486400" cy="384048"/>
           </a:xfrm>
           <a:prstGeom prst="rect">
@@ -12964,7 +12964,7 @@
                 <a:latin typeface="Arial"/>
                 <a:ea typeface="微软雅黑"/>
               </a:rPr>
-              <a:t>五组基线、主场景形态、逐场景吞吐与尾延迟、实例与规模扩展</a:t>
+              <a:t>Layer 0 / Layer 3 两场注入，以及三条局限与展望</a:t>
             </a:r>
           </a:p>
         </p:txBody>
@@ -12977,7 +12977,7 @@
         </p:nvSpPr>
         <p:spPr>
           <a:xfrm>
-            <a:off x="9985248" y="4544568"/>
+            <a:off x="9985248" y="5257800"/>
             <a:ext cx="1078992" cy="384048"/>
           </a:xfrm>
           <a:prstGeom prst="rect">
@@ -13000,7 +13000,7 @@
                 <a:latin typeface="Arial"/>
                 <a:ea typeface="微软雅黑"/>
               </a:rPr>
-              <a:t>P16–P21</a:t>
+              <a:t>P22–P24</a:t>
             </a:r>
           </a:p>
         </p:txBody>
@@ -13013,7 +13013,7 @@
         </p:nvSpPr>
         <p:spPr>
           <a:xfrm>
-            <a:off x="566928" y="5212079"/>
+            <a:off x="566928" y="5925312"/>
             <a:ext cx="10497312" cy="7315"/>
           </a:xfrm>
           <a:prstGeom prst="rect">
@@ -13052,194 +13052,6 @@
       <p:sp>
         <p:nvSpPr>
           <p:cNvPr id="29" name="TextBox 28"/>
-          <p:cNvSpPr txBox="1"/>
-          <p:nvPr/>
-        </p:nvSpPr>
-        <p:spPr>
-          <a:xfrm>
-            <a:off x="566928" y="5349240"/>
-            <a:ext cx="658368" cy="420624"/>
-          </a:xfrm>
-          <a:prstGeom prst="rect">
-            <a:avLst/>
-          </a:prstGeom>
-          <a:noFill/>
-        </p:spPr>
-        <p:txBody>
-          <a:bodyPr wrap="square" anchor="t" lIns="0" rIns="0" tIns="0" bIns="0">
-            <a:spAutoFit/>
-          </a:bodyPr>
-          <a:lstStyle/>
-          <a:p>
-            <a:pPr algn="l"/>
-            <a:r>
-              <a:rPr sz="1900" b="1">
-                <a:solidFill>
-                  <a:srgbClr val="0B2A4A"/>
-                </a:solidFill>
-                <a:latin typeface="Arial"/>
-                <a:ea typeface="微软雅黑"/>
-              </a:rPr>
-              <a:t>06</a:t>
-            </a:r>
-          </a:p>
-        </p:txBody>
-      </p:sp>
-      <p:sp>
-        <p:nvSpPr>
-          <p:cNvPr id="30" name="TextBox 29"/>
-          <p:cNvSpPr txBox="1"/>
-          <p:nvPr/>
-        </p:nvSpPr>
-        <p:spPr>
-          <a:xfrm>
-            <a:off x="1261872" y="5303520"/>
-            <a:ext cx="3154680" cy="420624"/>
-          </a:xfrm>
-          <a:prstGeom prst="rect">
-            <a:avLst/>
-          </a:prstGeom>
-          <a:noFill/>
-        </p:spPr>
-        <p:txBody>
-          <a:bodyPr wrap="square" anchor="t" lIns="0" rIns="0" tIns="0" bIns="0">
-            <a:spAutoFit/>
-          </a:bodyPr>
-          <a:lstStyle/>
-          <a:p>
-            <a:pPr algn="l"/>
-            <a:r>
-              <a:rPr sz="1700" b="1">
-                <a:solidFill>
-                  <a:srgbClr val="333333"/>
-                </a:solidFill>
-                <a:latin typeface="Arial"/>
-                <a:ea typeface="微软雅黑"/>
-              </a:rPr>
-              <a:t>故障注入与局限</a:t>
-            </a:r>
-          </a:p>
-        </p:txBody>
-      </p:sp>
-      <p:sp>
-        <p:nvSpPr>
-          <p:cNvPr id="31" name="TextBox 30"/>
-          <p:cNvSpPr txBox="1"/>
-          <p:nvPr/>
-        </p:nvSpPr>
-        <p:spPr>
-          <a:xfrm>
-            <a:off x="4480560" y="5358383"/>
-            <a:ext cx="5486400" cy="384048"/>
-          </a:xfrm>
-          <a:prstGeom prst="rect">
-            <a:avLst/>
-          </a:prstGeom>
-          <a:noFill/>
-        </p:spPr>
-        <p:txBody>
-          <a:bodyPr wrap="square" anchor="t" lIns="0" rIns="0" tIns="0" bIns="0">
-            <a:spAutoFit/>
-          </a:bodyPr>
-          <a:lstStyle/>
-          <a:p>
-            <a:pPr algn="l"/>
-            <a:r>
-              <a:rPr sz="1150" b="0">
-                <a:solidFill>
-                  <a:srgbClr val="566474"/>
-                </a:solidFill>
-                <a:latin typeface="Arial"/>
-                <a:ea typeface="微软雅黑"/>
-              </a:rPr>
-              <a:t>Layer 0 / Layer 3 两场注入，以及三条局限与展望</a:t>
-            </a:r>
-          </a:p>
-        </p:txBody>
-      </p:sp>
-      <p:sp>
-        <p:nvSpPr>
-          <p:cNvPr id="32" name="TextBox 31"/>
-          <p:cNvSpPr txBox="1"/>
-          <p:nvPr/>
-        </p:nvSpPr>
-        <p:spPr>
-          <a:xfrm>
-            <a:off x="9985248" y="5330952"/>
-            <a:ext cx="1078992" cy="384048"/>
-          </a:xfrm>
-          <a:prstGeom prst="rect">
-            <a:avLst/>
-          </a:prstGeom>
-          <a:noFill/>
-        </p:spPr>
-        <p:txBody>
-          <a:bodyPr wrap="square" anchor="t" lIns="0" rIns="0" tIns="0" bIns="0">
-            <a:spAutoFit/>
-          </a:bodyPr>
-          <a:lstStyle/>
-          <a:p>
-            <a:pPr algn="r"/>
-            <a:r>
-              <a:rPr sz="1250" b="1">
-                <a:solidFill>
-                  <a:srgbClr val="1F5C99"/>
-                </a:solidFill>
-                <a:latin typeface="Arial"/>
-                <a:ea typeface="微软雅黑"/>
-              </a:rPr>
-              <a:t>P22–P24</a:t>
-            </a:r>
-          </a:p>
-        </p:txBody>
-      </p:sp>
-      <p:sp>
-        <p:nvSpPr>
-          <p:cNvPr id="33" name="Rectangle 32"/>
-          <p:cNvSpPr/>
-          <p:nvPr/>
-        </p:nvSpPr>
-        <p:spPr>
-          <a:xfrm>
-            <a:off x="566928" y="5998464"/>
-            <a:ext cx="10497312" cy="7315"/>
-          </a:xfrm>
-          <a:prstGeom prst="rect">
-            <a:avLst/>
-          </a:prstGeom>
-          <a:solidFill>
-            <a:srgbClr val="D8DFE8"/>
-          </a:solidFill>
-          <a:ln>
-            <a:noFill/>
-          </a:ln>
-          <a:effectLst/>
-        </p:spPr>
-        <p:style>
-          <a:lnRef idx="1">
-            <a:schemeClr val="accent1"/>
-          </a:lnRef>
-          <a:fillRef idx="3">
-            <a:schemeClr val="accent1"/>
-          </a:fillRef>
-          <a:effectRef idx="2">
-            <a:schemeClr val="accent1"/>
-          </a:effectRef>
-          <a:fontRef idx="minor">
-            <a:schemeClr val="lt1"/>
-          </a:fontRef>
-        </p:style>
-        <p:txBody>
-          <a:bodyPr rtlCol="0" anchor="ctr"/>
-          <a:lstStyle/>
-          <a:p>
-            <a:pPr algn="ctr"/>
-          </a:p>
-        </p:txBody>
-      </p:sp>
-      <p:sp>
-        <p:nvSpPr>
-          <p:cNvPr id="34" name="TextBox 33"/>
           <p:cNvSpPr txBox="1"/>
           <p:nvPr/>
         </p:nvSpPr>

--- a/docs/thesis/defense/答辩PPT-基于etcd的分布式Kubernetes调度器.pptx
+++ b/docs/thesis/defense/答辩PPT-基于etcd的分布式Kubernetes调度器.pptx
@@ -12740,7 +12740,7 @@
                 <a:latin typeface="Arial"/>
                 <a:ea typeface="微软雅黑"/>
               </a:rPr>
-              <a:t>实验与结果</a:t>
+              <a:t>实验数据与性能对比分析</a:t>
             </a:r>
           </a:p>
         </p:txBody>

--- a/docs/thesis/defense/答辩PPT-基于etcd的分布式Kubernetes调度器.pptx
+++ b/docs/thesis/defense/答辩PPT-基于etcd的分布式Kubernetes调度器.pptx
@@ -12776,7 +12776,7 @@
                 <a:latin typeface="Arial"/>
                 <a:ea typeface="微软雅黑"/>
               </a:rPr>
-              <a:t>144 次 run 的口径与断言；五组基线、逐场景吞吐与尾延迟、扩展与复杂负载</a:t>
+              <a:t>144 次 run 的口径与断言；逐场景吞吐与尾延迟、扩展与复杂负载、两场故障注入</a:t>
             </a:r>
           </a:p>
         </p:txBody>
@@ -12812,7 +12812,7 @@
                 <a:latin typeface="Arial"/>
                 <a:ea typeface="微软雅黑"/>
               </a:rPr>
-              <a:t>P13–P21</a:t>
+              <a:t>P13–P23</a:t>
             </a:r>
           </a:p>
         </p:txBody>
@@ -12928,7 +12928,7 @@
                 <a:latin typeface="Arial"/>
                 <a:ea typeface="微软雅黑"/>
               </a:rPr>
-              <a:t>故障注入与局限</a:t>
+              <a:t>局限与展望</a:t>
             </a:r>
           </a:p>
         </p:txBody>
@@ -12964,7 +12964,7 @@
                 <a:latin typeface="Arial"/>
                 <a:ea typeface="微软雅黑"/>
               </a:rPr>
-              <a:t>Layer 0 / Layer 3 两场注入，以及三条局限与展望</a:t>
+              <a:t>三条局限（Gang 归因、KWOK 边界、资源开销）与三个延伸方向</a:t>
             </a:r>
           </a:p>
         </p:txBody>
@@ -13000,7 +13000,7 @@
                 <a:latin typeface="Arial"/>
                 <a:ea typeface="微软雅黑"/>
               </a:rPr>
-              <a:t>P22–P24</a:t>
+              <a:t>P24</a:t>
             </a:r>
           </a:p>
         </p:txBody>

--- a/docs/thesis/defense/答辩PPT-基于etcd的分布式Kubernetes调度器.pptx
+++ b/docs/thesis/defense/答辩PPT-基于etcd的分布式Kubernetes调度器.pptx
@@ -12552,7 +12552,7 @@
                 <a:latin typeface="Arial"/>
                 <a:ea typeface="微软雅黑"/>
               </a:rPr>
-              <a:t>核心方案</a:t>
+              <a:t>核心方案实现</a:t>
             </a:r>
           </a:p>
         </p:txBody>
@@ -12776,7 +12776,7 @@
                 <a:latin typeface="Arial"/>
                 <a:ea typeface="微软雅黑"/>
               </a:rPr>
-              <a:t>144 次 run 的口径与断言；逐场景吞吐与尾延迟、扩展与复杂负载、两场故障注入</a:t>
+              <a:t>144 次 run 的口径与断言；吞吐、尾延迟、扩展与复杂负载、两场故障注入</a:t>
             </a:r>
           </a:p>
         </p:txBody>

--- a/docs/thesis/defense/答辩PPT-基于etcd的分布式Kubernetes调度器.pptx
+++ b/docs/thesis/defense/答辩PPT-基于etcd的分布式Kubernetes调度器.pptx
@@ -12117,8 +12117,8 @@
         </p:nvSpPr>
         <p:spPr>
           <a:xfrm>
-            <a:off x="566928" y="1472184"/>
-            <a:ext cx="658368" cy="420624"/>
+            <a:off x="1005840" y="1609344"/>
+            <a:ext cx="777240" cy="475488"/>
           </a:xfrm>
           <a:prstGeom prst="rect">
             <a:avLst/>
@@ -12133,7 +12133,7 @@
           <a:p>
             <a:pPr algn="l"/>
             <a:r>
-              <a:rPr sz="1900" b="1">
+              <a:rPr sz="2200" b="1">
                 <a:solidFill>
                   <a:srgbClr val="0B2A4A"/>
                 </a:solidFill>
@@ -12153,8 +12153,8 @@
         </p:nvSpPr>
         <p:spPr>
           <a:xfrm>
-            <a:off x="1261872" y="1426464"/>
-            <a:ext cx="3154680" cy="420624"/>
+            <a:off x="1874519" y="1572768"/>
+            <a:ext cx="8138160" cy="548640"/>
           </a:xfrm>
           <a:prstGeom prst="rect">
             <a:avLst/>
@@ -12169,7 +12169,7 @@
           <a:p>
             <a:pPr algn="l"/>
             <a:r>
-              <a:rPr sz="1700" b="1">
+              <a:rPr sz="2400" b="1">
                 <a:solidFill>
                   <a:srgbClr val="333333"/>
                 </a:solidFill>
@@ -12183,86 +12183,14 @@
       </p:sp>
       <p:sp>
         <p:nvSpPr>
-          <p:cNvPr id="6" name="TextBox 5"/>
-          <p:cNvSpPr txBox="1"/>
-          <p:nvPr/>
-        </p:nvSpPr>
-        <p:spPr>
-          <a:xfrm>
-            <a:off x="4480560" y="1481328"/>
-            <a:ext cx="5486400" cy="384048"/>
-          </a:xfrm>
-          <a:prstGeom prst="rect">
-            <a:avLst/>
-          </a:prstGeom>
-          <a:noFill/>
-        </p:spPr>
-        <p:txBody>
-          <a:bodyPr wrap="square" anchor="t" lIns="0" rIns="0" tIns="0" bIns="0">
-            <a:spAutoFit/>
-          </a:bodyPr>
-          <a:lstStyle/>
-          <a:p>
-            <a:pPr algn="l"/>
-            <a:r>
-              <a:rPr sz="1150" b="0">
-                <a:solidFill>
-                  <a:srgbClr val="566474"/>
-                </a:solidFill>
-                <a:latin typeface="Arial"/>
-                <a:ea typeface="微软雅黑"/>
-              </a:rPr>
-              <a:t>万节点规模下的三个瓶颈、两条技术路线与本文的两个问题</a:t>
-            </a:r>
-          </a:p>
-        </p:txBody>
-      </p:sp>
-      <p:sp>
-        <p:nvSpPr>
-          <p:cNvPr id="7" name="TextBox 6"/>
-          <p:cNvSpPr txBox="1"/>
-          <p:nvPr/>
-        </p:nvSpPr>
-        <p:spPr>
-          <a:xfrm>
-            <a:off x="9985248" y="1453896"/>
-            <a:ext cx="1078992" cy="384048"/>
-          </a:xfrm>
-          <a:prstGeom prst="rect">
-            <a:avLst/>
-          </a:prstGeom>
-          <a:noFill/>
-        </p:spPr>
-        <p:txBody>
-          <a:bodyPr wrap="square" anchor="t" lIns="0" rIns="0" tIns="0" bIns="0">
-            <a:spAutoFit/>
-          </a:bodyPr>
-          <a:lstStyle/>
-          <a:p>
-            <a:pPr algn="r"/>
-            <a:r>
-              <a:rPr sz="1250" b="1">
-                <a:solidFill>
-                  <a:srgbClr val="1F5C99"/>
-                </a:solidFill>
-                <a:latin typeface="Arial"/>
-                <a:ea typeface="微软雅黑"/>
-              </a:rPr>
-              <a:t>P3–P5</a:t>
-            </a:r>
-          </a:p>
-        </p:txBody>
-      </p:sp>
-      <p:sp>
-        <p:nvSpPr>
-          <p:cNvPr id="8" name="Rectangle 7"/>
+          <p:cNvPr id="6" name="Rectangle 5"/>
           <p:cNvSpPr/>
           <p:nvPr/>
         </p:nvSpPr>
         <p:spPr>
           <a:xfrm>
-            <a:off x="566928" y="2121408"/>
-            <a:ext cx="10497312" cy="7315"/>
+            <a:off x="1005840" y="2340864"/>
+            <a:ext cx="9144000" cy="7315"/>
           </a:xfrm>
           <a:prstGeom prst="rect">
             <a:avLst/>
@@ -12299,14 +12227,14 @@
       </p:sp>
       <p:sp>
         <p:nvSpPr>
-          <p:cNvPr id="9" name="TextBox 8"/>
+          <p:cNvPr id="7" name="TextBox 6"/>
           <p:cNvSpPr txBox="1"/>
           <p:nvPr/>
         </p:nvSpPr>
         <p:spPr>
           <a:xfrm>
-            <a:off x="566928" y="2423160"/>
-            <a:ext cx="658368" cy="420624"/>
+            <a:off x="1005840" y="2523744"/>
+            <a:ext cx="777240" cy="475488"/>
           </a:xfrm>
           <a:prstGeom prst="rect">
             <a:avLst/>
@@ -12321,7 +12249,7 @@
           <a:p>
             <a:pPr algn="l"/>
             <a:r>
-              <a:rPr sz="1900" b="1">
+              <a:rPr sz="2200" b="1">
                 <a:solidFill>
                   <a:srgbClr val="0B2A4A"/>
                 </a:solidFill>
@@ -12335,14 +12263,14 @@
       </p:sp>
       <p:sp>
         <p:nvSpPr>
-          <p:cNvPr id="10" name="TextBox 9"/>
+          <p:cNvPr id="8" name="TextBox 7"/>
           <p:cNvSpPr txBox="1"/>
           <p:nvPr/>
         </p:nvSpPr>
         <p:spPr>
           <a:xfrm>
-            <a:off x="1261872" y="2377440"/>
-            <a:ext cx="3154680" cy="420624"/>
+            <a:off x="1874519" y="2487168"/>
+            <a:ext cx="8138160" cy="548640"/>
           </a:xfrm>
           <a:prstGeom prst="rect">
             <a:avLst/>
@@ -12357,7 +12285,7 @@
           <a:p>
             <a:pPr algn="l"/>
             <a:r>
-              <a:rPr sz="1700" b="1">
+              <a:rPr sz="2400" b="1">
                 <a:solidFill>
                   <a:srgbClr val="333333"/>
                 </a:solidFill>
@@ -12371,86 +12299,14 @@
       </p:sp>
       <p:sp>
         <p:nvSpPr>
-          <p:cNvPr id="11" name="TextBox 10"/>
-          <p:cNvSpPr txBox="1"/>
-          <p:nvPr/>
-        </p:nvSpPr>
-        <p:spPr>
-          <a:xfrm>
-            <a:off x="4480560" y="2432304"/>
-            <a:ext cx="5486400" cy="384048"/>
-          </a:xfrm>
-          <a:prstGeom prst="rect">
-            <a:avLst/>
-          </a:prstGeom>
-          <a:noFill/>
-        </p:spPr>
-        <p:txBody>
-          <a:bodyPr wrap="square" anchor="t" lIns="0" rIns="0" tIns="0" bIns="0">
-            <a:spAutoFit/>
-          </a:bodyPr>
-          <a:lstStyle/>
-          <a:p>
-            <a:pPr algn="l"/>
-            <a:r>
-              <a:rPr sz="1150" b="0">
-                <a:solidFill>
-                  <a:srgbClr val="566474"/>
-                </a:solidFill>
-                <a:latin typeface="Arial"/>
-                <a:ea typeface="微软雅黑"/>
-              </a:rPr>
-              <a:t>Dispatcher / Scheduler / Binder 三层职责与 Pod 流转</a:t>
-            </a:r>
-          </a:p>
-        </p:txBody>
-      </p:sp>
-      <p:sp>
-        <p:nvSpPr>
-          <p:cNvPr id="12" name="TextBox 11"/>
-          <p:cNvSpPr txBox="1"/>
-          <p:nvPr/>
-        </p:nvSpPr>
-        <p:spPr>
-          <a:xfrm>
-            <a:off x="9985248" y="2404872"/>
-            <a:ext cx="1078992" cy="384048"/>
-          </a:xfrm>
-          <a:prstGeom prst="rect">
-            <a:avLst/>
-          </a:prstGeom>
-          <a:noFill/>
-        </p:spPr>
-        <p:txBody>
-          <a:bodyPr wrap="square" anchor="t" lIns="0" rIns="0" tIns="0" bIns="0">
-            <a:spAutoFit/>
-          </a:bodyPr>
-          <a:lstStyle/>
-          <a:p>
-            <a:pPr algn="r"/>
-            <a:r>
-              <a:rPr sz="1250" b="1">
-                <a:solidFill>
-                  <a:srgbClr val="1F5C99"/>
-                </a:solidFill>
-                <a:latin typeface="Arial"/>
-                <a:ea typeface="微软雅黑"/>
-              </a:rPr>
-              <a:t>P6–P8</a:t>
-            </a:r>
-          </a:p>
-        </p:txBody>
-      </p:sp>
-      <p:sp>
-        <p:nvSpPr>
-          <p:cNvPr id="13" name="Rectangle 12"/>
+          <p:cNvPr id="9" name="Rectangle 8"/>
           <p:cNvSpPr/>
           <p:nvPr/>
         </p:nvSpPr>
         <p:spPr>
           <a:xfrm>
-            <a:off x="566928" y="3072384"/>
-            <a:ext cx="10497312" cy="7315"/>
+            <a:off x="1005840" y="3255263"/>
+            <a:ext cx="9144000" cy="7315"/>
           </a:xfrm>
           <a:prstGeom prst="rect">
             <a:avLst/>
@@ -12487,14 +12343,14 @@
       </p:sp>
       <p:sp>
         <p:nvSpPr>
-          <p:cNvPr id="14" name="TextBox 13"/>
+          <p:cNvPr id="10" name="TextBox 9"/>
           <p:cNvSpPr txBox="1"/>
           <p:nvPr/>
         </p:nvSpPr>
         <p:spPr>
           <a:xfrm>
-            <a:off x="566928" y="3374136"/>
-            <a:ext cx="658368" cy="420624"/>
+            <a:off x="1005840" y="3438144"/>
+            <a:ext cx="777240" cy="475488"/>
           </a:xfrm>
           <a:prstGeom prst="rect">
             <a:avLst/>
@@ -12509,7 +12365,7 @@
           <a:p>
             <a:pPr algn="l"/>
             <a:r>
-              <a:rPr sz="1900" b="1">
+              <a:rPr sz="2200" b="1">
                 <a:solidFill>
                   <a:srgbClr val="0B2A4A"/>
                 </a:solidFill>
@@ -12523,14 +12379,14 @@
       </p:sp>
       <p:sp>
         <p:nvSpPr>
-          <p:cNvPr id="15" name="TextBox 14"/>
+          <p:cNvPr id="11" name="TextBox 10"/>
           <p:cNvSpPr txBox="1"/>
           <p:nvPr/>
         </p:nvSpPr>
         <p:spPr>
           <a:xfrm>
-            <a:off x="1261872" y="3328416"/>
-            <a:ext cx="3154680" cy="420624"/>
+            <a:off x="1874519" y="3401568"/>
+            <a:ext cx="8138160" cy="548640"/>
           </a:xfrm>
           <a:prstGeom prst="rect">
             <a:avLst/>
@@ -12545,7 +12401,7 @@
           <a:p>
             <a:pPr algn="l"/>
             <a:r>
-              <a:rPr sz="1700" b="1">
+              <a:rPr sz="2400" b="1">
                 <a:solidFill>
                   <a:srgbClr val="333333"/>
                 </a:solidFill>
@@ -12559,86 +12415,14 @@
       </p:sp>
       <p:sp>
         <p:nvSpPr>
-          <p:cNvPr id="16" name="TextBox 15"/>
-          <p:cNvSpPr txBox="1"/>
-          <p:nvPr/>
-        </p:nvSpPr>
-        <p:spPr>
-          <a:xfrm>
-            <a:off x="4480560" y="3383280"/>
-            <a:ext cx="5486400" cy="384048"/>
-          </a:xfrm>
-          <a:prstGeom prst="rect">
-            <a:avLst/>
-          </a:prstGeom>
-          <a:noFill/>
-        </p:spPr>
-        <p:txBody>
-          <a:bodyPr wrap="square" anchor="t" lIns="0" rIns="0" tIns="0" bIns="0">
-            <a:spAutoFit/>
-          </a:bodyPr>
-          <a:lstStyle/>
-          <a:p>
-            <a:pPr algn="l"/>
-            <a:r>
-              <a:rPr sz="1150" b="0">
-                <a:solidFill>
-                  <a:srgbClr val="566474"/>
-                </a:solidFill>
-                <a:latin typeface="Arial"/>
-                <a:ea typeface="微软雅黑"/>
-              </a:rPr>
-              <a:t>把 Binder 合并进 Scheduler、缓存零拷贝共享；四层容错 + 不变量证明</a:t>
-            </a:r>
-          </a:p>
-        </p:txBody>
-      </p:sp>
-      <p:sp>
-        <p:nvSpPr>
-          <p:cNvPr id="17" name="TextBox 16"/>
-          <p:cNvSpPr txBox="1"/>
-          <p:nvPr/>
-        </p:nvSpPr>
-        <p:spPr>
-          <a:xfrm>
-            <a:off x="9985248" y="3355848"/>
-            <a:ext cx="1078992" cy="384048"/>
-          </a:xfrm>
-          <a:prstGeom prst="rect">
-            <a:avLst/>
-          </a:prstGeom>
-          <a:noFill/>
-        </p:spPr>
-        <p:txBody>
-          <a:bodyPr wrap="square" anchor="t" lIns="0" rIns="0" tIns="0" bIns="0">
-            <a:spAutoFit/>
-          </a:bodyPr>
-          <a:lstStyle/>
-          <a:p>
-            <a:pPr algn="r"/>
-            <a:r>
-              <a:rPr sz="1250" b="1">
-                <a:solidFill>
-                  <a:srgbClr val="1F5C99"/>
-                </a:solidFill>
-                <a:latin typeface="Arial"/>
-                <a:ea typeface="微软雅黑"/>
-              </a:rPr>
-              <a:t>P9–P12</a:t>
-            </a:r>
-          </a:p>
-        </p:txBody>
-      </p:sp>
-      <p:sp>
-        <p:nvSpPr>
-          <p:cNvPr id="18" name="Rectangle 17"/>
+          <p:cNvPr id="12" name="Rectangle 11"/>
           <p:cNvSpPr/>
           <p:nvPr/>
         </p:nvSpPr>
         <p:spPr>
           <a:xfrm>
-            <a:off x="566928" y="4023360"/>
-            <a:ext cx="10497312" cy="7315"/>
+            <a:off x="1005840" y="4169663"/>
+            <a:ext cx="9144000" cy="7315"/>
           </a:xfrm>
           <a:prstGeom prst="rect">
             <a:avLst/>
@@ -12675,14 +12459,14 @@
       </p:sp>
       <p:sp>
         <p:nvSpPr>
-          <p:cNvPr id="19" name="TextBox 18"/>
+          <p:cNvPr id="13" name="TextBox 12"/>
           <p:cNvSpPr txBox="1"/>
           <p:nvPr/>
         </p:nvSpPr>
         <p:spPr>
           <a:xfrm>
-            <a:off x="566928" y="4325112"/>
-            <a:ext cx="658368" cy="420624"/>
+            <a:off x="1005840" y="4352544"/>
+            <a:ext cx="777240" cy="475488"/>
           </a:xfrm>
           <a:prstGeom prst="rect">
             <a:avLst/>
@@ -12697,7 +12481,7 @@
           <a:p>
             <a:pPr algn="l"/>
             <a:r>
-              <a:rPr sz="1900" b="1">
+              <a:rPr sz="2200" b="1">
                 <a:solidFill>
                   <a:srgbClr val="0B2A4A"/>
                 </a:solidFill>
@@ -12711,14 +12495,14 @@
       </p:sp>
       <p:sp>
         <p:nvSpPr>
-          <p:cNvPr id="20" name="TextBox 19"/>
+          <p:cNvPr id="14" name="TextBox 13"/>
           <p:cNvSpPr txBox="1"/>
           <p:nvPr/>
         </p:nvSpPr>
         <p:spPr>
           <a:xfrm>
-            <a:off x="1261872" y="4279392"/>
-            <a:ext cx="3154680" cy="420624"/>
+            <a:off x="1874519" y="4315968"/>
+            <a:ext cx="8138160" cy="548640"/>
           </a:xfrm>
           <a:prstGeom prst="rect">
             <a:avLst/>
@@ -12733,7 +12517,7 @@
           <a:p>
             <a:pPr algn="l"/>
             <a:r>
-              <a:rPr sz="1700" b="1">
+              <a:rPr sz="2400" b="1">
                 <a:solidFill>
                   <a:srgbClr val="333333"/>
                 </a:solidFill>
@@ -12747,86 +12531,14 @@
       </p:sp>
       <p:sp>
         <p:nvSpPr>
-          <p:cNvPr id="21" name="TextBox 20"/>
-          <p:cNvSpPr txBox="1"/>
-          <p:nvPr/>
-        </p:nvSpPr>
-        <p:spPr>
-          <a:xfrm>
-            <a:off x="4480560" y="4334255"/>
-            <a:ext cx="5486400" cy="384048"/>
-          </a:xfrm>
-          <a:prstGeom prst="rect">
-            <a:avLst/>
-          </a:prstGeom>
-          <a:noFill/>
-        </p:spPr>
-        <p:txBody>
-          <a:bodyPr wrap="square" anchor="t" lIns="0" rIns="0" tIns="0" bIns="0">
-            <a:spAutoFit/>
-          </a:bodyPr>
-          <a:lstStyle/>
-          <a:p>
-            <a:pPr algn="l"/>
-            <a:r>
-              <a:rPr sz="1150" b="0">
-                <a:solidFill>
-                  <a:srgbClr val="566474"/>
-                </a:solidFill>
-                <a:latin typeface="Arial"/>
-                <a:ea typeface="微软雅黑"/>
-              </a:rPr>
-              <a:t>144 次 run 的口径与断言；吞吐、尾延迟、扩展与复杂负载、两场故障注入</a:t>
-            </a:r>
-          </a:p>
-        </p:txBody>
-      </p:sp>
-      <p:sp>
-        <p:nvSpPr>
-          <p:cNvPr id="22" name="TextBox 21"/>
-          <p:cNvSpPr txBox="1"/>
-          <p:nvPr/>
-        </p:nvSpPr>
-        <p:spPr>
-          <a:xfrm>
-            <a:off x="9985248" y="4306824"/>
-            <a:ext cx="1078992" cy="384048"/>
-          </a:xfrm>
-          <a:prstGeom prst="rect">
-            <a:avLst/>
-          </a:prstGeom>
-          <a:noFill/>
-        </p:spPr>
-        <p:txBody>
-          <a:bodyPr wrap="square" anchor="t" lIns="0" rIns="0" tIns="0" bIns="0">
-            <a:spAutoFit/>
-          </a:bodyPr>
-          <a:lstStyle/>
-          <a:p>
-            <a:pPr algn="r"/>
-            <a:r>
-              <a:rPr sz="1250" b="1">
-                <a:solidFill>
-                  <a:srgbClr val="1F5C99"/>
-                </a:solidFill>
-                <a:latin typeface="Arial"/>
-                <a:ea typeface="微软雅黑"/>
-              </a:rPr>
-              <a:t>P13–P23</a:t>
-            </a:r>
-          </a:p>
-        </p:txBody>
-      </p:sp>
-      <p:sp>
-        <p:nvSpPr>
-          <p:cNvPr id="23" name="Rectangle 22"/>
+          <p:cNvPr id="15" name="Rectangle 14"/>
           <p:cNvSpPr/>
           <p:nvPr/>
         </p:nvSpPr>
         <p:spPr>
           <a:xfrm>
-            <a:off x="566928" y="4974336"/>
-            <a:ext cx="10497312" cy="7315"/>
+            <a:off x="1005840" y="5084064"/>
+            <a:ext cx="9144000" cy="7315"/>
           </a:xfrm>
           <a:prstGeom prst="rect">
             <a:avLst/>
@@ -12863,14 +12575,14 @@
       </p:sp>
       <p:sp>
         <p:nvSpPr>
-          <p:cNvPr id="24" name="TextBox 23"/>
+          <p:cNvPr id="16" name="TextBox 15"/>
           <p:cNvSpPr txBox="1"/>
           <p:nvPr/>
         </p:nvSpPr>
         <p:spPr>
           <a:xfrm>
-            <a:off x="566928" y="5276088"/>
-            <a:ext cx="658368" cy="420624"/>
+            <a:off x="1005840" y="5266944"/>
+            <a:ext cx="777240" cy="475488"/>
           </a:xfrm>
           <a:prstGeom prst="rect">
             <a:avLst/>
@@ -12885,7 +12597,7 @@
           <a:p>
             <a:pPr algn="l"/>
             <a:r>
-              <a:rPr sz="1900" b="1">
+              <a:rPr sz="2200" b="1">
                 <a:solidFill>
                   <a:srgbClr val="0B2A4A"/>
                 </a:solidFill>
@@ -12899,14 +12611,14 @@
       </p:sp>
       <p:sp>
         <p:nvSpPr>
-          <p:cNvPr id="25" name="TextBox 24"/>
+          <p:cNvPr id="17" name="TextBox 16"/>
           <p:cNvSpPr txBox="1"/>
           <p:nvPr/>
         </p:nvSpPr>
         <p:spPr>
           <a:xfrm>
-            <a:off x="1261872" y="5230368"/>
-            <a:ext cx="3154680" cy="420624"/>
+            <a:off x="1874519" y="5230368"/>
+            <a:ext cx="8138160" cy="548640"/>
           </a:xfrm>
           <a:prstGeom prst="rect">
             <a:avLst/>
@@ -12921,7 +12633,7 @@
           <a:p>
             <a:pPr algn="l"/>
             <a:r>
-              <a:rPr sz="1700" b="1">
+              <a:rPr sz="2400" b="1">
                 <a:solidFill>
                   <a:srgbClr val="333333"/>
                 </a:solidFill>
@@ -12935,86 +12647,14 @@
       </p:sp>
       <p:sp>
         <p:nvSpPr>
-          <p:cNvPr id="26" name="TextBox 25"/>
-          <p:cNvSpPr txBox="1"/>
-          <p:nvPr/>
-        </p:nvSpPr>
-        <p:spPr>
-          <a:xfrm>
-            <a:off x="4480560" y="5285232"/>
-            <a:ext cx="5486400" cy="384048"/>
-          </a:xfrm>
-          <a:prstGeom prst="rect">
-            <a:avLst/>
-          </a:prstGeom>
-          <a:noFill/>
-        </p:spPr>
-        <p:txBody>
-          <a:bodyPr wrap="square" anchor="t" lIns="0" rIns="0" tIns="0" bIns="0">
-            <a:spAutoFit/>
-          </a:bodyPr>
-          <a:lstStyle/>
-          <a:p>
-            <a:pPr algn="l"/>
-            <a:r>
-              <a:rPr sz="1150" b="0">
-                <a:solidFill>
-                  <a:srgbClr val="566474"/>
-                </a:solidFill>
-                <a:latin typeface="Arial"/>
-                <a:ea typeface="微软雅黑"/>
-              </a:rPr>
-              <a:t>三条局限（Gang 归因、KWOK 边界、资源开销）与三个延伸方向</a:t>
-            </a:r>
-          </a:p>
-        </p:txBody>
-      </p:sp>
-      <p:sp>
-        <p:nvSpPr>
-          <p:cNvPr id="27" name="TextBox 26"/>
-          <p:cNvSpPr txBox="1"/>
-          <p:nvPr/>
-        </p:nvSpPr>
-        <p:spPr>
-          <a:xfrm>
-            <a:off x="9985248" y="5257800"/>
-            <a:ext cx="1078992" cy="384048"/>
-          </a:xfrm>
-          <a:prstGeom prst="rect">
-            <a:avLst/>
-          </a:prstGeom>
-          <a:noFill/>
-        </p:spPr>
-        <p:txBody>
-          <a:bodyPr wrap="square" anchor="t" lIns="0" rIns="0" tIns="0" bIns="0">
-            <a:spAutoFit/>
-          </a:bodyPr>
-          <a:lstStyle/>
-          <a:p>
-            <a:pPr algn="r"/>
-            <a:r>
-              <a:rPr sz="1250" b="1">
-                <a:solidFill>
-                  <a:srgbClr val="1F5C99"/>
-                </a:solidFill>
-                <a:latin typeface="Arial"/>
-                <a:ea typeface="微软雅黑"/>
-              </a:rPr>
-              <a:t>P24</a:t>
-            </a:r>
-          </a:p>
-        </p:txBody>
-      </p:sp>
-      <p:sp>
-        <p:nvSpPr>
-          <p:cNvPr id="28" name="Rectangle 27"/>
+          <p:cNvPr id="18" name="Rectangle 17"/>
           <p:cNvSpPr/>
           <p:nvPr/>
         </p:nvSpPr>
         <p:spPr>
           <a:xfrm>
-            <a:off x="566928" y="5925312"/>
-            <a:ext cx="10497312" cy="7315"/>
+            <a:off x="1005840" y="5998464"/>
+            <a:ext cx="9144000" cy="7315"/>
           </a:xfrm>
           <a:prstGeom prst="rect">
             <a:avLst/>
@@ -13051,7 +12691,7 @@
       </p:sp>
       <p:sp>
         <p:nvSpPr>
-          <p:cNvPr id="29" name="TextBox 28"/>
+          <p:cNvPr id="19" name="TextBox 18"/>
           <p:cNvSpPr txBox="1"/>
           <p:nvPr/>
         </p:nvSpPr>

--- a/docs/thesis/defense/答辩PPT-基于etcd的分布式Kubernetes调度器.pptx
+++ b/docs/thesis/defense/答辩PPT-基于etcd的分布式Kubernetes调度器.pptx
@@ -1296,7 +1296,7 @@
           <a:lstStyle/>
           <a:p>
             <a:r>
-              <a:t>汇报分六段，二十分钟左右，重点在第五、六段的实验。</a:t>
+              <a:t>汇报分五段，二十分钟左右，重点在第四段的实验数据。</a:t>
             </a:r>
           </a:p>
         </p:txBody>
@@ -12176,7 +12176,7 @@
                 <a:latin typeface="Arial"/>
                 <a:ea typeface="微软雅黑"/>
               </a:rPr>
-              <a:t>研究背景与现状</a:t>
+              <a:t>研究背景与国内外研究现状</a:t>
             </a:r>
           </a:p>
         </p:txBody>

--- a/docs/thesis/defense/答辩PPT-基于etcd的分布式Kubernetes调度器.pptx
+++ b/docs/thesis/defense/答辩PPT-基于etcd的分布式Kubernetes调度器.pptx
@@ -12408,7 +12408,7 @@
                 <a:latin typeface="Arial"/>
                 <a:ea typeface="微软雅黑"/>
               </a:rPr>
-              <a:t>核心方案实现</a:t>
+              <a:t>研究内容与创新点</a:t>
             </a:r>
           </a:p>
         </p:txBody>

--- a/docs/thesis/defense/答辩PPT-基于etcd的分布式Kubernetes调度器.pptx
+++ b/docs/thesis/defense/答辩PPT-基于etcd的分布式Kubernetes调度器.pptx
@@ -12292,7 +12292,7 @@
                 <a:latin typeface="Arial"/>
                 <a:ea typeface="微软雅黑"/>
               </a:rPr>
-              <a:t>架构总览</a:t>
+              <a:t>研究内容与创新点</a:t>
             </a:r>
           </a:p>
         </p:txBody>
@@ -12408,7 +12408,7 @@
                 <a:latin typeface="Arial"/>
                 <a:ea typeface="微软雅黑"/>
               </a:rPr>
-              <a:t>研究内容与创新点</a:t>
+              <a:t>架构总览</a:t>
             </a:r>
           </a:p>
         </p:txBody>
